--- a/projects/hackmeridian-rail/deck/radox-custody-rail.pptx
+++ b/projects/hackmeridian-rail/deck/radox-custody-rail.pptx
@@ -10541,7 +10541,7 @@
         <p:spPr>
           <a:xfrm>
             <a:off x="914400" y="1417320"/>
-            <a:ext cx="4270248" cy="475488"/>
+            <a:ext cx="3291839" cy="475488"/>
           </a:xfrm>
           <a:prstGeom prst="roundRect">
             <a:avLst>
@@ -10748,7 +10748,7 @@
                 </a:solidFill>
                 <a:latin typeface="Inter Tight"/>
               </a:rPr>
-              <a:t>7 transactions on Stellar testnet. All successful.</a:t>
+              <a:t>7 testnet transactions. All successful.</a:t>
             </a:r>
           </a:p>
         </p:txBody>
@@ -10761,14 +10761,14 @@
         </p:nvSpPr>
         <p:spPr>
           <a:xfrm>
-            <a:off x="914400" y="4146804"/>
-            <a:ext cx="16459200" cy="27432"/>
+            <a:off x="2090057" y="3415284"/>
+            <a:ext cx="14107885" cy="27432"/>
           </a:xfrm>
           <a:prstGeom prst="rect">
             <a:avLst/>
           </a:prstGeom>
           <a:solidFill>
-            <a:srgbClr val="2A2F36"/>
+            <a:srgbClr val="556F00"/>
           </a:solidFill>
           <a:ln>
             <a:noFill/>
@@ -10782,7 +10782,7 @@
           <a:fillRef idx="3">
             <a:schemeClr val="accent1"/>
           </a:fillRef>
-          <a:effectRef idx="2">
+          <a:effectRef idx="0">
             <a:schemeClr val="accent1"/>
           </a:effectRef>
           <a:fontRef idx="minor">
@@ -10799,27 +10799,23 @@
       </p:sp>
       <p:sp>
         <p:nvSpPr>
-          <p:cNvPr id="126" name="Rounded Rectangle 125"/>
+          <p:cNvPr id="126" name="Oval 125"/>
           <p:cNvSpPr/>
           <p:nvPr/>
         </p:nvSpPr>
         <p:spPr>
           <a:xfrm>
-            <a:off x="914400" y="3246120"/>
-            <a:ext cx="2167128" cy="1828800"/>
-          </a:xfrm>
-          <a:prstGeom prst="roundRect">
-            <a:avLst>
-              <a:gd name="adj" fmla="val 12000"/>
-            </a:avLst>
+            <a:off x="1907177" y="3246120"/>
+            <a:ext cx="365760" cy="365760"/>
+          </a:xfrm>
+          <a:prstGeom prst="ellipse">
+            <a:avLst/>
           </a:prstGeom>
           <a:solidFill>
-            <a:srgbClr val="131517"/>
+            <a:srgbClr val="C6F24E"/>
           </a:solidFill>
-          <a:ln w="19050">
-            <a:solidFill>
-              <a:srgbClr val="C6F24E"/>
-            </a:solidFill>
+          <a:ln>
+            <a:noFill/>
           </a:ln>
           <a:effectLst/>
         </p:spPr>
@@ -10830,7 +10826,7 @@
           <a:fillRef idx="3">
             <a:schemeClr val="accent1"/>
           </a:fillRef>
-          <a:effectRef idx="2">
+          <a:effectRef idx="0">
             <a:schemeClr val="accent1"/>
           </a:effectRef>
           <a:fontRef idx="minor">
@@ -10853,8 +10849,8 @@
         </p:nvSpPr>
         <p:spPr>
           <a:xfrm>
-            <a:off x="1005840" y="3392424"/>
-            <a:ext cx="1984248" cy="1600200"/>
+            <a:off x="960120" y="3749039"/>
+            <a:ext cx="2259874" cy="914400"/>
           </a:xfrm>
           <a:prstGeom prst="rect">
             <a:avLst/>
@@ -10872,7 +10868,7 @@
                 <a:spcPct val="112000"/>
               </a:lnSpc>
               <a:spcAft>
-                <a:spcPts val="300"/>
+                <a:spcPts val="200"/>
               </a:spcAft>
             </a:pPr>
             <a:r>
@@ -10891,7 +10887,7 @@
                 <a:spcPct val="112000"/>
               </a:lnSpc>
               <a:spcAft>
-                <a:spcPts val="300"/>
+                <a:spcPts val="200"/>
               </a:spcAft>
             </a:pPr>
             <a:r>
@@ -10904,13 +10900,36 @@
               <a:t>operator</a:t>
             </a:r>
           </a:p>
+        </p:txBody>
+      </p:sp>
+      <p:sp>
+        <p:nvSpPr>
+          <p:cNvPr id="128" name="TextBox 127"/>
+          <p:cNvSpPr txBox="1"/>
+          <p:nvPr/>
+        </p:nvSpPr>
+        <p:spPr>
+          <a:xfrm>
+            <a:off x="960120" y="4663440"/>
+            <a:ext cx="2259874" cy="365760"/>
+          </a:xfrm>
+          <a:prstGeom prst="rect">
+            <a:avLst/>
+          </a:prstGeom>
+          <a:noFill/>
+        </p:spPr>
+        <p:txBody>
+          <a:bodyPr wrap="square" lIns="0" rIns="0" tIns="0" bIns="0" anchor="t">
+            <a:spAutoFit/>
+          </a:bodyPr>
+          <a:lstStyle/>
           <a:p>
             <a:pPr algn="ctr">
               <a:lnSpc>
                 <a:spcPct val="112000"/>
               </a:lnSpc>
               <a:spcAft>
-                <a:spcPts val="300"/>
+                <a:spcPts val="600"/>
               </a:spcAft>
             </a:pPr>
             <a:r>
@@ -10927,27 +10946,23 @@
       </p:sp>
       <p:sp>
         <p:nvSpPr>
-          <p:cNvPr id="128" name="Rounded Rectangle 127"/>
+          <p:cNvPr id="129" name="Oval 128"/>
           <p:cNvSpPr/>
           <p:nvPr/>
         </p:nvSpPr>
         <p:spPr>
           <a:xfrm>
-            <a:off x="3296412" y="3246120"/>
-            <a:ext cx="2167128" cy="1828800"/>
-          </a:xfrm>
-          <a:prstGeom prst="roundRect">
-            <a:avLst>
-              <a:gd name="adj" fmla="val 12000"/>
-            </a:avLst>
+            <a:off x="4322499" y="3310128"/>
+            <a:ext cx="237744" cy="237744"/>
+          </a:xfrm>
+          <a:prstGeom prst="ellipse">
+            <a:avLst/>
           </a:prstGeom>
           <a:solidFill>
-            <a:srgbClr val="131517"/>
+            <a:srgbClr val="C6F24E"/>
           </a:solidFill>
-          <a:ln w="12700">
-            <a:solidFill>
-              <a:srgbClr val="2A2F36"/>
-            </a:solidFill>
+          <a:ln>
+            <a:noFill/>
           </a:ln>
           <a:effectLst/>
         </p:spPr>
@@ -10958,7 +10973,7 @@
           <a:fillRef idx="3">
             <a:schemeClr val="accent1"/>
           </a:fillRef>
-          <a:effectRef idx="2">
+          <a:effectRef idx="0">
             <a:schemeClr val="accent1"/>
           </a:effectRef>
           <a:fontRef idx="minor">
@@ -10975,14 +10990,14 @@
       </p:sp>
       <p:sp>
         <p:nvSpPr>
-          <p:cNvPr id="129" name="TextBox 128"/>
+          <p:cNvPr id="130" name="TextBox 129"/>
           <p:cNvSpPr txBox="1"/>
           <p:nvPr/>
         </p:nvSpPr>
         <p:spPr>
           <a:xfrm>
-            <a:off x="3387852" y="3392424"/>
-            <a:ext cx="1984248" cy="1600200"/>
+            <a:off x="3311434" y="3749039"/>
+            <a:ext cx="2259874" cy="914400"/>
           </a:xfrm>
           <a:prstGeom prst="rect">
             <a:avLst/>
@@ -11000,7 +11015,7 @@
                 <a:spcPct val="112000"/>
               </a:lnSpc>
               <a:spcAft>
-                <a:spcPts val="300"/>
+                <a:spcPts val="200"/>
               </a:spcAft>
             </a:pPr>
             <a:r>
@@ -11019,7 +11034,7 @@
                 <a:spcPct val="112000"/>
               </a:lnSpc>
               <a:spcAft>
-                <a:spcPts val="300"/>
+                <a:spcPts val="200"/>
               </a:spcAft>
             </a:pPr>
             <a:r>
@@ -11032,13 +11047,36 @@
               <a:t>Warehouse → Port</a:t>
             </a:r>
           </a:p>
+        </p:txBody>
+      </p:sp>
+      <p:sp>
+        <p:nvSpPr>
+          <p:cNvPr id="131" name="TextBox 130"/>
+          <p:cNvSpPr txBox="1"/>
+          <p:nvPr/>
+        </p:nvSpPr>
+        <p:spPr>
+          <a:xfrm>
+            <a:off x="3311434" y="4663440"/>
+            <a:ext cx="2259874" cy="365760"/>
+          </a:xfrm>
+          <a:prstGeom prst="rect">
+            <a:avLst/>
+          </a:prstGeom>
+          <a:noFill/>
+        </p:spPr>
+        <p:txBody>
+          <a:bodyPr wrap="square" lIns="0" rIns="0" tIns="0" bIns="0" anchor="t">
+            <a:spAutoFit/>
+          </a:bodyPr>
+          <a:lstStyle/>
           <a:p>
             <a:pPr algn="ctr">
               <a:lnSpc>
                 <a:spcPct val="112000"/>
               </a:lnSpc>
               <a:spcAft>
-                <a:spcPts val="300"/>
+                <a:spcPts val="600"/>
               </a:spcAft>
             </a:pPr>
             <a:r>
@@ -11055,27 +11093,23 @@
       </p:sp>
       <p:sp>
         <p:nvSpPr>
-          <p:cNvPr id="130" name="Rounded Rectangle 129"/>
+          <p:cNvPr id="132" name="Oval 131"/>
           <p:cNvSpPr/>
           <p:nvPr/>
         </p:nvSpPr>
         <p:spPr>
           <a:xfrm>
-            <a:off x="5678424" y="3246120"/>
-            <a:ext cx="2167128" cy="1828800"/>
-          </a:xfrm>
-          <a:prstGeom prst="roundRect">
-            <a:avLst>
-              <a:gd name="adj" fmla="val 12000"/>
-            </a:avLst>
+            <a:off x="6673813" y="3310128"/>
+            <a:ext cx="237744" cy="237744"/>
+          </a:xfrm>
+          <a:prstGeom prst="ellipse">
+            <a:avLst/>
           </a:prstGeom>
           <a:solidFill>
-            <a:srgbClr val="131517"/>
+            <a:srgbClr val="C6F24E"/>
           </a:solidFill>
-          <a:ln w="12700">
-            <a:solidFill>
-              <a:srgbClr val="2A2F36"/>
-            </a:solidFill>
+          <a:ln>
+            <a:noFill/>
           </a:ln>
           <a:effectLst/>
         </p:spPr>
@@ -11086,7 +11120,7 @@
           <a:fillRef idx="3">
             <a:schemeClr val="accent1"/>
           </a:fillRef>
-          <a:effectRef idx="2">
+          <a:effectRef idx="0">
             <a:schemeClr val="accent1"/>
           </a:effectRef>
           <a:fontRef idx="minor">
@@ -11103,14 +11137,14 @@
       </p:sp>
       <p:sp>
         <p:nvSpPr>
-          <p:cNvPr id="131" name="TextBox 130"/>
+          <p:cNvPr id="133" name="TextBox 132"/>
           <p:cNvSpPr txBox="1"/>
           <p:nvPr/>
         </p:nvSpPr>
         <p:spPr>
           <a:xfrm>
-            <a:off x="5769864" y="3392424"/>
-            <a:ext cx="1984248" cy="1600200"/>
+            <a:off x="5662748" y="3749039"/>
+            <a:ext cx="2259874" cy="914400"/>
           </a:xfrm>
           <a:prstGeom prst="rect">
             <a:avLst/>
@@ -11128,7 +11162,7 @@
                 <a:spcPct val="112000"/>
               </a:lnSpc>
               <a:spcAft>
-                <a:spcPts val="300"/>
+                <a:spcPts val="200"/>
               </a:spcAft>
             </a:pPr>
             <a:r>
@@ -11147,7 +11181,7 @@
                 <a:spcPct val="112000"/>
               </a:lnSpc>
               <a:spcAft>
-                <a:spcPts val="300"/>
+                <a:spcPts val="200"/>
               </a:spcAft>
             </a:pPr>
             <a:r>
@@ -11160,13 +11194,36 @@
               <a:t>Port → Carrier</a:t>
             </a:r>
           </a:p>
+        </p:txBody>
+      </p:sp>
+      <p:sp>
+        <p:nvSpPr>
+          <p:cNvPr id="134" name="TextBox 133"/>
+          <p:cNvSpPr txBox="1"/>
+          <p:nvPr/>
+        </p:nvSpPr>
+        <p:spPr>
+          <a:xfrm>
+            <a:off x="5662748" y="4663440"/>
+            <a:ext cx="2259874" cy="365760"/>
+          </a:xfrm>
+          <a:prstGeom prst="rect">
+            <a:avLst/>
+          </a:prstGeom>
+          <a:noFill/>
+        </p:spPr>
+        <p:txBody>
+          <a:bodyPr wrap="square" lIns="0" rIns="0" tIns="0" bIns="0" anchor="t">
+            <a:spAutoFit/>
+          </a:bodyPr>
+          <a:lstStyle/>
           <a:p>
             <a:pPr algn="ctr">
               <a:lnSpc>
                 <a:spcPct val="112000"/>
               </a:lnSpc>
               <a:spcAft>
-                <a:spcPts val="300"/>
+                <a:spcPts val="600"/>
               </a:spcAft>
             </a:pPr>
             <a:r>
@@ -11183,27 +11240,23 @@
       </p:sp>
       <p:sp>
         <p:nvSpPr>
-          <p:cNvPr id="132" name="Rounded Rectangle 131"/>
+          <p:cNvPr id="135" name="Oval 134"/>
           <p:cNvSpPr/>
           <p:nvPr/>
         </p:nvSpPr>
         <p:spPr>
           <a:xfrm>
-            <a:off x="8060436" y="3246120"/>
-            <a:ext cx="2167128" cy="1828800"/>
-          </a:xfrm>
-          <a:prstGeom prst="roundRect">
-            <a:avLst>
-              <a:gd name="adj" fmla="val 12000"/>
-            </a:avLst>
+            <a:off x="9025128" y="3310128"/>
+            <a:ext cx="237744" cy="237744"/>
+          </a:xfrm>
+          <a:prstGeom prst="ellipse">
+            <a:avLst/>
           </a:prstGeom>
           <a:solidFill>
-            <a:srgbClr val="131517"/>
+            <a:srgbClr val="C6F24E"/>
           </a:solidFill>
-          <a:ln w="12700">
-            <a:solidFill>
-              <a:srgbClr val="2A2F36"/>
-            </a:solidFill>
+          <a:ln>
+            <a:noFill/>
           </a:ln>
           <a:effectLst/>
         </p:spPr>
@@ -11214,7 +11267,7 @@
           <a:fillRef idx="3">
             <a:schemeClr val="accent1"/>
           </a:fillRef>
-          <a:effectRef idx="2">
+          <a:effectRef idx="0">
             <a:schemeClr val="accent1"/>
           </a:effectRef>
           <a:fontRef idx="minor">
@@ -11231,14 +11284,14 @@
       </p:sp>
       <p:sp>
         <p:nvSpPr>
-          <p:cNvPr id="133" name="TextBox 132"/>
+          <p:cNvPr id="136" name="TextBox 135"/>
           <p:cNvSpPr txBox="1"/>
           <p:nvPr/>
         </p:nvSpPr>
         <p:spPr>
           <a:xfrm>
-            <a:off x="8151875" y="3392424"/>
-            <a:ext cx="1984248" cy="1600200"/>
+            <a:off x="8014062" y="3749039"/>
+            <a:ext cx="2259874" cy="914400"/>
           </a:xfrm>
           <a:prstGeom prst="rect">
             <a:avLst/>
@@ -11256,7 +11309,7 @@
                 <a:spcPct val="112000"/>
               </a:lnSpc>
               <a:spcAft>
-                <a:spcPts val="300"/>
+                <a:spcPts val="200"/>
               </a:spcAft>
             </a:pPr>
             <a:r>
@@ -11275,7 +11328,7 @@
                 <a:spcPct val="112000"/>
               </a:lnSpc>
               <a:spcAft>
-                <a:spcPts val="300"/>
+                <a:spcPts val="200"/>
               </a:spcAft>
             </a:pPr>
             <a:r>
@@ -11288,13 +11341,36 @@
               <a:t>Carrier → Customs</a:t>
             </a:r>
           </a:p>
+        </p:txBody>
+      </p:sp>
+      <p:sp>
+        <p:nvSpPr>
+          <p:cNvPr id="137" name="TextBox 136"/>
+          <p:cNvSpPr txBox="1"/>
+          <p:nvPr/>
+        </p:nvSpPr>
+        <p:spPr>
+          <a:xfrm>
+            <a:off x="8014062" y="4663440"/>
+            <a:ext cx="2259874" cy="365760"/>
+          </a:xfrm>
+          <a:prstGeom prst="rect">
+            <a:avLst/>
+          </a:prstGeom>
+          <a:noFill/>
+        </p:spPr>
+        <p:txBody>
+          <a:bodyPr wrap="square" lIns="0" rIns="0" tIns="0" bIns="0" anchor="t">
+            <a:spAutoFit/>
+          </a:bodyPr>
+          <a:lstStyle/>
           <a:p>
             <a:pPr algn="ctr">
               <a:lnSpc>
                 <a:spcPct val="112000"/>
               </a:lnSpc>
               <a:spcAft>
-                <a:spcPts val="300"/>
+                <a:spcPts val="600"/>
               </a:spcAft>
             </a:pPr>
             <a:r>
@@ -11311,27 +11387,23 @@
       </p:sp>
       <p:sp>
         <p:nvSpPr>
-          <p:cNvPr id="134" name="Rounded Rectangle 133"/>
+          <p:cNvPr id="138" name="Oval 137"/>
           <p:cNvSpPr/>
           <p:nvPr/>
         </p:nvSpPr>
         <p:spPr>
           <a:xfrm>
-            <a:off x="10442448" y="3246120"/>
-            <a:ext cx="2167128" cy="1828800"/>
-          </a:xfrm>
-          <a:prstGeom prst="roundRect">
-            <a:avLst>
-              <a:gd name="adj" fmla="val 12000"/>
-            </a:avLst>
+            <a:off x="11376442" y="3310128"/>
+            <a:ext cx="237744" cy="237744"/>
+          </a:xfrm>
+          <a:prstGeom prst="ellipse">
+            <a:avLst/>
           </a:prstGeom>
           <a:solidFill>
-            <a:srgbClr val="131517"/>
+            <a:srgbClr val="C6F24E"/>
           </a:solidFill>
-          <a:ln w="12700">
-            <a:solidFill>
-              <a:srgbClr val="2A2F36"/>
-            </a:solidFill>
+          <a:ln>
+            <a:noFill/>
           </a:ln>
           <a:effectLst/>
         </p:spPr>
@@ -11342,7 +11414,7 @@
           <a:fillRef idx="3">
             <a:schemeClr val="accent1"/>
           </a:fillRef>
-          <a:effectRef idx="2">
+          <a:effectRef idx="0">
             <a:schemeClr val="accent1"/>
           </a:effectRef>
           <a:fontRef idx="minor">
@@ -11359,14 +11431,14 @@
       </p:sp>
       <p:sp>
         <p:nvSpPr>
-          <p:cNvPr id="135" name="TextBox 134"/>
+          <p:cNvPr id="139" name="TextBox 138"/>
           <p:cNvSpPr txBox="1"/>
           <p:nvPr/>
         </p:nvSpPr>
         <p:spPr>
           <a:xfrm>
-            <a:off x="10533888" y="3392424"/>
-            <a:ext cx="1984248" cy="1600200"/>
+            <a:off x="10365377" y="3749039"/>
+            <a:ext cx="2259874" cy="914400"/>
           </a:xfrm>
           <a:prstGeom prst="rect">
             <a:avLst/>
@@ -11384,7 +11456,7 @@
                 <a:spcPct val="112000"/>
               </a:lnSpc>
               <a:spcAft>
-                <a:spcPts val="300"/>
+                <a:spcPts val="200"/>
               </a:spcAft>
             </a:pPr>
             <a:r>
@@ -11403,7 +11475,7 @@
                 <a:spcPct val="112000"/>
               </a:lnSpc>
               <a:spcAft>
-                <a:spcPts val="300"/>
+                <a:spcPts val="200"/>
               </a:spcAft>
             </a:pPr>
             <a:r>
@@ -11416,13 +11488,36 @@
               <a:t>Customs → Recipient</a:t>
             </a:r>
           </a:p>
+        </p:txBody>
+      </p:sp>
+      <p:sp>
+        <p:nvSpPr>
+          <p:cNvPr id="140" name="TextBox 139"/>
+          <p:cNvSpPr txBox="1"/>
+          <p:nvPr/>
+        </p:nvSpPr>
+        <p:spPr>
+          <a:xfrm>
+            <a:off x="10365377" y="4663440"/>
+            <a:ext cx="2259874" cy="365760"/>
+          </a:xfrm>
+          <a:prstGeom prst="rect">
+            <a:avLst/>
+          </a:prstGeom>
+          <a:noFill/>
+        </p:spPr>
+        <p:txBody>
+          <a:bodyPr wrap="square" lIns="0" rIns="0" tIns="0" bIns="0" anchor="t">
+            <a:spAutoFit/>
+          </a:bodyPr>
+          <a:lstStyle/>
           <a:p>
             <a:pPr algn="ctr">
               <a:lnSpc>
                 <a:spcPct val="112000"/>
               </a:lnSpc>
               <a:spcAft>
-                <a:spcPts val="300"/>
+                <a:spcPts val="600"/>
               </a:spcAft>
             </a:pPr>
             <a:r>
@@ -11439,27 +11534,23 @@
       </p:sp>
       <p:sp>
         <p:nvSpPr>
-          <p:cNvPr id="136" name="Rounded Rectangle 135"/>
+          <p:cNvPr id="141" name="Oval 140"/>
           <p:cNvSpPr/>
           <p:nvPr/>
         </p:nvSpPr>
         <p:spPr>
           <a:xfrm>
-            <a:off x="12824460" y="3246120"/>
-            <a:ext cx="2167128" cy="1828800"/>
-          </a:xfrm>
-          <a:prstGeom prst="roundRect">
-            <a:avLst>
-              <a:gd name="adj" fmla="val 12000"/>
-            </a:avLst>
+            <a:off x="13727756" y="3310128"/>
+            <a:ext cx="237744" cy="237744"/>
+          </a:xfrm>
+          <a:prstGeom prst="ellipse">
+            <a:avLst/>
           </a:prstGeom>
           <a:solidFill>
-            <a:srgbClr val="131517"/>
+            <a:srgbClr val="C6F24E"/>
           </a:solidFill>
-          <a:ln w="12700">
-            <a:solidFill>
-              <a:srgbClr val="2A2F36"/>
-            </a:solidFill>
+          <a:ln>
+            <a:noFill/>
           </a:ln>
           <a:effectLst/>
         </p:spPr>
@@ -11470,7 +11561,7 @@
           <a:fillRef idx="3">
             <a:schemeClr val="accent1"/>
           </a:fillRef>
-          <a:effectRef idx="2">
+          <a:effectRef idx="0">
             <a:schemeClr val="accent1"/>
           </a:effectRef>
           <a:fontRef idx="minor">
@@ -11487,14 +11578,14 @@
       </p:sp>
       <p:sp>
         <p:nvSpPr>
-          <p:cNvPr id="137" name="TextBox 136"/>
+          <p:cNvPr id="142" name="TextBox 141"/>
           <p:cNvSpPr txBox="1"/>
           <p:nvPr/>
         </p:nvSpPr>
         <p:spPr>
           <a:xfrm>
-            <a:off x="12915900" y="3392424"/>
-            <a:ext cx="1984248" cy="1600200"/>
+            <a:off x="12716691" y="3749039"/>
+            <a:ext cx="2259874" cy="914400"/>
           </a:xfrm>
           <a:prstGeom prst="rect">
             <a:avLst/>
@@ -11512,7 +11603,7 @@
                 <a:spcPct val="112000"/>
               </a:lnSpc>
               <a:spcAft>
-                <a:spcPts val="300"/>
+                <a:spcPts val="200"/>
               </a:spcAft>
             </a:pPr>
             <a:r>
@@ -11531,7 +11622,7 @@
                 <a:spcPct val="112000"/>
               </a:lnSpc>
               <a:spcAft>
-                <a:spcPts val="300"/>
+                <a:spcPts val="200"/>
               </a:spcAft>
             </a:pPr>
             <a:r>
@@ -11544,13 +11635,36 @@
               <a:t>Recipient → Holder</a:t>
             </a:r>
           </a:p>
+        </p:txBody>
+      </p:sp>
+      <p:sp>
+        <p:nvSpPr>
+          <p:cNvPr id="143" name="TextBox 142"/>
+          <p:cNvSpPr txBox="1"/>
+          <p:nvPr/>
+        </p:nvSpPr>
+        <p:spPr>
+          <a:xfrm>
+            <a:off x="12716691" y="4663440"/>
+            <a:ext cx="2259874" cy="365760"/>
+          </a:xfrm>
+          <a:prstGeom prst="rect">
+            <a:avLst/>
+          </a:prstGeom>
+          <a:noFill/>
+        </p:spPr>
+        <p:txBody>
+          <a:bodyPr wrap="square" lIns="0" rIns="0" tIns="0" bIns="0" anchor="t">
+            <a:spAutoFit/>
+          </a:bodyPr>
+          <a:lstStyle/>
           <a:p>
             <a:pPr algn="ctr">
               <a:lnSpc>
                 <a:spcPct val="112000"/>
               </a:lnSpc>
               <a:spcAft>
-                <a:spcPts val="300"/>
+                <a:spcPts val="600"/>
               </a:spcAft>
             </a:pPr>
             <a:r>
@@ -11567,27 +11681,23 @@
       </p:sp>
       <p:sp>
         <p:nvSpPr>
-          <p:cNvPr id="138" name="Rounded Rectangle 137"/>
+          <p:cNvPr id="144" name="Oval 143"/>
           <p:cNvSpPr/>
           <p:nvPr/>
         </p:nvSpPr>
         <p:spPr>
           <a:xfrm>
-            <a:off x="15206472" y="3246120"/>
-            <a:ext cx="2167128" cy="1828800"/>
-          </a:xfrm>
-          <a:prstGeom prst="roundRect">
-            <a:avLst>
-              <a:gd name="adj" fmla="val 12000"/>
-            </a:avLst>
+            <a:off x="16015062" y="3246120"/>
+            <a:ext cx="365760" cy="365760"/>
+          </a:xfrm>
+          <a:prstGeom prst="ellipse">
+            <a:avLst/>
           </a:prstGeom>
           <a:solidFill>
-            <a:srgbClr val="131517"/>
+            <a:srgbClr val="C6F24E"/>
           </a:solidFill>
-          <a:ln w="19050">
-            <a:solidFill>
-              <a:srgbClr val="C6F24E"/>
-            </a:solidFill>
+          <a:ln>
+            <a:noFill/>
           </a:ln>
           <a:effectLst/>
         </p:spPr>
@@ -11598,7 +11708,7 @@
           <a:fillRef idx="3">
             <a:schemeClr val="accent1"/>
           </a:fillRef>
-          <a:effectRef idx="2">
+          <a:effectRef idx="0">
             <a:schemeClr val="accent1"/>
           </a:effectRef>
           <a:fontRef idx="minor">
@@ -11615,14 +11725,14 @@
       </p:sp>
       <p:sp>
         <p:nvSpPr>
-          <p:cNvPr id="139" name="TextBox 138"/>
+          <p:cNvPr id="145" name="TextBox 144"/>
           <p:cNvSpPr txBox="1"/>
           <p:nvPr/>
         </p:nvSpPr>
         <p:spPr>
           <a:xfrm>
-            <a:off x="15297912" y="3392424"/>
-            <a:ext cx="1984248" cy="1600200"/>
+            <a:off x="15068005" y="3749039"/>
+            <a:ext cx="2259874" cy="914400"/>
           </a:xfrm>
           <a:prstGeom prst="rect">
             <a:avLst/>
@@ -11640,7 +11750,7 @@
                 <a:spcPct val="112000"/>
               </a:lnSpc>
               <a:spcAft>
-                <a:spcPts val="300"/>
+                <a:spcPts val="200"/>
               </a:spcAft>
             </a:pPr>
             <a:r>
@@ -11659,7 +11769,7 @@
                 <a:spcPct val="112000"/>
               </a:lnSpc>
               <a:spcAft>
-                <a:spcPts val="300"/>
+                <a:spcPts val="200"/>
               </a:spcAft>
             </a:pPr>
             <a:r>
@@ -11672,13 +11782,36 @@
               <a:t>existing redeem</a:t>
             </a:r>
           </a:p>
+        </p:txBody>
+      </p:sp>
+      <p:sp>
+        <p:nvSpPr>
+          <p:cNvPr id="146" name="TextBox 145"/>
+          <p:cNvSpPr txBox="1"/>
+          <p:nvPr/>
+        </p:nvSpPr>
+        <p:spPr>
+          <a:xfrm>
+            <a:off x="15068005" y="4663440"/>
+            <a:ext cx="2259874" cy="365760"/>
+          </a:xfrm>
+          <a:prstGeom prst="rect">
+            <a:avLst/>
+          </a:prstGeom>
+          <a:noFill/>
+        </p:spPr>
+        <p:txBody>
+          <a:bodyPr wrap="square" lIns="0" rIns="0" tIns="0" bIns="0" anchor="t">
+            <a:spAutoFit/>
+          </a:bodyPr>
+          <a:lstStyle/>
           <a:p>
             <a:pPr algn="ctr">
               <a:lnSpc>
                 <a:spcPct val="112000"/>
               </a:lnSpc>
               <a:spcAft>
-                <a:spcPts val="300"/>
+                <a:spcPts val="600"/>
               </a:spcAft>
             </a:pPr>
             <a:r>
@@ -11695,7 +11828,7 @@
       </p:sp>
       <p:sp>
         <p:nvSpPr>
-          <p:cNvPr id="140" name="TextBox 139"/>
+          <p:cNvPr id="147" name="TextBox 146"/>
           <p:cNvSpPr txBox="1"/>
           <p:nvPr/>
         </p:nvSpPr>
@@ -11737,7 +11870,7 @@
       </p:sp>
       <p:sp>
         <p:nvSpPr>
-          <p:cNvPr id="141" name="TextBox 140"/>
+          <p:cNvPr id="148" name="TextBox 147"/>
           <p:cNvSpPr txBox="1"/>
           <p:nvPr/>
         </p:nvSpPr>
@@ -11779,7 +11912,7 @@
       </p:sp>
       <p:sp>
         <p:nvSpPr>
-          <p:cNvPr id="142" name="TextBox 141"/>
+          <p:cNvPr id="149" name="TextBox 148"/>
           <p:cNvSpPr txBox="1"/>
           <p:nvPr/>
         </p:nvSpPr>
@@ -11821,7 +11954,7 @@
       </p:sp>
       <p:sp>
         <p:nvSpPr>
-          <p:cNvPr id="143" name="TextBox 142"/>
+          <p:cNvPr id="150" name="TextBox 149"/>
           <p:cNvSpPr txBox="1"/>
           <p:nvPr/>
         </p:nvSpPr>
@@ -11863,7 +11996,7 @@
       </p:sp>
       <p:sp>
         <p:nvSpPr>
-          <p:cNvPr id="144" name="TextBox 143"/>
+          <p:cNvPr id="151" name="TextBox 150"/>
           <p:cNvSpPr txBox="1"/>
           <p:nvPr/>
         </p:nvSpPr>
@@ -11905,7 +12038,7 @@
       </p:sp>
       <p:sp>
         <p:nvSpPr>
-          <p:cNvPr id="145" name="TextBox 144"/>
+          <p:cNvPr id="152" name="TextBox 151"/>
           <p:cNvSpPr txBox="1"/>
           <p:nvPr/>
         </p:nvSpPr>
@@ -11947,7 +12080,7 @@
       </p:sp>
       <p:sp>
         <p:nvSpPr>
-          <p:cNvPr id="146" name="TextBox 145"/>
+          <p:cNvPr id="153" name="TextBox 152"/>
           <p:cNvSpPr txBox="1"/>
           <p:nvPr/>
         </p:nvSpPr>
@@ -11989,7 +12122,7 @@
       </p:sp>
       <p:sp>
         <p:nvSpPr>
-          <p:cNvPr id="147" name="TextBox 146"/>
+          <p:cNvPr id="154" name="TextBox 153"/>
           <p:cNvSpPr txBox="1"/>
           <p:nvPr/>
         </p:nvSpPr>
@@ -12031,7 +12164,7 @@
       </p:sp>
       <p:sp>
         <p:nvSpPr>
-          <p:cNvPr id="148" name="TextBox 147"/>
+          <p:cNvPr id="155" name="TextBox 154"/>
           <p:cNvSpPr txBox="1"/>
           <p:nvPr/>
         </p:nvSpPr>
@@ -12094,7 +12227,7 @@
                 </a:solidFill>
                 <a:latin typeface="Instrument Sans"/>
               </a:rPr>
-              <a:t>Each hash opens at stellar.expert/explorer/testnet/tx/&lt;hash&gt;; full hashes in the repo's proofs/lifecycle.json.</a:t>
+              <a:t>Plus one event attestation by a source custodian (33379211), also on chain. Full hashes: the repo's proofs/lifecycle.json.</a:t>
             </a:r>
           </a:p>
           <a:p>
@@ -12113,7 +12246,7 @@
                 </a:solidFill>
                 <a:latin typeface="Instrument Sans"/>
               </a:rPr>
-              <a:t>All six actors are test keys held by one harness: this proves the mechanism, not independent custodians.</a:t>
+              <a:t>Every actor is a test key held by one harness: this proves the mechanism, not independent custodians.</a:t>
             </a:r>
           </a:p>
         </p:txBody>
@@ -12353,7 +12486,7 @@
         <p:spPr>
           <a:xfrm>
             <a:off x="914400" y="1417320"/>
-            <a:ext cx="5253228" cy="475488"/>
+            <a:ext cx="3977639" cy="475488"/>
           </a:xfrm>
           <a:prstGeom prst="roundRect">
             <a:avLst>
@@ -12560,7 +12693,7 @@
                 </a:solidFill>
                 <a:latin typeface="Inter Tight"/>
               </a:rPr>
-              <a:t>Three Stellar features do the work</a:t>
+              <a:t>Why Stellar: two signers, one call</a:t>
             </a:r>
           </a:p>
         </p:txBody>
@@ -12594,7 +12727,7 @@
           <a:fillRef idx="3">
             <a:schemeClr val="accent1"/>
           </a:fillRef>
-          <a:effectRef idx="2">
+          <a:effectRef idx="0">
             <a:schemeClr val="accent1"/>
           </a:effectRef>
           <a:fontRef idx="minor">
@@ -12617,7 +12750,7 @@
         </p:nvSpPr>
         <p:spPr>
           <a:xfrm>
-            <a:off x="914400" y="3246120"/>
+            <a:off x="914400" y="3319272"/>
             <a:ext cx="914400" cy="548640"/>
           </a:xfrm>
           <a:prstGeom prst="rect">
@@ -12688,7 +12821,7 @@
                 </a:solidFill>
                 <a:latin typeface="Inter Tight"/>
               </a:rPr>
-              <a:t>Two signers, one call</a:t>
+              <a:t>Multi-party auth in one call</a:t>
             </a:r>
           </a:p>
         </p:txBody>
@@ -12764,7 +12897,7 @@
           <a:fillRef idx="3">
             <a:schemeClr val="accent1"/>
           </a:fillRef>
-          <a:effectRef idx="2">
+          <a:effectRef idx="0">
             <a:schemeClr val="accent1"/>
           </a:effectRef>
           <a:fontRef idx="minor">
@@ -12787,7 +12920,7 @@
         </p:nvSpPr>
         <p:spPr>
           <a:xfrm>
-            <a:off x="914400" y="4617720"/>
+            <a:off x="914400" y="4690872"/>
             <a:ext cx="914400" cy="548640"/>
           </a:xfrm>
           <a:prstGeom prst="rect">
@@ -12934,7 +13067,7 @@
           <a:fillRef idx="3">
             <a:schemeClr val="accent1"/>
           </a:fillRef>
-          <a:effectRef idx="2">
+          <a:effectRef idx="0">
             <a:schemeClr val="accent1"/>
           </a:effectRef>
           <a:fontRef idx="minor">
@@ -12957,7 +13090,7 @@
         </p:nvSpPr>
         <p:spPr>
           <a:xfrm>
-            <a:off x="914400" y="5989320"/>
+            <a:off x="914400" y="6062472"/>
             <a:ext cx="914400" cy="548640"/>
           </a:xfrm>
           <a:prstGeom prst="rect">
@@ -13104,7 +13237,7 @@
           <a:fillRef idx="3">
             <a:schemeClr val="accent1"/>
           </a:fillRef>
-          <a:effectRef idx="2">
+          <a:effectRef idx="0">
             <a:schemeClr val="accent1"/>
           </a:effectRef>
           <a:fontRef idx="minor">
@@ -13174,7 +13307,7 @@
                 </a:solidFill>
                 <a:latin typeface="Instrument Sans"/>
               </a:rPr>
-              <a:t>Kutana and Trustless Work release escrow on trade milestones. None records a physical handover signed by two custodians, and no SEP covers it.</a:t>
+              <a:t>Kutana and Trustless Work release escrow on trade milestones. We found none that records a custody handover signed by two custodians, and no SEP for it.</a:t>
             </a:r>
           </a:p>
           <a:p>
@@ -13442,7 +13575,7 @@
         <p:spPr>
           <a:xfrm>
             <a:off x="914400" y="1417320"/>
-            <a:ext cx="5056631" cy="475488"/>
+            <a:ext cx="3840480" cy="475488"/>
           </a:xfrm>
           <a:prstGeom prst="roundRect">
             <a:avLst>
@@ -13683,7 +13816,7 @@
           <a:fillRef idx="3">
             <a:schemeClr val="accent1"/>
           </a:fillRef>
-          <a:effectRef idx="2">
+          <a:effectRef idx="0">
             <a:schemeClr val="accent1"/>
           </a:effectRef>
           <a:fontRef idx="minor">
@@ -13790,7 +13923,7 @@
         </p:nvSpPr>
         <p:spPr>
           <a:xfrm>
-            <a:off x="914400" y="4361688"/>
+            <a:off x="914400" y="4526280"/>
             <a:ext cx="8778240" cy="18288"/>
           </a:xfrm>
           <a:prstGeom prst="rect">
@@ -13811,7 +13944,7 @@
           <a:fillRef idx="3">
             <a:schemeClr val="accent1"/>
           </a:fillRef>
-          <a:effectRef idx="2">
+          <a:effectRef idx="0">
             <a:schemeClr val="accent1"/>
           </a:effectRef>
           <a:fontRef idx="minor">
@@ -13834,7 +13967,7 @@
         </p:nvSpPr>
         <p:spPr>
           <a:xfrm>
-            <a:off x="914400" y="4498848"/>
+            <a:off x="914400" y="4663440"/>
             <a:ext cx="3017520" cy="457200"/>
           </a:xfrm>
           <a:prstGeom prst="rect">
@@ -13876,7 +14009,7 @@
         </p:nvSpPr>
         <p:spPr>
           <a:xfrm>
-            <a:off x="3931920" y="4462272"/>
+            <a:off x="3931920" y="4626864"/>
             <a:ext cx="5760720" cy="1097280"/>
           </a:xfrm>
           <a:prstGeom prst="rect">
@@ -13918,7 +14051,7 @@
         </p:nvSpPr>
         <p:spPr>
           <a:xfrm>
-            <a:off x="914400" y="5568696"/>
+            <a:off x="914400" y="5897880"/>
             <a:ext cx="8778240" cy="18288"/>
           </a:xfrm>
           <a:prstGeom prst="rect">
@@ -13939,7 +14072,7 @@
           <a:fillRef idx="3">
             <a:schemeClr val="accent1"/>
           </a:fillRef>
-          <a:effectRef idx="2">
+          <a:effectRef idx="0">
             <a:schemeClr val="accent1"/>
           </a:effectRef>
           <a:fontRef idx="minor">
@@ -13962,7 +14095,7 @@
         </p:nvSpPr>
         <p:spPr>
           <a:xfrm>
-            <a:off x="914400" y="5705856"/>
+            <a:off x="914400" y="6035040"/>
             <a:ext cx="3017520" cy="457200"/>
           </a:xfrm>
           <a:prstGeom prst="rect">
@@ -14004,7 +14137,7 @@
         </p:nvSpPr>
         <p:spPr>
           <a:xfrm>
-            <a:off x="3931920" y="5669280"/>
+            <a:off x="3931920" y="5998464"/>
             <a:ext cx="5760720" cy="1097280"/>
           </a:xfrm>
           <a:prstGeom prst="rect">
@@ -14046,7 +14179,7 @@
         </p:nvSpPr>
         <p:spPr>
           <a:xfrm>
-            <a:off x="914400" y="6775704"/>
+            <a:off x="914400" y="7269480"/>
             <a:ext cx="8778240" cy="18288"/>
           </a:xfrm>
           <a:prstGeom prst="rect">
@@ -14067,7 +14200,7 @@
           <a:fillRef idx="3">
             <a:schemeClr val="accent1"/>
           </a:fillRef>
-          <a:effectRef idx="2">
+          <a:effectRef idx="0">
             <a:schemeClr val="accent1"/>
           </a:effectRef>
           <a:fontRef idx="minor">
@@ -14090,7 +14223,7 @@
         </p:nvSpPr>
         <p:spPr>
           <a:xfrm>
-            <a:off x="914400" y="6912864"/>
+            <a:off x="914400" y="7406640"/>
             <a:ext cx="3017520" cy="457200"/>
           </a:xfrm>
           <a:prstGeom prst="rect">
@@ -14132,7 +14265,7 @@
         </p:nvSpPr>
         <p:spPr>
           <a:xfrm>
-            <a:off x="3931920" y="6876288"/>
+            <a:off x="3931920" y="7370064"/>
             <a:ext cx="5760720" cy="1097280"/>
           </a:xfrm>
           <a:prstGeom prst="rect">
@@ -14161,7 +14294,7 @@
                 </a:solidFill>
                 <a:latin typeface="Instrument Sans"/>
               </a:rPr>
-              <a:t>A financial institution, our client, runs the rail for its trade flows.</a:t>
+              <a:t>A financial institution, the client, would run the rail for its trade flows.</a:t>
             </a:r>
           </a:p>
         </p:txBody>
@@ -14175,11 +14308,11 @@
         <p:spPr>
           <a:xfrm>
             <a:off x="10424160" y="3154680"/>
-            <a:ext cx="6949440" cy="4480560"/>
+            <a:ext cx="6949440" cy="5212080"/>
           </a:xfrm>
           <a:prstGeom prst="roundRect">
             <a:avLst>
-              <a:gd name="adj" fmla="val 12000"/>
+              <a:gd name="adj" fmla="val 2807"/>
             </a:avLst>
           </a:prstGeom>
           <a:solidFill>
@@ -14199,7 +14332,7 @@
           <a:fillRef idx="3">
             <a:schemeClr val="accent1"/>
           </a:fillRef>
-          <a:effectRef idx="2">
+          <a:effectRef idx="0">
             <a:schemeClr val="accent1"/>
           </a:effectRef>
           <a:fontRef idx="minor">
@@ -14241,7 +14374,7 @@
                 <a:spcPct val="112000"/>
               </a:lnSpc>
               <a:spcAft>
-                <a:spcPts val="1600"/>
+                <a:spcPts val="1800"/>
               </a:spcAft>
             </a:pPr>
             <a:r>
@@ -14260,11 +14393,11 @@
                 <a:spcPct val="112000"/>
               </a:lnSpc>
               <a:spcAft>
-                <a:spcPts val="1600"/>
+                <a:spcPts val="1800"/>
               </a:spcAft>
             </a:pPr>
             <a:r>
-              <a:rPr sz="2400" b="1">
+              <a:rPr sz="2600" b="1">
                 <a:solidFill>
                   <a:srgbClr val="0E0F11"/>
                 </a:solidFill>
@@ -14279,11 +14412,11 @@
                 <a:spcPct val="112000"/>
               </a:lnSpc>
               <a:spcAft>
-                <a:spcPts val="1600"/>
+                <a:spcPts val="1800"/>
               </a:spcAft>
             </a:pPr>
             <a:r>
-              <a:rPr sz="2400" b="0">
+              <a:rPr sz="2600" b="0">
                 <a:solidFill>
                   <a:srgbClr val="0E0F11"/>
                 </a:solidFill>
@@ -14298,11 +14431,11 @@
                 <a:spcPct val="112000"/>
               </a:lnSpc>
               <a:spcAft>
-                <a:spcPts val="1600"/>
+                <a:spcPts val="1800"/>
               </a:spcAft>
             </a:pPr>
             <a:r>
-              <a:rPr sz="2000" b="0">
+              <a:rPr sz="2200" b="0">
                 <a:solidFill>
                   <a:srgbClr val="4D5560"/>
                 </a:solidFill>
@@ -14548,7 +14681,7 @@
         <p:spPr>
           <a:xfrm>
             <a:off x="914400" y="1417320"/>
-            <a:ext cx="4270248" cy="475488"/>
+            <a:ext cx="3291839" cy="475488"/>
           </a:xfrm>
           <a:prstGeom prst="roundRect">
             <a:avLst>
@@ -14831,7 +14964,7 @@
           <a:fillRef idx="3">
             <a:schemeClr val="accent1"/>
           </a:fillRef>
-          <a:effectRef idx="2">
+          <a:effectRef idx="0">
             <a:schemeClr val="accent1"/>
           </a:effectRef>
           <a:fontRef idx="minor">
@@ -14873,11 +15006,11 @@
                 <a:spcPct val="112000"/>
               </a:lnSpc>
               <a:spcAft>
-                <a:spcPts val="1200"/>
+                <a:spcPts val="1400"/>
               </a:spcAft>
             </a:pPr>
             <a:r>
-              <a:rPr sz="2300" b="0">
+              <a:rPr sz="2400" b="0">
                 <a:solidFill>
                   <a:srgbClr val="4D5560"/>
                 </a:solidFill>
@@ -14886,7 +15019,7 @@
               <a:t>— </a:t>
             </a:r>
             <a:r>
-              <a:rPr sz="2300" b="0">
+              <a:rPr sz="2400" b="0">
                 <a:solidFill>
                   <a:srgbClr val="0E0F11"/>
                 </a:solidFill>
@@ -14901,11 +15034,11 @@
                 <a:spcPct val="112000"/>
               </a:lnSpc>
               <a:spcAft>
-                <a:spcPts val="1200"/>
+                <a:spcPts val="1400"/>
               </a:spcAft>
             </a:pPr>
             <a:r>
-              <a:rPr sz="2300" b="0">
+              <a:rPr sz="2400" b="0">
                 <a:solidFill>
                   <a:srgbClr val="4D5560"/>
                 </a:solidFill>
@@ -14914,7 +15047,7 @@
               <a:t>— </a:t>
             </a:r>
             <a:r>
-              <a:rPr sz="2300" b="0">
+              <a:rPr sz="2400" b="0">
                 <a:solidFill>
                   <a:srgbClr val="0E0F11"/>
                 </a:solidFill>
@@ -14929,11 +15062,11 @@
                 <a:spcPct val="112000"/>
               </a:lnSpc>
               <a:spcAft>
-                <a:spcPts val="1200"/>
+                <a:spcPts val="1400"/>
               </a:spcAft>
             </a:pPr>
             <a:r>
-              <a:rPr sz="2300" b="0">
+              <a:rPr sz="2400" b="0">
                 <a:solidFill>
                   <a:srgbClr val="4D5560"/>
                 </a:solidFill>
@@ -14942,7 +15075,7 @@
               <a:t>— </a:t>
             </a:r>
             <a:r>
-              <a:rPr sz="2300" b="0">
+              <a:rPr sz="2400" b="0">
                 <a:solidFill>
                   <a:srgbClr val="0E0F11"/>
                 </a:solidFill>
@@ -15024,7 +15157,7 @@
           <a:fillRef idx="3">
             <a:schemeClr val="accent1"/>
           </a:fillRef>
-          <a:effectRef idx="2">
+          <a:effectRef idx="0">
             <a:schemeClr val="accent1"/>
           </a:effectRef>
           <a:fontRef idx="minor">
@@ -15066,11 +15199,11 @@
                 <a:spcPct val="112000"/>
               </a:lnSpc>
               <a:spcAft>
-                <a:spcPts val="1200"/>
+                <a:spcPts val="1400"/>
               </a:spcAft>
             </a:pPr>
             <a:r>
-              <a:rPr sz="2300" b="0">
+              <a:rPr sz="2400" b="0">
                 <a:solidFill>
                   <a:srgbClr val="556F00"/>
                 </a:solidFill>
@@ -15079,7 +15212,7 @@
               <a:t>— </a:t>
             </a:r>
             <a:r>
-              <a:rPr sz="2300" b="0">
+              <a:rPr sz="2400" b="0">
                 <a:solidFill>
                   <a:srgbClr val="0E0F11"/>
                 </a:solidFill>
@@ -15094,11 +15227,11 @@
                 <a:spcPct val="112000"/>
               </a:lnSpc>
               <a:spcAft>
-                <a:spcPts val="1200"/>
+                <a:spcPts val="1400"/>
               </a:spcAft>
             </a:pPr>
             <a:r>
-              <a:rPr sz="2300" b="0">
+              <a:rPr sz="2400" b="0">
                 <a:solidFill>
                   <a:srgbClr val="556F00"/>
                 </a:solidFill>
@@ -15107,7 +15240,7 @@
               <a:t>— </a:t>
             </a:r>
             <a:r>
-              <a:rPr sz="2300" b="0">
+              <a:rPr sz="2400" b="0">
                 <a:solidFill>
                   <a:srgbClr val="0E0F11"/>
                 </a:solidFill>
@@ -15122,11 +15255,11 @@
                 <a:spcPct val="112000"/>
               </a:lnSpc>
               <a:spcAft>
-                <a:spcPts val="1200"/>
+                <a:spcPts val="1400"/>
               </a:spcAft>
             </a:pPr>
             <a:r>
-              <a:rPr sz="2300" b="0">
+              <a:rPr sz="2400" b="0">
                 <a:solidFill>
                   <a:srgbClr val="556F00"/>
                 </a:solidFill>
@@ -15135,7 +15268,7 @@
               <a:t>— </a:t>
             </a:r>
             <a:r>
-              <a:rPr sz="2300" b="0">
+              <a:rPr sz="2400" b="0">
                 <a:solidFill>
                   <a:srgbClr val="0E0F11"/>
                 </a:solidFill>
@@ -15150,11 +15283,11 @@
                 <a:spcPct val="112000"/>
               </a:lnSpc>
               <a:spcAft>
-                <a:spcPts val="1200"/>
+                <a:spcPts val="1400"/>
               </a:spcAft>
             </a:pPr>
             <a:r>
-              <a:rPr sz="2300" b="0">
+              <a:rPr sz="2400" b="0">
                 <a:solidFill>
                   <a:srgbClr val="556F00"/>
                 </a:solidFill>
@@ -15163,7 +15296,7 @@
               <a:t>— </a:t>
             </a:r>
             <a:r>
-              <a:rPr sz="2300" b="0">
+              <a:rPr sz="2400" b="0">
                 <a:solidFill>
                   <a:srgbClr val="0E0F11"/>
                 </a:solidFill>
@@ -15182,12 +15315,12 @@
         </p:nvSpPr>
         <p:spPr>
           <a:xfrm>
-            <a:off x="914400" y="7452360"/>
-            <a:ext cx="16459200" cy="1188720"/>
+            <a:off x="914400" y="7315200"/>
+            <a:ext cx="16459200" cy="1325880"/>
           </a:xfrm>
           <a:prstGeom prst="roundRect">
             <a:avLst>
-              <a:gd name="adj" fmla="val 12000"/>
+              <a:gd name="adj" fmla="val 11034"/>
             </a:avLst>
           </a:prstGeom>
           <a:solidFill>
@@ -15207,7 +15340,7 @@
           <a:fillRef idx="3">
             <a:schemeClr val="accent1"/>
           </a:fillRef>
-          <a:effectRef idx="2">
+          <a:effectRef idx="0">
             <a:schemeClr val="accent1"/>
           </a:effectRef>
           <a:fontRef idx="minor">
@@ -15230,8 +15363,8 @@
         </p:nvSpPr>
         <p:spPr>
           <a:xfrm>
-            <a:off x="1234440" y="7589520"/>
-            <a:ext cx="15819120" cy="1005840"/>
+            <a:off x="1234440" y="7424927"/>
+            <a:ext cx="15819120" cy="1097280"/>
           </a:xfrm>
           <a:prstGeom prst="rect">
             <a:avLst/>
@@ -15508,7 +15641,7 @@
         <p:spPr>
           <a:xfrm>
             <a:off x="914400" y="1417320"/>
-            <a:ext cx="3483863" cy="475488"/>
+            <a:ext cx="2743200" cy="475488"/>
           </a:xfrm>
           <a:prstGeom prst="roundRect">
             <a:avLst>
@@ -15715,7 +15848,7 @@
                 </a:solidFill>
                 <a:latin typeface="Inter Tight"/>
               </a:rPr>
-              <a:t>Next: one real shipment, then mainnet</a:t>
+              <a:t>Next: one pilot shipment, not yet agreed</a:t>
             </a:r>
           </a:p>
         </p:txBody>
@@ -15729,7 +15862,7 @@
         <p:spPr>
           <a:xfrm>
             <a:off x="1097280" y="3415284"/>
-            <a:ext cx="15910559" cy="27432"/>
+            <a:ext cx="12618720" cy="27432"/>
           </a:xfrm>
           <a:prstGeom prst="rect">
             <a:avLst/>
@@ -15749,7 +15882,7 @@
           <a:fillRef idx="3">
             <a:schemeClr val="accent1"/>
           </a:fillRef>
-          <a:effectRef idx="2">
+          <a:effectRef idx="0">
             <a:schemeClr val="accent1"/>
           </a:effectRef>
           <a:fontRef idx="minor">
@@ -15793,7 +15926,7 @@
           <a:fillRef idx="3">
             <a:schemeClr val="accent1"/>
           </a:fillRef>
-          <a:effectRef idx="2">
+          <a:effectRef idx="0">
             <a:schemeClr val="accent1"/>
           </a:effectRef>
           <a:fontRef idx="minor">
@@ -15921,7 +16054,7 @@
           <a:fillRef idx="3">
             <a:schemeClr val="accent1"/>
           </a:fillRef>
-          <a:effectRef idx="2">
+          <a:effectRef idx="0">
             <a:schemeClr val="accent1"/>
           </a:effectRef>
           <a:fontRef idx="minor">
@@ -16049,7 +16182,7 @@
           <a:fillRef idx="3">
             <a:schemeClr val="accent1"/>
           </a:fillRef>
-          <a:effectRef idx="2">
+          <a:effectRef idx="0">
             <a:schemeClr val="accent1"/>
           </a:effectRef>
           <a:fontRef idx="minor">
@@ -16177,7 +16310,7 @@
           <a:fillRef idx="3">
             <a:schemeClr val="accent1"/>
           </a:fillRef>
-          <a:effectRef idx="2">
+          <a:effectRef idx="0">
             <a:schemeClr val="accent1"/>
           </a:effectRef>
           <a:fontRef idx="minor">
@@ -16335,12 +16468,12 @@
         </p:nvSpPr>
         <p:spPr>
           <a:xfrm>
-            <a:off x="914400" y="7086600"/>
-            <a:ext cx="16459200" cy="1508760"/>
+            <a:off x="914400" y="6949440"/>
+            <a:ext cx="16459200" cy="1417320"/>
           </a:xfrm>
           <a:prstGeom prst="roundRect">
             <a:avLst>
-              <a:gd name="adj" fmla="val 12000"/>
+              <a:gd name="adj" fmla="val 10322"/>
             </a:avLst>
           </a:prstGeom>
           <a:solidFill>
@@ -16358,7 +16491,7 @@
           <a:fillRef idx="3">
             <a:schemeClr val="accent1"/>
           </a:fillRef>
-          <a:effectRef idx="2">
+          <a:effectRef idx="0">
             <a:schemeClr val="accent1"/>
           </a:effectRef>
           <a:fontRef idx="minor">
@@ -16381,7 +16514,7 @@
         </p:nvSpPr>
         <p:spPr>
           <a:xfrm>
-            <a:off x="1325880" y="7178040"/>
+            <a:off x="1325880" y="6995160"/>
             <a:ext cx="15636240" cy="1325880"/>
           </a:xfrm>
           <a:prstGeom prst="rect">
@@ -16659,7 +16792,7 @@
         <p:spPr>
           <a:xfrm>
             <a:off x="914400" y="1417320"/>
-            <a:ext cx="2304288" cy="475488"/>
+            <a:ext cx="1920240" cy="475488"/>
           </a:xfrm>
           <a:prstGeom prst="roundRect">
             <a:avLst>
@@ -16866,7 +16999,7 @@
                 </a:solidFill>
                 <a:latin typeface="Inter Tight"/>
               </a:rPr>
-              <a:t>Why us</a:t>
+              <a:t>Why us: a founder already on Stellar mainnet</a:t>
             </a:r>
           </a:p>
         </p:txBody>
@@ -16898,7 +17031,7 @@
                 <a:spcPct val="112000"/>
               </a:lnSpc>
               <a:spcAft>
-                <a:spcPts val="200"/>
+                <a:spcPts val="400"/>
               </a:spcAft>
             </a:pPr>
             <a:r>
@@ -16917,17 +17050,17 @@
                 <a:spcPct val="112000"/>
               </a:lnSpc>
               <a:spcAft>
-                <a:spcPts val="200"/>
+                <a:spcPts val="400"/>
               </a:spcAft>
             </a:pPr>
             <a:r>
-              <a:rPr sz="2200" b="0">
+              <a:rPr sz="2100" b="0">
                 <a:solidFill>
                   <a:srgbClr val="0E0F11"/>
                 </a:solidFill>
                 <a:latin typeface="Instrument Sans"/>
               </a:rPr>
-              <a:t>Founder and team captain. Built Radox: 3 Soroban contracts on Stellar mainnet.</a:t>
+              <a:t>Founder, captain. Built Radox: 3 Soroban contracts on Stellar mainnet.</a:t>
             </a:r>
           </a:p>
         </p:txBody>
@@ -16940,7 +17073,7 @@
         </p:nvSpPr>
         <p:spPr>
           <a:xfrm>
-            <a:off x="914400" y="4434840"/>
+            <a:off x="914400" y="4526280"/>
             <a:ext cx="9875520" cy="1188720"/>
           </a:xfrm>
           <a:prstGeom prst="rect">
@@ -16959,7 +17092,7 @@
                 <a:spcPct val="112000"/>
               </a:lnSpc>
               <a:spcAft>
-                <a:spcPts val="200"/>
+                <a:spcPts val="400"/>
               </a:spcAft>
             </a:pPr>
             <a:r>
@@ -16978,17 +17111,17 @@
                 <a:spcPct val="112000"/>
               </a:lnSpc>
               <a:spcAft>
-                <a:spcPts val="200"/>
+                <a:spcPts val="400"/>
               </a:spcAft>
             </a:pPr>
             <a:r>
-              <a:rPr sz="2200" b="0">
+              <a:rPr sz="2100" b="0">
                 <a:solidFill>
                   <a:srgbClr val="0E0F11"/>
                 </a:solidFill>
                 <a:latin typeface="Instrument Sans"/>
               </a:rPr>
-              <a:t>Developer. Led custody_registry, the testnet harness and the proofs this weekend.</a:t>
+              <a:t>Developer: custody_registry, the testnet harness and the proofs.</a:t>
             </a:r>
           </a:p>
         </p:txBody>
@@ -17001,7 +17134,7 @@
         </p:nvSpPr>
         <p:spPr>
           <a:xfrm>
-            <a:off x="914400" y="5715000"/>
+            <a:off x="914400" y="5897880"/>
             <a:ext cx="9875520" cy="1188720"/>
           </a:xfrm>
           <a:prstGeom prst="rect">
@@ -17020,7 +17153,7 @@
                 <a:spcPct val="112000"/>
               </a:lnSpc>
               <a:spcAft>
-                <a:spcPts val="200"/>
+                <a:spcPts val="400"/>
               </a:spcAft>
             </a:pPr>
             <a:r>
@@ -17039,11 +17172,11 @@
                 <a:spcPct val="112000"/>
               </a:lnSpc>
               <a:spcAft>
-                <a:spcPts val="200"/>
+                <a:spcPts val="400"/>
               </a:spcAft>
             </a:pPr>
             <a:r>
-              <a:rPr sz="2200" b="0">
+              <a:rPr sz="2100" b="0">
                 <a:solidFill>
                   <a:srgbClr val="0E0F11"/>
                 </a:solidFill>
@@ -17109,7 +17242,7 @@
           </a:xfrm>
           <a:prstGeom prst="roundRect">
             <a:avLst>
-              <a:gd name="adj" fmla="val 12000"/>
+              <a:gd name="adj" fmla="val 3555"/>
             </a:avLst>
           </a:prstGeom>
           <a:noFill/>
@@ -17128,7 +17261,7 @@
           <a:fillRef idx="3">
             <a:schemeClr val="accent1"/>
           </a:fillRef>
-          <a:effectRef idx="2">
+          <a:effectRef idx="0">
             <a:schemeClr val="accent1"/>
           </a:effectRef>
           <a:fontRef idx="minor">
@@ -17214,7 +17347,7 @@
           <a:fillRef idx="3">
             <a:schemeClr val="accent1"/>
           </a:fillRef>
-          <a:effectRef idx="2">
+          <a:effectRef idx="0">
             <a:schemeClr val="accent1"/>
           </a:effectRef>
           <a:fontRef idx="minor">
@@ -17460,7 +17593,7 @@
         <p:spPr>
           <a:xfrm>
             <a:off x="914400" y="1600200"/>
-            <a:ext cx="8595360" cy="475488"/>
+            <a:ext cx="6446520" cy="475488"/>
           </a:xfrm>
           <a:prstGeom prst="roundRect">
             <a:avLst>
@@ -18075,7 +18208,7 @@
                 </a:solidFill>
                 <a:latin typeface="Inter Tight"/>
               </a:rPr>
-              <a:t>Every handover of a shipment, signed by both hands, on Stellar.</a:t>
+              <a:t>Know who holds the goods: every handover signed by both custodians.</a:t>
             </a:r>
           </a:p>
         </p:txBody>
@@ -18117,7 +18250,7 @@
                 </a:solidFill>
                 <a:latin typeface="Instrument Sans"/>
               </a:rPr>
-              <a:t>Dual-signed custody for goods in transit  ·  First corridor: Rio–Miami</a:t>
+              <a:t>A dual-signed custody record on Stellar  ·  First corridor: Rio–Miami</a:t>
             </a:r>
           </a:p>
         </p:txBody>
@@ -18236,7 +18369,7 @@
           <a:fillRef idx="3">
             <a:schemeClr val="accent1"/>
           </a:fillRef>
-          <a:effectRef idx="2">
+          <a:effectRef idx="0">
             <a:schemeClr val="accent1"/>
           </a:effectRef>
           <a:fontRef idx="minor">
@@ -18280,7 +18413,7 @@
           <a:fillRef idx="3">
             <a:schemeClr val="accent1"/>
           </a:fillRef>
-          <a:effectRef idx="2">
+          <a:effectRef idx="0">
             <a:schemeClr val="accent1"/>
           </a:effectRef>
           <a:fontRef idx="minor">
@@ -18324,7 +18457,7 @@
           <a:fillRef idx="3">
             <a:schemeClr val="accent1"/>
           </a:fillRef>
-          <a:effectRef idx="2">
+          <a:effectRef idx="0">
             <a:schemeClr val="accent1"/>
           </a:effectRef>
           <a:fontRef idx="minor">
@@ -18368,7 +18501,7 @@
           <a:fillRef idx="3">
             <a:schemeClr val="accent1"/>
           </a:fillRef>
-          <a:effectRef idx="2">
+          <a:effectRef idx="0">
             <a:schemeClr val="accent1"/>
           </a:effectRef>
           <a:fontRef idx="minor">
@@ -18412,7 +18545,7 @@
           <a:fillRef idx="3">
             <a:schemeClr val="accent1"/>
           </a:fillRef>
-          <a:effectRef idx="2">
+          <a:effectRef idx="0">
             <a:schemeClr val="accent1"/>
           </a:effectRef>
           <a:fontRef idx="minor">
@@ -18456,7 +18589,7 @@
           <a:fillRef idx="3">
             <a:schemeClr val="accent1"/>
           </a:fillRef>
-          <a:effectRef idx="2">
+          <a:effectRef idx="0">
             <a:schemeClr val="accent1"/>
           </a:effectRef>
           <a:fontRef idx="minor">
@@ -18500,7 +18633,7 @@
           <a:fillRef idx="3">
             <a:schemeClr val="accent1"/>
           </a:fillRef>
-          <a:effectRef idx="2">
+          <a:effectRef idx="0">
             <a:schemeClr val="accent1"/>
           </a:effectRef>
           <a:fontRef idx="minor">
@@ -18523,7 +18656,7 @@
         </p:nvSpPr>
         <p:spPr>
           <a:xfrm>
-            <a:off x="12527280" y="5870448"/>
+            <a:off x="12682728" y="5870448"/>
             <a:ext cx="1828800" cy="365760"/>
           </a:xfrm>
           <a:prstGeom prst="rect">
@@ -18565,7 +18698,7 @@
         </p:nvSpPr>
         <p:spPr>
           <a:xfrm>
-            <a:off x="15819120" y="5870448"/>
+            <a:off x="15663672" y="5870448"/>
             <a:ext cx="1828800" cy="365760"/>
           </a:xfrm>
           <a:prstGeom prst="rect">
@@ -18834,7 +18967,7 @@
         <p:spPr>
           <a:xfrm>
             <a:off x="914400" y="1417320"/>
-            <a:ext cx="4073652" cy="475488"/>
+            <a:ext cx="3154679" cy="475488"/>
           </a:xfrm>
           <a:prstGeom prst="roundRect">
             <a:avLst>
@@ -19096,8 +19229,8 @@
         </p:nvSpPr>
         <p:spPr>
           <a:xfrm>
-            <a:off x="1280160" y="4878324"/>
-            <a:ext cx="9144000" cy="27432"/>
+            <a:off x="1737360" y="4878324"/>
+            <a:ext cx="8686800" cy="27432"/>
           </a:xfrm>
           <a:prstGeom prst="rect">
             <a:avLst/>
@@ -19117,7 +19250,7 @@
           <a:fillRef idx="3">
             <a:schemeClr val="accent1"/>
           </a:fillRef>
-          <a:effectRef idx="2">
+          <a:effectRef idx="0">
             <a:schemeClr val="accent1"/>
           </a:effectRef>
           <a:fontRef idx="minor">
@@ -19140,7 +19273,7 @@
         </p:nvSpPr>
         <p:spPr>
           <a:xfrm>
-            <a:off x="1124712" y="4736592"/>
+            <a:off x="1581912" y="4736592"/>
             <a:ext cx="310896" cy="310896"/>
           </a:xfrm>
           <a:prstGeom prst="ellipse">
@@ -19161,7 +19294,7 @@
           <a:fillRef idx="3">
             <a:schemeClr val="accent1"/>
           </a:fillRef>
-          <a:effectRef idx="2">
+          <a:effectRef idx="0">
             <a:schemeClr val="accent1"/>
           </a:effectRef>
           <a:fontRef idx="minor">
@@ -19184,7 +19317,7 @@
         </p:nvSpPr>
         <p:spPr>
           <a:xfrm>
-            <a:off x="182879" y="5184648"/>
+            <a:off x="640080" y="5184648"/>
             <a:ext cx="2194560" cy="457200"/>
           </a:xfrm>
           <a:prstGeom prst="rect">
@@ -19226,7 +19359,7 @@
         </p:nvSpPr>
         <p:spPr>
           <a:xfrm>
-            <a:off x="3410712" y="4736592"/>
+            <a:off x="3753612" y="4736592"/>
             <a:ext cx="310896" cy="310896"/>
           </a:xfrm>
           <a:prstGeom prst="ellipse">
@@ -19247,7 +19380,7 @@
           <a:fillRef idx="3">
             <a:schemeClr val="accent1"/>
           </a:fillRef>
-          <a:effectRef idx="2">
+          <a:effectRef idx="0">
             <a:schemeClr val="accent1"/>
           </a:effectRef>
           <a:fontRef idx="minor">
@@ -19270,7 +19403,7 @@
         </p:nvSpPr>
         <p:spPr>
           <a:xfrm>
-            <a:off x="2468880" y="5184648"/>
+            <a:off x="2811780" y="5184648"/>
             <a:ext cx="2194560" cy="457200"/>
           </a:xfrm>
           <a:prstGeom prst="rect">
@@ -19312,7 +19445,7 @@
         </p:nvSpPr>
         <p:spPr>
           <a:xfrm>
-            <a:off x="5696712" y="4736592"/>
+            <a:off x="5925312" y="4736592"/>
             <a:ext cx="310896" cy="310896"/>
           </a:xfrm>
           <a:prstGeom prst="ellipse">
@@ -19333,7 +19466,7 @@
           <a:fillRef idx="3">
             <a:schemeClr val="accent1"/>
           </a:fillRef>
-          <a:effectRef idx="2">
+          <a:effectRef idx="0">
             <a:schemeClr val="accent1"/>
           </a:effectRef>
           <a:fontRef idx="minor">
@@ -19356,7 +19489,7 @@
         </p:nvSpPr>
         <p:spPr>
           <a:xfrm>
-            <a:off x="4754880" y="5184648"/>
+            <a:off x="4983480" y="5184648"/>
             <a:ext cx="2194560" cy="457200"/>
           </a:xfrm>
           <a:prstGeom prst="rect">
@@ -19398,7 +19531,7 @@
         </p:nvSpPr>
         <p:spPr>
           <a:xfrm>
-            <a:off x="7982712" y="4736592"/>
+            <a:off x="8097012" y="4736592"/>
             <a:ext cx="310896" cy="310896"/>
           </a:xfrm>
           <a:prstGeom prst="ellipse">
@@ -19419,7 +19552,7 @@
           <a:fillRef idx="3">
             <a:schemeClr val="accent1"/>
           </a:fillRef>
-          <a:effectRef idx="2">
+          <a:effectRef idx="0">
             <a:schemeClr val="accent1"/>
           </a:effectRef>
           <a:fontRef idx="minor">
@@ -19442,7 +19575,7 @@
         </p:nvSpPr>
         <p:spPr>
           <a:xfrm>
-            <a:off x="7040880" y="5184648"/>
+            <a:off x="7155180" y="5184648"/>
             <a:ext cx="2194560" cy="457200"/>
           </a:xfrm>
           <a:prstGeom prst="rect">
@@ -19505,7 +19638,7 @@
           <a:fillRef idx="3">
             <a:schemeClr val="accent1"/>
           </a:fillRef>
-          <a:effectRef idx="2">
+          <a:effectRef idx="0">
             <a:schemeClr val="accent1"/>
           </a:effectRef>
           <a:fontRef idx="minor">
@@ -19599,7 +19732,7 @@
                 </a:solidFill>
                 <a:latin typeface="Instrument Sans"/>
               </a:rPr>
-              <a:t>Each handover is recorded on paper or inside one operator's own system.</a:t>
+              <a:t>Handovers are mostly paper, or sit inside one operator's own system.</a:t>
             </a:r>
           </a:p>
         </p:txBody>
@@ -19663,8 +19796,8 @@
         </p:nvSpPr>
         <p:spPr>
           <a:xfrm>
-            <a:off x="12070080" y="3154680"/>
-            <a:ext cx="5303520" cy="1188720"/>
+            <a:off x="12070080" y="3246120"/>
+            <a:ext cx="5303520" cy="1005840"/>
           </a:xfrm>
           <a:prstGeom prst="rect">
             <a:avLst/>
@@ -19686,7 +19819,7 @@
               </a:spcAft>
             </a:pPr>
             <a:r>
-              <a:rPr sz="9600" b="1">
+              <a:rPr sz="6400" b="1">
                 <a:solidFill>
                   <a:srgbClr val="0E0F11"/>
                 </a:solidFill>
@@ -19705,7 +19838,7 @@
         </p:nvSpPr>
         <p:spPr>
           <a:xfrm>
-            <a:off x="12070080" y="4526280"/>
+            <a:off x="12070080" y="4206240"/>
             <a:ext cx="5303520" cy="2377440"/>
           </a:xfrm>
           <a:prstGeom prst="rect">
@@ -19747,7 +19880,7 @@
               </a:spcAft>
             </a:pPr>
             <a:r>
-              <a:rPr sz="1800" b="1">
+              <a:rPr sz="1800" b="0">
                 <a:solidFill>
                   <a:srgbClr val="4D5560"/>
                 </a:solidFill>
@@ -20035,7 +20168,7 @@
         <p:spPr>
           <a:xfrm>
             <a:off x="914400" y="1417320"/>
-            <a:ext cx="3090672" cy="475488"/>
+            <a:ext cx="2468879" cy="475488"/>
           </a:xfrm>
           <a:prstGeom prst="roundRect">
             <a:avLst>
@@ -20242,7 +20375,7 @@
                 </a:solidFill>
                 <a:latin typeface="Inter Tight"/>
               </a:rPr>
-              <a:t>Every handover, signed by both hands</a:t>
+              <a:t>Both custodians sign, or nothing changes</a:t>
             </a:r>
           </a:p>
         </p:txBody>
@@ -20260,7 +20393,7 @@
           </a:xfrm>
           <a:prstGeom prst="roundRect">
             <a:avLst>
-              <a:gd name="adj" fmla="val 12000"/>
+              <a:gd name="adj" fmla="val 11034"/>
             </a:avLst>
           </a:prstGeom>
           <a:solidFill>
@@ -20280,7 +20413,7 @@
           <a:fillRef idx="3">
             <a:schemeClr val="accent1"/>
           </a:fillRef>
-          <a:effectRef idx="2">
+          <a:effectRef idx="0">
             <a:schemeClr val="accent1"/>
           </a:effectRef>
           <a:fontRef idx="minor">
@@ -20369,7 +20502,7 @@
           </a:xfrm>
           <a:prstGeom prst="roundRect">
             <a:avLst>
-              <a:gd name="adj" fmla="val 12000"/>
+              <a:gd name="adj" fmla="val 11034"/>
             </a:avLst>
           </a:prstGeom>
           <a:solidFill>
@@ -20387,7 +20520,7 @@
           <a:fillRef idx="3">
             <a:schemeClr val="accent1"/>
           </a:fillRef>
-          <a:effectRef idx="2">
+          <a:effectRef idx="0">
             <a:schemeClr val="accent1"/>
           </a:effectRef>
           <a:fontRef idx="minor">
@@ -20476,7 +20609,7 @@
           </a:xfrm>
           <a:prstGeom prst="roundRect">
             <a:avLst>
-              <a:gd name="adj" fmla="val 12000"/>
+              <a:gd name="adj" fmla="val 11034"/>
             </a:avLst>
           </a:prstGeom>
           <a:solidFill>
@@ -20496,7 +20629,7 @@
           <a:fillRef idx="3">
             <a:schemeClr val="accent1"/>
           </a:fillRef>
-          <a:effectRef idx="2">
+          <a:effectRef idx="0">
             <a:schemeClr val="accent1"/>
           </a:effectRef>
           <a:fontRef idx="minor">
@@ -20601,7 +20734,7 @@
           <a:fillRef idx="3">
             <a:schemeClr val="accent1"/>
           </a:fillRef>
-          <a:effectRef idx="2">
+          <a:effectRef idx="0">
             <a:schemeClr val="accent1"/>
           </a:effectRef>
           <a:fontRef idx="minor">
@@ -20645,7 +20778,7 @@
           <a:fillRef idx="3">
             <a:schemeClr val="accent1"/>
           </a:fillRef>
-          <a:effectRef idx="2">
+          <a:effectRef idx="0">
             <a:schemeClr val="accent1"/>
           </a:effectRef>
           <a:fontRef idx="minor">
@@ -20697,16 +20830,7 @@
                 </a:solidFill>
                 <a:latin typeface="Instrument Sans"/>
               </a:rPr>
-              <a:t>Either signature missing → the call fails. </a:t>
-            </a:r>
-            <a:r>
-              <a:rPr sz="3000" b="0">
-                <a:solidFill>
-                  <a:srgbClr val="4D5560"/>
-                </a:solidFill>
-                <a:latin typeface="Instrument Sans"/>
-              </a:rPr>
-              <a:t>Both sign, or nothing changes.</a:t>
+              <a:t>Either signature missing → the call fails.</a:t>
             </a:r>
           </a:p>
         </p:txBody>
@@ -20742,13 +20866,13 @@
               </a:spcAft>
             </a:pPr>
             <a:r>
-              <a:rPr sz="2000" b="0">
+              <a:rPr sz="2600" b="0">
                 <a:solidFill>
                   <a:srgbClr val="556F00"/>
                 </a:solidFill>
                 <a:latin typeface="Instrument Sans"/>
               </a:rPr>
-              <a:t>■ </a:t>
+              <a:t>— </a:t>
             </a:r>
             <a:r>
               <a:rPr sz="2600" b="0">
@@ -20788,13 +20912,13 @@
               </a:spcAft>
             </a:pPr>
             <a:r>
-              <a:rPr sz="2000" b="0">
+              <a:rPr sz="2600" b="0">
                 <a:solidFill>
                   <a:srgbClr val="556F00"/>
                 </a:solidFill>
                 <a:latin typeface="Instrument Sans"/>
               </a:rPr>
-              <a:t>■ </a:t>
+              <a:t>— </a:t>
             </a:r>
             <a:r>
               <a:rPr sz="2600" b="0">
@@ -20816,13 +20940,13 @@
               </a:spcAft>
             </a:pPr>
             <a:r>
-              <a:rPr sz="2000" b="0">
+              <a:rPr sz="2600" b="0">
                 <a:solidFill>
                   <a:srgbClr val="556F00"/>
                 </a:solidFill>
                 <a:latin typeface="Instrument Sans"/>
               </a:rPr>
-              <a:t>■ </a:t>
+              <a:t>— </a:t>
             </a:r>
             <a:r>
               <a:rPr sz="2600" b="0">
@@ -21150,7 +21274,7 @@
         <p:spPr>
           <a:xfrm>
             <a:off x="914400" y="1417320"/>
-            <a:ext cx="6432804" cy="475488"/>
+            <a:ext cx="4800600" cy="475488"/>
           </a:xfrm>
           <a:prstGeom prst="roundRect">
             <a:avLst>
@@ -21364,7 +21488,7 @@
       </p:sp>
       <p:pic>
         <p:nvPicPr>
-          <p:cNvPr id="125" name="Picture 124" descr="page-handovers.png"/>
+          <p:cNvPr id="125" name="Picture 124" descr="page-handovers-rows.png"/>
           <p:cNvPicPr>
             <a:picLocks noChangeAspect="1"/>
           </p:cNvPicPr>
@@ -21379,7 +21503,7 @@
         <p:spPr>
           <a:xfrm>
             <a:off x="914400" y="3154680"/>
-            <a:ext cx="5954233" cy="5486400"/>
+            <a:ext cx="8138160" cy="5522323"/>
           </a:xfrm>
           <a:prstGeom prst="rect">
             <a:avLst/>
@@ -21395,7 +21519,7 @@
         <p:spPr>
           <a:xfrm>
             <a:off x="914400" y="3154680"/>
-            <a:ext cx="5954232" cy="5486400"/>
+            <a:ext cx="8138160" cy="5522322"/>
           </a:xfrm>
           <a:prstGeom prst="rect">
             <a:avLst/>
@@ -21415,7 +21539,7 @@
           <a:fillRef idx="3">
             <a:schemeClr val="accent1"/>
           </a:fillRef>
-          <a:effectRef idx="2">
+          <a:effectRef idx="0">
             <a:schemeClr val="accent1"/>
           </a:effectRef>
           <a:fontRef idx="minor">
@@ -21438,8 +21562,8 @@
         </p:nvSpPr>
         <p:spPr>
           <a:xfrm>
-            <a:off x="7498079" y="3246120"/>
-            <a:ext cx="9875520" cy="2743200"/>
+            <a:off x="9692640" y="3154680"/>
+            <a:ext cx="7680960" cy="2011680"/>
           </a:xfrm>
           <a:prstGeom prst="rect">
             <a:avLst/>
@@ -21457,148 +21581,129 @@
                 <a:spcPct val="112000"/>
               </a:lnSpc>
               <a:spcAft>
-                <a:spcPts val="1800"/>
+                <a:spcPts val="600"/>
               </a:spcAft>
             </a:pPr>
             <a:r>
-              <a:rPr sz="2800" b="0">
-                <a:solidFill>
-                  <a:srgbClr val="E7E8EA"/>
+              <a:rPr sz="2600" b="1">
+                <a:solidFill>
+                  <a:srgbClr val="C6F24E"/>
                 </a:solidFill>
                 <a:latin typeface="Instrument Sans"/>
               </a:rPr>
-              <a:t>One public page per shipment: every handover, who signed it, and its Stellar transaction.</a:t>
-            </a:r>
-          </a:p>
+              <a:t>Verify head</a:t>
+            </a:r>
+            <a:r>
+              <a:rPr sz="2600" b="0">
+                <a:solidFill>
+                  <a:srgbClr val="E7E8EA"/>
+                </a:solidFill>
+                <a:latin typeface="Instrument Sans"/>
+              </a:rPr>
+              <a:t> recomputes the hash chain in the browser and compares it with the head stored in the contract.</a:t>
+            </a:r>
+          </a:p>
+        </p:txBody>
+      </p:sp>
+      <p:sp>
+        <p:nvSpPr>
+          <p:cNvPr id="128" name="TextBox 127"/>
+          <p:cNvSpPr txBox="1"/>
+          <p:nvPr/>
+        </p:nvSpPr>
+        <p:spPr>
+          <a:xfrm>
+            <a:off x="9692640" y="5257800"/>
+            <a:ext cx="5486400" cy="1097280"/>
+          </a:xfrm>
+          <a:prstGeom prst="rect">
+            <a:avLst/>
+          </a:prstGeom>
+          <a:noFill/>
+        </p:spPr>
+        <p:txBody>
+          <a:bodyPr wrap="square" lIns="0" rIns="0" tIns="0" bIns="0" anchor="t">
+            <a:spAutoFit/>
+          </a:bodyPr>
+          <a:lstStyle/>
+          <a:p>
+            <a:pPr algn="l">
+              <a:lnSpc>
+                <a:spcPct val="90000"/>
+              </a:lnSpc>
+              <a:spcAft>
+                <a:spcPts val="600"/>
+              </a:spcAft>
+            </a:pPr>
+            <a:r>
+              <a:rPr sz="8000" b="1">
+                <a:solidFill>
+                  <a:srgbClr val="C6F24E"/>
+                </a:solidFill>
+                <a:latin typeface="JetBrains Mono"/>
+              </a:rPr>
+              <a:t>MATCH</a:t>
+            </a:r>
+          </a:p>
+        </p:txBody>
+      </p:sp>
+      <p:sp>
+        <p:nvSpPr>
+          <p:cNvPr id="129" name="TextBox 128"/>
+          <p:cNvSpPr txBox="1"/>
+          <p:nvPr/>
+        </p:nvSpPr>
+        <p:spPr>
+          <a:xfrm>
+            <a:off x="9692640" y="6355080"/>
+            <a:ext cx="5120640" cy="1463040"/>
+          </a:xfrm>
+          <a:prstGeom prst="rect">
+            <a:avLst/>
+          </a:prstGeom>
+          <a:noFill/>
+        </p:spPr>
+        <p:txBody>
+          <a:bodyPr wrap="square" lIns="0" rIns="0" tIns="0" bIns="0" anchor="t">
+            <a:spAutoFit/>
+          </a:bodyPr>
+          <a:lstStyle/>
           <a:p>
             <a:pPr algn="l">
               <a:lnSpc>
                 <a:spcPct val="112000"/>
               </a:lnSpc>
               <a:spcAft>
-                <a:spcPts val="1800"/>
+                <a:spcPts val="600"/>
               </a:spcAft>
             </a:pPr>
             <a:r>
-              <a:rPr sz="2800" b="1">
-                <a:solidFill>
-                  <a:srgbClr val="C6F24E"/>
+              <a:rPr sz="2000" b="0">
+                <a:solidFill>
+                  <a:srgbClr val="A3A8B0"/>
                 </a:solidFill>
                 <a:latin typeface="Instrument Sans"/>
               </a:rPr>
-              <a:t>Verify head</a:t>
-            </a:r>
-            <a:r>
-              <a:rPr sz="2800" b="0">
-                <a:solidFill>
-                  <a:srgbClr val="E7E8EA"/>
-                </a:solidFill>
-                <a:latin typeface="Instrument Sans"/>
-              </a:rPr>
-              <a:t> recomputes the hash chain in the browser and compares it with the contract.</a:t>
-            </a:r>
-          </a:p>
-        </p:txBody>
-      </p:sp>
-      <p:sp>
-        <p:nvSpPr>
-          <p:cNvPr id="128" name="TextBox 127"/>
-          <p:cNvSpPr txBox="1"/>
-          <p:nvPr/>
-        </p:nvSpPr>
-        <p:spPr>
-          <a:xfrm>
-            <a:off x="7498079" y="5715000"/>
-            <a:ext cx="5486400" cy="1097280"/>
-          </a:xfrm>
-          <a:prstGeom prst="rect">
-            <a:avLst/>
-          </a:prstGeom>
-          <a:noFill/>
-        </p:spPr>
-        <p:txBody>
-          <a:bodyPr wrap="square" lIns="0" rIns="0" tIns="0" bIns="0" anchor="t">
-            <a:spAutoFit/>
-          </a:bodyPr>
-          <a:lstStyle/>
-          <a:p>
-            <a:pPr algn="l">
-              <a:lnSpc>
-                <a:spcPct val="90000"/>
-              </a:lnSpc>
-              <a:spcAft>
-                <a:spcPts val="600"/>
-              </a:spcAft>
-            </a:pPr>
-            <a:r>
-              <a:rPr sz="8000" b="1">
-                <a:solidFill>
-                  <a:srgbClr val="C6F24E"/>
-                </a:solidFill>
-                <a:latin typeface="JetBrains Mono"/>
-              </a:rPr>
-              <a:t>MATCH</a:t>
-            </a:r>
-          </a:p>
-        </p:txBody>
-      </p:sp>
-      <p:sp>
-        <p:nvSpPr>
-          <p:cNvPr id="129" name="TextBox 128"/>
-          <p:cNvSpPr txBox="1"/>
-          <p:nvPr/>
-        </p:nvSpPr>
-        <p:spPr>
-          <a:xfrm>
-            <a:off x="7498079" y="6812280"/>
-            <a:ext cx="6035040" cy="1188720"/>
-          </a:xfrm>
-          <a:prstGeom prst="rect">
-            <a:avLst/>
-          </a:prstGeom>
-          <a:noFill/>
-        </p:spPr>
-        <p:txBody>
-          <a:bodyPr wrap="square" lIns="0" rIns="0" tIns="0" bIns="0" anchor="t">
-            <a:spAutoFit/>
-          </a:bodyPr>
-          <a:lstStyle/>
+              <a:t>Clicked live on 25 Oct 2026.</a:t>
+            </a:r>
+          </a:p>
           <a:p>
             <a:pPr algn="l">
               <a:lnSpc>
                 <a:spcPct val="112000"/>
               </a:lnSpc>
               <a:spcAft>
-                <a:spcPts val="400"/>
+                <a:spcPts val="600"/>
               </a:spcAft>
             </a:pPr>
             <a:r>
-              <a:rPr sz="1800" b="0">
+              <a:rPr sz="2000" b="0">
                 <a:solidFill>
                   <a:srgbClr val="A3A8B0"/>
                 </a:solidFill>
                 <a:latin typeface="Instrument Sans"/>
               </a:rPr>
-              <a:t>recomputed from 7 transactions, checked live 25 Oct 2026</a:t>
-            </a:r>
-          </a:p>
-          <a:p>
-            <a:pPr algn="l">
-              <a:lnSpc>
-                <a:spcPct val="112000"/>
-              </a:lnSpc>
-              <a:spcAft>
-                <a:spcPts val="400"/>
-              </a:spcAft>
-            </a:pPr>
-            <a:r>
-              <a:rPr sz="1800" b="0">
-                <a:solidFill>
-                  <a:srgbClr val="A3A8B0"/>
-                </a:solidFill>
-                <a:latin typeface="Instrument Sans"/>
-              </a:rPr>
-              <a:t>Reads Stellar RPC and Horizon directly; read-only.</a:t>
+              <a:t>Read-only: Stellar RPC and Horizon, no wallet.</a:t>
             </a:r>
           </a:p>
         </p:txBody>
@@ -21619,8 +21724,8 @@
         </p:blipFill>
         <p:spPr>
           <a:xfrm>
-            <a:off x="15179040" y="5715000"/>
-            <a:ext cx="2194560" cy="2194560"/>
+            <a:off x="15361920" y="5669280"/>
+            <a:ext cx="2011680" cy="2011680"/>
           </a:xfrm>
           <a:prstGeom prst="rect">
             <a:avLst/>
@@ -21635,8 +21740,8 @@
         </p:nvSpPr>
         <p:spPr>
           <a:xfrm>
-            <a:off x="13350240" y="8001000"/>
-            <a:ext cx="4023360" cy="365760"/>
+            <a:off x="12801600" y="7863840"/>
+            <a:ext cx="4572000" cy="365760"/>
           </a:xfrm>
           <a:prstGeom prst="rect">
             <a:avLst/>

--- a/projects/hackmeridian-rail/deck/radox-custody-rail.pptx
+++ b/projects/hackmeridian-rail/deck/radox-custody-rail.pptx
@@ -14666,7 +14666,7 @@
                 <a:cs typeface="JetBrains Mono"/>
                 <a:sym typeface="JetBrains Mono"/>
               </a:rPr>
-              <a:t>NEXT ▸ WHAT COMES NEXT</a:t>
+              <a:t>NEXT ▸ VISION AND ASK</a:t>
             </a:r>
             <a:endParaRPr/>
           </a:p>
@@ -15641,7 +15641,7 @@
         <p:spPr>
           <a:xfrm>
             <a:off x="914400" y="1417320"/>
-            <a:ext cx="2743200" cy="475488"/>
+            <a:ext cx="3977639" cy="475488"/>
           </a:xfrm>
           <a:prstGeom prst="roundRect">
             <a:avLst>
@@ -15680,7 +15680,7 @@
                 <a:cs typeface="JetBrains Mono"/>
                 <a:sym typeface="JetBrains Mono"/>
               </a:rPr>
-              <a:t>NEXT · THE ASK</a:t>
+              <a:t>VISION · NEXT · THE ASK</a:t>
             </a:r>
             <a:endParaRPr/>
           </a:p>
@@ -15848,20 +15848,71 @@
                 </a:solidFill>
                 <a:latin typeface="Inter Tight"/>
               </a:rPr>
-              <a:t>Next: one pilot shipment, not yet agreed</a:t>
-            </a:r>
-          </a:p>
-        </p:txBody>
-      </p:sp>
-      <p:sp>
-        <p:nvSpPr>
-          <p:cNvPr id="125" name="Rectangle 124"/>
+              <a:t>Vision: one custody standard, every corridor</a:t>
+            </a:r>
+          </a:p>
+        </p:txBody>
+      </p:sp>
+      <p:sp>
+        <p:nvSpPr>
+          <p:cNvPr id="125" name="TextBox 124"/>
+          <p:cNvSpPr txBox="1"/>
+          <p:nvPr/>
+        </p:nvSpPr>
+        <p:spPr>
+          <a:xfrm>
+            <a:off x="914400" y="3108960"/>
+            <a:ext cx="16459200" cy="1188720"/>
+          </a:xfrm>
+          <a:prstGeom prst="rect">
+            <a:avLst/>
+          </a:prstGeom>
+          <a:noFill/>
+        </p:spPr>
+        <p:txBody>
+          <a:bodyPr wrap="square" lIns="0" rIns="0" tIns="0" bIns="0" anchor="t">
+            <a:spAutoFit/>
+          </a:bodyPr>
+          <a:lstStyle/>
+          <a:p>
+            <a:pPr algn="l">
+              <a:lnSpc>
+                <a:spcPct val="112000"/>
+              </a:lnSpc>
+              <a:spcAft>
+                <a:spcPts val="600"/>
+              </a:spcAft>
+            </a:pPr>
+            <a:r>
+              <a:rPr sz="2800" b="1">
+                <a:solidFill>
+                  <a:srgbClr val="0E0F11"/>
+                </a:solidFill>
+                <a:latin typeface="Instrument Sans"/>
+              </a:rPr>
+              <a:t>Rio–Miami is the first corridor and the pilot. </a:t>
+            </a:r>
+            <a:r>
+              <a:rPr sz="2800" b="0">
+                <a:solidFill>
+                  <a:srgbClr val="0E0F11"/>
+                </a:solidFill>
+                <a:latin typeface="Instrument Sans"/>
+              </a:rPr>
+              <a:t>The goal is an open, SWIFT-like standard for tokenized goods moving on rails anywhere, built to integrate with the systems of chambers of commerce, ports and airports.</a:t>
+            </a:r>
+          </a:p>
+        </p:txBody>
+      </p:sp>
+      <p:sp>
+        <p:nvSpPr>
+          <p:cNvPr id="126" name="Rectangle 125"/>
           <p:cNvSpPr/>
           <p:nvPr/>
         </p:nvSpPr>
         <p:spPr>
           <a:xfrm>
-            <a:off x="1097280" y="3415284"/>
+            <a:off x="1097280" y="4604004"/>
             <a:ext cx="12618720" cy="27432"/>
           </a:xfrm>
           <a:prstGeom prst="rect">
@@ -15899,13 +15950,13 @@
       </p:sp>
       <p:sp>
         <p:nvSpPr>
-          <p:cNvPr id="126" name="Oval 125"/>
+          <p:cNvPr id="127" name="Oval 126"/>
           <p:cNvSpPr/>
           <p:nvPr/>
         </p:nvSpPr>
         <p:spPr>
           <a:xfrm>
-            <a:off x="941832" y="3273552"/>
+            <a:off x="941832" y="4462272"/>
             <a:ext cx="310896" cy="310896"/>
           </a:xfrm>
           <a:prstGeom prst="ellipse">
@@ -15943,13 +15994,13 @@
       </p:sp>
       <p:sp>
         <p:nvSpPr>
-          <p:cNvPr id="127" name="TextBox 126"/>
+          <p:cNvPr id="128" name="TextBox 127"/>
           <p:cNvSpPr txBox="1"/>
           <p:nvPr/>
         </p:nvSpPr>
         <p:spPr>
           <a:xfrm>
-            <a:off x="914400" y="3749039"/>
+            <a:off x="914400" y="4892040"/>
             <a:ext cx="3931920" cy="457200"/>
           </a:xfrm>
           <a:prstGeom prst="rect">
@@ -15985,14 +16036,14 @@
       </p:sp>
       <p:sp>
         <p:nvSpPr>
-          <p:cNvPr id="128" name="TextBox 127"/>
+          <p:cNvPr id="129" name="TextBox 128"/>
           <p:cNvSpPr txBox="1"/>
           <p:nvPr/>
         </p:nvSpPr>
         <p:spPr>
           <a:xfrm>
-            <a:off x="914400" y="4206240"/>
-            <a:ext cx="3931920" cy="2011680"/>
+            <a:off x="914400" y="5349240"/>
+            <a:ext cx="3931920" cy="1463040"/>
           </a:xfrm>
           <a:prstGeom prst="rect">
             <a:avLst/>
@@ -16014,26 +16065,26 @@
               </a:spcAft>
             </a:pPr>
             <a:r>
-              <a:rPr sz="2400" b="0">
+              <a:rPr sz="2200" b="0">
                 <a:solidFill>
                   <a:srgbClr val="0E0F11"/>
                 </a:solidFill>
                 <a:latin typeface="Instrument Sans"/>
               </a:rPr>
-              <a:t>Testnet this weekend: contract, 7 transactions, public page, API read.</a:t>
-            </a:r>
-          </a:p>
-        </p:txBody>
-      </p:sp>
-      <p:sp>
-        <p:nvSpPr>
-          <p:cNvPr id="129" name="Oval 128"/>
+              <a:t>Mechanism proven on testnet. No users or revenue yet.</a:t>
+            </a:r>
+          </a:p>
+        </p:txBody>
+      </p:sp>
+      <p:sp>
+        <p:nvSpPr>
+          <p:cNvPr id="130" name="Oval 129"/>
           <p:cNvSpPr/>
           <p:nvPr/>
         </p:nvSpPr>
         <p:spPr>
           <a:xfrm>
-            <a:off x="5184648" y="3310128"/>
+            <a:off x="5184648" y="4498848"/>
             <a:ext cx="237744" cy="237744"/>
           </a:xfrm>
           <a:prstGeom prst="ellipse">
@@ -16071,13 +16122,13 @@
       </p:sp>
       <p:sp>
         <p:nvSpPr>
-          <p:cNvPr id="130" name="TextBox 129"/>
+          <p:cNvPr id="131" name="TextBox 130"/>
           <p:cNvSpPr txBox="1"/>
           <p:nvPr/>
         </p:nvSpPr>
         <p:spPr>
           <a:xfrm>
-            <a:off x="5120640" y="3749039"/>
+            <a:off x="5120640" y="4892040"/>
             <a:ext cx="3931920" cy="457200"/>
           </a:xfrm>
           <a:prstGeom prst="rect">
@@ -16113,14 +16164,14 @@
       </p:sp>
       <p:sp>
         <p:nvSpPr>
-          <p:cNvPr id="131" name="TextBox 130"/>
+          <p:cNvPr id="132" name="TextBox 131"/>
           <p:cNvSpPr txBox="1"/>
           <p:nvPr/>
         </p:nvSpPr>
         <p:spPr>
           <a:xfrm>
-            <a:off x="5120640" y="4206240"/>
-            <a:ext cx="3931920" cy="2011680"/>
+            <a:off x="5120640" y="5349240"/>
+            <a:ext cx="3931920" cy="1463040"/>
           </a:xfrm>
           <a:prstGeom prst="rect">
             <a:avLst/>
@@ -16142,26 +16193,26 @@
               </a:spcAft>
             </a:pPr>
             <a:r>
-              <a:rPr sz="2400" b="0">
+              <a:rPr sz="2200" b="0">
                 <a:solidFill>
                   <a:srgbClr val="0E0F11"/>
                 </a:solidFill>
                 <a:latin typeface="Instrument Sans"/>
               </a:rPr>
-              <a:t>Full testnet test matrix. A first pilot shipment with one producer (none agreed yet).</a:t>
-            </a:r>
-          </a:p>
-        </p:txBody>
-      </p:sp>
-      <p:sp>
-        <p:nvSpPr>
-          <p:cNvPr id="132" name="Oval 131"/>
+              <a:t>One Rio–Miami pilot shipment (none agreed yet). Full test matrix.</a:t>
+            </a:r>
+          </a:p>
+        </p:txBody>
+      </p:sp>
+      <p:sp>
+        <p:nvSpPr>
+          <p:cNvPr id="133" name="Oval 132"/>
           <p:cNvSpPr/>
           <p:nvPr/>
         </p:nvSpPr>
         <p:spPr>
           <a:xfrm>
-            <a:off x="9390887" y="3310128"/>
+            <a:off x="9390887" y="4498848"/>
             <a:ext cx="237744" cy="237744"/>
           </a:xfrm>
           <a:prstGeom prst="ellipse">
@@ -16199,13 +16250,13 @@
       </p:sp>
       <p:sp>
         <p:nvSpPr>
-          <p:cNvPr id="133" name="TextBox 132"/>
+          <p:cNvPr id="134" name="TextBox 133"/>
           <p:cNvSpPr txBox="1"/>
           <p:nvPr/>
         </p:nvSpPr>
         <p:spPr>
           <a:xfrm>
-            <a:off x="9326880" y="3749039"/>
+            <a:off x="9326880" y="4892040"/>
             <a:ext cx="3931920" cy="457200"/>
           </a:xfrm>
           <a:prstGeom prst="rect">
@@ -16241,14 +16292,14 @@
       </p:sp>
       <p:sp>
         <p:nvSpPr>
-          <p:cNvPr id="134" name="TextBox 133"/>
+          <p:cNvPr id="135" name="TextBox 134"/>
           <p:cNvSpPr txBox="1"/>
           <p:nvPr/>
         </p:nvSpPr>
         <p:spPr>
           <a:xfrm>
-            <a:off x="9326880" y="4206240"/>
-            <a:ext cx="3931920" cy="2011680"/>
+            <a:off x="9326880" y="5349240"/>
+            <a:ext cx="3931920" cy="1463040"/>
           </a:xfrm>
           <a:prstGeom prst="rect">
             <a:avLst/>
@@ -16270,26 +16321,26 @@
               </a:spcAft>
             </a:pPr>
             <a:r>
-              <a:rPr sz="2400" b="0">
+              <a:rPr sz="2200" b="0">
                 <a:solidFill>
                   <a:srgbClr val="0E0F11"/>
                 </a:solidFill>
                 <a:latin typeface="Instrument Sans"/>
               </a:rPr>
-              <a:t>SCF Build application (not yet submitted). Security audit before mainnet (not done).</a:t>
-            </a:r>
-          </a:p>
-        </p:txBody>
-      </p:sp>
-      <p:sp>
-        <p:nvSpPr>
-          <p:cNvPr id="135" name="Oval 134"/>
+              <a:t>SCF Build application, then a security audit (neither done). Mainnet.</a:t>
+            </a:r>
+          </a:p>
+        </p:txBody>
+      </p:sp>
+      <p:sp>
+        <p:nvSpPr>
+          <p:cNvPr id="136" name="Oval 135"/>
           <p:cNvSpPr/>
           <p:nvPr/>
         </p:nvSpPr>
         <p:spPr>
           <a:xfrm>
-            <a:off x="13597127" y="3310128"/>
+            <a:off x="13597127" y="4498848"/>
             <a:ext cx="237744" cy="237744"/>
           </a:xfrm>
           <a:prstGeom prst="ellipse">
@@ -16327,13 +16378,13 @@
       </p:sp>
       <p:sp>
         <p:nvSpPr>
-          <p:cNvPr id="136" name="TextBox 135"/>
+          <p:cNvPr id="137" name="TextBox 136"/>
           <p:cNvSpPr txBox="1"/>
           <p:nvPr/>
         </p:nvSpPr>
         <p:spPr>
           <a:xfrm>
-            <a:off x="13533119" y="3749039"/>
+            <a:off x="13533119" y="4892040"/>
             <a:ext cx="3931920" cy="457200"/>
           </a:xfrm>
           <a:prstGeom prst="rect">
@@ -16369,14 +16420,14 @@
       </p:sp>
       <p:sp>
         <p:nvSpPr>
-          <p:cNvPr id="137" name="TextBox 136"/>
+          <p:cNvPr id="138" name="TextBox 137"/>
           <p:cNvSpPr txBox="1"/>
           <p:nvPr/>
         </p:nvSpPr>
         <p:spPr>
           <a:xfrm>
-            <a:off x="13533119" y="4206240"/>
-            <a:ext cx="3931920" cy="2011680"/>
+            <a:off x="13533119" y="5349240"/>
+            <a:ext cx="3931920" cy="1463040"/>
           </a:xfrm>
           <a:prstGeom prst="rect">
             <a:avLst/>
@@ -16398,64 +16449,13 @@
               </a:spcAft>
             </a:pPr>
             <a:r>
-              <a:rPr sz="2400" b="0">
+              <a:rPr sz="2200" b="0">
                 <a:solidFill>
                   <a:srgbClr val="0E0F11"/>
                 </a:solidFill>
                 <a:latin typeface="Instrument Sans"/>
               </a:rPr>
-              <a:t>Mainnet. A USD on-ramp leg (not built).</a:t>
-            </a:r>
-          </a:p>
-        </p:txBody>
-      </p:sp>
-      <p:sp>
-        <p:nvSpPr>
-          <p:cNvPr id="138" name="TextBox 137"/>
-          <p:cNvSpPr txBox="1"/>
-          <p:nvPr/>
-        </p:nvSpPr>
-        <p:spPr>
-          <a:xfrm>
-            <a:off x="914400" y="6263640"/>
-            <a:ext cx="16459200" cy="548640"/>
-          </a:xfrm>
-          <a:prstGeom prst="rect">
-            <a:avLst/>
-          </a:prstGeom>
-          <a:noFill/>
-        </p:spPr>
-        <p:txBody>
-          <a:bodyPr wrap="square" lIns="0" rIns="0" tIns="0" bIns="0" anchor="t">
-            <a:spAutoFit/>
-          </a:bodyPr>
-          <a:lstStyle/>
-          <a:p>
-            <a:pPr algn="l">
-              <a:lnSpc>
-                <a:spcPct val="112000"/>
-              </a:lnSpc>
-              <a:spcAft>
-                <a:spcPts val="600"/>
-              </a:spcAft>
-            </a:pPr>
-            <a:r>
-              <a:rPr sz="2400" b="1">
-                <a:solidFill>
-                  <a:srgbClr val="0E0F11"/>
-                </a:solidFill>
-                <a:latin typeface="Instrument Sans"/>
-              </a:rPr>
-              <a:t>No users or revenue yet. </a:t>
-            </a:r>
-            <a:r>
-              <a:rPr sz="2400" b="0">
-                <a:solidFill>
-                  <a:srgbClr val="4D5560"/>
-                </a:solidFill>
-                <a:latin typeface="Instrument Sans"/>
-              </a:rPr>
-              <a:t>First users come from one pilot shipment in the Rio–Miami corridor.</a:t>
+              <a:t>More corridors on the same standard. A USD leg (not built).</a:t>
             </a:r>
           </a:p>
         </p:txBody>
@@ -16468,12 +16468,12 @@
         </p:nvSpPr>
         <p:spPr>
           <a:xfrm>
-            <a:off x="914400" y="6949440"/>
-            <a:ext cx="16459200" cy="1417320"/>
+            <a:off x="914400" y="7040880"/>
+            <a:ext cx="16459200" cy="1371600"/>
           </a:xfrm>
           <a:prstGeom prst="roundRect">
             <a:avLst>
-              <a:gd name="adj" fmla="val 10322"/>
+              <a:gd name="adj" fmla="val 10666"/>
             </a:avLst>
           </a:prstGeom>
           <a:solidFill>
@@ -16514,8 +16514,8 @@
         </p:nvSpPr>
         <p:spPr>
           <a:xfrm>
-            <a:off x="1325880" y="6995160"/>
-            <a:ext cx="15636240" cy="1325880"/>
+            <a:off x="1325880" y="7068312"/>
+            <a:ext cx="15636240" cy="1316736"/>
           </a:xfrm>
           <a:prstGeom prst="rect">
             <a:avLst/>
@@ -16546,7 +16546,7 @@
               <a:t>Our ask  </a:t>
             </a:r>
             <a:r>
-              <a:rPr sz="2600" b="1">
+              <a:rPr sz="2400" b="1">
                 <a:solidFill>
                   <a:srgbClr val="0E0F11"/>
                 </a:solidFill>
@@ -17012,7 +17012,7 @@
         </p:nvSpPr>
         <p:spPr>
           <a:xfrm>
-            <a:off x="914400" y="3154680"/>
+            <a:off x="914400" y="3108960"/>
             <a:ext cx="9875520" cy="1188720"/>
           </a:xfrm>
           <a:prstGeom prst="rect">
@@ -17073,7 +17073,7 @@
         </p:nvSpPr>
         <p:spPr>
           <a:xfrm>
-            <a:off x="914400" y="4526280"/>
+            <a:off x="914400" y="4251960"/>
             <a:ext cx="9875520" cy="1188720"/>
           </a:xfrm>
           <a:prstGeom prst="rect">
@@ -17134,7 +17134,7 @@
         </p:nvSpPr>
         <p:spPr>
           <a:xfrm>
-            <a:off x="914400" y="5897880"/>
+            <a:off x="914400" y="5394960"/>
             <a:ext cx="9875520" cy="1188720"/>
           </a:xfrm>
           <a:prstGeom prst="rect">
@@ -17195,7 +17195,7 @@
         </p:nvSpPr>
         <p:spPr>
           <a:xfrm>
-            <a:off x="914400" y="6995160"/>
+            <a:off x="914400" y="6537960"/>
             <a:ext cx="9692640" cy="457200"/>
           </a:xfrm>
           <a:prstGeom prst="rect">
@@ -17237,12 +17237,12 @@
         </p:nvSpPr>
         <p:spPr>
           <a:xfrm>
-            <a:off x="11338560" y="3200400"/>
-            <a:ext cx="6035040" cy="4114800"/>
+            <a:off x="11338560" y="3108960"/>
+            <a:ext cx="6035040" cy="3657600"/>
           </a:xfrm>
           <a:prstGeom prst="roundRect">
             <a:avLst>
-              <a:gd name="adj" fmla="val 3555"/>
+              <a:gd name="adj" fmla="val 4000"/>
             </a:avLst>
           </a:prstGeom>
           <a:noFill/>
@@ -17284,8 +17284,8 @@
         </p:nvSpPr>
         <p:spPr>
           <a:xfrm>
-            <a:off x="11338560" y="3200400"/>
-            <a:ext cx="6035040" cy="4114800"/>
+            <a:off x="11338560" y="3108960"/>
+            <a:ext cx="6035040" cy="3657600"/>
           </a:xfrm>
           <a:prstGeom prst="rect">
             <a:avLst/>
@@ -17320,13 +17320,55 @@
       </p:sp>
       <p:sp>
         <p:nvSpPr>
-          <p:cNvPr id="131" name="Rectangle 130"/>
+          <p:cNvPr id="131" name="TextBox 130"/>
+          <p:cNvSpPr txBox="1"/>
+          <p:nvPr/>
+        </p:nvSpPr>
+        <p:spPr>
+          <a:xfrm>
+            <a:off x="914400" y="6995160"/>
+            <a:ext cx="16459200" cy="548640"/>
+          </a:xfrm>
+          <a:prstGeom prst="rect">
+            <a:avLst/>
+          </a:prstGeom>
+          <a:noFill/>
+        </p:spPr>
+        <p:txBody>
+          <a:bodyPr wrap="square" lIns="0" rIns="0" tIns="0" bIns="0" anchor="t">
+            <a:spAutoFit/>
+          </a:bodyPr>
+          <a:lstStyle/>
+          <a:p>
+            <a:pPr algn="l">
+              <a:lnSpc>
+                <a:spcPct val="112000"/>
+              </a:lnSpc>
+              <a:spcAft>
+                <a:spcPts val="600"/>
+              </a:spcAft>
+            </a:pPr>
+            <a:r>
+              <a:rPr sz="2800" b="1">
+                <a:solidFill>
+                  <a:srgbClr val="556F00"/>
+                </a:solidFill>
+                <a:latin typeface="Inter Tight"/>
+              </a:rPr>
+              <a:t>Rio–Miami first. Then one custody standard for every corridor.</a:t>
+            </a:r>
+          </a:p>
+        </p:txBody>
+      </p:sp>
+      <p:sp>
+        <p:nvSpPr>
+          <p:cNvPr id="132" name="Rectangle 131"/>
           <p:cNvSpPr/>
           <p:nvPr/>
         </p:nvSpPr>
         <p:spPr>
           <a:xfrm>
-            <a:off x="914400" y="7580376"/>
+            <a:off x="914400" y="7626096"/>
             <a:ext cx="16459200" cy="18288"/>
           </a:xfrm>
           <a:prstGeom prst="rect">
@@ -17364,7 +17406,7 @@
       </p:sp>
       <p:sp>
         <p:nvSpPr>
-          <p:cNvPr id="132" name="TextBox 131"/>
+          <p:cNvPr id="133" name="TextBox 132"/>
           <p:cNvSpPr txBox="1"/>
           <p:nvPr/>
         </p:nvSpPr>
@@ -18250,7 +18292,7 @@
                 </a:solidFill>
                 <a:latin typeface="Instrument Sans"/>
               </a:rPr>
-              <a:t>A dual-signed custody record on Stellar  ·  First corridor: Rio–Miami</a:t>
+              <a:t>Toward a SWIFT-like custody standard on Stellar  ·  Pilot corridor: Rio–Miami</a:t>
             </a:r>
           </a:p>
         </p:txBody>
@@ -19732,7 +19774,7 @@
                 </a:solidFill>
                 <a:latin typeface="Instrument Sans"/>
               </a:rPr>
-              <a:t>Handovers are mostly paper, or sit inside one operator's own system.</a:t>
+              <a:t>Handovers are mostly paper, or sit inside each operator's own system: no shared record crosses borders.</a:t>
             </a:r>
           </a:p>
         </p:txBody>

--- a/projects/hackmeridian-rail/deck/radox-custody-rail.pptx
+++ b/projects/hackmeridian-rail/deck/radox-custody-rail.pptx
@@ -15884,7 +15884,7 @@
               </a:spcAft>
             </a:pPr>
             <a:r>
-              <a:rPr sz="2800" b="1">
+              <a:rPr sz="2600" b="1">
                 <a:solidFill>
                   <a:srgbClr val="0E0F11"/>
                 </a:solidFill>
@@ -15893,7 +15893,7 @@
               <a:t>Rio–Miami is the first corridor and the pilot. </a:t>
             </a:r>
             <a:r>
-              <a:rPr sz="2800" b="0">
+              <a:rPr sz="2600" b="0">
                 <a:solidFill>
                   <a:srgbClr val="0E0F11"/>
                 </a:solidFill>
@@ -15912,7 +15912,7 @@
         </p:nvSpPr>
         <p:spPr>
           <a:xfrm>
-            <a:off x="1097280" y="4604004"/>
+            <a:off x="1097280" y="4832604"/>
             <a:ext cx="12618720" cy="27432"/>
           </a:xfrm>
           <a:prstGeom prst="rect">
@@ -15956,7 +15956,7 @@
         </p:nvSpPr>
         <p:spPr>
           <a:xfrm>
-            <a:off x="941832" y="4462272"/>
+            <a:off x="941832" y="4690872"/>
             <a:ext cx="310896" cy="310896"/>
           </a:xfrm>
           <a:prstGeom prst="ellipse">
@@ -16000,7 +16000,7 @@
         </p:nvSpPr>
         <p:spPr>
           <a:xfrm>
-            <a:off x="914400" y="4892040"/>
+            <a:off x="914400" y="5074920"/>
             <a:ext cx="3931920" cy="457200"/>
           </a:xfrm>
           <a:prstGeom prst="rect">
@@ -16042,8 +16042,8 @@
         </p:nvSpPr>
         <p:spPr>
           <a:xfrm>
-            <a:off x="914400" y="5349240"/>
-            <a:ext cx="3931920" cy="1463040"/>
+            <a:off x="914400" y="5486400"/>
+            <a:ext cx="3931920" cy="1371600"/>
           </a:xfrm>
           <a:prstGeom prst="rect">
             <a:avLst/>
@@ -16084,7 +16084,7 @@
         </p:nvSpPr>
         <p:spPr>
           <a:xfrm>
-            <a:off x="5184648" y="4498848"/>
+            <a:off x="5184648" y="4727448"/>
             <a:ext cx="237744" cy="237744"/>
           </a:xfrm>
           <a:prstGeom prst="ellipse">
@@ -16128,7 +16128,7 @@
         </p:nvSpPr>
         <p:spPr>
           <a:xfrm>
-            <a:off x="5120640" y="4892040"/>
+            <a:off x="5120640" y="5074920"/>
             <a:ext cx="3931920" cy="457200"/>
           </a:xfrm>
           <a:prstGeom prst="rect">
@@ -16170,8 +16170,8 @@
         </p:nvSpPr>
         <p:spPr>
           <a:xfrm>
-            <a:off x="5120640" y="5349240"/>
-            <a:ext cx="3931920" cy="1463040"/>
+            <a:off x="5120640" y="5486400"/>
+            <a:ext cx="3931920" cy="1371600"/>
           </a:xfrm>
           <a:prstGeom prst="rect">
             <a:avLst/>
@@ -16212,7 +16212,7 @@
         </p:nvSpPr>
         <p:spPr>
           <a:xfrm>
-            <a:off x="9390887" y="4498848"/>
+            <a:off x="9390887" y="4727448"/>
             <a:ext cx="237744" cy="237744"/>
           </a:xfrm>
           <a:prstGeom prst="ellipse">
@@ -16256,7 +16256,7 @@
         </p:nvSpPr>
         <p:spPr>
           <a:xfrm>
-            <a:off x="9326880" y="4892040"/>
+            <a:off x="9326880" y="5074920"/>
             <a:ext cx="3931920" cy="457200"/>
           </a:xfrm>
           <a:prstGeom prst="rect">
@@ -16298,8 +16298,8 @@
         </p:nvSpPr>
         <p:spPr>
           <a:xfrm>
-            <a:off x="9326880" y="5349240"/>
-            <a:ext cx="3931920" cy="1463040"/>
+            <a:off x="9326880" y="5486400"/>
+            <a:ext cx="3931920" cy="1371600"/>
           </a:xfrm>
           <a:prstGeom prst="rect">
             <a:avLst/>
@@ -16340,7 +16340,7 @@
         </p:nvSpPr>
         <p:spPr>
           <a:xfrm>
-            <a:off x="13597127" y="4498848"/>
+            <a:off x="13597127" y="4727448"/>
             <a:ext cx="237744" cy="237744"/>
           </a:xfrm>
           <a:prstGeom prst="ellipse">
@@ -16384,7 +16384,7 @@
         </p:nvSpPr>
         <p:spPr>
           <a:xfrm>
-            <a:off x="13533119" y="4892040"/>
+            <a:off x="13533119" y="5074920"/>
             <a:ext cx="3931920" cy="457200"/>
           </a:xfrm>
           <a:prstGeom prst="rect">
@@ -16426,8 +16426,8 @@
         </p:nvSpPr>
         <p:spPr>
           <a:xfrm>
-            <a:off x="13533119" y="5349240"/>
-            <a:ext cx="3931920" cy="1463040"/>
+            <a:off x="13533119" y="5486400"/>
+            <a:ext cx="3931920" cy="1371600"/>
           </a:xfrm>
           <a:prstGeom prst="rect">
             <a:avLst/>
@@ -16468,12 +16468,12 @@
         </p:nvSpPr>
         <p:spPr>
           <a:xfrm>
-            <a:off x="914400" y="7040880"/>
-            <a:ext cx="16459200" cy="1371600"/>
+            <a:off x="914400" y="7086600"/>
+            <a:ext cx="16459200" cy="1325880"/>
           </a:xfrm>
           <a:prstGeom prst="roundRect">
             <a:avLst>
-              <a:gd name="adj" fmla="val 10666"/>
+              <a:gd name="adj" fmla="val 11034"/>
             </a:avLst>
           </a:prstGeom>
           <a:solidFill>
@@ -16514,8 +16514,8 @@
         </p:nvSpPr>
         <p:spPr>
           <a:xfrm>
-            <a:off x="1325880" y="7068312"/>
-            <a:ext cx="15636240" cy="1316736"/>
+            <a:off x="1325880" y="7086600"/>
+            <a:ext cx="15636240" cy="1325880"/>
           </a:xfrm>
           <a:prstGeom prst="rect">
             <a:avLst/>

--- a/projects/hackmeridian-rail/deck/radox-custody-rail.pptx
+++ b/projects/hackmeridian-rail/deck/radox-custody-rail.pptx
@@ -13307,7 +13307,7 @@
                 </a:solidFill>
                 <a:latin typeface="Instrument Sans"/>
               </a:rPr>
-              <a:t>Kutana and Trustless Work release escrow on trade milestones. We found none that records a custody handover signed by two custodians, and no SEP for it.</a:t>
+              <a:t>Kutana and Trustless Work release escrow on trade milestones; Pipeline finances commodity trade. We found none that records a custody handover signed by two custodians, and no SEP for it.</a:t>
             </a:r>
           </a:p>
           <a:p>
@@ -14987,8 +14987,8 @@
         </p:nvSpPr>
         <p:spPr>
           <a:xfrm>
-            <a:off x="914400" y="3931920"/>
-            <a:ext cx="7955279" cy="3474720"/>
+            <a:off x="914400" y="3886200"/>
+            <a:ext cx="7955279" cy="3383280"/>
           </a:xfrm>
           <a:prstGeom prst="rect">
             <a:avLst/>
@@ -15006,11 +15006,11 @@
                 <a:spcPct val="112000"/>
               </a:lnSpc>
               <a:spcAft>
-                <a:spcPts val="1400"/>
+                <a:spcPts val="800"/>
               </a:spcAft>
             </a:pPr>
             <a:r>
-              <a:rPr sz="2400" b="0">
+              <a:rPr sz="2100" b="0">
                 <a:solidFill>
                   <a:srgbClr val="4D5560"/>
                 </a:solidFill>
@@ -15019,13 +15019,13 @@
               <a:t>— </a:t>
             </a:r>
             <a:r>
-              <a:rPr sz="2400" b="0">
+              <a:rPr sz="2100" b="0">
                 <a:solidFill>
                   <a:srgbClr val="0E0F11"/>
                 </a:solidFill>
                 <a:latin typeface="Instrument Sans"/>
               </a:rPr>
-              <a:t>Radox platform and 3 Soroban contracts on Stellar mainnet (public repo, created 2026-08-19)</a:t>
+              <a:t>Radox platform (closed backend); its 3 Soroban contracts are on Stellar mainnet, public since 2026-08-19</a:t>
             </a:r>
           </a:p>
           <a:p>
@@ -15034,11 +15034,11 @@
                 <a:spcPct val="112000"/>
               </a:lnSpc>
               <a:spcAft>
-                <a:spcPts val="1400"/>
+                <a:spcPts val="800"/>
               </a:spcAft>
             </a:pPr>
             <a:r>
-              <a:rPr sz="2400" b="0">
+              <a:rPr sz="2100" b="0">
                 <a:solidFill>
                   <a:srgbClr val="4D5560"/>
                 </a:solidFill>
@@ -15047,7 +15047,7 @@
               <a:t>— </a:t>
             </a:r>
             <a:r>
-              <a:rPr sz="2400" b="0">
+              <a:rPr sz="2100" b="0">
                 <a:solidFill>
                   <a:srgbClr val="0E0F11"/>
                 </a:solidFill>
@@ -15062,11 +15062,11 @@
                 <a:spcPct val="112000"/>
               </a:lnSpc>
               <a:spcAft>
-                <a:spcPts val="1400"/>
+                <a:spcPts val="800"/>
               </a:spcAft>
             </a:pPr>
             <a:r>
-              <a:rPr sz="2400" b="0">
+              <a:rPr sz="2100" b="0">
                 <a:solidFill>
                   <a:srgbClr val="4D5560"/>
                 </a:solidFill>
@@ -15075,13 +15075,41 @@
               <a:t>— </a:t>
             </a:r>
             <a:r>
-              <a:rPr sz="2400" b="0">
+              <a:rPr sz="2100" b="0">
                 <a:solidFill>
                   <a:srgbClr val="0E0F11"/>
                 </a:solidFill>
                 <a:latin typeface="Instrument Sans"/>
               </a:rPr>
-              <a:t>Planning files, 24–25 Oct</a:t>
+              <a:t>Architecture notes (20 Oct), planning files (24–25 Oct), the explainer video, our agent tooling (from 22 Oct)</a:t>
+            </a:r>
+          </a:p>
+          <a:p>
+            <a:pPr algn="l">
+              <a:lnSpc>
+                <a:spcPct val="112000"/>
+              </a:lnSpc>
+              <a:spcAft>
+                <a:spcPts val="800"/>
+              </a:spcAft>
+            </a:pPr>
+            <a:r>
+              <a:rPr sz="2100" b="0">
+                <a:solidFill>
+                  <a:srgbClr val="4D5560"/>
+                </a:solidFill>
+                <a:latin typeface="Instrument Sans"/>
+              </a:rPr>
+              <a:t>— </a:t>
+            </a:r>
+            <a:r>
+              <a:rPr sz="2100" b="0">
+                <a:solidFill>
+                  <a:srgbClr val="0E0F11"/>
+                </a:solidFill>
+                <a:latin typeface="Instrument Sans"/>
+              </a:rPr>
+              <a:t>No contract code before then: first repo commit 25 Oct 09:00 UTC</a:t>
             </a:r>
           </a:p>
         </p:txBody>
@@ -15180,8 +15208,8 @@
         </p:nvSpPr>
         <p:spPr>
           <a:xfrm>
-            <a:off x="9418320" y="3931920"/>
-            <a:ext cx="7955279" cy="3474720"/>
+            <a:off x="9418320" y="3886200"/>
+            <a:ext cx="7955279" cy="3383280"/>
           </a:xfrm>
           <a:prstGeom prst="rect">
             <a:avLst/>
@@ -15199,11 +15227,11 @@
                 <a:spcPct val="112000"/>
               </a:lnSpc>
               <a:spcAft>
-                <a:spcPts val="1400"/>
+                <a:spcPts val="800"/>
               </a:spcAft>
             </a:pPr>
             <a:r>
-              <a:rPr sz="2400" b="0">
+              <a:rPr sz="2100" b="0">
                 <a:solidFill>
                   <a:srgbClr val="556F00"/>
                 </a:solidFill>
@@ -15212,7 +15240,7 @@
               <a:t>— </a:t>
             </a:r>
             <a:r>
-              <a:rPr sz="2400" b="0">
+              <a:rPr sz="2100" b="0">
                 <a:solidFill>
                   <a:srgbClr val="0E0F11"/>
                 </a:solidFill>
@@ -15227,11 +15255,11 @@
                 <a:spcPct val="112000"/>
               </a:lnSpc>
               <a:spcAft>
-                <a:spcPts val="1400"/>
+                <a:spcPts val="800"/>
               </a:spcAft>
             </a:pPr>
             <a:r>
-              <a:rPr sz="2400" b="0">
+              <a:rPr sz="2100" b="0">
                 <a:solidFill>
                   <a:srgbClr val="556F00"/>
                 </a:solidFill>
@@ -15240,7 +15268,7 @@
               <a:t>— </a:t>
             </a:r>
             <a:r>
-              <a:rPr sz="2400" b="0">
+              <a:rPr sz="2100" b="0">
                 <a:solidFill>
                   <a:srgbClr val="0E0F11"/>
                 </a:solidFill>
@@ -15255,11 +15283,11 @@
                 <a:spcPct val="112000"/>
               </a:lnSpc>
               <a:spcAft>
-                <a:spcPts val="1400"/>
+                <a:spcPts val="800"/>
               </a:spcAft>
             </a:pPr>
             <a:r>
-              <a:rPr sz="2400" b="0">
+              <a:rPr sz="2100" b="0">
                 <a:solidFill>
                   <a:srgbClr val="556F00"/>
                 </a:solidFill>
@@ -15268,13 +15296,13 @@
               <a:t>— </a:t>
             </a:r>
             <a:r>
-              <a:rPr sz="2400" b="0">
+              <a:rPr sz="2100" b="0">
                 <a:solidFill>
                   <a:srgbClr val="0E0F11"/>
                 </a:solidFill>
                 <a:latin typeface="Instrument Sans"/>
               </a:rPr>
-              <a:t>verify-head script and the public shipment page</a:t>
+              <a:t>verify-head script, the public shipment page, this deck</a:t>
             </a:r>
           </a:p>
           <a:p>
@@ -15283,11 +15311,11 @@
                 <a:spcPct val="112000"/>
               </a:lnSpc>
               <a:spcAft>
-                <a:spcPts val="1400"/>
+                <a:spcPts val="800"/>
               </a:spcAft>
             </a:pPr>
             <a:r>
-              <a:rPr sz="2400" b="0">
+              <a:rPr sz="2100" b="0">
                 <a:solidFill>
                   <a:srgbClr val="556F00"/>
                 </a:solidFill>
@@ -15296,7 +15324,7 @@
               <a:t>— </a:t>
             </a:r>
             <a:r>
-              <a:rPr sz="2400" b="0">
+              <a:rPr sz="2100" b="0">
                 <a:solidFill>
                   <a:srgbClr val="0E0F11"/>
                 </a:solidFill>
@@ -15401,7 +15429,7 @@
                 </a:solidFill>
                 <a:latin typeface="Instrument Sans"/>
               </a:rPr>
-              <a:t>Code, tests and scripts were written with AI coding agents (Claude Code); the team decided scope and what ships. Per-file record in AI_USAGE.md. The video narration is an AI voice generated from Pedro's voice.</a:t>
+              <a:t>Code, tests, scripts, the shipment page, docs and this deck were made with AI coding agents (Claude Code); the team decided scope and what ships. Per-file record in AI_USAGE.md. The video narration is an AI voice generated from Pedro's voice.</a:t>
             </a:r>
           </a:p>
         </p:txBody>
@@ -17496,7 +17524,7 @@
                 </a:solidFill>
                 <a:latin typeface="Instrument Sans"/>
               </a:rPr>
-              <a:t>Code written with AI coding agents (Claude Code). Narration: an AI voice from Pedro's voice. No AI-generated images in this deck.</a:t>
+              <a:t>Code, page, docs and deck made with AI coding agents (Claude Code). Narration: an AI voice from Pedro's voice. No AI-generated images in this deck.</a:t>
             </a:r>
           </a:p>
         </p:txBody>
@@ -19732,7 +19760,7 @@
                 </a:solidFill>
                 <a:latin typeface="Instrument Sans"/>
               </a:rPr>
-              <a:t>Buyer</a:t>
+              <a:t>Recipient</a:t>
             </a:r>
           </a:p>
         </p:txBody>

--- a/projects/hackmeridian-rail/deck/radox-custody-rail.pptx
+++ b/projects/hackmeridian-rail/deck/radox-custody-rail.pptx
@@ -13307,7 +13307,7 @@
                 </a:solidFill>
                 <a:latin typeface="Instrument Sans"/>
               </a:rPr>
-              <a:t>Kutana and Trustless Work release escrow on trade milestones; Pipeline finances commodity trade. We found none that records a custody handover signed by two custodians, and no SEP for it.</a:t>
+              <a:t>Kutana and Trustless Work release escrow on trade milestones; Pipeline finances commodity trade. We found none that records a custody handover signed by two custodians, and no SEP.</a:t>
             </a:r>
           </a:p>
           <a:p>

--- a/projects/hackmeridian-rail/deck/radox-custody-rail.pptx
+++ b/projects/hackmeridian-rail/deck/radox-custody-rail.pptx
@@ -14403,7 +14403,7 @@
                 </a:solidFill>
                 <a:latin typeface="Instrument Sans"/>
               </a:rPr>
-              <a:t>SWIFT-style: the record format is public; Radox runs the rail and the API.</a:t>
+              <a:t>SWIFT-style: the record format is public; Radox builds the rail and the API.</a:t>
             </a:r>
           </a:p>
           <a:p>
@@ -15918,7 +15918,7 @@
                 </a:solidFill>
                 <a:latin typeface="Instrument Sans"/>
               </a:rPr>
-              <a:t>Rio–Miami is the first corridor and the pilot. </a:t>
+              <a:t>Rio–Miami is our pilot corridor. </a:t>
             </a:r>
             <a:r>
               <a:rPr sz="2600" b="0">
@@ -15927,7 +15927,7 @@
                 </a:solidFill>
                 <a:latin typeface="Instrument Sans"/>
               </a:rPr>
-              <a:t>The goal is an open, SWIFT-like standard for tokenized goods moving on rails anywhere, built to integrate with the systems of chambers of commerce, ports and airports.</a:t>
+              <a:t>The goal is an open, SWIFT-like custody standard on Stellar for tokenized goods in transit worldwide, to integrate with the systems of chambers of commerce, ports and airports.</a:t>
             </a:r>
           </a:p>
         </p:txBody>
@@ -16099,7 +16099,7 @@
                 </a:solidFill>
                 <a:latin typeface="Instrument Sans"/>
               </a:rPr>
-              <a:t>Mechanism proven on testnet. No users or revenue yet.</a:t>
+              <a:t>Mechanism proven on testnet. No standard, users or revenue yet.</a:t>
             </a:r>
           </a:p>
         </p:txBody>
@@ -16355,7 +16355,7 @@
                 </a:solidFill>
                 <a:latin typeface="Instrument Sans"/>
               </a:rPr>
-              <a:t>SCF Build application, then a security audit (neither done). Mainnet.</a:t>
+              <a:t>SCF Build, then a security audit (neither done). Mainnet; USD leg (not built).</a:t>
             </a:r>
           </a:p>
         </p:txBody>
@@ -16483,7 +16483,7 @@
                 </a:solidFill>
                 <a:latin typeface="Instrument Sans"/>
               </a:rPr>
-              <a:t>More corridors on the same standard. A USD leg (not built).</a:t>
+              <a:t>More corridors, one standard. Port, airport, chamber links (none started).</a:t>
             </a:r>
           </a:p>
         </p:txBody>
@@ -16580,7 +16580,7 @@
                 </a:solidFill>
                 <a:latin typeface="Instrument Sans"/>
               </a:rPr>
-              <a:t>Introductions to one financial institution and one logistics operator for a first pilot shipment, and a Stellar engineer's review of the design.</a:t>
+              <a:t>Introductions to one financial institution and one port, airport or logistics operator for a first pilot shipment, and a Stellar engineer's review of the design.</a:t>
             </a:r>
           </a:p>
         </p:txBody>
@@ -17383,7 +17383,7 @@
                 </a:solidFill>
                 <a:latin typeface="Inter Tight"/>
               </a:rPr>
-              <a:t>Rio–Miami first. Then one custody standard for every corridor.</a:t>
+              <a:t>Rio–Miami first. Our goal: one custody standard for every corridor.</a:t>
             </a:r>
           </a:p>
         </p:txBody>
@@ -19802,7 +19802,7 @@
                 </a:solidFill>
                 <a:latin typeface="Instrument Sans"/>
               </a:rPr>
-              <a:t>Handovers are mostly paper, or sit inside each operator's own system: no shared record crosses borders.</a:t>
+              <a:t>Handovers are mostly paper, or sit inside each operator's own system: rarely one shared record across borders.</a:t>
             </a:r>
           </a:p>
         </p:txBody>

--- a/projects/hackmeridian-rail/deck/radox-custody-rail.pptx
+++ b/projects/hackmeridian-rail/deck/radox-custody-rail.pptx
@@ -13289,7 +13289,7 @@
                 </a:solidFill>
                 <a:latin typeface="Instrument Sans"/>
               </a:rPr>
-              <a:t>Nearest neighbours we found </a:t>
+              <a:t>Nearest neighbours we found on Stellar </a:t>
             </a:r>
             <a:r>
               <a:rPr sz="2100" b="0">
@@ -14252,7 +14252,7 @@
                 </a:solidFill>
                 <a:latin typeface="JetBrains Mono"/>
               </a:rPr>
-              <a:t>OPERATOR</a:t>
+              <a:t>CLIENT</a:t>
             </a:r>
           </a:p>
         </p:txBody>
@@ -14294,7 +14294,7 @@
                 </a:solidFill>
                 <a:latin typeface="Instrument Sans"/>
               </a:rPr>
-              <a:t>A financial institution, the client, would run the rail for its trade flows.</a:t>
+              <a:t>A financial institution pays to use the rail for its trade flows.</a:t>
             </a:r>
           </a:p>
         </p:txBody>
@@ -14384,7 +14384,7 @@
                 </a:solidFill>
                 <a:latin typeface="JetBrains Mono"/>
               </a:rPr>
-              <a:t>MODEL · THE OPERATOR PAYS</a:t>
+              <a:t>MODEL · THE CLIENT PAYS</a:t>
             </a:r>
           </a:p>
           <a:p>
@@ -14403,7 +14403,7 @@
                 </a:solidFill>
                 <a:latin typeface="Instrument Sans"/>
               </a:rPr>
-              <a:t>SWIFT-style: the record format is public; Radox builds the rail and the API.</a:t>
+              <a:t>SWIFT-style: the record format is public; Radox operates the rail and the API.</a:t>
             </a:r>
           </a:p>
           <a:p>
@@ -14422,7 +14422,7 @@
                 </a:solidFill>
                 <a:latin typeface="Instrument Sans"/>
               </a:rPr>
-              <a:t>Revenue: a fee from the financial institution that operates the rail. Not priced yet.</a:t>
+              <a:t>Revenue: a fee from the financial institution that uses the rail. Not priced yet.</a:t>
             </a:r>
           </a:p>
           <a:p>
@@ -15927,7 +15927,7 @@
                 </a:solidFill>
                 <a:latin typeface="Instrument Sans"/>
               </a:rPr>
-              <a:t>The goal is an open, SWIFT-like custody standard on Stellar for tokenized goods in transit worldwide, to integrate with the systems of chambers of commerce, ports and airports.</a:t>
+              <a:t>The goal is a public, SWIFT-like custody standard on Stellar for tokenized goods in transit worldwide, to integrate with the systems of chambers of commerce, ports and airports.</a:t>
             </a:r>
           </a:p>
         </p:txBody>
@@ -16355,7 +16355,7 @@
                 </a:solidFill>
                 <a:latin typeface="Instrument Sans"/>
               </a:rPr>
-              <a:t>SCF Build, then a security audit (neither done). Mainnet; USD leg (not built).</a:t>
+              <a:t>SCF Build, then a security audit (neither done). Mainnet.</a:t>
             </a:r>
           </a:p>
         </p:txBody>
@@ -16483,7 +16483,7 @@
                 </a:solidFill>
                 <a:latin typeface="Instrument Sans"/>
               </a:rPr>
-              <a:t>More corridors, one standard. Port, airport, chamber links (none started).</a:t>
+              <a:t>More corridors; port, airport, chamber links (none confirmed); USD leg (not built).</a:t>
             </a:r>
           </a:p>
         </p:txBody>

--- a/projects/hackmeridian-rail/deck/radox-custody-rail.pptx
+++ b/projects/hackmeridian-rail/deck/radox-custody-rail.pptx
@@ -13298,7 +13298,7 @@
                 </a:solidFill>
                 <a:latin typeface="Instrument Sans"/>
               </a:rPr>
-              <a:t>(LumenLoop, SCF, Scout; searched 24–25 Oct 2026): </a:t>
+              <a:t>(LumenLoop, SCF, Scout, 24–25 Oct): </a:t>
             </a:r>
             <a:r>
               <a:rPr sz="2100" b="0">
@@ -16496,12 +16496,12 @@
         </p:nvSpPr>
         <p:spPr>
           <a:xfrm>
-            <a:off x="914400" y="7086600"/>
-            <a:ext cx="16459200" cy="1325880"/>
+            <a:off x="914400" y="7223760"/>
+            <a:ext cx="16459200" cy="1234440"/>
           </a:xfrm>
           <a:prstGeom prst="roundRect">
             <a:avLst>
-              <a:gd name="adj" fmla="val 11034"/>
+              <a:gd name="adj" fmla="val 11851"/>
             </a:avLst>
           </a:prstGeom>
           <a:solidFill>
@@ -16542,8 +16542,8 @@
         </p:nvSpPr>
         <p:spPr>
           <a:xfrm>
-            <a:off x="1325880" y="7086600"/>
-            <a:ext cx="15636240" cy="1325880"/>
+            <a:off x="1325880" y="7223760"/>
+            <a:ext cx="15636240" cy="1234440"/>
           </a:xfrm>
           <a:prstGeom prst="rect">
             <a:avLst/>

--- a/projects/hackmeridian-rail/deck/radox-custody-rail.pptx
+++ b/projects/hackmeridian-rail/deck/radox-custody-rail.pptx
@@ -13782,27 +13782,428 @@
                 </a:solidFill>
                 <a:latin typeface="Inter Tight"/>
               </a:rPr>
-              <a:t>Custodians sign. Financiers check.</a:t>
-            </a:r>
-          </a:p>
-        </p:txBody>
-      </p:sp>
-      <p:sp>
-        <p:nvSpPr>
-          <p:cNvPr id="125" name="Rectangle 124"/>
+              <a:t>Integrate once, reach every party</a:t>
+            </a:r>
+          </a:p>
+        </p:txBody>
+      </p:sp>
+      <p:sp>
+        <p:nvSpPr>
+          <p:cNvPr id="125" name="TextBox 124"/>
+          <p:cNvSpPr txBox="1"/>
+          <p:nvPr/>
+        </p:nvSpPr>
+        <p:spPr>
+          <a:xfrm>
+            <a:off x="914400" y="3063240"/>
+            <a:ext cx="16459200" cy="1097280"/>
+          </a:xfrm>
+          <a:prstGeom prst="rect">
+            <a:avLst/>
+          </a:prstGeom>
+          <a:noFill/>
+        </p:spPr>
+        <p:txBody>
+          <a:bodyPr wrap="square" lIns="0" rIns="0" tIns="0" bIns="0" anchor="t">
+            <a:spAutoFit/>
+          </a:bodyPr>
+          <a:lstStyle/>
+          <a:p>
+            <a:pPr algn="l">
+              <a:lnSpc>
+                <a:spcPct val="112000"/>
+              </a:lnSpc>
+              <a:spcAft>
+                <a:spcPts val="600"/>
+              </a:spcAft>
+            </a:pPr>
+            <a:r>
+              <a:rPr sz="2400" b="1">
+                <a:solidFill>
+                  <a:srgbClr val="0E0F11"/>
+                </a:solidFill>
+                <a:latin typeface="Instrument Sans"/>
+              </a:rPr>
+              <a:t>Today each pair of parties builds its own link. </a:t>
+            </a:r>
+            <a:r>
+              <a:rPr sz="2400" b="0">
+                <a:solidFill>
+                  <a:srgbClr val="0E0F11"/>
+                </a:solidFill>
+                <a:latin typeface="Instrument Sans"/>
+              </a:rPr>
+              <a:t>With one public custody standard, a port, airport, carrier, chamber or financier would integrate once and reach every other party: adopt without a custom project.</a:t>
+            </a:r>
+          </a:p>
+        </p:txBody>
+      </p:sp>
+      <p:cxnSp>
+        <p:nvCxnSpPr>
+          <p:cNvPr id="126" name="Connector 125"/>
+          <p:cNvCxnSpPr/>
+          <p:nvPr/>
+        </p:nvCxnSpPr>
+        <p:spPr>
+          <a:xfrm>
+            <a:off x="2331720" y="4572000"/>
+            <a:ext cx="826163" cy="600243"/>
+          </a:xfrm>
+          <a:prstGeom prst="line">
+            <a:avLst/>
+          </a:prstGeom>
+          <a:ln w="15875">
+            <a:solidFill>
+              <a:srgbClr val="4D5560"/>
+            </a:solidFill>
+          </a:ln>
+        </p:spPr>
+        <p:style>
+          <a:lnRef idx="2">
+            <a:schemeClr val="accent1"/>
+          </a:lnRef>
+          <a:fillRef idx="0">
+            <a:schemeClr val="accent1"/>
+          </a:fillRef>
+          <a:effectRef idx="1">
+            <a:schemeClr val="accent1"/>
+          </a:effectRef>
+          <a:fontRef idx="minor">
+            <a:schemeClr val="tx1"/>
+          </a:fontRef>
+        </p:style>
+      </p:cxnSp>
+      <p:cxnSp>
+        <p:nvCxnSpPr>
+          <p:cNvPr id="127" name="Connector 126"/>
+          <p:cNvCxnSpPr/>
+          <p:nvPr/>
+        </p:nvCxnSpPr>
+        <p:spPr>
+          <a:xfrm>
+            <a:off x="2331720" y="4572000"/>
+            <a:ext cx="510597" cy="1571456"/>
+          </a:xfrm>
+          <a:prstGeom prst="line">
+            <a:avLst/>
+          </a:prstGeom>
+          <a:ln w="15875">
+            <a:solidFill>
+              <a:srgbClr val="4D5560"/>
+            </a:solidFill>
+          </a:ln>
+        </p:spPr>
+        <p:style>
+          <a:lnRef idx="2">
+            <a:schemeClr val="accent1"/>
+          </a:lnRef>
+          <a:fillRef idx="0">
+            <a:schemeClr val="accent1"/>
+          </a:fillRef>
+          <a:effectRef idx="1">
+            <a:schemeClr val="accent1"/>
+          </a:effectRef>
+          <a:fontRef idx="minor">
+            <a:schemeClr val="tx1"/>
+          </a:fontRef>
+        </p:style>
+      </p:cxnSp>
+      <p:cxnSp>
+        <p:nvCxnSpPr>
+          <p:cNvPr id="128" name="Connector 127"/>
+          <p:cNvCxnSpPr/>
+          <p:nvPr/>
+        </p:nvCxnSpPr>
+        <p:spPr>
+          <a:xfrm flipH="1">
+            <a:off x="1821122" y="4572000"/>
+            <a:ext cx="510598" cy="1571456"/>
+          </a:xfrm>
+          <a:prstGeom prst="line">
+            <a:avLst/>
+          </a:prstGeom>
+          <a:ln w="15875">
+            <a:solidFill>
+              <a:srgbClr val="4D5560"/>
+            </a:solidFill>
+          </a:ln>
+        </p:spPr>
+        <p:style>
+          <a:lnRef idx="2">
+            <a:schemeClr val="accent1"/>
+          </a:lnRef>
+          <a:fillRef idx="0">
+            <a:schemeClr val="accent1"/>
+          </a:fillRef>
+          <a:effectRef idx="1">
+            <a:schemeClr val="accent1"/>
+          </a:effectRef>
+          <a:fontRef idx="minor">
+            <a:schemeClr val="tx1"/>
+          </a:fontRef>
+        </p:style>
+      </p:cxnSp>
+      <p:cxnSp>
+        <p:nvCxnSpPr>
+          <p:cNvPr id="129" name="Connector 128"/>
+          <p:cNvCxnSpPr/>
+          <p:nvPr/>
+        </p:nvCxnSpPr>
+        <p:spPr>
+          <a:xfrm flipH="1">
+            <a:off x="1505556" y="4572000"/>
+            <a:ext cx="826164" cy="600243"/>
+          </a:xfrm>
+          <a:prstGeom prst="line">
+            <a:avLst/>
+          </a:prstGeom>
+          <a:ln w="15875">
+            <a:solidFill>
+              <a:srgbClr val="4D5560"/>
+            </a:solidFill>
+          </a:ln>
+        </p:spPr>
+        <p:style>
+          <a:lnRef idx="2">
+            <a:schemeClr val="accent1"/>
+          </a:lnRef>
+          <a:fillRef idx="0">
+            <a:schemeClr val="accent1"/>
+          </a:fillRef>
+          <a:effectRef idx="1">
+            <a:schemeClr val="accent1"/>
+          </a:effectRef>
+          <a:fontRef idx="minor">
+            <a:schemeClr val="tx1"/>
+          </a:fontRef>
+        </p:style>
+      </p:cxnSp>
+      <p:cxnSp>
+        <p:nvCxnSpPr>
+          <p:cNvPr id="130" name="Connector 129"/>
+          <p:cNvCxnSpPr/>
+          <p:nvPr/>
+        </p:nvCxnSpPr>
+        <p:spPr>
+          <a:xfrm flipH="1">
+            <a:off x="2842317" y="5172243"/>
+            <a:ext cx="315566" cy="971213"/>
+          </a:xfrm>
+          <a:prstGeom prst="line">
+            <a:avLst/>
+          </a:prstGeom>
+          <a:ln w="15875">
+            <a:solidFill>
+              <a:srgbClr val="4D5560"/>
+            </a:solidFill>
+          </a:ln>
+        </p:spPr>
+        <p:style>
+          <a:lnRef idx="2">
+            <a:schemeClr val="accent1"/>
+          </a:lnRef>
+          <a:fillRef idx="0">
+            <a:schemeClr val="accent1"/>
+          </a:fillRef>
+          <a:effectRef idx="1">
+            <a:schemeClr val="accent1"/>
+          </a:effectRef>
+          <a:fontRef idx="minor">
+            <a:schemeClr val="tx1"/>
+          </a:fontRef>
+        </p:style>
+      </p:cxnSp>
+      <p:cxnSp>
+        <p:nvCxnSpPr>
+          <p:cNvPr id="131" name="Connector 130"/>
+          <p:cNvCxnSpPr/>
+          <p:nvPr/>
+        </p:nvCxnSpPr>
+        <p:spPr>
+          <a:xfrm flipH="1">
+            <a:off x="1821122" y="5172243"/>
+            <a:ext cx="1336761" cy="971213"/>
+          </a:xfrm>
+          <a:prstGeom prst="line">
+            <a:avLst/>
+          </a:prstGeom>
+          <a:ln w="15875">
+            <a:solidFill>
+              <a:srgbClr val="4D5560"/>
+            </a:solidFill>
+          </a:ln>
+        </p:spPr>
+        <p:style>
+          <a:lnRef idx="2">
+            <a:schemeClr val="accent1"/>
+          </a:lnRef>
+          <a:fillRef idx="0">
+            <a:schemeClr val="accent1"/>
+          </a:fillRef>
+          <a:effectRef idx="1">
+            <a:schemeClr val="accent1"/>
+          </a:effectRef>
+          <a:fontRef idx="minor">
+            <a:schemeClr val="tx1"/>
+          </a:fontRef>
+        </p:style>
+      </p:cxnSp>
+      <p:cxnSp>
+        <p:nvCxnSpPr>
+          <p:cNvPr id="132" name="Connector 131"/>
+          <p:cNvCxnSpPr/>
+          <p:nvPr/>
+        </p:nvCxnSpPr>
+        <p:spPr>
+          <a:xfrm flipH="1">
+            <a:off x="1505556" y="5172243"/>
+            <a:ext cx="1652327" cy="0"/>
+          </a:xfrm>
+          <a:prstGeom prst="line">
+            <a:avLst/>
+          </a:prstGeom>
+          <a:ln w="15875">
+            <a:solidFill>
+              <a:srgbClr val="4D5560"/>
+            </a:solidFill>
+          </a:ln>
+        </p:spPr>
+        <p:style>
+          <a:lnRef idx="2">
+            <a:schemeClr val="accent1"/>
+          </a:lnRef>
+          <a:fillRef idx="0">
+            <a:schemeClr val="accent1"/>
+          </a:fillRef>
+          <a:effectRef idx="1">
+            <a:schemeClr val="accent1"/>
+          </a:effectRef>
+          <a:fontRef idx="minor">
+            <a:schemeClr val="tx1"/>
+          </a:fontRef>
+        </p:style>
+      </p:cxnSp>
+      <p:cxnSp>
+        <p:nvCxnSpPr>
+          <p:cNvPr id="133" name="Connector 132"/>
+          <p:cNvCxnSpPr/>
+          <p:nvPr/>
+        </p:nvCxnSpPr>
+        <p:spPr>
+          <a:xfrm flipH="1">
+            <a:off x="1821122" y="6143456"/>
+            <a:ext cx="1021195" cy="0"/>
+          </a:xfrm>
+          <a:prstGeom prst="line">
+            <a:avLst/>
+          </a:prstGeom>
+          <a:ln w="15875">
+            <a:solidFill>
+              <a:srgbClr val="4D5560"/>
+            </a:solidFill>
+          </a:ln>
+        </p:spPr>
+        <p:style>
+          <a:lnRef idx="2">
+            <a:schemeClr val="accent1"/>
+          </a:lnRef>
+          <a:fillRef idx="0">
+            <a:schemeClr val="accent1"/>
+          </a:fillRef>
+          <a:effectRef idx="1">
+            <a:schemeClr val="accent1"/>
+          </a:effectRef>
+          <a:fontRef idx="minor">
+            <a:schemeClr val="tx1"/>
+          </a:fontRef>
+        </p:style>
+      </p:cxnSp>
+      <p:cxnSp>
+        <p:nvCxnSpPr>
+          <p:cNvPr id="134" name="Connector 133"/>
+          <p:cNvCxnSpPr/>
+          <p:nvPr/>
+        </p:nvCxnSpPr>
+        <p:spPr>
+          <a:xfrm flipH="1" flipV="1">
+            <a:off x="1505556" y="5172243"/>
+            <a:ext cx="1336761" cy="971213"/>
+          </a:xfrm>
+          <a:prstGeom prst="line">
+            <a:avLst/>
+          </a:prstGeom>
+          <a:ln w="15875">
+            <a:solidFill>
+              <a:srgbClr val="4D5560"/>
+            </a:solidFill>
+          </a:ln>
+        </p:spPr>
+        <p:style>
+          <a:lnRef idx="2">
+            <a:schemeClr val="accent1"/>
+          </a:lnRef>
+          <a:fillRef idx="0">
+            <a:schemeClr val="accent1"/>
+          </a:fillRef>
+          <a:effectRef idx="1">
+            <a:schemeClr val="accent1"/>
+          </a:effectRef>
+          <a:fontRef idx="minor">
+            <a:schemeClr val="tx1"/>
+          </a:fontRef>
+        </p:style>
+      </p:cxnSp>
+      <p:cxnSp>
+        <p:nvCxnSpPr>
+          <p:cNvPr id="135" name="Connector 134"/>
+          <p:cNvCxnSpPr/>
+          <p:nvPr/>
+        </p:nvCxnSpPr>
+        <p:spPr>
+          <a:xfrm flipH="1" flipV="1">
+            <a:off x="1505556" y="5172243"/>
+            <a:ext cx="315566" cy="971213"/>
+          </a:xfrm>
+          <a:prstGeom prst="line">
+            <a:avLst/>
+          </a:prstGeom>
+          <a:ln w="15875">
+            <a:solidFill>
+              <a:srgbClr val="4D5560"/>
+            </a:solidFill>
+          </a:ln>
+        </p:spPr>
+        <p:style>
+          <a:lnRef idx="2">
+            <a:schemeClr val="accent1"/>
+          </a:lnRef>
+          <a:fillRef idx="0">
+            <a:schemeClr val="accent1"/>
+          </a:fillRef>
+          <a:effectRef idx="1">
+            <a:schemeClr val="accent1"/>
+          </a:effectRef>
+          <a:fontRef idx="minor">
+            <a:schemeClr val="tx1"/>
+          </a:fontRef>
+        </p:style>
+      </p:cxnSp>
+      <p:sp>
+        <p:nvSpPr>
+          <p:cNvPr id="136" name="Oval 135"/>
           <p:cNvSpPr/>
           <p:nvPr/>
         </p:nvSpPr>
         <p:spPr>
           <a:xfrm>
-            <a:off x="914400" y="3154680"/>
-            <a:ext cx="8778240" cy="18288"/>
-          </a:xfrm>
-          <a:prstGeom prst="rect">
+            <a:off x="2212848" y="4453128"/>
+            <a:ext cx="237744" cy="237744"/>
+          </a:xfrm>
+          <a:prstGeom prst="ellipse">
             <a:avLst/>
           </a:prstGeom>
           <a:solidFill>
-            <a:srgbClr val="DFDDD6"/>
+            <a:srgbClr val="0E0F11"/>
           </a:solidFill>
           <a:ln>
             <a:noFill/>
@@ -13833,104 +14234,20 @@
       </p:sp>
       <p:sp>
         <p:nvSpPr>
-          <p:cNvPr id="126" name="TextBox 125"/>
-          <p:cNvSpPr txBox="1"/>
-          <p:nvPr/>
-        </p:nvSpPr>
-        <p:spPr>
-          <a:xfrm>
-            <a:off x="914400" y="3291840"/>
-            <a:ext cx="3017520" cy="457200"/>
-          </a:xfrm>
-          <a:prstGeom prst="rect">
-            <a:avLst/>
-          </a:prstGeom>
-          <a:noFill/>
-        </p:spPr>
-        <p:txBody>
-          <a:bodyPr wrap="square" lIns="0" rIns="0" tIns="0" bIns="0" anchor="t">
-            <a:spAutoFit/>
-          </a:bodyPr>
-          <a:lstStyle/>
-          <a:p>
-            <a:pPr algn="l">
-              <a:lnSpc>
-                <a:spcPct val="112000"/>
-              </a:lnSpc>
-              <a:spcAft>
-                <a:spcPts val="600"/>
-              </a:spcAft>
-            </a:pPr>
-            <a:r>
-              <a:rPr sz="1800" b="1">
-                <a:solidFill>
-                  <a:srgbClr val="556F00"/>
-                </a:solidFill>
-                <a:latin typeface="JetBrains Mono"/>
-              </a:rPr>
-              <a:t>CUSTODIANS</a:t>
-            </a:r>
-          </a:p>
-        </p:txBody>
-      </p:sp>
-      <p:sp>
-        <p:nvSpPr>
-          <p:cNvPr id="127" name="TextBox 126"/>
-          <p:cNvSpPr txBox="1"/>
-          <p:nvPr/>
-        </p:nvSpPr>
-        <p:spPr>
-          <a:xfrm>
-            <a:off x="3931920" y="3255264"/>
-            <a:ext cx="5760720" cy="1097280"/>
-          </a:xfrm>
-          <a:prstGeom prst="rect">
-            <a:avLst/>
-          </a:prstGeom>
-          <a:noFill/>
-        </p:spPr>
-        <p:txBody>
-          <a:bodyPr wrap="square" lIns="0" rIns="0" tIns="0" bIns="0" anchor="t">
-            <a:spAutoFit/>
-          </a:bodyPr>
-          <a:lstStyle/>
-          <a:p>
-            <a:pPr algn="l">
-              <a:lnSpc>
-                <a:spcPct val="112000"/>
-              </a:lnSpc>
-              <a:spcAft>
-                <a:spcPts val="600"/>
-              </a:spcAft>
-            </a:pPr>
-            <a:r>
-              <a:rPr sz="2400" b="0">
-                <a:solidFill>
-                  <a:srgbClr val="0E0F11"/>
-                </a:solidFill>
-                <a:latin typeface="Instrument Sans"/>
-              </a:rPr>
-              <a:t>Warehouse, port, carrier, customs: sign each handover.</a:t>
-            </a:r>
-          </a:p>
-        </p:txBody>
-      </p:sp>
-      <p:sp>
-        <p:nvSpPr>
-          <p:cNvPr id="128" name="Rectangle 127"/>
+          <p:cNvPr id="137" name="Oval 136"/>
           <p:cNvSpPr/>
           <p:nvPr/>
         </p:nvSpPr>
         <p:spPr>
           <a:xfrm>
-            <a:off x="914400" y="4526280"/>
-            <a:ext cx="8778240" cy="18288"/>
-          </a:xfrm>
-          <a:prstGeom prst="rect">
+            <a:off x="3039011" y="5053371"/>
+            <a:ext cx="237744" cy="237744"/>
+          </a:xfrm>
+          <a:prstGeom prst="ellipse">
             <a:avLst/>
           </a:prstGeom>
           <a:solidFill>
-            <a:srgbClr val="DFDDD6"/>
+            <a:srgbClr val="0E0F11"/>
           </a:solidFill>
           <a:ln>
             <a:noFill/>
@@ -13961,104 +14278,20 @@
       </p:sp>
       <p:sp>
         <p:nvSpPr>
-          <p:cNvPr id="129" name="TextBox 128"/>
-          <p:cNvSpPr txBox="1"/>
-          <p:nvPr/>
-        </p:nvSpPr>
-        <p:spPr>
-          <a:xfrm>
-            <a:off x="914400" y="4663440"/>
-            <a:ext cx="3017520" cy="457200"/>
-          </a:xfrm>
-          <a:prstGeom prst="rect">
-            <a:avLst/>
-          </a:prstGeom>
-          <a:noFill/>
-        </p:spPr>
-        <p:txBody>
-          <a:bodyPr wrap="square" lIns="0" rIns="0" tIns="0" bIns="0" anchor="t">
-            <a:spAutoFit/>
-          </a:bodyPr>
-          <a:lstStyle/>
-          <a:p>
-            <a:pPr algn="l">
-              <a:lnSpc>
-                <a:spcPct val="112000"/>
-              </a:lnSpc>
-              <a:spcAft>
-                <a:spcPts val="600"/>
-              </a:spcAft>
-            </a:pPr>
-            <a:r>
-              <a:rPr sz="1800" b="1">
-                <a:solidFill>
-                  <a:srgbClr val="556F00"/>
-                </a:solidFill>
-                <a:latin typeface="JetBrains Mono"/>
-              </a:rPr>
-              <a:t>EXPORTER · BUYER</a:t>
-            </a:r>
-          </a:p>
-        </p:txBody>
-      </p:sp>
-      <p:sp>
-        <p:nvSpPr>
-          <p:cNvPr id="130" name="TextBox 129"/>
-          <p:cNvSpPr txBox="1"/>
-          <p:nvPr/>
-        </p:nvSpPr>
-        <p:spPr>
-          <a:xfrm>
-            <a:off x="3931920" y="4626864"/>
-            <a:ext cx="5760720" cy="1097280"/>
-          </a:xfrm>
-          <a:prstGeom prst="rect">
-            <a:avLst/>
-          </a:prstGeom>
-          <a:noFill/>
-        </p:spPr>
-        <p:txBody>
-          <a:bodyPr wrap="square" lIns="0" rIns="0" tIns="0" bIns="0" anchor="t">
-            <a:spAutoFit/>
-          </a:bodyPr>
-          <a:lstStyle/>
-          <a:p>
-            <a:pPr algn="l">
-              <a:lnSpc>
-                <a:spcPct val="112000"/>
-              </a:lnSpc>
-              <a:spcAft>
-                <a:spcPts val="600"/>
-              </a:spcAft>
-            </a:pPr>
-            <a:r>
-              <a:rPr sz="2400" b="0">
-                <a:solidFill>
-                  <a:srgbClr val="0E0F11"/>
-                </a:solidFill>
-                <a:latin typeface="Instrument Sans"/>
-              </a:rPr>
-              <a:t>See where the goods are and who holds them.</a:t>
-            </a:r>
-          </a:p>
-        </p:txBody>
-      </p:sp>
-      <p:sp>
-        <p:nvSpPr>
-          <p:cNvPr id="131" name="Rectangle 130"/>
+          <p:cNvPr id="138" name="Oval 137"/>
           <p:cNvSpPr/>
           <p:nvPr/>
         </p:nvSpPr>
         <p:spPr>
           <a:xfrm>
-            <a:off x="914400" y="5897880"/>
-            <a:ext cx="8778240" cy="18288"/>
-          </a:xfrm>
-          <a:prstGeom prst="rect">
+            <a:off x="2723445" y="6024584"/>
+            <a:ext cx="237744" cy="237744"/>
+          </a:xfrm>
+          <a:prstGeom prst="ellipse">
             <a:avLst/>
           </a:prstGeom>
           <a:solidFill>
-            <a:srgbClr val="DFDDD6"/>
+            <a:srgbClr val="0E0F11"/>
           </a:solidFill>
           <a:ln>
             <a:noFill/>
@@ -14089,104 +14322,20 @@
       </p:sp>
       <p:sp>
         <p:nvSpPr>
-          <p:cNvPr id="132" name="TextBox 131"/>
-          <p:cNvSpPr txBox="1"/>
-          <p:nvPr/>
-        </p:nvSpPr>
-        <p:spPr>
-          <a:xfrm>
-            <a:off x="914400" y="6035040"/>
-            <a:ext cx="3017520" cy="457200"/>
-          </a:xfrm>
-          <a:prstGeom prst="rect">
-            <a:avLst/>
-          </a:prstGeom>
-          <a:noFill/>
-        </p:spPr>
-        <p:txBody>
-          <a:bodyPr wrap="square" lIns="0" rIns="0" tIns="0" bIns="0" anchor="t">
-            <a:spAutoFit/>
-          </a:bodyPr>
-          <a:lstStyle/>
-          <a:p>
-            <a:pPr algn="l">
-              <a:lnSpc>
-                <a:spcPct val="112000"/>
-              </a:lnSpc>
-              <a:spcAft>
-                <a:spcPts val="600"/>
-              </a:spcAft>
-            </a:pPr>
-            <a:r>
-              <a:rPr sz="1800" b="1">
-                <a:solidFill>
-                  <a:srgbClr val="556F00"/>
-                </a:solidFill>
-                <a:latin typeface="JetBrains Mono"/>
-              </a:rPr>
-              <a:t>FINANCIER</a:t>
-            </a:r>
-          </a:p>
-        </p:txBody>
-      </p:sp>
-      <p:sp>
-        <p:nvSpPr>
-          <p:cNvPr id="133" name="TextBox 132"/>
-          <p:cNvSpPr txBox="1"/>
-          <p:nvPr/>
-        </p:nvSpPr>
-        <p:spPr>
-          <a:xfrm>
-            <a:off x="3931920" y="5998464"/>
-            <a:ext cx="5760720" cy="1097280"/>
-          </a:xfrm>
-          <a:prstGeom prst="rect">
-            <a:avLst/>
-          </a:prstGeom>
-          <a:noFill/>
-        </p:spPr>
-        <p:txBody>
-          <a:bodyPr wrap="square" lIns="0" rIns="0" tIns="0" bIns="0" anchor="t">
-            <a:spAutoFit/>
-          </a:bodyPr>
-          <a:lstStyle/>
-          <a:p>
-            <a:pPr algn="l">
-              <a:lnSpc>
-                <a:spcPct val="112000"/>
-              </a:lnSpc>
-              <a:spcAft>
-                <a:spcPts val="600"/>
-              </a:spcAft>
-            </a:pPr>
-            <a:r>
-              <a:rPr sz="2400" b="0">
-                <a:solidFill>
-                  <a:srgbClr val="0E0F11"/>
-                </a:solidFill>
-                <a:latin typeface="Instrument Sans"/>
-              </a:rPr>
-              <a:t>Checks the custody chain before paying.</a:t>
-            </a:r>
-          </a:p>
-        </p:txBody>
-      </p:sp>
-      <p:sp>
-        <p:nvSpPr>
-          <p:cNvPr id="134" name="Rectangle 133"/>
+          <p:cNvPr id="139" name="Oval 138"/>
           <p:cNvSpPr/>
           <p:nvPr/>
         </p:nvSpPr>
         <p:spPr>
           <a:xfrm>
-            <a:off x="914400" y="7269480"/>
-            <a:ext cx="8778240" cy="18288"/>
-          </a:xfrm>
-          <a:prstGeom prst="rect">
+            <a:off x="1702250" y="6024584"/>
+            <a:ext cx="237744" cy="237744"/>
+          </a:xfrm>
+          <a:prstGeom prst="ellipse">
             <a:avLst/>
           </a:prstGeom>
           <a:solidFill>
-            <a:srgbClr val="DFDDD6"/>
+            <a:srgbClr val="0E0F11"/>
           </a:solidFill>
           <a:ln>
             <a:noFill/>
@@ -14217,111 +14366,23 @@
       </p:sp>
       <p:sp>
         <p:nvSpPr>
-          <p:cNvPr id="135" name="TextBox 134"/>
-          <p:cNvSpPr txBox="1"/>
-          <p:nvPr/>
-        </p:nvSpPr>
-        <p:spPr>
-          <a:xfrm>
-            <a:off x="914400" y="7406640"/>
-            <a:ext cx="3017520" cy="457200"/>
-          </a:xfrm>
-          <a:prstGeom prst="rect">
-            <a:avLst/>
-          </a:prstGeom>
-          <a:noFill/>
-        </p:spPr>
-        <p:txBody>
-          <a:bodyPr wrap="square" lIns="0" rIns="0" tIns="0" bIns="0" anchor="t">
-            <a:spAutoFit/>
-          </a:bodyPr>
-          <a:lstStyle/>
-          <a:p>
-            <a:pPr algn="l">
-              <a:lnSpc>
-                <a:spcPct val="112000"/>
-              </a:lnSpc>
-              <a:spcAft>
-                <a:spcPts val="600"/>
-              </a:spcAft>
-            </a:pPr>
-            <a:r>
-              <a:rPr sz="1800" b="1">
-                <a:solidFill>
-                  <a:srgbClr val="556F00"/>
-                </a:solidFill>
-                <a:latin typeface="JetBrains Mono"/>
-              </a:rPr>
-              <a:t>CLIENT</a:t>
-            </a:r>
-          </a:p>
-        </p:txBody>
-      </p:sp>
-      <p:sp>
-        <p:nvSpPr>
-          <p:cNvPr id="136" name="TextBox 135"/>
-          <p:cNvSpPr txBox="1"/>
-          <p:nvPr/>
-        </p:nvSpPr>
-        <p:spPr>
-          <a:xfrm>
-            <a:off x="3931920" y="7370064"/>
-            <a:ext cx="5760720" cy="1097280"/>
-          </a:xfrm>
-          <a:prstGeom prst="rect">
-            <a:avLst/>
-          </a:prstGeom>
-          <a:noFill/>
-        </p:spPr>
-        <p:txBody>
-          <a:bodyPr wrap="square" lIns="0" rIns="0" tIns="0" bIns="0" anchor="t">
-            <a:spAutoFit/>
-          </a:bodyPr>
-          <a:lstStyle/>
-          <a:p>
-            <a:pPr algn="l">
-              <a:lnSpc>
-                <a:spcPct val="112000"/>
-              </a:lnSpc>
-              <a:spcAft>
-                <a:spcPts val="600"/>
-              </a:spcAft>
-            </a:pPr>
-            <a:r>
-              <a:rPr sz="2400" b="0">
-                <a:solidFill>
-                  <a:srgbClr val="0E0F11"/>
-                </a:solidFill>
-                <a:latin typeface="Instrument Sans"/>
-              </a:rPr>
-              <a:t>A financial institution pays to use the rail for its trade flows.</a:t>
-            </a:r>
-          </a:p>
-        </p:txBody>
-      </p:sp>
-      <p:sp>
-        <p:nvSpPr>
-          <p:cNvPr id="137" name="Rounded Rectangle 136"/>
+          <p:cNvPr id="140" name="Oval 139"/>
           <p:cNvSpPr/>
           <p:nvPr/>
         </p:nvSpPr>
         <p:spPr>
           <a:xfrm>
-            <a:off x="10424160" y="3154680"/>
-            <a:ext cx="6949440" cy="5212080"/>
-          </a:xfrm>
-          <a:prstGeom prst="roundRect">
-            <a:avLst>
-              <a:gd name="adj" fmla="val 2807"/>
-            </a:avLst>
+            <a:off x="1386684" y="5053371"/>
+            <a:ext cx="237744" cy="237744"/>
+          </a:xfrm>
+          <a:prstGeom prst="ellipse">
+            <a:avLst/>
           </a:prstGeom>
           <a:solidFill>
-            <a:srgbClr val="FFFFFF"/>
+            <a:srgbClr val="0E0F11"/>
           </a:solidFill>
-          <a:ln w="12700">
-            <a:solidFill>
-              <a:srgbClr val="DFDDD6"/>
-            </a:solidFill>
+          <a:ln>
+            <a:noFill/>
           </a:ln>
           <a:effectLst/>
         </p:spPr>
@@ -14349,14 +14410,579 @@
       </p:sp>
       <p:sp>
         <p:nvSpPr>
-          <p:cNvPr id="138" name="TextBox 137"/>
+          <p:cNvPr id="141" name="TextBox 140"/>
           <p:cNvSpPr txBox="1"/>
           <p:nvPr/>
         </p:nvSpPr>
         <p:spPr>
           <a:xfrm>
-            <a:off x="10835640" y="3429000"/>
-            <a:ext cx="6217920" cy="5029200"/>
+            <a:off x="685799" y="4069080"/>
+            <a:ext cx="3291840" cy="411480"/>
+          </a:xfrm>
+          <a:prstGeom prst="rect">
+            <a:avLst/>
+          </a:prstGeom>
+          <a:noFill/>
+        </p:spPr>
+        <p:txBody>
+          <a:bodyPr wrap="square" lIns="0" rIns="0" tIns="0" bIns="0" anchor="t">
+            <a:spAutoFit/>
+          </a:bodyPr>
+          <a:lstStyle/>
+          <a:p>
+            <a:pPr algn="ctr">
+              <a:lnSpc>
+                <a:spcPct val="112000"/>
+              </a:lnSpc>
+              <a:spcAft>
+                <a:spcPts val="600"/>
+              </a:spcAft>
+            </a:pPr>
+            <a:r>
+              <a:rPr sz="1800" b="1">
+                <a:solidFill>
+                  <a:srgbClr val="4D5560"/>
+                </a:solidFill>
+                <a:latin typeface="JetBrains Mono"/>
+              </a:rPr>
+              <a:t>TODAY · 10 LINKS</a:t>
+            </a:r>
+          </a:p>
+        </p:txBody>
+      </p:sp>
+      <p:cxnSp>
+        <p:nvCxnSpPr>
+          <p:cNvPr id="142" name="Connector 141"/>
+          <p:cNvCxnSpPr/>
+          <p:nvPr/>
+        </p:nvCxnSpPr>
+        <p:spPr>
+          <a:xfrm flipV="1">
+            <a:off x="6080760" y="4572000"/>
+            <a:ext cx="0" cy="868680"/>
+          </a:xfrm>
+          <a:prstGeom prst="line">
+            <a:avLst/>
+          </a:prstGeom>
+          <a:ln w="25400">
+            <a:solidFill>
+              <a:srgbClr val="556F00"/>
+            </a:solidFill>
+          </a:ln>
+        </p:spPr>
+        <p:style>
+          <a:lnRef idx="2">
+            <a:schemeClr val="accent1"/>
+          </a:lnRef>
+          <a:fillRef idx="0">
+            <a:schemeClr val="accent1"/>
+          </a:fillRef>
+          <a:effectRef idx="1">
+            <a:schemeClr val="accent1"/>
+          </a:effectRef>
+          <a:fontRef idx="minor">
+            <a:schemeClr val="tx1"/>
+          </a:fontRef>
+        </p:style>
+      </p:cxnSp>
+      <p:cxnSp>
+        <p:nvCxnSpPr>
+          <p:cNvPr id="143" name="Connector 142"/>
+          <p:cNvCxnSpPr/>
+          <p:nvPr/>
+        </p:nvCxnSpPr>
+        <p:spPr>
+          <a:xfrm flipV="1">
+            <a:off x="6080760" y="5172243"/>
+            <a:ext cx="826163" cy="268437"/>
+          </a:xfrm>
+          <a:prstGeom prst="line">
+            <a:avLst/>
+          </a:prstGeom>
+          <a:ln w="25400">
+            <a:solidFill>
+              <a:srgbClr val="556F00"/>
+            </a:solidFill>
+          </a:ln>
+        </p:spPr>
+        <p:style>
+          <a:lnRef idx="2">
+            <a:schemeClr val="accent1"/>
+          </a:lnRef>
+          <a:fillRef idx="0">
+            <a:schemeClr val="accent1"/>
+          </a:fillRef>
+          <a:effectRef idx="1">
+            <a:schemeClr val="accent1"/>
+          </a:effectRef>
+          <a:fontRef idx="minor">
+            <a:schemeClr val="tx1"/>
+          </a:fontRef>
+        </p:style>
+      </p:cxnSp>
+      <p:cxnSp>
+        <p:nvCxnSpPr>
+          <p:cNvPr id="144" name="Connector 143"/>
+          <p:cNvCxnSpPr/>
+          <p:nvPr/>
+        </p:nvCxnSpPr>
+        <p:spPr>
+          <a:xfrm>
+            <a:off x="6080760" y="5440680"/>
+            <a:ext cx="510597" cy="702776"/>
+          </a:xfrm>
+          <a:prstGeom prst="line">
+            <a:avLst/>
+          </a:prstGeom>
+          <a:ln w="25400">
+            <a:solidFill>
+              <a:srgbClr val="556F00"/>
+            </a:solidFill>
+          </a:ln>
+        </p:spPr>
+        <p:style>
+          <a:lnRef idx="2">
+            <a:schemeClr val="accent1"/>
+          </a:lnRef>
+          <a:fillRef idx="0">
+            <a:schemeClr val="accent1"/>
+          </a:fillRef>
+          <a:effectRef idx="1">
+            <a:schemeClr val="accent1"/>
+          </a:effectRef>
+          <a:fontRef idx="minor">
+            <a:schemeClr val="tx1"/>
+          </a:fontRef>
+        </p:style>
+      </p:cxnSp>
+      <p:cxnSp>
+        <p:nvCxnSpPr>
+          <p:cNvPr id="145" name="Connector 144"/>
+          <p:cNvCxnSpPr/>
+          <p:nvPr/>
+        </p:nvCxnSpPr>
+        <p:spPr>
+          <a:xfrm flipH="1">
+            <a:off x="5570162" y="5440680"/>
+            <a:ext cx="510598" cy="702776"/>
+          </a:xfrm>
+          <a:prstGeom prst="line">
+            <a:avLst/>
+          </a:prstGeom>
+          <a:ln w="25400">
+            <a:solidFill>
+              <a:srgbClr val="556F00"/>
+            </a:solidFill>
+          </a:ln>
+        </p:spPr>
+        <p:style>
+          <a:lnRef idx="2">
+            <a:schemeClr val="accent1"/>
+          </a:lnRef>
+          <a:fillRef idx="0">
+            <a:schemeClr val="accent1"/>
+          </a:fillRef>
+          <a:effectRef idx="1">
+            <a:schemeClr val="accent1"/>
+          </a:effectRef>
+          <a:fontRef idx="minor">
+            <a:schemeClr val="tx1"/>
+          </a:fontRef>
+        </p:style>
+      </p:cxnSp>
+      <p:cxnSp>
+        <p:nvCxnSpPr>
+          <p:cNvPr id="146" name="Connector 145"/>
+          <p:cNvCxnSpPr/>
+          <p:nvPr/>
+        </p:nvCxnSpPr>
+        <p:spPr>
+          <a:xfrm flipH="1" flipV="1">
+            <a:off x="5254596" y="5172243"/>
+            <a:ext cx="826164" cy="268437"/>
+          </a:xfrm>
+          <a:prstGeom prst="line">
+            <a:avLst/>
+          </a:prstGeom>
+          <a:ln w="25400">
+            <a:solidFill>
+              <a:srgbClr val="556F00"/>
+            </a:solidFill>
+          </a:ln>
+        </p:spPr>
+        <p:style>
+          <a:lnRef idx="2">
+            <a:schemeClr val="accent1"/>
+          </a:lnRef>
+          <a:fillRef idx="0">
+            <a:schemeClr val="accent1"/>
+          </a:fillRef>
+          <a:effectRef idx="1">
+            <a:schemeClr val="accent1"/>
+          </a:effectRef>
+          <a:fontRef idx="minor">
+            <a:schemeClr val="tx1"/>
+          </a:fontRef>
+        </p:style>
+      </p:cxnSp>
+      <p:sp>
+        <p:nvSpPr>
+          <p:cNvPr id="147" name="Oval 146"/>
+          <p:cNvSpPr/>
+          <p:nvPr/>
+        </p:nvSpPr>
+        <p:spPr>
+          <a:xfrm>
+            <a:off x="5888736" y="5248656"/>
+            <a:ext cx="384048" cy="384048"/>
+          </a:xfrm>
+          <a:prstGeom prst="ellipse">
+            <a:avLst/>
+          </a:prstGeom>
+          <a:solidFill>
+            <a:srgbClr val="C6F24E"/>
+          </a:solidFill>
+          <a:ln>
+            <a:noFill/>
+          </a:ln>
+          <a:effectLst/>
+        </p:spPr>
+        <p:style>
+          <a:lnRef idx="1">
+            <a:schemeClr val="accent1"/>
+          </a:lnRef>
+          <a:fillRef idx="3">
+            <a:schemeClr val="accent1"/>
+          </a:fillRef>
+          <a:effectRef idx="0">
+            <a:schemeClr val="accent1"/>
+          </a:effectRef>
+          <a:fontRef idx="minor">
+            <a:schemeClr val="lt1"/>
+          </a:fontRef>
+        </p:style>
+        <p:txBody>
+          <a:bodyPr rtlCol="0" anchor="ctr"/>
+          <a:lstStyle/>
+          <a:p>
+            <a:pPr algn="ctr"/>
+          </a:p>
+        </p:txBody>
+      </p:sp>
+      <p:sp>
+        <p:nvSpPr>
+          <p:cNvPr id="148" name="Oval 147"/>
+          <p:cNvSpPr/>
+          <p:nvPr/>
+        </p:nvSpPr>
+        <p:spPr>
+          <a:xfrm>
+            <a:off x="5961888" y="4453128"/>
+            <a:ext cx="237744" cy="237744"/>
+          </a:xfrm>
+          <a:prstGeom prst="ellipse">
+            <a:avLst/>
+          </a:prstGeom>
+          <a:solidFill>
+            <a:srgbClr val="0E0F11"/>
+          </a:solidFill>
+          <a:ln>
+            <a:noFill/>
+          </a:ln>
+          <a:effectLst/>
+        </p:spPr>
+        <p:style>
+          <a:lnRef idx="1">
+            <a:schemeClr val="accent1"/>
+          </a:lnRef>
+          <a:fillRef idx="3">
+            <a:schemeClr val="accent1"/>
+          </a:fillRef>
+          <a:effectRef idx="0">
+            <a:schemeClr val="accent1"/>
+          </a:effectRef>
+          <a:fontRef idx="minor">
+            <a:schemeClr val="lt1"/>
+          </a:fontRef>
+        </p:style>
+        <p:txBody>
+          <a:bodyPr rtlCol="0" anchor="ctr"/>
+          <a:lstStyle/>
+          <a:p>
+            <a:pPr algn="ctr"/>
+          </a:p>
+        </p:txBody>
+      </p:sp>
+      <p:sp>
+        <p:nvSpPr>
+          <p:cNvPr id="149" name="Oval 148"/>
+          <p:cNvSpPr/>
+          <p:nvPr/>
+        </p:nvSpPr>
+        <p:spPr>
+          <a:xfrm>
+            <a:off x="6788051" y="5053371"/>
+            <a:ext cx="237744" cy="237744"/>
+          </a:xfrm>
+          <a:prstGeom prst="ellipse">
+            <a:avLst/>
+          </a:prstGeom>
+          <a:solidFill>
+            <a:srgbClr val="0E0F11"/>
+          </a:solidFill>
+          <a:ln>
+            <a:noFill/>
+          </a:ln>
+          <a:effectLst/>
+        </p:spPr>
+        <p:style>
+          <a:lnRef idx="1">
+            <a:schemeClr val="accent1"/>
+          </a:lnRef>
+          <a:fillRef idx="3">
+            <a:schemeClr val="accent1"/>
+          </a:fillRef>
+          <a:effectRef idx="0">
+            <a:schemeClr val="accent1"/>
+          </a:effectRef>
+          <a:fontRef idx="minor">
+            <a:schemeClr val="lt1"/>
+          </a:fontRef>
+        </p:style>
+        <p:txBody>
+          <a:bodyPr rtlCol="0" anchor="ctr"/>
+          <a:lstStyle/>
+          <a:p>
+            <a:pPr algn="ctr"/>
+          </a:p>
+        </p:txBody>
+      </p:sp>
+      <p:sp>
+        <p:nvSpPr>
+          <p:cNvPr id="150" name="Oval 149"/>
+          <p:cNvSpPr/>
+          <p:nvPr/>
+        </p:nvSpPr>
+        <p:spPr>
+          <a:xfrm>
+            <a:off x="6472485" y="6024584"/>
+            <a:ext cx="237744" cy="237744"/>
+          </a:xfrm>
+          <a:prstGeom prst="ellipse">
+            <a:avLst/>
+          </a:prstGeom>
+          <a:solidFill>
+            <a:srgbClr val="0E0F11"/>
+          </a:solidFill>
+          <a:ln>
+            <a:noFill/>
+          </a:ln>
+          <a:effectLst/>
+        </p:spPr>
+        <p:style>
+          <a:lnRef idx="1">
+            <a:schemeClr val="accent1"/>
+          </a:lnRef>
+          <a:fillRef idx="3">
+            <a:schemeClr val="accent1"/>
+          </a:fillRef>
+          <a:effectRef idx="0">
+            <a:schemeClr val="accent1"/>
+          </a:effectRef>
+          <a:fontRef idx="minor">
+            <a:schemeClr val="lt1"/>
+          </a:fontRef>
+        </p:style>
+        <p:txBody>
+          <a:bodyPr rtlCol="0" anchor="ctr"/>
+          <a:lstStyle/>
+          <a:p>
+            <a:pPr algn="ctr"/>
+          </a:p>
+        </p:txBody>
+      </p:sp>
+      <p:sp>
+        <p:nvSpPr>
+          <p:cNvPr id="151" name="Oval 150"/>
+          <p:cNvSpPr/>
+          <p:nvPr/>
+        </p:nvSpPr>
+        <p:spPr>
+          <a:xfrm>
+            <a:off x="5451290" y="6024584"/>
+            <a:ext cx="237744" cy="237744"/>
+          </a:xfrm>
+          <a:prstGeom prst="ellipse">
+            <a:avLst/>
+          </a:prstGeom>
+          <a:solidFill>
+            <a:srgbClr val="0E0F11"/>
+          </a:solidFill>
+          <a:ln>
+            <a:noFill/>
+          </a:ln>
+          <a:effectLst/>
+        </p:spPr>
+        <p:style>
+          <a:lnRef idx="1">
+            <a:schemeClr val="accent1"/>
+          </a:lnRef>
+          <a:fillRef idx="3">
+            <a:schemeClr val="accent1"/>
+          </a:fillRef>
+          <a:effectRef idx="0">
+            <a:schemeClr val="accent1"/>
+          </a:effectRef>
+          <a:fontRef idx="minor">
+            <a:schemeClr val="lt1"/>
+          </a:fontRef>
+        </p:style>
+        <p:txBody>
+          <a:bodyPr rtlCol="0" anchor="ctr"/>
+          <a:lstStyle/>
+          <a:p>
+            <a:pPr algn="ctr"/>
+          </a:p>
+        </p:txBody>
+      </p:sp>
+      <p:sp>
+        <p:nvSpPr>
+          <p:cNvPr id="152" name="Oval 151"/>
+          <p:cNvSpPr/>
+          <p:nvPr/>
+        </p:nvSpPr>
+        <p:spPr>
+          <a:xfrm>
+            <a:off x="5135724" y="5053371"/>
+            <a:ext cx="237744" cy="237744"/>
+          </a:xfrm>
+          <a:prstGeom prst="ellipse">
+            <a:avLst/>
+          </a:prstGeom>
+          <a:solidFill>
+            <a:srgbClr val="0E0F11"/>
+          </a:solidFill>
+          <a:ln>
+            <a:noFill/>
+          </a:ln>
+          <a:effectLst/>
+        </p:spPr>
+        <p:style>
+          <a:lnRef idx="1">
+            <a:schemeClr val="accent1"/>
+          </a:lnRef>
+          <a:fillRef idx="3">
+            <a:schemeClr val="accent1"/>
+          </a:fillRef>
+          <a:effectRef idx="0">
+            <a:schemeClr val="accent1"/>
+          </a:effectRef>
+          <a:fontRef idx="minor">
+            <a:schemeClr val="lt1"/>
+          </a:fontRef>
+        </p:style>
+        <p:txBody>
+          <a:bodyPr rtlCol="0" anchor="ctr"/>
+          <a:lstStyle/>
+          <a:p>
+            <a:pPr algn="ctr"/>
+          </a:p>
+        </p:txBody>
+      </p:sp>
+      <p:sp>
+        <p:nvSpPr>
+          <p:cNvPr id="153" name="TextBox 152"/>
+          <p:cNvSpPr txBox="1"/>
+          <p:nvPr/>
+        </p:nvSpPr>
+        <p:spPr>
+          <a:xfrm>
+            <a:off x="4434840" y="4069080"/>
+            <a:ext cx="3291840" cy="411480"/>
+          </a:xfrm>
+          <a:prstGeom prst="rect">
+            <a:avLst/>
+          </a:prstGeom>
+          <a:noFill/>
+        </p:spPr>
+        <p:txBody>
+          <a:bodyPr wrap="square" lIns="0" rIns="0" tIns="0" bIns="0" anchor="t">
+            <a:spAutoFit/>
+          </a:bodyPr>
+          <a:lstStyle/>
+          <a:p>
+            <a:pPr algn="ctr">
+              <a:lnSpc>
+                <a:spcPct val="112000"/>
+              </a:lnSpc>
+              <a:spcAft>
+                <a:spcPts val="600"/>
+              </a:spcAft>
+            </a:pPr>
+            <a:r>
+              <a:rPr sz="1800" b="1">
+                <a:solidFill>
+                  <a:srgbClr val="556F00"/>
+                </a:solidFill>
+                <a:latin typeface="JetBrains Mono"/>
+              </a:rPr>
+              <a:t>STANDARD · 5 LINKS</a:t>
+            </a:r>
+          </a:p>
+        </p:txBody>
+      </p:sp>
+      <p:sp>
+        <p:nvSpPr>
+          <p:cNvPr id="154" name="TextBox 153"/>
+          <p:cNvSpPr txBox="1"/>
+          <p:nvPr/>
+        </p:nvSpPr>
+        <p:spPr>
+          <a:xfrm>
+            <a:off x="914400" y="6583680"/>
+            <a:ext cx="7132320" cy="822960"/>
+          </a:xfrm>
+          <a:prstGeom prst="rect">
+            <a:avLst/>
+          </a:prstGeom>
+          <a:noFill/>
+        </p:spPr>
+        <p:txBody>
+          <a:bodyPr wrap="square" lIns="0" rIns="0" tIns="0" bIns="0" anchor="t">
+            <a:spAutoFit/>
+          </a:bodyPr>
+          <a:lstStyle/>
+          <a:p>
+            <a:pPr algn="ctr">
+              <a:lnSpc>
+                <a:spcPct val="112000"/>
+              </a:lnSpc>
+              <a:spcAft>
+                <a:spcPts val="600"/>
+              </a:spcAft>
+            </a:pPr>
+            <a:r>
+              <a:rPr sz="2000" b="0">
+                <a:solidFill>
+                  <a:srgbClr val="4D5560"/>
+                </a:solidFill>
+                <a:latin typeface="Instrument Sans"/>
+              </a:rPr>
+              <a:t>Example, 5 parties: 10 custom links, or 5 links to one standard.</a:t>
+            </a:r>
+          </a:p>
+        </p:txBody>
+      </p:sp>
+      <p:sp>
+        <p:nvSpPr>
+          <p:cNvPr id="155" name="TextBox 154"/>
+          <p:cNvSpPr txBox="1"/>
+          <p:nvPr/>
+        </p:nvSpPr>
+        <p:spPr>
+          <a:xfrm>
+            <a:off x="8503920" y="4069080"/>
+            <a:ext cx="4389120" cy="411480"/>
           </a:xfrm>
           <a:prstGeom prst="rect">
             <a:avLst/>
@@ -14374,7 +15000,7 @@
                 <a:spcPct val="112000"/>
               </a:lnSpc>
               <a:spcAft>
-                <a:spcPts val="1800"/>
+                <a:spcPts val="600"/>
               </a:spcAft>
             </a:pPr>
             <a:r>
@@ -14384,26 +15010,102 @@
                 </a:solidFill>
                 <a:latin typeface="JetBrains Mono"/>
               </a:rPr>
-              <a:t>MODEL · THE CLIENT PAYS</a:t>
-            </a:r>
-          </a:p>
+              <a:t>OPEN · ANYONE</a:t>
+            </a:r>
+          </a:p>
+        </p:txBody>
+      </p:sp>
+      <p:sp>
+        <p:nvSpPr>
+          <p:cNvPr id="156" name="Rectangle 155"/>
+          <p:cNvSpPr/>
+          <p:nvPr/>
+        </p:nvSpPr>
+        <p:spPr>
+          <a:xfrm>
+            <a:off x="8503920" y="4539996"/>
+            <a:ext cx="4251960" cy="27432"/>
+          </a:xfrm>
+          <a:prstGeom prst="rect">
+            <a:avLst/>
+          </a:prstGeom>
+          <a:solidFill>
+            <a:srgbClr val="556F00"/>
+          </a:solidFill>
+          <a:ln>
+            <a:noFill/>
+          </a:ln>
+          <a:effectLst/>
+        </p:spPr>
+        <p:style>
+          <a:lnRef idx="1">
+            <a:schemeClr val="accent1"/>
+          </a:lnRef>
+          <a:fillRef idx="3">
+            <a:schemeClr val="accent1"/>
+          </a:fillRef>
+          <a:effectRef idx="0">
+            <a:schemeClr val="accent1"/>
+          </a:effectRef>
+          <a:fontRef idx="minor">
+            <a:schemeClr val="lt1"/>
+          </a:fontRef>
+        </p:style>
+        <p:txBody>
+          <a:bodyPr rtlCol="0" anchor="ctr"/>
+          <a:lstStyle/>
+          <a:p>
+            <a:pPr algn="ctr"/>
+          </a:p>
+        </p:txBody>
+      </p:sp>
+      <p:sp>
+        <p:nvSpPr>
+          <p:cNvPr id="157" name="TextBox 156"/>
+          <p:cNvSpPr txBox="1"/>
+          <p:nvPr/>
+        </p:nvSpPr>
+        <p:spPr>
+          <a:xfrm>
+            <a:off x="8503920" y="4709160"/>
+            <a:ext cx="4343400" cy="2743200"/>
+          </a:xfrm>
+          <a:prstGeom prst="rect">
+            <a:avLst/>
+          </a:prstGeom>
+          <a:noFill/>
+        </p:spPr>
+        <p:txBody>
+          <a:bodyPr wrap="square" lIns="0" rIns="0" tIns="0" bIns="0" anchor="t">
+            <a:spAutoFit/>
+          </a:bodyPr>
+          <a:lstStyle/>
           <a:p>
             <a:pPr algn="l">
               <a:lnSpc>
                 <a:spcPct val="112000"/>
               </a:lnSpc>
               <a:spcAft>
-                <a:spcPts val="1800"/>
+                <a:spcPts val="800"/>
               </a:spcAft>
             </a:pPr>
             <a:r>
-              <a:rPr sz="2600" b="1">
-                <a:solidFill>
-                  <a:srgbClr val="0E0F11"/>
+              <a:rPr sz="2100" b="0">
+                <a:solidFill>
+                  <a:srgbClr val="556F00"/>
                 </a:solidFill>
                 <a:latin typeface="Instrument Sans"/>
               </a:rPr>
-              <a:t>SWIFT-style: the record format is public; Radox operates the rail and the API.</a:t>
+              <a:t>— </a:t>
+            </a:r>
+            <a:r>
+              <a:rPr sz="2100" b="0">
+                <a:solidFill>
+                  <a:srgbClr val="0E0F11"/>
+                </a:solidFill>
+                <a:latin typeface="Instrument Sans"/>
+              </a:rPr>
+              <a:t>Record format, roles and events</a:t>
             </a:r>
           </a:p>
           <a:p>
@@ -14412,17 +15114,26 @@
                 <a:spcPct val="112000"/>
               </a:lnSpc>
               <a:spcAft>
-                <a:spcPts val="1800"/>
+                <a:spcPts val="800"/>
               </a:spcAft>
             </a:pPr>
             <a:r>
-              <a:rPr sz="2600" b="0">
-                <a:solidFill>
-                  <a:srgbClr val="0E0F11"/>
+              <a:rPr sz="2100" b="0">
+                <a:solidFill>
+                  <a:srgbClr val="556F00"/>
                 </a:solidFill>
                 <a:latin typeface="Instrument Sans"/>
               </a:rPr>
-              <a:t>Revenue: a fee from the financial institution that uses the rail. Not priced yet.</a:t>
+              <a:t>— </a:t>
+            </a:r>
+            <a:r>
+              <a:rPr sz="2100" b="0">
+                <a:solidFill>
+                  <a:srgbClr val="0E0F11"/>
+                </a:solidFill>
+                <a:latin typeface="Instrument Sans"/>
+              </a:rPr>
+              <a:t>custody_registry contract (Apache-2.0)</a:t>
             </a:r>
           </a:p>
           <a:p>
@@ -14431,11 +15142,346 @@
                 <a:spcPct val="112000"/>
               </a:lnSpc>
               <a:spcAft>
-                <a:spcPts val="1800"/>
+                <a:spcPts val="800"/>
               </a:spcAft>
             </a:pPr>
             <a:r>
-              <a:rPr sz="2200" b="0">
+              <a:rPr sz="2100" b="0">
+                <a:solidFill>
+                  <a:srgbClr val="556F00"/>
+                </a:solidFill>
+                <a:latin typeface="Instrument Sans"/>
+              </a:rPr>
+              <a:t>— </a:t>
+            </a:r>
+            <a:r>
+              <a:rPr sz="2100" b="0">
+                <a:solidFill>
+                  <a:srgbClr val="0E0F11"/>
+                </a:solidFill>
+                <a:latin typeface="Instrument Sans"/>
+              </a:rPr>
+              <a:t>Verify any chain, no permission (slide 4)</a:t>
+            </a:r>
+          </a:p>
+        </p:txBody>
+      </p:sp>
+      <p:sp>
+        <p:nvSpPr>
+          <p:cNvPr id="158" name="TextBox 157"/>
+          <p:cNvSpPr txBox="1"/>
+          <p:nvPr/>
+        </p:nvSpPr>
+        <p:spPr>
+          <a:xfrm>
+            <a:off x="13121640" y="4069080"/>
+            <a:ext cx="4389120" cy="411480"/>
+          </a:xfrm>
+          <a:prstGeom prst="rect">
+            <a:avLst/>
+          </a:prstGeom>
+          <a:noFill/>
+        </p:spPr>
+        <p:txBody>
+          <a:bodyPr wrap="square" lIns="0" rIns="0" tIns="0" bIns="0" anchor="t">
+            <a:spAutoFit/>
+          </a:bodyPr>
+          <a:lstStyle/>
+          <a:p>
+            <a:pPr algn="l">
+              <a:lnSpc>
+                <a:spcPct val="112000"/>
+              </a:lnSpc>
+              <a:spcAft>
+                <a:spcPts val="600"/>
+              </a:spcAft>
+            </a:pPr>
+            <a:r>
+              <a:rPr sz="1800" b="1">
+                <a:solidFill>
+                  <a:srgbClr val="0E0F11"/>
+                </a:solidFill>
+                <a:latin typeface="JetBrains Mono"/>
+              </a:rPr>
+              <a:t>RADOX OPERATES · CLIENT PAYS</a:t>
+            </a:r>
+          </a:p>
+        </p:txBody>
+      </p:sp>
+      <p:sp>
+        <p:nvSpPr>
+          <p:cNvPr id="159" name="Rectangle 158"/>
+          <p:cNvSpPr/>
+          <p:nvPr/>
+        </p:nvSpPr>
+        <p:spPr>
+          <a:xfrm>
+            <a:off x="13121640" y="4539996"/>
+            <a:ext cx="4251960" cy="27432"/>
+          </a:xfrm>
+          <a:prstGeom prst="rect">
+            <a:avLst/>
+          </a:prstGeom>
+          <a:solidFill>
+            <a:srgbClr val="0E0F11"/>
+          </a:solidFill>
+          <a:ln>
+            <a:noFill/>
+          </a:ln>
+          <a:effectLst/>
+        </p:spPr>
+        <p:style>
+          <a:lnRef idx="1">
+            <a:schemeClr val="accent1"/>
+          </a:lnRef>
+          <a:fillRef idx="3">
+            <a:schemeClr val="accent1"/>
+          </a:fillRef>
+          <a:effectRef idx="0">
+            <a:schemeClr val="accent1"/>
+          </a:effectRef>
+          <a:fontRef idx="minor">
+            <a:schemeClr val="lt1"/>
+          </a:fontRef>
+        </p:style>
+        <p:txBody>
+          <a:bodyPr rtlCol="0" anchor="ctr"/>
+          <a:lstStyle/>
+          <a:p>
+            <a:pPr algn="ctr"/>
+          </a:p>
+        </p:txBody>
+      </p:sp>
+      <p:sp>
+        <p:nvSpPr>
+          <p:cNvPr id="160" name="TextBox 159"/>
+          <p:cNvSpPr txBox="1"/>
+          <p:nvPr/>
+        </p:nvSpPr>
+        <p:spPr>
+          <a:xfrm>
+            <a:off x="13121640" y="4709160"/>
+            <a:ext cx="4343400" cy="2743200"/>
+          </a:xfrm>
+          <a:prstGeom prst="rect">
+            <a:avLst/>
+          </a:prstGeom>
+          <a:noFill/>
+        </p:spPr>
+        <p:txBody>
+          <a:bodyPr wrap="square" lIns="0" rIns="0" tIns="0" bIns="0" anchor="t">
+            <a:spAutoFit/>
+          </a:bodyPr>
+          <a:lstStyle/>
+          <a:p>
+            <a:pPr algn="l">
+              <a:lnSpc>
+                <a:spcPct val="112000"/>
+              </a:lnSpc>
+              <a:spcAft>
+                <a:spcPts val="800"/>
+              </a:spcAft>
+            </a:pPr>
+            <a:r>
+              <a:rPr sz="2100" b="0">
+                <a:solidFill>
+                  <a:srgbClr val="0E0F11"/>
+                </a:solidFill>
+                <a:latin typeface="Instrument Sans"/>
+              </a:rPr>
+              <a:t>— </a:t>
+            </a:r>
+            <a:r>
+              <a:rPr sz="2100" b="0">
+                <a:solidFill>
+                  <a:srgbClr val="0E0F11"/>
+                </a:solidFill>
+                <a:latin typeface="Instrument Sans"/>
+              </a:rPr>
+              <a:t>Custodian onboarding</a:t>
+            </a:r>
+          </a:p>
+          <a:p>
+            <a:pPr algn="l">
+              <a:lnSpc>
+                <a:spcPct val="112000"/>
+              </a:lnSpc>
+              <a:spcAft>
+                <a:spcPts val="800"/>
+              </a:spcAft>
+            </a:pPr>
+            <a:r>
+              <a:rPr sz="2100" b="0">
+                <a:solidFill>
+                  <a:srgbClr val="0E0F11"/>
+                </a:solidFill>
+                <a:latin typeface="Instrument Sans"/>
+              </a:rPr>
+              <a:t>— </a:t>
+            </a:r>
+            <a:r>
+              <a:rPr sz="2100" b="0">
+                <a:solidFill>
+                  <a:srgbClr val="0E0F11"/>
+                </a:solidFill>
+                <a:latin typeface="Instrument Sans"/>
+              </a:rPr>
+              <a:t>The API, issuance controls, operation</a:t>
+            </a:r>
+          </a:p>
+          <a:p>
+            <a:pPr algn="l">
+              <a:lnSpc>
+                <a:spcPct val="112000"/>
+              </a:lnSpc>
+              <a:spcAft>
+                <a:spcPts val="800"/>
+              </a:spcAft>
+            </a:pPr>
+            <a:r>
+              <a:rPr sz="2100" b="0">
+                <a:solidFill>
+                  <a:srgbClr val="0E0F11"/>
+                </a:solidFill>
+                <a:latin typeface="Instrument Sans"/>
+              </a:rPr>
+              <a:t>— </a:t>
+            </a:r>
+            <a:r>
+              <a:rPr sz="2100" b="0">
+                <a:solidFill>
+                  <a:srgbClr val="0E0F11"/>
+                </a:solidFill>
+                <a:latin typeface="Instrument Sans"/>
+              </a:rPr>
+              <a:t>Closed, not self-hostable</a:t>
+            </a:r>
+          </a:p>
+          <a:p>
+            <a:pPr algn="l">
+              <a:lnSpc>
+                <a:spcPct val="112000"/>
+              </a:lnSpc>
+              <a:spcAft>
+                <a:spcPts val="800"/>
+              </a:spcAft>
+            </a:pPr>
+            <a:r>
+              <a:rPr sz="2100" b="0">
+                <a:solidFill>
+                  <a:srgbClr val="0E0F11"/>
+                </a:solidFill>
+                <a:latin typeface="Instrument Sans"/>
+              </a:rPr>
+              <a:t>— </a:t>
+            </a:r>
+            <a:r>
+              <a:rPr sz="2100" b="0">
+                <a:solidFill>
+                  <a:srgbClr val="0E0F11"/>
+                </a:solidFill>
+                <a:latin typeface="Instrument Sans"/>
+              </a:rPr>
+              <a:t>Fee from the financial institution; not priced yet</a:t>
+            </a:r>
+          </a:p>
+        </p:txBody>
+      </p:sp>
+      <p:sp>
+        <p:nvSpPr>
+          <p:cNvPr id="161" name="Rectangle 160"/>
+          <p:cNvSpPr/>
+          <p:nvPr/>
+        </p:nvSpPr>
+        <p:spPr>
+          <a:xfrm>
+            <a:off x="914400" y="7580376"/>
+            <a:ext cx="16459200" cy="18288"/>
+          </a:xfrm>
+          <a:prstGeom prst="rect">
+            <a:avLst/>
+          </a:prstGeom>
+          <a:solidFill>
+            <a:srgbClr val="DFDDD6"/>
+          </a:solidFill>
+          <a:ln>
+            <a:noFill/>
+          </a:ln>
+          <a:effectLst/>
+        </p:spPr>
+        <p:style>
+          <a:lnRef idx="1">
+            <a:schemeClr val="accent1"/>
+          </a:lnRef>
+          <a:fillRef idx="3">
+            <a:schemeClr val="accent1"/>
+          </a:fillRef>
+          <a:effectRef idx="0">
+            <a:schemeClr val="accent1"/>
+          </a:effectRef>
+          <a:fontRef idx="minor">
+            <a:schemeClr val="lt1"/>
+          </a:fontRef>
+        </p:style>
+        <p:txBody>
+          <a:bodyPr rtlCol="0" anchor="ctr"/>
+          <a:lstStyle/>
+          <a:p>
+            <a:pPr algn="ctr"/>
+          </a:p>
+        </p:txBody>
+      </p:sp>
+      <p:sp>
+        <p:nvSpPr>
+          <p:cNvPr id="162" name="TextBox 161"/>
+          <p:cNvSpPr txBox="1"/>
+          <p:nvPr/>
+        </p:nvSpPr>
+        <p:spPr>
+          <a:xfrm>
+            <a:off x="914400" y="7699248"/>
+            <a:ext cx="16459200" cy="822960"/>
+          </a:xfrm>
+          <a:prstGeom prst="rect">
+            <a:avLst/>
+          </a:prstGeom>
+          <a:noFill/>
+        </p:spPr>
+        <p:txBody>
+          <a:bodyPr wrap="square" lIns="0" rIns="0" tIns="0" bIns="0" anchor="t">
+            <a:spAutoFit/>
+          </a:bodyPr>
+          <a:lstStyle/>
+          <a:p>
+            <a:pPr algn="l">
+              <a:lnSpc>
+                <a:spcPct val="112000"/>
+              </a:lnSpc>
+              <a:spcAft>
+                <a:spcPts val="200"/>
+              </a:spcAft>
+            </a:pPr>
+            <a:r>
+              <a:rPr sz="1800" b="0">
+                <a:solidFill>
+                  <a:srgbClr val="0E0F11"/>
+                </a:solidFill>
+                <a:latin typeface="Instrument Sans"/>
+              </a:rPr>
+              <a:t>Adoption still takes work: a key per party, its own signatures, a connection to the Radox API.</a:t>
+            </a:r>
+          </a:p>
+          <a:p>
+            <a:pPr algn="l">
+              <a:lnSpc>
+                <a:spcPct val="112000"/>
+              </a:lnSpc>
+              <a:spcAft>
+                <a:spcPts val="200"/>
+              </a:spcAft>
+            </a:pPr>
+            <a:r>
+              <a:rPr sz="1800" b="0">
                 <a:solidFill>
                   <a:srgbClr val="4D5560"/>
                 </a:solidFill>

--- a/projects/hackmeridian-rail/deck/radox-custody-rail.pptx
+++ b/projects/hackmeridian-rail/deck/radox-custody-rail.pptx
@@ -12227,7 +12227,7 @@
                 </a:solidFill>
                 <a:latin typeface="Instrument Sans"/>
               </a:rPr>
-              <a:t>Plus one event attestation by a source custodian (33379211), also on chain. Full hashes: the repo's proofs/lifecycle.json.</a:t>
+              <a:t>Plus an attestation (33379211); full hashes in proofs/lifecycle.json. A second run (proofs/three-machine.json): two team members authorised handovers on their own computers, with their own testnet keys.</a:t>
             </a:r>
           </a:p>
           <a:p>
@@ -12246,7 +12246,7 @@
                 </a:solidFill>
                 <a:latin typeface="Instrument Sans"/>
               </a:rPr>
-              <a:t>Every actor is a test key held by one harness: this proves the mechanism, not independent custodians.</a:t>
+              <a:t>All are test keys, most held by one harness: this proves the mechanism, not independent custodians.</a:t>
             </a:r>
           </a:p>
         </p:txBody>

--- a/projects/hackmeridian-rail/deck/radox-custody-rail.pptx
+++ b/projects/hackmeridian-rail/deck/radox-custody-rail.pptx
@@ -13824,7 +13824,7 @@
                 </a:solidFill>
                 <a:latin typeface="Instrument Sans"/>
               </a:rPr>
-              <a:t>Today each pair of parties builds its own link. </a:t>
+              <a:t>Today, parties often connect pair by pair. </a:t>
             </a:r>
             <a:r>
               <a:rPr sz="2400" b="0">
@@ -14926,7 +14926,7 @@
                 </a:solidFill>
                 <a:latin typeface="JetBrains Mono"/>
               </a:rPr>
-              <a:t>STANDARD · 5 LINKS</a:t>
+              <a:t>ONE RAIL · 5 LINKS</a:t>
             </a:r>
           </a:p>
         </p:txBody>
@@ -15105,7 +15105,7 @@
                 </a:solidFill>
                 <a:latin typeface="Instrument Sans"/>
               </a:rPr>
-              <a:t>Record format, roles and events</a:t>
+              <a:t>Record format, roles and events: the custody_registry contract (Apache-2.0)</a:t>
             </a:r>
           </a:p>
           <a:p>
@@ -15133,35 +15133,7 @@
                 </a:solidFill>
                 <a:latin typeface="Instrument Sans"/>
               </a:rPr>
-              <a:t>custody_registry contract (Apache-2.0)</a:t>
-            </a:r>
-          </a:p>
-          <a:p>
-            <a:pPr algn="l">
-              <a:lnSpc>
-                <a:spcPct val="112000"/>
-              </a:lnSpc>
-              <a:spcAft>
-                <a:spcPts val="800"/>
-              </a:spcAft>
-            </a:pPr>
-            <a:r>
-              <a:rPr sz="2100" b="0">
-                <a:solidFill>
-                  <a:srgbClr val="556F00"/>
-                </a:solidFill>
-                <a:latin typeface="Instrument Sans"/>
-              </a:rPr>
-              <a:t>— </a:t>
-            </a:r>
-            <a:r>
-              <a:rPr sz="2100" b="0">
-                <a:solidFill>
-                  <a:srgbClr val="0E0F11"/>
-                </a:solidFill>
-                <a:latin typeface="Instrument Sans"/>
-              </a:rPr>
-              <a:t>Verify any chain, no permission (slide 4)</a:t>
+              <a:t>Verify any shipment, no login (slide 4)</a:t>
             </a:r>
           </a:p>
         </p:txBody>
@@ -15382,7 +15354,7 @@
                 </a:solidFill>
                 <a:latin typeface="Instrument Sans"/>
               </a:rPr>
-              <a:t>Fee from the financial institution; not priced yet</a:t>
+              <a:t>Paid by the financial institution; not priced</a:t>
             </a:r>
           </a:p>
         </p:txBody>

--- a/projects/hackmeridian-rail/deck/radox-custody-rail.pptx
+++ b/projects/hackmeridian-rail/deck/radox-custody-rail.pptx
@@ -12227,7 +12227,7 @@
                 </a:solidFill>
                 <a:latin typeface="Instrument Sans"/>
               </a:rPr>
-              <a:t>Plus an attestation (33379211); full hashes in proofs/lifecycle.json. A second run (proofs/three-machine.json): two team members authorised handovers on their own computers, with their own testnet keys.</a:t>
+              <a:t>Plus an attestation (33379211); full hashes in proofs/lifecycle.json. A second run (branch three-machine, proofs/three-machine.json): two team members authorised handovers on their own computers, with their own testnet keys.</a:t>
             </a:r>
           </a:p>
           <a:p>
@@ -13782,7 +13782,7 @@
                 </a:solidFill>
                 <a:latin typeface="Inter Tight"/>
               </a:rPr>
-              <a:t>Integrate once, reach every party</a:t>
+              <a:t>Integrate once, reach every party that joins</a:t>
             </a:r>
           </a:p>
         </p:txBody>
@@ -13818,15 +13818,6 @@
               </a:spcAft>
             </a:pPr>
             <a:r>
-              <a:rPr sz="2400" b="1">
-                <a:solidFill>
-                  <a:srgbClr val="0E0F11"/>
-                </a:solidFill>
-                <a:latin typeface="Instrument Sans"/>
-              </a:rPr>
-              <a:t>Today, parties often connect pair by pair. </a:t>
-            </a:r>
-            <a:r>
               <a:rPr sz="2400" b="0">
                 <a:solidFill>
                   <a:srgbClr val="0E0F11"/>
@@ -13846,7 +13837,7 @@
         </p:nvCxnSpPr>
         <p:spPr>
           <a:xfrm>
-            <a:off x="2331720" y="4572000"/>
+            <a:off x="2560320" y="4572000"/>
             <a:ext cx="826163" cy="600243"/>
           </a:xfrm>
           <a:prstGeom prst="line">
@@ -13881,7 +13872,7 @@
         </p:nvCxnSpPr>
         <p:spPr>
           <a:xfrm>
-            <a:off x="2331720" y="4572000"/>
+            <a:off x="2560320" y="4572000"/>
             <a:ext cx="510597" cy="1571456"/>
           </a:xfrm>
           <a:prstGeom prst="line">
@@ -13916,7 +13907,7 @@
         </p:nvCxnSpPr>
         <p:spPr>
           <a:xfrm flipH="1">
-            <a:off x="1821122" y="4572000"/>
+            <a:off x="2049722" y="4572000"/>
             <a:ext cx="510598" cy="1571456"/>
           </a:xfrm>
           <a:prstGeom prst="line">
@@ -13951,7 +13942,7 @@
         </p:nvCxnSpPr>
         <p:spPr>
           <a:xfrm flipH="1">
-            <a:off x="1505556" y="4572000"/>
+            <a:off x="1734156" y="4572000"/>
             <a:ext cx="826164" cy="600243"/>
           </a:xfrm>
           <a:prstGeom prst="line">
@@ -13986,7 +13977,7 @@
         </p:nvCxnSpPr>
         <p:spPr>
           <a:xfrm flipH="1">
-            <a:off x="2842317" y="5172243"/>
+            <a:off x="3070917" y="5172243"/>
             <a:ext cx="315566" cy="971213"/>
           </a:xfrm>
           <a:prstGeom prst="line">
@@ -14021,7 +14012,7 @@
         </p:nvCxnSpPr>
         <p:spPr>
           <a:xfrm flipH="1">
-            <a:off x="1821122" y="5172243"/>
+            <a:off x="2049722" y="5172243"/>
             <a:ext cx="1336761" cy="971213"/>
           </a:xfrm>
           <a:prstGeom prst="line">
@@ -14056,7 +14047,7 @@
         </p:nvCxnSpPr>
         <p:spPr>
           <a:xfrm flipH="1">
-            <a:off x="1505556" y="5172243"/>
+            <a:off x="1734156" y="5172243"/>
             <a:ext cx="1652327" cy="0"/>
           </a:xfrm>
           <a:prstGeom prst="line">
@@ -14091,7 +14082,7 @@
         </p:nvCxnSpPr>
         <p:spPr>
           <a:xfrm flipH="1">
-            <a:off x="1821122" y="6143456"/>
+            <a:off x="2049722" y="6143456"/>
             <a:ext cx="1021195" cy="0"/>
           </a:xfrm>
           <a:prstGeom prst="line">
@@ -14126,7 +14117,7 @@
         </p:nvCxnSpPr>
         <p:spPr>
           <a:xfrm flipH="1" flipV="1">
-            <a:off x="1505556" y="5172243"/>
+            <a:off x="1734156" y="5172243"/>
             <a:ext cx="1336761" cy="971213"/>
           </a:xfrm>
           <a:prstGeom prst="line">
@@ -14161,7 +14152,7 @@
         </p:nvCxnSpPr>
         <p:spPr>
           <a:xfrm flipH="1" flipV="1">
-            <a:off x="1505556" y="5172243"/>
+            <a:off x="1734156" y="5172243"/>
             <a:ext cx="315566" cy="971213"/>
           </a:xfrm>
           <a:prstGeom prst="line">
@@ -14196,7 +14187,7 @@
         </p:nvSpPr>
         <p:spPr>
           <a:xfrm>
-            <a:off x="2212848" y="4453128"/>
+            <a:off x="2441448" y="4453128"/>
             <a:ext cx="237744" cy="237744"/>
           </a:xfrm>
           <a:prstGeom prst="ellipse">
@@ -14240,7 +14231,7 @@
         </p:nvSpPr>
         <p:spPr>
           <a:xfrm>
-            <a:off x="3039011" y="5053371"/>
+            <a:off x="3267611" y="5053371"/>
             <a:ext cx="237744" cy="237744"/>
           </a:xfrm>
           <a:prstGeom prst="ellipse">
@@ -14284,7 +14275,7 @@
         </p:nvSpPr>
         <p:spPr>
           <a:xfrm>
-            <a:off x="2723445" y="6024584"/>
+            <a:off x="2952045" y="6024584"/>
             <a:ext cx="237744" cy="237744"/>
           </a:xfrm>
           <a:prstGeom prst="ellipse">
@@ -14328,7 +14319,7 @@
         </p:nvSpPr>
         <p:spPr>
           <a:xfrm>
-            <a:off x="1702250" y="6024584"/>
+            <a:off x="1930850" y="6024584"/>
             <a:ext cx="237744" cy="237744"/>
           </a:xfrm>
           <a:prstGeom prst="ellipse">
@@ -14372,7 +14363,7 @@
         </p:nvSpPr>
         <p:spPr>
           <a:xfrm>
-            <a:off x="1386684" y="5053371"/>
+            <a:off x="1615284" y="5053371"/>
             <a:ext cx="237744" cy="237744"/>
           </a:xfrm>
           <a:prstGeom prst="ellipse">
@@ -14416,7 +14407,7 @@
         </p:nvSpPr>
         <p:spPr>
           <a:xfrm>
-            <a:off x="685799" y="4069080"/>
+            <a:off x="914399" y="4069080"/>
             <a:ext cx="3291840" cy="411480"/>
           </a:xfrm>
           <a:prstGeom prst="rect">
@@ -14445,7 +14436,7 @@
                 </a:solidFill>
                 <a:latin typeface="JetBrains Mono"/>
               </a:rPr>
-              <a:t>TODAY · 10 LINKS</a:t>
+              <a:t>PAIR BY PAIR · 10 LINKS</a:t>
             </a:r>
           </a:p>
         </p:txBody>
@@ -14926,7 +14917,7 @@
                 </a:solidFill>
                 <a:latin typeface="JetBrains Mono"/>
               </a:rPr>
-              <a:t>ONE RAIL · 5 LINKS</a:t>
+              <a:t>ONE RADOX RAIL · 5 LINKS</a:t>
             </a:r>
           </a:p>
         </p:txBody>
@@ -15270,7 +15261,7 @@
                 </a:solidFill>
                 <a:latin typeface="Instrument Sans"/>
               </a:rPr>
-              <a:t>Custodian onboarding</a:t>
+              <a:t>Custodian onboarding, issuance controls, operation</a:t>
             </a:r>
           </a:p>
           <a:p>
@@ -15298,35 +15289,7 @@
                 </a:solidFill>
                 <a:latin typeface="Instrument Sans"/>
               </a:rPr>
-              <a:t>The API, issuance controls, operation</a:t>
-            </a:r>
-          </a:p>
-          <a:p>
-            <a:pPr algn="l">
-              <a:lnSpc>
-                <a:spcPct val="112000"/>
-              </a:lnSpc>
-              <a:spcAft>
-                <a:spcPts val="800"/>
-              </a:spcAft>
-            </a:pPr>
-            <a:r>
-              <a:rPr sz="2100" b="0">
-                <a:solidFill>
-                  <a:srgbClr val="0E0F11"/>
-                </a:solidFill>
-                <a:latin typeface="Instrument Sans"/>
-              </a:rPr>
-              <a:t>— </a:t>
-            </a:r>
-            <a:r>
-              <a:rPr sz="2100" b="0">
-                <a:solidFill>
-                  <a:srgbClr val="0E0F11"/>
-                </a:solidFill>
-                <a:latin typeface="Instrument Sans"/>
-              </a:rPr>
-              <a:t>Closed, not self-hostable</a:t>
+              <a:t>The API and backend: closed, not self-hostable</a:t>
             </a:r>
           </a:p>
           <a:p>
@@ -15440,7 +15403,7 @@
                 </a:solidFill>
                 <a:latin typeface="Instrument Sans"/>
               </a:rPr>
-              <a:t>Adoption still takes work: a key per party, its own signatures, a connection to the Radox API.</a:t>
+              <a:t>Adoption still takes work: a key per party, its own signatures, one connection to the rail (the Radox API).</a:t>
             </a:r>
           </a:p>
           <a:p>

--- a/projects/hackmeridian-rail/deck/radox-custody-rail.pptx
+++ b/projects/hackmeridian-rail/deck/radox-custody-rail.pptx
@@ -20754,7 +20754,7 @@
         </p:nvSpPr>
         <p:spPr>
           <a:xfrm>
-            <a:off x="914400" y="5852160"/>
+            <a:off x="914400" y="5669280"/>
             <a:ext cx="10241280" cy="914400"/>
           </a:xfrm>
           <a:prstGeom prst="rect">
@@ -20796,8 +20796,8 @@
         </p:nvSpPr>
         <p:spPr>
           <a:xfrm>
-            <a:off x="914400" y="6949440"/>
-            <a:ext cx="10241280" cy="1097280"/>
+            <a:off x="914400" y="6583680"/>
+            <a:ext cx="10241280" cy="1280160"/>
           </a:xfrm>
           <a:prstGeom prst="rect">
             <a:avLst/>
@@ -20834,7 +20834,7 @@
                 </a:solidFill>
                 <a:latin typeface="Instrument Sans"/>
               </a:rPr>
-              <a:t>a financier cannot see who holds the goods before paying. No customer has confirmed it yet; we are testing it with mentors.</a:t>
+              <a:t>a financier cannot see who holds the goods before paying. Mentors we spoke with at the event saw the need; no customer has confirmed it yet.</a:t>
             </a:r>
           </a:p>
         </p:txBody>

--- a/projects/hackmeridian-rail/deck/radox-custody-rail.pptx
+++ b/projects/hackmeridian-rail/deck/radox-custody-rail.pptx
@@ -20796,7 +20796,7 @@
         </p:nvSpPr>
         <p:spPr>
           <a:xfrm>
-            <a:off x="914400" y="6583680"/>
+            <a:off x="914400" y="6675120"/>
             <a:ext cx="10241280" cy="1280160"/>
           </a:xfrm>
           <a:prstGeom prst="rect">

--- a/projects/hackmeridian-rail/deck/radox-custody-rail.pptx
+++ b/projects/hackmeridian-rail/deck/radox-custody-rail.pptx
@@ -20834,7 +20834,7 @@
                 </a:solidFill>
                 <a:latin typeface="Instrument Sans"/>
               </a:rPr>
-              <a:t>a financier cannot see who holds the goods before paying. Mentors we spoke with at the event saw the need; no customer has confirmed it yet.</a:t>
+              <a:t>a financier cannot see who holds the goods before paying. Mentors were supportive; informal feedback, no customer has confirmed the need yet.</a:t>
             </a:r>
           </a:p>
         </p:txBody>

--- a/projects/hackmeridian-rail/deck/radox-custody-rail.pptx
+++ b/projects/hackmeridian-rail/deck/radox-custody-rail.pptx
@@ -20834,7 +20834,7 @@
                 </a:solidFill>
                 <a:latin typeface="Instrument Sans"/>
               </a:rPr>
-              <a:t>a financier cannot see who holds the goods before paying. Mentors were supportive; informal feedback, no customer has confirmed the need yet.</a:t>
+              <a:t>a financier cannot see who holds the goods before paying. No customer has confirmed it yet.</a:t>
             </a:r>
           </a:p>
         </p:txBody>

--- a/projects/hackmeridian-rail/deck/radox-custody-rail.pptx
+++ b/projects/hackmeridian-rail/deck/radox-custody-rail.pptx
@@ -10541,7 +10541,7 @@
         <p:spPr>
           <a:xfrm>
             <a:off x="914400" y="1417320"/>
-            <a:ext cx="3291839" cy="475488"/>
+            <a:ext cx="4800600" cy="475488"/>
           </a:xfrm>
           <a:prstGeom prst="roundRect">
             <a:avLst>
@@ -10580,7 +10580,7 @@
                 <a:cs typeface="JetBrains Mono"/>
                 <a:sym typeface="JetBrains Mono"/>
               </a:rPr>
-              <a:t>TECHNICAL WORKFLOW</a:t>
+              <a:t>THE PRODUCT · LIVE ON TESTNET</a:t>
             </a:r>
             <a:endParaRPr/>
           </a:p>
@@ -10748,30 +10748,54 @@
                 </a:solidFill>
                 <a:latin typeface="Inter Tight"/>
               </a:rPr>
-              <a:t>7 testnet transactions. All successful.</a:t>
-            </a:r>
-          </a:p>
-        </p:txBody>
-      </p:sp>
-      <p:sp>
-        <p:nvSpPr>
-          <p:cNvPr id="125" name="Rectangle 124"/>
+              <a:t>7 testnet transactions. Anyone can check them.</a:t>
+            </a:r>
+          </a:p>
+        </p:txBody>
+      </p:sp>
+      <p:pic>
+        <p:nvPicPr>
+          <p:cNvPr id="125" name="Picture 124" descr="page-handovers-rows.png"/>
+          <p:cNvPicPr>
+            <a:picLocks noChangeAspect="1"/>
+          </p:cNvPicPr>
+          <p:nvPr/>
+        </p:nvPicPr>
+        <p:blipFill>
+          <a:blip r:embed="rId3"/>
+          <a:stretch>
+            <a:fillRect/>
+          </a:stretch>
+        </p:blipFill>
+        <p:spPr>
+          <a:xfrm>
+            <a:off x="914400" y="3108960"/>
+            <a:ext cx="6766560" cy="4591594"/>
+          </a:xfrm>
+          <a:prstGeom prst="rect">
+            <a:avLst/>
+          </a:prstGeom>
+        </p:spPr>
+      </p:pic>
+      <p:sp>
+        <p:nvSpPr>
+          <p:cNvPr id="126" name="Rectangle 125"/>
           <p:cNvSpPr/>
           <p:nvPr/>
         </p:nvSpPr>
         <p:spPr>
           <a:xfrm>
-            <a:off x="2090057" y="3415284"/>
-            <a:ext cx="14107885" cy="27432"/>
-          </a:xfrm>
-          <a:prstGeom prst="rect">
-            <a:avLst/>
-          </a:prstGeom>
-          <a:solidFill>
-            <a:srgbClr val="556F00"/>
-          </a:solidFill>
-          <a:ln>
-            <a:noFill/>
+            <a:off x="914400" y="3108960"/>
+            <a:ext cx="6766560" cy="4591594"/>
+          </a:xfrm>
+          <a:prstGeom prst="rect">
+            <a:avLst/>
+          </a:prstGeom>
+          <a:noFill/>
+          <a:ln w="12700">
+            <a:solidFill>
+              <a:srgbClr val="2A2F36"/>
+            </a:solidFill>
           </a:ln>
           <a:effectLst/>
         </p:spPr>
@@ -10799,58 +10823,14 @@
       </p:sp>
       <p:sp>
         <p:nvSpPr>
-          <p:cNvPr id="126" name="Oval 125"/>
-          <p:cNvSpPr/>
-          <p:nvPr/>
-        </p:nvSpPr>
-        <p:spPr>
-          <a:xfrm>
-            <a:off x="1907177" y="3246120"/>
-            <a:ext cx="365760" cy="365760"/>
-          </a:xfrm>
-          <a:prstGeom prst="ellipse">
-            <a:avLst/>
-          </a:prstGeom>
-          <a:solidFill>
-            <a:srgbClr val="C6F24E"/>
-          </a:solidFill>
-          <a:ln>
-            <a:noFill/>
-          </a:ln>
-          <a:effectLst/>
-        </p:spPr>
-        <p:style>
-          <a:lnRef idx="1">
-            <a:schemeClr val="accent1"/>
-          </a:lnRef>
-          <a:fillRef idx="3">
-            <a:schemeClr val="accent1"/>
-          </a:fillRef>
-          <a:effectRef idx="0">
-            <a:schemeClr val="accent1"/>
-          </a:effectRef>
-          <a:fontRef idx="minor">
-            <a:schemeClr val="lt1"/>
-          </a:fontRef>
-        </p:style>
-        <p:txBody>
-          <a:bodyPr rtlCol="0" anchor="ctr"/>
-          <a:lstStyle/>
-          <a:p>
-            <a:pPr algn="ctr"/>
-          </a:p>
-        </p:txBody>
-      </p:sp>
-      <p:sp>
-        <p:nvSpPr>
           <p:cNvPr id="127" name="TextBox 126"/>
           <p:cNvSpPr txBox="1"/>
           <p:nvPr/>
         </p:nvSpPr>
         <p:spPr>
           <a:xfrm>
-            <a:off x="960120" y="3749039"/>
-            <a:ext cx="2259874" cy="914400"/>
+            <a:off x="8229600" y="3063240"/>
+            <a:ext cx="9144000" cy="365760"/>
           </a:xfrm>
           <a:prstGeom prst="rect">
             <a:avLst/>
@@ -10863,55 +10843,96 @@
           </a:bodyPr>
           <a:lstStyle/>
           <a:p>
-            <a:pPr algn="ctr">
+            <a:pPr algn="l">
               <a:lnSpc>
                 <a:spcPct val="112000"/>
               </a:lnSpc>
               <a:spcAft>
-                <a:spcPts val="200"/>
+                <a:spcPts val="600"/>
               </a:spcAft>
             </a:pPr>
             <a:r>
-              <a:rPr sz="2400" b="1">
+              <a:rPr sz="1800" b="0">
+                <a:solidFill>
+                  <a:srgbClr val="C6F24E"/>
+                </a:solidFill>
+                <a:latin typeface="JetBrains Mono"/>
+              </a:rPr>
+              <a:t>2b3d51f0</a:t>
+            </a:r>
+            <a:r>
+              <a:rPr sz="1800" b="0">
                 <a:solidFill>
                   <a:srgbClr val="E7E8EA"/>
                 </a:solidFill>
                 <a:latin typeface="Instrument Sans"/>
               </a:rPr>
-              <a:t>open</a:t>
-            </a:r>
-          </a:p>
-          <a:p>
-            <a:pPr algn="ctr">
+              <a:t>   open · operator</a:t>
+            </a:r>
+          </a:p>
+        </p:txBody>
+      </p:sp>
+      <p:sp>
+        <p:nvSpPr>
+          <p:cNvPr id="128" name="TextBox 127"/>
+          <p:cNvSpPr txBox="1"/>
+          <p:nvPr/>
+        </p:nvSpPr>
+        <p:spPr>
+          <a:xfrm>
+            <a:off x="8229600" y="3429000"/>
+            <a:ext cx="9144000" cy="365760"/>
+          </a:xfrm>
+          <a:prstGeom prst="rect">
+            <a:avLst/>
+          </a:prstGeom>
+          <a:noFill/>
+        </p:spPr>
+        <p:txBody>
+          <a:bodyPr wrap="square" lIns="0" rIns="0" tIns="0" bIns="0" anchor="t">
+            <a:spAutoFit/>
+          </a:bodyPr>
+          <a:lstStyle/>
+          <a:p>
+            <a:pPr algn="l">
               <a:lnSpc>
                 <a:spcPct val="112000"/>
               </a:lnSpc>
               <a:spcAft>
-                <a:spcPts val="200"/>
+                <a:spcPts val="600"/>
               </a:spcAft>
             </a:pPr>
             <a:r>
               <a:rPr sz="1800" b="0">
                 <a:solidFill>
-                  <a:srgbClr val="A3A8B0"/>
+                  <a:srgbClr val="C6F24E"/>
+                </a:solidFill>
+                <a:latin typeface="JetBrains Mono"/>
+              </a:rPr>
+              <a:t>635c99ac</a:t>
+            </a:r>
+            <a:r>
+              <a:rPr sz="1800" b="0">
+                <a:solidFill>
+                  <a:srgbClr val="E7E8EA"/>
                 </a:solidFill>
                 <a:latin typeface="Instrument Sans"/>
               </a:rPr>
-              <a:t>operator</a:t>
-            </a:r>
-          </a:p>
-        </p:txBody>
-      </p:sp>
-      <p:sp>
-        <p:nvSpPr>
-          <p:cNvPr id="128" name="TextBox 127"/>
+              <a:t>   handover 1 · Warehouse → Port</a:t>
+            </a:r>
+          </a:p>
+        </p:txBody>
+      </p:sp>
+      <p:sp>
+        <p:nvSpPr>
+          <p:cNvPr id="129" name="TextBox 128"/>
           <p:cNvSpPr txBox="1"/>
           <p:nvPr/>
         </p:nvSpPr>
         <p:spPr>
           <a:xfrm>
-            <a:off x="960120" y="4663440"/>
-            <a:ext cx="2259874" cy="365760"/>
+            <a:off x="8229600" y="3794760"/>
+            <a:ext cx="9144000" cy="365760"/>
           </a:xfrm>
           <a:prstGeom prst="rect">
             <a:avLst/>
@@ -10924,7 +10945,7 @@
           </a:bodyPr>
           <a:lstStyle/>
           <a:p>
-            <a:pPr algn="ctr">
+            <a:pPr algn="l">
               <a:lnSpc>
                 <a:spcPct val="112000"/>
               </a:lnSpc>
@@ -10935,56 +10956,21 @@
             <a:r>
               <a:rPr sz="1800" b="0">
                 <a:solidFill>
-                  <a:srgbClr val="9FB2CC"/>
+                  <a:srgbClr val="C6F24E"/>
                 </a:solidFill>
                 <a:latin typeface="JetBrains Mono"/>
               </a:rPr>
-              <a:t>2b3d51f0</a:t>
-            </a:r>
-          </a:p>
-        </p:txBody>
-      </p:sp>
-      <p:sp>
-        <p:nvSpPr>
-          <p:cNvPr id="129" name="Oval 128"/>
-          <p:cNvSpPr/>
-          <p:nvPr/>
-        </p:nvSpPr>
-        <p:spPr>
-          <a:xfrm>
-            <a:off x="4322499" y="3310128"/>
-            <a:ext cx="237744" cy="237744"/>
-          </a:xfrm>
-          <a:prstGeom prst="ellipse">
-            <a:avLst/>
-          </a:prstGeom>
-          <a:solidFill>
-            <a:srgbClr val="C6F24E"/>
-          </a:solidFill>
-          <a:ln>
-            <a:noFill/>
-          </a:ln>
-          <a:effectLst/>
-        </p:spPr>
-        <p:style>
-          <a:lnRef idx="1">
-            <a:schemeClr val="accent1"/>
-          </a:lnRef>
-          <a:fillRef idx="3">
-            <a:schemeClr val="accent1"/>
-          </a:fillRef>
-          <a:effectRef idx="0">
-            <a:schemeClr val="accent1"/>
-          </a:effectRef>
-          <a:fontRef idx="minor">
-            <a:schemeClr val="lt1"/>
-          </a:fontRef>
-        </p:style>
-        <p:txBody>
-          <a:bodyPr rtlCol="0" anchor="ctr"/>
-          <a:lstStyle/>
-          <a:p>
-            <a:pPr algn="ctr"/>
+              <a:t>56a0f006</a:t>
+            </a:r>
+            <a:r>
+              <a:rPr sz="1800" b="0">
+                <a:solidFill>
+                  <a:srgbClr val="E7E8EA"/>
+                </a:solidFill>
+                <a:latin typeface="Instrument Sans"/>
+              </a:rPr>
+              <a:t>   handover 2 · Port → Carrier</a:t>
+            </a:r>
           </a:p>
         </p:txBody>
       </p:sp>
@@ -10996,8 +10982,8 @@
         </p:nvSpPr>
         <p:spPr>
           <a:xfrm>
-            <a:off x="3311434" y="3749039"/>
-            <a:ext cx="2259874" cy="914400"/>
+            <a:off x="8229600" y="4160520"/>
+            <a:ext cx="9144000" cy="365760"/>
           </a:xfrm>
           <a:prstGeom prst="rect">
             <a:avLst/>
@@ -11010,55 +10996,96 @@
           </a:bodyPr>
           <a:lstStyle/>
           <a:p>
-            <a:pPr algn="ctr">
+            <a:pPr algn="l">
               <a:lnSpc>
                 <a:spcPct val="112000"/>
               </a:lnSpc>
               <a:spcAft>
-                <a:spcPts val="200"/>
+                <a:spcPts val="600"/>
               </a:spcAft>
             </a:pPr>
             <a:r>
-              <a:rPr sz="2400" b="1">
+              <a:rPr sz="1800" b="0">
+                <a:solidFill>
+                  <a:srgbClr val="C6F24E"/>
+                </a:solidFill>
+                <a:latin typeface="JetBrains Mono"/>
+              </a:rPr>
+              <a:t>ac268a49</a:t>
+            </a:r>
+            <a:r>
+              <a:rPr sz="1800" b="0">
                 <a:solidFill>
                   <a:srgbClr val="E7E8EA"/>
                 </a:solidFill>
                 <a:latin typeface="Instrument Sans"/>
               </a:rPr>
-              <a:t>handover 1</a:t>
-            </a:r>
-          </a:p>
-          <a:p>
-            <a:pPr algn="ctr">
+              <a:t>   handover 3 · Carrier → Customs</a:t>
+            </a:r>
+          </a:p>
+        </p:txBody>
+      </p:sp>
+      <p:sp>
+        <p:nvSpPr>
+          <p:cNvPr id="131" name="TextBox 130"/>
+          <p:cNvSpPr txBox="1"/>
+          <p:nvPr/>
+        </p:nvSpPr>
+        <p:spPr>
+          <a:xfrm>
+            <a:off x="8229600" y="4526280"/>
+            <a:ext cx="9144000" cy="365760"/>
+          </a:xfrm>
+          <a:prstGeom prst="rect">
+            <a:avLst/>
+          </a:prstGeom>
+          <a:noFill/>
+        </p:spPr>
+        <p:txBody>
+          <a:bodyPr wrap="square" lIns="0" rIns="0" tIns="0" bIns="0" anchor="t">
+            <a:spAutoFit/>
+          </a:bodyPr>
+          <a:lstStyle/>
+          <a:p>
+            <a:pPr algn="l">
               <a:lnSpc>
                 <a:spcPct val="112000"/>
               </a:lnSpc>
               <a:spcAft>
-                <a:spcPts val="200"/>
+                <a:spcPts val="600"/>
               </a:spcAft>
             </a:pPr>
             <a:r>
               <a:rPr sz="1800" b="0">
                 <a:solidFill>
-                  <a:srgbClr val="A3A8B0"/>
+                  <a:srgbClr val="C6F24E"/>
+                </a:solidFill>
+                <a:latin typeface="JetBrains Mono"/>
+              </a:rPr>
+              <a:t>5199d4fb</a:t>
+            </a:r>
+            <a:r>
+              <a:rPr sz="1800" b="0">
+                <a:solidFill>
+                  <a:srgbClr val="E7E8EA"/>
                 </a:solidFill>
                 <a:latin typeface="Instrument Sans"/>
               </a:rPr>
-              <a:t>Warehouse → Port</a:t>
-            </a:r>
-          </a:p>
-        </p:txBody>
-      </p:sp>
-      <p:sp>
-        <p:nvSpPr>
-          <p:cNvPr id="131" name="TextBox 130"/>
+              <a:t>   handover 4 · Customs → Recipient</a:t>
+            </a:r>
+          </a:p>
+        </p:txBody>
+      </p:sp>
+      <p:sp>
+        <p:nvSpPr>
+          <p:cNvPr id="132" name="TextBox 131"/>
           <p:cNvSpPr txBox="1"/>
           <p:nvPr/>
         </p:nvSpPr>
         <p:spPr>
           <a:xfrm>
-            <a:off x="3311434" y="4663440"/>
-            <a:ext cx="2259874" cy="365760"/>
+            <a:off x="8229600" y="4892040"/>
+            <a:ext cx="9144000" cy="365760"/>
           </a:xfrm>
           <a:prstGeom prst="rect">
             <a:avLst/>
@@ -11071,7 +11098,7 @@
           </a:bodyPr>
           <a:lstStyle/>
           <a:p>
-            <a:pPr algn="ctr">
+            <a:pPr algn="l">
               <a:lnSpc>
                 <a:spcPct val="112000"/>
               </a:lnSpc>
@@ -11082,56 +11109,21 @@
             <a:r>
               <a:rPr sz="1800" b="0">
                 <a:solidFill>
-                  <a:srgbClr val="9FB2CC"/>
+                  <a:srgbClr val="C6F24E"/>
                 </a:solidFill>
                 <a:latin typeface="JetBrains Mono"/>
               </a:rPr>
-              <a:t>635c99ac</a:t>
-            </a:r>
-          </a:p>
-        </p:txBody>
-      </p:sp>
-      <p:sp>
-        <p:nvSpPr>
-          <p:cNvPr id="132" name="Oval 131"/>
-          <p:cNvSpPr/>
-          <p:nvPr/>
-        </p:nvSpPr>
-        <p:spPr>
-          <a:xfrm>
-            <a:off x="6673813" y="3310128"/>
-            <a:ext cx="237744" cy="237744"/>
-          </a:xfrm>
-          <a:prstGeom prst="ellipse">
-            <a:avLst/>
-          </a:prstGeom>
-          <a:solidFill>
-            <a:srgbClr val="C6F24E"/>
-          </a:solidFill>
-          <a:ln>
-            <a:noFill/>
-          </a:ln>
-          <a:effectLst/>
-        </p:spPr>
-        <p:style>
-          <a:lnRef idx="1">
-            <a:schemeClr val="accent1"/>
-          </a:lnRef>
-          <a:fillRef idx="3">
-            <a:schemeClr val="accent1"/>
-          </a:fillRef>
-          <a:effectRef idx="0">
-            <a:schemeClr val="accent1"/>
-          </a:effectRef>
-          <a:fontRef idx="minor">
-            <a:schemeClr val="lt1"/>
-          </a:fontRef>
-        </p:style>
-        <p:txBody>
-          <a:bodyPr rtlCol="0" anchor="ctr"/>
-          <a:lstStyle/>
-          <a:p>
-            <a:pPr algn="ctr"/>
+              <a:t>919def8c</a:t>
+            </a:r>
+            <a:r>
+              <a:rPr sz="1800" b="0">
+                <a:solidFill>
+                  <a:srgbClr val="E7E8EA"/>
+                </a:solidFill>
+                <a:latin typeface="Instrument Sans"/>
+              </a:rPr>
+              <a:t>   deliver · Recipient → Holder</a:t>
+            </a:r>
           </a:p>
         </p:txBody>
       </p:sp>
@@ -11143,8 +11135,8 @@
         </p:nvSpPr>
         <p:spPr>
           <a:xfrm>
-            <a:off x="5662748" y="3749039"/>
-            <a:ext cx="2259874" cy="914400"/>
+            <a:off x="8229600" y="5257800"/>
+            <a:ext cx="9144000" cy="365760"/>
           </a:xfrm>
           <a:prstGeom prst="rect">
             <a:avLst/>
@@ -11157,685 +11149,45 @@
           </a:bodyPr>
           <a:lstStyle/>
           <a:p>
-            <a:pPr algn="ctr">
+            <a:pPr algn="l">
               <a:lnSpc>
                 <a:spcPct val="112000"/>
               </a:lnSpc>
               <a:spcAft>
-                <a:spcPts val="200"/>
+                <a:spcPts val="600"/>
               </a:spcAft>
             </a:pPr>
             <a:r>
-              <a:rPr sz="2400" b="1">
-                <a:solidFill>
-                  <a:srgbClr val="E7E8EA"/>
-                </a:solidFill>
-                <a:latin typeface="Instrument Sans"/>
-              </a:rPr>
-              <a:t>handover 2</a:t>
-            </a:r>
-          </a:p>
-          <a:p>
-            <a:pPr algn="ctr">
-              <a:lnSpc>
-                <a:spcPct val="112000"/>
-              </a:lnSpc>
-              <a:spcAft>
-                <a:spcPts val="200"/>
-              </a:spcAft>
-            </a:pPr>
-            <a:r>
               <a:rPr sz="1800" b="0">
                 <a:solidFill>
-                  <a:srgbClr val="A3A8B0"/>
-                </a:solidFill>
-                <a:latin typeface="Instrument Sans"/>
-              </a:rPr>
-              <a:t>Port → Carrier</a:t>
-            </a:r>
-          </a:p>
-        </p:txBody>
-      </p:sp>
-      <p:sp>
-        <p:nvSpPr>
-          <p:cNvPr id="134" name="TextBox 133"/>
-          <p:cNvSpPr txBox="1"/>
-          <p:nvPr/>
-        </p:nvSpPr>
-        <p:spPr>
-          <a:xfrm>
-            <a:off x="5662748" y="4663440"/>
-            <a:ext cx="2259874" cy="365760"/>
-          </a:xfrm>
-          <a:prstGeom prst="rect">
-            <a:avLst/>
-          </a:prstGeom>
-          <a:noFill/>
-        </p:spPr>
-        <p:txBody>
-          <a:bodyPr wrap="square" lIns="0" rIns="0" tIns="0" bIns="0" anchor="t">
-            <a:spAutoFit/>
-          </a:bodyPr>
-          <a:lstStyle/>
-          <a:p>
-            <a:pPr algn="ctr">
-              <a:lnSpc>
-                <a:spcPct val="112000"/>
-              </a:lnSpc>
-              <a:spcAft>
-                <a:spcPts val="600"/>
-              </a:spcAft>
-            </a:pPr>
-            <a:r>
-              <a:rPr sz="1800" b="0">
-                <a:solidFill>
-                  <a:srgbClr val="9FB2CC"/>
-                </a:solidFill>
-                <a:latin typeface="JetBrains Mono"/>
-              </a:rPr>
-              <a:t>56a0f006</a:t>
-            </a:r>
-          </a:p>
-        </p:txBody>
-      </p:sp>
-      <p:sp>
-        <p:nvSpPr>
-          <p:cNvPr id="135" name="Oval 134"/>
-          <p:cNvSpPr/>
-          <p:nvPr/>
-        </p:nvSpPr>
-        <p:spPr>
-          <a:xfrm>
-            <a:off x="9025128" y="3310128"/>
-            <a:ext cx="237744" cy="237744"/>
-          </a:xfrm>
-          <a:prstGeom prst="ellipse">
-            <a:avLst/>
-          </a:prstGeom>
-          <a:solidFill>
-            <a:srgbClr val="C6F24E"/>
-          </a:solidFill>
-          <a:ln>
-            <a:noFill/>
-          </a:ln>
-          <a:effectLst/>
-        </p:spPr>
-        <p:style>
-          <a:lnRef idx="1">
-            <a:schemeClr val="accent1"/>
-          </a:lnRef>
-          <a:fillRef idx="3">
-            <a:schemeClr val="accent1"/>
-          </a:fillRef>
-          <a:effectRef idx="0">
-            <a:schemeClr val="accent1"/>
-          </a:effectRef>
-          <a:fontRef idx="minor">
-            <a:schemeClr val="lt1"/>
-          </a:fontRef>
-        </p:style>
-        <p:txBody>
-          <a:bodyPr rtlCol="0" anchor="ctr"/>
-          <a:lstStyle/>
-          <a:p>
-            <a:pPr algn="ctr"/>
-          </a:p>
-        </p:txBody>
-      </p:sp>
-      <p:sp>
-        <p:nvSpPr>
-          <p:cNvPr id="136" name="TextBox 135"/>
-          <p:cNvSpPr txBox="1"/>
-          <p:nvPr/>
-        </p:nvSpPr>
-        <p:spPr>
-          <a:xfrm>
-            <a:off x="8014062" y="3749039"/>
-            <a:ext cx="2259874" cy="914400"/>
-          </a:xfrm>
-          <a:prstGeom prst="rect">
-            <a:avLst/>
-          </a:prstGeom>
-          <a:noFill/>
-        </p:spPr>
-        <p:txBody>
-          <a:bodyPr wrap="square" lIns="0" rIns="0" tIns="0" bIns="0" anchor="t">
-            <a:spAutoFit/>
-          </a:bodyPr>
-          <a:lstStyle/>
-          <a:p>
-            <a:pPr algn="ctr">
-              <a:lnSpc>
-                <a:spcPct val="112000"/>
-              </a:lnSpc>
-              <a:spcAft>
-                <a:spcPts val="200"/>
-              </a:spcAft>
-            </a:pPr>
-            <a:r>
-              <a:rPr sz="2400" b="1">
-                <a:solidFill>
-                  <a:srgbClr val="E7E8EA"/>
-                </a:solidFill>
-                <a:latin typeface="Instrument Sans"/>
-              </a:rPr>
-              <a:t>handover 3</a:t>
-            </a:r>
-          </a:p>
-          <a:p>
-            <a:pPr algn="ctr">
-              <a:lnSpc>
-                <a:spcPct val="112000"/>
-              </a:lnSpc>
-              <a:spcAft>
-                <a:spcPts val="200"/>
-              </a:spcAft>
-            </a:pPr>
-            <a:r>
-              <a:rPr sz="1800" b="0">
-                <a:solidFill>
-                  <a:srgbClr val="A3A8B0"/>
-                </a:solidFill>
-                <a:latin typeface="Instrument Sans"/>
-              </a:rPr>
-              <a:t>Carrier → Customs</a:t>
-            </a:r>
-          </a:p>
-        </p:txBody>
-      </p:sp>
-      <p:sp>
-        <p:nvSpPr>
-          <p:cNvPr id="137" name="TextBox 136"/>
-          <p:cNvSpPr txBox="1"/>
-          <p:nvPr/>
-        </p:nvSpPr>
-        <p:spPr>
-          <a:xfrm>
-            <a:off x="8014062" y="4663440"/>
-            <a:ext cx="2259874" cy="365760"/>
-          </a:xfrm>
-          <a:prstGeom prst="rect">
-            <a:avLst/>
-          </a:prstGeom>
-          <a:noFill/>
-        </p:spPr>
-        <p:txBody>
-          <a:bodyPr wrap="square" lIns="0" rIns="0" tIns="0" bIns="0" anchor="t">
-            <a:spAutoFit/>
-          </a:bodyPr>
-          <a:lstStyle/>
-          <a:p>
-            <a:pPr algn="ctr">
-              <a:lnSpc>
-                <a:spcPct val="112000"/>
-              </a:lnSpc>
-              <a:spcAft>
-                <a:spcPts val="600"/>
-              </a:spcAft>
-            </a:pPr>
-            <a:r>
-              <a:rPr sz="1800" b="0">
-                <a:solidFill>
-                  <a:srgbClr val="9FB2CC"/>
-                </a:solidFill>
-                <a:latin typeface="JetBrains Mono"/>
-              </a:rPr>
-              <a:t>ac268a49</a:t>
-            </a:r>
-          </a:p>
-        </p:txBody>
-      </p:sp>
-      <p:sp>
-        <p:nvSpPr>
-          <p:cNvPr id="138" name="Oval 137"/>
-          <p:cNvSpPr/>
-          <p:nvPr/>
-        </p:nvSpPr>
-        <p:spPr>
-          <a:xfrm>
-            <a:off x="11376442" y="3310128"/>
-            <a:ext cx="237744" cy="237744"/>
-          </a:xfrm>
-          <a:prstGeom prst="ellipse">
-            <a:avLst/>
-          </a:prstGeom>
-          <a:solidFill>
-            <a:srgbClr val="C6F24E"/>
-          </a:solidFill>
-          <a:ln>
-            <a:noFill/>
-          </a:ln>
-          <a:effectLst/>
-        </p:spPr>
-        <p:style>
-          <a:lnRef idx="1">
-            <a:schemeClr val="accent1"/>
-          </a:lnRef>
-          <a:fillRef idx="3">
-            <a:schemeClr val="accent1"/>
-          </a:fillRef>
-          <a:effectRef idx="0">
-            <a:schemeClr val="accent1"/>
-          </a:effectRef>
-          <a:fontRef idx="minor">
-            <a:schemeClr val="lt1"/>
-          </a:fontRef>
-        </p:style>
-        <p:txBody>
-          <a:bodyPr rtlCol="0" anchor="ctr"/>
-          <a:lstStyle/>
-          <a:p>
-            <a:pPr algn="ctr"/>
-          </a:p>
-        </p:txBody>
-      </p:sp>
-      <p:sp>
-        <p:nvSpPr>
-          <p:cNvPr id="139" name="TextBox 138"/>
-          <p:cNvSpPr txBox="1"/>
-          <p:nvPr/>
-        </p:nvSpPr>
-        <p:spPr>
-          <a:xfrm>
-            <a:off x="10365377" y="3749039"/>
-            <a:ext cx="2259874" cy="914400"/>
-          </a:xfrm>
-          <a:prstGeom prst="rect">
-            <a:avLst/>
-          </a:prstGeom>
-          <a:noFill/>
-        </p:spPr>
-        <p:txBody>
-          <a:bodyPr wrap="square" lIns="0" rIns="0" tIns="0" bIns="0" anchor="t">
-            <a:spAutoFit/>
-          </a:bodyPr>
-          <a:lstStyle/>
-          <a:p>
-            <a:pPr algn="ctr">
-              <a:lnSpc>
-                <a:spcPct val="112000"/>
-              </a:lnSpc>
-              <a:spcAft>
-                <a:spcPts val="200"/>
-              </a:spcAft>
-            </a:pPr>
-            <a:r>
-              <a:rPr sz="2400" b="1">
-                <a:solidFill>
-                  <a:srgbClr val="E7E8EA"/>
-                </a:solidFill>
-                <a:latin typeface="Instrument Sans"/>
-              </a:rPr>
-              <a:t>handover 4</a:t>
-            </a:r>
-          </a:p>
-          <a:p>
-            <a:pPr algn="ctr">
-              <a:lnSpc>
-                <a:spcPct val="112000"/>
-              </a:lnSpc>
-              <a:spcAft>
-                <a:spcPts val="200"/>
-              </a:spcAft>
-            </a:pPr>
-            <a:r>
-              <a:rPr sz="1800" b="0">
-                <a:solidFill>
-                  <a:srgbClr val="A3A8B0"/>
-                </a:solidFill>
-                <a:latin typeface="Instrument Sans"/>
-              </a:rPr>
-              <a:t>Customs → Recipient</a:t>
-            </a:r>
-          </a:p>
-        </p:txBody>
-      </p:sp>
-      <p:sp>
-        <p:nvSpPr>
-          <p:cNvPr id="140" name="TextBox 139"/>
-          <p:cNvSpPr txBox="1"/>
-          <p:nvPr/>
-        </p:nvSpPr>
-        <p:spPr>
-          <a:xfrm>
-            <a:off x="10365377" y="4663440"/>
-            <a:ext cx="2259874" cy="365760"/>
-          </a:xfrm>
-          <a:prstGeom prst="rect">
-            <a:avLst/>
-          </a:prstGeom>
-          <a:noFill/>
-        </p:spPr>
-        <p:txBody>
-          <a:bodyPr wrap="square" lIns="0" rIns="0" tIns="0" bIns="0" anchor="t">
-            <a:spAutoFit/>
-          </a:bodyPr>
-          <a:lstStyle/>
-          <a:p>
-            <a:pPr algn="ctr">
-              <a:lnSpc>
-                <a:spcPct val="112000"/>
-              </a:lnSpc>
-              <a:spcAft>
-                <a:spcPts val="600"/>
-              </a:spcAft>
-            </a:pPr>
-            <a:r>
-              <a:rPr sz="1800" b="0">
-                <a:solidFill>
-                  <a:srgbClr val="9FB2CC"/>
-                </a:solidFill>
-                <a:latin typeface="JetBrains Mono"/>
-              </a:rPr>
-              <a:t>5199d4fb</a:t>
-            </a:r>
-          </a:p>
-        </p:txBody>
-      </p:sp>
-      <p:sp>
-        <p:nvSpPr>
-          <p:cNvPr id="141" name="Oval 140"/>
-          <p:cNvSpPr/>
-          <p:nvPr/>
-        </p:nvSpPr>
-        <p:spPr>
-          <a:xfrm>
-            <a:off x="13727756" y="3310128"/>
-            <a:ext cx="237744" cy="237744"/>
-          </a:xfrm>
-          <a:prstGeom prst="ellipse">
-            <a:avLst/>
-          </a:prstGeom>
-          <a:solidFill>
-            <a:srgbClr val="C6F24E"/>
-          </a:solidFill>
-          <a:ln>
-            <a:noFill/>
-          </a:ln>
-          <a:effectLst/>
-        </p:spPr>
-        <p:style>
-          <a:lnRef idx="1">
-            <a:schemeClr val="accent1"/>
-          </a:lnRef>
-          <a:fillRef idx="3">
-            <a:schemeClr val="accent1"/>
-          </a:fillRef>
-          <a:effectRef idx="0">
-            <a:schemeClr val="accent1"/>
-          </a:effectRef>
-          <a:fontRef idx="minor">
-            <a:schemeClr val="lt1"/>
-          </a:fontRef>
-        </p:style>
-        <p:txBody>
-          <a:bodyPr rtlCol="0" anchor="ctr"/>
-          <a:lstStyle/>
-          <a:p>
-            <a:pPr algn="ctr"/>
-          </a:p>
-        </p:txBody>
-      </p:sp>
-      <p:sp>
-        <p:nvSpPr>
-          <p:cNvPr id="142" name="TextBox 141"/>
-          <p:cNvSpPr txBox="1"/>
-          <p:nvPr/>
-        </p:nvSpPr>
-        <p:spPr>
-          <a:xfrm>
-            <a:off x="12716691" y="3749039"/>
-            <a:ext cx="2259874" cy="914400"/>
-          </a:xfrm>
-          <a:prstGeom prst="rect">
-            <a:avLst/>
-          </a:prstGeom>
-          <a:noFill/>
-        </p:spPr>
-        <p:txBody>
-          <a:bodyPr wrap="square" lIns="0" rIns="0" tIns="0" bIns="0" anchor="t">
-            <a:spAutoFit/>
-          </a:bodyPr>
-          <a:lstStyle/>
-          <a:p>
-            <a:pPr algn="ctr">
-              <a:lnSpc>
-                <a:spcPct val="112000"/>
-              </a:lnSpc>
-              <a:spcAft>
-                <a:spcPts val="200"/>
-              </a:spcAft>
-            </a:pPr>
-            <a:r>
-              <a:rPr sz="2400" b="1">
-                <a:solidFill>
-                  <a:srgbClr val="E7E8EA"/>
-                </a:solidFill>
-                <a:latin typeface="Instrument Sans"/>
-              </a:rPr>
-              <a:t>deliver</a:t>
-            </a:r>
-          </a:p>
-          <a:p>
-            <a:pPr algn="ctr">
-              <a:lnSpc>
-                <a:spcPct val="112000"/>
-              </a:lnSpc>
-              <a:spcAft>
-                <a:spcPts val="200"/>
-              </a:spcAft>
-            </a:pPr>
-            <a:r>
-              <a:rPr sz="1800" b="0">
-                <a:solidFill>
-                  <a:srgbClr val="A3A8B0"/>
-                </a:solidFill>
-                <a:latin typeface="Instrument Sans"/>
-              </a:rPr>
-              <a:t>Recipient → Holder</a:t>
-            </a:r>
-          </a:p>
-        </p:txBody>
-      </p:sp>
-      <p:sp>
-        <p:nvSpPr>
-          <p:cNvPr id="143" name="TextBox 142"/>
-          <p:cNvSpPr txBox="1"/>
-          <p:nvPr/>
-        </p:nvSpPr>
-        <p:spPr>
-          <a:xfrm>
-            <a:off x="12716691" y="4663440"/>
-            <a:ext cx="2259874" cy="365760"/>
-          </a:xfrm>
-          <a:prstGeom prst="rect">
-            <a:avLst/>
-          </a:prstGeom>
-          <a:noFill/>
-        </p:spPr>
-        <p:txBody>
-          <a:bodyPr wrap="square" lIns="0" rIns="0" tIns="0" bIns="0" anchor="t">
-            <a:spAutoFit/>
-          </a:bodyPr>
-          <a:lstStyle/>
-          <a:p>
-            <a:pPr algn="ctr">
-              <a:lnSpc>
-                <a:spcPct val="112000"/>
-              </a:lnSpc>
-              <a:spcAft>
-                <a:spcPts val="600"/>
-              </a:spcAft>
-            </a:pPr>
-            <a:r>
-              <a:rPr sz="1800" b="0">
-                <a:solidFill>
-                  <a:srgbClr val="9FB2CC"/>
-                </a:solidFill>
-                <a:latin typeface="JetBrains Mono"/>
-              </a:rPr>
-              <a:t>919def8c</a:t>
-            </a:r>
-          </a:p>
-        </p:txBody>
-      </p:sp>
-      <p:sp>
-        <p:nvSpPr>
-          <p:cNvPr id="144" name="Oval 143"/>
-          <p:cNvSpPr/>
-          <p:nvPr/>
-        </p:nvSpPr>
-        <p:spPr>
-          <a:xfrm>
-            <a:off x="16015062" y="3246120"/>
-            <a:ext cx="365760" cy="365760"/>
-          </a:xfrm>
-          <a:prstGeom prst="ellipse">
-            <a:avLst/>
-          </a:prstGeom>
-          <a:solidFill>
-            <a:srgbClr val="C6F24E"/>
-          </a:solidFill>
-          <a:ln>
-            <a:noFill/>
-          </a:ln>
-          <a:effectLst/>
-        </p:spPr>
-        <p:style>
-          <a:lnRef idx="1">
-            <a:schemeClr val="accent1"/>
-          </a:lnRef>
-          <a:fillRef idx="3">
-            <a:schemeClr val="accent1"/>
-          </a:fillRef>
-          <a:effectRef idx="0">
-            <a:schemeClr val="accent1"/>
-          </a:effectRef>
-          <a:fontRef idx="minor">
-            <a:schemeClr val="lt1"/>
-          </a:fontRef>
-        </p:style>
-        <p:txBody>
-          <a:bodyPr rtlCol="0" anchor="ctr"/>
-          <a:lstStyle/>
-          <a:p>
-            <a:pPr algn="ctr"/>
-          </a:p>
-        </p:txBody>
-      </p:sp>
-      <p:sp>
-        <p:nvSpPr>
-          <p:cNvPr id="145" name="TextBox 144"/>
-          <p:cNvSpPr txBox="1"/>
-          <p:nvPr/>
-        </p:nvSpPr>
-        <p:spPr>
-          <a:xfrm>
-            <a:off x="15068005" y="3749039"/>
-            <a:ext cx="2259874" cy="914400"/>
-          </a:xfrm>
-          <a:prstGeom prst="rect">
-            <a:avLst/>
-          </a:prstGeom>
-          <a:noFill/>
-        </p:spPr>
-        <p:txBody>
-          <a:bodyPr wrap="square" lIns="0" rIns="0" tIns="0" bIns="0" anchor="t">
-            <a:spAutoFit/>
-          </a:bodyPr>
-          <a:lstStyle/>
-          <a:p>
-            <a:pPr algn="ctr">
-              <a:lnSpc>
-                <a:spcPct val="112000"/>
-              </a:lnSpc>
-              <a:spcAft>
-                <a:spcPts val="200"/>
-              </a:spcAft>
-            </a:pPr>
-            <a:r>
-              <a:rPr sz="2400" b="1">
-                <a:solidFill>
-                  <a:srgbClr val="E7E8EA"/>
-                </a:solidFill>
-                <a:latin typeface="Instrument Sans"/>
-              </a:rPr>
-              <a:t>burn</a:t>
-            </a:r>
-          </a:p>
-          <a:p>
-            <a:pPr algn="ctr">
-              <a:lnSpc>
-                <a:spcPct val="112000"/>
-              </a:lnSpc>
-              <a:spcAft>
-                <a:spcPts val="200"/>
-              </a:spcAft>
-            </a:pPr>
-            <a:r>
-              <a:rPr sz="1800" b="0">
-                <a:solidFill>
-                  <a:srgbClr val="A3A8B0"/>
-                </a:solidFill>
-                <a:latin typeface="Instrument Sans"/>
-              </a:rPr>
-              <a:t>existing redeem</a:t>
-            </a:r>
-          </a:p>
-        </p:txBody>
-      </p:sp>
-      <p:sp>
-        <p:nvSpPr>
-          <p:cNvPr id="146" name="TextBox 145"/>
-          <p:cNvSpPr txBox="1"/>
-          <p:nvPr/>
-        </p:nvSpPr>
-        <p:spPr>
-          <a:xfrm>
-            <a:off x="15068005" y="4663440"/>
-            <a:ext cx="2259874" cy="365760"/>
-          </a:xfrm>
-          <a:prstGeom prst="rect">
-            <a:avLst/>
-          </a:prstGeom>
-          <a:noFill/>
-        </p:spPr>
-        <p:txBody>
-          <a:bodyPr wrap="square" lIns="0" rIns="0" tIns="0" bIns="0" anchor="t">
-            <a:spAutoFit/>
-          </a:bodyPr>
-          <a:lstStyle/>
-          <a:p>
-            <a:pPr algn="ctr">
-              <a:lnSpc>
-                <a:spcPct val="112000"/>
-              </a:lnSpc>
-              <a:spcAft>
-                <a:spcPts val="600"/>
-              </a:spcAft>
-            </a:pPr>
-            <a:r>
-              <a:rPr sz="1800" b="0">
-                <a:solidFill>
-                  <a:srgbClr val="9FB2CC"/>
+                  <a:srgbClr val="C6F24E"/>
                 </a:solidFill>
                 <a:latin typeface="JetBrains Mono"/>
               </a:rPr>
               <a:t>864fd164</a:t>
             </a:r>
-          </a:p>
-        </p:txBody>
-      </p:sp>
-      <p:sp>
-        <p:nvSpPr>
-          <p:cNvPr id="147" name="TextBox 146"/>
+            <a:r>
+              <a:rPr sz="1800" b="0">
+                <a:solidFill>
+                  <a:srgbClr val="E7E8EA"/>
+                </a:solidFill>
+                <a:latin typeface="Instrument Sans"/>
+              </a:rPr>
+              <a:t>   burn · existing redeem</a:t>
+            </a:r>
+          </a:p>
+        </p:txBody>
+      </p:sp>
+      <p:sp>
+        <p:nvSpPr>
+          <p:cNvPr id="134" name="TextBox 133"/>
           <p:cNvSpPr txBox="1"/>
           <p:nvPr/>
         </p:nvSpPr>
         <p:spPr>
           <a:xfrm>
-            <a:off x="914400" y="5349240"/>
-            <a:ext cx="4023360" cy="1005840"/>
+            <a:off x="8229600" y="5760720"/>
+            <a:ext cx="2286000" cy="731520"/>
           </a:xfrm>
           <a:prstGeom prst="rect">
             <a:avLst/>
@@ -11857,7 +11209,7 @@
               </a:spcAft>
             </a:pPr>
             <a:r>
-              <a:rPr sz="7200" b="1">
+              <a:rPr sz="4400" b="1">
                 <a:solidFill>
                   <a:srgbClr val="C6F24E"/>
                 </a:solidFill>
@@ -11870,14 +11222,14 @@
       </p:sp>
       <p:sp>
         <p:nvSpPr>
-          <p:cNvPr id="148" name="TextBox 147"/>
+          <p:cNvPr id="135" name="TextBox 134"/>
           <p:cNvSpPr txBox="1"/>
           <p:nvPr/>
         </p:nvSpPr>
         <p:spPr>
           <a:xfrm>
-            <a:off x="914400" y="6400800"/>
-            <a:ext cx="3931920" cy="731520"/>
+            <a:off x="8229600" y="6492240"/>
+            <a:ext cx="2240280" cy="640080"/>
           </a:xfrm>
           <a:prstGeom prst="rect">
             <a:avLst/>
@@ -11899,27 +11251,27 @@
               </a:spcAft>
             </a:pPr>
             <a:r>
-              <a:rPr sz="2200" b="0">
+              <a:rPr sz="1800" b="0">
                 <a:solidFill>
                   <a:srgbClr val="E7E8EA"/>
                 </a:solidFill>
                 <a:latin typeface="Instrument Sans"/>
               </a:rPr>
-              <a:t>successful testnet transactions</a:t>
-            </a:r>
-          </a:p>
-        </p:txBody>
-      </p:sp>
-      <p:sp>
-        <p:nvSpPr>
-          <p:cNvPr id="149" name="TextBox 148"/>
+              <a:t>successful</a:t>
+            </a:r>
+          </a:p>
+        </p:txBody>
+      </p:sp>
+      <p:sp>
+        <p:nvSpPr>
+          <p:cNvPr id="136" name="TextBox 135"/>
           <p:cNvSpPr txBox="1"/>
           <p:nvPr/>
         </p:nvSpPr>
         <p:spPr>
           <a:xfrm>
-            <a:off x="5120640" y="5349240"/>
-            <a:ext cx="4023360" cy="1005840"/>
+            <a:off x="10561320" y="5760720"/>
+            <a:ext cx="2286000" cy="731520"/>
           </a:xfrm>
           <a:prstGeom prst="rect">
             <a:avLst/>
@@ -11941,7 +11293,7 @@
               </a:spcAft>
             </a:pPr>
             <a:r>
-              <a:rPr sz="7200" b="1">
+              <a:rPr sz="4400" b="1">
                 <a:solidFill>
                   <a:srgbClr val="C6F24E"/>
                 </a:solidFill>
@@ -11954,14 +11306,14 @@
       </p:sp>
       <p:sp>
         <p:nvSpPr>
-          <p:cNvPr id="150" name="TextBox 149"/>
+          <p:cNvPr id="137" name="TextBox 136"/>
           <p:cNvSpPr txBox="1"/>
           <p:nvPr/>
         </p:nvSpPr>
         <p:spPr>
           <a:xfrm>
-            <a:off x="5120640" y="6400800"/>
-            <a:ext cx="3931920" cy="731520"/>
+            <a:off x="10561320" y="6492240"/>
+            <a:ext cx="2240280" cy="640080"/>
           </a:xfrm>
           <a:prstGeom prst="rect">
             <a:avLst/>
@@ -11983,27 +11335,27 @@
               </a:spcAft>
             </a:pPr>
             <a:r>
-              <a:rPr sz="2200" b="0">
+              <a:rPr sz="1800" b="0">
                 <a:solidFill>
                   <a:srgbClr val="E7E8EA"/>
                 </a:solidFill>
                 <a:latin typeface="Instrument Sans"/>
               </a:rPr>
-              <a:t>invalid calls refused (simulated)</a:t>
-            </a:r>
-          </a:p>
-        </p:txBody>
-      </p:sp>
-      <p:sp>
-        <p:nvSpPr>
-          <p:cNvPr id="151" name="TextBox 150"/>
+              <a:t>refused (simulated)</a:t>
+            </a:r>
+          </a:p>
+        </p:txBody>
+      </p:sp>
+      <p:sp>
+        <p:nvSpPr>
+          <p:cNvPr id="138" name="TextBox 137"/>
           <p:cNvSpPr txBox="1"/>
           <p:nvPr/>
         </p:nvSpPr>
         <p:spPr>
           <a:xfrm>
-            <a:off x="9326880" y="5349240"/>
-            <a:ext cx="4023360" cy="1005840"/>
+            <a:off x="12893040" y="5760720"/>
+            <a:ext cx="2286000" cy="731520"/>
           </a:xfrm>
           <a:prstGeom prst="rect">
             <a:avLst/>
@@ -12025,7 +11377,7 @@
               </a:spcAft>
             </a:pPr>
             <a:r>
-              <a:rPr sz="7200" b="1">
+              <a:rPr sz="4400" b="1">
                 <a:solidFill>
                   <a:srgbClr val="C6F24E"/>
                 </a:solidFill>
@@ -12038,14 +11390,14 @@
       </p:sp>
       <p:sp>
         <p:nvSpPr>
-          <p:cNvPr id="152" name="TextBox 151"/>
+          <p:cNvPr id="139" name="TextBox 138"/>
           <p:cNvSpPr txBox="1"/>
           <p:nvPr/>
         </p:nvSpPr>
         <p:spPr>
           <a:xfrm>
-            <a:off x="9326880" y="6400800"/>
-            <a:ext cx="3931920" cy="731520"/>
+            <a:off x="12893040" y="6492240"/>
+            <a:ext cx="2240280" cy="640080"/>
           </a:xfrm>
           <a:prstGeom prst="rect">
             <a:avLst/>
@@ -12067,27 +11419,27 @@
               </a:spcAft>
             </a:pPr>
             <a:r>
-              <a:rPr sz="2200" b="0">
+              <a:rPr sz="1800" b="0">
                 <a:solidFill>
                   <a:srgbClr val="E7E8EA"/>
                 </a:solidFill>
                 <a:latin typeface="Instrument Sans"/>
               </a:rPr>
-              <a:t>contract unit tests pass</a:t>
-            </a:r>
-          </a:p>
-        </p:txBody>
-      </p:sp>
-      <p:sp>
-        <p:nvSpPr>
-          <p:cNvPr id="153" name="TextBox 152"/>
+              <a:t>unit tests</a:t>
+            </a:r>
+          </a:p>
+        </p:txBody>
+      </p:sp>
+      <p:sp>
+        <p:nvSpPr>
+          <p:cNvPr id="140" name="TextBox 139"/>
           <p:cNvSpPr txBox="1"/>
           <p:nvPr/>
         </p:nvSpPr>
         <p:spPr>
           <a:xfrm>
-            <a:off x="13533119" y="5349240"/>
-            <a:ext cx="4023360" cy="1005840"/>
+            <a:off x="15224759" y="5760720"/>
+            <a:ext cx="2286000" cy="731520"/>
           </a:xfrm>
           <a:prstGeom prst="rect">
             <a:avLst/>
@@ -12109,7 +11461,7 @@
               </a:spcAft>
             </a:pPr>
             <a:r>
-              <a:rPr sz="7200" b="1">
+              <a:rPr sz="4400" b="1">
                 <a:solidFill>
                   <a:srgbClr val="C6F24E"/>
                 </a:solidFill>
@@ -12122,14 +11474,14 @@
       </p:sp>
       <p:sp>
         <p:nvSpPr>
-          <p:cNvPr id="154" name="TextBox 153"/>
+          <p:cNvPr id="141" name="TextBox 140"/>
           <p:cNvSpPr txBox="1"/>
           <p:nvPr/>
         </p:nvSpPr>
         <p:spPr>
           <a:xfrm>
-            <a:off x="13533119" y="6400800"/>
-            <a:ext cx="3931920" cy="731520"/>
+            <a:off x="15224759" y="6492240"/>
+            <a:ext cx="2240280" cy="640080"/>
           </a:xfrm>
           <a:prstGeom prst="rect">
             <a:avLst/>
@@ -12151,27 +11503,27 @@
               </a:spcAft>
             </a:pPr>
             <a:r>
-              <a:rPr sz="2200" b="0">
+              <a:rPr sz="1800" b="0">
                 <a:solidFill>
                   <a:srgbClr val="E7E8EA"/>
                 </a:solidFill>
                 <a:latin typeface="Instrument Sans"/>
               </a:rPr>
-              <a:t>verify-head rebuilds the chain</a:t>
-            </a:r>
-          </a:p>
-        </p:txBody>
-      </p:sp>
-      <p:sp>
-        <p:nvSpPr>
-          <p:cNvPr id="155" name="TextBox 154"/>
+              <a:t>verify-head, live 25 Oct</a:t>
+            </a:r>
+          </a:p>
+        </p:txBody>
+      </p:sp>
+      <p:sp>
+        <p:nvSpPr>
+          <p:cNvPr id="142" name="TextBox 141"/>
           <p:cNvSpPr txBox="1"/>
           <p:nvPr/>
         </p:nvSpPr>
         <p:spPr>
           <a:xfrm>
-            <a:off x="914400" y="7360920"/>
-            <a:ext cx="16459200" cy="1463040"/>
+            <a:off x="8229600" y="7178040"/>
+            <a:ext cx="9144000" cy="1463040"/>
           </a:xfrm>
           <a:prstGeom prst="rect">
             <a:avLst/>
@@ -12189,7 +11541,7 @@
                 <a:spcPct val="112000"/>
               </a:lnSpc>
               <a:spcAft>
-                <a:spcPts val="600"/>
+                <a:spcPts val="400"/>
               </a:spcAft>
             </a:pPr>
             <a:r>
@@ -12199,7 +11551,7 @@
                 </a:solidFill>
                 <a:latin typeface="JetBrains Mono"/>
               </a:rPr>
-              <a:t>custody_registry  </a:t>
+              <a:t>custody_registry </a:t>
             </a:r>
             <a:r>
               <a:rPr sz="1800" b="0">
@@ -12217,7 +11569,7 @@
                 <a:spcPct val="112000"/>
               </a:lnSpc>
               <a:spcAft>
-                <a:spcPts val="600"/>
+                <a:spcPts val="400"/>
               </a:spcAft>
             </a:pPr>
             <a:r>
@@ -12227,7 +11579,7 @@
                 </a:solidFill>
                 <a:latin typeface="Instrument Sans"/>
               </a:rPr>
-              <a:t>Plus an attestation (33379211); full hashes in proofs/lifecycle.json. A second run (branch three-machine, proofs/three-machine.json): two team members authorised handovers on their own computers, with their own testnet keys.</a:t>
+              <a:t>Plus an attestation (33379211). A second run (branch three-machine): two team members authorised handovers on their own computers, with their own testnet keys.</a:t>
             </a:r>
           </a:p>
           <a:p>
@@ -12236,7 +11588,7 @@
                 <a:spcPct val="112000"/>
               </a:lnSpc>
               <a:spcAft>
-                <a:spcPts val="600"/>
+                <a:spcPts val="400"/>
               </a:spcAft>
             </a:pPr>
             <a:r>
@@ -12246,7 +11598,7 @@
                 </a:solidFill>
                 <a:latin typeface="Instrument Sans"/>
               </a:rPr>
-              <a:t>All are test keys, most held by one harness: this proves the mechanism, not independent custodians.</a:t>
+              <a:t>All test keys, most held by one harness: this proves the mechanism, not independent custodians.</a:t>
             </a:r>
           </a:p>
         </p:txBody>
@@ -20003,7 +19355,7 @@
                 <a:cs typeface="JetBrains Mono"/>
                 <a:sym typeface="JetBrains Mono"/>
               </a:rPr>
-              <a:t>NEXT ▸ THE SOLUTION</a:t>
+              <a:t>NEXT ▸ WHAT IT COSTS</a:t>
             </a:r>
             <a:endParaRPr/>
           </a:p>
@@ -20232,56 +19584,14 @@
       </p:sp>
       <p:sp>
         <p:nvSpPr>
-          <p:cNvPr id="125" name="TextBox 124"/>
-          <p:cNvSpPr txBox="1"/>
-          <p:nvPr/>
-        </p:nvSpPr>
-        <p:spPr>
-          <a:xfrm>
-            <a:off x="914400" y="3246120"/>
-            <a:ext cx="10241280" cy="1097280"/>
-          </a:xfrm>
-          <a:prstGeom prst="rect">
-            <a:avLst/>
-          </a:prstGeom>
-          <a:noFill/>
-        </p:spPr>
-        <p:txBody>
-          <a:bodyPr wrap="square" lIns="0" rIns="0" tIns="0" bIns="0" anchor="t">
-            <a:spAutoFit/>
-          </a:bodyPr>
-          <a:lstStyle/>
-          <a:p>
-            <a:pPr algn="l">
-              <a:lnSpc>
-                <a:spcPct val="112000"/>
-              </a:lnSpc>
-              <a:spcAft>
-                <a:spcPts val="600"/>
-              </a:spcAft>
-            </a:pPr>
-            <a:r>
-              <a:rPr sz="3000" b="0">
-                <a:solidFill>
-                  <a:srgbClr val="0E0F11"/>
-                </a:solidFill>
-                <a:latin typeface="Instrument Sans"/>
-              </a:rPr>
-              <a:t>Between seller and buyer, a shipment changes hands several times.</a:t>
-            </a:r>
-          </a:p>
-        </p:txBody>
-      </p:sp>
-      <p:sp>
-        <p:nvSpPr>
-          <p:cNvPr id="126" name="Rectangle 125"/>
+          <p:cNvPr id="125" name="Rectangle 124"/>
           <p:cNvSpPr/>
           <p:nvPr/>
         </p:nvSpPr>
         <p:spPr>
           <a:xfrm>
-            <a:off x="1737360" y="4878324"/>
-            <a:ext cx="8686800" cy="27432"/>
+            <a:off x="1463040" y="3415284"/>
+            <a:ext cx="15361919" cy="27432"/>
           </a:xfrm>
           <a:prstGeom prst="rect">
             <a:avLst/>
@@ -20318,14 +19628,14 @@
       </p:sp>
       <p:sp>
         <p:nvSpPr>
-          <p:cNvPr id="127" name="Oval 126"/>
+          <p:cNvPr id="126" name="Oval 125"/>
           <p:cNvSpPr/>
           <p:nvPr/>
         </p:nvSpPr>
         <p:spPr>
           <a:xfrm>
-            <a:off x="1581912" y="4736592"/>
-            <a:ext cx="310896" cy="310896"/>
+            <a:off x="1325880" y="3291840"/>
+            <a:ext cx="274320" cy="274320"/>
           </a:xfrm>
           <a:prstGeom prst="ellipse">
             <a:avLst/>
@@ -20362,14 +19672,14 @@
       </p:sp>
       <p:sp>
         <p:nvSpPr>
-          <p:cNvPr id="128" name="TextBox 127"/>
+          <p:cNvPr id="127" name="TextBox 126"/>
           <p:cNvSpPr txBox="1"/>
           <p:nvPr/>
         </p:nvSpPr>
         <p:spPr>
           <a:xfrm>
-            <a:off x="640080" y="5184648"/>
-            <a:ext cx="2194560" cy="457200"/>
+            <a:off x="274320" y="3657600"/>
+            <a:ext cx="2377440" cy="457200"/>
           </a:xfrm>
           <a:prstGeom prst="rect">
             <a:avLst/>
@@ -20404,14 +19714,14 @@
       </p:sp>
       <p:sp>
         <p:nvSpPr>
-          <p:cNvPr id="129" name="Oval 128"/>
+          <p:cNvPr id="128" name="Oval 127"/>
           <p:cNvSpPr/>
           <p:nvPr/>
         </p:nvSpPr>
         <p:spPr>
           <a:xfrm>
-            <a:off x="3753612" y="4736592"/>
-            <a:ext cx="310896" cy="310896"/>
+            <a:off x="5166359" y="3291840"/>
+            <a:ext cx="274320" cy="274320"/>
           </a:xfrm>
           <a:prstGeom prst="ellipse">
             <a:avLst/>
@@ -20448,14 +19758,14 @@
       </p:sp>
       <p:sp>
         <p:nvSpPr>
-          <p:cNvPr id="130" name="TextBox 129"/>
+          <p:cNvPr id="129" name="TextBox 128"/>
           <p:cNvSpPr txBox="1"/>
           <p:nvPr/>
         </p:nvSpPr>
         <p:spPr>
           <a:xfrm>
-            <a:off x="2811780" y="5184648"/>
-            <a:ext cx="2194560" cy="457200"/>
+            <a:off x="4114799" y="3657600"/>
+            <a:ext cx="2377440" cy="457200"/>
           </a:xfrm>
           <a:prstGeom prst="rect">
             <a:avLst/>
@@ -20490,14 +19800,14 @@
       </p:sp>
       <p:sp>
         <p:nvSpPr>
-          <p:cNvPr id="131" name="Oval 130"/>
+          <p:cNvPr id="130" name="Oval 129"/>
           <p:cNvSpPr/>
           <p:nvPr/>
         </p:nvSpPr>
         <p:spPr>
           <a:xfrm>
-            <a:off x="5925312" y="4736592"/>
-            <a:ext cx="310896" cy="310896"/>
+            <a:off x="9006839" y="3291840"/>
+            <a:ext cx="274320" cy="274320"/>
           </a:xfrm>
           <a:prstGeom prst="ellipse">
             <a:avLst/>
@@ -20534,14 +19844,14 @@
       </p:sp>
       <p:sp>
         <p:nvSpPr>
-          <p:cNvPr id="132" name="TextBox 131"/>
+          <p:cNvPr id="131" name="TextBox 130"/>
           <p:cNvSpPr txBox="1"/>
           <p:nvPr/>
         </p:nvSpPr>
         <p:spPr>
           <a:xfrm>
-            <a:off x="4983480" y="5184648"/>
-            <a:ext cx="2194560" cy="457200"/>
+            <a:off x="7955279" y="3657600"/>
+            <a:ext cx="2377440" cy="457200"/>
           </a:xfrm>
           <a:prstGeom prst="rect">
             <a:avLst/>
@@ -20576,14 +19886,14 @@
       </p:sp>
       <p:sp>
         <p:nvSpPr>
-          <p:cNvPr id="133" name="Oval 132"/>
+          <p:cNvPr id="132" name="Oval 131"/>
           <p:cNvSpPr/>
           <p:nvPr/>
         </p:nvSpPr>
         <p:spPr>
           <a:xfrm>
-            <a:off x="8097012" y="4736592"/>
-            <a:ext cx="310896" cy="310896"/>
+            <a:off x="12847319" y="3291840"/>
+            <a:ext cx="274320" cy="274320"/>
           </a:xfrm>
           <a:prstGeom prst="ellipse">
             <a:avLst/>
@@ -20620,14 +19930,14 @@
       </p:sp>
       <p:sp>
         <p:nvSpPr>
-          <p:cNvPr id="134" name="TextBox 133"/>
+          <p:cNvPr id="133" name="TextBox 132"/>
           <p:cNvSpPr txBox="1"/>
           <p:nvPr/>
         </p:nvSpPr>
         <p:spPr>
           <a:xfrm>
-            <a:off x="7155180" y="5184648"/>
-            <a:ext cx="2194560" cy="457200"/>
+            <a:off x="11795759" y="3657600"/>
+            <a:ext cx="2377440" cy="457200"/>
           </a:xfrm>
           <a:prstGeom prst="rect">
             <a:avLst/>
@@ -20662,14 +19972,14 @@
       </p:sp>
       <p:sp>
         <p:nvSpPr>
-          <p:cNvPr id="135" name="Oval 134"/>
+          <p:cNvPr id="134" name="Oval 133"/>
           <p:cNvSpPr/>
           <p:nvPr/>
         </p:nvSpPr>
         <p:spPr>
           <a:xfrm>
-            <a:off x="10268712" y="4736592"/>
-            <a:ext cx="310896" cy="310896"/>
+            <a:off x="16687800" y="3291840"/>
+            <a:ext cx="274320" cy="274320"/>
           </a:xfrm>
           <a:prstGeom prst="ellipse">
             <a:avLst/>
@@ -20706,14 +20016,14 @@
       </p:sp>
       <p:sp>
         <p:nvSpPr>
-          <p:cNvPr id="136" name="TextBox 135"/>
+          <p:cNvPr id="135" name="TextBox 134"/>
           <p:cNvSpPr txBox="1"/>
           <p:nvPr/>
         </p:nvSpPr>
         <p:spPr>
           <a:xfrm>
-            <a:off x="9326880" y="5184648"/>
-            <a:ext cx="2194560" cy="457200"/>
+            <a:off x="15636239" y="3657600"/>
+            <a:ext cx="2377440" cy="457200"/>
           </a:xfrm>
           <a:prstGeom prst="rect">
             <a:avLst/>
@@ -20748,14 +20058,100 @@
       </p:sp>
       <p:sp>
         <p:nvSpPr>
+          <p:cNvPr id="136" name="Rectangle 135"/>
+          <p:cNvSpPr/>
+          <p:nvPr/>
+        </p:nvSpPr>
+        <p:spPr>
+          <a:xfrm>
+            <a:off x="914400" y="4421124"/>
+            <a:ext cx="5120640" cy="27432"/>
+          </a:xfrm>
+          <a:prstGeom prst="rect">
+            <a:avLst/>
+          </a:prstGeom>
+          <a:solidFill>
+            <a:srgbClr val="556F00"/>
+          </a:solidFill>
+          <a:ln>
+            <a:noFill/>
+          </a:ln>
+          <a:effectLst/>
+        </p:spPr>
+        <p:style>
+          <a:lnRef idx="1">
+            <a:schemeClr val="accent1"/>
+          </a:lnRef>
+          <a:fillRef idx="3">
+            <a:schemeClr val="accent1"/>
+          </a:fillRef>
+          <a:effectRef idx="0">
+            <a:schemeClr val="accent1"/>
+          </a:effectRef>
+          <a:fontRef idx="minor">
+            <a:schemeClr val="lt1"/>
+          </a:fontRef>
+        </p:style>
+        <p:txBody>
+          <a:bodyPr rtlCol="0" anchor="ctr"/>
+          <a:lstStyle/>
+          <a:p>
+            <a:pPr algn="ctr"/>
+          </a:p>
+        </p:txBody>
+      </p:sp>
+      <p:sp>
+        <p:nvSpPr>
           <p:cNvPr id="137" name="TextBox 136"/>
           <p:cNvSpPr txBox="1"/>
           <p:nvPr/>
         </p:nvSpPr>
         <p:spPr>
           <a:xfrm>
-            <a:off x="914400" y="5669280"/>
-            <a:ext cx="10241280" cy="914400"/>
+            <a:off x="914400" y="4617720"/>
+            <a:ext cx="5120640" cy="1097280"/>
+          </a:xfrm>
+          <a:prstGeom prst="rect">
+            <a:avLst/>
+          </a:prstGeom>
+          <a:noFill/>
+        </p:spPr>
+        <p:txBody>
+          <a:bodyPr wrap="square" lIns="0" rIns="0" tIns="0" bIns="0" anchor="t">
+            <a:spAutoFit/>
+          </a:bodyPr>
+          <a:lstStyle/>
+          <a:p>
+            <a:pPr algn="l">
+              <a:lnSpc>
+                <a:spcPct val="95000"/>
+              </a:lnSpc>
+              <a:spcAft>
+                <a:spcPts val="600"/>
+              </a:spcAft>
+            </a:pPr>
+            <a:r>
+              <a:rPr sz="6400" b="1">
+                <a:solidFill>
+                  <a:srgbClr val="0E0F11"/>
+                </a:solidFill>
+                <a:latin typeface="Inter Tight"/>
+              </a:rPr>
+              <a:t>{{N1}}</a:t>
+            </a:r>
+          </a:p>
+        </p:txBody>
+      </p:sp>
+      <p:sp>
+        <p:nvSpPr>
+          <p:cNvPr id="138" name="TextBox 137"/>
+          <p:cNvSpPr txBox="1"/>
+          <p:nvPr/>
+        </p:nvSpPr>
+        <p:spPr>
+          <a:xfrm>
+            <a:off x="914400" y="5760720"/>
+            <a:ext cx="5120640" cy="914400"/>
           </a:xfrm>
           <a:prstGeom prst="rect">
             <a:avLst/>
@@ -20777,27 +20173,27 @@
               </a:spcAft>
             </a:pPr>
             <a:r>
-              <a:rPr sz="2600" b="0">
-                <a:solidFill>
-                  <a:srgbClr val="4D5560"/>
+              <a:rPr sz="2400" b="1">
+                <a:solidFill>
+                  <a:srgbClr val="0E0F11"/>
                 </a:solidFill>
                 <a:latin typeface="Instrument Sans"/>
               </a:rPr>
-              <a:t>Handovers are mostly paper, or sit inside each operator's own system: rarely one shared record across borders.</a:t>
-            </a:r>
-          </a:p>
-        </p:txBody>
-      </p:sp>
-      <p:sp>
-        <p:nvSpPr>
-          <p:cNvPr id="138" name="TextBox 137"/>
+              <a:t>{{parties one shipment touches}}</a:t>
+            </a:r>
+          </a:p>
+        </p:txBody>
+      </p:sp>
+      <p:sp>
+        <p:nvSpPr>
+          <p:cNvPr id="139" name="TextBox 138"/>
           <p:cNvSpPr txBox="1"/>
           <p:nvPr/>
         </p:nvSpPr>
         <p:spPr>
           <a:xfrm>
             <a:off x="914400" y="6675120"/>
-            <a:ext cx="10241280" cy="1280160"/>
+            <a:ext cx="5120640" cy="822960"/>
           </a:xfrm>
           <a:prstGeom prst="rect">
             <a:avLst/>
@@ -20819,36 +20215,71 @@
               </a:spcAft>
             </a:pPr>
             <a:r>
-              <a:rPr sz="2400" b="1">
-                <a:solidFill>
-                  <a:srgbClr val="556F00"/>
+              <a:rPr sz="1800" b="0">
+                <a:solidFill>
+                  <a:srgbClr val="4D5560"/>
                 </a:solidFill>
                 <a:latin typeface="Instrument Sans"/>
               </a:rPr>
-              <a:t>Our hypothesis: </a:t>
-            </a:r>
-            <a:r>
-              <a:rPr sz="2400" b="0">
-                <a:solidFill>
-                  <a:srgbClr val="0E0F11"/>
-                </a:solidFill>
-                <a:latin typeface="Instrument Sans"/>
-              </a:rPr>
-              <a:t>a financier cannot see who holds the goods before paying. No customer has confirmed it yet.</a:t>
-            </a:r>
-          </a:p>
-        </p:txBody>
-      </p:sp>
-      <p:sp>
-        <p:nvSpPr>
-          <p:cNvPr id="139" name="TextBox 138"/>
+              <a:t>{{source, publisher, date}}</a:t>
+            </a:r>
+          </a:p>
+        </p:txBody>
+      </p:sp>
+      <p:sp>
+        <p:nvSpPr>
+          <p:cNvPr id="140" name="Rectangle 139"/>
+          <p:cNvSpPr/>
+          <p:nvPr/>
+        </p:nvSpPr>
+        <p:spPr>
+          <a:xfrm>
+            <a:off x="6492240" y="4421124"/>
+            <a:ext cx="5120640" cy="27432"/>
+          </a:xfrm>
+          <a:prstGeom prst="rect">
+            <a:avLst/>
+          </a:prstGeom>
+          <a:solidFill>
+            <a:srgbClr val="556F00"/>
+          </a:solidFill>
+          <a:ln>
+            <a:noFill/>
+          </a:ln>
+          <a:effectLst/>
+        </p:spPr>
+        <p:style>
+          <a:lnRef idx="1">
+            <a:schemeClr val="accent1"/>
+          </a:lnRef>
+          <a:fillRef idx="3">
+            <a:schemeClr val="accent1"/>
+          </a:fillRef>
+          <a:effectRef idx="0">
+            <a:schemeClr val="accent1"/>
+          </a:effectRef>
+          <a:fontRef idx="minor">
+            <a:schemeClr val="lt1"/>
+          </a:fontRef>
+        </p:style>
+        <p:txBody>
+          <a:bodyPr rtlCol="0" anchor="ctr"/>
+          <a:lstStyle/>
+          <a:p>
+            <a:pPr algn="ctr"/>
+          </a:p>
+        </p:txBody>
+      </p:sp>
+      <p:sp>
+        <p:nvSpPr>
+          <p:cNvPr id="141" name="TextBox 140"/>
           <p:cNvSpPr txBox="1"/>
           <p:nvPr/>
         </p:nvSpPr>
         <p:spPr>
           <a:xfrm>
-            <a:off x="12070080" y="3246120"/>
-            <a:ext cx="5303520" cy="1005840"/>
+            <a:off x="6492240" y="4617720"/>
+            <a:ext cx="5120640" cy="1097280"/>
           </a:xfrm>
           <a:prstGeom prst="rect">
             <a:avLst/>
@@ -20876,21 +20307,21 @@
                 </a:solidFill>
                 <a:latin typeface="Inter Tight"/>
               </a:rPr>
-              <a:t>US$2.5T</a:t>
-            </a:r>
-          </a:p>
-        </p:txBody>
-      </p:sp>
-      <p:sp>
-        <p:nvSpPr>
-          <p:cNvPr id="140" name="TextBox 139"/>
+              <a:t>{{N2}}</a:t>
+            </a:r>
+          </a:p>
+        </p:txBody>
+      </p:sp>
+      <p:sp>
+        <p:nvSpPr>
+          <p:cNvPr id="142" name="TextBox 141"/>
           <p:cNvSpPr txBox="1"/>
           <p:nvPr/>
         </p:nvSpPr>
         <p:spPr>
           <a:xfrm>
-            <a:off x="12070080" y="4206240"/>
-            <a:ext cx="5303520" cy="2377440"/>
+            <a:off x="6492240" y="5760720"/>
+            <a:ext cx="5120640" cy="914400"/>
           </a:xfrm>
           <a:prstGeom prst="rect">
             <a:avLst/>
@@ -20908,7 +20339,7 @@
                 <a:spcPct val="112000"/>
               </a:lnSpc>
               <a:spcAft>
-                <a:spcPts val="1000"/>
+                <a:spcPts val="600"/>
               </a:spcAft>
             </a:pPr>
             <a:r>
@@ -20918,16 +20349,39 @@
                 </a:solidFill>
                 <a:latin typeface="Instrument Sans"/>
               </a:rPr>
-              <a:t>Global trade finance gap.</a:t>
-            </a:r>
-          </a:p>
+              <a:t>{{documents per shipment}}</a:t>
+            </a:r>
+          </a:p>
+        </p:txBody>
+      </p:sp>
+      <p:sp>
+        <p:nvSpPr>
+          <p:cNvPr id="143" name="TextBox 142"/>
+          <p:cNvSpPr txBox="1"/>
+          <p:nvPr/>
+        </p:nvSpPr>
+        <p:spPr>
+          <a:xfrm>
+            <a:off x="6492240" y="6675120"/>
+            <a:ext cx="5120640" cy="822960"/>
+          </a:xfrm>
+          <a:prstGeom prst="rect">
+            <a:avLst/>
+          </a:prstGeom>
+          <a:noFill/>
+        </p:spPr>
+        <p:txBody>
+          <a:bodyPr wrap="square" lIns="0" rIns="0" tIns="0" bIns="0" anchor="t">
+            <a:spAutoFit/>
+          </a:bodyPr>
+          <a:lstStyle/>
           <a:p>
             <a:pPr algn="l">
               <a:lnSpc>
                 <a:spcPct val="112000"/>
               </a:lnSpc>
               <a:spcAft>
-                <a:spcPts val="1000"/>
+                <a:spcPts val="600"/>
               </a:spcAft>
             </a:pPr>
             <a:r>
@@ -20937,20 +20391,190 @@
                 </a:solidFill>
                 <a:latin typeface="Instrument Sans"/>
               </a:rPr>
-              <a:t>ADB Global Trade Finance Gap Survey, Dec 2025. It sizes the financing gap; it is not evidence of the custody problem.</a:t>
-            </a:r>
-          </a:p>
-        </p:txBody>
-      </p:sp>
-      <p:sp>
-        <p:nvSpPr>
-          <p:cNvPr id="141" name="TextBox 140"/>
+              <a:t>{{source, publisher, date}}</a:t>
+            </a:r>
+          </a:p>
+        </p:txBody>
+      </p:sp>
+      <p:sp>
+        <p:nvSpPr>
+          <p:cNvPr id="144" name="Rectangle 143"/>
+          <p:cNvSpPr/>
+          <p:nvPr/>
+        </p:nvSpPr>
+        <p:spPr>
+          <a:xfrm>
+            <a:off x="12070080" y="4421124"/>
+            <a:ext cx="5120640" cy="27432"/>
+          </a:xfrm>
+          <a:prstGeom prst="rect">
+            <a:avLst/>
+          </a:prstGeom>
+          <a:solidFill>
+            <a:srgbClr val="556F00"/>
+          </a:solidFill>
+          <a:ln>
+            <a:noFill/>
+          </a:ln>
+          <a:effectLst/>
+        </p:spPr>
+        <p:style>
+          <a:lnRef idx="1">
+            <a:schemeClr val="accent1"/>
+          </a:lnRef>
+          <a:fillRef idx="3">
+            <a:schemeClr val="accent1"/>
+          </a:fillRef>
+          <a:effectRef idx="0">
+            <a:schemeClr val="accent1"/>
+          </a:effectRef>
+          <a:fontRef idx="minor">
+            <a:schemeClr val="lt1"/>
+          </a:fontRef>
+        </p:style>
+        <p:txBody>
+          <a:bodyPr rtlCol="0" anchor="ctr"/>
+          <a:lstStyle/>
+          <a:p>
+            <a:pPr algn="ctr"/>
+          </a:p>
+        </p:txBody>
+      </p:sp>
+      <p:sp>
+        <p:nvSpPr>
+          <p:cNvPr id="145" name="TextBox 144"/>
           <p:cNvSpPr txBox="1"/>
           <p:nvPr/>
         </p:nvSpPr>
         <p:spPr>
           <a:xfrm>
-            <a:off x="914400" y="8001000"/>
+            <a:off x="12070080" y="4617720"/>
+            <a:ext cx="5120640" cy="1097280"/>
+          </a:xfrm>
+          <a:prstGeom prst="rect">
+            <a:avLst/>
+          </a:prstGeom>
+          <a:noFill/>
+        </p:spPr>
+        <p:txBody>
+          <a:bodyPr wrap="square" lIns="0" rIns="0" tIns="0" bIns="0" anchor="t">
+            <a:spAutoFit/>
+          </a:bodyPr>
+          <a:lstStyle/>
+          <a:p>
+            <a:pPr algn="l">
+              <a:lnSpc>
+                <a:spcPct val="95000"/>
+              </a:lnSpc>
+              <a:spcAft>
+                <a:spcPts val="600"/>
+              </a:spcAft>
+            </a:pPr>
+            <a:r>
+              <a:rPr sz="6400" b="1">
+                <a:solidFill>
+                  <a:srgbClr val="0E0F11"/>
+                </a:solidFill>
+                <a:latin typeface="Inter Tight"/>
+              </a:rPr>
+              <a:t>{{N3}}</a:t>
+            </a:r>
+          </a:p>
+        </p:txBody>
+      </p:sp>
+      <p:sp>
+        <p:nvSpPr>
+          <p:cNvPr id="146" name="TextBox 145"/>
+          <p:cNvSpPr txBox="1"/>
+          <p:nvPr/>
+        </p:nvSpPr>
+        <p:spPr>
+          <a:xfrm>
+            <a:off x="12070080" y="5760720"/>
+            <a:ext cx="5120640" cy="914400"/>
+          </a:xfrm>
+          <a:prstGeom prst="rect">
+            <a:avLst/>
+          </a:prstGeom>
+          <a:noFill/>
+        </p:spPr>
+        <p:txBody>
+          <a:bodyPr wrap="square" lIns="0" rIns="0" tIns="0" bIns="0" anchor="t">
+            <a:spAutoFit/>
+          </a:bodyPr>
+          <a:lstStyle/>
+          <a:p>
+            <a:pPr algn="l">
+              <a:lnSpc>
+                <a:spcPct val="112000"/>
+              </a:lnSpc>
+              <a:spcAft>
+                <a:spcPts val="600"/>
+              </a:spcAft>
+            </a:pPr>
+            <a:r>
+              <a:rPr sz="2400" b="1">
+                <a:solidFill>
+                  <a:srgbClr val="0E0F11"/>
+                </a:solidFill>
+                <a:latin typeface="Instrument Sans"/>
+              </a:rPr>
+              <a:t>{{share still on paper}}</a:t>
+            </a:r>
+          </a:p>
+        </p:txBody>
+      </p:sp>
+      <p:sp>
+        <p:nvSpPr>
+          <p:cNvPr id="147" name="TextBox 146"/>
+          <p:cNvSpPr txBox="1"/>
+          <p:nvPr/>
+        </p:nvSpPr>
+        <p:spPr>
+          <a:xfrm>
+            <a:off x="12070080" y="6675120"/>
+            <a:ext cx="5120640" cy="822960"/>
+          </a:xfrm>
+          <a:prstGeom prst="rect">
+            <a:avLst/>
+          </a:prstGeom>
+          <a:noFill/>
+        </p:spPr>
+        <p:txBody>
+          <a:bodyPr wrap="square" lIns="0" rIns="0" tIns="0" bIns="0" anchor="t">
+            <a:spAutoFit/>
+          </a:bodyPr>
+          <a:lstStyle/>
+          <a:p>
+            <a:pPr algn="l">
+              <a:lnSpc>
+                <a:spcPct val="112000"/>
+              </a:lnSpc>
+              <a:spcAft>
+                <a:spcPts val="600"/>
+              </a:spcAft>
+            </a:pPr>
+            <a:r>
+              <a:rPr sz="1800" b="0">
+                <a:solidFill>
+                  <a:srgbClr val="4D5560"/>
+                </a:solidFill>
+                <a:latin typeface="Instrument Sans"/>
+              </a:rPr>
+              <a:t>{{source, publisher, date}}</a:t>
+            </a:r>
+          </a:p>
+        </p:txBody>
+      </p:sp>
+      <p:sp>
+        <p:nvSpPr>
+          <p:cNvPr id="148" name="TextBox 147"/>
+          <p:cNvSpPr txBox="1"/>
+          <p:nvPr/>
+        </p:nvSpPr>
+        <p:spPr>
+          <a:xfrm>
+            <a:off x="914400" y="7863840"/>
             <a:ext cx="16459200" cy="822960"/>
           </a:xfrm>
           <a:prstGeom prst="rect">
@@ -21204,7 +20828,7 @@
                 <a:cs typeface="JetBrains Mono"/>
                 <a:sym typeface="JetBrains Mono"/>
               </a:rPr>
-              <a:t>NEXT ▸ THE PRODUCT</a:t>
+              <a:t>NEXT ▸ THE SOLUTION</a:t>
             </a:r>
             <a:endParaRPr/>
           </a:p>
@@ -21219,7 +20843,7 @@
         <p:spPr>
           <a:xfrm>
             <a:off x="914400" y="1417320"/>
-            <a:ext cx="2468879" cy="475488"/>
+            <a:ext cx="3429000" cy="475488"/>
           </a:xfrm>
           <a:prstGeom prst="roundRect">
             <a:avLst>
@@ -21258,7 +20882,7 @@
                 <a:cs typeface="JetBrains Mono"/>
                 <a:sym typeface="JetBrains Mono"/>
               </a:rPr>
-              <a:t>THE SOLUTION</a:t>
+              <a:t>PMF · WHAT IT COSTS</a:t>
             </a:r>
             <a:endParaRPr/>
           </a:p>
@@ -21426,34 +21050,81 @@
                 </a:solidFill>
                 <a:latin typeface="Inter Tight"/>
               </a:rPr>
-              <a:t>Both custodians sign, or nothing changes</a:t>
-            </a:r>
-          </a:p>
-        </p:txBody>
-      </p:sp>
-      <p:sp>
-        <p:nvSpPr>
-          <p:cNvPr id="125" name="Rounded Rectangle 124"/>
+              <a:t>Paper custody leaks money</a:t>
+            </a:r>
+          </a:p>
+        </p:txBody>
+      </p:sp>
+      <p:sp>
+        <p:nvSpPr>
+          <p:cNvPr id="125" name="TextBox 124"/>
+          <p:cNvSpPr txBox="1"/>
+          <p:nvPr/>
+        </p:nvSpPr>
+        <p:spPr>
+          <a:xfrm>
+            <a:off x="914400" y="3108960"/>
+            <a:ext cx="16459200" cy="822960"/>
+          </a:xfrm>
+          <a:prstGeom prst="rect">
+            <a:avLst/>
+          </a:prstGeom>
+          <a:noFill/>
+        </p:spPr>
+        <p:txBody>
+          <a:bodyPr wrap="square" lIns="0" rIns="0" tIns="0" bIns="0" anchor="t">
+            <a:spAutoFit/>
+          </a:bodyPr>
+          <a:lstStyle/>
+          <a:p>
+            <a:pPr algn="l">
+              <a:lnSpc>
+                <a:spcPct val="112000"/>
+              </a:lnSpc>
+              <a:spcAft>
+                <a:spcPts val="600"/>
+              </a:spcAft>
+            </a:pPr>
+            <a:r>
+              <a:rPr sz="2400" b="1">
+                <a:solidFill>
+                  <a:srgbClr val="556F00"/>
+                </a:solidFill>
+                <a:latin typeface="Instrument Sans"/>
+              </a:rPr>
+              <a:t>Our hypothesis: </a:t>
+            </a:r>
+            <a:r>
+              <a:rPr sz="2400" b="0">
+                <a:solidFill>
+                  <a:srgbClr val="0E0F11"/>
+                </a:solidFill>
+                <a:latin typeface="Instrument Sans"/>
+              </a:rPr>
+              <a:t>a financier cannot see who holds the goods before paying. No customer has confirmed it yet.</a:t>
+            </a:r>
+          </a:p>
+        </p:txBody>
+      </p:sp>
+      <p:sp>
+        <p:nvSpPr>
+          <p:cNvPr id="126" name="Rectangle 125"/>
           <p:cNvSpPr/>
           <p:nvPr/>
         </p:nvSpPr>
         <p:spPr>
           <a:xfrm>
-            <a:off x="914400" y="3291840"/>
-            <a:ext cx="4480560" cy="1325880"/>
-          </a:xfrm>
-          <a:prstGeom prst="roundRect">
-            <a:avLst>
-              <a:gd name="adj" fmla="val 11034"/>
-            </a:avLst>
+            <a:off x="914400" y="4192524"/>
+            <a:ext cx="5120640" cy="27432"/>
+          </a:xfrm>
+          <a:prstGeom prst="rect">
+            <a:avLst/>
           </a:prstGeom>
           <a:solidFill>
-            <a:srgbClr val="FFFFFF"/>
+            <a:srgbClr val="556F00"/>
           </a:solidFill>
-          <a:ln w="12700">
-            <a:solidFill>
-              <a:srgbClr val="DFDDD6"/>
-            </a:solidFill>
+          <a:ln>
+            <a:noFill/>
           </a:ln>
           <a:effectLst/>
         </p:spPr>
@@ -21481,14 +21152,14 @@
       </p:sp>
       <p:sp>
         <p:nvSpPr>
-          <p:cNvPr id="126" name="TextBox 125"/>
+          <p:cNvPr id="127" name="TextBox 126"/>
           <p:cNvSpPr txBox="1"/>
           <p:nvPr/>
         </p:nvSpPr>
         <p:spPr>
           <a:xfrm>
-            <a:off x="914400" y="3474720"/>
-            <a:ext cx="4480560" cy="1005840"/>
+            <a:off x="914400" y="4389120"/>
+            <a:ext cx="5120640" cy="1097280"/>
           </a:xfrm>
           <a:prstGeom prst="rect">
             <a:avLst/>
@@ -21501,31 +21172,96 @@
           </a:bodyPr>
           <a:lstStyle/>
           <a:p>
-            <a:pPr algn="ctr">
+            <a:pPr algn="l">
+              <a:lnSpc>
+                <a:spcPct val="95000"/>
+              </a:lnSpc>
+              <a:spcAft>
+                <a:spcPts val="600"/>
+              </a:spcAft>
+            </a:pPr>
+            <a:r>
+              <a:rPr sz="6400" b="1">
+                <a:solidFill>
+                  <a:srgbClr val="0E0F11"/>
+                </a:solidFill>
+                <a:latin typeface="Inter Tight"/>
+              </a:rPr>
+              <a:t>{{N4}}</a:t>
+            </a:r>
+          </a:p>
+        </p:txBody>
+      </p:sp>
+      <p:sp>
+        <p:nvSpPr>
+          <p:cNvPr id="128" name="TextBox 127"/>
+          <p:cNvSpPr txBox="1"/>
+          <p:nvPr/>
+        </p:nvSpPr>
+        <p:spPr>
+          <a:xfrm>
+            <a:off x="914400" y="5532120"/>
+            <a:ext cx="5120640" cy="914400"/>
+          </a:xfrm>
+          <a:prstGeom prst="rect">
+            <a:avLst/>
+          </a:prstGeom>
+          <a:noFill/>
+        </p:spPr>
+        <p:txBody>
+          <a:bodyPr wrap="square" lIns="0" rIns="0" tIns="0" bIns="0" anchor="t">
+            <a:spAutoFit/>
+          </a:bodyPr>
+          <a:lstStyle/>
+          <a:p>
+            <a:pPr algn="l">
               <a:lnSpc>
                 <a:spcPct val="112000"/>
               </a:lnSpc>
               <a:spcAft>
-                <a:spcPts val="200"/>
+                <a:spcPts val="600"/>
               </a:spcAft>
             </a:pPr>
             <a:r>
-              <a:rPr sz="2800" b="1">
+              <a:rPr sz="2400" b="1">
                 <a:solidFill>
                   <a:srgbClr val="0E0F11"/>
                 </a:solidFill>
                 <a:latin typeface="Instrument Sans"/>
               </a:rPr>
-              <a:t>Outgoing custodian</a:t>
-            </a:r>
-          </a:p>
-          <a:p>
-            <a:pPr algn="ctr">
+              <a:t>{{fraud from duplicate or forged documents}}</a:t>
+            </a:r>
+          </a:p>
+        </p:txBody>
+      </p:sp>
+      <p:sp>
+        <p:nvSpPr>
+          <p:cNvPr id="129" name="TextBox 128"/>
+          <p:cNvSpPr txBox="1"/>
+          <p:nvPr/>
+        </p:nvSpPr>
+        <p:spPr>
+          <a:xfrm>
+            <a:off x="914400" y="6446520"/>
+            <a:ext cx="5120640" cy="822960"/>
+          </a:xfrm>
+          <a:prstGeom prst="rect">
+            <a:avLst/>
+          </a:prstGeom>
+          <a:noFill/>
+        </p:spPr>
+        <p:txBody>
+          <a:bodyPr wrap="square" lIns="0" rIns="0" tIns="0" bIns="0" anchor="t">
+            <a:spAutoFit/>
+          </a:bodyPr>
+          <a:lstStyle/>
+          <a:p>
+            <a:pPr algn="l">
               <a:lnSpc>
                 <a:spcPct val="112000"/>
               </a:lnSpc>
               <a:spcAft>
-                <a:spcPts val="200"/>
+                <a:spcPts val="600"/>
               </a:spcAft>
             </a:pPr>
             <a:r>
@@ -21533,31 +21269,29 @@
                 <a:solidFill>
                   <a:srgbClr val="4D5560"/>
                 </a:solidFill>
-                <a:latin typeface="JetBrains Mono"/>
+                <a:latin typeface="Instrument Sans"/>
               </a:rPr>
-              <a:t>signs</a:t>
-            </a:r>
-          </a:p>
-        </p:txBody>
-      </p:sp>
-      <p:sp>
-        <p:nvSpPr>
-          <p:cNvPr id="127" name="Rounded Rectangle 126"/>
+              <a:t>{{source, publisher, date}}</a:t>
+            </a:r>
+          </a:p>
+        </p:txBody>
+      </p:sp>
+      <p:sp>
+        <p:nvSpPr>
+          <p:cNvPr id="130" name="Rectangle 129"/>
           <p:cNvSpPr/>
           <p:nvPr/>
         </p:nvSpPr>
         <p:spPr>
           <a:xfrm>
-            <a:off x="5989320" y="3291840"/>
-            <a:ext cx="6309360" cy="1325880"/>
-          </a:xfrm>
-          <a:prstGeom prst="roundRect">
-            <a:avLst>
-              <a:gd name="adj" fmla="val 11034"/>
-            </a:avLst>
+            <a:off x="6492240" y="4192524"/>
+            <a:ext cx="5120640" cy="27432"/>
+          </a:xfrm>
+          <a:prstGeom prst="rect">
+            <a:avLst/>
           </a:prstGeom>
           <a:solidFill>
-            <a:srgbClr val="C6F24E"/>
+            <a:srgbClr val="556F00"/>
           </a:solidFill>
           <a:ln>
             <a:noFill/>
@@ -21588,14 +21322,14 @@
       </p:sp>
       <p:sp>
         <p:nvSpPr>
-          <p:cNvPr id="128" name="TextBox 127"/>
+          <p:cNvPr id="131" name="TextBox 130"/>
           <p:cNvSpPr txBox="1"/>
           <p:nvPr/>
         </p:nvSpPr>
         <p:spPr>
           <a:xfrm>
-            <a:off x="5989320" y="3474720"/>
-            <a:ext cx="6309360" cy="1005840"/>
+            <a:off x="6492240" y="4389120"/>
+            <a:ext cx="5120640" cy="1097280"/>
           </a:xfrm>
           <a:prstGeom prst="rect">
             <a:avLst/>
@@ -21608,68 +21342,129 @@
           </a:bodyPr>
           <a:lstStyle/>
           <a:p>
-            <a:pPr algn="ctr">
+            <a:pPr algn="l">
+              <a:lnSpc>
+                <a:spcPct val="95000"/>
+              </a:lnSpc>
+              <a:spcAft>
+                <a:spcPts val="600"/>
+              </a:spcAft>
+            </a:pPr>
+            <a:r>
+              <a:rPr sz="6400" b="1">
+                <a:solidFill>
+                  <a:srgbClr val="0E0F11"/>
+                </a:solidFill>
+                <a:latin typeface="Inter Tight"/>
+              </a:rPr>
+              <a:t>{{N5}}</a:t>
+            </a:r>
+          </a:p>
+        </p:txBody>
+      </p:sp>
+      <p:sp>
+        <p:nvSpPr>
+          <p:cNvPr id="132" name="TextBox 131"/>
+          <p:cNvSpPr txBox="1"/>
+          <p:nvPr/>
+        </p:nvSpPr>
+        <p:spPr>
+          <a:xfrm>
+            <a:off x="6492240" y="5532120"/>
+            <a:ext cx="5120640" cy="914400"/>
+          </a:xfrm>
+          <a:prstGeom prst="rect">
+            <a:avLst/>
+          </a:prstGeom>
+          <a:noFill/>
+        </p:spPr>
+        <p:txBody>
+          <a:bodyPr wrap="square" lIns="0" rIns="0" tIns="0" bIns="0" anchor="t">
+            <a:spAutoFit/>
+          </a:bodyPr>
+          <a:lstStyle/>
+          <a:p>
+            <a:pPr algn="l">
               <a:lnSpc>
                 <a:spcPct val="112000"/>
               </a:lnSpc>
               <a:spcAft>
-                <a:spcPts val="200"/>
+                <a:spcPts val="600"/>
               </a:spcAft>
             </a:pPr>
             <a:r>
-              <a:rPr sz="2800" b="1">
+              <a:rPr sz="2400" b="1">
                 <a:solidFill>
                   <a:srgbClr val="0E0F11"/>
                 </a:solidFill>
                 <a:latin typeface="Instrument Sans"/>
               </a:rPr>
-              <a:t>One Stellar transaction</a:t>
-            </a:r>
-          </a:p>
-          <a:p>
-            <a:pPr algn="ctr">
+              <a:t>{{cargo theft or loss in transit}}</a:t>
+            </a:r>
+          </a:p>
+        </p:txBody>
+      </p:sp>
+      <p:sp>
+        <p:nvSpPr>
+          <p:cNvPr id="133" name="TextBox 132"/>
+          <p:cNvSpPr txBox="1"/>
+          <p:nvPr/>
+        </p:nvSpPr>
+        <p:spPr>
+          <a:xfrm>
+            <a:off x="6492240" y="6446520"/>
+            <a:ext cx="5120640" cy="822960"/>
+          </a:xfrm>
+          <a:prstGeom prst="rect">
+            <a:avLst/>
+          </a:prstGeom>
+          <a:noFill/>
+        </p:spPr>
+        <p:txBody>
+          <a:bodyPr wrap="square" lIns="0" rIns="0" tIns="0" bIns="0" anchor="t">
+            <a:spAutoFit/>
+          </a:bodyPr>
+          <a:lstStyle/>
+          <a:p>
+            <a:pPr algn="l">
               <a:lnSpc>
                 <a:spcPct val="112000"/>
               </a:lnSpc>
               <a:spcAft>
-                <a:spcPts val="200"/>
+                <a:spcPts val="600"/>
               </a:spcAft>
             </a:pPr>
             <a:r>
               <a:rPr sz="1800" b="0">
                 <a:solidFill>
-                  <a:srgbClr val="0E0F11"/>
-                </a:solidFill>
-                <a:latin typeface="JetBrains Mono"/>
+                  <a:srgbClr val="4D5560"/>
+                </a:solidFill>
+                <a:latin typeface="Instrument Sans"/>
               </a:rPr>
-              <a:t>custody_registry.handover</a:t>
-            </a:r>
-          </a:p>
-        </p:txBody>
-      </p:sp>
-      <p:sp>
-        <p:nvSpPr>
-          <p:cNvPr id="129" name="Rounded Rectangle 128"/>
+              <a:t>{{source, publisher, date}}</a:t>
+            </a:r>
+          </a:p>
+        </p:txBody>
+      </p:sp>
+      <p:sp>
+        <p:nvSpPr>
+          <p:cNvPr id="134" name="Rectangle 133"/>
           <p:cNvSpPr/>
           <p:nvPr/>
         </p:nvSpPr>
         <p:spPr>
           <a:xfrm>
-            <a:off x="12893040" y="3291840"/>
-            <a:ext cx="4480560" cy="1325880"/>
-          </a:xfrm>
-          <a:prstGeom prst="roundRect">
-            <a:avLst>
-              <a:gd name="adj" fmla="val 11034"/>
-            </a:avLst>
+            <a:off x="12070080" y="4192524"/>
+            <a:ext cx="5120640" cy="27432"/>
+          </a:xfrm>
+          <a:prstGeom prst="rect">
+            <a:avLst/>
           </a:prstGeom>
           <a:solidFill>
-            <a:srgbClr val="FFFFFF"/>
+            <a:srgbClr val="556F00"/>
           </a:solidFill>
-          <a:ln w="12700">
-            <a:solidFill>
-              <a:srgbClr val="DFDDD6"/>
-            </a:solidFill>
+          <a:ln>
+            <a:noFill/>
           </a:ln>
           <a:effectLst/>
         </p:spPr>
@@ -21697,14 +21492,14 @@
       </p:sp>
       <p:sp>
         <p:nvSpPr>
-          <p:cNvPr id="130" name="TextBox 129"/>
+          <p:cNvPr id="135" name="TextBox 134"/>
           <p:cNvSpPr txBox="1"/>
           <p:nvPr/>
         </p:nvSpPr>
         <p:spPr>
           <a:xfrm>
-            <a:off x="12893040" y="3474720"/>
-            <a:ext cx="4480560" cy="1005840"/>
+            <a:off x="12070080" y="4389120"/>
+            <a:ext cx="5120640" cy="1097280"/>
           </a:xfrm>
           <a:prstGeom prst="rect">
             <a:avLst/>
@@ -21717,31 +21512,96 @@
           </a:bodyPr>
           <a:lstStyle/>
           <a:p>
-            <a:pPr algn="ctr">
+            <a:pPr algn="l">
+              <a:lnSpc>
+                <a:spcPct val="95000"/>
+              </a:lnSpc>
+              <a:spcAft>
+                <a:spcPts val="600"/>
+              </a:spcAft>
+            </a:pPr>
+            <a:r>
+              <a:rPr sz="6400" b="1">
+                <a:solidFill>
+                  <a:srgbClr val="0E0F11"/>
+                </a:solidFill>
+                <a:latin typeface="Inter Tight"/>
+              </a:rPr>
+              <a:t>US$2.5T</a:t>
+            </a:r>
+          </a:p>
+        </p:txBody>
+      </p:sp>
+      <p:sp>
+        <p:nvSpPr>
+          <p:cNvPr id="136" name="TextBox 135"/>
+          <p:cNvSpPr txBox="1"/>
+          <p:nvPr/>
+        </p:nvSpPr>
+        <p:spPr>
+          <a:xfrm>
+            <a:off x="12070080" y="5532120"/>
+            <a:ext cx="5120640" cy="914400"/>
+          </a:xfrm>
+          <a:prstGeom prst="rect">
+            <a:avLst/>
+          </a:prstGeom>
+          <a:noFill/>
+        </p:spPr>
+        <p:txBody>
+          <a:bodyPr wrap="square" lIns="0" rIns="0" tIns="0" bIns="0" anchor="t">
+            <a:spAutoFit/>
+          </a:bodyPr>
+          <a:lstStyle/>
+          <a:p>
+            <a:pPr algn="l">
               <a:lnSpc>
                 <a:spcPct val="112000"/>
               </a:lnSpc>
               <a:spcAft>
-                <a:spcPts val="200"/>
+                <a:spcPts val="600"/>
               </a:spcAft>
             </a:pPr>
             <a:r>
-              <a:rPr sz="2800" b="1">
+              <a:rPr sz="2400" b="1">
                 <a:solidFill>
                   <a:srgbClr val="0E0F11"/>
                 </a:solidFill>
                 <a:latin typeface="Instrument Sans"/>
               </a:rPr>
-              <a:t>Incoming custodian</a:t>
-            </a:r>
-          </a:p>
-          <a:p>
-            <a:pPr algn="ctr">
+              <a:t>global trade finance gap</a:t>
+            </a:r>
+          </a:p>
+        </p:txBody>
+      </p:sp>
+      <p:sp>
+        <p:nvSpPr>
+          <p:cNvPr id="137" name="TextBox 136"/>
+          <p:cNvSpPr txBox="1"/>
+          <p:nvPr/>
+        </p:nvSpPr>
+        <p:spPr>
+          <a:xfrm>
+            <a:off x="12070080" y="6446520"/>
+            <a:ext cx="5120640" cy="822960"/>
+          </a:xfrm>
+          <a:prstGeom prst="rect">
+            <a:avLst/>
+          </a:prstGeom>
+          <a:noFill/>
+        </p:spPr>
+        <p:txBody>
+          <a:bodyPr wrap="square" lIns="0" rIns="0" tIns="0" bIns="0" anchor="t">
+            <a:spAutoFit/>
+          </a:bodyPr>
+          <a:lstStyle/>
+          <a:p>
+            <a:pPr algn="l">
               <a:lnSpc>
                 <a:spcPct val="112000"/>
               </a:lnSpc>
               <a:spcAft>
-                <a:spcPts val="200"/>
+                <a:spcPts val="600"/>
               </a:spcAft>
             </a:pPr>
             <a:r>
@@ -21749,32 +21609,525 @@
                 <a:solidFill>
                   <a:srgbClr val="4D5560"/>
                 </a:solidFill>
-                <a:latin typeface="JetBrains Mono"/>
+                <a:latin typeface="Instrument Sans"/>
               </a:rPr>
-              <a:t>signs</a:t>
-            </a:r>
-          </a:p>
-        </p:txBody>
-      </p:sp>
-      <p:sp>
-        <p:nvSpPr>
-          <p:cNvPr id="131" name="Rectangle 130"/>
+              <a:t>ADB Global Trade Finance Gap Survey, Dec 2025</a:t>
+            </a:r>
+          </a:p>
+        </p:txBody>
+      </p:sp>
+      <p:sp>
+        <p:nvSpPr>
+          <p:cNvPr id="138" name="TextBox 137"/>
+          <p:cNvSpPr txBox="1"/>
+          <p:nvPr/>
+        </p:nvSpPr>
+        <p:spPr>
+          <a:xfrm>
+            <a:off x="914400" y="7498079"/>
+            <a:ext cx="16459200" cy="822960"/>
+          </a:xfrm>
+          <a:prstGeom prst="rect">
+            <a:avLst/>
+          </a:prstGeom>
+          <a:noFill/>
+        </p:spPr>
+        <p:txBody>
+          <a:bodyPr wrap="square" lIns="0" rIns="0" tIns="0" bIns="0" anchor="t">
+            <a:spAutoFit/>
+          </a:bodyPr>
+          <a:lstStyle/>
+          <a:p>
+            <a:pPr algn="l">
+              <a:lnSpc>
+                <a:spcPct val="112000"/>
+              </a:lnSpc>
+              <a:spcAft>
+                <a:spcPts val="600"/>
+              </a:spcAft>
+            </a:pPr>
+            <a:r>
+              <a:rPr sz="2000" b="0">
+                <a:solidFill>
+                  <a:srgbClr val="4D5560"/>
+                </a:solidFill>
+                <a:latin typeface="Instrument Sans"/>
+              </a:rPr>
+              <a:t>These numbers size the market problem. They are not our traction, and this build does not solve all of it.</a:t>
+            </a:r>
+          </a:p>
+        </p:txBody>
+      </p:sp>
+    </p:spTree>
+  </p:cSld>
+  <p:clrMapOvr>
+    <a:masterClrMapping/>
+  </p:clrMapOvr>
+</p:sld>
+</file>
+
+<file path=ppt/slides/slide9.xml><?xml version="1.0" encoding="utf-8"?>
+<p:sld xmlns:a="http://schemas.openxmlformats.org/drawingml/2006/main" xmlns:p="http://schemas.openxmlformats.org/presentationml/2006/main" xmlns:r="http://schemas.openxmlformats.org/officeDocument/2006/relationships">
+  <p:cSld>
+    <p:bg>
+      <p:bgPr>
+        <a:solidFill>
+          <a:srgbClr val="F7F6F2"/>
+        </a:solidFill>
+      </p:bgPr>
+    </p:bg>
+    <p:spTree>
+      <p:nvGrpSpPr>
+        <p:cNvPr id="1" name=""/>
+        <p:cNvGrpSpPr/>
+        <p:nvPr/>
+      </p:nvGrpSpPr>
+      <p:grpSpPr/>
+      <p:sp>
+        <p:nvSpPr>
+          <p:cNvPr id="106" name="Google Shape;106;p14"/>
           <p:cNvSpPr/>
           <p:nvPr/>
         </p:nvSpPr>
         <p:spPr>
           <a:xfrm>
-            <a:off x="5394960" y="3931920"/>
-            <a:ext cx="594360" cy="36576"/>
+            <a:off x="0" y="0"/>
+            <a:ext cx="18288000" cy="731520"/>
           </a:xfrm>
           <a:prstGeom prst="rect">
             <a:avLst/>
           </a:prstGeom>
           <a:solidFill>
-            <a:srgbClr val="0E0F11"/>
+            <a:srgbClr val="0F0F0F"/>
           </a:solidFill>
           <a:ln>
             <a:noFill/>
+          </a:ln>
+        </p:spPr>
+        <p:txBody>
+          <a:bodyPr anchorCtr="0" anchor="ctr" bIns="45700" lIns="91425" spcFirstLastPara="1" rIns="91425" wrap="square" tIns="45700">
+            <a:noAutofit/>
+          </a:bodyPr>
+          <a:lstStyle/>
+          <a:p>
+            <a:pPr indent="0" lvl="0" marL="0" marR="0" rtl="0" algn="ctr">
+              <a:spcBef>
+                <a:spcPts val="0"/>
+              </a:spcBef>
+              <a:spcAft>
+                <a:spcPts val="0"/>
+              </a:spcAft>
+              <a:buNone/>
+            </a:pPr>
+            <a:r>
+              <a:t/>
+            </a:r>
+            <a:endParaRPr b="0" i="0" sz="1800" u="none" cap="none" strike="noStrike">
+              <a:solidFill>
+                <a:schemeClr val="dk1"/>
+              </a:solidFill>
+              <a:latin typeface="Instrument Sans"/>
+              <a:ea typeface="Instrument Sans"/>
+              <a:cs typeface="Instrument Sans"/>
+              <a:sym typeface="Instrument Sans"/>
+            </a:endParaRPr>
+          </a:p>
+        </p:txBody>
+      </p:sp>
+      <p:sp>
+        <p:nvSpPr>
+          <p:cNvPr id="107" name="Google Shape;107;p14"/>
+          <p:cNvSpPr txBox="1"/>
+          <p:nvPr/>
+        </p:nvSpPr>
+        <p:spPr>
+          <a:xfrm>
+            <a:off x="914400" y="201168"/>
+            <a:ext cx="4572000" cy="329184"/>
+          </a:xfrm>
+          <a:prstGeom prst="rect">
+            <a:avLst/>
+          </a:prstGeom>
+          <a:noFill/>
+          <a:ln>
+            <a:noFill/>
+          </a:ln>
+        </p:spPr>
+        <p:txBody>
+          <a:bodyPr anchorCtr="0" anchor="ctr" bIns="0" lIns="0" spcFirstLastPara="1" rIns="0" wrap="square" tIns="0">
+            <a:spAutoFit/>
+          </a:bodyPr>
+          <a:lstStyle/>
+          <a:p>
+            <a:pPr indent="0" lvl="0" marL="0" marR="0" rtl="0" algn="l">
+              <a:spcBef>
+                <a:spcPts val="0"/>
+              </a:spcBef>
+              <a:spcAft>
+                <a:spcPts val="0"/>
+              </a:spcAft>
+              <a:buNone/>
+            </a:pPr>
+            <a:r>
+              <a:rPr b="1" i="0" lang="en-US" sz="1400" u="none" cap="none" strike="noStrike">
+                <a:solidFill>
+                  <a:srgbClr val="C6F24E"/>
+                </a:solidFill>
+                <a:latin typeface="JetBrains Mono"/>
+                <a:ea typeface="JetBrains Mono"/>
+                <a:cs typeface="JetBrains Mono"/>
+                <a:sym typeface="JetBrains Mono"/>
+              </a:rPr>
+              <a:t>PLATFORM 04 / 10</a:t>
+            </a:r>
+            <a:endParaRPr/>
+          </a:p>
+        </p:txBody>
+      </p:sp>
+      <p:sp>
+        <p:nvSpPr>
+          <p:cNvPr id="108" name="Google Shape;108;p14"/>
+          <p:cNvSpPr txBox="1"/>
+          <p:nvPr/>
+        </p:nvSpPr>
+        <p:spPr>
+          <a:xfrm>
+            <a:off x="5486400" y="201168"/>
+            <a:ext cx="7315200" cy="329184"/>
+          </a:xfrm>
+          <a:prstGeom prst="rect">
+            <a:avLst/>
+          </a:prstGeom>
+          <a:noFill/>
+          <a:ln>
+            <a:noFill/>
+          </a:ln>
+        </p:spPr>
+        <p:txBody>
+          <a:bodyPr anchorCtr="0" anchor="ctr" bIns="0" lIns="0" spcFirstLastPara="1" rIns="0" wrap="square" tIns="0">
+            <a:spAutoFit/>
+          </a:bodyPr>
+          <a:lstStyle/>
+          <a:p>
+            <a:pPr indent="0" lvl="0" marL="0" marR="0" rtl="0" algn="ctr">
+              <a:spcBef>
+                <a:spcPts val="0"/>
+              </a:spcBef>
+              <a:spcAft>
+                <a:spcPts val="0"/>
+              </a:spcAft>
+              <a:buNone/>
+            </a:pPr>
+            <a:r>
+              <a:rPr b="1" i="0" lang="en-US" sz="1400" u="none" cap="none" strike="noStrike">
+                <a:solidFill>
+                  <a:srgbClr val="FFFFFF"/>
+                </a:solidFill>
+                <a:latin typeface="JetBrains Mono"/>
+                <a:ea typeface="JetBrains Mono"/>
+                <a:cs typeface="JetBrains Mono"/>
+                <a:sym typeface="JetBrains Mono"/>
+              </a:rPr>
+              <a:t>HACKMERIDIAN 2026 · LISBON</a:t>
+            </a:r>
+            <a:endParaRPr/>
+          </a:p>
+        </p:txBody>
+      </p:sp>
+      <p:sp>
+        <p:nvSpPr>
+          <p:cNvPr id="109" name="Google Shape;109;p14"/>
+          <p:cNvSpPr txBox="1"/>
+          <p:nvPr/>
+        </p:nvSpPr>
+        <p:spPr>
+          <a:xfrm>
+            <a:off x="12801600" y="201168"/>
+            <a:ext cx="4572000" cy="329184"/>
+          </a:xfrm>
+          <a:prstGeom prst="rect">
+            <a:avLst/>
+          </a:prstGeom>
+          <a:noFill/>
+          <a:ln>
+            <a:noFill/>
+          </a:ln>
+        </p:spPr>
+        <p:txBody>
+          <a:bodyPr anchorCtr="0" anchor="ctr" bIns="0" lIns="0" spcFirstLastPara="1" rIns="0" wrap="square" tIns="0">
+            <a:spAutoFit/>
+          </a:bodyPr>
+          <a:lstStyle/>
+          <a:p>
+            <a:pPr indent="0" lvl="0" marL="0" marR="0" rtl="0" algn="r">
+              <a:spcBef>
+                <a:spcPts val="0"/>
+              </a:spcBef>
+              <a:spcAft>
+                <a:spcPts val="0"/>
+              </a:spcAft>
+              <a:buNone/>
+            </a:pPr>
+            <a:r>
+              <a:rPr b="1" i="0" lang="en-US" sz="1400" u="none" cap="none" strike="noStrike">
+                <a:solidFill>
+                  <a:srgbClr val="C6F24E"/>
+                </a:solidFill>
+                <a:latin typeface="JetBrains Mono"/>
+                <a:ea typeface="JetBrains Mono"/>
+                <a:cs typeface="JetBrains Mono"/>
+                <a:sym typeface="JetBrains Mono"/>
+              </a:rPr>
+              <a:t>NEXT ▸ LIVE ON TESTNET</a:t>
+            </a:r>
+            <a:endParaRPr/>
+          </a:p>
+        </p:txBody>
+      </p:sp>
+      <p:sp>
+        <p:nvSpPr>
+          <p:cNvPr id="110" name="Google Shape;110;p14"/>
+          <p:cNvSpPr/>
+          <p:nvPr/>
+        </p:nvSpPr>
+        <p:spPr>
+          <a:xfrm>
+            <a:off x="914400" y="1417320"/>
+            <a:ext cx="2468879" cy="475488"/>
+          </a:xfrm>
+          <a:prstGeom prst="roundRect">
+            <a:avLst>
+              <a:gd fmla="val 50000" name="adj"/>
+            </a:avLst>
+          </a:prstGeom>
+          <a:solidFill>
+            <a:srgbClr val="C6F24E"/>
+          </a:solidFill>
+          <a:ln>
+            <a:noFill/>
+          </a:ln>
+        </p:spPr>
+        <p:txBody>
+          <a:bodyPr anchorCtr="0" anchor="ctr" bIns="0" lIns="0" spcFirstLastPara="1" rIns="0" wrap="square" tIns="0">
+            <a:noAutofit/>
+          </a:bodyPr>
+          <a:lstStyle/>
+          <a:p>
+            <a:pPr indent="0" lvl="0" marL="0" marR="0" rtl="0" algn="ctr">
+              <a:spcBef>
+                <a:spcPts val="0"/>
+              </a:spcBef>
+              <a:spcAft>
+                <a:spcPts val="0"/>
+              </a:spcAft>
+              <a:buNone/>
+            </a:pPr>
+            <a:r>
+              <a:rPr b="1" i="0" lang="en-US" sz="1800" u="none" cap="none" strike="noStrike">
+                <a:solidFill>
+                  <a:srgbClr val="0E0F11"/>
+                </a:solidFill>
+                <a:latin typeface="JetBrains Mono"/>
+                <a:ea typeface="JetBrains Mono"/>
+                <a:cs typeface="JetBrains Mono"/>
+                <a:sym typeface="JetBrains Mono"/>
+              </a:rPr>
+              <a:t>THE SOLUTION</a:t>
+            </a:r>
+            <a:endParaRPr/>
+          </a:p>
+        </p:txBody>
+      </p:sp>
+      <p:sp>
+        <p:nvSpPr>
+          <p:cNvPr id="121" name="Google Shape;121;p14"/>
+          <p:cNvSpPr/>
+          <p:nvPr/>
+        </p:nvSpPr>
+        <p:spPr>
+          <a:xfrm>
+            <a:off x="914400" y="8915400"/>
+            <a:ext cx="16459200" cy="13716"/>
+          </a:xfrm>
+          <a:prstGeom prst="rect">
+            <a:avLst/>
+          </a:prstGeom>
+          <a:solidFill>
+            <a:srgbClr val="DFDDD6"/>
+          </a:solidFill>
+          <a:ln>
+            <a:noFill/>
+          </a:ln>
+        </p:spPr>
+        <p:txBody>
+          <a:bodyPr anchorCtr="0" anchor="ctr" bIns="45700" lIns="91425" spcFirstLastPara="1" rIns="91425" wrap="square" tIns="45700">
+            <a:noAutofit/>
+          </a:bodyPr>
+          <a:lstStyle/>
+          <a:p>
+            <a:pPr indent="0" lvl="0" marL="0" marR="0" rtl="0" algn="ctr">
+              <a:spcBef>
+                <a:spcPts val="0"/>
+              </a:spcBef>
+              <a:spcAft>
+                <a:spcPts val="0"/>
+              </a:spcAft>
+              <a:buNone/>
+            </a:pPr>
+            <a:r>
+              <a:t/>
+            </a:r>
+            <a:endParaRPr b="0" i="0" sz="1800" u="none" cap="none" strike="noStrike">
+              <a:solidFill>
+                <a:schemeClr val="dk1"/>
+              </a:solidFill>
+              <a:latin typeface="Instrument Sans"/>
+              <a:ea typeface="Instrument Sans"/>
+              <a:cs typeface="Instrument Sans"/>
+              <a:sym typeface="Instrument Sans"/>
+            </a:endParaRPr>
+          </a:p>
+        </p:txBody>
+      </p:sp>
+      <p:sp>
+        <p:nvSpPr>
+          <p:cNvPr id="122" name="Google Shape;122;p14"/>
+          <p:cNvSpPr txBox="1"/>
+          <p:nvPr/>
+        </p:nvSpPr>
+        <p:spPr>
+          <a:xfrm>
+            <a:off x="914400" y="9253728"/>
+            <a:ext cx="9144000" cy="320040"/>
+          </a:xfrm>
+          <a:prstGeom prst="rect">
+            <a:avLst/>
+          </a:prstGeom>
+          <a:noFill/>
+          <a:ln>
+            <a:noFill/>
+          </a:ln>
+        </p:spPr>
+        <p:txBody>
+          <a:bodyPr anchorCtr="0" anchor="ctr" bIns="0" lIns="0" spcFirstLastPara="1" rIns="0" wrap="square" tIns="0">
+            <a:spAutoFit/>
+          </a:bodyPr>
+          <a:lstStyle/>
+          <a:p>
+            <a:pPr indent="0" lvl="0" marL="0" marR="0" rtl="0" algn="l">
+              <a:spcBef>
+                <a:spcPts val="0"/>
+              </a:spcBef>
+              <a:spcAft>
+                <a:spcPts val="0"/>
+              </a:spcAft>
+              <a:buNone/>
+            </a:pPr>
+            <a:r>
+              <a:rPr b="0" i="0" lang="en-US" sz="1200" u="none" cap="none" strike="noStrike">
+                <a:solidFill>
+                  <a:srgbClr val="5C5C5C"/>
+                </a:solidFill>
+                <a:latin typeface="JetBrains Mono"/>
+                <a:ea typeface="JetBrains Mono"/>
+                <a:cs typeface="JetBrains Mono"/>
+                <a:sym typeface="JetBrains Mono"/>
+              </a:rPr>
+              <a:t>© 2026 HackMeridian · Lisbon  ·  #HackMeridian26</a:t>
+            </a:r>
+            <a:endParaRPr/>
+          </a:p>
+        </p:txBody>
+      </p:sp>
+      <p:pic>
+        <p:nvPicPr>
+          <p:cNvPr id="123" name="Picture 122" descr="image.png"/>
+          <p:cNvPicPr>
+            <a:picLocks noChangeAspect="1"/>
+          </p:cNvPicPr>
+          <p:nvPr/>
+        </p:nvPicPr>
+        <p:blipFill>
+          <a:blip r:embed="rId2"/>
+          <a:stretch>
+            <a:fillRect/>
+          </a:stretch>
+        </p:blipFill>
+        <p:spPr>
+          <a:xfrm>
+            <a:off x="14859000" y="9171432"/>
+            <a:ext cx="2517969" cy="438912"/>
+          </a:xfrm>
+          <a:prstGeom prst="rect">
+            <a:avLst/>
+          </a:prstGeom>
+        </p:spPr>
+      </p:pic>
+      <p:sp>
+        <p:nvSpPr>
+          <p:cNvPr id="124" name="TextBox 123"/>
+          <p:cNvSpPr txBox="1"/>
+          <p:nvPr/>
+        </p:nvSpPr>
+        <p:spPr>
+          <a:xfrm>
+            <a:off x="914400" y="2011680"/>
+            <a:ext cx="16459200" cy="1005840"/>
+          </a:xfrm>
+          <a:prstGeom prst="rect">
+            <a:avLst/>
+          </a:prstGeom>
+          <a:noFill/>
+        </p:spPr>
+        <p:txBody>
+          <a:bodyPr wrap="square" lIns="0" rIns="0" tIns="0" bIns="0" anchor="t">
+            <a:spAutoFit/>
+          </a:bodyPr>
+          <a:lstStyle/>
+          <a:p>
+            <a:pPr algn="l">
+              <a:lnSpc>
+                <a:spcPct val="100000"/>
+              </a:lnSpc>
+              <a:spcAft>
+                <a:spcPts val="600"/>
+              </a:spcAft>
+            </a:pPr>
+            <a:r>
+              <a:rPr sz="5800" b="1">
+                <a:solidFill>
+                  <a:srgbClr val="0E0F11"/>
+                </a:solidFill>
+                <a:latin typeface="Inter Tight"/>
+              </a:rPr>
+              <a:t>Both custodians sign, or nothing changes</a:t>
+            </a:r>
+          </a:p>
+        </p:txBody>
+      </p:sp>
+      <p:sp>
+        <p:nvSpPr>
+          <p:cNvPr id="125" name="Rounded Rectangle 124"/>
+          <p:cNvSpPr/>
+          <p:nvPr/>
+        </p:nvSpPr>
+        <p:spPr>
+          <a:xfrm>
+            <a:off x="914400" y="3291840"/>
+            <a:ext cx="4480560" cy="1325880"/>
+          </a:xfrm>
+          <a:prstGeom prst="roundRect">
+            <a:avLst>
+              <a:gd name="adj" fmla="val 11034"/>
+            </a:avLst>
+          </a:prstGeom>
+          <a:solidFill>
+            <a:srgbClr val="FFFFFF"/>
+          </a:solidFill>
+          <a:ln w="12700">
+            <a:solidFill>
+              <a:srgbClr val="DFDDD6"/>
+            </a:solidFill>
           </a:ln>
           <a:effectLst/>
         </p:spPr>
@@ -21802,20 +22155,83 @@
       </p:sp>
       <p:sp>
         <p:nvSpPr>
-          <p:cNvPr id="132" name="Rectangle 131"/>
+          <p:cNvPr id="126" name="TextBox 125"/>
+          <p:cNvSpPr txBox="1"/>
+          <p:nvPr/>
+        </p:nvSpPr>
+        <p:spPr>
+          <a:xfrm>
+            <a:off x="914400" y="3474720"/>
+            <a:ext cx="4480560" cy="1005840"/>
+          </a:xfrm>
+          <a:prstGeom prst="rect">
+            <a:avLst/>
+          </a:prstGeom>
+          <a:noFill/>
+        </p:spPr>
+        <p:txBody>
+          <a:bodyPr wrap="square" lIns="0" rIns="0" tIns="0" bIns="0" anchor="t">
+            <a:spAutoFit/>
+          </a:bodyPr>
+          <a:lstStyle/>
+          <a:p>
+            <a:pPr algn="ctr">
+              <a:lnSpc>
+                <a:spcPct val="112000"/>
+              </a:lnSpc>
+              <a:spcAft>
+                <a:spcPts val="200"/>
+              </a:spcAft>
+            </a:pPr>
+            <a:r>
+              <a:rPr sz="2800" b="1">
+                <a:solidFill>
+                  <a:srgbClr val="0E0F11"/>
+                </a:solidFill>
+                <a:latin typeface="Instrument Sans"/>
+              </a:rPr>
+              <a:t>Outgoing custodian</a:t>
+            </a:r>
+          </a:p>
+          <a:p>
+            <a:pPr algn="ctr">
+              <a:lnSpc>
+                <a:spcPct val="112000"/>
+              </a:lnSpc>
+              <a:spcAft>
+                <a:spcPts val="200"/>
+              </a:spcAft>
+            </a:pPr>
+            <a:r>
+              <a:rPr sz="1800" b="0">
+                <a:solidFill>
+                  <a:srgbClr val="4D5560"/>
+                </a:solidFill>
+                <a:latin typeface="JetBrains Mono"/>
+              </a:rPr>
+              <a:t>signs</a:t>
+            </a:r>
+          </a:p>
+        </p:txBody>
+      </p:sp>
+      <p:sp>
+        <p:nvSpPr>
+          <p:cNvPr id="127" name="Rounded Rectangle 126"/>
           <p:cNvSpPr/>
           <p:nvPr/>
         </p:nvSpPr>
         <p:spPr>
           <a:xfrm>
-            <a:off x="12298680" y="3931920"/>
-            <a:ext cx="594360" cy="36576"/>
-          </a:xfrm>
-          <a:prstGeom prst="rect">
-            <a:avLst/>
+            <a:off x="5989320" y="3291840"/>
+            <a:ext cx="6309360" cy="1325880"/>
+          </a:xfrm>
+          <a:prstGeom prst="roundRect">
+            <a:avLst>
+              <a:gd name="adj" fmla="val 11034"/>
+            </a:avLst>
           </a:prstGeom>
           <a:solidFill>
-            <a:srgbClr val="0E0F11"/>
+            <a:srgbClr val="C6F24E"/>
           </a:solidFill>
           <a:ln>
             <a:noFill/>
@@ -21846,14 +22262,14 @@
       </p:sp>
       <p:sp>
         <p:nvSpPr>
-          <p:cNvPr id="133" name="TextBox 132"/>
+          <p:cNvPr id="128" name="TextBox 127"/>
           <p:cNvSpPr txBox="1"/>
           <p:nvPr/>
         </p:nvSpPr>
         <p:spPr>
           <a:xfrm>
-            <a:off x="914400" y="4983480"/>
-            <a:ext cx="16459200" cy="548640"/>
+            <a:off x="5989320" y="3474720"/>
+            <a:ext cx="6309360" cy="1005840"/>
           </a:xfrm>
           <a:prstGeom prst="rect">
             <a:avLst/>
@@ -21871,714 +22287,62 @@
                 <a:spcPct val="112000"/>
               </a:lnSpc>
               <a:spcAft>
-                <a:spcPts val="600"/>
+                <a:spcPts val="200"/>
               </a:spcAft>
             </a:pPr>
             <a:r>
-              <a:rPr sz="3000" b="1">
+              <a:rPr sz="2800" b="1">
                 <a:solidFill>
                   <a:srgbClr val="0E0F11"/>
                 </a:solidFill>
                 <a:latin typeface="Instrument Sans"/>
               </a:rPr>
-              <a:t>Either signature missing → the call fails.</a:t>
-            </a:r>
-          </a:p>
-        </p:txBody>
-      </p:sp>
-      <p:sp>
-        <p:nvSpPr>
-          <p:cNvPr id="134" name="TextBox 133"/>
-          <p:cNvSpPr txBox="1"/>
-          <p:nvPr/>
-        </p:nvSpPr>
-        <p:spPr>
-          <a:xfrm>
-            <a:off x="914400" y="5897880"/>
-            <a:ext cx="16459200" cy="1645920"/>
-          </a:xfrm>
-          <a:prstGeom prst="rect">
-            <a:avLst/>
-          </a:prstGeom>
-          <a:noFill/>
-        </p:spPr>
-        <p:txBody>
-          <a:bodyPr wrap="square" lIns="0" rIns="0" tIns="0" bIns="0" anchor="t">
-            <a:spAutoFit/>
-          </a:bodyPr>
-          <a:lstStyle/>
-          <a:p>
-            <a:pPr algn="l">
+              <a:t>One Stellar transaction</a:t>
+            </a:r>
+          </a:p>
+          <a:p>
+            <a:pPr algn="ctr">
               <a:lnSpc>
                 <a:spcPct val="112000"/>
               </a:lnSpc>
               <a:spcAft>
-                <a:spcPts val="800"/>
+                <a:spcPts val="200"/>
               </a:spcAft>
             </a:pPr>
             <a:r>
-              <a:rPr sz="2600" b="0">
-                <a:solidFill>
-                  <a:srgbClr val="556F00"/>
-                </a:solidFill>
-                <a:latin typeface="Instrument Sans"/>
-              </a:rPr>
-              <a:t>— </a:t>
-            </a:r>
-            <a:r>
-              <a:rPr sz="2600" b="0">
-                <a:solidFill>
-                  <a:srgbClr val="0E0F11"/>
-                </a:solidFill>
-                <a:latin typeface="Instrument Sans"/>
-              </a:rPr>
-              <a:t>Each handover moves custody and extends an on-chain hash chain, the </a:t>
-            </a:r>
-            <a:r>
-              <a:rPr sz="2600" b="0">
+              <a:rPr sz="1800" b="0">
                 <a:solidFill>
                   <a:srgbClr val="0E0F11"/>
                 </a:solidFill>
                 <a:latin typeface="JetBrains Mono"/>
               </a:rPr>
-              <a:t>head</a:t>
-            </a:r>
-            <a:r>
-              <a:rPr sz="2600" b="0">
-                <a:solidFill>
-                  <a:srgbClr val="0E0F11"/>
-                </a:solidFill>
-                <a:latin typeface="Instrument Sans"/>
-              </a:rPr>
-              <a:t>.</a:t>
-            </a:r>
-          </a:p>
-          <a:p>
-            <a:pPr algn="l">
-              <a:lnSpc>
-                <a:spcPct val="112000"/>
-              </a:lnSpc>
-              <a:spcAft>
-                <a:spcPts val="800"/>
-              </a:spcAft>
-            </a:pPr>
-            <a:r>
-              <a:rPr sz="2600" b="0">
-                <a:solidFill>
-                  <a:srgbClr val="556F00"/>
-                </a:solidFill>
-                <a:latin typeface="Instrument Sans"/>
-              </a:rPr>
-              <a:t>— </a:t>
-            </a:r>
-            <a:r>
-              <a:rPr sz="2600" b="0">
-                <a:solidFill>
-                  <a:srgbClr val="0E0F11"/>
-                </a:solidFill>
-                <a:latin typeface="Instrument Sans"/>
-              </a:rPr>
-              <a:t>The token stays with its holder in transit; only custody changes.</a:t>
-            </a:r>
-          </a:p>
-          <a:p>
-            <a:pPr algn="l">
-              <a:lnSpc>
-                <a:spcPct val="112000"/>
-              </a:lnSpc>
-              <a:spcAft>
-                <a:spcPts val="800"/>
-              </a:spcAft>
-            </a:pPr>
-            <a:r>
-              <a:rPr sz="2600" b="0">
-                <a:solidFill>
-                  <a:srgbClr val="556F00"/>
-                </a:solidFill>
-                <a:latin typeface="Instrument Sans"/>
-              </a:rPr>
-              <a:t>— </a:t>
-            </a:r>
-            <a:r>
-              <a:rPr sz="2600" b="0">
-                <a:solidFill>
-                  <a:srgbClr val="0E0F11"/>
-                </a:solidFill>
-                <a:latin typeface="Instrument Sans"/>
-              </a:rPr>
-              <a:t>After Delivered, the operator burns the token with the existing </a:t>
-            </a:r>
-            <a:r>
-              <a:rPr sz="2600" b="0">
-                <a:solidFill>
-                  <a:srgbClr val="0E0F11"/>
-                </a:solidFill>
-                <a:latin typeface="JetBrains Mono"/>
-              </a:rPr>
-              <a:t>redeem</a:t>
-            </a:r>
-            <a:r>
-              <a:rPr sz="2600" b="0">
-                <a:solidFill>
-                  <a:srgbClr val="0E0F11"/>
-                </a:solidFill>
-                <a:latin typeface="Instrument Sans"/>
-              </a:rPr>
-              <a:t>¹.</a:t>
-            </a:r>
-          </a:p>
-        </p:txBody>
-      </p:sp>
-      <p:sp>
-        <p:nvSpPr>
-          <p:cNvPr id="135" name="TextBox 134"/>
-          <p:cNvSpPr txBox="1"/>
-          <p:nvPr/>
-        </p:nvSpPr>
-        <p:spPr>
-          <a:xfrm>
-            <a:off x="914400" y="7909560"/>
-            <a:ext cx="16459200" cy="914400"/>
-          </a:xfrm>
-          <a:prstGeom prst="rect">
-            <a:avLst/>
-          </a:prstGeom>
-          <a:noFill/>
-        </p:spPr>
-        <p:txBody>
-          <a:bodyPr wrap="square" lIns="0" rIns="0" tIns="0" bIns="0" anchor="t">
-            <a:spAutoFit/>
-          </a:bodyPr>
-          <a:lstStyle/>
-          <a:p>
-            <a:pPr algn="l">
-              <a:lnSpc>
-                <a:spcPct val="112000"/>
-              </a:lnSpc>
-              <a:spcAft>
-                <a:spcPts val="200"/>
-              </a:spcAft>
-            </a:pPr>
-            <a:r>
-              <a:rPr sz="1800" b="0">
-                <a:solidFill>
-                  <a:srgbClr val="4D5560"/>
-                </a:solidFill>
-                <a:latin typeface="Instrument Sans"/>
-              </a:rPr>
-              <a:t>A custody record keyed to the container number. In production it would sit beside the carrier's bill of lading; not integrated in this build.</a:t>
-            </a:r>
-          </a:p>
-          <a:p>
-            <a:pPr algn="l">
-              <a:lnSpc>
-                <a:spcPct val="112000"/>
-              </a:lnSpc>
-              <a:spcAft>
-                <a:spcPts val="200"/>
-              </a:spcAft>
-            </a:pPr>
-            <a:r>
-              <a:rPr sz="1800" b="0">
-                <a:solidFill>
-                  <a:srgbClr val="4D5560"/>
-                </a:solidFill>
-                <a:latin typeface="Instrument Sans"/>
-              </a:rPr>
-              <a:t>¹ Radox platform policy, not enforced on-chain by the registry; redeem still needs the holder's signature.</a:t>
-            </a:r>
-          </a:p>
-        </p:txBody>
-      </p:sp>
-    </p:spTree>
-  </p:cSld>
-  <p:clrMapOvr>
-    <a:masterClrMapping/>
-  </p:clrMapOvr>
-</p:sld>
-</file>
-
-<file path=ppt/slides/slide9.xml><?xml version="1.0" encoding="utf-8"?>
-<p:sld xmlns:a="http://schemas.openxmlformats.org/drawingml/2006/main" xmlns:p="http://schemas.openxmlformats.org/presentationml/2006/main" xmlns:r="http://schemas.openxmlformats.org/officeDocument/2006/relationships">
-  <p:cSld>
-    <p:bg>
-      <p:bgPr>
-        <a:solidFill>
-          <a:srgbClr val="0E0F11"/>
-        </a:solidFill>
-      </p:bgPr>
-    </p:bg>
-    <p:spTree>
-      <p:nvGrpSpPr>
-        <p:cNvPr id="1" name=""/>
-        <p:cNvGrpSpPr/>
-        <p:nvPr/>
-      </p:nvGrpSpPr>
-      <p:grpSpPr/>
-      <p:sp>
-        <p:nvSpPr>
-          <p:cNvPr id="106" name="Google Shape;106;p14"/>
+              <a:t>custody_registry.handover</a:t>
+            </a:r>
+          </a:p>
+        </p:txBody>
+      </p:sp>
+      <p:sp>
+        <p:nvSpPr>
+          <p:cNvPr id="129" name="Rounded Rectangle 128"/>
           <p:cNvSpPr/>
           <p:nvPr/>
         </p:nvSpPr>
         <p:spPr>
           <a:xfrm>
-            <a:off x="0" y="0"/>
-            <a:ext cx="18288000" cy="731520"/>
-          </a:xfrm>
-          <a:prstGeom prst="rect">
-            <a:avLst/>
-          </a:prstGeom>
-          <a:solidFill>
-            <a:srgbClr val="131517"/>
-          </a:solidFill>
-          <a:ln>
-            <a:noFill/>
-          </a:ln>
-        </p:spPr>
-        <p:txBody>
-          <a:bodyPr anchorCtr="0" anchor="ctr" bIns="45700" lIns="91425" spcFirstLastPara="1" rIns="91425" wrap="square" tIns="45700">
-            <a:noAutofit/>
-          </a:bodyPr>
-          <a:lstStyle/>
-          <a:p>
-            <a:pPr indent="0" lvl="0" marL="0" marR="0" rtl="0" algn="ctr">
-              <a:spcBef>
-                <a:spcPts val="0"/>
-              </a:spcBef>
-              <a:spcAft>
-                <a:spcPts val="0"/>
-              </a:spcAft>
-              <a:buNone/>
-            </a:pPr>
-            <a:r>
-              <a:t/>
-            </a:r>
-            <a:endParaRPr b="0" i="0" sz="1800" u="none" cap="none" strike="noStrike">
-              <a:solidFill>
-                <a:schemeClr val="dk1"/>
-              </a:solidFill>
-              <a:latin typeface="Instrument Sans"/>
-              <a:ea typeface="Instrument Sans"/>
-              <a:cs typeface="Instrument Sans"/>
-              <a:sym typeface="Instrument Sans"/>
-            </a:endParaRPr>
-          </a:p>
-        </p:txBody>
-      </p:sp>
-      <p:sp>
-        <p:nvSpPr>
-          <p:cNvPr id="107" name="Google Shape;107;p14"/>
-          <p:cNvSpPr txBox="1"/>
-          <p:nvPr/>
-        </p:nvSpPr>
-        <p:spPr>
-          <a:xfrm>
-            <a:off x="914400" y="201168"/>
-            <a:ext cx="4572000" cy="329184"/>
-          </a:xfrm>
-          <a:prstGeom prst="rect">
-            <a:avLst/>
-          </a:prstGeom>
-          <a:noFill/>
-          <a:ln>
-            <a:noFill/>
-          </a:ln>
-        </p:spPr>
-        <p:txBody>
-          <a:bodyPr anchorCtr="0" anchor="ctr" bIns="0" lIns="0" spcFirstLastPara="1" rIns="0" wrap="square" tIns="0">
-            <a:spAutoFit/>
-          </a:bodyPr>
-          <a:lstStyle/>
-          <a:p>
-            <a:pPr indent="0" lvl="0" marL="0" marR="0" rtl="0" algn="l">
-              <a:spcBef>
-                <a:spcPts val="0"/>
-              </a:spcBef>
-              <a:spcAft>
-                <a:spcPts val="0"/>
-              </a:spcAft>
-              <a:buNone/>
-            </a:pPr>
-            <a:r>
-              <a:rPr b="1" i="0" lang="en-US" sz="1400" u="none" cap="none" strike="noStrike">
-                <a:solidFill>
-                  <a:srgbClr val="C6F24E"/>
-                </a:solidFill>
-                <a:latin typeface="JetBrains Mono"/>
-                <a:ea typeface="JetBrains Mono"/>
-                <a:cs typeface="JetBrains Mono"/>
-                <a:sym typeface="JetBrains Mono"/>
-              </a:rPr>
-              <a:t>PLATFORM 04 / 10</a:t>
-            </a:r>
-            <a:endParaRPr/>
-          </a:p>
-        </p:txBody>
-      </p:sp>
-      <p:sp>
-        <p:nvSpPr>
-          <p:cNvPr id="108" name="Google Shape;108;p14"/>
-          <p:cNvSpPr txBox="1"/>
-          <p:nvPr/>
-        </p:nvSpPr>
-        <p:spPr>
-          <a:xfrm>
-            <a:off x="5486400" y="201168"/>
-            <a:ext cx="7315200" cy="329184"/>
-          </a:xfrm>
-          <a:prstGeom prst="rect">
-            <a:avLst/>
-          </a:prstGeom>
-          <a:noFill/>
-          <a:ln>
-            <a:noFill/>
-          </a:ln>
-        </p:spPr>
-        <p:txBody>
-          <a:bodyPr anchorCtr="0" anchor="ctr" bIns="0" lIns="0" spcFirstLastPara="1" rIns="0" wrap="square" tIns="0">
-            <a:spAutoFit/>
-          </a:bodyPr>
-          <a:lstStyle/>
-          <a:p>
-            <a:pPr indent="0" lvl="0" marL="0" marR="0" rtl="0" algn="ctr">
-              <a:spcBef>
-                <a:spcPts val="0"/>
-              </a:spcBef>
-              <a:spcAft>
-                <a:spcPts val="0"/>
-              </a:spcAft>
-              <a:buNone/>
-            </a:pPr>
-            <a:r>
-              <a:rPr b="1" i="0" lang="en-US" sz="1400" u="none" cap="none" strike="noStrike">
-                <a:solidFill>
-                  <a:srgbClr val="FFFFFF"/>
-                </a:solidFill>
-                <a:latin typeface="JetBrains Mono"/>
-                <a:ea typeface="JetBrains Mono"/>
-                <a:cs typeface="JetBrains Mono"/>
-                <a:sym typeface="JetBrains Mono"/>
-              </a:rPr>
-              <a:t>HACKMERIDIAN 2026 · LISBON</a:t>
-            </a:r>
-            <a:endParaRPr/>
-          </a:p>
-        </p:txBody>
-      </p:sp>
-      <p:sp>
-        <p:nvSpPr>
-          <p:cNvPr id="109" name="Google Shape;109;p14"/>
-          <p:cNvSpPr txBox="1"/>
-          <p:nvPr/>
-        </p:nvSpPr>
-        <p:spPr>
-          <a:xfrm>
-            <a:off x="12801600" y="201168"/>
-            <a:ext cx="4572000" cy="329184"/>
-          </a:xfrm>
-          <a:prstGeom prst="rect">
-            <a:avLst/>
-          </a:prstGeom>
-          <a:noFill/>
-          <a:ln>
-            <a:noFill/>
-          </a:ln>
-        </p:spPr>
-        <p:txBody>
-          <a:bodyPr anchorCtr="0" anchor="ctr" bIns="0" lIns="0" spcFirstLastPara="1" rIns="0" wrap="square" tIns="0">
-            <a:spAutoFit/>
-          </a:bodyPr>
-          <a:lstStyle/>
-          <a:p>
-            <a:pPr indent="0" lvl="0" marL="0" marR="0" rtl="0" algn="r">
-              <a:spcBef>
-                <a:spcPts val="0"/>
-              </a:spcBef>
-              <a:spcAft>
-                <a:spcPts val="0"/>
-              </a:spcAft>
-              <a:buNone/>
-            </a:pPr>
-            <a:r>
-              <a:rPr b="1" i="0" lang="en-US" sz="1400" u="none" cap="none" strike="noStrike">
-                <a:solidFill>
-                  <a:srgbClr val="C6F24E"/>
-                </a:solidFill>
-                <a:latin typeface="JetBrains Mono"/>
-                <a:ea typeface="JetBrains Mono"/>
-                <a:cs typeface="JetBrains Mono"/>
-                <a:sym typeface="JetBrains Mono"/>
-              </a:rPr>
-              <a:t>NEXT ▸ TECHNICAL WORKFLOW</a:t>
-            </a:r>
-            <a:endParaRPr/>
-          </a:p>
-        </p:txBody>
-      </p:sp>
-      <p:sp>
-        <p:nvSpPr>
-          <p:cNvPr id="110" name="Google Shape;110;p14"/>
-          <p:cNvSpPr/>
-          <p:nvPr/>
-        </p:nvSpPr>
-        <p:spPr>
-          <a:xfrm>
-            <a:off x="914400" y="1417320"/>
-            <a:ext cx="4800600" cy="475488"/>
+            <a:off x="12893040" y="3291840"/>
+            <a:ext cx="4480560" cy="1325880"/>
           </a:xfrm>
           <a:prstGeom prst="roundRect">
             <a:avLst>
-              <a:gd fmla="val 50000" name="adj"/>
+              <a:gd name="adj" fmla="val 11034"/>
             </a:avLst>
           </a:prstGeom>
           <a:solidFill>
-            <a:srgbClr val="C6F24E"/>
+            <a:srgbClr val="FFFFFF"/>
           </a:solidFill>
-          <a:ln>
-            <a:noFill/>
-          </a:ln>
-        </p:spPr>
-        <p:txBody>
-          <a:bodyPr anchorCtr="0" anchor="ctr" bIns="0" lIns="0" spcFirstLastPara="1" rIns="0" wrap="square" tIns="0">
-            <a:noAutofit/>
-          </a:bodyPr>
-          <a:lstStyle/>
-          <a:p>
-            <a:pPr indent="0" lvl="0" marL="0" marR="0" rtl="0" algn="ctr">
-              <a:spcBef>
-                <a:spcPts val="0"/>
-              </a:spcBef>
-              <a:spcAft>
-                <a:spcPts val="0"/>
-              </a:spcAft>
-              <a:buNone/>
-            </a:pPr>
-            <a:r>
-              <a:rPr b="1" i="0" lang="en-US" sz="1800" u="none" cap="none" strike="noStrike">
-                <a:solidFill>
-                  <a:srgbClr val="0E0F11"/>
-                </a:solidFill>
-                <a:latin typeface="JetBrains Mono"/>
-                <a:ea typeface="JetBrains Mono"/>
-                <a:cs typeface="JetBrains Mono"/>
-                <a:sym typeface="JetBrains Mono"/>
-              </a:rPr>
-              <a:t>THE PRODUCT · LIVE ON TESTNET</a:t>
-            </a:r>
-            <a:endParaRPr/>
-          </a:p>
-        </p:txBody>
-      </p:sp>
-      <p:sp>
-        <p:nvSpPr>
-          <p:cNvPr id="121" name="Google Shape;121;p14"/>
-          <p:cNvSpPr/>
-          <p:nvPr/>
-        </p:nvSpPr>
-        <p:spPr>
-          <a:xfrm>
-            <a:off x="914400" y="8915400"/>
-            <a:ext cx="16459200" cy="13716"/>
-          </a:xfrm>
-          <a:prstGeom prst="rect">
-            <a:avLst/>
-          </a:prstGeom>
-          <a:solidFill>
-            <a:srgbClr val="2A2F36"/>
-          </a:solidFill>
-          <a:ln>
-            <a:noFill/>
-          </a:ln>
-        </p:spPr>
-        <p:txBody>
-          <a:bodyPr anchorCtr="0" anchor="ctr" bIns="45700" lIns="91425" spcFirstLastPara="1" rIns="91425" wrap="square" tIns="45700">
-            <a:noAutofit/>
-          </a:bodyPr>
-          <a:lstStyle/>
-          <a:p>
-            <a:pPr indent="0" lvl="0" marL="0" marR="0" rtl="0" algn="ctr">
-              <a:spcBef>
-                <a:spcPts val="0"/>
-              </a:spcBef>
-              <a:spcAft>
-                <a:spcPts val="0"/>
-              </a:spcAft>
-              <a:buNone/>
-            </a:pPr>
-            <a:r>
-              <a:t/>
-            </a:r>
-            <a:endParaRPr b="0" i="0" sz="1800" u="none" cap="none" strike="noStrike">
-              <a:solidFill>
-                <a:schemeClr val="dk1"/>
-              </a:solidFill>
-              <a:latin typeface="Instrument Sans"/>
-              <a:ea typeface="Instrument Sans"/>
-              <a:cs typeface="Instrument Sans"/>
-              <a:sym typeface="Instrument Sans"/>
-            </a:endParaRPr>
-          </a:p>
-        </p:txBody>
-      </p:sp>
-      <p:sp>
-        <p:nvSpPr>
-          <p:cNvPr id="122" name="Google Shape;122;p14"/>
-          <p:cNvSpPr txBox="1"/>
-          <p:nvPr/>
-        </p:nvSpPr>
-        <p:spPr>
-          <a:xfrm>
-            <a:off x="914400" y="9253728"/>
-            <a:ext cx="9144000" cy="320040"/>
-          </a:xfrm>
-          <a:prstGeom prst="rect">
-            <a:avLst/>
-          </a:prstGeom>
-          <a:noFill/>
-          <a:ln>
-            <a:noFill/>
-          </a:ln>
-        </p:spPr>
-        <p:txBody>
-          <a:bodyPr anchorCtr="0" anchor="ctr" bIns="0" lIns="0" spcFirstLastPara="1" rIns="0" wrap="square" tIns="0">
-            <a:spAutoFit/>
-          </a:bodyPr>
-          <a:lstStyle/>
-          <a:p>
-            <a:pPr indent="0" lvl="0" marL="0" marR="0" rtl="0" algn="l">
-              <a:spcBef>
-                <a:spcPts val="0"/>
-              </a:spcBef>
-              <a:spcAft>
-                <a:spcPts val="0"/>
-              </a:spcAft>
-              <a:buNone/>
-            </a:pPr>
-            <a:r>
-              <a:rPr b="0" i="0" lang="en-US" sz="1200" u="none" cap="none" strike="noStrike">
-                <a:solidFill>
-                  <a:srgbClr val="A3A8B0"/>
-                </a:solidFill>
-                <a:latin typeface="JetBrains Mono"/>
-                <a:ea typeface="JetBrains Mono"/>
-                <a:cs typeface="JetBrains Mono"/>
-                <a:sym typeface="JetBrains Mono"/>
-              </a:rPr>
-              <a:t>© 2026 HackMeridian · Lisbon  ·  #HackMeridian26</a:t>
-            </a:r>
-            <a:endParaRPr/>
-          </a:p>
-        </p:txBody>
-      </p:sp>
-      <p:pic>
-        <p:nvPicPr>
-          <p:cNvPr id="123" name="Picture 122" descr="image.png"/>
-          <p:cNvPicPr>
-            <a:picLocks noChangeAspect="1"/>
-          </p:cNvPicPr>
-          <p:nvPr/>
-        </p:nvPicPr>
-        <p:blipFill>
-          <a:blip r:embed="rId2"/>
-          <a:stretch>
-            <a:fillRect/>
-          </a:stretch>
-        </p:blipFill>
-        <p:spPr>
-          <a:xfrm>
-            <a:off x="14859000" y="9171432"/>
-            <a:ext cx="2517969" cy="438912"/>
-          </a:xfrm>
-          <a:prstGeom prst="rect">
-            <a:avLst/>
-          </a:prstGeom>
-        </p:spPr>
-      </p:pic>
-      <p:sp>
-        <p:nvSpPr>
-          <p:cNvPr id="124" name="TextBox 123"/>
-          <p:cNvSpPr txBox="1"/>
-          <p:nvPr/>
-        </p:nvSpPr>
-        <p:spPr>
-          <a:xfrm>
-            <a:off x="914400" y="2011680"/>
-            <a:ext cx="16459200" cy="1005840"/>
-          </a:xfrm>
-          <a:prstGeom prst="rect">
-            <a:avLst/>
-          </a:prstGeom>
-          <a:noFill/>
-        </p:spPr>
-        <p:txBody>
-          <a:bodyPr wrap="square" lIns="0" rIns="0" tIns="0" bIns="0" anchor="t">
-            <a:spAutoFit/>
-          </a:bodyPr>
-          <a:lstStyle/>
-          <a:p>
-            <a:pPr algn="l">
-              <a:lnSpc>
-                <a:spcPct val="100000"/>
-              </a:lnSpc>
-              <a:spcAft>
-                <a:spcPts val="600"/>
-              </a:spcAft>
-            </a:pPr>
-            <a:r>
-              <a:rPr sz="5800" b="1">
-                <a:solidFill>
-                  <a:srgbClr val="E7E8EA"/>
-                </a:solidFill>
-                <a:latin typeface="Inter Tight"/>
-              </a:rPr>
-              <a:t>Anyone can check the chain. No login.</a:t>
-            </a:r>
-          </a:p>
-        </p:txBody>
-      </p:sp>
-      <p:pic>
-        <p:nvPicPr>
-          <p:cNvPr id="125" name="Picture 124" descr="page-handovers-rows.png"/>
-          <p:cNvPicPr>
-            <a:picLocks noChangeAspect="1"/>
-          </p:cNvPicPr>
-          <p:nvPr/>
-        </p:nvPicPr>
-        <p:blipFill>
-          <a:blip r:embed="rId3"/>
-          <a:stretch>
-            <a:fillRect/>
-          </a:stretch>
-        </p:blipFill>
-        <p:spPr>
-          <a:xfrm>
-            <a:off x="914400" y="3154680"/>
-            <a:ext cx="8138160" cy="5522323"/>
-          </a:xfrm>
-          <a:prstGeom prst="rect">
-            <a:avLst/>
-          </a:prstGeom>
-        </p:spPr>
-      </p:pic>
-      <p:sp>
-        <p:nvSpPr>
-          <p:cNvPr id="126" name="Rectangle 125"/>
-          <p:cNvSpPr/>
-          <p:nvPr/>
-        </p:nvSpPr>
-        <p:spPr>
-          <a:xfrm>
-            <a:off x="914400" y="3154680"/>
-            <a:ext cx="8138160" cy="5522322"/>
-          </a:xfrm>
-          <a:prstGeom prst="rect">
-            <a:avLst/>
-          </a:prstGeom>
-          <a:noFill/>
           <a:ln w="12700">
             <a:solidFill>
-              <a:srgbClr val="2A2F36"/>
+              <a:srgbClr val="DFDDD6"/>
             </a:solidFill>
           </a:ln>
           <a:effectLst/>
@@ -22607,14 +22371,205 @@
       </p:sp>
       <p:sp>
         <p:nvSpPr>
-          <p:cNvPr id="127" name="TextBox 126"/>
+          <p:cNvPr id="130" name="TextBox 129"/>
           <p:cNvSpPr txBox="1"/>
           <p:nvPr/>
         </p:nvSpPr>
         <p:spPr>
           <a:xfrm>
-            <a:off x="9692640" y="3154680"/>
-            <a:ext cx="7680960" cy="2011680"/>
+            <a:off x="12893040" y="3474720"/>
+            <a:ext cx="4480560" cy="1005840"/>
+          </a:xfrm>
+          <a:prstGeom prst="rect">
+            <a:avLst/>
+          </a:prstGeom>
+          <a:noFill/>
+        </p:spPr>
+        <p:txBody>
+          <a:bodyPr wrap="square" lIns="0" rIns="0" tIns="0" bIns="0" anchor="t">
+            <a:spAutoFit/>
+          </a:bodyPr>
+          <a:lstStyle/>
+          <a:p>
+            <a:pPr algn="ctr">
+              <a:lnSpc>
+                <a:spcPct val="112000"/>
+              </a:lnSpc>
+              <a:spcAft>
+                <a:spcPts val="200"/>
+              </a:spcAft>
+            </a:pPr>
+            <a:r>
+              <a:rPr sz="2800" b="1">
+                <a:solidFill>
+                  <a:srgbClr val="0E0F11"/>
+                </a:solidFill>
+                <a:latin typeface="Instrument Sans"/>
+              </a:rPr>
+              <a:t>Incoming custodian</a:t>
+            </a:r>
+          </a:p>
+          <a:p>
+            <a:pPr algn="ctr">
+              <a:lnSpc>
+                <a:spcPct val="112000"/>
+              </a:lnSpc>
+              <a:spcAft>
+                <a:spcPts val="200"/>
+              </a:spcAft>
+            </a:pPr>
+            <a:r>
+              <a:rPr sz="1800" b="0">
+                <a:solidFill>
+                  <a:srgbClr val="4D5560"/>
+                </a:solidFill>
+                <a:latin typeface="JetBrains Mono"/>
+              </a:rPr>
+              <a:t>signs</a:t>
+            </a:r>
+          </a:p>
+        </p:txBody>
+      </p:sp>
+      <p:sp>
+        <p:nvSpPr>
+          <p:cNvPr id="131" name="Rectangle 130"/>
+          <p:cNvSpPr/>
+          <p:nvPr/>
+        </p:nvSpPr>
+        <p:spPr>
+          <a:xfrm>
+            <a:off x="5394960" y="3931920"/>
+            <a:ext cx="594360" cy="36576"/>
+          </a:xfrm>
+          <a:prstGeom prst="rect">
+            <a:avLst/>
+          </a:prstGeom>
+          <a:solidFill>
+            <a:srgbClr val="0E0F11"/>
+          </a:solidFill>
+          <a:ln>
+            <a:noFill/>
+          </a:ln>
+          <a:effectLst/>
+        </p:spPr>
+        <p:style>
+          <a:lnRef idx="1">
+            <a:schemeClr val="accent1"/>
+          </a:lnRef>
+          <a:fillRef idx="3">
+            <a:schemeClr val="accent1"/>
+          </a:fillRef>
+          <a:effectRef idx="0">
+            <a:schemeClr val="accent1"/>
+          </a:effectRef>
+          <a:fontRef idx="minor">
+            <a:schemeClr val="lt1"/>
+          </a:fontRef>
+        </p:style>
+        <p:txBody>
+          <a:bodyPr rtlCol="0" anchor="ctr"/>
+          <a:lstStyle/>
+          <a:p>
+            <a:pPr algn="ctr"/>
+          </a:p>
+        </p:txBody>
+      </p:sp>
+      <p:sp>
+        <p:nvSpPr>
+          <p:cNvPr id="132" name="Rectangle 131"/>
+          <p:cNvSpPr/>
+          <p:nvPr/>
+        </p:nvSpPr>
+        <p:spPr>
+          <a:xfrm>
+            <a:off x="12298680" y="3931920"/>
+            <a:ext cx="594360" cy="36576"/>
+          </a:xfrm>
+          <a:prstGeom prst="rect">
+            <a:avLst/>
+          </a:prstGeom>
+          <a:solidFill>
+            <a:srgbClr val="0E0F11"/>
+          </a:solidFill>
+          <a:ln>
+            <a:noFill/>
+          </a:ln>
+          <a:effectLst/>
+        </p:spPr>
+        <p:style>
+          <a:lnRef idx="1">
+            <a:schemeClr val="accent1"/>
+          </a:lnRef>
+          <a:fillRef idx="3">
+            <a:schemeClr val="accent1"/>
+          </a:fillRef>
+          <a:effectRef idx="0">
+            <a:schemeClr val="accent1"/>
+          </a:effectRef>
+          <a:fontRef idx="minor">
+            <a:schemeClr val="lt1"/>
+          </a:fontRef>
+        </p:style>
+        <p:txBody>
+          <a:bodyPr rtlCol="0" anchor="ctr"/>
+          <a:lstStyle/>
+          <a:p>
+            <a:pPr algn="ctr"/>
+          </a:p>
+        </p:txBody>
+      </p:sp>
+      <p:sp>
+        <p:nvSpPr>
+          <p:cNvPr id="133" name="TextBox 132"/>
+          <p:cNvSpPr txBox="1"/>
+          <p:nvPr/>
+        </p:nvSpPr>
+        <p:spPr>
+          <a:xfrm>
+            <a:off x="914400" y="4983480"/>
+            <a:ext cx="16459200" cy="548640"/>
+          </a:xfrm>
+          <a:prstGeom prst="rect">
+            <a:avLst/>
+          </a:prstGeom>
+          <a:noFill/>
+        </p:spPr>
+        <p:txBody>
+          <a:bodyPr wrap="square" lIns="0" rIns="0" tIns="0" bIns="0" anchor="t">
+            <a:spAutoFit/>
+          </a:bodyPr>
+          <a:lstStyle/>
+          <a:p>
+            <a:pPr algn="ctr">
+              <a:lnSpc>
+                <a:spcPct val="112000"/>
+              </a:lnSpc>
+              <a:spcAft>
+                <a:spcPts val="600"/>
+              </a:spcAft>
+            </a:pPr>
+            <a:r>
+              <a:rPr sz="3000" b="1">
+                <a:solidFill>
+                  <a:srgbClr val="0E0F11"/>
+                </a:solidFill>
+                <a:latin typeface="Instrument Sans"/>
+              </a:rPr>
+              <a:t>Either signature missing → the call fails.</a:t>
+            </a:r>
+          </a:p>
+        </p:txBody>
+      </p:sp>
+      <p:sp>
+        <p:nvSpPr>
+          <p:cNvPr id="134" name="TextBox 133"/>
+          <p:cNvSpPr txBox="1"/>
+          <p:nvPr/>
+        </p:nvSpPr>
+        <p:spPr>
+          <a:xfrm>
+            <a:off x="914400" y="5897880"/>
+            <a:ext cx="16459200" cy="1645920"/>
           </a:xfrm>
           <a:prstGeom prst="rect">
             <a:avLst/>
@@ -22632,110 +22587,72 @@
                 <a:spcPct val="112000"/>
               </a:lnSpc>
               <a:spcAft>
-                <a:spcPts val="600"/>
+                <a:spcPts val="800"/>
               </a:spcAft>
             </a:pPr>
             <a:r>
-              <a:rPr sz="2600" b="1">
-                <a:solidFill>
-                  <a:srgbClr val="C6F24E"/>
+              <a:rPr sz="2600" b="0">
+                <a:solidFill>
+                  <a:srgbClr val="556F00"/>
                 </a:solidFill>
                 <a:latin typeface="Instrument Sans"/>
               </a:rPr>
-              <a:t>Verify head</a:t>
+              <a:t>— </a:t>
             </a:r>
             <a:r>
               <a:rPr sz="2600" b="0">
                 <a:solidFill>
-                  <a:srgbClr val="E7E8EA"/>
+                  <a:srgbClr val="0E0F11"/>
                 </a:solidFill>
                 <a:latin typeface="Instrument Sans"/>
               </a:rPr>
-              <a:t> recomputes the hash chain in the browser and compares it with the head stored in the contract.</a:t>
-            </a:r>
-          </a:p>
-        </p:txBody>
-      </p:sp>
-      <p:sp>
-        <p:nvSpPr>
-          <p:cNvPr id="128" name="TextBox 127"/>
-          <p:cNvSpPr txBox="1"/>
-          <p:nvPr/>
-        </p:nvSpPr>
-        <p:spPr>
-          <a:xfrm>
-            <a:off x="9692640" y="5257800"/>
-            <a:ext cx="5486400" cy="1097280"/>
-          </a:xfrm>
-          <a:prstGeom prst="rect">
-            <a:avLst/>
-          </a:prstGeom>
-          <a:noFill/>
-        </p:spPr>
-        <p:txBody>
-          <a:bodyPr wrap="square" lIns="0" rIns="0" tIns="0" bIns="0" anchor="t">
-            <a:spAutoFit/>
-          </a:bodyPr>
-          <a:lstStyle/>
-          <a:p>
-            <a:pPr algn="l">
-              <a:lnSpc>
-                <a:spcPct val="90000"/>
-              </a:lnSpc>
-              <a:spcAft>
-                <a:spcPts val="600"/>
-              </a:spcAft>
-            </a:pPr>
-            <a:r>
-              <a:rPr sz="8000" b="1">
-                <a:solidFill>
-                  <a:srgbClr val="C6F24E"/>
+              <a:t>Each handover moves custody and extends an on-chain hash chain, the </a:t>
+            </a:r>
+            <a:r>
+              <a:rPr sz="2600" b="0">
+                <a:solidFill>
+                  <a:srgbClr val="0E0F11"/>
                 </a:solidFill>
                 <a:latin typeface="JetBrains Mono"/>
               </a:rPr>
-              <a:t>MATCH</a:t>
-            </a:r>
-          </a:p>
-        </p:txBody>
-      </p:sp>
-      <p:sp>
-        <p:nvSpPr>
-          <p:cNvPr id="129" name="TextBox 128"/>
-          <p:cNvSpPr txBox="1"/>
-          <p:nvPr/>
-        </p:nvSpPr>
-        <p:spPr>
-          <a:xfrm>
-            <a:off x="9692640" y="6355080"/>
-            <a:ext cx="5120640" cy="1463040"/>
-          </a:xfrm>
-          <a:prstGeom prst="rect">
-            <a:avLst/>
-          </a:prstGeom>
-          <a:noFill/>
-        </p:spPr>
-        <p:txBody>
-          <a:bodyPr wrap="square" lIns="0" rIns="0" tIns="0" bIns="0" anchor="t">
-            <a:spAutoFit/>
-          </a:bodyPr>
-          <a:lstStyle/>
+              <a:t>head</a:t>
+            </a:r>
+            <a:r>
+              <a:rPr sz="2600" b="0">
+                <a:solidFill>
+                  <a:srgbClr val="0E0F11"/>
+                </a:solidFill>
+                <a:latin typeface="Instrument Sans"/>
+              </a:rPr>
+              <a:t>.</a:t>
+            </a:r>
+          </a:p>
           <a:p>
             <a:pPr algn="l">
               <a:lnSpc>
                 <a:spcPct val="112000"/>
               </a:lnSpc>
               <a:spcAft>
-                <a:spcPts val="600"/>
+                <a:spcPts val="800"/>
               </a:spcAft>
             </a:pPr>
             <a:r>
-              <a:rPr sz="2000" b="0">
-                <a:solidFill>
-                  <a:srgbClr val="A3A8B0"/>
+              <a:rPr sz="2600" b="0">
+                <a:solidFill>
+                  <a:srgbClr val="556F00"/>
                 </a:solidFill>
                 <a:latin typeface="Instrument Sans"/>
               </a:rPr>
-              <a:t>Clicked live on 25 Oct 2026.</a:t>
+              <a:t>— </a:t>
+            </a:r>
+            <a:r>
+              <a:rPr sz="2600" b="0">
+                <a:solidFill>
+                  <a:srgbClr val="0E0F11"/>
+                </a:solidFill>
+                <a:latin typeface="Instrument Sans"/>
+              </a:rPr>
+              <a:t>The token stays with its holder in transit; only custody changes.</a:t>
             </a:r>
           </a:p>
           <a:p>
@@ -22744,55 +22661,58 @@
                 <a:spcPct val="112000"/>
               </a:lnSpc>
               <a:spcAft>
-                <a:spcPts val="600"/>
+                <a:spcPts val="800"/>
               </a:spcAft>
             </a:pPr>
             <a:r>
-              <a:rPr sz="2000" b="0">
-                <a:solidFill>
-                  <a:srgbClr val="A3A8B0"/>
+              <a:rPr sz="2600" b="0">
+                <a:solidFill>
+                  <a:srgbClr val="556F00"/>
                 </a:solidFill>
                 <a:latin typeface="Instrument Sans"/>
               </a:rPr>
-              <a:t>Read-only: Stellar RPC and Horizon, no wallet.</a:t>
-            </a:r>
-          </a:p>
-        </p:txBody>
-      </p:sp>
-      <p:pic>
-        <p:nvPicPr>
-          <p:cNvPr id="130" name="Picture 129" descr="qr-page-dark.png"/>
-          <p:cNvPicPr>
-            <a:picLocks noChangeAspect="1"/>
-          </p:cNvPicPr>
-          <p:nvPr/>
-        </p:nvPicPr>
-        <p:blipFill>
-          <a:blip r:embed="rId4"/>
-          <a:stretch>
-            <a:fillRect/>
-          </a:stretch>
-        </p:blipFill>
-        <p:spPr>
-          <a:xfrm>
-            <a:off x="15361920" y="5669280"/>
-            <a:ext cx="2011680" cy="2011680"/>
-          </a:xfrm>
-          <a:prstGeom prst="rect">
-            <a:avLst/>
-          </a:prstGeom>
-        </p:spPr>
-      </p:pic>
-      <p:sp>
-        <p:nvSpPr>
-          <p:cNvPr id="131" name="TextBox 130"/>
+              <a:t>— </a:t>
+            </a:r>
+            <a:r>
+              <a:rPr sz="2600" b="0">
+                <a:solidFill>
+                  <a:srgbClr val="0E0F11"/>
+                </a:solidFill>
+                <a:latin typeface="Instrument Sans"/>
+              </a:rPr>
+              <a:t>After Delivered, the operator burns the token with the existing </a:t>
+            </a:r>
+            <a:r>
+              <a:rPr sz="2600" b="0">
+                <a:solidFill>
+                  <a:srgbClr val="0E0F11"/>
+                </a:solidFill>
+                <a:latin typeface="JetBrains Mono"/>
+              </a:rPr>
+              <a:t>redeem</a:t>
+            </a:r>
+            <a:r>
+              <a:rPr sz="2600" b="0">
+                <a:solidFill>
+                  <a:srgbClr val="0E0F11"/>
+                </a:solidFill>
+                <a:latin typeface="Instrument Sans"/>
+              </a:rPr>
+              <a:t>¹.</a:t>
+            </a:r>
+          </a:p>
+        </p:txBody>
+      </p:sp>
+      <p:sp>
+        <p:nvSpPr>
+          <p:cNvPr id="135" name="TextBox 134"/>
           <p:cNvSpPr txBox="1"/>
           <p:nvPr/>
         </p:nvSpPr>
         <p:spPr>
           <a:xfrm>
-            <a:off x="12801600" y="7863840"/>
-            <a:ext cx="4572000" cy="365760"/>
+            <a:off x="914400" y="7909560"/>
+            <a:ext cx="16459200" cy="914400"/>
           </a:xfrm>
           <a:prstGeom prst="rect">
             <a:avLst/>
@@ -22805,22 +22725,41 @@
           </a:bodyPr>
           <a:lstStyle/>
           <a:p>
-            <a:pPr algn="r">
+            <a:pPr algn="l">
               <a:lnSpc>
                 <a:spcPct val="112000"/>
               </a:lnSpc>
               <a:spcAft>
-                <a:spcPts val="600"/>
+                <a:spcPts val="200"/>
               </a:spcAft>
             </a:pPr>
             <a:r>
               <a:rPr sz="1800" b="0">
                 <a:solidFill>
-                  <a:srgbClr val="C6F24E"/>
-                </a:solidFill>
-                <a:latin typeface="JetBrains Mono"/>
+                  <a:srgbClr val="4D5560"/>
+                </a:solidFill>
+                <a:latin typeface="Instrument Sans"/>
               </a:rPr>
-              <a:t>rio-miami-rail.vercel.app</a:t>
+              <a:t>A custody record keyed to the container number. In production it would sit beside the carrier's bill of lading; not integrated in this build.</a:t>
+            </a:r>
+          </a:p>
+          <a:p>
+            <a:pPr algn="l">
+              <a:lnSpc>
+                <a:spcPct val="112000"/>
+              </a:lnSpc>
+              <a:spcAft>
+                <a:spcPts val="200"/>
+              </a:spcAft>
+            </a:pPr>
+            <a:r>
+              <a:rPr sz="1800" b="0">
+                <a:solidFill>
+                  <a:srgbClr val="4D5560"/>
+                </a:solidFill>
+                <a:latin typeface="Instrument Sans"/>
+              </a:rPr>
+              <a:t>¹ Radox platform policy, not enforced on-chain by the registry; redeem still needs the holder's signature.</a:t>
             </a:r>
           </a:p>
         </p:txBody>

--- a/projects/hackmeridian-rail/deck/radox-custody-rail.pptx
+++ b/projects/hackmeridian-rail/deck/radox-custody-rail.pptx
@@ -11509,7 +11509,7 @@
                 </a:solidFill>
                 <a:latin typeface="Instrument Sans"/>
               </a:rPr>
-              <a:t>verify-head, live 25 Oct</a:t>
+              <a:t>head check, 25 Oct</a:t>
             </a:r>
           </a:p>
         </p:txBody>
@@ -11522,7 +11522,7 @@
         </p:nvSpPr>
         <p:spPr>
           <a:xfrm>
-            <a:off x="8229600" y="7178040"/>
+            <a:off x="8229600" y="6903720"/>
             <a:ext cx="9144000" cy="1463040"/>
           </a:xfrm>
           <a:prstGeom prst="rect">
@@ -11579,7 +11579,7 @@
                 </a:solidFill>
                 <a:latin typeface="Instrument Sans"/>
               </a:rPr>
-              <a:t>Plus an attestation (33379211). A second run (branch three-machine): two team members authorised handovers on their own computers, with their own testnet keys.</a:t>
+              <a:t>Plus attestation 33379211. Second run (branch three-machine): two team members authorised handovers on their own computers and testnet keys.</a:t>
             </a:r>
           </a:p>
           <a:p>
@@ -11598,7 +11598,7 @@
                 </a:solidFill>
                 <a:latin typeface="Instrument Sans"/>
               </a:rPr>
-              <a:t>All test keys, most held by one harness: this proves the mechanism, not independent custodians.</a:t>
+              <a:t>All test keys, mostly in one harness: it proves the mechanism, not independent custodians.</a:t>
             </a:r>
           </a:p>
         </p:txBody>
@@ -14476,7 +14476,7 @@
                 </a:solidFill>
                 <a:latin typeface="Instrument Sans"/>
               </a:rPr>
-              <a:t>Verify any shipment, no login (slide 4)</a:t>
+              <a:t>Verify any shipment, no login (slide 5)</a:t>
             </a:r>
           </a:p>
         </p:txBody>
@@ -20137,7 +20137,7 @@
                 </a:solidFill>
                 <a:latin typeface="Inter Tight"/>
               </a:rPr>
-              <a:t>{{N1}}</a:t>
+              <a:t>5.7%</a:t>
             </a:r>
           </a:p>
         </p:txBody>
@@ -20179,7 +20179,7 @@
                 </a:solidFill>
                 <a:latin typeface="Instrument Sans"/>
               </a:rPr>
-              <a:t>{{parties one shipment touches}}</a:t>
+              <a:t>of bills of lading issued electronically</a:t>
             </a:r>
           </a:p>
         </p:txBody>
@@ -20221,7 +20221,7 @@
                 </a:solidFill>
                 <a:latin typeface="Instrument Sans"/>
               </a:rPr>
-              <a:t>{{source, publisher, date}}</a:t>
+              <a:t>DCSA, Jan 2025</a:t>
             </a:r>
           </a:p>
         </p:txBody>
@@ -20307,7 +20307,7 @@
                 </a:solidFill>
                 <a:latin typeface="Inter Tight"/>
               </a:rPr>
-              <a:t>{{N2}}</a:t>
+              <a:t>11.2%</a:t>
             </a:r>
           </a:p>
         </p:txBody>
@@ -20349,7 +20349,7 @@
                 </a:solidFill>
                 <a:latin typeface="Instrument Sans"/>
               </a:rPr>
-              <a:t>{{documents per shipment}}</a:t>
+              <a:t>of surveyed firms use only electronic bills</a:t>
             </a:r>
           </a:p>
         </p:txBody>
@@ -20391,7 +20391,7 @@
                 </a:solidFill>
                 <a:latin typeface="Instrument Sans"/>
               </a:rPr>
-              <a:t>{{source, publisher, date}}</a:t>
+              <a:t>ICC / FIT Alliance survey, 190 replies, Oct 2026</a:t>
             </a:r>
           </a:p>
         </p:txBody>
@@ -20477,7 +20477,7 @@
                 </a:solidFill>
                 <a:latin typeface="Inter Tight"/>
               </a:rPr>
-              <a:t>{{N3}}</a:t>
+              <a:t>22%</a:t>
             </a:r>
           </a:p>
         </p:txBody>
@@ -20519,7 +20519,7 @@
                 </a:solidFill>
                 <a:latin typeface="Instrument Sans"/>
               </a:rPr>
-              <a:t>{{share still on paper}}</a:t>
+              <a:t>of cargo thefts worldwide involve an insider</a:t>
             </a:r>
           </a:p>
         </p:txBody>
@@ -20561,7 +20561,7 @@
                 </a:solidFill>
                 <a:latin typeface="Instrument Sans"/>
               </a:rPr>
-              <a:t>{{source, publisher, date}}</a:t>
+              <a:t>TT Club &amp; BSI Cargo Theft Report, Apr 2026</a:t>
             </a:r>
           </a:p>
         </p:txBody>
@@ -21050,7 +21050,7 @@
                 </a:solidFill>
                 <a:latin typeface="Inter Tight"/>
               </a:rPr>
-              <a:t>Paper custody leaks money</a:t>
+              <a:t>Cargo goes missing. Finance waits.</a:t>
             </a:r>
           </a:p>
         </p:txBody>
@@ -21115,7 +21115,7 @@
         <p:spPr>
           <a:xfrm>
             <a:off x="914400" y="4192524"/>
-            <a:ext cx="5120640" cy="27432"/>
+            <a:ext cx="8046720" cy="27432"/>
           </a:xfrm>
           <a:prstGeom prst="rect">
             <a:avLst/>
@@ -21159,7 +21159,7 @@
         <p:spPr>
           <a:xfrm>
             <a:off x="914400" y="4389120"/>
-            <a:ext cx="5120640" cy="1097280"/>
+            <a:ext cx="8046720" cy="1097280"/>
           </a:xfrm>
           <a:prstGeom prst="rect">
             <a:avLst/>
@@ -21187,7 +21187,7 @@
                 </a:solidFill>
                 <a:latin typeface="Inter Tight"/>
               </a:rPr>
-              <a:t>{{N4}}</a:t>
+              <a:t>R$900M</a:t>
             </a:r>
           </a:p>
         </p:txBody>
@@ -21201,7 +21201,7 @@
         <p:spPr>
           <a:xfrm>
             <a:off x="914400" y="5532120"/>
-            <a:ext cx="5120640" cy="914400"/>
+            <a:ext cx="8046720" cy="914400"/>
           </a:xfrm>
           <a:prstGeom prst="rect">
             <a:avLst/>
@@ -21229,7 +21229,7 @@
                 </a:solidFill>
                 <a:latin typeface="Instrument Sans"/>
               </a:rPr>
-              <a:t>{{fraud from duplicate or forged documents}}</a:t>
+              <a:t>direct loss from 8,570 cargo robberies in Brazil, 2025</a:t>
             </a:r>
           </a:p>
         </p:txBody>
@@ -21243,7 +21243,7 @@
         <p:spPr>
           <a:xfrm>
             <a:off x="914400" y="6446520"/>
-            <a:ext cx="5120640" cy="822960"/>
+            <a:ext cx="8046720" cy="822960"/>
           </a:xfrm>
           <a:prstGeom prst="rect">
             <a:avLst/>
@@ -21271,7 +21271,7 @@
                 </a:solidFill>
                 <a:latin typeface="Instrument Sans"/>
               </a:rPr>
-              <a:t>{{source, publisher, date}}</a:t>
+              <a:t>NTC&amp;Logística survey, published 28 Mar 2026</a:t>
             </a:r>
           </a:p>
         </p:txBody>
@@ -21284,8 +21284,8 @@
         </p:nvSpPr>
         <p:spPr>
           <a:xfrm>
-            <a:off x="6492240" y="4192524"/>
-            <a:ext cx="5120640" cy="27432"/>
+            <a:off x="9326880" y="4192524"/>
+            <a:ext cx="8046720" cy="27432"/>
           </a:xfrm>
           <a:prstGeom prst="rect">
             <a:avLst/>
@@ -21328,8 +21328,8 @@
         </p:nvSpPr>
         <p:spPr>
           <a:xfrm>
-            <a:off x="6492240" y="4389120"/>
-            <a:ext cx="5120640" cy="1097280"/>
+            <a:off x="9326880" y="4389120"/>
+            <a:ext cx="8046720" cy="1097280"/>
           </a:xfrm>
           <a:prstGeom prst="rect">
             <a:avLst/>
@@ -21357,7 +21357,7 @@
                 </a:solidFill>
                 <a:latin typeface="Inter Tight"/>
               </a:rPr>
-              <a:t>{{N5}}</a:t>
+              <a:t>US$2.5T</a:t>
             </a:r>
           </a:p>
         </p:txBody>
@@ -21370,8 +21370,8 @@
         </p:nvSpPr>
         <p:spPr>
           <a:xfrm>
-            <a:off x="6492240" y="5532120"/>
-            <a:ext cx="5120640" cy="914400"/>
+            <a:off x="9326880" y="5532120"/>
+            <a:ext cx="8046720" cy="914400"/>
           </a:xfrm>
           <a:prstGeom prst="rect">
             <a:avLst/>
@@ -21399,7 +21399,7 @@
                 </a:solidFill>
                 <a:latin typeface="Instrument Sans"/>
               </a:rPr>
-              <a:t>{{cargo theft or loss in transit}}</a:t>
+              <a:t>global trade finance gap</a:t>
             </a:r>
           </a:p>
         </p:txBody>
@@ -21412,8 +21412,8 @@
         </p:nvSpPr>
         <p:spPr>
           <a:xfrm>
-            <a:off x="6492240" y="6446520"/>
-            <a:ext cx="5120640" cy="822960"/>
+            <a:off x="9326880" y="6446520"/>
+            <a:ext cx="8046720" cy="822960"/>
           </a:xfrm>
           <a:prstGeom prst="rect">
             <a:avLst/>
@@ -21441,107 +21441,21 @@
                 </a:solidFill>
                 <a:latin typeface="Instrument Sans"/>
               </a:rPr>
-              <a:t>{{source, publisher, date}}</a:t>
-            </a:r>
-          </a:p>
-        </p:txBody>
-      </p:sp>
-      <p:sp>
-        <p:nvSpPr>
-          <p:cNvPr id="134" name="Rectangle 133"/>
-          <p:cNvSpPr/>
-          <p:nvPr/>
-        </p:nvSpPr>
-        <p:spPr>
-          <a:xfrm>
-            <a:off x="12070080" y="4192524"/>
-            <a:ext cx="5120640" cy="27432"/>
-          </a:xfrm>
-          <a:prstGeom prst="rect">
-            <a:avLst/>
-          </a:prstGeom>
-          <a:solidFill>
-            <a:srgbClr val="556F00"/>
-          </a:solidFill>
-          <a:ln>
-            <a:noFill/>
-          </a:ln>
-          <a:effectLst/>
-        </p:spPr>
-        <p:style>
-          <a:lnRef idx="1">
-            <a:schemeClr val="accent1"/>
-          </a:lnRef>
-          <a:fillRef idx="3">
-            <a:schemeClr val="accent1"/>
-          </a:fillRef>
-          <a:effectRef idx="0">
-            <a:schemeClr val="accent1"/>
-          </a:effectRef>
-          <a:fontRef idx="minor">
-            <a:schemeClr val="lt1"/>
-          </a:fontRef>
-        </p:style>
-        <p:txBody>
-          <a:bodyPr rtlCol="0" anchor="ctr"/>
-          <a:lstStyle/>
-          <a:p>
-            <a:pPr algn="ctr"/>
-          </a:p>
-        </p:txBody>
-      </p:sp>
-      <p:sp>
-        <p:nvSpPr>
-          <p:cNvPr id="135" name="TextBox 134"/>
+              <a:t>ADB Global Trade Finance Gap Survey, Dec 2025</a:t>
+            </a:r>
+          </a:p>
+        </p:txBody>
+      </p:sp>
+      <p:sp>
+        <p:nvSpPr>
+          <p:cNvPr id="134" name="TextBox 133"/>
           <p:cNvSpPr txBox="1"/>
           <p:nvPr/>
         </p:nvSpPr>
         <p:spPr>
           <a:xfrm>
-            <a:off x="12070080" y="4389120"/>
-            <a:ext cx="5120640" cy="1097280"/>
-          </a:xfrm>
-          <a:prstGeom prst="rect">
-            <a:avLst/>
-          </a:prstGeom>
-          <a:noFill/>
-        </p:spPr>
-        <p:txBody>
-          <a:bodyPr wrap="square" lIns="0" rIns="0" tIns="0" bIns="0" anchor="t">
-            <a:spAutoFit/>
-          </a:bodyPr>
-          <a:lstStyle/>
-          <a:p>
-            <a:pPr algn="l">
-              <a:lnSpc>
-                <a:spcPct val="95000"/>
-              </a:lnSpc>
-              <a:spcAft>
-                <a:spcPts val="600"/>
-              </a:spcAft>
-            </a:pPr>
-            <a:r>
-              <a:rPr sz="6400" b="1">
-                <a:solidFill>
-                  <a:srgbClr val="0E0F11"/>
-                </a:solidFill>
-                <a:latin typeface="Inter Tight"/>
-              </a:rPr>
-              <a:t>US$2.5T</a:t>
-            </a:r>
-          </a:p>
-        </p:txBody>
-      </p:sp>
-      <p:sp>
-        <p:nvSpPr>
-          <p:cNvPr id="136" name="TextBox 135"/>
-          <p:cNvSpPr txBox="1"/>
-          <p:nvPr/>
-        </p:nvSpPr>
-        <p:spPr>
-          <a:xfrm>
-            <a:off x="12070080" y="5532120"/>
-            <a:ext cx="5120640" cy="914400"/>
+            <a:off x="914400" y="7498079"/>
+            <a:ext cx="16459200" cy="822960"/>
           </a:xfrm>
           <a:prstGeom prst="rect">
             <a:avLst/>
@@ -21563,97 +21477,13 @@
               </a:spcAft>
             </a:pPr>
             <a:r>
-              <a:rPr sz="2400" b="1">
-                <a:solidFill>
-                  <a:srgbClr val="0E0F11"/>
+              <a:rPr sz="2000" b="0">
+                <a:solidFill>
+                  <a:srgbClr val="4D5560"/>
                 </a:solidFill>
                 <a:latin typeface="Instrument Sans"/>
               </a:rPr>
-              <a:t>global trade finance gap</a:t>
-            </a:r>
-          </a:p>
-        </p:txBody>
-      </p:sp>
-      <p:sp>
-        <p:nvSpPr>
-          <p:cNvPr id="137" name="TextBox 136"/>
-          <p:cNvSpPr txBox="1"/>
-          <p:nvPr/>
-        </p:nvSpPr>
-        <p:spPr>
-          <a:xfrm>
-            <a:off x="12070080" y="6446520"/>
-            <a:ext cx="5120640" cy="822960"/>
-          </a:xfrm>
-          <a:prstGeom prst="rect">
-            <a:avLst/>
-          </a:prstGeom>
-          <a:noFill/>
-        </p:spPr>
-        <p:txBody>
-          <a:bodyPr wrap="square" lIns="0" rIns="0" tIns="0" bIns="0" anchor="t">
-            <a:spAutoFit/>
-          </a:bodyPr>
-          <a:lstStyle/>
-          <a:p>
-            <a:pPr algn="l">
-              <a:lnSpc>
-                <a:spcPct val="112000"/>
-              </a:lnSpc>
-              <a:spcAft>
-                <a:spcPts val="600"/>
-              </a:spcAft>
-            </a:pPr>
-            <a:r>
-              <a:rPr sz="1800" b="0">
-                <a:solidFill>
-                  <a:srgbClr val="4D5560"/>
-                </a:solidFill>
-                <a:latin typeface="Instrument Sans"/>
-              </a:rPr>
-              <a:t>ADB Global Trade Finance Gap Survey, Dec 2025</a:t>
-            </a:r>
-          </a:p>
-        </p:txBody>
-      </p:sp>
-      <p:sp>
-        <p:nvSpPr>
-          <p:cNvPr id="138" name="TextBox 137"/>
-          <p:cNvSpPr txBox="1"/>
-          <p:nvPr/>
-        </p:nvSpPr>
-        <p:spPr>
-          <a:xfrm>
-            <a:off x="914400" y="7498079"/>
-            <a:ext cx="16459200" cy="822960"/>
-          </a:xfrm>
-          <a:prstGeom prst="rect">
-            <a:avLst/>
-          </a:prstGeom>
-          <a:noFill/>
-        </p:spPr>
-        <p:txBody>
-          <a:bodyPr wrap="square" lIns="0" rIns="0" tIns="0" bIns="0" anchor="t">
-            <a:spAutoFit/>
-          </a:bodyPr>
-          <a:lstStyle/>
-          <a:p>
-            <a:pPr algn="l">
-              <a:lnSpc>
-                <a:spcPct val="112000"/>
-              </a:lnSpc>
-              <a:spcAft>
-                <a:spcPts val="600"/>
-              </a:spcAft>
-            </a:pPr>
-            <a:r>
-              <a:rPr sz="2000" b="0">
-                <a:solidFill>
-                  <a:srgbClr val="4D5560"/>
-                </a:solidFill>
-                <a:latin typeface="Instrument Sans"/>
-              </a:rPr>
-              <a:t>These numbers size the market problem. They are not our traction, and this build does not solve all of it.</a:t>
+              <a:t>These numbers size the problem in the market, not results of ours. This build does not solve all of it.</a:t>
             </a:r>
           </a:p>
         </p:txBody>

--- a/projects/hackmeridian-rail/deck/radox-custody-rail.pptx
+++ b/projects/hackmeridian-rail/deck/radox-custody-rail.pptx
@@ -20137,7 +20137,7 @@
                 </a:solidFill>
                 <a:latin typeface="Inter Tight"/>
               </a:rPr>
-              <a:t>5.7%</a:t>
+              <a:t>45M</a:t>
             </a:r>
           </a:p>
         </p:txBody>
@@ -20179,7 +20179,7 @@
                 </a:solidFill>
                 <a:latin typeface="Instrument Sans"/>
               </a:rPr>
-              <a:t>of bills of lading issued electronically</a:t>
+              <a:t>ocean bills of lading issued a year</a:t>
             </a:r>
           </a:p>
         </p:txBody>
@@ -20221,7 +20221,7 @@
                 </a:solidFill>
                 <a:latin typeface="Instrument Sans"/>
               </a:rPr>
-              <a:t>DCSA, Jan 2025</a:t>
+              <a:t>DCSA, Feb 2023 (2021 data)</a:t>
             </a:r>
           </a:p>
         </p:txBody>
@@ -20307,7 +20307,7 @@
                 </a:solidFill>
                 <a:latin typeface="Inter Tight"/>
               </a:rPr>
-              <a:t>11.2%</a:t>
+              <a:t>~11%</a:t>
             </a:r>
           </a:p>
         </p:txBody>
@@ -20349,7 +20349,7 @@
                 </a:solidFill>
                 <a:latin typeface="Instrument Sans"/>
               </a:rPr>
-              <a:t>of surveyed firms use only electronic bills</a:t>
+              <a:t>of them electronic in 2025</a:t>
             </a:r>
           </a:p>
         </p:txBody>
@@ -20391,7 +20391,7 @@
                 </a:solidFill>
                 <a:latin typeface="Instrument Sans"/>
               </a:rPr>
-              <a:t>ICC / FIT Alliance survey, 190 replies, Oct 2026</a:t>
+              <a:t>DCSA, figure as of 2025</a:t>
             </a:r>
           </a:p>
         </p:txBody>
@@ -20519,7 +20519,7 @@
                 </a:solidFill>
                 <a:latin typeface="Instrument Sans"/>
               </a:rPr>
-              <a:t>of cargo thefts worldwide involve an insider</a:t>
+              <a:t>of global cargo thefts in 2025 involved insiders</a:t>
             </a:r>
           </a:p>
         </p:txBody>
@@ -21050,7 +21050,7 @@
                 </a:solidFill>
                 <a:latin typeface="Inter Tight"/>
               </a:rPr>
-              <a:t>Cargo goes missing. Finance waits.</a:t>
+              <a:t>Cargo goes missing. Banks get fooled.</a:t>
             </a:r>
           </a:p>
         </p:txBody>
@@ -21115,7 +21115,7 @@
         <p:spPr>
           <a:xfrm>
             <a:off x="914400" y="4192524"/>
-            <a:ext cx="8046720" cy="27432"/>
+            <a:ext cx="5120640" cy="27432"/>
           </a:xfrm>
           <a:prstGeom prst="rect">
             <a:avLst/>
@@ -21159,7 +21159,7 @@
         <p:spPr>
           <a:xfrm>
             <a:off x="914400" y="4389120"/>
-            <a:ext cx="8046720" cy="1097280"/>
+            <a:ext cx="5120640" cy="1097280"/>
           </a:xfrm>
           <a:prstGeom prst="rect">
             <a:avLst/>
@@ -21201,7 +21201,7 @@
         <p:spPr>
           <a:xfrm>
             <a:off x="914400" y="5532120"/>
-            <a:ext cx="8046720" cy="914400"/>
+            <a:ext cx="5120640" cy="914400"/>
           </a:xfrm>
           <a:prstGeom prst="rect">
             <a:avLst/>
@@ -21229,7 +21229,7 @@
                 </a:solidFill>
                 <a:latin typeface="Instrument Sans"/>
               </a:rPr>
-              <a:t>direct loss from 8,570 cargo robberies in Brazil, 2025</a:t>
+              <a:t>est. direct loss, 8,570 cargo thefts in Brazil, 2025</a:t>
             </a:r>
           </a:p>
         </p:txBody>
@@ -21243,7 +21243,7 @@
         <p:spPr>
           <a:xfrm>
             <a:off x="914400" y="6446520"/>
-            <a:ext cx="8046720" cy="822960"/>
+            <a:ext cx="5120640" cy="822960"/>
           </a:xfrm>
           <a:prstGeom prst="rect">
             <a:avLst/>
@@ -21271,7 +21271,7 @@
                 </a:solidFill>
                 <a:latin typeface="Instrument Sans"/>
               </a:rPr>
-              <a:t>NTC&amp;Logística survey, published 28 Mar 2026</a:t>
+              <a:t>NTC&amp;Logística survey, 28 Mar 2026</a:t>
             </a:r>
           </a:p>
         </p:txBody>
@@ -21284,8 +21284,8 @@
         </p:nvSpPr>
         <p:spPr>
           <a:xfrm>
-            <a:off x="9326880" y="4192524"/>
-            <a:ext cx="8046720" cy="27432"/>
+            <a:off x="6492240" y="4192524"/>
+            <a:ext cx="5120640" cy="27432"/>
           </a:xfrm>
           <a:prstGeom prst="rect">
             <a:avLst/>
@@ -21328,8 +21328,8 @@
         </p:nvSpPr>
         <p:spPr>
           <a:xfrm>
-            <a:off x="9326880" y="4389120"/>
-            <a:ext cx="8046720" cy="1097280"/>
+            <a:off x="6492240" y="4389120"/>
+            <a:ext cx="5120640" cy="1097280"/>
           </a:xfrm>
           <a:prstGeom prst="rect">
             <a:avLst/>
@@ -21357,7 +21357,7 @@
                 </a:solidFill>
                 <a:latin typeface="Inter Tight"/>
               </a:rPr>
-              <a:t>US$2.5T</a:t>
+              <a:t>US$85M</a:t>
             </a:r>
           </a:p>
         </p:txBody>
@@ -21370,8 +21370,8 @@
         </p:nvSpPr>
         <p:spPr>
           <a:xfrm>
-            <a:off x="9326880" y="5532120"/>
-            <a:ext cx="8046720" cy="914400"/>
+            <a:off x="6492240" y="5532120"/>
+            <a:ext cx="5120640" cy="914400"/>
           </a:xfrm>
           <a:prstGeom prst="rect">
             <a:avLst/>
@@ -21399,7 +21399,7 @@
                 </a:solidFill>
                 <a:latin typeface="Instrument Sans"/>
               </a:rPr>
-              <a:t>global trade finance gap</a:t>
+              <a:t>HSBC's loss on forged documents for oil trades that never happened</a:t>
             </a:r>
           </a:p>
         </p:txBody>
@@ -21412,8 +21412,8 @@
         </p:nvSpPr>
         <p:spPr>
           <a:xfrm>
-            <a:off x="9326880" y="6446520"/>
-            <a:ext cx="8046720" cy="822960"/>
+            <a:off x="6492240" y="6446520"/>
+            <a:ext cx="5120640" cy="822960"/>
           </a:xfrm>
           <a:prstGeom prst="rect">
             <a:avLst/>
@@ -21441,6 +21441,176 @@
                 </a:solidFill>
                 <a:latin typeface="Instrument Sans"/>
               </a:rPr>
+              <a:t>Hin Leong case, Global Trade Review, 18 Nov 2024</a:t>
+            </a:r>
+          </a:p>
+        </p:txBody>
+      </p:sp>
+      <p:sp>
+        <p:nvSpPr>
+          <p:cNvPr id="134" name="Rectangle 133"/>
+          <p:cNvSpPr/>
+          <p:nvPr/>
+        </p:nvSpPr>
+        <p:spPr>
+          <a:xfrm>
+            <a:off x="12070080" y="4192524"/>
+            <a:ext cx="5120640" cy="27432"/>
+          </a:xfrm>
+          <a:prstGeom prst="rect">
+            <a:avLst/>
+          </a:prstGeom>
+          <a:solidFill>
+            <a:srgbClr val="556F00"/>
+          </a:solidFill>
+          <a:ln>
+            <a:noFill/>
+          </a:ln>
+          <a:effectLst/>
+        </p:spPr>
+        <p:style>
+          <a:lnRef idx="1">
+            <a:schemeClr val="accent1"/>
+          </a:lnRef>
+          <a:fillRef idx="3">
+            <a:schemeClr val="accent1"/>
+          </a:fillRef>
+          <a:effectRef idx="0">
+            <a:schemeClr val="accent1"/>
+          </a:effectRef>
+          <a:fontRef idx="minor">
+            <a:schemeClr val="lt1"/>
+          </a:fontRef>
+        </p:style>
+        <p:txBody>
+          <a:bodyPr rtlCol="0" anchor="ctr"/>
+          <a:lstStyle/>
+          <a:p>
+            <a:pPr algn="ctr"/>
+          </a:p>
+        </p:txBody>
+      </p:sp>
+      <p:sp>
+        <p:nvSpPr>
+          <p:cNvPr id="135" name="TextBox 134"/>
+          <p:cNvSpPr txBox="1"/>
+          <p:nvPr/>
+        </p:nvSpPr>
+        <p:spPr>
+          <a:xfrm>
+            <a:off x="12070080" y="4389120"/>
+            <a:ext cx="5120640" cy="1097280"/>
+          </a:xfrm>
+          <a:prstGeom prst="rect">
+            <a:avLst/>
+          </a:prstGeom>
+          <a:noFill/>
+        </p:spPr>
+        <p:txBody>
+          <a:bodyPr wrap="square" lIns="0" rIns="0" tIns="0" bIns="0" anchor="t">
+            <a:spAutoFit/>
+          </a:bodyPr>
+          <a:lstStyle/>
+          <a:p>
+            <a:pPr algn="l">
+              <a:lnSpc>
+                <a:spcPct val="95000"/>
+              </a:lnSpc>
+              <a:spcAft>
+                <a:spcPts val="600"/>
+              </a:spcAft>
+            </a:pPr>
+            <a:r>
+              <a:rPr sz="6400" b="1">
+                <a:solidFill>
+                  <a:srgbClr val="0E0F11"/>
+                </a:solidFill>
+                <a:latin typeface="Inter Tight"/>
+              </a:rPr>
+              <a:t>US$2.5T</a:t>
+            </a:r>
+          </a:p>
+        </p:txBody>
+      </p:sp>
+      <p:sp>
+        <p:nvSpPr>
+          <p:cNvPr id="136" name="TextBox 135"/>
+          <p:cNvSpPr txBox="1"/>
+          <p:nvPr/>
+        </p:nvSpPr>
+        <p:spPr>
+          <a:xfrm>
+            <a:off x="12070080" y="5532120"/>
+            <a:ext cx="5120640" cy="914400"/>
+          </a:xfrm>
+          <a:prstGeom prst="rect">
+            <a:avLst/>
+          </a:prstGeom>
+          <a:noFill/>
+        </p:spPr>
+        <p:txBody>
+          <a:bodyPr wrap="square" lIns="0" rIns="0" tIns="0" bIns="0" anchor="t">
+            <a:spAutoFit/>
+          </a:bodyPr>
+          <a:lstStyle/>
+          <a:p>
+            <a:pPr algn="l">
+              <a:lnSpc>
+                <a:spcPct val="112000"/>
+              </a:lnSpc>
+              <a:spcAft>
+                <a:spcPts val="600"/>
+              </a:spcAft>
+            </a:pPr>
+            <a:r>
+              <a:rPr sz="2400" b="1">
+                <a:solidFill>
+                  <a:srgbClr val="0E0F11"/>
+                </a:solidFill>
+                <a:latin typeface="Instrument Sans"/>
+              </a:rPr>
+              <a:t>global trade finance gap</a:t>
+            </a:r>
+          </a:p>
+        </p:txBody>
+      </p:sp>
+      <p:sp>
+        <p:nvSpPr>
+          <p:cNvPr id="137" name="TextBox 136"/>
+          <p:cNvSpPr txBox="1"/>
+          <p:nvPr/>
+        </p:nvSpPr>
+        <p:spPr>
+          <a:xfrm>
+            <a:off x="12070080" y="6446520"/>
+            <a:ext cx="5120640" cy="822960"/>
+          </a:xfrm>
+          <a:prstGeom prst="rect">
+            <a:avLst/>
+          </a:prstGeom>
+          <a:noFill/>
+        </p:spPr>
+        <p:txBody>
+          <a:bodyPr wrap="square" lIns="0" rIns="0" tIns="0" bIns="0" anchor="t">
+            <a:spAutoFit/>
+          </a:bodyPr>
+          <a:lstStyle/>
+          <a:p>
+            <a:pPr algn="l">
+              <a:lnSpc>
+                <a:spcPct val="112000"/>
+              </a:lnSpc>
+              <a:spcAft>
+                <a:spcPts val="600"/>
+              </a:spcAft>
+            </a:pPr>
+            <a:r>
+              <a:rPr sz="1800" b="0">
+                <a:solidFill>
+                  <a:srgbClr val="4D5560"/>
+                </a:solidFill>
+                <a:latin typeface="Instrument Sans"/>
+              </a:rPr>
               <a:t>ADB Global Trade Finance Gap Survey, Dec 2025</a:t>
             </a:r>
           </a:p>
@@ -21448,7 +21618,7 @@
       </p:sp>
       <p:sp>
         <p:nvSpPr>
-          <p:cNvPr id="134" name="TextBox 133"/>
+          <p:cNvPr id="138" name="TextBox 137"/>
           <p:cNvSpPr txBox="1"/>
           <p:nvPr/>
         </p:nvSpPr>

--- a/projects/hackmeridian-rail/deck/radox-custody-rail.pptx
+++ b/projects/hackmeridian-rail/deck/radox-custody-rail.pptx
@@ -20349,7 +20349,7 @@
                 </a:solidFill>
                 <a:latin typeface="Instrument Sans"/>
               </a:rPr>
-              <a:t>of them electronic in 2025</a:t>
+              <a:t>of bills of lading issued electronically, 2025</a:t>
             </a:r>
           </a:p>
         </p:txBody>
@@ -20391,7 +20391,7 @@
                 </a:solidFill>
                 <a:latin typeface="Instrument Sans"/>
               </a:rPr>
-              <a:t>DCSA, figure as of 2025</a:t>
+              <a:t>DCSA, as of 2025 (Jan 2025 guide: 5.7%)</a:t>
             </a:r>
           </a:p>
         </p:txBody>
@@ -20519,7 +20519,7 @@
                 </a:solidFill>
                 <a:latin typeface="Instrument Sans"/>
               </a:rPr>
-              <a:t>of global cargo thefts in 2025 involved insiders</a:t>
+              <a:t>of recorded cargo thefts in 2025 involved insiders</a:t>
             </a:r>
           </a:p>
         </p:txBody>
@@ -21050,7 +21050,7 @@
                 </a:solidFill>
                 <a:latin typeface="Inter Tight"/>
               </a:rPr>
-              <a:t>Cargo goes missing. Banks get fooled.</a:t>
+              <a:t>Cargo goes missing. A bank got fooled.</a:t>
             </a:r>
           </a:p>
         </p:txBody>
@@ -21229,7 +21229,7 @@
                 </a:solidFill>
                 <a:latin typeface="Instrument Sans"/>
               </a:rPr>
-              <a:t>est. direct loss, 8,570 cargo thefts in Brazil, 2025</a:t>
+              <a:t>est. direct loss, 8,570 cargo robberies in Brazil, 2025</a:t>
             </a:r>
           </a:p>
         </p:txBody>
@@ -21569,7 +21569,7 @@
                 </a:solidFill>
                 <a:latin typeface="Instrument Sans"/>
               </a:rPr>
-              <a:t>global trade finance gap</a:t>
+              <a:t>global trade finance gap (market size only)</a:t>
             </a:r>
           </a:p>
         </p:txBody>
@@ -21611,7 +21611,7 @@
                 </a:solidFill>
                 <a:latin typeface="Instrument Sans"/>
               </a:rPr>
-              <a:t>ADB Global Trade Finance Gap Survey, Dec 2025</a:t>
+              <a:t>ADB survey of banks, Dec 2025</a:t>
             </a:r>
           </a:p>
         </p:txBody>
@@ -21653,7 +21653,7 @@
                 </a:solidFill>
                 <a:latin typeface="Instrument Sans"/>
               </a:rPr>
-              <a:t>These numbers size the problem in the market, not results of ours. This build does not solve all of it.</a:t>
+              <a:t>These numbers size the market problem. They are not results of ours, and we do not claim our build prevents any of it.</a:t>
             </a:r>
           </a:p>
         </p:txBody>

--- a/projects/hackmeridian-rail/deck/radox-custody-rail.pptx
+++ b/projects/hackmeridian-rail/deck/radox-custody-rail.pptx
@@ -10320,7 +10320,7 @@
     <p:bg>
       <p:bgPr>
         <a:solidFill>
-          <a:srgbClr val="0E0F11"/>
+          <a:srgbClr val="F7F6F2"/>
         </a:solidFill>
       </p:bgPr>
     </p:bg>
@@ -10346,7 +10346,7 @@
             <a:avLst/>
           </a:prstGeom>
           <a:solidFill>
-            <a:srgbClr val="131517"/>
+            <a:srgbClr val="0F0F0F"/>
           </a:solidFill>
           <a:ln>
             <a:noFill/>
@@ -10526,7 +10526,7 @@
                 <a:cs typeface="JetBrains Mono"/>
                 <a:sym typeface="JetBrains Mono"/>
               </a:rPr>
-              <a:t>NEXT ▸ WHY STELLAR</a:t>
+              <a:t>NEXT ▸ LIVE ON TESTNET</a:t>
             </a:r>
             <a:endParaRPr/>
           </a:p>
@@ -10541,7 +10541,7 @@
         <p:spPr>
           <a:xfrm>
             <a:off x="914400" y="1417320"/>
-            <a:ext cx="4800600" cy="475488"/>
+            <a:ext cx="3703320" cy="475488"/>
           </a:xfrm>
           <a:prstGeom prst="roundRect">
             <a:avLst>
@@ -10580,7 +10580,7 @@
                 <a:cs typeface="JetBrains Mono"/>
                 <a:sym typeface="JetBrains Mono"/>
               </a:rPr>
-              <a:t>THE PRODUCT · LIVE ON TESTNET</a:t>
+              <a:t>THE RAIL · END TO END</a:t>
             </a:r>
             <a:endParaRPr/>
           </a:p>
@@ -10601,7 +10601,7 @@
             <a:avLst/>
           </a:prstGeom>
           <a:solidFill>
-            <a:srgbClr val="2A2F36"/>
+            <a:srgbClr val="DFDDD6"/>
           </a:solidFill>
           <a:ln>
             <a:noFill/>
@@ -10674,7 +10674,7 @@
             <a:r>
               <a:rPr b="0" i="0" lang="en-US" sz="1200" u="none" cap="none" strike="noStrike">
                 <a:solidFill>
-                  <a:srgbClr val="A3A8B0"/>
+                  <a:srgbClr val="5C5C5C"/>
                 </a:solidFill>
                 <a:latin typeface="JetBrains Mono"/>
                 <a:ea typeface="JetBrains Mono"/>
@@ -10744,39 +10744,57 @@
             <a:r>
               <a:rPr sz="5800" b="1">
                 <a:solidFill>
-                  <a:srgbClr val="E7E8EA"/>
+                  <a:srgbClr val="0E0F11"/>
                 </a:solidFill>
                 <a:latin typeface="Inter Tight"/>
               </a:rPr>
-              <a:t>7 testnet transactions. Anyone can check them.</a:t>
-            </a:r>
-          </a:p>
-        </p:txBody>
-      </p:sp>
-      <p:pic>
-        <p:nvPicPr>
-          <p:cNvPr id="125" name="Picture 124" descr="page-handovers-rows.png"/>
-          <p:cNvPicPr>
-            <a:picLocks noChangeAspect="1"/>
-          </p:cNvPicPr>
-          <p:nvPr/>
-        </p:nvPicPr>
-        <p:blipFill>
-          <a:blip r:embed="rId3"/>
-          <a:stretch>
-            <a:fillRect/>
-          </a:stretch>
-        </p:blipFill>
-        <p:spPr>
-          <a:xfrm>
-            <a:off x="914400" y="3108960"/>
-            <a:ext cx="6766560" cy="4591594"/>
-          </a:xfrm>
-          <a:prstGeom prst="rect">
-            <a:avLst/>
-          </a:prstGeom>
-        </p:spPr>
-      </p:pic>
+              <a:t>One rail, origin to delivery</a:t>
+            </a:r>
+          </a:p>
+        </p:txBody>
+      </p:sp>
+      <p:sp>
+        <p:nvSpPr>
+          <p:cNvPr id="125" name="TextBox 124"/>
+          <p:cNvSpPr txBox="1"/>
+          <p:nvPr/>
+        </p:nvSpPr>
+        <p:spPr>
+          <a:xfrm>
+            <a:off x="914400" y="3063240"/>
+            <a:ext cx="16459200" cy="548640"/>
+          </a:xfrm>
+          <a:prstGeom prst="rect">
+            <a:avLst/>
+          </a:prstGeom>
+          <a:noFill/>
+        </p:spPr>
+        <p:txBody>
+          <a:bodyPr wrap="square" lIns="0" rIns="0" tIns="0" bIns="0" anchor="t">
+            <a:spAutoFit/>
+          </a:bodyPr>
+          <a:lstStyle/>
+          <a:p>
+            <a:pPr algn="l">
+              <a:lnSpc>
+                <a:spcPct val="112000"/>
+              </a:lnSpc>
+              <a:spcAft>
+                <a:spcPts val="600"/>
+              </a:spcAft>
+            </a:pPr>
+            <a:r>
+              <a:rPr sz="2400" b="0">
+                <a:solidFill>
+                  <a:srgbClr val="0E0F11"/>
+                </a:solidFill>
+                <a:latin typeface="Instrument Sans"/>
+              </a:rPr>
+              <a:t>One record follows the goods across company boundaries, not inside one company's system.</a:t>
+            </a:r>
+          </a:p>
+        </p:txBody>
+      </p:sp>
       <p:sp>
         <p:nvSpPr>
           <p:cNvPr id="126" name="Rectangle 125"/>
@@ -10785,17 +10803,17 @@
         </p:nvSpPr>
         <p:spPr>
           <a:xfrm>
-            <a:off x="914400" y="3108960"/>
-            <a:ext cx="6766560" cy="4591594"/>
-          </a:xfrm>
-          <a:prstGeom prst="rect">
-            <a:avLst/>
-          </a:prstGeom>
-          <a:noFill/>
-          <a:ln w="12700">
-            <a:solidFill>
-              <a:srgbClr val="2A2F36"/>
-            </a:solidFill>
+            <a:off x="1188720" y="4553712"/>
+            <a:ext cx="15910559" cy="36576"/>
+          </a:xfrm>
+          <a:prstGeom prst="rect">
+            <a:avLst/>
+          </a:prstGeom>
+          <a:solidFill>
+            <a:srgbClr val="556F00"/>
+          </a:solidFill>
+          <a:ln>
+            <a:noFill/>
           </a:ln>
           <a:effectLst/>
         </p:spPr>
@@ -10823,14 +10841,1038 @@
       </p:sp>
       <p:sp>
         <p:nvSpPr>
-          <p:cNvPr id="127" name="TextBox 126"/>
+          <p:cNvPr id="127" name="Oval 126"/>
+          <p:cNvSpPr/>
+          <p:nvPr/>
+        </p:nvSpPr>
+        <p:spPr>
+          <a:xfrm>
+            <a:off x="1033272" y="4416552"/>
+            <a:ext cx="310896" cy="310896"/>
+          </a:xfrm>
+          <a:prstGeom prst="ellipse">
+            <a:avLst/>
+          </a:prstGeom>
+          <a:solidFill>
+            <a:srgbClr val="556F00"/>
+          </a:solidFill>
+          <a:ln>
+            <a:noFill/>
+          </a:ln>
+          <a:effectLst/>
+        </p:spPr>
+        <p:style>
+          <a:lnRef idx="1">
+            <a:schemeClr val="accent1"/>
+          </a:lnRef>
+          <a:fillRef idx="3">
+            <a:schemeClr val="accent1"/>
+          </a:fillRef>
+          <a:effectRef idx="0">
+            <a:schemeClr val="accent1"/>
+          </a:effectRef>
+          <a:fontRef idx="minor">
+            <a:schemeClr val="lt1"/>
+          </a:fontRef>
+        </p:style>
+        <p:txBody>
+          <a:bodyPr rtlCol="0" anchor="ctr"/>
+          <a:lstStyle/>
+          <a:p>
+            <a:pPr algn="ctr"/>
+          </a:p>
+        </p:txBody>
+      </p:sp>
+      <p:sp>
+        <p:nvSpPr>
+          <p:cNvPr id="128" name="TextBox 127"/>
           <p:cNvSpPr txBox="1"/>
           <p:nvPr/>
         </p:nvSpPr>
         <p:spPr>
           <a:xfrm>
-            <a:off x="8229600" y="3063240"/>
-            <a:ext cx="9144000" cy="365760"/>
+            <a:off x="45720" y="4828032"/>
+            <a:ext cx="2286000" cy="457200"/>
+          </a:xfrm>
+          <a:prstGeom prst="rect">
+            <a:avLst/>
+          </a:prstGeom>
+          <a:noFill/>
+        </p:spPr>
+        <p:txBody>
+          <a:bodyPr wrap="square" lIns="0" rIns="0" tIns="0" bIns="0" anchor="t">
+            <a:spAutoFit/>
+          </a:bodyPr>
+          <a:lstStyle/>
+          <a:p>
+            <a:pPr algn="ctr">
+              <a:lnSpc>
+                <a:spcPct val="112000"/>
+              </a:lnSpc>
+              <a:spcAft>
+                <a:spcPts val="600"/>
+              </a:spcAft>
+            </a:pPr>
+            <a:r>
+              <a:rPr sz="2100" b="1">
+                <a:solidFill>
+                  <a:srgbClr val="0E0F11"/>
+                </a:solidFill>
+                <a:latin typeface="Instrument Sans"/>
+              </a:rPr>
+              <a:t>Open</a:t>
+            </a:r>
+          </a:p>
+        </p:txBody>
+      </p:sp>
+      <p:sp>
+        <p:nvSpPr>
+          <p:cNvPr id="129" name="TextBox 128"/>
+          <p:cNvSpPr txBox="1"/>
+          <p:nvPr/>
+        </p:nvSpPr>
+        <p:spPr>
+          <a:xfrm>
+            <a:off x="45720" y="5230368"/>
+            <a:ext cx="2286000" cy="457200"/>
+          </a:xfrm>
+          <a:prstGeom prst="rect">
+            <a:avLst/>
+          </a:prstGeom>
+          <a:noFill/>
+        </p:spPr>
+        <p:txBody>
+          <a:bodyPr wrap="square" lIns="0" rIns="0" tIns="0" bIns="0" anchor="t">
+            <a:spAutoFit/>
+          </a:bodyPr>
+          <a:lstStyle/>
+          <a:p>
+            <a:pPr algn="ctr">
+              <a:lnSpc>
+                <a:spcPct val="112000"/>
+              </a:lnSpc>
+              <a:spcAft>
+                <a:spcPts val="600"/>
+              </a:spcAft>
+            </a:pPr>
+            <a:r>
+              <a:rPr sz="1800" b="0">
+                <a:solidFill>
+                  <a:srgbClr val="4D5560"/>
+                </a:solidFill>
+                <a:latin typeface="Instrument Sans"/>
+              </a:rPr>
+              <a:t>operator</a:t>
+            </a:r>
+          </a:p>
+        </p:txBody>
+      </p:sp>
+      <p:sp>
+        <p:nvSpPr>
+          <p:cNvPr id="130" name="Oval 129"/>
+          <p:cNvSpPr/>
+          <p:nvPr/>
+        </p:nvSpPr>
+        <p:spPr>
+          <a:xfrm>
+            <a:off x="3306209" y="4416552"/>
+            <a:ext cx="310896" cy="310896"/>
+          </a:xfrm>
+          <a:prstGeom prst="ellipse">
+            <a:avLst/>
+          </a:prstGeom>
+          <a:solidFill>
+            <a:srgbClr val="0E0F11"/>
+          </a:solidFill>
+          <a:ln>
+            <a:noFill/>
+          </a:ln>
+          <a:effectLst/>
+        </p:spPr>
+        <p:style>
+          <a:lnRef idx="1">
+            <a:schemeClr val="accent1"/>
+          </a:lnRef>
+          <a:fillRef idx="3">
+            <a:schemeClr val="accent1"/>
+          </a:fillRef>
+          <a:effectRef idx="0">
+            <a:schemeClr val="accent1"/>
+          </a:effectRef>
+          <a:fontRef idx="minor">
+            <a:schemeClr val="lt1"/>
+          </a:fontRef>
+        </p:style>
+        <p:txBody>
+          <a:bodyPr rtlCol="0" anchor="ctr"/>
+          <a:lstStyle/>
+          <a:p>
+            <a:pPr algn="ctr"/>
+          </a:p>
+        </p:txBody>
+      </p:sp>
+      <p:sp>
+        <p:nvSpPr>
+          <p:cNvPr id="131" name="TextBox 130"/>
+          <p:cNvSpPr txBox="1"/>
+          <p:nvPr/>
+        </p:nvSpPr>
+        <p:spPr>
+          <a:xfrm>
+            <a:off x="2318657" y="4828032"/>
+            <a:ext cx="2286000" cy="457200"/>
+          </a:xfrm>
+          <a:prstGeom prst="rect">
+            <a:avLst/>
+          </a:prstGeom>
+          <a:noFill/>
+        </p:spPr>
+        <p:txBody>
+          <a:bodyPr wrap="square" lIns="0" rIns="0" tIns="0" bIns="0" anchor="t">
+            <a:spAutoFit/>
+          </a:bodyPr>
+          <a:lstStyle/>
+          <a:p>
+            <a:pPr algn="ctr">
+              <a:lnSpc>
+                <a:spcPct val="112000"/>
+              </a:lnSpc>
+              <a:spcAft>
+                <a:spcPts val="600"/>
+              </a:spcAft>
+            </a:pPr>
+            <a:r>
+              <a:rPr sz="2100" b="1">
+                <a:solidFill>
+                  <a:srgbClr val="0E0F11"/>
+                </a:solidFill>
+                <a:latin typeface="Instrument Sans"/>
+              </a:rPr>
+              <a:t>Warehouse</a:t>
+            </a:r>
+          </a:p>
+        </p:txBody>
+      </p:sp>
+      <p:sp>
+        <p:nvSpPr>
+          <p:cNvPr id="132" name="TextBox 131"/>
+          <p:cNvSpPr txBox="1"/>
+          <p:nvPr/>
+        </p:nvSpPr>
+        <p:spPr>
+          <a:xfrm>
+            <a:off x="3598817" y="4005072"/>
+            <a:ext cx="1998617" cy="411480"/>
+          </a:xfrm>
+          <a:prstGeom prst="rect">
+            <a:avLst/>
+          </a:prstGeom>
+          <a:noFill/>
+        </p:spPr>
+        <p:txBody>
+          <a:bodyPr wrap="square" lIns="0" rIns="0" tIns="0" bIns="0" anchor="t">
+            <a:spAutoFit/>
+          </a:bodyPr>
+          <a:lstStyle/>
+          <a:p>
+            <a:pPr algn="ctr">
+              <a:lnSpc>
+                <a:spcPct val="112000"/>
+              </a:lnSpc>
+              <a:spcAft>
+                <a:spcPts val="600"/>
+              </a:spcAft>
+            </a:pPr>
+            <a:r>
+              <a:rPr sz="1800" b="0">
+                <a:solidFill>
+                  <a:srgbClr val="556F00"/>
+                </a:solidFill>
+                <a:latin typeface="JetBrains Mono"/>
+              </a:rPr>
+              <a:t>2 signatures</a:t>
+            </a:r>
+          </a:p>
+        </p:txBody>
+      </p:sp>
+      <p:sp>
+        <p:nvSpPr>
+          <p:cNvPr id="133" name="Oval 132"/>
+          <p:cNvSpPr/>
+          <p:nvPr/>
+        </p:nvSpPr>
+        <p:spPr>
+          <a:xfrm>
+            <a:off x="5579146" y="4416552"/>
+            <a:ext cx="310896" cy="310896"/>
+          </a:xfrm>
+          <a:prstGeom prst="ellipse">
+            <a:avLst/>
+          </a:prstGeom>
+          <a:solidFill>
+            <a:srgbClr val="0E0F11"/>
+          </a:solidFill>
+          <a:ln>
+            <a:noFill/>
+          </a:ln>
+          <a:effectLst/>
+        </p:spPr>
+        <p:style>
+          <a:lnRef idx="1">
+            <a:schemeClr val="accent1"/>
+          </a:lnRef>
+          <a:fillRef idx="3">
+            <a:schemeClr val="accent1"/>
+          </a:fillRef>
+          <a:effectRef idx="0">
+            <a:schemeClr val="accent1"/>
+          </a:effectRef>
+          <a:fontRef idx="minor">
+            <a:schemeClr val="lt1"/>
+          </a:fontRef>
+        </p:style>
+        <p:txBody>
+          <a:bodyPr rtlCol="0" anchor="ctr"/>
+          <a:lstStyle/>
+          <a:p>
+            <a:pPr algn="ctr"/>
+          </a:p>
+        </p:txBody>
+      </p:sp>
+      <p:sp>
+        <p:nvSpPr>
+          <p:cNvPr id="134" name="TextBox 133"/>
+          <p:cNvSpPr txBox="1"/>
+          <p:nvPr/>
+        </p:nvSpPr>
+        <p:spPr>
+          <a:xfrm>
+            <a:off x="4591594" y="4828032"/>
+            <a:ext cx="2286000" cy="457200"/>
+          </a:xfrm>
+          <a:prstGeom prst="rect">
+            <a:avLst/>
+          </a:prstGeom>
+          <a:noFill/>
+        </p:spPr>
+        <p:txBody>
+          <a:bodyPr wrap="square" lIns="0" rIns="0" tIns="0" bIns="0" anchor="t">
+            <a:spAutoFit/>
+          </a:bodyPr>
+          <a:lstStyle/>
+          <a:p>
+            <a:pPr algn="ctr">
+              <a:lnSpc>
+                <a:spcPct val="112000"/>
+              </a:lnSpc>
+              <a:spcAft>
+                <a:spcPts val="600"/>
+              </a:spcAft>
+            </a:pPr>
+            <a:r>
+              <a:rPr sz="2100" b="1">
+                <a:solidFill>
+                  <a:srgbClr val="0E0F11"/>
+                </a:solidFill>
+                <a:latin typeface="Instrument Sans"/>
+              </a:rPr>
+              <a:t>Port</a:t>
+            </a:r>
+          </a:p>
+        </p:txBody>
+      </p:sp>
+      <p:sp>
+        <p:nvSpPr>
+          <p:cNvPr id="135" name="TextBox 134"/>
+          <p:cNvSpPr txBox="1"/>
+          <p:nvPr/>
+        </p:nvSpPr>
+        <p:spPr>
+          <a:xfrm>
+            <a:off x="5871754" y="4005072"/>
+            <a:ext cx="1998617" cy="411480"/>
+          </a:xfrm>
+          <a:prstGeom prst="rect">
+            <a:avLst/>
+          </a:prstGeom>
+          <a:noFill/>
+        </p:spPr>
+        <p:txBody>
+          <a:bodyPr wrap="square" lIns="0" rIns="0" tIns="0" bIns="0" anchor="t">
+            <a:spAutoFit/>
+          </a:bodyPr>
+          <a:lstStyle/>
+          <a:p>
+            <a:pPr algn="ctr">
+              <a:lnSpc>
+                <a:spcPct val="112000"/>
+              </a:lnSpc>
+              <a:spcAft>
+                <a:spcPts val="600"/>
+              </a:spcAft>
+            </a:pPr>
+            <a:r>
+              <a:rPr sz="1800" b="0">
+                <a:solidFill>
+                  <a:srgbClr val="556F00"/>
+                </a:solidFill>
+                <a:latin typeface="JetBrains Mono"/>
+              </a:rPr>
+              <a:t>2 signatures</a:t>
+            </a:r>
+          </a:p>
+        </p:txBody>
+      </p:sp>
+      <p:sp>
+        <p:nvSpPr>
+          <p:cNvPr id="136" name="Oval 135"/>
+          <p:cNvSpPr/>
+          <p:nvPr/>
+        </p:nvSpPr>
+        <p:spPr>
+          <a:xfrm>
+            <a:off x="7852083" y="4416552"/>
+            <a:ext cx="310896" cy="310896"/>
+          </a:xfrm>
+          <a:prstGeom prst="ellipse">
+            <a:avLst/>
+          </a:prstGeom>
+          <a:solidFill>
+            <a:srgbClr val="0E0F11"/>
+          </a:solidFill>
+          <a:ln>
+            <a:noFill/>
+          </a:ln>
+          <a:effectLst/>
+        </p:spPr>
+        <p:style>
+          <a:lnRef idx="1">
+            <a:schemeClr val="accent1"/>
+          </a:lnRef>
+          <a:fillRef idx="3">
+            <a:schemeClr val="accent1"/>
+          </a:fillRef>
+          <a:effectRef idx="0">
+            <a:schemeClr val="accent1"/>
+          </a:effectRef>
+          <a:fontRef idx="minor">
+            <a:schemeClr val="lt1"/>
+          </a:fontRef>
+        </p:style>
+        <p:txBody>
+          <a:bodyPr rtlCol="0" anchor="ctr"/>
+          <a:lstStyle/>
+          <a:p>
+            <a:pPr algn="ctr"/>
+          </a:p>
+        </p:txBody>
+      </p:sp>
+      <p:sp>
+        <p:nvSpPr>
+          <p:cNvPr id="137" name="TextBox 136"/>
+          <p:cNvSpPr txBox="1"/>
+          <p:nvPr/>
+        </p:nvSpPr>
+        <p:spPr>
+          <a:xfrm>
+            <a:off x="6864531" y="4828032"/>
+            <a:ext cx="2286000" cy="457200"/>
+          </a:xfrm>
+          <a:prstGeom prst="rect">
+            <a:avLst/>
+          </a:prstGeom>
+          <a:noFill/>
+        </p:spPr>
+        <p:txBody>
+          <a:bodyPr wrap="square" lIns="0" rIns="0" tIns="0" bIns="0" anchor="t">
+            <a:spAutoFit/>
+          </a:bodyPr>
+          <a:lstStyle/>
+          <a:p>
+            <a:pPr algn="ctr">
+              <a:lnSpc>
+                <a:spcPct val="112000"/>
+              </a:lnSpc>
+              <a:spcAft>
+                <a:spcPts val="600"/>
+              </a:spcAft>
+            </a:pPr>
+            <a:r>
+              <a:rPr sz="2100" b="1">
+                <a:solidFill>
+                  <a:srgbClr val="0E0F11"/>
+                </a:solidFill>
+                <a:latin typeface="Instrument Sans"/>
+              </a:rPr>
+              <a:t>Carrier</a:t>
+            </a:r>
+          </a:p>
+        </p:txBody>
+      </p:sp>
+      <p:sp>
+        <p:nvSpPr>
+          <p:cNvPr id="138" name="TextBox 137"/>
+          <p:cNvSpPr txBox="1"/>
+          <p:nvPr/>
+        </p:nvSpPr>
+        <p:spPr>
+          <a:xfrm>
+            <a:off x="8144691" y="4005072"/>
+            <a:ext cx="1998617" cy="411480"/>
+          </a:xfrm>
+          <a:prstGeom prst="rect">
+            <a:avLst/>
+          </a:prstGeom>
+          <a:noFill/>
+        </p:spPr>
+        <p:txBody>
+          <a:bodyPr wrap="square" lIns="0" rIns="0" tIns="0" bIns="0" anchor="t">
+            <a:spAutoFit/>
+          </a:bodyPr>
+          <a:lstStyle/>
+          <a:p>
+            <a:pPr algn="ctr">
+              <a:lnSpc>
+                <a:spcPct val="112000"/>
+              </a:lnSpc>
+              <a:spcAft>
+                <a:spcPts val="600"/>
+              </a:spcAft>
+            </a:pPr>
+            <a:r>
+              <a:rPr sz="1800" b="0">
+                <a:solidFill>
+                  <a:srgbClr val="556F00"/>
+                </a:solidFill>
+                <a:latin typeface="JetBrains Mono"/>
+              </a:rPr>
+              <a:t>2 signatures</a:t>
+            </a:r>
+          </a:p>
+        </p:txBody>
+      </p:sp>
+      <p:sp>
+        <p:nvSpPr>
+          <p:cNvPr id="139" name="Oval 138"/>
+          <p:cNvSpPr/>
+          <p:nvPr/>
+        </p:nvSpPr>
+        <p:spPr>
+          <a:xfrm>
+            <a:off x="10125020" y="4416552"/>
+            <a:ext cx="310896" cy="310896"/>
+          </a:xfrm>
+          <a:prstGeom prst="ellipse">
+            <a:avLst/>
+          </a:prstGeom>
+          <a:solidFill>
+            <a:srgbClr val="0E0F11"/>
+          </a:solidFill>
+          <a:ln>
+            <a:noFill/>
+          </a:ln>
+          <a:effectLst/>
+        </p:spPr>
+        <p:style>
+          <a:lnRef idx="1">
+            <a:schemeClr val="accent1"/>
+          </a:lnRef>
+          <a:fillRef idx="3">
+            <a:schemeClr val="accent1"/>
+          </a:fillRef>
+          <a:effectRef idx="0">
+            <a:schemeClr val="accent1"/>
+          </a:effectRef>
+          <a:fontRef idx="minor">
+            <a:schemeClr val="lt1"/>
+          </a:fontRef>
+        </p:style>
+        <p:txBody>
+          <a:bodyPr rtlCol="0" anchor="ctr"/>
+          <a:lstStyle/>
+          <a:p>
+            <a:pPr algn="ctr"/>
+          </a:p>
+        </p:txBody>
+      </p:sp>
+      <p:sp>
+        <p:nvSpPr>
+          <p:cNvPr id="140" name="TextBox 139"/>
+          <p:cNvSpPr txBox="1"/>
+          <p:nvPr/>
+        </p:nvSpPr>
+        <p:spPr>
+          <a:xfrm>
+            <a:off x="9137468" y="4828032"/>
+            <a:ext cx="2286000" cy="457200"/>
+          </a:xfrm>
+          <a:prstGeom prst="rect">
+            <a:avLst/>
+          </a:prstGeom>
+          <a:noFill/>
+        </p:spPr>
+        <p:txBody>
+          <a:bodyPr wrap="square" lIns="0" rIns="0" tIns="0" bIns="0" anchor="t">
+            <a:spAutoFit/>
+          </a:bodyPr>
+          <a:lstStyle/>
+          <a:p>
+            <a:pPr algn="ctr">
+              <a:lnSpc>
+                <a:spcPct val="112000"/>
+              </a:lnSpc>
+              <a:spcAft>
+                <a:spcPts val="600"/>
+              </a:spcAft>
+            </a:pPr>
+            <a:r>
+              <a:rPr sz="2100" b="1">
+                <a:solidFill>
+                  <a:srgbClr val="0E0F11"/>
+                </a:solidFill>
+                <a:latin typeface="Instrument Sans"/>
+              </a:rPr>
+              <a:t>Customs</a:t>
+            </a:r>
+          </a:p>
+        </p:txBody>
+      </p:sp>
+      <p:sp>
+        <p:nvSpPr>
+          <p:cNvPr id="141" name="TextBox 140"/>
+          <p:cNvSpPr txBox="1"/>
+          <p:nvPr/>
+        </p:nvSpPr>
+        <p:spPr>
+          <a:xfrm>
+            <a:off x="10417628" y="4005072"/>
+            <a:ext cx="1998617" cy="411480"/>
+          </a:xfrm>
+          <a:prstGeom prst="rect">
+            <a:avLst/>
+          </a:prstGeom>
+          <a:noFill/>
+        </p:spPr>
+        <p:txBody>
+          <a:bodyPr wrap="square" lIns="0" rIns="0" tIns="0" bIns="0" anchor="t">
+            <a:spAutoFit/>
+          </a:bodyPr>
+          <a:lstStyle/>
+          <a:p>
+            <a:pPr algn="ctr">
+              <a:lnSpc>
+                <a:spcPct val="112000"/>
+              </a:lnSpc>
+              <a:spcAft>
+                <a:spcPts val="600"/>
+              </a:spcAft>
+            </a:pPr>
+            <a:r>
+              <a:rPr sz="1800" b="0">
+                <a:solidFill>
+                  <a:srgbClr val="556F00"/>
+                </a:solidFill>
+                <a:latin typeface="JetBrains Mono"/>
+              </a:rPr>
+              <a:t>2 signatures</a:t>
+            </a:r>
+          </a:p>
+        </p:txBody>
+      </p:sp>
+      <p:sp>
+        <p:nvSpPr>
+          <p:cNvPr id="142" name="Oval 141"/>
+          <p:cNvSpPr/>
+          <p:nvPr/>
+        </p:nvSpPr>
+        <p:spPr>
+          <a:xfrm>
+            <a:off x="12397957" y="4416552"/>
+            <a:ext cx="310896" cy="310896"/>
+          </a:xfrm>
+          <a:prstGeom prst="ellipse">
+            <a:avLst/>
+          </a:prstGeom>
+          <a:solidFill>
+            <a:srgbClr val="0E0F11"/>
+          </a:solidFill>
+          <a:ln>
+            <a:noFill/>
+          </a:ln>
+          <a:effectLst/>
+        </p:spPr>
+        <p:style>
+          <a:lnRef idx="1">
+            <a:schemeClr val="accent1"/>
+          </a:lnRef>
+          <a:fillRef idx="3">
+            <a:schemeClr val="accent1"/>
+          </a:fillRef>
+          <a:effectRef idx="0">
+            <a:schemeClr val="accent1"/>
+          </a:effectRef>
+          <a:fontRef idx="minor">
+            <a:schemeClr val="lt1"/>
+          </a:fontRef>
+        </p:style>
+        <p:txBody>
+          <a:bodyPr rtlCol="0" anchor="ctr"/>
+          <a:lstStyle/>
+          <a:p>
+            <a:pPr algn="ctr"/>
+          </a:p>
+        </p:txBody>
+      </p:sp>
+      <p:sp>
+        <p:nvSpPr>
+          <p:cNvPr id="143" name="TextBox 142"/>
+          <p:cNvSpPr txBox="1"/>
+          <p:nvPr/>
+        </p:nvSpPr>
+        <p:spPr>
+          <a:xfrm>
+            <a:off x="11410405" y="4828032"/>
+            <a:ext cx="2286000" cy="457200"/>
+          </a:xfrm>
+          <a:prstGeom prst="rect">
+            <a:avLst/>
+          </a:prstGeom>
+          <a:noFill/>
+        </p:spPr>
+        <p:txBody>
+          <a:bodyPr wrap="square" lIns="0" rIns="0" tIns="0" bIns="0" anchor="t">
+            <a:spAutoFit/>
+          </a:bodyPr>
+          <a:lstStyle/>
+          <a:p>
+            <a:pPr algn="ctr">
+              <a:lnSpc>
+                <a:spcPct val="112000"/>
+              </a:lnSpc>
+              <a:spcAft>
+                <a:spcPts val="600"/>
+              </a:spcAft>
+            </a:pPr>
+            <a:r>
+              <a:rPr sz="2100" b="1">
+                <a:solidFill>
+                  <a:srgbClr val="0E0F11"/>
+                </a:solidFill>
+                <a:latin typeface="Instrument Sans"/>
+              </a:rPr>
+              <a:t>Recipient</a:t>
+            </a:r>
+          </a:p>
+        </p:txBody>
+      </p:sp>
+      <p:sp>
+        <p:nvSpPr>
+          <p:cNvPr id="144" name="TextBox 143"/>
+          <p:cNvSpPr txBox="1"/>
+          <p:nvPr/>
+        </p:nvSpPr>
+        <p:spPr>
+          <a:xfrm>
+            <a:off x="12690565" y="4005072"/>
+            <a:ext cx="1998617" cy="411480"/>
+          </a:xfrm>
+          <a:prstGeom prst="rect">
+            <a:avLst/>
+          </a:prstGeom>
+          <a:noFill/>
+        </p:spPr>
+        <p:txBody>
+          <a:bodyPr wrap="square" lIns="0" rIns="0" tIns="0" bIns="0" anchor="t">
+            <a:spAutoFit/>
+          </a:bodyPr>
+          <a:lstStyle/>
+          <a:p>
+            <a:pPr algn="ctr">
+              <a:lnSpc>
+                <a:spcPct val="112000"/>
+              </a:lnSpc>
+              <a:spcAft>
+                <a:spcPts val="600"/>
+              </a:spcAft>
+            </a:pPr>
+            <a:r>
+              <a:rPr sz="1800" b="0">
+                <a:solidFill>
+                  <a:srgbClr val="556F00"/>
+                </a:solidFill>
+                <a:latin typeface="JetBrains Mono"/>
+              </a:rPr>
+              <a:t>2 signatures</a:t>
+            </a:r>
+          </a:p>
+        </p:txBody>
+      </p:sp>
+      <p:sp>
+        <p:nvSpPr>
+          <p:cNvPr id="145" name="Oval 144"/>
+          <p:cNvSpPr/>
+          <p:nvPr/>
+        </p:nvSpPr>
+        <p:spPr>
+          <a:xfrm>
+            <a:off x="14670894" y="4416552"/>
+            <a:ext cx="310896" cy="310896"/>
+          </a:xfrm>
+          <a:prstGeom prst="ellipse">
+            <a:avLst/>
+          </a:prstGeom>
+          <a:solidFill>
+            <a:srgbClr val="556F00"/>
+          </a:solidFill>
+          <a:ln>
+            <a:noFill/>
+          </a:ln>
+          <a:effectLst/>
+        </p:spPr>
+        <p:style>
+          <a:lnRef idx="1">
+            <a:schemeClr val="accent1"/>
+          </a:lnRef>
+          <a:fillRef idx="3">
+            <a:schemeClr val="accent1"/>
+          </a:fillRef>
+          <a:effectRef idx="0">
+            <a:schemeClr val="accent1"/>
+          </a:effectRef>
+          <a:fontRef idx="minor">
+            <a:schemeClr val="lt1"/>
+          </a:fontRef>
+        </p:style>
+        <p:txBody>
+          <a:bodyPr rtlCol="0" anchor="ctr"/>
+          <a:lstStyle/>
+          <a:p>
+            <a:pPr algn="ctr"/>
+          </a:p>
+        </p:txBody>
+      </p:sp>
+      <p:sp>
+        <p:nvSpPr>
+          <p:cNvPr id="146" name="TextBox 145"/>
+          <p:cNvSpPr txBox="1"/>
+          <p:nvPr/>
+        </p:nvSpPr>
+        <p:spPr>
+          <a:xfrm>
+            <a:off x="13683342" y="4828032"/>
+            <a:ext cx="2286000" cy="457200"/>
+          </a:xfrm>
+          <a:prstGeom prst="rect">
+            <a:avLst/>
+          </a:prstGeom>
+          <a:noFill/>
+        </p:spPr>
+        <p:txBody>
+          <a:bodyPr wrap="square" lIns="0" rIns="0" tIns="0" bIns="0" anchor="t">
+            <a:spAutoFit/>
+          </a:bodyPr>
+          <a:lstStyle/>
+          <a:p>
+            <a:pPr algn="ctr">
+              <a:lnSpc>
+                <a:spcPct val="112000"/>
+              </a:lnSpc>
+              <a:spcAft>
+                <a:spcPts val="600"/>
+              </a:spcAft>
+            </a:pPr>
+            <a:r>
+              <a:rPr sz="2100" b="1">
+                <a:solidFill>
+                  <a:srgbClr val="0E0F11"/>
+                </a:solidFill>
+                <a:latin typeface="Instrument Sans"/>
+              </a:rPr>
+              <a:t>Delivered</a:t>
+            </a:r>
+          </a:p>
+        </p:txBody>
+      </p:sp>
+      <p:sp>
+        <p:nvSpPr>
+          <p:cNvPr id="147" name="TextBox 146"/>
+          <p:cNvSpPr txBox="1"/>
+          <p:nvPr/>
+        </p:nvSpPr>
+        <p:spPr>
+          <a:xfrm>
+            <a:off x="13683342" y="5230368"/>
+            <a:ext cx="2286000" cy="457200"/>
+          </a:xfrm>
+          <a:prstGeom prst="rect">
+            <a:avLst/>
+          </a:prstGeom>
+          <a:noFill/>
+        </p:spPr>
+        <p:txBody>
+          <a:bodyPr wrap="square" lIns="0" rIns="0" tIns="0" bIns="0" anchor="t">
+            <a:spAutoFit/>
+          </a:bodyPr>
+          <a:lstStyle/>
+          <a:p>
+            <a:pPr algn="ctr">
+              <a:lnSpc>
+                <a:spcPct val="112000"/>
+              </a:lnSpc>
+              <a:spcAft>
+                <a:spcPts val="600"/>
+              </a:spcAft>
+            </a:pPr>
+            <a:r>
+              <a:rPr sz="1800" b="0">
+                <a:solidFill>
+                  <a:srgbClr val="4D5560"/>
+                </a:solidFill>
+                <a:latin typeface="Instrument Sans"/>
+              </a:rPr>
+              <a:t>to the holder</a:t>
+            </a:r>
+          </a:p>
+        </p:txBody>
+      </p:sp>
+      <p:sp>
+        <p:nvSpPr>
+          <p:cNvPr id="148" name="Oval 147"/>
+          <p:cNvSpPr/>
+          <p:nvPr/>
+        </p:nvSpPr>
+        <p:spPr>
+          <a:xfrm>
+            <a:off x="16943831" y="4416552"/>
+            <a:ext cx="310896" cy="310896"/>
+          </a:xfrm>
+          <a:prstGeom prst="ellipse">
+            <a:avLst/>
+          </a:prstGeom>
+          <a:solidFill>
+            <a:srgbClr val="556F00"/>
+          </a:solidFill>
+          <a:ln>
+            <a:noFill/>
+          </a:ln>
+          <a:effectLst/>
+        </p:spPr>
+        <p:style>
+          <a:lnRef idx="1">
+            <a:schemeClr val="accent1"/>
+          </a:lnRef>
+          <a:fillRef idx="3">
+            <a:schemeClr val="accent1"/>
+          </a:fillRef>
+          <a:effectRef idx="0">
+            <a:schemeClr val="accent1"/>
+          </a:effectRef>
+          <a:fontRef idx="minor">
+            <a:schemeClr val="lt1"/>
+          </a:fontRef>
+        </p:style>
+        <p:txBody>
+          <a:bodyPr rtlCol="0" anchor="ctr"/>
+          <a:lstStyle/>
+          <a:p>
+            <a:pPr algn="ctr"/>
+          </a:p>
+        </p:txBody>
+      </p:sp>
+      <p:sp>
+        <p:nvSpPr>
+          <p:cNvPr id="149" name="TextBox 148"/>
+          <p:cNvSpPr txBox="1"/>
+          <p:nvPr/>
+        </p:nvSpPr>
+        <p:spPr>
+          <a:xfrm>
+            <a:off x="15956280" y="4828032"/>
+            <a:ext cx="2286000" cy="457200"/>
+          </a:xfrm>
+          <a:prstGeom prst="rect">
+            <a:avLst/>
+          </a:prstGeom>
+          <a:noFill/>
+        </p:spPr>
+        <p:txBody>
+          <a:bodyPr wrap="square" lIns="0" rIns="0" tIns="0" bIns="0" anchor="t">
+            <a:spAutoFit/>
+          </a:bodyPr>
+          <a:lstStyle/>
+          <a:p>
+            <a:pPr algn="ctr">
+              <a:lnSpc>
+                <a:spcPct val="112000"/>
+              </a:lnSpc>
+              <a:spcAft>
+                <a:spcPts val="600"/>
+              </a:spcAft>
+            </a:pPr>
+            <a:r>
+              <a:rPr sz="2100" b="1">
+                <a:solidFill>
+                  <a:srgbClr val="0E0F11"/>
+                </a:solidFill>
+                <a:latin typeface="Instrument Sans"/>
+              </a:rPr>
+              <a:t>Burned</a:t>
+            </a:r>
+          </a:p>
+        </p:txBody>
+      </p:sp>
+      <p:sp>
+        <p:nvSpPr>
+          <p:cNvPr id="150" name="TextBox 149"/>
+          <p:cNvSpPr txBox="1"/>
+          <p:nvPr/>
+        </p:nvSpPr>
+        <p:spPr>
+          <a:xfrm>
+            <a:off x="15956280" y="5230368"/>
+            <a:ext cx="2286000" cy="457200"/>
+          </a:xfrm>
+          <a:prstGeom prst="rect">
+            <a:avLst/>
+          </a:prstGeom>
+          <a:noFill/>
+        </p:spPr>
+        <p:txBody>
+          <a:bodyPr wrap="square" lIns="0" rIns="0" tIns="0" bIns="0" anchor="t">
+            <a:spAutoFit/>
+          </a:bodyPr>
+          <a:lstStyle/>
+          <a:p>
+            <a:pPr algn="ctr">
+              <a:lnSpc>
+                <a:spcPct val="112000"/>
+              </a:lnSpc>
+              <a:spcAft>
+                <a:spcPts val="600"/>
+              </a:spcAft>
+            </a:pPr>
+            <a:r>
+              <a:rPr sz="1800" b="0">
+                <a:solidFill>
+                  <a:srgbClr val="4D5560"/>
+                </a:solidFill>
+                <a:latin typeface="Instrument Sans"/>
+              </a:rPr>
+              <a:t>existing redeem¹</a:t>
+            </a:r>
+          </a:p>
+        </p:txBody>
+      </p:sp>
+      <p:sp>
+        <p:nvSpPr>
+          <p:cNvPr id="151" name="TextBox 150"/>
+          <p:cNvSpPr txBox="1"/>
+          <p:nvPr/>
+        </p:nvSpPr>
+        <p:spPr>
+          <a:xfrm>
+            <a:off x="914400" y="5897880"/>
+            <a:ext cx="16459200" cy="1554480"/>
           </a:xfrm>
           <a:prstGeom prst="rect">
             <a:avLst/>
@@ -10852,47 +11894,33 @@
               </a:spcAft>
             </a:pPr>
             <a:r>
-              <a:rPr sz="1800" b="0">
-                <a:solidFill>
-                  <a:srgbClr val="C6F24E"/>
-                </a:solidFill>
-                <a:latin typeface="JetBrains Mono"/>
-              </a:rPr>
-              <a:t>2b3d51f0</a:t>
-            </a:r>
-            <a:r>
-              <a:rPr sz="1800" b="0">
-                <a:solidFill>
-                  <a:srgbClr val="E7E8EA"/>
+              <a:rPr sz="2400" b="0">
+                <a:solidFill>
+                  <a:srgbClr val="556F00"/>
                 </a:solidFill>
                 <a:latin typeface="Instrument Sans"/>
               </a:rPr>
-              <a:t>   open · operator</a:t>
-            </a:r>
-          </a:p>
-        </p:txBody>
-      </p:sp>
-      <p:sp>
-        <p:nvSpPr>
-          <p:cNvPr id="128" name="TextBox 127"/>
-          <p:cNvSpPr txBox="1"/>
-          <p:nvPr/>
-        </p:nvSpPr>
-        <p:spPr>
-          <a:xfrm>
-            <a:off x="8229600" y="3429000"/>
-            <a:ext cx="9144000" cy="365760"/>
-          </a:xfrm>
-          <a:prstGeom prst="rect">
-            <a:avLst/>
-          </a:prstGeom>
-          <a:noFill/>
-        </p:spPr>
-        <p:txBody>
-          <a:bodyPr wrap="square" lIns="0" rIns="0" tIns="0" bIns="0" anchor="t">
-            <a:spAutoFit/>
-          </a:bodyPr>
-          <a:lstStyle/>
+              <a:t>— </a:t>
+            </a:r>
+            <a:r>
+              <a:rPr sz="2400" b="1">
+                <a:solidFill>
+                  <a:srgbClr val="0E0F11"/>
+                </a:solidFill>
+                <a:latin typeface="Instrument Sans"/>
+              </a:rPr>
+              <a:t>Rule of every link: </a:t>
+            </a:r>
+            <a:r>
+              <a:rPr sz="2400" b="0">
+                <a:solidFill>
+                  <a:srgbClr val="0E0F11"/>
+                </a:solidFill>
+                <a:latin typeface="Instrument Sans"/>
+              </a:rPr>
+              <a:t>both companies sign the same Stellar transaction, or custody does not move.</a:t>
+            </a:r>
+          </a:p>
           <a:p>
             <a:pPr algn="l">
               <a:lnSpc>
@@ -10903,47 +11931,42 @@
               </a:spcAft>
             </a:pPr>
             <a:r>
-              <a:rPr sz="1800" b="0">
-                <a:solidFill>
-                  <a:srgbClr val="C6F24E"/>
+              <a:rPr sz="2400" b="0">
+                <a:solidFill>
+                  <a:srgbClr val="556F00"/>
+                </a:solidFill>
+                <a:latin typeface="Instrument Sans"/>
+              </a:rPr>
+              <a:t>— </a:t>
+            </a:r>
+            <a:r>
+              <a:rPr sz="2400" b="0">
+                <a:solidFill>
+                  <a:srgbClr val="0E0F11"/>
+                </a:solidFill>
+                <a:latin typeface="Instrument Sans"/>
+              </a:rPr>
+              <a:t>Each step extends an on-chain hash chain, the </a:t>
+            </a:r>
+            <a:r>
+              <a:rPr sz="2400" b="0">
+                <a:solidFill>
+                  <a:srgbClr val="0E0F11"/>
                 </a:solidFill>
                 <a:latin typeface="JetBrains Mono"/>
               </a:rPr>
-              <a:t>635c99ac</a:t>
-            </a:r>
-            <a:r>
-              <a:rPr sz="1800" b="0">
-                <a:solidFill>
-                  <a:srgbClr val="E7E8EA"/>
+              <a:t>head</a:t>
+            </a:r>
+            <a:r>
+              <a:rPr sz="2400" b="0">
+                <a:solidFill>
+                  <a:srgbClr val="0E0F11"/>
                 </a:solidFill>
                 <a:latin typeface="Instrument Sans"/>
               </a:rPr>
-              <a:t>   handover 1 · Warehouse → Port</a:t>
-            </a:r>
-          </a:p>
-        </p:txBody>
-      </p:sp>
-      <p:sp>
-        <p:nvSpPr>
-          <p:cNvPr id="129" name="TextBox 128"/>
-          <p:cNvSpPr txBox="1"/>
-          <p:nvPr/>
-        </p:nvSpPr>
-        <p:spPr>
-          <a:xfrm>
-            <a:off x="8229600" y="3794760"/>
-            <a:ext cx="9144000" cy="365760"/>
-          </a:xfrm>
-          <a:prstGeom prst="rect">
-            <a:avLst/>
-          </a:prstGeom>
-          <a:noFill/>
-        </p:spPr>
-        <p:txBody>
-          <a:bodyPr wrap="square" lIns="0" rIns="0" tIns="0" bIns="0" anchor="t">
-            <a:spAutoFit/>
-          </a:bodyPr>
-          <a:lstStyle/>
+              <a:t>: anyone can rebuild the history.</a:t>
+            </a:r>
+          </a:p>
           <a:p>
             <a:pPr algn="l">
               <a:lnSpc>
@@ -10954,36 +11977,36 @@
               </a:spcAft>
             </a:pPr>
             <a:r>
-              <a:rPr sz="1800" b="0">
-                <a:solidFill>
-                  <a:srgbClr val="C6F24E"/>
-                </a:solidFill>
-                <a:latin typeface="JetBrains Mono"/>
-              </a:rPr>
-              <a:t>56a0f006</a:t>
-            </a:r>
-            <a:r>
-              <a:rPr sz="1800" b="0">
-                <a:solidFill>
-                  <a:srgbClr val="E7E8EA"/>
+              <a:rPr sz="2400" b="0">
+                <a:solidFill>
+                  <a:srgbClr val="556F00"/>
                 </a:solidFill>
                 <a:latin typeface="Instrument Sans"/>
               </a:rPr>
-              <a:t>   handover 2 · Port → Carrier</a:t>
-            </a:r>
-          </a:p>
-        </p:txBody>
-      </p:sp>
-      <p:sp>
-        <p:nvSpPr>
-          <p:cNvPr id="130" name="TextBox 129"/>
+              <a:t>— </a:t>
+            </a:r>
+            <a:r>
+              <a:rPr sz="2400" b="0">
+                <a:solidFill>
+                  <a:srgbClr val="0E0F11"/>
+                </a:solidFill>
+                <a:latin typeface="Instrument Sans"/>
+              </a:rPr>
+              <a:t>The token stays with its holder in transit; only custody moves.</a:t>
+            </a:r>
+          </a:p>
+        </p:txBody>
+      </p:sp>
+      <p:sp>
+        <p:nvSpPr>
+          <p:cNvPr id="152" name="TextBox 151"/>
           <p:cNvSpPr txBox="1"/>
           <p:nvPr/>
         </p:nvSpPr>
         <p:spPr>
           <a:xfrm>
-            <a:off x="8229600" y="4160520"/>
-            <a:ext cx="9144000" cy="365760"/>
+            <a:off x="914400" y="7726679"/>
+            <a:ext cx="16459200" cy="1097280"/>
           </a:xfrm>
           <a:prstGeom prst="rect">
             <a:avLst/>
@@ -11001,604 +12024,36 @@
                 <a:spcPct val="112000"/>
               </a:lnSpc>
               <a:spcAft>
-                <a:spcPts val="600"/>
+                <a:spcPts val="200"/>
               </a:spcAft>
             </a:pPr>
             <a:r>
-              <a:rPr sz="1800" b="0">
-                <a:solidFill>
-                  <a:srgbClr val="C6F24E"/>
-                </a:solidFill>
-                <a:latin typeface="JetBrains Mono"/>
-              </a:rPr>
-              <a:t>ac268a49</a:t>
-            </a:r>
-            <a:r>
-              <a:rPr sz="1800" b="0">
-                <a:solidFill>
-                  <a:srgbClr val="E7E8EA"/>
+              <a:rPr sz="1800" b="1">
+                <a:solidFill>
+                  <a:srgbClr val="0E0F11"/>
                 </a:solidFill>
                 <a:latin typeface="Instrument Sans"/>
               </a:rPr>
-              <a:t>   handover 3 · Carrier → Customs</a:t>
-            </a:r>
-          </a:p>
-        </p:txBody>
-      </p:sp>
-      <p:sp>
-        <p:nvSpPr>
-          <p:cNvPr id="131" name="TextBox 130"/>
-          <p:cNvSpPr txBox="1"/>
-          <p:nvPr/>
-        </p:nvSpPr>
-        <p:spPr>
-          <a:xfrm>
-            <a:off x="8229600" y="4526280"/>
-            <a:ext cx="9144000" cy="365760"/>
-          </a:xfrm>
-          <a:prstGeom prst="rect">
-            <a:avLst/>
-          </a:prstGeom>
-          <a:noFill/>
-        </p:spPr>
-        <p:txBody>
-          <a:bodyPr wrap="square" lIns="0" rIns="0" tIns="0" bIns="0" anchor="t">
-            <a:spAutoFit/>
-          </a:bodyPr>
-          <a:lstStyle/>
+              <a:t>Built: this lifecycle on testnet, test keys. Design, not built: real companies on the rail, the standard, integrations.</a:t>
+            </a:r>
+          </a:p>
           <a:p>
             <a:pPr algn="l">
               <a:lnSpc>
                 <a:spcPct val="112000"/>
               </a:lnSpc>
               <a:spcAft>
-                <a:spcPts val="600"/>
+                <a:spcPts val="200"/>
               </a:spcAft>
             </a:pPr>
             <a:r>
               <a:rPr sz="1800" b="0">
                 <a:solidFill>
-                  <a:srgbClr val="C6F24E"/>
-                </a:solidFill>
-                <a:latin typeface="JetBrains Mono"/>
-              </a:rPr>
-              <a:t>5199d4fb</a:t>
-            </a:r>
-            <a:r>
-              <a:rPr sz="1800" b="0">
-                <a:solidFill>
-                  <a:srgbClr val="E7E8EA"/>
+                  <a:srgbClr val="4D5560"/>
                 </a:solidFill>
                 <a:latin typeface="Instrument Sans"/>
               </a:rPr>
-              <a:t>   handover 4 · Customs → Recipient</a:t>
-            </a:r>
-          </a:p>
-        </p:txBody>
-      </p:sp>
-      <p:sp>
-        <p:nvSpPr>
-          <p:cNvPr id="132" name="TextBox 131"/>
-          <p:cNvSpPr txBox="1"/>
-          <p:nvPr/>
-        </p:nvSpPr>
-        <p:spPr>
-          <a:xfrm>
-            <a:off x="8229600" y="4892040"/>
-            <a:ext cx="9144000" cy="365760"/>
-          </a:xfrm>
-          <a:prstGeom prst="rect">
-            <a:avLst/>
-          </a:prstGeom>
-          <a:noFill/>
-        </p:spPr>
-        <p:txBody>
-          <a:bodyPr wrap="square" lIns="0" rIns="0" tIns="0" bIns="0" anchor="t">
-            <a:spAutoFit/>
-          </a:bodyPr>
-          <a:lstStyle/>
-          <a:p>
-            <a:pPr algn="l">
-              <a:lnSpc>
-                <a:spcPct val="112000"/>
-              </a:lnSpc>
-              <a:spcAft>
-                <a:spcPts val="600"/>
-              </a:spcAft>
-            </a:pPr>
-            <a:r>
-              <a:rPr sz="1800" b="0">
-                <a:solidFill>
-                  <a:srgbClr val="C6F24E"/>
-                </a:solidFill>
-                <a:latin typeface="JetBrains Mono"/>
-              </a:rPr>
-              <a:t>919def8c</a:t>
-            </a:r>
-            <a:r>
-              <a:rPr sz="1800" b="0">
-                <a:solidFill>
-                  <a:srgbClr val="E7E8EA"/>
-                </a:solidFill>
-                <a:latin typeface="Instrument Sans"/>
-              </a:rPr>
-              <a:t>   deliver · Recipient → Holder</a:t>
-            </a:r>
-          </a:p>
-        </p:txBody>
-      </p:sp>
-      <p:sp>
-        <p:nvSpPr>
-          <p:cNvPr id="133" name="TextBox 132"/>
-          <p:cNvSpPr txBox="1"/>
-          <p:nvPr/>
-        </p:nvSpPr>
-        <p:spPr>
-          <a:xfrm>
-            <a:off x="8229600" y="5257800"/>
-            <a:ext cx="9144000" cy="365760"/>
-          </a:xfrm>
-          <a:prstGeom prst="rect">
-            <a:avLst/>
-          </a:prstGeom>
-          <a:noFill/>
-        </p:spPr>
-        <p:txBody>
-          <a:bodyPr wrap="square" lIns="0" rIns="0" tIns="0" bIns="0" anchor="t">
-            <a:spAutoFit/>
-          </a:bodyPr>
-          <a:lstStyle/>
-          <a:p>
-            <a:pPr algn="l">
-              <a:lnSpc>
-                <a:spcPct val="112000"/>
-              </a:lnSpc>
-              <a:spcAft>
-                <a:spcPts val="600"/>
-              </a:spcAft>
-            </a:pPr>
-            <a:r>
-              <a:rPr sz="1800" b="0">
-                <a:solidFill>
-                  <a:srgbClr val="C6F24E"/>
-                </a:solidFill>
-                <a:latin typeface="JetBrains Mono"/>
-              </a:rPr>
-              <a:t>864fd164</a:t>
-            </a:r>
-            <a:r>
-              <a:rPr sz="1800" b="0">
-                <a:solidFill>
-                  <a:srgbClr val="E7E8EA"/>
-                </a:solidFill>
-                <a:latin typeface="Instrument Sans"/>
-              </a:rPr>
-              <a:t>   burn · existing redeem</a:t>
-            </a:r>
-          </a:p>
-        </p:txBody>
-      </p:sp>
-      <p:sp>
-        <p:nvSpPr>
-          <p:cNvPr id="134" name="TextBox 133"/>
-          <p:cNvSpPr txBox="1"/>
-          <p:nvPr/>
-        </p:nvSpPr>
-        <p:spPr>
-          <a:xfrm>
-            <a:off x="8229600" y="5760720"/>
-            <a:ext cx="2286000" cy="731520"/>
-          </a:xfrm>
-          <a:prstGeom prst="rect">
-            <a:avLst/>
-          </a:prstGeom>
-          <a:noFill/>
-        </p:spPr>
-        <p:txBody>
-          <a:bodyPr wrap="square" lIns="0" rIns="0" tIns="0" bIns="0" anchor="t">
-            <a:spAutoFit/>
-          </a:bodyPr>
-          <a:lstStyle/>
-          <a:p>
-            <a:pPr algn="l">
-              <a:lnSpc>
-                <a:spcPct val="90000"/>
-              </a:lnSpc>
-              <a:spcAft>
-                <a:spcPts val="600"/>
-              </a:spcAft>
-            </a:pPr>
-            <a:r>
-              <a:rPr sz="4400" b="1">
-                <a:solidFill>
-                  <a:srgbClr val="C6F24E"/>
-                </a:solidFill>
-                <a:latin typeface="Inter Tight"/>
-              </a:rPr>
-              <a:t>7</a:t>
-            </a:r>
-          </a:p>
-        </p:txBody>
-      </p:sp>
-      <p:sp>
-        <p:nvSpPr>
-          <p:cNvPr id="135" name="TextBox 134"/>
-          <p:cNvSpPr txBox="1"/>
-          <p:nvPr/>
-        </p:nvSpPr>
-        <p:spPr>
-          <a:xfrm>
-            <a:off x="8229600" y="6492240"/>
-            <a:ext cx="2240280" cy="640080"/>
-          </a:xfrm>
-          <a:prstGeom prst="rect">
-            <a:avLst/>
-          </a:prstGeom>
-          <a:noFill/>
-        </p:spPr>
-        <p:txBody>
-          <a:bodyPr wrap="square" lIns="0" rIns="0" tIns="0" bIns="0" anchor="t">
-            <a:spAutoFit/>
-          </a:bodyPr>
-          <a:lstStyle/>
-          <a:p>
-            <a:pPr algn="l">
-              <a:lnSpc>
-                <a:spcPct val="112000"/>
-              </a:lnSpc>
-              <a:spcAft>
-                <a:spcPts val="600"/>
-              </a:spcAft>
-            </a:pPr>
-            <a:r>
-              <a:rPr sz="1800" b="0">
-                <a:solidFill>
-                  <a:srgbClr val="E7E8EA"/>
-                </a:solidFill>
-                <a:latin typeface="Instrument Sans"/>
-              </a:rPr>
-              <a:t>successful</a:t>
-            </a:r>
-          </a:p>
-        </p:txBody>
-      </p:sp>
-      <p:sp>
-        <p:nvSpPr>
-          <p:cNvPr id="136" name="TextBox 135"/>
-          <p:cNvSpPr txBox="1"/>
-          <p:nvPr/>
-        </p:nvSpPr>
-        <p:spPr>
-          <a:xfrm>
-            <a:off x="10561320" y="5760720"/>
-            <a:ext cx="2286000" cy="731520"/>
-          </a:xfrm>
-          <a:prstGeom prst="rect">
-            <a:avLst/>
-          </a:prstGeom>
-          <a:noFill/>
-        </p:spPr>
-        <p:txBody>
-          <a:bodyPr wrap="square" lIns="0" rIns="0" tIns="0" bIns="0" anchor="t">
-            <a:spAutoFit/>
-          </a:bodyPr>
-          <a:lstStyle/>
-          <a:p>
-            <a:pPr algn="l">
-              <a:lnSpc>
-                <a:spcPct val="90000"/>
-              </a:lnSpc>
-              <a:spcAft>
-                <a:spcPts val="600"/>
-              </a:spcAft>
-            </a:pPr>
-            <a:r>
-              <a:rPr sz="4400" b="1">
-                <a:solidFill>
-                  <a:srgbClr val="C6F24E"/>
-                </a:solidFill>
-                <a:latin typeface="Inter Tight"/>
-              </a:rPr>
-              <a:t>9</a:t>
-            </a:r>
-          </a:p>
-        </p:txBody>
-      </p:sp>
-      <p:sp>
-        <p:nvSpPr>
-          <p:cNvPr id="137" name="TextBox 136"/>
-          <p:cNvSpPr txBox="1"/>
-          <p:nvPr/>
-        </p:nvSpPr>
-        <p:spPr>
-          <a:xfrm>
-            <a:off x="10561320" y="6492240"/>
-            <a:ext cx="2240280" cy="640080"/>
-          </a:xfrm>
-          <a:prstGeom prst="rect">
-            <a:avLst/>
-          </a:prstGeom>
-          <a:noFill/>
-        </p:spPr>
-        <p:txBody>
-          <a:bodyPr wrap="square" lIns="0" rIns="0" tIns="0" bIns="0" anchor="t">
-            <a:spAutoFit/>
-          </a:bodyPr>
-          <a:lstStyle/>
-          <a:p>
-            <a:pPr algn="l">
-              <a:lnSpc>
-                <a:spcPct val="112000"/>
-              </a:lnSpc>
-              <a:spcAft>
-                <a:spcPts val="600"/>
-              </a:spcAft>
-            </a:pPr>
-            <a:r>
-              <a:rPr sz="1800" b="0">
-                <a:solidFill>
-                  <a:srgbClr val="E7E8EA"/>
-                </a:solidFill>
-                <a:latin typeface="Instrument Sans"/>
-              </a:rPr>
-              <a:t>refused (simulated)</a:t>
-            </a:r>
-          </a:p>
-        </p:txBody>
-      </p:sp>
-      <p:sp>
-        <p:nvSpPr>
-          <p:cNvPr id="138" name="TextBox 137"/>
-          <p:cNvSpPr txBox="1"/>
-          <p:nvPr/>
-        </p:nvSpPr>
-        <p:spPr>
-          <a:xfrm>
-            <a:off x="12893040" y="5760720"/>
-            <a:ext cx="2286000" cy="731520"/>
-          </a:xfrm>
-          <a:prstGeom prst="rect">
-            <a:avLst/>
-          </a:prstGeom>
-          <a:noFill/>
-        </p:spPr>
-        <p:txBody>
-          <a:bodyPr wrap="square" lIns="0" rIns="0" tIns="0" bIns="0" anchor="t">
-            <a:spAutoFit/>
-          </a:bodyPr>
-          <a:lstStyle/>
-          <a:p>
-            <a:pPr algn="l">
-              <a:lnSpc>
-                <a:spcPct val="90000"/>
-              </a:lnSpc>
-              <a:spcAft>
-                <a:spcPts val="600"/>
-              </a:spcAft>
-            </a:pPr>
-            <a:r>
-              <a:rPr sz="4400" b="1">
-                <a:solidFill>
-                  <a:srgbClr val="C6F24E"/>
-                </a:solidFill>
-                <a:latin typeface="Inter Tight"/>
-              </a:rPr>
-              <a:t>24</a:t>
-            </a:r>
-          </a:p>
-        </p:txBody>
-      </p:sp>
-      <p:sp>
-        <p:nvSpPr>
-          <p:cNvPr id="139" name="TextBox 138"/>
-          <p:cNvSpPr txBox="1"/>
-          <p:nvPr/>
-        </p:nvSpPr>
-        <p:spPr>
-          <a:xfrm>
-            <a:off x="12893040" y="6492240"/>
-            <a:ext cx="2240280" cy="640080"/>
-          </a:xfrm>
-          <a:prstGeom prst="rect">
-            <a:avLst/>
-          </a:prstGeom>
-          <a:noFill/>
-        </p:spPr>
-        <p:txBody>
-          <a:bodyPr wrap="square" lIns="0" rIns="0" tIns="0" bIns="0" anchor="t">
-            <a:spAutoFit/>
-          </a:bodyPr>
-          <a:lstStyle/>
-          <a:p>
-            <a:pPr algn="l">
-              <a:lnSpc>
-                <a:spcPct val="112000"/>
-              </a:lnSpc>
-              <a:spcAft>
-                <a:spcPts val="600"/>
-              </a:spcAft>
-            </a:pPr>
-            <a:r>
-              <a:rPr sz="1800" b="0">
-                <a:solidFill>
-                  <a:srgbClr val="E7E8EA"/>
-                </a:solidFill>
-                <a:latin typeface="Instrument Sans"/>
-              </a:rPr>
-              <a:t>unit tests</a:t>
-            </a:r>
-          </a:p>
-        </p:txBody>
-      </p:sp>
-      <p:sp>
-        <p:nvSpPr>
-          <p:cNvPr id="140" name="TextBox 139"/>
-          <p:cNvSpPr txBox="1"/>
-          <p:nvPr/>
-        </p:nvSpPr>
-        <p:spPr>
-          <a:xfrm>
-            <a:off x="15224759" y="5760720"/>
-            <a:ext cx="2286000" cy="731520"/>
-          </a:xfrm>
-          <a:prstGeom prst="rect">
-            <a:avLst/>
-          </a:prstGeom>
-          <a:noFill/>
-        </p:spPr>
-        <p:txBody>
-          <a:bodyPr wrap="square" lIns="0" rIns="0" tIns="0" bIns="0" anchor="t">
-            <a:spAutoFit/>
-          </a:bodyPr>
-          <a:lstStyle/>
-          <a:p>
-            <a:pPr algn="l">
-              <a:lnSpc>
-                <a:spcPct val="90000"/>
-              </a:lnSpc>
-              <a:spcAft>
-                <a:spcPts val="600"/>
-              </a:spcAft>
-            </a:pPr>
-            <a:r>
-              <a:rPr sz="4400" b="1">
-                <a:solidFill>
-                  <a:srgbClr val="C6F24E"/>
-                </a:solidFill>
-                <a:latin typeface="Inter Tight"/>
-              </a:rPr>
-              <a:t>MATCH</a:t>
-            </a:r>
-          </a:p>
-        </p:txBody>
-      </p:sp>
-      <p:sp>
-        <p:nvSpPr>
-          <p:cNvPr id="141" name="TextBox 140"/>
-          <p:cNvSpPr txBox="1"/>
-          <p:nvPr/>
-        </p:nvSpPr>
-        <p:spPr>
-          <a:xfrm>
-            <a:off x="15224759" y="6492240"/>
-            <a:ext cx="2240280" cy="640080"/>
-          </a:xfrm>
-          <a:prstGeom prst="rect">
-            <a:avLst/>
-          </a:prstGeom>
-          <a:noFill/>
-        </p:spPr>
-        <p:txBody>
-          <a:bodyPr wrap="square" lIns="0" rIns="0" tIns="0" bIns="0" anchor="t">
-            <a:spAutoFit/>
-          </a:bodyPr>
-          <a:lstStyle/>
-          <a:p>
-            <a:pPr algn="l">
-              <a:lnSpc>
-                <a:spcPct val="112000"/>
-              </a:lnSpc>
-              <a:spcAft>
-                <a:spcPts val="600"/>
-              </a:spcAft>
-            </a:pPr>
-            <a:r>
-              <a:rPr sz="1800" b="0">
-                <a:solidFill>
-                  <a:srgbClr val="E7E8EA"/>
-                </a:solidFill>
-                <a:latin typeface="Instrument Sans"/>
-              </a:rPr>
-              <a:t>head check, 25 Oct</a:t>
-            </a:r>
-          </a:p>
-        </p:txBody>
-      </p:sp>
-      <p:sp>
-        <p:nvSpPr>
-          <p:cNvPr id="142" name="TextBox 141"/>
-          <p:cNvSpPr txBox="1"/>
-          <p:nvPr/>
-        </p:nvSpPr>
-        <p:spPr>
-          <a:xfrm>
-            <a:off x="8229600" y="6903720"/>
-            <a:ext cx="9144000" cy="1463040"/>
-          </a:xfrm>
-          <a:prstGeom prst="rect">
-            <a:avLst/>
-          </a:prstGeom>
-          <a:noFill/>
-        </p:spPr>
-        <p:txBody>
-          <a:bodyPr wrap="square" lIns="0" rIns="0" tIns="0" bIns="0" anchor="t">
-            <a:spAutoFit/>
-          </a:bodyPr>
-          <a:lstStyle/>
-          <a:p>
-            <a:pPr algn="l">
-              <a:lnSpc>
-                <a:spcPct val="112000"/>
-              </a:lnSpc>
-              <a:spcAft>
-                <a:spcPts val="400"/>
-              </a:spcAft>
-            </a:pPr>
-            <a:r>
-              <a:rPr sz="1800" b="0">
-                <a:solidFill>
-                  <a:srgbClr val="A3A8B0"/>
-                </a:solidFill>
-                <a:latin typeface="JetBrains Mono"/>
-              </a:rPr>
-              <a:t>custody_registry </a:t>
-            </a:r>
-            <a:r>
-              <a:rPr sz="1800" b="0">
-                <a:solidFill>
-                  <a:srgbClr val="E7E8EA"/>
-                </a:solidFill>
-                <a:latin typeface="JetBrains Mono"/>
-              </a:rPr>
-              <a:t>CCBJVXMJYWPHTDJHDFPRGKPGXGEP24JOPJAMUS5C3BMZJTRTWR2H4LII</a:t>
-            </a:r>
-          </a:p>
-          <a:p>
-            <a:pPr algn="l">
-              <a:lnSpc>
-                <a:spcPct val="112000"/>
-              </a:lnSpc>
-              <a:spcAft>
-                <a:spcPts val="400"/>
-              </a:spcAft>
-            </a:pPr>
-            <a:r>
-              <a:rPr sz="1800" b="0">
-                <a:solidFill>
-                  <a:srgbClr val="A3A8B0"/>
-                </a:solidFill>
-                <a:latin typeface="Instrument Sans"/>
-              </a:rPr>
-              <a:t>Plus attestation 33379211. Second run (branch three-machine): two team members authorised handovers on their own computers and testnet keys.</a:t>
-            </a:r>
-          </a:p>
-          <a:p>
-            <a:pPr algn="l">
-              <a:lnSpc>
-                <a:spcPct val="112000"/>
-              </a:lnSpc>
-              <a:spcAft>
-                <a:spcPts val="400"/>
-              </a:spcAft>
-            </a:pPr>
-            <a:r>
-              <a:rPr sz="1800" b="1">
-                <a:solidFill>
-                  <a:srgbClr val="E7E8EA"/>
-                </a:solidFill>
-                <a:latin typeface="Instrument Sans"/>
-              </a:rPr>
-              <a:t>All test keys, mostly in one harness: it proves the mechanism, not independent custodians.</a:t>
+              <a:t>Keyed to the container number; would sit beside the carrier's bill of lading, not integrated. ¹ Radox policy, not enforced on-chain; redeem needs the holder's signature.</a:t>
             </a:r>
           </a:p>
         </p:txBody>
@@ -11617,7 +12072,7 @@
     <p:bg>
       <p:bgPr>
         <a:solidFill>
-          <a:srgbClr val="F7F6F2"/>
+          <a:srgbClr val="0E0F11"/>
         </a:solidFill>
       </p:bgPr>
     </p:bg>
@@ -11643,7 +12098,7 @@
             <a:avLst/>
           </a:prstGeom>
           <a:solidFill>
-            <a:srgbClr val="0F0F0F"/>
+            <a:srgbClr val="131517"/>
           </a:solidFill>
           <a:ln>
             <a:noFill/>
@@ -11823,7 +12278,7 @@
                 <a:cs typeface="JetBrains Mono"/>
                 <a:sym typeface="JetBrains Mono"/>
               </a:rPr>
-              <a:t>NEXT ▸ USERS AND MODEL</a:t>
+              <a:t>NEXT ▸ WHY STELLAR</a:t>
             </a:r>
             <a:endParaRPr/>
           </a:p>
@@ -11838,7 +12293,7 @@
         <p:spPr>
           <a:xfrm>
             <a:off x="914400" y="1417320"/>
-            <a:ext cx="3977639" cy="475488"/>
+            <a:ext cx="4526280" cy="475488"/>
           </a:xfrm>
           <a:prstGeom prst="roundRect">
             <a:avLst>
@@ -11877,7 +12332,7 @@
                 <a:cs typeface="JetBrains Mono"/>
                 <a:sym typeface="JetBrains Mono"/>
               </a:rPr>
-              <a:t>ECOSYSTEM · WHY STELLAR</a:t>
+              <a:t>THE PROOF · LIVE ON TESTNET</a:t>
             </a:r>
             <a:endParaRPr/>
           </a:p>
@@ -11898,7 +12353,7 @@
             <a:avLst/>
           </a:prstGeom>
           <a:solidFill>
-            <a:srgbClr val="DFDDD6"/>
+            <a:srgbClr val="2A2F36"/>
           </a:solidFill>
           <a:ln>
             <a:noFill/>
@@ -11971,7 +12426,7 @@
             <a:r>
               <a:rPr b="0" i="0" lang="en-US" sz="1200" u="none" cap="none" strike="noStrike">
                 <a:solidFill>
-                  <a:srgbClr val="5C5C5C"/>
+                  <a:srgbClr val="A3A8B0"/>
                 </a:solidFill>
                 <a:latin typeface="JetBrains Mono"/>
                 <a:ea typeface="JetBrains Mono"/>
@@ -12041,34 +12496,58 @@
             <a:r>
               <a:rPr sz="5800" b="1">
                 <a:solidFill>
-                  <a:srgbClr val="0E0F11"/>
+                  <a:srgbClr val="E7E8EA"/>
                 </a:solidFill>
                 <a:latin typeface="Inter Tight"/>
               </a:rPr>
-              <a:t>Why Stellar: two signers, one call</a:t>
-            </a:r>
-          </a:p>
-        </p:txBody>
-      </p:sp>
-      <p:sp>
-        <p:nvSpPr>
-          <p:cNvPr id="125" name="Rectangle 124"/>
+              <a:t>The whole chain ran on testnet</a:t>
+            </a:r>
+          </a:p>
+        </p:txBody>
+      </p:sp>
+      <p:pic>
+        <p:nvPicPr>
+          <p:cNvPr id="125" name="Picture 124" descr="page-handovers-rows.png"/>
+          <p:cNvPicPr>
+            <a:picLocks noChangeAspect="1"/>
+          </p:cNvPicPr>
+          <p:nvPr/>
+        </p:nvPicPr>
+        <p:blipFill>
+          <a:blip r:embed="rId3"/>
+          <a:stretch>
+            <a:fillRect/>
+          </a:stretch>
+        </p:blipFill>
+        <p:spPr>
+          <a:xfrm>
+            <a:off x="914400" y="3108960"/>
+            <a:ext cx="6766560" cy="4591594"/>
+          </a:xfrm>
+          <a:prstGeom prst="rect">
+            <a:avLst/>
+          </a:prstGeom>
+        </p:spPr>
+      </p:pic>
+      <p:sp>
+        <p:nvSpPr>
+          <p:cNvPr id="126" name="Rectangle 125"/>
           <p:cNvSpPr/>
           <p:nvPr/>
         </p:nvSpPr>
         <p:spPr>
           <a:xfrm>
-            <a:off x="914400" y="3127248"/>
-            <a:ext cx="16459200" cy="18288"/>
-          </a:xfrm>
-          <a:prstGeom prst="rect">
-            <a:avLst/>
-          </a:prstGeom>
-          <a:solidFill>
-            <a:srgbClr val="DFDDD6"/>
-          </a:solidFill>
-          <a:ln>
-            <a:noFill/>
+            <a:off x="914400" y="3108960"/>
+            <a:ext cx="6766560" cy="4591594"/>
+          </a:xfrm>
+          <a:prstGeom prst="rect">
+            <a:avLst/>
+          </a:prstGeom>
+          <a:noFill/>
+          <a:ln w="12700">
+            <a:solidFill>
+              <a:srgbClr val="2A2F36"/>
+            </a:solidFill>
           </a:ln>
           <a:effectLst/>
         </p:spPr>
@@ -12096,14 +12575,14 @@
       </p:sp>
       <p:sp>
         <p:nvSpPr>
-          <p:cNvPr id="126" name="TextBox 125"/>
+          <p:cNvPr id="127" name="TextBox 126"/>
           <p:cNvSpPr txBox="1"/>
           <p:nvPr/>
         </p:nvSpPr>
         <p:spPr>
           <a:xfrm>
-            <a:off x="914400" y="3319272"/>
-            <a:ext cx="914400" cy="548640"/>
+            <a:off x="8229600" y="3063240"/>
+            <a:ext cx="9144000" cy="365760"/>
           </a:xfrm>
           <a:prstGeom prst="rect">
             <a:avLst/>
@@ -12125,27 +12604,36 @@
               </a:spcAft>
             </a:pPr>
             <a:r>
-              <a:rPr sz="2400" b="1">
-                <a:solidFill>
-                  <a:srgbClr val="556F00"/>
+              <a:rPr sz="1800" b="0">
+                <a:solidFill>
+                  <a:srgbClr val="C6F24E"/>
                 </a:solidFill>
                 <a:latin typeface="JetBrains Mono"/>
               </a:rPr>
-              <a:t>01</a:t>
-            </a:r>
-          </a:p>
-        </p:txBody>
-      </p:sp>
-      <p:sp>
-        <p:nvSpPr>
-          <p:cNvPr id="127" name="TextBox 126"/>
+              <a:t>2b3d51f0</a:t>
+            </a:r>
+            <a:r>
+              <a:rPr sz="1800" b="0">
+                <a:solidFill>
+                  <a:srgbClr val="E7E8EA"/>
+                </a:solidFill>
+                <a:latin typeface="Instrument Sans"/>
+              </a:rPr>
+              <a:t>   open · operator</a:t>
+            </a:r>
+          </a:p>
+        </p:txBody>
+      </p:sp>
+      <p:sp>
+        <p:nvSpPr>
+          <p:cNvPr id="128" name="TextBox 127"/>
           <p:cNvSpPr txBox="1"/>
           <p:nvPr/>
         </p:nvSpPr>
         <p:spPr>
           <a:xfrm>
-            <a:off x="1828800" y="3246120"/>
-            <a:ext cx="5852160" cy="1097280"/>
+            <a:off x="8229600" y="3429000"/>
+            <a:ext cx="9144000" cy="365760"/>
           </a:xfrm>
           <a:prstGeom prst="rect">
             <a:avLst/>
@@ -12167,27 +12655,36 @@
               </a:spcAft>
             </a:pPr>
             <a:r>
-              <a:rPr sz="3000" b="1">
-                <a:solidFill>
-                  <a:srgbClr val="0E0F11"/>
-                </a:solidFill>
-                <a:latin typeface="Inter Tight"/>
+              <a:rPr sz="1800" b="0">
+                <a:solidFill>
+                  <a:srgbClr val="C6F24E"/>
+                </a:solidFill>
+                <a:latin typeface="JetBrains Mono"/>
               </a:rPr>
-              <a:t>Multi-party auth in one call</a:t>
-            </a:r>
-          </a:p>
-        </p:txBody>
-      </p:sp>
-      <p:sp>
-        <p:nvSpPr>
-          <p:cNvPr id="128" name="TextBox 127"/>
+              <a:t>635c99ac</a:t>
+            </a:r>
+            <a:r>
+              <a:rPr sz="1800" b="0">
+                <a:solidFill>
+                  <a:srgbClr val="E7E8EA"/>
+                </a:solidFill>
+                <a:latin typeface="Instrument Sans"/>
+              </a:rPr>
+              <a:t>   handover 1 · Warehouse → Port</a:t>
+            </a:r>
+          </a:p>
+        </p:txBody>
+      </p:sp>
+      <p:sp>
+        <p:nvSpPr>
+          <p:cNvPr id="129" name="TextBox 128"/>
           <p:cNvSpPr txBox="1"/>
           <p:nvPr/>
         </p:nvSpPr>
         <p:spPr>
           <a:xfrm>
-            <a:off x="7863840" y="3264408"/>
-            <a:ext cx="9509760" cy="1188720"/>
+            <a:off x="8229600" y="3794760"/>
+            <a:ext cx="9144000" cy="365760"/>
           </a:xfrm>
           <a:prstGeom prst="rect">
             <a:avLst/>
@@ -12209,58 +12706,23 @@
               </a:spcAft>
             </a:pPr>
             <a:r>
-              <a:rPr sz="2400" b="0">
-                <a:solidFill>
-                  <a:srgbClr val="0E0F11"/>
+              <a:rPr sz="1800" b="0">
+                <a:solidFill>
+                  <a:srgbClr val="C6F24E"/>
+                </a:solidFill>
+                <a:latin typeface="JetBrains Mono"/>
+              </a:rPr>
+              <a:t>56a0f006</a:t>
+            </a:r>
+            <a:r>
+              <a:rPr sz="1800" b="0">
+                <a:solidFill>
+                  <a:srgbClr val="E7E8EA"/>
                 </a:solidFill>
                 <a:latin typeface="Instrument Sans"/>
               </a:rPr>
-              <a:t>Soroban authorises both custodians inside one contract invocation: the handover is atomic.</a:t>
-            </a:r>
-          </a:p>
-        </p:txBody>
-      </p:sp>
-      <p:sp>
-        <p:nvSpPr>
-          <p:cNvPr id="129" name="Rectangle 128"/>
-          <p:cNvSpPr/>
-          <p:nvPr/>
-        </p:nvSpPr>
-        <p:spPr>
-          <a:xfrm>
-            <a:off x="914400" y="4498848"/>
-            <a:ext cx="16459200" cy="18288"/>
-          </a:xfrm>
-          <a:prstGeom prst="rect">
-            <a:avLst/>
-          </a:prstGeom>
-          <a:solidFill>
-            <a:srgbClr val="DFDDD6"/>
-          </a:solidFill>
-          <a:ln>
-            <a:noFill/>
-          </a:ln>
-          <a:effectLst/>
-        </p:spPr>
-        <p:style>
-          <a:lnRef idx="1">
-            <a:schemeClr val="accent1"/>
-          </a:lnRef>
-          <a:fillRef idx="3">
-            <a:schemeClr val="accent1"/>
-          </a:fillRef>
-          <a:effectRef idx="0">
-            <a:schemeClr val="accent1"/>
-          </a:effectRef>
-          <a:fontRef idx="minor">
-            <a:schemeClr val="lt1"/>
-          </a:fontRef>
-        </p:style>
-        <p:txBody>
-          <a:bodyPr rtlCol="0" anchor="ctr"/>
-          <a:lstStyle/>
-          <a:p>
-            <a:pPr algn="ctr"/>
+              <a:t>   handover 2 · Port → Carrier</a:t>
+            </a:r>
           </a:p>
         </p:txBody>
       </p:sp>
@@ -12272,8 +12734,8 @@
         </p:nvSpPr>
         <p:spPr>
           <a:xfrm>
-            <a:off x="914400" y="4690872"/>
-            <a:ext cx="914400" cy="548640"/>
+            <a:off x="8229600" y="4160520"/>
+            <a:ext cx="9144000" cy="365760"/>
           </a:xfrm>
           <a:prstGeom prst="rect">
             <a:avLst/>
@@ -12295,13 +12757,22 @@
               </a:spcAft>
             </a:pPr>
             <a:r>
-              <a:rPr sz="2400" b="1">
-                <a:solidFill>
-                  <a:srgbClr val="556F00"/>
+              <a:rPr sz="1800" b="0">
+                <a:solidFill>
+                  <a:srgbClr val="C6F24E"/>
                 </a:solidFill>
                 <a:latin typeface="JetBrains Mono"/>
               </a:rPr>
-              <a:t>02</a:t>
+              <a:t>ac268a49</a:t>
+            </a:r>
+            <a:r>
+              <a:rPr sz="1800" b="0">
+                <a:solidFill>
+                  <a:srgbClr val="E7E8EA"/>
+                </a:solidFill>
+                <a:latin typeface="Instrument Sans"/>
+              </a:rPr>
+              <a:t>   handover 3 · Carrier → Customs</a:t>
             </a:r>
           </a:p>
         </p:txBody>
@@ -12314,8 +12785,8 @@
         </p:nvSpPr>
         <p:spPr>
           <a:xfrm>
-            <a:off x="1828800" y="4617720"/>
-            <a:ext cx="5852160" cy="1097280"/>
+            <a:off x="8229600" y="4526280"/>
+            <a:ext cx="9144000" cy="365760"/>
           </a:xfrm>
           <a:prstGeom prst="rect">
             <a:avLst/>
@@ -12337,13 +12808,22 @@
               </a:spcAft>
             </a:pPr>
             <a:r>
-              <a:rPr sz="3000" b="1">
-                <a:solidFill>
-                  <a:srgbClr val="0E0F11"/>
-                </a:solidFill>
-                <a:latin typeface="Inter Tight"/>
+              <a:rPr sz="1800" b="0">
+                <a:solidFill>
+                  <a:srgbClr val="C6F24E"/>
+                </a:solidFill>
+                <a:latin typeface="JetBrains Mono"/>
               </a:rPr>
-              <a:t>Events plus an on-chain head</a:t>
+              <a:t>5199d4fb</a:t>
+            </a:r>
+            <a:r>
+              <a:rPr sz="1800" b="0">
+                <a:solidFill>
+                  <a:srgbClr val="E7E8EA"/>
+                </a:solidFill>
+                <a:latin typeface="Instrument Sans"/>
+              </a:rPr>
+              <a:t>   handover 4 · Customs → Recipient</a:t>
             </a:r>
           </a:p>
         </p:txBody>
@@ -12356,8 +12836,8 @@
         </p:nvSpPr>
         <p:spPr>
           <a:xfrm>
-            <a:off x="7863840" y="4636007"/>
-            <a:ext cx="9509760" cy="1188720"/>
+            <a:off x="8229600" y="4892040"/>
+            <a:ext cx="9144000" cy="365760"/>
           </a:xfrm>
           <a:prstGeom prst="rect">
             <a:avLst/>
@@ -12379,71 +12859,36 @@
               </a:spcAft>
             </a:pPr>
             <a:r>
-              <a:rPr sz="2400" b="0">
-                <a:solidFill>
-                  <a:srgbClr val="0E0F11"/>
+              <a:rPr sz="1800" b="0">
+                <a:solidFill>
+                  <a:srgbClr val="C6F24E"/>
+                </a:solidFill>
+                <a:latin typeface="JetBrains Mono"/>
+              </a:rPr>
+              <a:t>919def8c</a:t>
+            </a:r>
+            <a:r>
+              <a:rPr sz="1800" b="0">
+                <a:solidFill>
+                  <a:srgbClr val="E7E8EA"/>
                 </a:solidFill>
                 <a:latin typeface="Instrument Sans"/>
               </a:rPr>
-              <a:t>RPC keeps contract events about 7 days. The head stored in the contract lets anyone rebuild the full history later.</a:t>
-            </a:r>
-          </a:p>
-        </p:txBody>
-      </p:sp>
-      <p:sp>
-        <p:nvSpPr>
-          <p:cNvPr id="133" name="Rectangle 132"/>
-          <p:cNvSpPr/>
-          <p:nvPr/>
-        </p:nvSpPr>
-        <p:spPr>
-          <a:xfrm>
-            <a:off x="914400" y="5870448"/>
-            <a:ext cx="16459200" cy="18288"/>
-          </a:xfrm>
-          <a:prstGeom prst="rect">
-            <a:avLst/>
-          </a:prstGeom>
-          <a:solidFill>
-            <a:srgbClr val="DFDDD6"/>
-          </a:solidFill>
-          <a:ln>
-            <a:noFill/>
-          </a:ln>
-          <a:effectLst/>
-        </p:spPr>
-        <p:style>
-          <a:lnRef idx="1">
-            <a:schemeClr val="accent1"/>
-          </a:lnRef>
-          <a:fillRef idx="3">
-            <a:schemeClr val="accent1"/>
-          </a:fillRef>
-          <a:effectRef idx="0">
-            <a:schemeClr val="accent1"/>
-          </a:effectRef>
-          <a:fontRef idx="minor">
-            <a:schemeClr val="lt1"/>
-          </a:fontRef>
-        </p:style>
-        <p:txBody>
-          <a:bodyPr rtlCol="0" anchor="ctr"/>
-          <a:lstStyle/>
-          <a:p>
-            <a:pPr algn="ctr"/>
-          </a:p>
-        </p:txBody>
-      </p:sp>
-      <p:sp>
-        <p:nvSpPr>
-          <p:cNvPr id="134" name="TextBox 133"/>
+              <a:t>   deliver · Recipient → Holder</a:t>
+            </a:r>
+          </a:p>
+        </p:txBody>
+      </p:sp>
+      <p:sp>
+        <p:nvSpPr>
+          <p:cNvPr id="133" name="TextBox 132"/>
           <p:cNvSpPr txBox="1"/>
           <p:nvPr/>
         </p:nvSpPr>
         <p:spPr>
           <a:xfrm>
-            <a:off x="914400" y="6062472"/>
-            <a:ext cx="914400" cy="548640"/>
+            <a:off x="8229600" y="5257800"/>
+            <a:ext cx="9144000" cy="365760"/>
           </a:xfrm>
           <a:prstGeom prst="rect">
             <a:avLst/>
@@ -12465,13 +12910,64 @@
               </a:spcAft>
             </a:pPr>
             <a:r>
-              <a:rPr sz="2400" b="1">
-                <a:solidFill>
-                  <a:srgbClr val="556F00"/>
+              <a:rPr sz="1800" b="0">
+                <a:solidFill>
+                  <a:srgbClr val="C6F24E"/>
                 </a:solidFill>
                 <a:latin typeface="JetBrains Mono"/>
               </a:rPr>
-              <a:t>03</a:t>
+              <a:t>864fd164</a:t>
+            </a:r>
+            <a:r>
+              <a:rPr sz="1800" b="0">
+                <a:solidFill>
+                  <a:srgbClr val="E7E8EA"/>
+                </a:solidFill>
+                <a:latin typeface="Instrument Sans"/>
+              </a:rPr>
+              <a:t>   burn · existing redeem</a:t>
+            </a:r>
+          </a:p>
+        </p:txBody>
+      </p:sp>
+      <p:sp>
+        <p:nvSpPr>
+          <p:cNvPr id="134" name="TextBox 133"/>
+          <p:cNvSpPr txBox="1"/>
+          <p:nvPr/>
+        </p:nvSpPr>
+        <p:spPr>
+          <a:xfrm>
+            <a:off x="8229600" y="5760720"/>
+            <a:ext cx="2286000" cy="731520"/>
+          </a:xfrm>
+          <a:prstGeom prst="rect">
+            <a:avLst/>
+          </a:prstGeom>
+          <a:noFill/>
+        </p:spPr>
+        <p:txBody>
+          <a:bodyPr wrap="square" lIns="0" rIns="0" tIns="0" bIns="0" anchor="t">
+            <a:spAutoFit/>
+          </a:bodyPr>
+          <a:lstStyle/>
+          <a:p>
+            <a:pPr algn="l">
+              <a:lnSpc>
+                <a:spcPct val="90000"/>
+              </a:lnSpc>
+              <a:spcAft>
+                <a:spcPts val="600"/>
+              </a:spcAft>
+            </a:pPr>
+            <a:r>
+              <a:rPr sz="4400" b="1">
+                <a:solidFill>
+                  <a:srgbClr val="C6F24E"/>
+                </a:solidFill>
+                <a:latin typeface="Inter Tight"/>
+              </a:rPr>
+              <a:t>7</a:t>
             </a:r>
           </a:p>
         </p:txBody>
@@ -12484,8 +12980,8 @@
         </p:nvSpPr>
         <p:spPr>
           <a:xfrm>
-            <a:off x="1828800" y="5989320"/>
-            <a:ext cx="5852160" cy="1097280"/>
+            <a:off x="8229600" y="6492240"/>
+            <a:ext cx="2240280" cy="640080"/>
           </a:xfrm>
           <a:prstGeom prst="rect">
             <a:avLst/>
@@ -12507,27 +13003,69 @@
               </a:spcAft>
             </a:pPr>
             <a:r>
-              <a:rPr sz="3000" b="1">
-                <a:solidFill>
-                  <a:srgbClr val="0E0F11"/>
+              <a:rPr sz="1800" b="0">
+                <a:solidFill>
+                  <a:srgbClr val="E7E8EA"/>
+                </a:solidFill>
+                <a:latin typeface="Instrument Sans"/>
+              </a:rPr>
+              <a:t>successful</a:t>
+            </a:r>
+          </a:p>
+        </p:txBody>
+      </p:sp>
+      <p:sp>
+        <p:nvSpPr>
+          <p:cNvPr id="136" name="TextBox 135"/>
+          <p:cNvSpPr txBox="1"/>
+          <p:nvPr/>
+        </p:nvSpPr>
+        <p:spPr>
+          <a:xfrm>
+            <a:off x="10561320" y="5760720"/>
+            <a:ext cx="2286000" cy="731520"/>
+          </a:xfrm>
+          <a:prstGeom prst="rect">
+            <a:avLst/>
+          </a:prstGeom>
+          <a:noFill/>
+        </p:spPr>
+        <p:txBody>
+          <a:bodyPr wrap="square" lIns="0" rIns="0" tIns="0" bIns="0" anchor="t">
+            <a:spAutoFit/>
+          </a:bodyPr>
+          <a:lstStyle/>
+          <a:p>
+            <a:pPr algn="l">
+              <a:lnSpc>
+                <a:spcPct val="90000"/>
+              </a:lnSpc>
+              <a:spcAft>
+                <a:spcPts val="600"/>
+              </a:spcAft>
+            </a:pPr>
+            <a:r>
+              <a:rPr sz="4400" b="1">
+                <a:solidFill>
+                  <a:srgbClr val="C6F24E"/>
                 </a:solidFill>
                 <a:latin typeface="Inter Tight"/>
               </a:rPr>
-              <a:t>The token stays put, then burns</a:t>
-            </a:r>
-          </a:p>
-        </p:txBody>
-      </p:sp>
-      <p:sp>
-        <p:nvSpPr>
-          <p:cNvPr id="136" name="TextBox 135"/>
+              <a:t>9</a:t>
+            </a:r>
+          </a:p>
+        </p:txBody>
+      </p:sp>
+      <p:sp>
+        <p:nvSpPr>
+          <p:cNvPr id="137" name="TextBox 136"/>
           <p:cNvSpPr txBox="1"/>
           <p:nvPr/>
         </p:nvSpPr>
         <p:spPr>
           <a:xfrm>
-            <a:off x="7863840" y="6007607"/>
-            <a:ext cx="9509760" cy="1188720"/>
+            <a:off x="10561320" y="6492240"/>
+            <a:ext cx="2240280" cy="640080"/>
           </a:xfrm>
           <a:prstGeom prst="rect">
             <a:avLst/>
@@ -12549,58 +13087,14 @@
               </a:spcAft>
             </a:pPr>
             <a:r>
-              <a:rPr sz="2400" b="0">
-                <a:solidFill>
-                  <a:srgbClr val="0E0F11"/>
+              <a:rPr sz="1800" b="0">
+                <a:solidFill>
+                  <a:srgbClr val="E7E8EA"/>
                 </a:solidFill>
                 <a:latin typeface="Instrument Sans"/>
               </a:rPr>
-              <a:t>The shipment token never moves in transit; the existing Radox redeem burns it after delivery.</a:t>
-            </a:r>
-          </a:p>
-        </p:txBody>
-      </p:sp>
-      <p:sp>
-        <p:nvSpPr>
-          <p:cNvPr id="137" name="Rectangle 136"/>
-          <p:cNvSpPr/>
-          <p:nvPr/>
-        </p:nvSpPr>
-        <p:spPr>
-          <a:xfrm>
-            <a:off x="914400" y="7242048"/>
-            <a:ext cx="16459200" cy="18288"/>
-          </a:xfrm>
-          <a:prstGeom prst="rect">
-            <a:avLst/>
-          </a:prstGeom>
-          <a:solidFill>
-            <a:srgbClr val="DFDDD6"/>
-          </a:solidFill>
-          <a:ln>
-            <a:noFill/>
-          </a:ln>
-          <a:effectLst/>
-        </p:spPr>
-        <p:style>
-          <a:lnRef idx="1">
-            <a:schemeClr val="accent1"/>
-          </a:lnRef>
-          <a:fillRef idx="3">
-            <a:schemeClr val="accent1"/>
-          </a:fillRef>
-          <a:effectRef idx="0">
-            <a:schemeClr val="accent1"/>
-          </a:effectRef>
-          <a:fontRef idx="minor">
-            <a:schemeClr val="lt1"/>
-          </a:fontRef>
-        </p:style>
-        <p:txBody>
-          <a:bodyPr rtlCol="0" anchor="ctr"/>
-          <a:lstStyle/>
-          <a:p>
-            <a:pPr algn="ctr"/>
+              <a:t>refused (simulated)</a:t>
+            </a:r>
           </a:p>
         </p:txBody>
       </p:sp>
@@ -12612,8 +13106,50 @@
         </p:nvSpPr>
         <p:spPr>
           <a:xfrm>
-            <a:off x="914400" y="7424927"/>
-            <a:ext cx="16459200" cy="1371600"/>
+            <a:off x="12893040" y="5760720"/>
+            <a:ext cx="2286000" cy="731520"/>
+          </a:xfrm>
+          <a:prstGeom prst="rect">
+            <a:avLst/>
+          </a:prstGeom>
+          <a:noFill/>
+        </p:spPr>
+        <p:txBody>
+          <a:bodyPr wrap="square" lIns="0" rIns="0" tIns="0" bIns="0" anchor="t">
+            <a:spAutoFit/>
+          </a:bodyPr>
+          <a:lstStyle/>
+          <a:p>
+            <a:pPr algn="l">
+              <a:lnSpc>
+                <a:spcPct val="90000"/>
+              </a:lnSpc>
+              <a:spcAft>
+                <a:spcPts val="600"/>
+              </a:spcAft>
+            </a:pPr>
+            <a:r>
+              <a:rPr sz="4400" b="1">
+                <a:solidFill>
+                  <a:srgbClr val="C6F24E"/>
+                </a:solidFill>
+                <a:latin typeface="Inter Tight"/>
+              </a:rPr>
+              <a:t>24</a:t>
+            </a:r>
+          </a:p>
+        </p:txBody>
+      </p:sp>
+      <p:sp>
+        <p:nvSpPr>
+          <p:cNvPr id="139" name="TextBox 138"/>
+          <p:cNvSpPr txBox="1"/>
+          <p:nvPr/>
+        </p:nvSpPr>
+        <p:spPr>
+          <a:xfrm>
+            <a:off x="12893040" y="6492240"/>
+            <a:ext cx="2240280" cy="640080"/>
           </a:xfrm>
           <a:prstGeom prst="rect">
             <a:avLst/>
@@ -12635,33 +13171,80 @@
               </a:spcAft>
             </a:pPr>
             <a:r>
-              <a:rPr sz="2100" b="1">
-                <a:solidFill>
-                  <a:srgbClr val="0E0F11"/>
+              <a:rPr sz="1800" b="0">
+                <a:solidFill>
+                  <a:srgbClr val="E7E8EA"/>
                 </a:solidFill>
                 <a:latin typeface="Instrument Sans"/>
               </a:rPr>
-              <a:t>Nearest neighbours we found on Stellar </a:t>
-            </a:r>
-            <a:r>
-              <a:rPr sz="2100" b="0">
-                <a:solidFill>
-                  <a:srgbClr val="4D5560"/>
-                </a:solidFill>
-                <a:latin typeface="Instrument Sans"/>
+              <a:t>unit tests</a:t>
+            </a:r>
+          </a:p>
+        </p:txBody>
+      </p:sp>
+      <p:sp>
+        <p:nvSpPr>
+          <p:cNvPr id="140" name="TextBox 139"/>
+          <p:cNvSpPr txBox="1"/>
+          <p:nvPr/>
+        </p:nvSpPr>
+        <p:spPr>
+          <a:xfrm>
+            <a:off x="15224759" y="5760720"/>
+            <a:ext cx="2286000" cy="731520"/>
+          </a:xfrm>
+          <a:prstGeom prst="rect">
+            <a:avLst/>
+          </a:prstGeom>
+          <a:noFill/>
+        </p:spPr>
+        <p:txBody>
+          <a:bodyPr wrap="square" lIns="0" rIns="0" tIns="0" bIns="0" anchor="t">
+            <a:spAutoFit/>
+          </a:bodyPr>
+          <a:lstStyle/>
+          <a:p>
+            <a:pPr algn="l">
+              <a:lnSpc>
+                <a:spcPct val="90000"/>
+              </a:lnSpc>
+              <a:spcAft>
+                <a:spcPts val="600"/>
+              </a:spcAft>
+            </a:pPr>
+            <a:r>
+              <a:rPr sz="4400" b="1">
+                <a:solidFill>
+                  <a:srgbClr val="C6F24E"/>
+                </a:solidFill>
+                <a:latin typeface="Inter Tight"/>
               </a:rPr>
-              <a:t>(LumenLoop, SCF, Scout, 24–25 Oct): </a:t>
-            </a:r>
-            <a:r>
-              <a:rPr sz="2100" b="0">
-                <a:solidFill>
-                  <a:srgbClr val="0E0F11"/>
-                </a:solidFill>
-                <a:latin typeface="Instrument Sans"/>
-              </a:rPr>
-              <a:t>Kutana and Trustless Work release escrow on trade milestones; Pipeline finances commodity trade. We found none that records a custody handover signed by two custodians, and no SEP.</a:t>
-            </a:r>
-          </a:p>
+              <a:t>MATCH</a:t>
+            </a:r>
+          </a:p>
+        </p:txBody>
+      </p:sp>
+      <p:sp>
+        <p:nvSpPr>
+          <p:cNvPr id="141" name="TextBox 140"/>
+          <p:cNvSpPr txBox="1"/>
+          <p:nvPr/>
+        </p:nvSpPr>
+        <p:spPr>
+          <a:xfrm>
+            <a:off x="15224759" y="6492240"/>
+            <a:ext cx="2240280" cy="640080"/>
+          </a:xfrm>
+          <a:prstGeom prst="rect">
+            <a:avLst/>
+          </a:prstGeom>
+          <a:noFill/>
+        </p:spPr>
+        <p:txBody>
+          <a:bodyPr wrap="square" lIns="0" rIns="0" tIns="0" bIns="0" anchor="t">
+            <a:spAutoFit/>
+          </a:bodyPr>
+          <a:lstStyle/>
           <a:p>
             <a:pPr algn="l">
               <a:lnSpc>
@@ -12672,22 +13255,102 @@
               </a:spcAft>
             </a:pPr>
             <a:r>
-              <a:rPr sz="2100" b="1">
-                <a:solidFill>
-                  <a:srgbClr val="556F00"/>
+              <a:rPr sz="1800" b="0">
+                <a:solidFill>
+                  <a:srgbClr val="E7E8EA"/>
                 </a:solidFill>
                 <a:latin typeface="Instrument Sans"/>
               </a:rPr>
-              <a:t>Open source, Apache-2.0: </a:t>
-            </a:r>
-            <a:r>
-              <a:rPr sz="2100" b="0">
-                <a:solidFill>
-                  <a:srgbClr val="0E0F11"/>
+              <a:t>head check, 25 Oct</a:t>
+            </a:r>
+          </a:p>
+        </p:txBody>
+      </p:sp>
+      <p:sp>
+        <p:nvSpPr>
+          <p:cNvPr id="142" name="TextBox 141"/>
+          <p:cNvSpPr txBox="1"/>
+          <p:nvPr/>
+        </p:nvSpPr>
+        <p:spPr>
+          <a:xfrm>
+            <a:off x="8229600" y="6858000"/>
+            <a:ext cx="9144000" cy="1463040"/>
+          </a:xfrm>
+          <a:prstGeom prst="rect">
+            <a:avLst/>
+          </a:prstGeom>
+          <a:noFill/>
+        </p:spPr>
+        <p:txBody>
+          <a:bodyPr wrap="square" lIns="0" rIns="0" tIns="0" bIns="0" anchor="t">
+            <a:spAutoFit/>
+          </a:bodyPr>
+          <a:lstStyle/>
+          <a:p>
+            <a:pPr algn="l">
+              <a:lnSpc>
+                <a:spcPct val="112000"/>
+              </a:lnSpc>
+              <a:spcAft>
+                <a:spcPts val="400"/>
+              </a:spcAft>
+            </a:pPr>
+            <a:r>
+              <a:rPr sz="1800" b="0">
+                <a:solidFill>
+                  <a:srgbClr val="A3A8B0"/>
+                </a:solidFill>
+                <a:latin typeface="JetBrains Mono"/>
+              </a:rPr>
+              <a:t>custody_registry </a:t>
+            </a:r>
+            <a:r>
+              <a:rPr sz="1800" b="0">
+                <a:solidFill>
+                  <a:srgbClr val="E7E8EA"/>
+                </a:solidFill>
+                <a:latin typeface="JetBrains Mono"/>
+              </a:rPr>
+              <a:t>CCBJVXMJYWPHTDJHDFPRGKPGXGEP24JOPJAMUS5C3BMZJTRTWR2H4LII</a:t>
+            </a:r>
+          </a:p>
+          <a:p>
+            <a:pPr algn="l">
+              <a:lnSpc>
+                <a:spcPct val="112000"/>
+              </a:lnSpc>
+              <a:spcAft>
+                <a:spcPts val="400"/>
+              </a:spcAft>
+            </a:pPr>
+            <a:r>
+              <a:rPr sz="1800" b="0">
+                <a:solidFill>
+                  <a:srgbClr val="A3A8B0"/>
                 </a:solidFill>
                 <a:latin typeface="Instrument Sans"/>
               </a:rPr>
-              <a:t>a custody primitive other Stellar real-world-asset issuers can reuse.</a:t>
+              <a:t>Second run (branch three-machine): two team members, as two companies, signed from their own computers and testnet keys.</a:t>
+            </a:r>
+          </a:p>
+          <a:p>
+            <a:pPr algn="l">
+              <a:lnSpc>
+                <a:spcPct val="112000"/>
+              </a:lnSpc>
+              <a:spcAft>
+                <a:spcPts val="400"/>
+              </a:spcAft>
+            </a:pPr>
+            <a:r>
+              <a:rPr sz="1800" b="1">
+                <a:solidFill>
+                  <a:srgbClr val="E7E8EA"/>
+                </a:solidFill>
+                <a:latin typeface="Instrument Sans"/>
+              </a:rPr>
+              <a:t>All test keys: this proves the mechanism, not independent companies.</a:t>
             </a:r>
           </a:p>
         </p:txBody>
@@ -12927,7 +13590,7 @@
         <p:spPr>
           <a:xfrm>
             <a:off x="914400" y="1417320"/>
-            <a:ext cx="3840480" cy="475488"/>
+            <a:ext cx="3977639" cy="475488"/>
           </a:xfrm>
           <a:prstGeom prst="roundRect">
             <a:avLst>
@@ -12966,7 +13629,7 @@
                 <a:cs typeface="JetBrains Mono"/>
                 <a:sym typeface="JetBrains Mono"/>
               </a:rPr>
-              <a:t>USERS · BUSINESS MODEL</a:t>
+              <a:t>ECOSYSTEM · WHY STELLAR</a:t>
             </a:r>
             <a:endParaRPr/>
           </a:p>
@@ -13134,419 +13797,27 @@
                 </a:solidFill>
                 <a:latin typeface="Inter Tight"/>
               </a:rPr>
-              <a:t>Integrate once, reach every party that joins</a:t>
-            </a:r>
-          </a:p>
-        </p:txBody>
-      </p:sp>
-      <p:sp>
-        <p:nvSpPr>
-          <p:cNvPr id="125" name="TextBox 124"/>
-          <p:cNvSpPr txBox="1"/>
-          <p:nvPr/>
-        </p:nvSpPr>
-        <p:spPr>
-          <a:xfrm>
-            <a:off x="914400" y="3063240"/>
-            <a:ext cx="16459200" cy="1097280"/>
-          </a:xfrm>
-          <a:prstGeom prst="rect">
-            <a:avLst/>
-          </a:prstGeom>
-          <a:noFill/>
-        </p:spPr>
-        <p:txBody>
-          <a:bodyPr wrap="square" lIns="0" rIns="0" tIns="0" bIns="0" anchor="t">
-            <a:spAutoFit/>
-          </a:bodyPr>
-          <a:lstStyle/>
-          <a:p>
-            <a:pPr algn="l">
-              <a:lnSpc>
-                <a:spcPct val="112000"/>
-              </a:lnSpc>
-              <a:spcAft>
-                <a:spcPts val="600"/>
-              </a:spcAft>
-            </a:pPr>
-            <a:r>
-              <a:rPr sz="2400" b="0">
-                <a:solidFill>
-                  <a:srgbClr val="0E0F11"/>
-                </a:solidFill>
-                <a:latin typeface="Instrument Sans"/>
-              </a:rPr>
-              <a:t>With one public custody standard, a port, airport, carrier, chamber or financier would integrate once and reach every other party: adopt without a custom project.</a:t>
-            </a:r>
-          </a:p>
-        </p:txBody>
-      </p:sp>
-      <p:cxnSp>
-        <p:nvCxnSpPr>
-          <p:cNvPr id="126" name="Connector 125"/>
-          <p:cNvCxnSpPr/>
-          <p:nvPr/>
-        </p:nvCxnSpPr>
-        <p:spPr>
-          <a:xfrm>
-            <a:off x="2560320" y="4572000"/>
-            <a:ext cx="826163" cy="600243"/>
-          </a:xfrm>
-          <a:prstGeom prst="line">
-            <a:avLst/>
-          </a:prstGeom>
-          <a:ln w="15875">
-            <a:solidFill>
-              <a:srgbClr val="4D5560"/>
-            </a:solidFill>
-          </a:ln>
-        </p:spPr>
-        <p:style>
-          <a:lnRef idx="2">
-            <a:schemeClr val="accent1"/>
-          </a:lnRef>
-          <a:fillRef idx="0">
-            <a:schemeClr val="accent1"/>
-          </a:fillRef>
-          <a:effectRef idx="1">
-            <a:schemeClr val="accent1"/>
-          </a:effectRef>
-          <a:fontRef idx="minor">
-            <a:schemeClr val="tx1"/>
-          </a:fontRef>
-        </p:style>
-      </p:cxnSp>
-      <p:cxnSp>
-        <p:nvCxnSpPr>
-          <p:cNvPr id="127" name="Connector 126"/>
-          <p:cNvCxnSpPr/>
-          <p:nvPr/>
-        </p:nvCxnSpPr>
-        <p:spPr>
-          <a:xfrm>
-            <a:off x="2560320" y="4572000"/>
-            <a:ext cx="510597" cy="1571456"/>
-          </a:xfrm>
-          <a:prstGeom prst="line">
-            <a:avLst/>
-          </a:prstGeom>
-          <a:ln w="15875">
-            <a:solidFill>
-              <a:srgbClr val="4D5560"/>
-            </a:solidFill>
-          </a:ln>
-        </p:spPr>
-        <p:style>
-          <a:lnRef idx="2">
-            <a:schemeClr val="accent1"/>
-          </a:lnRef>
-          <a:fillRef idx="0">
-            <a:schemeClr val="accent1"/>
-          </a:fillRef>
-          <a:effectRef idx="1">
-            <a:schemeClr val="accent1"/>
-          </a:effectRef>
-          <a:fontRef idx="minor">
-            <a:schemeClr val="tx1"/>
-          </a:fontRef>
-        </p:style>
-      </p:cxnSp>
-      <p:cxnSp>
-        <p:nvCxnSpPr>
-          <p:cNvPr id="128" name="Connector 127"/>
-          <p:cNvCxnSpPr/>
-          <p:nvPr/>
-        </p:nvCxnSpPr>
-        <p:spPr>
-          <a:xfrm flipH="1">
-            <a:off x="2049722" y="4572000"/>
-            <a:ext cx="510598" cy="1571456"/>
-          </a:xfrm>
-          <a:prstGeom prst="line">
-            <a:avLst/>
-          </a:prstGeom>
-          <a:ln w="15875">
-            <a:solidFill>
-              <a:srgbClr val="4D5560"/>
-            </a:solidFill>
-          </a:ln>
-        </p:spPr>
-        <p:style>
-          <a:lnRef idx="2">
-            <a:schemeClr val="accent1"/>
-          </a:lnRef>
-          <a:fillRef idx="0">
-            <a:schemeClr val="accent1"/>
-          </a:fillRef>
-          <a:effectRef idx="1">
-            <a:schemeClr val="accent1"/>
-          </a:effectRef>
-          <a:fontRef idx="minor">
-            <a:schemeClr val="tx1"/>
-          </a:fontRef>
-        </p:style>
-      </p:cxnSp>
-      <p:cxnSp>
-        <p:nvCxnSpPr>
-          <p:cNvPr id="129" name="Connector 128"/>
-          <p:cNvCxnSpPr/>
-          <p:nvPr/>
-        </p:nvCxnSpPr>
-        <p:spPr>
-          <a:xfrm flipH="1">
-            <a:off x="1734156" y="4572000"/>
-            <a:ext cx="826164" cy="600243"/>
-          </a:xfrm>
-          <a:prstGeom prst="line">
-            <a:avLst/>
-          </a:prstGeom>
-          <a:ln w="15875">
-            <a:solidFill>
-              <a:srgbClr val="4D5560"/>
-            </a:solidFill>
-          </a:ln>
-        </p:spPr>
-        <p:style>
-          <a:lnRef idx="2">
-            <a:schemeClr val="accent1"/>
-          </a:lnRef>
-          <a:fillRef idx="0">
-            <a:schemeClr val="accent1"/>
-          </a:fillRef>
-          <a:effectRef idx="1">
-            <a:schemeClr val="accent1"/>
-          </a:effectRef>
-          <a:fontRef idx="minor">
-            <a:schemeClr val="tx1"/>
-          </a:fontRef>
-        </p:style>
-      </p:cxnSp>
-      <p:cxnSp>
-        <p:nvCxnSpPr>
-          <p:cNvPr id="130" name="Connector 129"/>
-          <p:cNvCxnSpPr/>
-          <p:nvPr/>
-        </p:nvCxnSpPr>
-        <p:spPr>
-          <a:xfrm flipH="1">
-            <a:off x="3070917" y="5172243"/>
-            <a:ext cx="315566" cy="971213"/>
-          </a:xfrm>
-          <a:prstGeom prst="line">
-            <a:avLst/>
-          </a:prstGeom>
-          <a:ln w="15875">
-            <a:solidFill>
-              <a:srgbClr val="4D5560"/>
-            </a:solidFill>
-          </a:ln>
-        </p:spPr>
-        <p:style>
-          <a:lnRef idx="2">
-            <a:schemeClr val="accent1"/>
-          </a:lnRef>
-          <a:fillRef idx="0">
-            <a:schemeClr val="accent1"/>
-          </a:fillRef>
-          <a:effectRef idx="1">
-            <a:schemeClr val="accent1"/>
-          </a:effectRef>
-          <a:fontRef idx="minor">
-            <a:schemeClr val="tx1"/>
-          </a:fontRef>
-        </p:style>
-      </p:cxnSp>
-      <p:cxnSp>
-        <p:nvCxnSpPr>
-          <p:cNvPr id="131" name="Connector 130"/>
-          <p:cNvCxnSpPr/>
-          <p:nvPr/>
-        </p:nvCxnSpPr>
-        <p:spPr>
-          <a:xfrm flipH="1">
-            <a:off x="2049722" y="5172243"/>
-            <a:ext cx="1336761" cy="971213"/>
-          </a:xfrm>
-          <a:prstGeom prst="line">
-            <a:avLst/>
-          </a:prstGeom>
-          <a:ln w="15875">
-            <a:solidFill>
-              <a:srgbClr val="4D5560"/>
-            </a:solidFill>
-          </a:ln>
-        </p:spPr>
-        <p:style>
-          <a:lnRef idx="2">
-            <a:schemeClr val="accent1"/>
-          </a:lnRef>
-          <a:fillRef idx="0">
-            <a:schemeClr val="accent1"/>
-          </a:fillRef>
-          <a:effectRef idx="1">
-            <a:schemeClr val="accent1"/>
-          </a:effectRef>
-          <a:fontRef idx="minor">
-            <a:schemeClr val="tx1"/>
-          </a:fontRef>
-        </p:style>
-      </p:cxnSp>
-      <p:cxnSp>
-        <p:nvCxnSpPr>
-          <p:cNvPr id="132" name="Connector 131"/>
-          <p:cNvCxnSpPr/>
-          <p:nvPr/>
-        </p:nvCxnSpPr>
-        <p:spPr>
-          <a:xfrm flipH="1">
-            <a:off x="1734156" y="5172243"/>
-            <a:ext cx="1652327" cy="0"/>
-          </a:xfrm>
-          <a:prstGeom prst="line">
-            <a:avLst/>
-          </a:prstGeom>
-          <a:ln w="15875">
-            <a:solidFill>
-              <a:srgbClr val="4D5560"/>
-            </a:solidFill>
-          </a:ln>
-        </p:spPr>
-        <p:style>
-          <a:lnRef idx="2">
-            <a:schemeClr val="accent1"/>
-          </a:lnRef>
-          <a:fillRef idx="0">
-            <a:schemeClr val="accent1"/>
-          </a:fillRef>
-          <a:effectRef idx="1">
-            <a:schemeClr val="accent1"/>
-          </a:effectRef>
-          <a:fontRef idx="minor">
-            <a:schemeClr val="tx1"/>
-          </a:fontRef>
-        </p:style>
-      </p:cxnSp>
-      <p:cxnSp>
-        <p:nvCxnSpPr>
-          <p:cNvPr id="133" name="Connector 132"/>
-          <p:cNvCxnSpPr/>
-          <p:nvPr/>
-        </p:nvCxnSpPr>
-        <p:spPr>
-          <a:xfrm flipH="1">
-            <a:off x="2049722" y="6143456"/>
-            <a:ext cx="1021195" cy="0"/>
-          </a:xfrm>
-          <a:prstGeom prst="line">
-            <a:avLst/>
-          </a:prstGeom>
-          <a:ln w="15875">
-            <a:solidFill>
-              <a:srgbClr val="4D5560"/>
-            </a:solidFill>
-          </a:ln>
-        </p:spPr>
-        <p:style>
-          <a:lnRef idx="2">
-            <a:schemeClr val="accent1"/>
-          </a:lnRef>
-          <a:fillRef idx="0">
-            <a:schemeClr val="accent1"/>
-          </a:fillRef>
-          <a:effectRef idx="1">
-            <a:schemeClr val="accent1"/>
-          </a:effectRef>
-          <a:fontRef idx="minor">
-            <a:schemeClr val="tx1"/>
-          </a:fontRef>
-        </p:style>
-      </p:cxnSp>
-      <p:cxnSp>
-        <p:nvCxnSpPr>
-          <p:cNvPr id="134" name="Connector 133"/>
-          <p:cNvCxnSpPr/>
-          <p:nvPr/>
-        </p:nvCxnSpPr>
-        <p:spPr>
-          <a:xfrm flipH="1" flipV="1">
-            <a:off x="1734156" y="5172243"/>
-            <a:ext cx="1336761" cy="971213"/>
-          </a:xfrm>
-          <a:prstGeom prst="line">
-            <a:avLst/>
-          </a:prstGeom>
-          <a:ln w="15875">
-            <a:solidFill>
-              <a:srgbClr val="4D5560"/>
-            </a:solidFill>
-          </a:ln>
-        </p:spPr>
-        <p:style>
-          <a:lnRef idx="2">
-            <a:schemeClr val="accent1"/>
-          </a:lnRef>
-          <a:fillRef idx="0">
-            <a:schemeClr val="accent1"/>
-          </a:fillRef>
-          <a:effectRef idx="1">
-            <a:schemeClr val="accent1"/>
-          </a:effectRef>
-          <a:fontRef idx="minor">
-            <a:schemeClr val="tx1"/>
-          </a:fontRef>
-        </p:style>
-      </p:cxnSp>
-      <p:cxnSp>
-        <p:nvCxnSpPr>
-          <p:cNvPr id="135" name="Connector 134"/>
-          <p:cNvCxnSpPr/>
-          <p:nvPr/>
-        </p:nvCxnSpPr>
-        <p:spPr>
-          <a:xfrm flipH="1" flipV="1">
-            <a:off x="1734156" y="5172243"/>
-            <a:ext cx="315566" cy="971213"/>
-          </a:xfrm>
-          <a:prstGeom prst="line">
-            <a:avLst/>
-          </a:prstGeom>
-          <a:ln w="15875">
-            <a:solidFill>
-              <a:srgbClr val="4D5560"/>
-            </a:solidFill>
-          </a:ln>
-        </p:spPr>
-        <p:style>
-          <a:lnRef idx="2">
-            <a:schemeClr val="accent1"/>
-          </a:lnRef>
-          <a:fillRef idx="0">
-            <a:schemeClr val="accent1"/>
-          </a:fillRef>
-          <a:effectRef idx="1">
-            <a:schemeClr val="accent1"/>
-          </a:effectRef>
-          <a:fontRef idx="minor">
-            <a:schemeClr val="tx1"/>
-          </a:fontRef>
-        </p:style>
-      </p:cxnSp>
-      <p:sp>
-        <p:nvSpPr>
-          <p:cNvPr id="136" name="Oval 135"/>
+              <a:t>Why Stellar: many companies, one ledger</a:t>
+            </a:r>
+          </a:p>
+        </p:txBody>
+      </p:sp>
+      <p:sp>
+        <p:nvSpPr>
+          <p:cNvPr id="125" name="Rectangle 124"/>
           <p:cNvSpPr/>
           <p:nvPr/>
         </p:nvSpPr>
         <p:spPr>
           <a:xfrm>
-            <a:off x="2441448" y="4453128"/>
-            <a:ext cx="237744" cy="237744"/>
-          </a:xfrm>
-          <a:prstGeom prst="ellipse">
+            <a:off x="914400" y="3127248"/>
+            <a:ext cx="16459200" cy="18288"/>
+          </a:xfrm>
+          <a:prstGeom prst="rect">
             <a:avLst/>
           </a:prstGeom>
           <a:solidFill>
-            <a:srgbClr val="0E0F11"/>
+            <a:srgbClr val="DFDDD6"/>
           </a:solidFill>
           <a:ln>
             <a:noFill/>
@@ -13577,20 +13848,146 @@
       </p:sp>
       <p:sp>
         <p:nvSpPr>
-          <p:cNvPr id="137" name="Oval 136"/>
+          <p:cNvPr id="126" name="TextBox 125"/>
+          <p:cNvSpPr txBox="1"/>
+          <p:nvPr/>
+        </p:nvSpPr>
+        <p:spPr>
+          <a:xfrm>
+            <a:off x="914400" y="3319272"/>
+            <a:ext cx="914400" cy="548640"/>
+          </a:xfrm>
+          <a:prstGeom prst="rect">
+            <a:avLst/>
+          </a:prstGeom>
+          <a:noFill/>
+        </p:spPr>
+        <p:txBody>
+          <a:bodyPr wrap="square" lIns="0" rIns="0" tIns="0" bIns="0" anchor="t">
+            <a:spAutoFit/>
+          </a:bodyPr>
+          <a:lstStyle/>
+          <a:p>
+            <a:pPr algn="l">
+              <a:lnSpc>
+                <a:spcPct val="112000"/>
+              </a:lnSpc>
+              <a:spcAft>
+                <a:spcPts val="600"/>
+              </a:spcAft>
+            </a:pPr>
+            <a:r>
+              <a:rPr sz="2400" b="1">
+                <a:solidFill>
+                  <a:srgbClr val="556F00"/>
+                </a:solidFill>
+                <a:latin typeface="JetBrains Mono"/>
+              </a:rPr>
+              <a:t>01</a:t>
+            </a:r>
+          </a:p>
+        </p:txBody>
+      </p:sp>
+      <p:sp>
+        <p:nvSpPr>
+          <p:cNvPr id="127" name="TextBox 126"/>
+          <p:cNvSpPr txBox="1"/>
+          <p:nvPr/>
+        </p:nvSpPr>
+        <p:spPr>
+          <a:xfrm>
+            <a:off x="1828800" y="3246120"/>
+            <a:ext cx="5852160" cy="1097280"/>
+          </a:xfrm>
+          <a:prstGeom prst="rect">
+            <a:avLst/>
+          </a:prstGeom>
+          <a:noFill/>
+        </p:spPr>
+        <p:txBody>
+          <a:bodyPr wrap="square" lIns="0" rIns="0" tIns="0" bIns="0" anchor="t">
+            <a:spAutoFit/>
+          </a:bodyPr>
+          <a:lstStyle/>
+          <a:p>
+            <a:pPr algn="l">
+              <a:lnSpc>
+                <a:spcPct val="112000"/>
+              </a:lnSpc>
+              <a:spcAft>
+                <a:spcPts val="600"/>
+              </a:spcAft>
+            </a:pPr>
+            <a:r>
+              <a:rPr sz="3000" b="1">
+                <a:solidFill>
+                  <a:srgbClr val="0E0F11"/>
+                </a:solidFill>
+                <a:latin typeface="Inter Tight"/>
+              </a:rPr>
+              <a:t>Multi-party auth in one call</a:t>
+            </a:r>
+          </a:p>
+        </p:txBody>
+      </p:sp>
+      <p:sp>
+        <p:nvSpPr>
+          <p:cNvPr id="128" name="TextBox 127"/>
+          <p:cNvSpPr txBox="1"/>
+          <p:nvPr/>
+        </p:nvSpPr>
+        <p:spPr>
+          <a:xfrm>
+            <a:off x="7863840" y="3264408"/>
+            <a:ext cx="9509760" cy="1188720"/>
+          </a:xfrm>
+          <a:prstGeom prst="rect">
+            <a:avLst/>
+          </a:prstGeom>
+          <a:noFill/>
+        </p:spPr>
+        <p:txBody>
+          <a:bodyPr wrap="square" lIns="0" rIns="0" tIns="0" bIns="0" anchor="t">
+            <a:spAutoFit/>
+          </a:bodyPr>
+          <a:lstStyle/>
+          <a:p>
+            <a:pPr algn="l">
+              <a:lnSpc>
+                <a:spcPct val="112000"/>
+              </a:lnSpc>
+              <a:spcAft>
+                <a:spcPts val="600"/>
+              </a:spcAft>
+            </a:pPr>
+            <a:r>
+              <a:rPr sz="2400" b="0">
+                <a:solidFill>
+                  <a:srgbClr val="0E0F11"/>
+                </a:solidFill>
+                <a:latin typeface="Instrument Sans"/>
+              </a:rPr>
+              <a:t>Soroban authorises both companies of a link inside one contract invocation: the handover is atomic.</a:t>
+            </a:r>
+          </a:p>
+        </p:txBody>
+      </p:sp>
+      <p:sp>
+        <p:nvSpPr>
+          <p:cNvPr id="129" name="Rectangle 128"/>
           <p:cNvSpPr/>
           <p:nvPr/>
         </p:nvSpPr>
         <p:spPr>
           <a:xfrm>
-            <a:off x="3267611" y="5053371"/>
-            <a:ext cx="237744" cy="237744"/>
-          </a:xfrm>
-          <a:prstGeom prst="ellipse">
+            <a:off x="914400" y="4498848"/>
+            <a:ext cx="16459200" cy="18288"/>
+          </a:xfrm>
+          <a:prstGeom prst="rect">
             <a:avLst/>
           </a:prstGeom>
           <a:solidFill>
-            <a:srgbClr val="0E0F11"/>
+            <a:srgbClr val="DFDDD6"/>
           </a:solidFill>
           <a:ln>
             <a:noFill/>
@@ -13621,20 +14018,146 @@
       </p:sp>
       <p:sp>
         <p:nvSpPr>
-          <p:cNvPr id="138" name="Oval 137"/>
+          <p:cNvPr id="130" name="TextBox 129"/>
+          <p:cNvSpPr txBox="1"/>
+          <p:nvPr/>
+        </p:nvSpPr>
+        <p:spPr>
+          <a:xfrm>
+            <a:off x="914400" y="4690872"/>
+            <a:ext cx="914400" cy="548640"/>
+          </a:xfrm>
+          <a:prstGeom prst="rect">
+            <a:avLst/>
+          </a:prstGeom>
+          <a:noFill/>
+        </p:spPr>
+        <p:txBody>
+          <a:bodyPr wrap="square" lIns="0" rIns="0" tIns="0" bIns="0" anchor="t">
+            <a:spAutoFit/>
+          </a:bodyPr>
+          <a:lstStyle/>
+          <a:p>
+            <a:pPr algn="l">
+              <a:lnSpc>
+                <a:spcPct val="112000"/>
+              </a:lnSpc>
+              <a:spcAft>
+                <a:spcPts val="600"/>
+              </a:spcAft>
+            </a:pPr>
+            <a:r>
+              <a:rPr sz="2400" b="1">
+                <a:solidFill>
+                  <a:srgbClr val="556F00"/>
+                </a:solidFill>
+                <a:latin typeface="JetBrains Mono"/>
+              </a:rPr>
+              <a:t>02</a:t>
+            </a:r>
+          </a:p>
+        </p:txBody>
+      </p:sp>
+      <p:sp>
+        <p:nvSpPr>
+          <p:cNvPr id="131" name="TextBox 130"/>
+          <p:cNvSpPr txBox="1"/>
+          <p:nvPr/>
+        </p:nvSpPr>
+        <p:spPr>
+          <a:xfrm>
+            <a:off x="1828800" y="4617720"/>
+            <a:ext cx="5852160" cy="1097280"/>
+          </a:xfrm>
+          <a:prstGeom prst="rect">
+            <a:avLst/>
+          </a:prstGeom>
+          <a:noFill/>
+        </p:spPr>
+        <p:txBody>
+          <a:bodyPr wrap="square" lIns="0" rIns="0" tIns="0" bIns="0" anchor="t">
+            <a:spAutoFit/>
+          </a:bodyPr>
+          <a:lstStyle/>
+          <a:p>
+            <a:pPr algn="l">
+              <a:lnSpc>
+                <a:spcPct val="112000"/>
+              </a:lnSpc>
+              <a:spcAft>
+                <a:spcPts val="600"/>
+              </a:spcAft>
+            </a:pPr>
+            <a:r>
+              <a:rPr sz="3000" b="1">
+                <a:solidFill>
+                  <a:srgbClr val="0E0F11"/>
+                </a:solidFill>
+                <a:latin typeface="Inter Tight"/>
+              </a:rPr>
+              <a:t>Events plus an on-chain head</a:t>
+            </a:r>
+          </a:p>
+        </p:txBody>
+      </p:sp>
+      <p:sp>
+        <p:nvSpPr>
+          <p:cNvPr id="132" name="TextBox 131"/>
+          <p:cNvSpPr txBox="1"/>
+          <p:nvPr/>
+        </p:nvSpPr>
+        <p:spPr>
+          <a:xfrm>
+            <a:off x="7863840" y="4636007"/>
+            <a:ext cx="9509760" cy="1188720"/>
+          </a:xfrm>
+          <a:prstGeom prst="rect">
+            <a:avLst/>
+          </a:prstGeom>
+          <a:noFill/>
+        </p:spPr>
+        <p:txBody>
+          <a:bodyPr wrap="square" lIns="0" rIns="0" tIns="0" bIns="0" anchor="t">
+            <a:spAutoFit/>
+          </a:bodyPr>
+          <a:lstStyle/>
+          <a:p>
+            <a:pPr algn="l">
+              <a:lnSpc>
+                <a:spcPct val="112000"/>
+              </a:lnSpc>
+              <a:spcAft>
+                <a:spcPts val="600"/>
+              </a:spcAft>
+            </a:pPr>
+            <a:r>
+              <a:rPr sz="2400" b="0">
+                <a:solidFill>
+                  <a:srgbClr val="0E0F11"/>
+                </a:solidFill>
+                <a:latin typeface="Instrument Sans"/>
+              </a:rPr>
+              <a:t>RPC keeps contract events about 7 days. The head stored in the contract lets anyone rebuild the full history later.</a:t>
+            </a:r>
+          </a:p>
+        </p:txBody>
+      </p:sp>
+      <p:sp>
+        <p:nvSpPr>
+          <p:cNvPr id="133" name="Rectangle 132"/>
           <p:cNvSpPr/>
           <p:nvPr/>
         </p:nvSpPr>
         <p:spPr>
           <a:xfrm>
-            <a:off x="2952045" y="6024584"/>
-            <a:ext cx="237744" cy="237744"/>
-          </a:xfrm>
-          <a:prstGeom prst="ellipse">
+            <a:off x="914400" y="5870448"/>
+            <a:ext cx="16459200" cy="18288"/>
+          </a:xfrm>
+          <a:prstGeom prst="rect">
             <a:avLst/>
           </a:prstGeom>
           <a:solidFill>
-            <a:srgbClr val="0E0F11"/>
+            <a:srgbClr val="DFDDD6"/>
           </a:solidFill>
           <a:ln>
             <a:noFill/>
@@ -13665,20 +14188,146 @@
       </p:sp>
       <p:sp>
         <p:nvSpPr>
-          <p:cNvPr id="139" name="Oval 138"/>
+          <p:cNvPr id="134" name="TextBox 133"/>
+          <p:cNvSpPr txBox="1"/>
+          <p:nvPr/>
+        </p:nvSpPr>
+        <p:spPr>
+          <a:xfrm>
+            <a:off x="914400" y="6062472"/>
+            <a:ext cx="914400" cy="548640"/>
+          </a:xfrm>
+          <a:prstGeom prst="rect">
+            <a:avLst/>
+          </a:prstGeom>
+          <a:noFill/>
+        </p:spPr>
+        <p:txBody>
+          <a:bodyPr wrap="square" lIns="0" rIns="0" tIns="0" bIns="0" anchor="t">
+            <a:spAutoFit/>
+          </a:bodyPr>
+          <a:lstStyle/>
+          <a:p>
+            <a:pPr algn="l">
+              <a:lnSpc>
+                <a:spcPct val="112000"/>
+              </a:lnSpc>
+              <a:spcAft>
+                <a:spcPts val="600"/>
+              </a:spcAft>
+            </a:pPr>
+            <a:r>
+              <a:rPr sz="2400" b="1">
+                <a:solidFill>
+                  <a:srgbClr val="556F00"/>
+                </a:solidFill>
+                <a:latin typeface="JetBrains Mono"/>
+              </a:rPr>
+              <a:t>03</a:t>
+            </a:r>
+          </a:p>
+        </p:txBody>
+      </p:sp>
+      <p:sp>
+        <p:nvSpPr>
+          <p:cNvPr id="135" name="TextBox 134"/>
+          <p:cNvSpPr txBox="1"/>
+          <p:nvPr/>
+        </p:nvSpPr>
+        <p:spPr>
+          <a:xfrm>
+            <a:off x="1828800" y="5989320"/>
+            <a:ext cx="5852160" cy="1097280"/>
+          </a:xfrm>
+          <a:prstGeom prst="rect">
+            <a:avLst/>
+          </a:prstGeom>
+          <a:noFill/>
+        </p:spPr>
+        <p:txBody>
+          <a:bodyPr wrap="square" lIns="0" rIns="0" tIns="0" bIns="0" anchor="t">
+            <a:spAutoFit/>
+          </a:bodyPr>
+          <a:lstStyle/>
+          <a:p>
+            <a:pPr algn="l">
+              <a:lnSpc>
+                <a:spcPct val="112000"/>
+              </a:lnSpc>
+              <a:spcAft>
+                <a:spcPts val="600"/>
+              </a:spcAft>
+            </a:pPr>
+            <a:r>
+              <a:rPr sz="3000" b="1">
+                <a:solidFill>
+                  <a:srgbClr val="0E0F11"/>
+                </a:solidFill>
+                <a:latin typeface="Inter Tight"/>
+              </a:rPr>
+              <a:t>The token stays put, then burns</a:t>
+            </a:r>
+          </a:p>
+        </p:txBody>
+      </p:sp>
+      <p:sp>
+        <p:nvSpPr>
+          <p:cNvPr id="136" name="TextBox 135"/>
+          <p:cNvSpPr txBox="1"/>
+          <p:nvPr/>
+        </p:nvSpPr>
+        <p:spPr>
+          <a:xfrm>
+            <a:off x="7863840" y="6007607"/>
+            <a:ext cx="9509760" cy="1188720"/>
+          </a:xfrm>
+          <a:prstGeom prst="rect">
+            <a:avLst/>
+          </a:prstGeom>
+          <a:noFill/>
+        </p:spPr>
+        <p:txBody>
+          <a:bodyPr wrap="square" lIns="0" rIns="0" tIns="0" bIns="0" anchor="t">
+            <a:spAutoFit/>
+          </a:bodyPr>
+          <a:lstStyle/>
+          <a:p>
+            <a:pPr algn="l">
+              <a:lnSpc>
+                <a:spcPct val="112000"/>
+              </a:lnSpc>
+              <a:spcAft>
+                <a:spcPts val="600"/>
+              </a:spcAft>
+            </a:pPr>
+            <a:r>
+              <a:rPr sz="2400" b="0">
+                <a:solidFill>
+                  <a:srgbClr val="0E0F11"/>
+                </a:solidFill>
+                <a:latin typeface="Instrument Sans"/>
+              </a:rPr>
+              <a:t>The shipment token never moves in transit; the existing Radox redeem burns it after delivery.</a:t>
+            </a:r>
+          </a:p>
+        </p:txBody>
+      </p:sp>
+      <p:sp>
+        <p:nvSpPr>
+          <p:cNvPr id="137" name="Rectangle 136"/>
           <p:cNvSpPr/>
           <p:nvPr/>
         </p:nvSpPr>
         <p:spPr>
           <a:xfrm>
-            <a:off x="1930850" y="6024584"/>
-            <a:ext cx="237744" cy="237744"/>
-          </a:xfrm>
-          <a:prstGeom prst="ellipse">
+            <a:off x="914400" y="7242048"/>
+            <a:ext cx="16459200" cy="18288"/>
+          </a:xfrm>
+          <a:prstGeom prst="rect">
             <a:avLst/>
           </a:prstGeom>
           <a:solidFill>
-            <a:srgbClr val="0E0F11"/>
+            <a:srgbClr val="DFDDD6"/>
           </a:solidFill>
           <a:ln>
             <a:noFill/>
@@ -13709,623 +14358,14 @@
       </p:sp>
       <p:sp>
         <p:nvSpPr>
-          <p:cNvPr id="140" name="Oval 139"/>
-          <p:cNvSpPr/>
-          <p:nvPr/>
-        </p:nvSpPr>
-        <p:spPr>
-          <a:xfrm>
-            <a:off x="1615284" y="5053371"/>
-            <a:ext cx="237744" cy="237744"/>
-          </a:xfrm>
-          <a:prstGeom prst="ellipse">
-            <a:avLst/>
-          </a:prstGeom>
-          <a:solidFill>
-            <a:srgbClr val="0E0F11"/>
-          </a:solidFill>
-          <a:ln>
-            <a:noFill/>
-          </a:ln>
-          <a:effectLst/>
-        </p:spPr>
-        <p:style>
-          <a:lnRef idx="1">
-            <a:schemeClr val="accent1"/>
-          </a:lnRef>
-          <a:fillRef idx="3">
-            <a:schemeClr val="accent1"/>
-          </a:fillRef>
-          <a:effectRef idx="0">
-            <a:schemeClr val="accent1"/>
-          </a:effectRef>
-          <a:fontRef idx="minor">
-            <a:schemeClr val="lt1"/>
-          </a:fontRef>
-        </p:style>
-        <p:txBody>
-          <a:bodyPr rtlCol="0" anchor="ctr"/>
-          <a:lstStyle/>
-          <a:p>
-            <a:pPr algn="ctr"/>
-          </a:p>
-        </p:txBody>
-      </p:sp>
-      <p:sp>
-        <p:nvSpPr>
-          <p:cNvPr id="141" name="TextBox 140"/>
+          <p:cNvPr id="138" name="TextBox 137"/>
           <p:cNvSpPr txBox="1"/>
           <p:nvPr/>
         </p:nvSpPr>
         <p:spPr>
           <a:xfrm>
-            <a:off x="914399" y="4069080"/>
-            <a:ext cx="3291840" cy="411480"/>
-          </a:xfrm>
-          <a:prstGeom prst="rect">
-            <a:avLst/>
-          </a:prstGeom>
-          <a:noFill/>
-        </p:spPr>
-        <p:txBody>
-          <a:bodyPr wrap="square" lIns="0" rIns="0" tIns="0" bIns="0" anchor="t">
-            <a:spAutoFit/>
-          </a:bodyPr>
-          <a:lstStyle/>
-          <a:p>
-            <a:pPr algn="ctr">
-              <a:lnSpc>
-                <a:spcPct val="112000"/>
-              </a:lnSpc>
-              <a:spcAft>
-                <a:spcPts val="600"/>
-              </a:spcAft>
-            </a:pPr>
-            <a:r>
-              <a:rPr sz="1800" b="1">
-                <a:solidFill>
-                  <a:srgbClr val="4D5560"/>
-                </a:solidFill>
-                <a:latin typeface="JetBrains Mono"/>
-              </a:rPr>
-              <a:t>PAIR BY PAIR · 10 LINKS</a:t>
-            </a:r>
-          </a:p>
-        </p:txBody>
-      </p:sp>
-      <p:cxnSp>
-        <p:nvCxnSpPr>
-          <p:cNvPr id="142" name="Connector 141"/>
-          <p:cNvCxnSpPr/>
-          <p:nvPr/>
-        </p:nvCxnSpPr>
-        <p:spPr>
-          <a:xfrm flipV="1">
-            <a:off x="6080760" y="4572000"/>
-            <a:ext cx="0" cy="868680"/>
-          </a:xfrm>
-          <a:prstGeom prst="line">
-            <a:avLst/>
-          </a:prstGeom>
-          <a:ln w="25400">
-            <a:solidFill>
-              <a:srgbClr val="556F00"/>
-            </a:solidFill>
-          </a:ln>
-        </p:spPr>
-        <p:style>
-          <a:lnRef idx="2">
-            <a:schemeClr val="accent1"/>
-          </a:lnRef>
-          <a:fillRef idx="0">
-            <a:schemeClr val="accent1"/>
-          </a:fillRef>
-          <a:effectRef idx="1">
-            <a:schemeClr val="accent1"/>
-          </a:effectRef>
-          <a:fontRef idx="minor">
-            <a:schemeClr val="tx1"/>
-          </a:fontRef>
-        </p:style>
-      </p:cxnSp>
-      <p:cxnSp>
-        <p:nvCxnSpPr>
-          <p:cNvPr id="143" name="Connector 142"/>
-          <p:cNvCxnSpPr/>
-          <p:nvPr/>
-        </p:nvCxnSpPr>
-        <p:spPr>
-          <a:xfrm flipV="1">
-            <a:off x="6080760" y="5172243"/>
-            <a:ext cx="826163" cy="268437"/>
-          </a:xfrm>
-          <a:prstGeom prst="line">
-            <a:avLst/>
-          </a:prstGeom>
-          <a:ln w="25400">
-            <a:solidFill>
-              <a:srgbClr val="556F00"/>
-            </a:solidFill>
-          </a:ln>
-        </p:spPr>
-        <p:style>
-          <a:lnRef idx="2">
-            <a:schemeClr val="accent1"/>
-          </a:lnRef>
-          <a:fillRef idx="0">
-            <a:schemeClr val="accent1"/>
-          </a:fillRef>
-          <a:effectRef idx="1">
-            <a:schemeClr val="accent1"/>
-          </a:effectRef>
-          <a:fontRef idx="minor">
-            <a:schemeClr val="tx1"/>
-          </a:fontRef>
-        </p:style>
-      </p:cxnSp>
-      <p:cxnSp>
-        <p:nvCxnSpPr>
-          <p:cNvPr id="144" name="Connector 143"/>
-          <p:cNvCxnSpPr/>
-          <p:nvPr/>
-        </p:nvCxnSpPr>
-        <p:spPr>
-          <a:xfrm>
-            <a:off x="6080760" y="5440680"/>
-            <a:ext cx="510597" cy="702776"/>
-          </a:xfrm>
-          <a:prstGeom prst="line">
-            <a:avLst/>
-          </a:prstGeom>
-          <a:ln w="25400">
-            <a:solidFill>
-              <a:srgbClr val="556F00"/>
-            </a:solidFill>
-          </a:ln>
-        </p:spPr>
-        <p:style>
-          <a:lnRef idx="2">
-            <a:schemeClr val="accent1"/>
-          </a:lnRef>
-          <a:fillRef idx="0">
-            <a:schemeClr val="accent1"/>
-          </a:fillRef>
-          <a:effectRef idx="1">
-            <a:schemeClr val="accent1"/>
-          </a:effectRef>
-          <a:fontRef idx="minor">
-            <a:schemeClr val="tx1"/>
-          </a:fontRef>
-        </p:style>
-      </p:cxnSp>
-      <p:cxnSp>
-        <p:nvCxnSpPr>
-          <p:cNvPr id="145" name="Connector 144"/>
-          <p:cNvCxnSpPr/>
-          <p:nvPr/>
-        </p:nvCxnSpPr>
-        <p:spPr>
-          <a:xfrm flipH="1">
-            <a:off x="5570162" y="5440680"/>
-            <a:ext cx="510598" cy="702776"/>
-          </a:xfrm>
-          <a:prstGeom prst="line">
-            <a:avLst/>
-          </a:prstGeom>
-          <a:ln w="25400">
-            <a:solidFill>
-              <a:srgbClr val="556F00"/>
-            </a:solidFill>
-          </a:ln>
-        </p:spPr>
-        <p:style>
-          <a:lnRef idx="2">
-            <a:schemeClr val="accent1"/>
-          </a:lnRef>
-          <a:fillRef idx="0">
-            <a:schemeClr val="accent1"/>
-          </a:fillRef>
-          <a:effectRef idx="1">
-            <a:schemeClr val="accent1"/>
-          </a:effectRef>
-          <a:fontRef idx="minor">
-            <a:schemeClr val="tx1"/>
-          </a:fontRef>
-        </p:style>
-      </p:cxnSp>
-      <p:cxnSp>
-        <p:nvCxnSpPr>
-          <p:cNvPr id="146" name="Connector 145"/>
-          <p:cNvCxnSpPr/>
-          <p:nvPr/>
-        </p:nvCxnSpPr>
-        <p:spPr>
-          <a:xfrm flipH="1" flipV="1">
-            <a:off x="5254596" y="5172243"/>
-            <a:ext cx="826164" cy="268437"/>
-          </a:xfrm>
-          <a:prstGeom prst="line">
-            <a:avLst/>
-          </a:prstGeom>
-          <a:ln w="25400">
-            <a:solidFill>
-              <a:srgbClr val="556F00"/>
-            </a:solidFill>
-          </a:ln>
-        </p:spPr>
-        <p:style>
-          <a:lnRef idx="2">
-            <a:schemeClr val="accent1"/>
-          </a:lnRef>
-          <a:fillRef idx="0">
-            <a:schemeClr val="accent1"/>
-          </a:fillRef>
-          <a:effectRef idx="1">
-            <a:schemeClr val="accent1"/>
-          </a:effectRef>
-          <a:fontRef idx="minor">
-            <a:schemeClr val="tx1"/>
-          </a:fontRef>
-        </p:style>
-      </p:cxnSp>
-      <p:sp>
-        <p:nvSpPr>
-          <p:cNvPr id="147" name="Oval 146"/>
-          <p:cNvSpPr/>
-          <p:nvPr/>
-        </p:nvSpPr>
-        <p:spPr>
-          <a:xfrm>
-            <a:off x="5888736" y="5248656"/>
-            <a:ext cx="384048" cy="384048"/>
-          </a:xfrm>
-          <a:prstGeom prst="ellipse">
-            <a:avLst/>
-          </a:prstGeom>
-          <a:solidFill>
-            <a:srgbClr val="C6F24E"/>
-          </a:solidFill>
-          <a:ln>
-            <a:noFill/>
-          </a:ln>
-          <a:effectLst/>
-        </p:spPr>
-        <p:style>
-          <a:lnRef idx="1">
-            <a:schemeClr val="accent1"/>
-          </a:lnRef>
-          <a:fillRef idx="3">
-            <a:schemeClr val="accent1"/>
-          </a:fillRef>
-          <a:effectRef idx="0">
-            <a:schemeClr val="accent1"/>
-          </a:effectRef>
-          <a:fontRef idx="minor">
-            <a:schemeClr val="lt1"/>
-          </a:fontRef>
-        </p:style>
-        <p:txBody>
-          <a:bodyPr rtlCol="0" anchor="ctr"/>
-          <a:lstStyle/>
-          <a:p>
-            <a:pPr algn="ctr"/>
-          </a:p>
-        </p:txBody>
-      </p:sp>
-      <p:sp>
-        <p:nvSpPr>
-          <p:cNvPr id="148" name="Oval 147"/>
-          <p:cNvSpPr/>
-          <p:nvPr/>
-        </p:nvSpPr>
-        <p:spPr>
-          <a:xfrm>
-            <a:off x="5961888" y="4453128"/>
-            <a:ext cx="237744" cy="237744"/>
-          </a:xfrm>
-          <a:prstGeom prst="ellipse">
-            <a:avLst/>
-          </a:prstGeom>
-          <a:solidFill>
-            <a:srgbClr val="0E0F11"/>
-          </a:solidFill>
-          <a:ln>
-            <a:noFill/>
-          </a:ln>
-          <a:effectLst/>
-        </p:spPr>
-        <p:style>
-          <a:lnRef idx="1">
-            <a:schemeClr val="accent1"/>
-          </a:lnRef>
-          <a:fillRef idx="3">
-            <a:schemeClr val="accent1"/>
-          </a:fillRef>
-          <a:effectRef idx="0">
-            <a:schemeClr val="accent1"/>
-          </a:effectRef>
-          <a:fontRef idx="minor">
-            <a:schemeClr val="lt1"/>
-          </a:fontRef>
-        </p:style>
-        <p:txBody>
-          <a:bodyPr rtlCol="0" anchor="ctr"/>
-          <a:lstStyle/>
-          <a:p>
-            <a:pPr algn="ctr"/>
-          </a:p>
-        </p:txBody>
-      </p:sp>
-      <p:sp>
-        <p:nvSpPr>
-          <p:cNvPr id="149" name="Oval 148"/>
-          <p:cNvSpPr/>
-          <p:nvPr/>
-        </p:nvSpPr>
-        <p:spPr>
-          <a:xfrm>
-            <a:off x="6788051" y="5053371"/>
-            <a:ext cx="237744" cy="237744"/>
-          </a:xfrm>
-          <a:prstGeom prst="ellipse">
-            <a:avLst/>
-          </a:prstGeom>
-          <a:solidFill>
-            <a:srgbClr val="0E0F11"/>
-          </a:solidFill>
-          <a:ln>
-            <a:noFill/>
-          </a:ln>
-          <a:effectLst/>
-        </p:spPr>
-        <p:style>
-          <a:lnRef idx="1">
-            <a:schemeClr val="accent1"/>
-          </a:lnRef>
-          <a:fillRef idx="3">
-            <a:schemeClr val="accent1"/>
-          </a:fillRef>
-          <a:effectRef idx="0">
-            <a:schemeClr val="accent1"/>
-          </a:effectRef>
-          <a:fontRef idx="minor">
-            <a:schemeClr val="lt1"/>
-          </a:fontRef>
-        </p:style>
-        <p:txBody>
-          <a:bodyPr rtlCol="0" anchor="ctr"/>
-          <a:lstStyle/>
-          <a:p>
-            <a:pPr algn="ctr"/>
-          </a:p>
-        </p:txBody>
-      </p:sp>
-      <p:sp>
-        <p:nvSpPr>
-          <p:cNvPr id="150" name="Oval 149"/>
-          <p:cNvSpPr/>
-          <p:nvPr/>
-        </p:nvSpPr>
-        <p:spPr>
-          <a:xfrm>
-            <a:off x="6472485" y="6024584"/>
-            <a:ext cx="237744" cy="237744"/>
-          </a:xfrm>
-          <a:prstGeom prst="ellipse">
-            <a:avLst/>
-          </a:prstGeom>
-          <a:solidFill>
-            <a:srgbClr val="0E0F11"/>
-          </a:solidFill>
-          <a:ln>
-            <a:noFill/>
-          </a:ln>
-          <a:effectLst/>
-        </p:spPr>
-        <p:style>
-          <a:lnRef idx="1">
-            <a:schemeClr val="accent1"/>
-          </a:lnRef>
-          <a:fillRef idx="3">
-            <a:schemeClr val="accent1"/>
-          </a:fillRef>
-          <a:effectRef idx="0">
-            <a:schemeClr val="accent1"/>
-          </a:effectRef>
-          <a:fontRef idx="minor">
-            <a:schemeClr val="lt1"/>
-          </a:fontRef>
-        </p:style>
-        <p:txBody>
-          <a:bodyPr rtlCol="0" anchor="ctr"/>
-          <a:lstStyle/>
-          <a:p>
-            <a:pPr algn="ctr"/>
-          </a:p>
-        </p:txBody>
-      </p:sp>
-      <p:sp>
-        <p:nvSpPr>
-          <p:cNvPr id="151" name="Oval 150"/>
-          <p:cNvSpPr/>
-          <p:nvPr/>
-        </p:nvSpPr>
-        <p:spPr>
-          <a:xfrm>
-            <a:off x="5451290" y="6024584"/>
-            <a:ext cx="237744" cy="237744"/>
-          </a:xfrm>
-          <a:prstGeom prst="ellipse">
-            <a:avLst/>
-          </a:prstGeom>
-          <a:solidFill>
-            <a:srgbClr val="0E0F11"/>
-          </a:solidFill>
-          <a:ln>
-            <a:noFill/>
-          </a:ln>
-          <a:effectLst/>
-        </p:spPr>
-        <p:style>
-          <a:lnRef idx="1">
-            <a:schemeClr val="accent1"/>
-          </a:lnRef>
-          <a:fillRef idx="3">
-            <a:schemeClr val="accent1"/>
-          </a:fillRef>
-          <a:effectRef idx="0">
-            <a:schemeClr val="accent1"/>
-          </a:effectRef>
-          <a:fontRef idx="minor">
-            <a:schemeClr val="lt1"/>
-          </a:fontRef>
-        </p:style>
-        <p:txBody>
-          <a:bodyPr rtlCol="0" anchor="ctr"/>
-          <a:lstStyle/>
-          <a:p>
-            <a:pPr algn="ctr"/>
-          </a:p>
-        </p:txBody>
-      </p:sp>
-      <p:sp>
-        <p:nvSpPr>
-          <p:cNvPr id="152" name="Oval 151"/>
-          <p:cNvSpPr/>
-          <p:nvPr/>
-        </p:nvSpPr>
-        <p:spPr>
-          <a:xfrm>
-            <a:off x="5135724" y="5053371"/>
-            <a:ext cx="237744" cy="237744"/>
-          </a:xfrm>
-          <a:prstGeom prst="ellipse">
-            <a:avLst/>
-          </a:prstGeom>
-          <a:solidFill>
-            <a:srgbClr val="0E0F11"/>
-          </a:solidFill>
-          <a:ln>
-            <a:noFill/>
-          </a:ln>
-          <a:effectLst/>
-        </p:spPr>
-        <p:style>
-          <a:lnRef idx="1">
-            <a:schemeClr val="accent1"/>
-          </a:lnRef>
-          <a:fillRef idx="3">
-            <a:schemeClr val="accent1"/>
-          </a:fillRef>
-          <a:effectRef idx="0">
-            <a:schemeClr val="accent1"/>
-          </a:effectRef>
-          <a:fontRef idx="minor">
-            <a:schemeClr val="lt1"/>
-          </a:fontRef>
-        </p:style>
-        <p:txBody>
-          <a:bodyPr rtlCol="0" anchor="ctr"/>
-          <a:lstStyle/>
-          <a:p>
-            <a:pPr algn="ctr"/>
-          </a:p>
-        </p:txBody>
-      </p:sp>
-      <p:sp>
-        <p:nvSpPr>
-          <p:cNvPr id="153" name="TextBox 152"/>
-          <p:cNvSpPr txBox="1"/>
-          <p:nvPr/>
-        </p:nvSpPr>
-        <p:spPr>
-          <a:xfrm>
-            <a:off x="4434840" y="4069080"/>
-            <a:ext cx="3291840" cy="411480"/>
-          </a:xfrm>
-          <a:prstGeom prst="rect">
-            <a:avLst/>
-          </a:prstGeom>
-          <a:noFill/>
-        </p:spPr>
-        <p:txBody>
-          <a:bodyPr wrap="square" lIns="0" rIns="0" tIns="0" bIns="0" anchor="t">
-            <a:spAutoFit/>
-          </a:bodyPr>
-          <a:lstStyle/>
-          <a:p>
-            <a:pPr algn="ctr">
-              <a:lnSpc>
-                <a:spcPct val="112000"/>
-              </a:lnSpc>
-              <a:spcAft>
-                <a:spcPts val="600"/>
-              </a:spcAft>
-            </a:pPr>
-            <a:r>
-              <a:rPr sz="1800" b="1">
-                <a:solidFill>
-                  <a:srgbClr val="556F00"/>
-                </a:solidFill>
-                <a:latin typeface="JetBrains Mono"/>
-              </a:rPr>
-              <a:t>ONE RADOX RAIL · 5 LINKS</a:t>
-            </a:r>
-          </a:p>
-        </p:txBody>
-      </p:sp>
-      <p:sp>
-        <p:nvSpPr>
-          <p:cNvPr id="154" name="TextBox 153"/>
-          <p:cNvSpPr txBox="1"/>
-          <p:nvPr/>
-        </p:nvSpPr>
-        <p:spPr>
-          <a:xfrm>
-            <a:off x="914400" y="6583680"/>
-            <a:ext cx="7132320" cy="822960"/>
-          </a:xfrm>
-          <a:prstGeom prst="rect">
-            <a:avLst/>
-          </a:prstGeom>
-          <a:noFill/>
-        </p:spPr>
-        <p:txBody>
-          <a:bodyPr wrap="square" lIns="0" rIns="0" tIns="0" bIns="0" anchor="t">
-            <a:spAutoFit/>
-          </a:bodyPr>
-          <a:lstStyle/>
-          <a:p>
-            <a:pPr algn="ctr">
-              <a:lnSpc>
-                <a:spcPct val="112000"/>
-              </a:lnSpc>
-              <a:spcAft>
-                <a:spcPts val="600"/>
-              </a:spcAft>
-            </a:pPr>
-            <a:r>
-              <a:rPr sz="2000" b="0">
-                <a:solidFill>
-                  <a:srgbClr val="4D5560"/>
-                </a:solidFill>
-                <a:latin typeface="Instrument Sans"/>
-              </a:rPr>
-              <a:t>Example, 5 parties: 10 custom links, or 5 links to one standard.</a:t>
-            </a:r>
-          </a:p>
-        </p:txBody>
-      </p:sp>
-      <p:sp>
-        <p:nvSpPr>
-          <p:cNvPr id="155" name="TextBox 154"/>
-          <p:cNvSpPr txBox="1"/>
-          <p:nvPr/>
-        </p:nvSpPr>
-        <p:spPr>
-          <a:xfrm>
-            <a:off x="8503920" y="4069080"/>
-            <a:ext cx="4389120" cy="411480"/>
+            <a:off x="914400" y="7424927"/>
+            <a:ext cx="16459200" cy="1371600"/>
           </a:xfrm>
           <a:prstGeom prst="rect">
             <a:avLst/>
@@ -14347,99 +14387,50 @@
               </a:spcAft>
             </a:pPr>
             <a:r>
-              <a:rPr sz="1800" b="1">
-                <a:solidFill>
-                  <a:srgbClr val="556F00"/>
-                </a:solidFill>
-                <a:latin typeface="JetBrains Mono"/>
+              <a:rPr sz="2100" b="1">
+                <a:solidFill>
+                  <a:srgbClr val="0E0F11"/>
+                </a:solidFill>
+                <a:latin typeface="Instrument Sans"/>
               </a:rPr>
-              <a:t>OPEN · ANYONE</a:t>
-            </a:r>
-          </a:p>
-        </p:txBody>
-      </p:sp>
-      <p:sp>
-        <p:nvSpPr>
-          <p:cNvPr id="156" name="Rectangle 155"/>
-          <p:cNvSpPr/>
-          <p:nvPr/>
-        </p:nvSpPr>
-        <p:spPr>
-          <a:xfrm>
-            <a:off x="8503920" y="4539996"/>
-            <a:ext cx="4251960" cy="27432"/>
-          </a:xfrm>
-          <a:prstGeom prst="rect">
-            <a:avLst/>
-          </a:prstGeom>
-          <a:solidFill>
-            <a:srgbClr val="556F00"/>
-          </a:solidFill>
-          <a:ln>
-            <a:noFill/>
-          </a:ln>
-          <a:effectLst/>
-        </p:spPr>
-        <p:style>
-          <a:lnRef idx="1">
-            <a:schemeClr val="accent1"/>
-          </a:lnRef>
-          <a:fillRef idx="3">
-            <a:schemeClr val="accent1"/>
-          </a:fillRef>
-          <a:effectRef idx="0">
-            <a:schemeClr val="accent1"/>
-          </a:effectRef>
-          <a:fontRef idx="minor">
-            <a:schemeClr val="lt1"/>
-          </a:fontRef>
-        </p:style>
-        <p:txBody>
-          <a:bodyPr rtlCol="0" anchor="ctr"/>
-          <a:lstStyle/>
-          <a:p>
-            <a:pPr algn="ctr"/>
-          </a:p>
-        </p:txBody>
-      </p:sp>
-      <p:sp>
-        <p:nvSpPr>
-          <p:cNvPr id="157" name="TextBox 156"/>
-          <p:cNvSpPr txBox="1"/>
-          <p:nvPr/>
-        </p:nvSpPr>
-        <p:spPr>
-          <a:xfrm>
-            <a:off x="8503920" y="4709160"/>
-            <a:ext cx="4343400" cy="2743200"/>
-          </a:xfrm>
-          <a:prstGeom prst="rect">
-            <a:avLst/>
-          </a:prstGeom>
-          <a:noFill/>
-        </p:spPr>
-        <p:txBody>
-          <a:bodyPr wrap="square" lIns="0" rIns="0" tIns="0" bIns="0" anchor="t">
-            <a:spAutoFit/>
-          </a:bodyPr>
-          <a:lstStyle/>
+              <a:t>Nearest neighbours we found on Stellar </a:t>
+            </a:r>
+            <a:r>
+              <a:rPr sz="2100" b="0">
+                <a:solidFill>
+                  <a:srgbClr val="4D5560"/>
+                </a:solidFill>
+                <a:latin typeface="Instrument Sans"/>
+              </a:rPr>
+              <a:t>(LumenLoop, SCF, Scout, 24–25 Oct): </a:t>
+            </a:r>
+            <a:r>
+              <a:rPr sz="2100" b="0">
+                <a:solidFill>
+                  <a:srgbClr val="0E0F11"/>
+                </a:solidFill>
+                <a:latin typeface="Instrument Sans"/>
+              </a:rPr>
+              <a:t>Kutana and Trustless Work release escrow on trade milestones; Pipeline finances commodity trade. We found none that records a custody handover signed by two custodians, and no SEP.</a:t>
+            </a:r>
+          </a:p>
           <a:p>
             <a:pPr algn="l">
               <a:lnSpc>
                 <a:spcPct val="112000"/>
               </a:lnSpc>
               <a:spcAft>
-                <a:spcPts val="800"/>
+                <a:spcPts val="600"/>
               </a:spcAft>
             </a:pPr>
             <a:r>
-              <a:rPr sz="2100" b="0">
+              <a:rPr sz="2100" b="1">
                 <a:solidFill>
                   <a:srgbClr val="556F00"/>
                 </a:solidFill>
                 <a:latin typeface="Instrument Sans"/>
               </a:rPr>
-              <a:t>— </a:t>
+              <a:t>Open source, Apache-2.0: </a:t>
             </a:r>
             <a:r>
               <a:rPr sz="2100" b="0">
@@ -14448,333 +14439,7 @@
                 </a:solidFill>
                 <a:latin typeface="Instrument Sans"/>
               </a:rPr>
-              <a:t>Record format, roles and events: the custody_registry contract (Apache-2.0)</a:t>
-            </a:r>
-          </a:p>
-          <a:p>
-            <a:pPr algn="l">
-              <a:lnSpc>
-                <a:spcPct val="112000"/>
-              </a:lnSpc>
-              <a:spcAft>
-                <a:spcPts val="800"/>
-              </a:spcAft>
-            </a:pPr>
-            <a:r>
-              <a:rPr sz="2100" b="0">
-                <a:solidFill>
-                  <a:srgbClr val="556F00"/>
-                </a:solidFill>
-                <a:latin typeface="Instrument Sans"/>
-              </a:rPr>
-              <a:t>— </a:t>
-            </a:r>
-            <a:r>
-              <a:rPr sz="2100" b="0">
-                <a:solidFill>
-                  <a:srgbClr val="0E0F11"/>
-                </a:solidFill>
-                <a:latin typeface="Instrument Sans"/>
-              </a:rPr>
-              <a:t>Verify any shipment, no login (slide 5)</a:t>
-            </a:r>
-          </a:p>
-        </p:txBody>
-      </p:sp>
-      <p:sp>
-        <p:nvSpPr>
-          <p:cNvPr id="158" name="TextBox 157"/>
-          <p:cNvSpPr txBox="1"/>
-          <p:nvPr/>
-        </p:nvSpPr>
-        <p:spPr>
-          <a:xfrm>
-            <a:off x="13121640" y="4069080"/>
-            <a:ext cx="4389120" cy="411480"/>
-          </a:xfrm>
-          <a:prstGeom prst="rect">
-            <a:avLst/>
-          </a:prstGeom>
-          <a:noFill/>
-        </p:spPr>
-        <p:txBody>
-          <a:bodyPr wrap="square" lIns="0" rIns="0" tIns="0" bIns="0" anchor="t">
-            <a:spAutoFit/>
-          </a:bodyPr>
-          <a:lstStyle/>
-          <a:p>
-            <a:pPr algn="l">
-              <a:lnSpc>
-                <a:spcPct val="112000"/>
-              </a:lnSpc>
-              <a:spcAft>
-                <a:spcPts val="600"/>
-              </a:spcAft>
-            </a:pPr>
-            <a:r>
-              <a:rPr sz="1800" b="1">
-                <a:solidFill>
-                  <a:srgbClr val="0E0F11"/>
-                </a:solidFill>
-                <a:latin typeface="JetBrains Mono"/>
-              </a:rPr>
-              <a:t>RADOX OPERATES · CLIENT PAYS</a:t>
-            </a:r>
-          </a:p>
-        </p:txBody>
-      </p:sp>
-      <p:sp>
-        <p:nvSpPr>
-          <p:cNvPr id="159" name="Rectangle 158"/>
-          <p:cNvSpPr/>
-          <p:nvPr/>
-        </p:nvSpPr>
-        <p:spPr>
-          <a:xfrm>
-            <a:off x="13121640" y="4539996"/>
-            <a:ext cx="4251960" cy="27432"/>
-          </a:xfrm>
-          <a:prstGeom prst="rect">
-            <a:avLst/>
-          </a:prstGeom>
-          <a:solidFill>
-            <a:srgbClr val="0E0F11"/>
-          </a:solidFill>
-          <a:ln>
-            <a:noFill/>
-          </a:ln>
-          <a:effectLst/>
-        </p:spPr>
-        <p:style>
-          <a:lnRef idx="1">
-            <a:schemeClr val="accent1"/>
-          </a:lnRef>
-          <a:fillRef idx="3">
-            <a:schemeClr val="accent1"/>
-          </a:fillRef>
-          <a:effectRef idx="0">
-            <a:schemeClr val="accent1"/>
-          </a:effectRef>
-          <a:fontRef idx="minor">
-            <a:schemeClr val="lt1"/>
-          </a:fontRef>
-        </p:style>
-        <p:txBody>
-          <a:bodyPr rtlCol="0" anchor="ctr"/>
-          <a:lstStyle/>
-          <a:p>
-            <a:pPr algn="ctr"/>
-          </a:p>
-        </p:txBody>
-      </p:sp>
-      <p:sp>
-        <p:nvSpPr>
-          <p:cNvPr id="160" name="TextBox 159"/>
-          <p:cNvSpPr txBox="1"/>
-          <p:nvPr/>
-        </p:nvSpPr>
-        <p:spPr>
-          <a:xfrm>
-            <a:off x="13121640" y="4709160"/>
-            <a:ext cx="4343400" cy="2743200"/>
-          </a:xfrm>
-          <a:prstGeom prst="rect">
-            <a:avLst/>
-          </a:prstGeom>
-          <a:noFill/>
-        </p:spPr>
-        <p:txBody>
-          <a:bodyPr wrap="square" lIns="0" rIns="0" tIns="0" bIns="0" anchor="t">
-            <a:spAutoFit/>
-          </a:bodyPr>
-          <a:lstStyle/>
-          <a:p>
-            <a:pPr algn="l">
-              <a:lnSpc>
-                <a:spcPct val="112000"/>
-              </a:lnSpc>
-              <a:spcAft>
-                <a:spcPts val="800"/>
-              </a:spcAft>
-            </a:pPr>
-            <a:r>
-              <a:rPr sz="2100" b="0">
-                <a:solidFill>
-                  <a:srgbClr val="0E0F11"/>
-                </a:solidFill>
-                <a:latin typeface="Instrument Sans"/>
-              </a:rPr>
-              <a:t>— </a:t>
-            </a:r>
-            <a:r>
-              <a:rPr sz="2100" b="0">
-                <a:solidFill>
-                  <a:srgbClr val="0E0F11"/>
-                </a:solidFill>
-                <a:latin typeface="Instrument Sans"/>
-              </a:rPr>
-              <a:t>Custodian onboarding, issuance controls, operation</a:t>
-            </a:r>
-          </a:p>
-          <a:p>
-            <a:pPr algn="l">
-              <a:lnSpc>
-                <a:spcPct val="112000"/>
-              </a:lnSpc>
-              <a:spcAft>
-                <a:spcPts val="800"/>
-              </a:spcAft>
-            </a:pPr>
-            <a:r>
-              <a:rPr sz="2100" b="0">
-                <a:solidFill>
-                  <a:srgbClr val="0E0F11"/>
-                </a:solidFill>
-                <a:latin typeface="Instrument Sans"/>
-              </a:rPr>
-              <a:t>— </a:t>
-            </a:r>
-            <a:r>
-              <a:rPr sz="2100" b="0">
-                <a:solidFill>
-                  <a:srgbClr val="0E0F11"/>
-                </a:solidFill>
-                <a:latin typeface="Instrument Sans"/>
-              </a:rPr>
-              <a:t>The API and backend: closed, not self-hostable</a:t>
-            </a:r>
-          </a:p>
-          <a:p>
-            <a:pPr algn="l">
-              <a:lnSpc>
-                <a:spcPct val="112000"/>
-              </a:lnSpc>
-              <a:spcAft>
-                <a:spcPts val="800"/>
-              </a:spcAft>
-            </a:pPr>
-            <a:r>
-              <a:rPr sz="2100" b="0">
-                <a:solidFill>
-                  <a:srgbClr val="0E0F11"/>
-                </a:solidFill>
-                <a:latin typeface="Instrument Sans"/>
-              </a:rPr>
-              <a:t>— </a:t>
-            </a:r>
-            <a:r>
-              <a:rPr sz="2100" b="0">
-                <a:solidFill>
-                  <a:srgbClr val="0E0F11"/>
-                </a:solidFill>
-                <a:latin typeface="Instrument Sans"/>
-              </a:rPr>
-              <a:t>Paid by the financial institution; not priced</a:t>
-            </a:r>
-          </a:p>
-        </p:txBody>
-      </p:sp>
-      <p:sp>
-        <p:nvSpPr>
-          <p:cNvPr id="161" name="Rectangle 160"/>
-          <p:cNvSpPr/>
-          <p:nvPr/>
-        </p:nvSpPr>
-        <p:spPr>
-          <a:xfrm>
-            <a:off x="914400" y="7580376"/>
-            <a:ext cx="16459200" cy="18288"/>
-          </a:xfrm>
-          <a:prstGeom prst="rect">
-            <a:avLst/>
-          </a:prstGeom>
-          <a:solidFill>
-            <a:srgbClr val="DFDDD6"/>
-          </a:solidFill>
-          <a:ln>
-            <a:noFill/>
-          </a:ln>
-          <a:effectLst/>
-        </p:spPr>
-        <p:style>
-          <a:lnRef idx="1">
-            <a:schemeClr val="accent1"/>
-          </a:lnRef>
-          <a:fillRef idx="3">
-            <a:schemeClr val="accent1"/>
-          </a:fillRef>
-          <a:effectRef idx="0">
-            <a:schemeClr val="accent1"/>
-          </a:effectRef>
-          <a:fontRef idx="minor">
-            <a:schemeClr val="lt1"/>
-          </a:fontRef>
-        </p:style>
-        <p:txBody>
-          <a:bodyPr rtlCol="0" anchor="ctr"/>
-          <a:lstStyle/>
-          <a:p>
-            <a:pPr algn="ctr"/>
-          </a:p>
-        </p:txBody>
-      </p:sp>
-      <p:sp>
-        <p:nvSpPr>
-          <p:cNvPr id="162" name="TextBox 161"/>
-          <p:cNvSpPr txBox="1"/>
-          <p:nvPr/>
-        </p:nvSpPr>
-        <p:spPr>
-          <a:xfrm>
-            <a:off x="914400" y="7699248"/>
-            <a:ext cx="16459200" cy="822960"/>
-          </a:xfrm>
-          <a:prstGeom prst="rect">
-            <a:avLst/>
-          </a:prstGeom>
-          <a:noFill/>
-        </p:spPr>
-        <p:txBody>
-          <a:bodyPr wrap="square" lIns="0" rIns="0" tIns="0" bIns="0" anchor="t">
-            <a:spAutoFit/>
-          </a:bodyPr>
-          <a:lstStyle/>
-          <a:p>
-            <a:pPr algn="l">
-              <a:lnSpc>
-                <a:spcPct val="112000"/>
-              </a:lnSpc>
-              <a:spcAft>
-                <a:spcPts val="200"/>
-              </a:spcAft>
-            </a:pPr>
-            <a:r>
-              <a:rPr sz="1800" b="0">
-                <a:solidFill>
-                  <a:srgbClr val="0E0F11"/>
-                </a:solidFill>
-                <a:latin typeface="Instrument Sans"/>
-              </a:rPr>
-              <a:t>Adoption still takes work: a key per party, its own signatures, one connection to the rail (the Radox API).</a:t>
-            </a:r>
-          </a:p>
-          <a:p>
-            <a:pPr algn="l">
-              <a:lnSpc>
-                <a:spcPct val="112000"/>
-              </a:lnSpc>
-              <a:spcAft>
-                <a:spcPts val="200"/>
-              </a:spcAft>
-            </a:pPr>
-            <a:r>
-              <a:rPr sz="1800" b="0">
-                <a:solidFill>
-                  <a:srgbClr val="4D5560"/>
-                </a:solidFill>
-                <a:latin typeface="Instrument Sans"/>
-              </a:rPr>
-              <a:t>Radox is the rail, never the issuer. Regulation and licences stay with the client and its local counsel.</a:t>
+              <a:t>a custody primitive other Stellar real-world-asset issuers can reuse.</a:t>
             </a:r>
           </a:p>
         </p:txBody>
@@ -16209,7 +15874,7 @@
                 </a:solidFill>
                 <a:latin typeface="Inter Tight"/>
               </a:rPr>
-              <a:t>Vision: one custody standard, every corridor</a:t>
+              <a:t>Vision: one rail, every corridor</a:t>
             </a:r>
           </a:p>
         </p:txBody>
@@ -16260,7 +15925,7 @@
                 </a:solidFill>
                 <a:latin typeface="Instrument Sans"/>
               </a:rPr>
-              <a:t>The goal is a public, SWIFT-like custody standard on Stellar for tokenized goods in transit worldwide, to integrate with the systems of chambers of commerce, ports and airports.</a:t>
+              <a:t>Then the same rail worldwide, linked to chambers of commerce, ports and airports, with a payment leg after delivery: all future work.</a:t>
             </a:r>
           </a:p>
         </p:txBody>
@@ -17716,7 +17381,7 @@
                 </a:solidFill>
                 <a:latin typeface="Inter Tight"/>
               </a:rPr>
-              <a:t>Rio–Miami first. Our goal: one custody standard for every corridor.</a:t>
+              <a:t>Rio–Miami first. Our goal: one rail for goods, every corridor.</a:t>
             </a:r>
           </a:p>
         </p:txBody>
@@ -18583,7 +18248,7 @@
         <p:spPr>
           <a:xfrm>
             <a:off x="914400" y="3794760"/>
-            <a:ext cx="10972800" cy="1463040"/>
+            <a:ext cx="11247120" cy="1463040"/>
           </a:xfrm>
           <a:prstGeom prst="rect">
             <a:avLst/>
@@ -18605,13 +18270,13 @@
               </a:spcAft>
             </a:pPr>
             <a:r>
-              <a:rPr sz="4400" b="1">
+              <a:rPr sz="3600" b="1">
                 <a:solidFill>
                   <a:srgbClr val="E7E8EA"/>
                 </a:solidFill>
                 <a:latin typeface="Inter Tight"/>
               </a:rPr>
-              <a:t>Know who holds the goods: every handover signed by both custodians.</a:t>
+              <a:t>One record for the goods, from origin to delivery, across every company that touches them.</a:t>
             </a:r>
           </a:p>
         </p:txBody>
@@ -18653,7 +18318,7 @@
                 </a:solidFill>
                 <a:latin typeface="Instrument Sans"/>
               </a:rPr>
-              <a:t>Toward a SWIFT-like custody standard on Stellar  ·  Pilot corridor: Rio–Miami</a:t>
+              <a:t>Toward a SWIFT-like standard on Stellar  ·  Pilot corridor: Rio–Miami</a:t>
             </a:r>
           </a:p>
         </p:txBody>
@@ -19577,7 +19242,7 @@
                 </a:solidFill>
                 <a:latin typeface="Inter Tight"/>
               </a:rPr>
-              <a:t>Who holds the cargo right now?</a:t>
+              <a:t>Who holds the whole chain?</a:t>
             </a:r>
           </a:p>
         </p:txBody>
@@ -19590,14 +19255,14 @@
         </p:nvSpPr>
         <p:spPr>
           <a:xfrm>
-            <a:off x="1463040" y="3415284"/>
-            <a:ext cx="15361919" cy="27432"/>
+            <a:off x="1783080" y="3278124"/>
+            <a:ext cx="3200399" cy="27432"/>
           </a:xfrm>
           <a:prstGeom prst="rect">
             <a:avLst/>
           </a:prstGeom>
           <a:solidFill>
-            <a:srgbClr val="556F00"/>
+            <a:srgbClr val="DFDDD6"/>
           </a:solidFill>
           <a:ln>
             <a:noFill/>
@@ -19634,7 +19299,7 @@
         </p:nvSpPr>
         <p:spPr>
           <a:xfrm>
-            <a:off x="1325880" y="3291840"/>
+            <a:off x="1325880" y="3154680"/>
             <a:ext cx="274320" cy="274320"/>
           </a:xfrm>
           <a:prstGeom prst="ellipse">
@@ -19678,7 +19343,7 @@
         </p:nvSpPr>
         <p:spPr>
           <a:xfrm>
-            <a:off x="274320" y="3657600"/>
+            <a:off x="274320" y="3493008"/>
             <a:ext cx="2377440" cy="457200"/>
           </a:xfrm>
           <a:prstGeom prst="rect">
@@ -19714,20 +19379,20 @@
       </p:sp>
       <p:sp>
         <p:nvSpPr>
-          <p:cNvPr id="128" name="Oval 127"/>
+          <p:cNvPr id="128" name="Rectangle 127"/>
           <p:cNvSpPr/>
           <p:nvPr/>
         </p:nvSpPr>
         <p:spPr>
           <a:xfrm>
-            <a:off x="5166359" y="3291840"/>
-            <a:ext cx="274320" cy="274320"/>
-          </a:xfrm>
-          <a:prstGeom prst="ellipse">
+            <a:off x="5623559" y="3278124"/>
+            <a:ext cx="3200399" cy="27432"/>
+          </a:xfrm>
+          <a:prstGeom prst="rect">
             <a:avLst/>
           </a:prstGeom>
           <a:solidFill>
-            <a:srgbClr val="556F00"/>
+            <a:srgbClr val="DFDDD6"/>
           </a:solidFill>
           <a:ln>
             <a:noFill/>
@@ -19758,55 +19423,13 @@
       </p:sp>
       <p:sp>
         <p:nvSpPr>
-          <p:cNvPr id="129" name="TextBox 128"/>
-          <p:cNvSpPr txBox="1"/>
-          <p:nvPr/>
-        </p:nvSpPr>
-        <p:spPr>
-          <a:xfrm>
-            <a:off x="4114799" y="3657600"/>
-            <a:ext cx="2377440" cy="457200"/>
-          </a:xfrm>
-          <a:prstGeom prst="rect">
-            <a:avLst/>
-          </a:prstGeom>
-          <a:noFill/>
-        </p:spPr>
-        <p:txBody>
-          <a:bodyPr wrap="square" lIns="0" rIns="0" tIns="0" bIns="0" anchor="t">
-            <a:spAutoFit/>
-          </a:bodyPr>
-          <a:lstStyle/>
-          <a:p>
-            <a:pPr algn="ctr">
-              <a:lnSpc>
-                <a:spcPct val="112000"/>
-              </a:lnSpc>
-              <a:spcAft>
-                <a:spcPts val="600"/>
-              </a:spcAft>
-            </a:pPr>
-            <a:r>
-              <a:rPr sz="2200" b="1">
-                <a:solidFill>
-                  <a:srgbClr val="0E0F11"/>
-                </a:solidFill>
-                <a:latin typeface="Instrument Sans"/>
-              </a:rPr>
-              <a:t>Port</a:t>
-            </a:r>
-          </a:p>
-        </p:txBody>
-      </p:sp>
-      <p:sp>
-        <p:nvSpPr>
-          <p:cNvPr id="130" name="Oval 129"/>
+          <p:cNvPr id="129" name="Oval 128"/>
           <p:cNvSpPr/>
           <p:nvPr/>
         </p:nvSpPr>
         <p:spPr>
           <a:xfrm>
-            <a:off x="9006839" y="3291840"/>
+            <a:off x="5166359" y="3154680"/>
             <a:ext cx="274320" cy="274320"/>
           </a:xfrm>
           <a:prstGeom prst="ellipse">
@@ -19844,13 +19467,13 @@
       </p:sp>
       <p:sp>
         <p:nvSpPr>
-          <p:cNvPr id="131" name="TextBox 130"/>
+          <p:cNvPr id="130" name="TextBox 129"/>
           <p:cNvSpPr txBox="1"/>
           <p:nvPr/>
         </p:nvSpPr>
         <p:spPr>
           <a:xfrm>
-            <a:off x="7955279" y="3657600"/>
+            <a:off x="4114799" y="3493008"/>
             <a:ext cx="2377440" cy="457200"/>
           </a:xfrm>
           <a:prstGeom prst="rect">
@@ -19879,27 +19502,27 @@
                 </a:solidFill>
                 <a:latin typeface="Instrument Sans"/>
               </a:rPr>
-              <a:t>Carrier</a:t>
-            </a:r>
-          </a:p>
-        </p:txBody>
-      </p:sp>
-      <p:sp>
-        <p:nvSpPr>
-          <p:cNvPr id="132" name="Oval 131"/>
+              <a:t>Port</a:t>
+            </a:r>
+          </a:p>
+        </p:txBody>
+      </p:sp>
+      <p:sp>
+        <p:nvSpPr>
+          <p:cNvPr id="131" name="Rectangle 130"/>
           <p:cNvSpPr/>
           <p:nvPr/>
         </p:nvSpPr>
         <p:spPr>
           <a:xfrm>
-            <a:off x="12847319" y="3291840"/>
-            <a:ext cx="274320" cy="274320"/>
-          </a:xfrm>
-          <a:prstGeom prst="ellipse">
+            <a:off x="9464039" y="3278124"/>
+            <a:ext cx="3200399" cy="27432"/>
+          </a:xfrm>
+          <a:prstGeom prst="rect">
             <a:avLst/>
           </a:prstGeom>
           <a:solidFill>
-            <a:srgbClr val="556F00"/>
+            <a:srgbClr val="DFDDD6"/>
           </a:solidFill>
           <a:ln>
             <a:noFill/>
@@ -19930,55 +19553,13 @@
       </p:sp>
       <p:sp>
         <p:nvSpPr>
-          <p:cNvPr id="133" name="TextBox 132"/>
-          <p:cNvSpPr txBox="1"/>
-          <p:nvPr/>
-        </p:nvSpPr>
-        <p:spPr>
-          <a:xfrm>
-            <a:off x="11795759" y="3657600"/>
-            <a:ext cx="2377440" cy="457200"/>
-          </a:xfrm>
-          <a:prstGeom prst="rect">
-            <a:avLst/>
-          </a:prstGeom>
-          <a:noFill/>
-        </p:spPr>
-        <p:txBody>
-          <a:bodyPr wrap="square" lIns="0" rIns="0" tIns="0" bIns="0" anchor="t">
-            <a:spAutoFit/>
-          </a:bodyPr>
-          <a:lstStyle/>
-          <a:p>
-            <a:pPr algn="ctr">
-              <a:lnSpc>
-                <a:spcPct val="112000"/>
-              </a:lnSpc>
-              <a:spcAft>
-                <a:spcPts val="600"/>
-              </a:spcAft>
-            </a:pPr>
-            <a:r>
-              <a:rPr sz="2200" b="1">
-                <a:solidFill>
-                  <a:srgbClr val="0E0F11"/>
-                </a:solidFill>
-                <a:latin typeface="Instrument Sans"/>
-              </a:rPr>
-              <a:t>Customs</a:t>
-            </a:r>
-          </a:p>
-        </p:txBody>
-      </p:sp>
-      <p:sp>
-        <p:nvSpPr>
-          <p:cNvPr id="134" name="Oval 133"/>
+          <p:cNvPr id="132" name="Oval 131"/>
           <p:cNvSpPr/>
           <p:nvPr/>
         </p:nvSpPr>
         <p:spPr>
           <a:xfrm>
-            <a:off x="16687800" y="3291840"/>
+            <a:off x="9006839" y="3154680"/>
             <a:ext cx="274320" cy="274320"/>
           </a:xfrm>
           <a:prstGeom prst="ellipse">
@@ -20016,13 +19597,13 @@
       </p:sp>
       <p:sp>
         <p:nvSpPr>
-          <p:cNvPr id="135" name="TextBox 134"/>
+          <p:cNvPr id="133" name="TextBox 132"/>
           <p:cNvSpPr txBox="1"/>
           <p:nvPr/>
         </p:nvSpPr>
         <p:spPr>
           <a:xfrm>
-            <a:off x="15636239" y="3657600"/>
+            <a:off x="7955279" y="3493008"/>
             <a:ext cx="2377440" cy="457200"/>
           </a:xfrm>
           <a:prstGeom prst="rect">
@@ -20051,27 +19632,27 @@
                 </a:solidFill>
                 <a:latin typeface="Instrument Sans"/>
               </a:rPr>
-              <a:t>Recipient</a:t>
-            </a:r>
-          </a:p>
-        </p:txBody>
-      </p:sp>
-      <p:sp>
-        <p:nvSpPr>
-          <p:cNvPr id="136" name="Rectangle 135"/>
+              <a:t>Carrier</a:t>
+            </a:r>
+          </a:p>
+        </p:txBody>
+      </p:sp>
+      <p:sp>
+        <p:nvSpPr>
+          <p:cNvPr id="134" name="Rectangle 133"/>
           <p:cNvSpPr/>
           <p:nvPr/>
         </p:nvSpPr>
         <p:spPr>
           <a:xfrm>
-            <a:off x="914400" y="4421124"/>
-            <a:ext cx="5120640" cy="27432"/>
+            <a:off x="13304519" y="3278124"/>
+            <a:ext cx="3200399" cy="27432"/>
           </a:xfrm>
           <a:prstGeom prst="rect">
             <a:avLst/>
           </a:prstGeom>
           <a:solidFill>
-            <a:srgbClr val="556F00"/>
+            <a:srgbClr val="DFDDD6"/>
           </a:solidFill>
           <a:ln>
             <a:noFill/>
@@ -20102,142 +19683,16 @@
       </p:sp>
       <p:sp>
         <p:nvSpPr>
-          <p:cNvPr id="137" name="TextBox 136"/>
-          <p:cNvSpPr txBox="1"/>
-          <p:nvPr/>
-        </p:nvSpPr>
-        <p:spPr>
-          <a:xfrm>
-            <a:off x="914400" y="4617720"/>
-            <a:ext cx="5120640" cy="1097280"/>
-          </a:xfrm>
-          <a:prstGeom prst="rect">
-            <a:avLst/>
-          </a:prstGeom>
-          <a:noFill/>
-        </p:spPr>
-        <p:txBody>
-          <a:bodyPr wrap="square" lIns="0" rIns="0" tIns="0" bIns="0" anchor="t">
-            <a:spAutoFit/>
-          </a:bodyPr>
-          <a:lstStyle/>
-          <a:p>
-            <a:pPr algn="l">
-              <a:lnSpc>
-                <a:spcPct val="95000"/>
-              </a:lnSpc>
-              <a:spcAft>
-                <a:spcPts val="600"/>
-              </a:spcAft>
-            </a:pPr>
-            <a:r>
-              <a:rPr sz="6400" b="1">
-                <a:solidFill>
-                  <a:srgbClr val="0E0F11"/>
-                </a:solidFill>
-                <a:latin typeface="Inter Tight"/>
-              </a:rPr>
-              <a:t>45M</a:t>
-            </a:r>
-          </a:p>
-        </p:txBody>
-      </p:sp>
-      <p:sp>
-        <p:nvSpPr>
-          <p:cNvPr id="138" name="TextBox 137"/>
-          <p:cNvSpPr txBox="1"/>
-          <p:nvPr/>
-        </p:nvSpPr>
-        <p:spPr>
-          <a:xfrm>
-            <a:off x="914400" y="5760720"/>
-            <a:ext cx="5120640" cy="914400"/>
-          </a:xfrm>
-          <a:prstGeom prst="rect">
-            <a:avLst/>
-          </a:prstGeom>
-          <a:noFill/>
-        </p:spPr>
-        <p:txBody>
-          <a:bodyPr wrap="square" lIns="0" rIns="0" tIns="0" bIns="0" anchor="t">
-            <a:spAutoFit/>
-          </a:bodyPr>
-          <a:lstStyle/>
-          <a:p>
-            <a:pPr algn="l">
-              <a:lnSpc>
-                <a:spcPct val="112000"/>
-              </a:lnSpc>
-              <a:spcAft>
-                <a:spcPts val="600"/>
-              </a:spcAft>
-            </a:pPr>
-            <a:r>
-              <a:rPr sz="2400" b="1">
-                <a:solidFill>
-                  <a:srgbClr val="0E0F11"/>
-                </a:solidFill>
-                <a:latin typeface="Instrument Sans"/>
-              </a:rPr>
-              <a:t>ocean bills of lading issued a year</a:t>
-            </a:r>
-          </a:p>
-        </p:txBody>
-      </p:sp>
-      <p:sp>
-        <p:nvSpPr>
-          <p:cNvPr id="139" name="TextBox 138"/>
-          <p:cNvSpPr txBox="1"/>
-          <p:nvPr/>
-        </p:nvSpPr>
-        <p:spPr>
-          <a:xfrm>
-            <a:off x="914400" y="6675120"/>
-            <a:ext cx="5120640" cy="822960"/>
-          </a:xfrm>
-          <a:prstGeom prst="rect">
-            <a:avLst/>
-          </a:prstGeom>
-          <a:noFill/>
-        </p:spPr>
-        <p:txBody>
-          <a:bodyPr wrap="square" lIns="0" rIns="0" tIns="0" bIns="0" anchor="t">
-            <a:spAutoFit/>
-          </a:bodyPr>
-          <a:lstStyle/>
-          <a:p>
-            <a:pPr algn="l">
-              <a:lnSpc>
-                <a:spcPct val="112000"/>
-              </a:lnSpc>
-              <a:spcAft>
-                <a:spcPts val="600"/>
-              </a:spcAft>
-            </a:pPr>
-            <a:r>
-              <a:rPr sz="1800" b="0">
-                <a:solidFill>
-                  <a:srgbClr val="4D5560"/>
-                </a:solidFill>
-                <a:latin typeface="Instrument Sans"/>
-              </a:rPr>
-              <a:t>DCSA, Feb 2023 (2021 data)</a:t>
-            </a:r>
-          </a:p>
-        </p:txBody>
-      </p:sp>
-      <p:sp>
-        <p:nvSpPr>
-          <p:cNvPr id="140" name="Rectangle 139"/>
+          <p:cNvPr id="135" name="Oval 134"/>
           <p:cNvSpPr/>
           <p:nvPr/>
         </p:nvSpPr>
         <p:spPr>
           <a:xfrm>
-            <a:off x="6492240" y="4421124"/>
-            <a:ext cx="5120640" cy="27432"/>
-          </a:xfrm>
-          <a:prstGeom prst="rect">
+            <a:off x="12847319" y="3154680"/>
+            <a:ext cx="274320" cy="274320"/>
+          </a:xfrm>
+          <a:prstGeom prst="ellipse">
             <a:avLst/>
           </a:prstGeom>
           <a:solidFill>
@@ -20272,14 +19727,14 @@
       </p:sp>
       <p:sp>
         <p:nvSpPr>
-          <p:cNvPr id="141" name="TextBox 140"/>
+          <p:cNvPr id="136" name="TextBox 135"/>
           <p:cNvSpPr txBox="1"/>
           <p:nvPr/>
         </p:nvSpPr>
         <p:spPr>
           <a:xfrm>
-            <a:off x="6492240" y="4617720"/>
-            <a:ext cx="5120640" cy="1097280"/>
+            <a:off x="11795759" y="3493008"/>
+            <a:ext cx="2377440" cy="457200"/>
           </a:xfrm>
           <a:prstGeom prst="rect">
             <a:avLst/>
@@ -20292,49 +19747,7 @@
           </a:bodyPr>
           <a:lstStyle/>
           <a:p>
-            <a:pPr algn="l">
-              <a:lnSpc>
-                <a:spcPct val="95000"/>
-              </a:lnSpc>
-              <a:spcAft>
-                <a:spcPts val="600"/>
-              </a:spcAft>
-            </a:pPr>
-            <a:r>
-              <a:rPr sz="6400" b="1">
-                <a:solidFill>
-                  <a:srgbClr val="0E0F11"/>
-                </a:solidFill>
-                <a:latin typeface="Inter Tight"/>
-              </a:rPr>
-              <a:t>~11%</a:t>
-            </a:r>
-          </a:p>
-        </p:txBody>
-      </p:sp>
-      <p:sp>
-        <p:nvSpPr>
-          <p:cNvPr id="142" name="TextBox 141"/>
-          <p:cNvSpPr txBox="1"/>
-          <p:nvPr/>
-        </p:nvSpPr>
-        <p:spPr>
-          <a:xfrm>
-            <a:off x="6492240" y="5760720"/>
-            <a:ext cx="5120640" cy="914400"/>
-          </a:xfrm>
-          <a:prstGeom prst="rect">
-            <a:avLst/>
-          </a:prstGeom>
-          <a:noFill/>
-        </p:spPr>
-        <p:txBody>
-          <a:bodyPr wrap="square" lIns="0" rIns="0" tIns="0" bIns="0" anchor="t">
-            <a:spAutoFit/>
-          </a:bodyPr>
-          <a:lstStyle/>
-          <a:p>
-            <a:pPr algn="l">
+            <a:pPr algn="ctr">
               <a:lnSpc>
                 <a:spcPct val="112000"/>
               </a:lnSpc>
@@ -20343,71 +19756,29 @@
               </a:spcAft>
             </a:pPr>
             <a:r>
-              <a:rPr sz="2400" b="1">
+              <a:rPr sz="2200" b="1">
                 <a:solidFill>
                   <a:srgbClr val="0E0F11"/>
                 </a:solidFill>
                 <a:latin typeface="Instrument Sans"/>
               </a:rPr>
-              <a:t>of bills of lading issued electronically, 2025</a:t>
-            </a:r>
-          </a:p>
-        </p:txBody>
-      </p:sp>
-      <p:sp>
-        <p:nvSpPr>
-          <p:cNvPr id="143" name="TextBox 142"/>
-          <p:cNvSpPr txBox="1"/>
-          <p:nvPr/>
-        </p:nvSpPr>
-        <p:spPr>
-          <a:xfrm>
-            <a:off x="6492240" y="6675120"/>
-            <a:ext cx="5120640" cy="822960"/>
-          </a:xfrm>
-          <a:prstGeom prst="rect">
-            <a:avLst/>
-          </a:prstGeom>
-          <a:noFill/>
-        </p:spPr>
-        <p:txBody>
-          <a:bodyPr wrap="square" lIns="0" rIns="0" tIns="0" bIns="0" anchor="t">
-            <a:spAutoFit/>
-          </a:bodyPr>
-          <a:lstStyle/>
-          <a:p>
-            <a:pPr algn="l">
-              <a:lnSpc>
-                <a:spcPct val="112000"/>
-              </a:lnSpc>
-              <a:spcAft>
-                <a:spcPts val="600"/>
-              </a:spcAft>
-            </a:pPr>
-            <a:r>
-              <a:rPr sz="1800" b="0">
-                <a:solidFill>
-                  <a:srgbClr val="4D5560"/>
-                </a:solidFill>
-                <a:latin typeface="Instrument Sans"/>
-              </a:rPr>
-              <a:t>DCSA, as of 2025 (Jan 2025 guide: 5.7%)</a:t>
-            </a:r>
-          </a:p>
-        </p:txBody>
-      </p:sp>
-      <p:sp>
-        <p:nvSpPr>
-          <p:cNvPr id="144" name="Rectangle 143"/>
+              <a:t>Customs</a:t>
+            </a:r>
+          </a:p>
+        </p:txBody>
+      </p:sp>
+      <p:sp>
+        <p:nvSpPr>
+          <p:cNvPr id="137" name="Oval 136"/>
           <p:cNvSpPr/>
           <p:nvPr/>
         </p:nvSpPr>
         <p:spPr>
           <a:xfrm>
-            <a:off x="12070080" y="4421124"/>
-            <a:ext cx="5120640" cy="27432"/>
-          </a:xfrm>
-          <a:prstGeom prst="rect">
+            <a:off x="16687800" y="3154680"/>
+            <a:ext cx="274320" cy="274320"/>
+          </a:xfrm>
+          <a:prstGeom prst="ellipse">
             <a:avLst/>
           </a:prstGeom>
           <a:solidFill>
@@ -20442,13 +19813,150 @@
       </p:sp>
       <p:sp>
         <p:nvSpPr>
-          <p:cNvPr id="145" name="TextBox 144"/>
+          <p:cNvPr id="138" name="TextBox 137"/>
           <p:cNvSpPr txBox="1"/>
           <p:nvPr/>
         </p:nvSpPr>
         <p:spPr>
           <a:xfrm>
-            <a:off x="12070080" y="4617720"/>
+            <a:off x="15636239" y="3493008"/>
+            <a:ext cx="2377440" cy="457200"/>
+          </a:xfrm>
+          <a:prstGeom prst="rect">
+            <a:avLst/>
+          </a:prstGeom>
+          <a:noFill/>
+        </p:spPr>
+        <p:txBody>
+          <a:bodyPr wrap="square" lIns="0" rIns="0" tIns="0" bIns="0" anchor="t">
+            <a:spAutoFit/>
+          </a:bodyPr>
+          <a:lstStyle/>
+          <a:p>
+            <a:pPr algn="ctr">
+              <a:lnSpc>
+                <a:spcPct val="112000"/>
+              </a:lnSpc>
+              <a:spcAft>
+                <a:spcPts val="600"/>
+              </a:spcAft>
+            </a:pPr>
+            <a:r>
+              <a:rPr sz="2200" b="1">
+                <a:solidFill>
+                  <a:srgbClr val="0E0F11"/>
+                </a:solidFill>
+                <a:latin typeface="Instrument Sans"/>
+              </a:rPr>
+              <a:t>Recipient</a:t>
+            </a:r>
+          </a:p>
+        </p:txBody>
+      </p:sp>
+      <p:sp>
+        <p:nvSpPr>
+          <p:cNvPr id="139" name="TextBox 138"/>
+          <p:cNvSpPr txBox="1"/>
+          <p:nvPr/>
+        </p:nvSpPr>
+        <p:spPr>
+          <a:xfrm>
+            <a:off x="914400" y="4069080"/>
+            <a:ext cx="16459200" cy="457200"/>
+          </a:xfrm>
+          <a:prstGeom prst="rect">
+            <a:avLst/>
+          </a:prstGeom>
+          <a:noFill/>
+        </p:spPr>
+        <p:txBody>
+          <a:bodyPr wrap="square" lIns="0" rIns="0" tIns="0" bIns="0" anchor="t">
+            <a:spAutoFit/>
+          </a:bodyPr>
+          <a:lstStyle/>
+          <a:p>
+            <a:pPr algn="l">
+              <a:lnSpc>
+                <a:spcPct val="112000"/>
+              </a:lnSpc>
+              <a:spcAft>
+                <a:spcPts val="600"/>
+              </a:spcAft>
+            </a:pPr>
+            <a:r>
+              <a:rPr sz="2200" b="1">
+                <a:solidFill>
+                  <a:srgbClr val="556F00"/>
+                </a:solidFill>
+                <a:latin typeface="Instrument Sans"/>
+              </a:rPr>
+              <a:t>Our hypothesis: </a:t>
+            </a:r>
+            <a:r>
+              <a:rPr sz="2200" b="0">
+                <a:solidFill>
+                  <a:srgbClr val="0E0F11"/>
+                </a:solidFill>
+                <a:latin typeface="Instrument Sans"/>
+              </a:rPr>
+              <a:t>each company keeps its own record of its own leg; nobody holds the chain end to end.</a:t>
+            </a:r>
+          </a:p>
+        </p:txBody>
+      </p:sp>
+      <p:sp>
+        <p:nvSpPr>
+          <p:cNvPr id="140" name="Rectangle 139"/>
+          <p:cNvSpPr/>
+          <p:nvPr/>
+        </p:nvSpPr>
+        <p:spPr>
+          <a:xfrm>
+            <a:off x="914400" y="4695444"/>
+            <a:ext cx="5120640" cy="27432"/>
+          </a:xfrm>
+          <a:prstGeom prst="rect">
+            <a:avLst/>
+          </a:prstGeom>
+          <a:solidFill>
+            <a:srgbClr val="556F00"/>
+          </a:solidFill>
+          <a:ln>
+            <a:noFill/>
+          </a:ln>
+          <a:effectLst/>
+        </p:spPr>
+        <p:style>
+          <a:lnRef idx="1">
+            <a:schemeClr val="accent1"/>
+          </a:lnRef>
+          <a:fillRef idx="3">
+            <a:schemeClr val="accent1"/>
+          </a:fillRef>
+          <a:effectRef idx="0">
+            <a:schemeClr val="accent1"/>
+          </a:effectRef>
+          <a:fontRef idx="minor">
+            <a:schemeClr val="lt1"/>
+          </a:fontRef>
+        </p:style>
+        <p:txBody>
+          <a:bodyPr rtlCol="0" anchor="ctr"/>
+          <a:lstStyle/>
+          <a:p>
+            <a:pPr algn="ctr"/>
+          </a:p>
+        </p:txBody>
+      </p:sp>
+      <p:sp>
+        <p:nvSpPr>
+          <p:cNvPr id="141" name="TextBox 140"/>
+          <p:cNvSpPr txBox="1"/>
+          <p:nvPr/>
+        </p:nvSpPr>
+        <p:spPr>
+          <a:xfrm>
+            <a:off x="914400" y="4892040"/>
             <a:ext cx="5120640" cy="1097280"/>
           </a:xfrm>
           <a:prstGeom prst="rect">
@@ -20477,20 +19985,20 @@
                 </a:solidFill>
                 <a:latin typeface="Inter Tight"/>
               </a:rPr>
-              <a:t>22%</a:t>
-            </a:r>
-          </a:p>
-        </p:txBody>
-      </p:sp>
-      <p:sp>
-        <p:nvSpPr>
-          <p:cNvPr id="146" name="TextBox 145"/>
+              <a:t>45M</a:t>
+            </a:r>
+          </a:p>
+        </p:txBody>
+      </p:sp>
+      <p:sp>
+        <p:nvSpPr>
+          <p:cNvPr id="142" name="TextBox 141"/>
           <p:cNvSpPr txBox="1"/>
           <p:nvPr/>
         </p:nvSpPr>
         <p:spPr>
           <a:xfrm>
-            <a:off x="12070080" y="5760720"/>
+            <a:off x="914400" y="6035040"/>
             <a:ext cx="5120640" cy="914400"/>
           </a:xfrm>
           <a:prstGeom prst="rect">
@@ -20519,20 +20027,20 @@
                 </a:solidFill>
                 <a:latin typeface="Instrument Sans"/>
               </a:rPr>
-              <a:t>of recorded cargo thefts in 2025 involved insiders</a:t>
-            </a:r>
-          </a:p>
-        </p:txBody>
-      </p:sp>
-      <p:sp>
-        <p:nvSpPr>
-          <p:cNvPr id="147" name="TextBox 146"/>
+              <a:t>ocean bills of lading issued a year</a:t>
+            </a:r>
+          </a:p>
+        </p:txBody>
+      </p:sp>
+      <p:sp>
+        <p:nvSpPr>
+          <p:cNvPr id="143" name="TextBox 142"/>
           <p:cNvSpPr txBox="1"/>
           <p:nvPr/>
         </p:nvSpPr>
         <p:spPr>
           <a:xfrm>
-            <a:off x="12070080" y="6675120"/>
+            <a:off x="914400" y="6949440"/>
             <a:ext cx="5120640" cy="822960"/>
           </a:xfrm>
           <a:prstGeom prst="rect">
@@ -20561,6 +20069,346 @@
                 </a:solidFill>
                 <a:latin typeface="Instrument Sans"/>
               </a:rPr>
+              <a:t>DCSA, Feb 2023 (2021 data)</a:t>
+            </a:r>
+          </a:p>
+        </p:txBody>
+      </p:sp>
+      <p:sp>
+        <p:nvSpPr>
+          <p:cNvPr id="144" name="Rectangle 143"/>
+          <p:cNvSpPr/>
+          <p:nvPr/>
+        </p:nvSpPr>
+        <p:spPr>
+          <a:xfrm>
+            <a:off x="6492240" y="4695444"/>
+            <a:ext cx="5120640" cy="27432"/>
+          </a:xfrm>
+          <a:prstGeom prst="rect">
+            <a:avLst/>
+          </a:prstGeom>
+          <a:solidFill>
+            <a:srgbClr val="556F00"/>
+          </a:solidFill>
+          <a:ln>
+            <a:noFill/>
+          </a:ln>
+          <a:effectLst/>
+        </p:spPr>
+        <p:style>
+          <a:lnRef idx="1">
+            <a:schemeClr val="accent1"/>
+          </a:lnRef>
+          <a:fillRef idx="3">
+            <a:schemeClr val="accent1"/>
+          </a:fillRef>
+          <a:effectRef idx="0">
+            <a:schemeClr val="accent1"/>
+          </a:effectRef>
+          <a:fontRef idx="minor">
+            <a:schemeClr val="lt1"/>
+          </a:fontRef>
+        </p:style>
+        <p:txBody>
+          <a:bodyPr rtlCol="0" anchor="ctr"/>
+          <a:lstStyle/>
+          <a:p>
+            <a:pPr algn="ctr"/>
+          </a:p>
+        </p:txBody>
+      </p:sp>
+      <p:sp>
+        <p:nvSpPr>
+          <p:cNvPr id="145" name="TextBox 144"/>
+          <p:cNvSpPr txBox="1"/>
+          <p:nvPr/>
+        </p:nvSpPr>
+        <p:spPr>
+          <a:xfrm>
+            <a:off x="6492240" y="4892040"/>
+            <a:ext cx="5120640" cy="1097280"/>
+          </a:xfrm>
+          <a:prstGeom prst="rect">
+            <a:avLst/>
+          </a:prstGeom>
+          <a:noFill/>
+        </p:spPr>
+        <p:txBody>
+          <a:bodyPr wrap="square" lIns="0" rIns="0" tIns="0" bIns="0" anchor="t">
+            <a:spAutoFit/>
+          </a:bodyPr>
+          <a:lstStyle/>
+          <a:p>
+            <a:pPr algn="l">
+              <a:lnSpc>
+                <a:spcPct val="95000"/>
+              </a:lnSpc>
+              <a:spcAft>
+                <a:spcPts val="600"/>
+              </a:spcAft>
+            </a:pPr>
+            <a:r>
+              <a:rPr sz="6400" b="1">
+                <a:solidFill>
+                  <a:srgbClr val="0E0F11"/>
+                </a:solidFill>
+                <a:latin typeface="Inter Tight"/>
+              </a:rPr>
+              <a:t>~11%</a:t>
+            </a:r>
+          </a:p>
+        </p:txBody>
+      </p:sp>
+      <p:sp>
+        <p:nvSpPr>
+          <p:cNvPr id="146" name="TextBox 145"/>
+          <p:cNvSpPr txBox="1"/>
+          <p:nvPr/>
+        </p:nvSpPr>
+        <p:spPr>
+          <a:xfrm>
+            <a:off x="6492240" y="6035040"/>
+            <a:ext cx="5120640" cy="914400"/>
+          </a:xfrm>
+          <a:prstGeom prst="rect">
+            <a:avLst/>
+          </a:prstGeom>
+          <a:noFill/>
+        </p:spPr>
+        <p:txBody>
+          <a:bodyPr wrap="square" lIns="0" rIns="0" tIns="0" bIns="0" anchor="t">
+            <a:spAutoFit/>
+          </a:bodyPr>
+          <a:lstStyle/>
+          <a:p>
+            <a:pPr algn="l">
+              <a:lnSpc>
+                <a:spcPct val="112000"/>
+              </a:lnSpc>
+              <a:spcAft>
+                <a:spcPts val="600"/>
+              </a:spcAft>
+            </a:pPr>
+            <a:r>
+              <a:rPr sz="2400" b="1">
+                <a:solidFill>
+                  <a:srgbClr val="0E0F11"/>
+                </a:solidFill>
+                <a:latin typeface="Instrument Sans"/>
+              </a:rPr>
+              <a:t>of bills of lading issued electronically, 2025</a:t>
+            </a:r>
+          </a:p>
+        </p:txBody>
+      </p:sp>
+      <p:sp>
+        <p:nvSpPr>
+          <p:cNvPr id="147" name="TextBox 146"/>
+          <p:cNvSpPr txBox="1"/>
+          <p:nvPr/>
+        </p:nvSpPr>
+        <p:spPr>
+          <a:xfrm>
+            <a:off x="6492240" y="6949440"/>
+            <a:ext cx="5120640" cy="822960"/>
+          </a:xfrm>
+          <a:prstGeom prst="rect">
+            <a:avLst/>
+          </a:prstGeom>
+          <a:noFill/>
+        </p:spPr>
+        <p:txBody>
+          <a:bodyPr wrap="square" lIns="0" rIns="0" tIns="0" bIns="0" anchor="t">
+            <a:spAutoFit/>
+          </a:bodyPr>
+          <a:lstStyle/>
+          <a:p>
+            <a:pPr algn="l">
+              <a:lnSpc>
+                <a:spcPct val="112000"/>
+              </a:lnSpc>
+              <a:spcAft>
+                <a:spcPts val="600"/>
+              </a:spcAft>
+            </a:pPr>
+            <a:r>
+              <a:rPr sz="1800" b="0">
+                <a:solidFill>
+                  <a:srgbClr val="4D5560"/>
+                </a:solidFill>
+                <a:latin typeface="Instrument Sans"/>
+              </a:rPr>
+              <a:t>DCSA, as of 2025 (Jan 2025 guide: 5.7%)</a:t>
+            </a:r>
+          </a:p>
+        </p:txBody>
+      </p:sp>
+      <p:sp>
+        <p:nvSpPr>
+          <p:cNvPr id="148" name="Rectangle 147"/>
+          <p:cNvSpPr/>
+          <p:nvPr/>
+        </p:nvSpPr>
+        <p:spPr>
+          <a:xfrm>
+            <a:off x="12070080" y="4695444"/>
+            <a:ext cx="5120640" cy="27432"/>
+          </a:xfrm>
+          <a:prstGeom prst="rect">
+            <a:avLst/>
+          </a:prstGeom>
+          <a:solidFill>
+            <a:srgbClr val="556F00"/>
+          </a:solidFill>
+          <a:ln>
+            <a:noFill/>
+          </a:ln>
+          <a:effectLst/>
+        </p:spPr>
+        <p:style>
+          <a:lnRef idx="1">
+            <a:schemeClr val="accent1"/>
+          </a:lnRef>
+          <a:fillRef idx="3">
+            <a:schemeClr val="accent1"/>
+          </a:fillRef>
+          <a:effectRef idx="0">
+            <a:schemeClr val="accent1"/>
+          </a:effectRef>
+          <a:fontRef idx="minor">
+            <a:schemeClr val="lt1"/>
+          </a:fontRef>
+        </p:style>
+        <p:txBody>
+          <a:bodyPr rtlCol="0" anchor="ctr"/>
+          <a:lstStyle/>
+          <a:p>
+            <a:pPr algn="ctr"/>
+          </a:p>
+        </p:txBody>
+      </p:sp>
+      <p:sp>
+        <p:nvSpPr>
+          <p:cNvPr id="149" name="TextBox 148"/>
+          <p:cNvSpPr txBox="1"/>
+          <p:nvPr/>
+        </p:nvSpPr>
+        <p:spPr>
+          <a:xfrm>
+            <a:off x="12070080" y="4892040"/>
+            <a:ext cx="5120640" cy="1097280"/>
+          </a:xfrm>
+          <a:prstGeom prst="rect">
+            <a:avLst/>
+          </a:prstGeom>
+          <a:noFill/>
+        </p:spPr>
+        <p:txBody>
+          <a:bodyPr wrap="square" lIns="0" rIns="0" tIns="0" bIns="0" anchor="t">
+            <a:spAutoFit/>
+          </a:bodyPr>
+          <a:lstStyle/>
+          <a:p>
+            <a:pPr algn="l">
+              <a:lnSpc>
+                <a:spcPct val="95000"/>
+              </a:lnSpc>
+              <a:spcAft>
+                <a:spcPts val="600"/>
+              </a:spcAft>
+            </a:pPr>
+            <a:r>
+              <a:rPr sz="6400" b="1">
+                <a:solidFill>
+                  <a:srgbClr val="0E0F11"/>
+                </a:solidFill>
+                <a:latin typeface="Inter Tight"/>
+              </a:rPr>
+              <a:t>22%</a:t>
+            </a:r>
+          </a:p>
+        </p:txBody>
+      </p:sp>
+      <p:sp>
+        <p:nvSpPr>
+          <p:cNvPr id="150" name="TextBox 149"/>
+          <p:cNvSpPr txBox="1"/>
+          <p:nvPr/>
+        </p:nvSpPr>
+        <p:spPr>
+          <a:xfrm>
+            <a:off x="12070080" y="6035040"/>
+            <a:ext cx="5120640" cy="914400"/>
+          </a:xfrm>
+          <a:prstGeom prst="rect">
+            <a:avLst/>
+          </a:prstGeom>
+          <a:noFill/>
+        </p:spPr>
+        <p:txBody>
+          <a:bodyPr wrap="square" lIns="0" rIns="0" tIns="0" bIns="0" anchor="t">
+            <a:spAutoFit/>
+          </a:bodyPr>
+          <a:lstStyle/>
+          <a:p>
+            <a:pPr algn="l">
+              <a:lnSpc>
+                <a:spcPct val="112000"/>
+              </a:lnSpc>
+              <a:spcAft>
+                <a:spcPts val="600"/>
+              </a:spcAft>
+            </a:pPr>
+            <a:r>
+              <a:rPr sz="2400" b="1">
+                <a:solidFill>
+                  <a:srgbClr val="0E0F11"/>
+                </a:solidFill>
+                <a:latin typeface="Instrument Sans"/>
+              </a:rPr>
+              <a:t>of recorded cargo thefts in 2025 involved insiders</a:t>
+            </a:r>
+          </a:p>
+        </p:txBody>
+      </p:sp>
+      <p:sp>
+        <p:nvSpPr>
+          <p:cNvPr id="151" name="TextBox 150"/>
+          <p:cNvSpPr txBox="1"/>
+          <p:nvPr/>
+        </p:nvSpPr>
+        <p:spPr>
+          <a:xfrm>
+            <a:off x="12070080" y="6949440"/>
+            <a:ext cx="5120640" cy="822960"/>
+          </a:xfrm>
+          <a:prstGeom prst="rect">
+            <a:avLst/>
+          </a:prstGeom>
+          <a:noFill/>
+        </p:spPr>
+        <p:txBody>
+          <a:bodyPr wrap="square" lIns="0" rIns="0" tIns="0" bIns="0" anchor="t">
+            <a:spAutoFit/>
+          </a:bodyPr>
+          <a:lstStyle/>
+          <a:p>
+            <a:pPr algn="l">
+              <a:lnSpc>
+                <a:spcPct val="112000"/>
+              </a:lnSpc>
+              <a:spcAft>
+                <a:spcPts val="600"/>
+              </a:spcAft>
+            </a:pPr>
+            <a:r>
+              <a:rPr sz="1800" b="0">
+                <a:solidFill>
+                  <a:srgbClr val="4D5560"/>
+                </a:solidFill>
+                <a:latin typeface="Instrument Sans"/>
+              </a:rPr>
               <a:t>TT Club &amp; BSI Cargo Theft Report, Apr 2026</a:t>
             </a:r>
           </a:p>
@@ -20568,13 +20416,13 @@
       </p:sp>
       <p:sp>
         <p:nvSpPr>
-          <p:cNvPr id="148" name="TextBox 147"/>
+          <p:cNvPr id="152" name="TextBox 151"/>
           <p:cNvSpPr txBox="1"/>
           <p:nvPr/>
         </p:nvSpPr>
         <p:spPr>
           <a:xfrm>
-            <a:off x="914400" y="7863840"/>
+            <a:off x="914400" y="7909560"/>
             <a:ext cx="16459200" cy="822960"/>
           </a:xfrm>
           <a:prstGeom prst="rect">
@@ -20828,7 +20676,7 @@
                 <a:cs typeface="JetBrains Mono"/>
                 <a:sym typeface="JetBrains Mono"/>
               </a:rPr>
-              <a:t>NEXT ▸ THE SOLUTION</a:t>
+              <a:t>NEXT ▸ THE STANDARD</a:t>
             </a:r>
             <a:endParaRPr/>
           </a:p>
@@ -21878,7 +21726,7 @@
                 <a:cs typeface="JetBrains Mono"/>
                 <a:sym typeface="JetBrains Mono"/>
               </a:rPr>
-              <a:t>NEXT ▸ LIVE ON TESTNET</a:t>
+              <a:t>NEXT ▸ THE RAIL</a:t>
             </a:r>
             <a:endParaRPr/>
           </a:p>
@@ -21893,7 +21741,7 @@
         <p:spPr>
           <a:xfrm>
             <a:off x="914400" y="1417320"/>
-            <a:ext cx="2468879" cy="475488"/>
+            <a:ext cx="5212080" cy="475488"/>
           </a:xfrm>
           <a:prstGeom prst="roundRect">
             <a:avLst>
@@ -21932,7 +21780,7 @@
                 <a:cs typeface="JetBrains Mono"/>
                 <a:sym typeface="JetBrains Mono"/>
               </a:rPr>
-              <a:t>THE SOLUTION</a:t>
+              <a:t>THE PROPOSAL · A PUBLIC STANDARD</a:t>
             </a:r>
             <a:endParaRPr/>
           </a:p>
@@ -22100,34 +21948,431 @@
                 </a:solidFill>
                 <a:latin typeface="Inter Tight"/>
               </a:rPr>
-              <a:t>Both custodians sign, or nothing changes</a:t>
-            </a:r>
-          </a:p>
-        </p:txBody>
-      </p:sp>
-      <p:sp>
-        <p:nvSpPr>
-          <p:cNvPr id="125" name="Rounded Rectangle 124"/>
+              <a:t>A SWIFT-like standard: integrate once</a:t>
+            </a:r>
+          </a:p>
+        </p:txBody>
+      </p:sp>
+      <p:sp>
+        <p:nvSpPr>
+          <p:cNvPr id="125" name="TextBox 124"/>
+          <p:cNvSpPr txBox="1"/>
+          <p:nvPr/>
+        </p:nvSpPr>
+        <p:spPr>
+          <a:xfrm>
+            <a:off x="914400" y="3063240"/>
+            <a:ext cx="16459200" cy="1097280"/>
+          </a:xfrm>
+          <a:prstGeom prst="rect">
+            <a:avLst/>
+          </a:prstGeom>
+          <a:noFill/>
+        </p:spPr>
+        <p:txBody>
+          <a:bodyPr wrap="square" lIns="0" rIns="0" tIns="0" bIns="0" anchor="t">
+            <a:spAutoFit/>
+          </a:bodyPr>
+          <a:lstStyle/>
+          <a:p>
+            <a:pPr algn="l">
+              <a:lnSpc>
+                <a:spcPct val="112000"/>
+              </a:lnSpc>
+              <a:spcAft>
+                <a:spcPts val="600"/>
+              </a:spcAft>
+            </a:pPr>
+            <a:r>
+              <a:rPr sz="2400" b="1">
+                <a:solidFill>
+                  <a:srgbClr val="0E0F11"/>
+                </a:solidFill>
+                <a:latin typeface="Instrument Sans"/>
+              </a:rPr>
+              <a:t>The goal is </a:t>
+            </a:r>
+            <a:r>
+              <a:rPr sz="2400" b="0">
+                <a:solidFill>
+                  <a:srgbClr val="0E0F11"/>
+                </a:solidFill>
+                <a:latin typeface="Instrument Sans"/>
+              </a:rPr>
+              <a:t>a public, SWIFT-like custody standard on Stellar: a port, airport, carrier, chamber of commerce or financier would integrate once and reach every company that joins, corridor after corridor.</a:t>
+            </a:r>
+          </a:p>
+        </p:txBody>
+      </p:sp>
+      <p:cxnSp>
+        <p:nvCxnSpPr>
+          <p:cNvPr id="126" name="Connector 125"/>
+          <p:cNvCxnSpPr/>
+          <p:nvPr/>
+        </p:nvCxnSpPr>
+        <p:spPr>
+          <a:xfrm>
+            <a:off x="2560320" y="4572000"/>
+            <a:ext cx="826163" cy="600243"/>
+          </a:xfrm>
+          <a:prstGeom prst="line">
+            <a:avLst/>
+          </a:prstGeom>
+          <a:ln w="15875">
+            <a:solidFill>
+              <a:srgbClr val="4D5560"/>
+            </a:solidFill>
+          </a:ln>
+        </p:spPr>
+        <p:style>
+          <a:lnRef idx="2">
+            <a:schemeClr val="accent1"/>
+          </a:lnRef>
+          <a:fillRef idx="0">
+            <a:schemeClr val="accent1"/>
+          </a:fillRef>
+          <a:effectRef idx="1">
+            <a:schemeClr val="accent1"/>
+          </a:effectRef>
+          <a:fontRef idx="minor">
+            <a:schemeClr val="tx1"/>
+          </a:fontRef>
+        </p:style>
+      </p:cxnSp>
+      <p:cxnSp>
+        <p:nvCxnSpPr>
+          <p:cNvPr id="127" name="Connector 126"/>
+          <p:cNvCxnSpPr/>
+          <p:nvPr/>
+        </p:nvCxnSpPr>
+        <p:spPr>
+          <a:xfrm>
+            <a:off x="2560320" y="4572000"/>
+            <a:ext cx="510597" cy="1571456"/>
+          </a:xfrm>
+          <a:prstGeom prst="line">
+            <a:avLst/>
+          </a:prstGeom>
+          <a:ln w="15875">
+            <a:solidFill>
+              <a:srgbClr val="4D5560"/>
+            </a:solidFill>
+          </a:ln>
+        </p:spPr>
+        <p:style>
+          <a:lnRef idx="2">
+            <a:schemeClr val="accent1"/>
+          </a:lnRef>
+          <a:fillRef idx="0">
+            <a:schemeClr val="accent1"/>
+          </a:fillRef>
+          <a:effectRef idx="1">
+            <a:schemeClr val="accent1"/>
+          </a:effectRef>
+          <a:fontRef idx="minor">
+            <a:schemeClr val="tx1"/>
+          </a:fontRef>
+        </p:style>
+      </p:cxnSp>
+      <p:cxnSp>
+        <p:nvCxnSpPr>
+          <p:cNvPr id="128" name="Connector 127"/>
+          <p:cNvCxnSpPr/>
+          <p:nvPr/>
+        </p:nvCxnSpPr>
+        <p:spPr>
+          <a:xfrm flipH="1">
+            <a:off x="2049722" y="4572000"/>
+            <a:ext cx="510598" cy="1571456"/>
+          </a:xfrm>
+          <a:prstGeom prst="line">
+            <a:avLst/>
+          </a:prstGeom>
+          <a:ln w="15875">
+            <a:solidFill>
+              <a:srgbClr val="4D5560"/>
+            </a:solidFill>
+          </a:ln>
+        </p:spPr>
+        <p:style>
+          <a:lnRef idx="2">
+            <a:schemeClr val="accent1"/>
+          </a:lnRef>
+          <a:fillRef idx="0">
+            <a:schemeClr val="accent1"/>
+          </a:fillRef>
+          <a:effectRef idx="1">
+            <a:schemeClr val="accent1"/>
+          </a:effectRef>
+          <a:fontRef idx="minor">
+            <a:schemeClr val="tx1"/>
+          </a:fontRef>
+        </p:style>
+      </p:cxnSp>
+      <p:cxnSp>
+        <p:nvCxnSpPr>
+          <p:cNvPr id="129" name="Connector 128"/>
+          <p:cNvCxnSpPr/>
+          <p:nvPr/>
+        </p:nvCxnSpPr>
+        <p:spPr>
+          <a:xfrm flipH="1">
+            <a:off x="1734156" y="4572000"/>
+            <a:ext cx="826164" cy="600243"/>
+          </a:xfrm>
+          <a:prstGeom prst="line">
+            <a:avLst/>
+          </a:prstGeom>
+          <a:ln w="15875">
+            <a:solidFill>
+              <a:srgbClr val="4D5560"/>
+            </a:solidFill>
+          </a:ln>
+        </p:spPr>
+        <p:style>
+          <a:lnRef idx="2">
+            <a:schemeClr val="accent1"/>
+          </a:lnRef>
+          <a:fillRef idx="0">
+            <a:schemeClr val="accent1"/>
+          </a:fillRef>
+          <a:effectRef idx="1">
+            <a:schemeClr val="accent1"/>
+          </a:effectRef>
+          <a:fontRef idx="minor">
+            <a:schemeClr val="tx1"/>
+          </a:fontRef>
+        </p:style>
+      </p:cxnSp>
+      <p:cxnSp>
+        <p:nvCxnSpPr>
+          <p:cNvPr id="130" name="Connector 129"/>
+          <p:cNvCxnSpPr/>
+          <p:nvPr/>
+        </p:nvCxnSpPr>
+        <p:spPr>
+          <a:xfrm flipH="1">
+            <a:off x="3070917" y="5172243"/>
+            <a:ext cx="315566" cy="971213"/>
+          </a:xfrm>
+          <a:prstGeom prst="line">
+            <a:avLst/>
+          </a:prstGeom>
+          <a:ln w="15875">
+            <a:solidFill>
+              <a:srgbClr val="4D5560"/>
+            </a:solidFill>
+          </a:ln>
+        </p:spPr>
+        <p:style>
+          <a:lnRef idx="2">
+            <a:schemeClr val="accent1"/>
+          </a:lnRef>
+          <a:fillRef idx="0">
+            <a:schemeClr val="accent1"/>
+          </a:fillRef>
+          <a:effectRef idx="1">
+            <a:schemeClr val="accent1"/>
+          </a:effectRef>
+          <a:fontRef idx="minor">
+            <a:schemeClr val="tx1"/>
+          </a:fontRef>
+        </p:style>
+      </p:cxnSp>
+      <p:cxnSp>
+        <p:nvCxnSpPr>
+          <p:cNvPr id="131" name="Connector 130"/>
+          <p:cNvCxnSpPr/>
+          <p:nvPr/>
+        </p:nvCxnSpPr>
+        <p:spPr>
+          <a:xfrm flipH="1">
+            <a:off x="2049722" y="5172243"/>
+            <a:ext cx="1336761" cy="971213"/>
+          </a:xfrm>
+          <a:prstGeom prst="line">
+            <a:avLst/>
+          </a:prstGeom>
+          <a:ln w="15875">
+            <a:solidFill>
+              <a:srgbClr val="4D5560"/>
+            </a:solidFill>
+          </a:ln>
+        </p:spPr>
+        <p:style>
+          <a:lnRef idx="2">
+            <a:schemeClr val="accent1"/>
+          </a:lnRef>
+          <a:fillRef idx="0">
+            <a:schemeClr val="accent1"/>
+          </a:fillRef>
+          <a:effectRef idx="1">
+            <a:schemeClr val="accent1"/>
+          </a:effectRef>
+          <a:fontRef idx="minor">
+            <a:schemeClr val="tx1"/>
+          </a:fontRef>
+        </p:style>
+      </p:cxnSp>
+      <p:cxnSp>
+        <p:nvCxnSpPr>
+          <p:cNvPr id="132" name="Connector 131"/>
+          <p:cNvCxnSpPr/>
+          <p:nvPr/>
+        </p:nvCxnSpPr>
+        <p:spPr>
+          <a:xfrm flipH="1">
+            <a:off x="1734156" y="5172243"/>
+            <a:ext cx="1652327" cy="0"/>
+          </a:xfrm>
+          <a:prstGeom prst="line">
+            <a:avLst/>
+          </a:prstGeom>
+          <a:ln w="15875">
+            <a:solidFill>
+              <a:srgbClr val="4D5560"/>
+            </a:solidFill>
+          </a:ln>
+        </p:spPr>
+        <p:style>
+          <a:lnRef idx="2">
+            <a:schemeClr val="accent1"/>
+          </a:lnRef>
+          <a:fillRef idx="0">
+            <a:schemeClr val="accent1"/>
+          </a:fillRef>
+          <a:effectRef idx="1">
+            <a:schemeClr val="accent1"/>
+          </a:effectRef>
+          <a:fontRef idx="minor">
+            <a:schemeClr val="tx1"/>
+          </a:fontRef>
+        </p:style>
+      </p:cxnSp>
+      <p:cxnSp>
+        <p:nvCxnSpPr>
+          <p:cNvPr id="133" name="Connector 132"/>
+          <p:cNvCxnSpPr/>
+          <p:nvPr/>
+        </p:nvCxnSpPr>
+        <p:spPr>
+          <a:xfrm flipH="1">
+            <a:off x="2049722" y="6143456"/>
+            <a:ext cx="1021195" cy="0"/>
+          </a:xfrm>
+          <a:prstGeom prst="line">
+            <a:avLst/>
+          </a:prstGeom>
+          <a:ln w="15875">
+            <a:solidFill>
+              <a:srgbClr val="4D5560"/>
+            </a:solidFill>
+          </a:ln>
+        </p:spPr>
+        <p:style>
+          <a:lnRef idx="2">
+            <a:schemeClr val="accent1"/>
+          </a:lnRef>
+          <a:fillRef idx="0">
+            <a:schemeClr val="accent1"/>
+          </a:fillRef>
+          <a:effectRef idx="1">
+            <a:schemeClr val="accent1"/>
+          </a:effectRef>
+          <a:fontRef idx="minor">
+            <a:schemeClr val="tx1"/>
+          </a:fontRef>
+        </p:style>
+      </p:cxnSp>
+      <p:cxnSp>
+        <p:nvCxnSpPr>
+          <p:cNvPr id="134" name="Connector 133"/>
+          <p:cNvCxnSpPr/>
+          <p:nvPr/>
+        </p:nvCxnSpPr>
+        <p:spPr>
+          <a:xfrm flipH="1" flipV="1">
+            <a:off x="1734156" y="5172243"/>
+            <a:ext cx="1336761" cy="971213"/>
+          </a:xfrm>
+          <a:prstGeom prst="line">
+            <a:avLst/>
+          </a:prstGeom>
+          <a:ln w="15875">
+            <a:solidFill>
+              <a:srgbClr val="4D5560"/>
+            </a:solidFill>
+          </a:ln>
+        </p:spPr>
+        <p:style>
+          <a:lnRef idx="2">
+            <a:schemeClr val="accent1"/>
+          </a:lnRef>
+          <a:fillRef idx="0">
+            <a:schemeClr val="accent1"/>
+          </a:fillRef>
+          <a:effectRef idx="1">
+            <a:schemeClr val="accent1"/>
+          </a:effectRef>
+          <a:fontRef idx="minor">
+            <a:schemeClr val="tx1"/>
+          </a:fontRef>
+        </p:style>
+      </p:cxnSp>
+      <p:cxnSp>
+        <p:nvCxnSpPr>
+          <p:cNvPr id="135" name="Connector 134"/>
+          <p:cNvCxnSpPr/>
+          <p:nvPr/>
+        </p:nvCxnSpPr>
+        <p:spPr>
+          <a:xfrm flipH="1" flipV="1">
+            <a:off x="1734156" y="5172243"/>
+            <a:ext cx="315566" cy="971213"/>
+          </a:xfrm>
+          <a:prstGeom prst="line">
+            <a:avLst/>
+          </a:prstGeom>
+          <a:ln w="15875">
+            <a:solidFill>
+              <a:srgbClr val="4D5560"/>
+            </a:solidFill>
+          </a:ln>
+        </p:spPr>
+        <p:style>
+          <a:lnRef idx="2">
+            <a:schemeClr val="accent1"/>
+          </a:lnRef>
+          <a:fillRef idx="0">
+            <a:schemeClr val="accent1"/>
+          </a:fillRef>
+          <a:effectRef idx="1">
+            <a:schemeClr val="accent1"/>
+          </a:effectRef>
+          <a:fontRef idx="minor">
+            <a:schemeClr val="tx1"/>
+          </a:fontRef>
+        </p:style>
+      </p:cxnSp>
+      <p:sp>
+        <p:nvSpPr>
+          <p:cNvPr id="136" name="Oval 135"/>
           <p:cNvSpPr/>
           <p:nvPr/>
         </p:nvSpPr>
         <p:spPr>
           <a:xfrm>
-            <a:off x="914400" y="3291840"/>
-            <a:ext cx="4480560" cy="1325880"/>
-          </a:xfrm>
-          <a:prstGeom prst="roundRect">
-            <a:avLst>
-              <a:gd name="adj" fmla="val 11034"/>
-            </a:avLst>
+            <a:off x="2441448" y="4453128"/>
+            <a:ext cx="237744" cy="237744"/>
+          </a:xfrm>
+          <a:prstGeom prst="ellipse">
+            <a:avLst/>
           </a:prstGeom>
           <a:solidFill>
-            <a:srgbClr val="FFFFFF"/>
+            <a:srgbClr val="0E0F11"/>
           </a:solidFill>
-          <a:ln w="12700">
-            <a:solidFill>
-              <a:srgbClr val="DFDDD6"/>
-            </a:solidFill>
+          <a:ln>
+            <a:noFill/>
           </a:ln>
           <a:effectLst/>
         </p:spPr>
@@ -22155,83 +22400,20 @@
       </p:sp>
       <p:sp>
         <p:nvSpPr>
-          <p:cNvPr id="126" name="TextBox 125"/>
-          <p:cNvSpPr txBox="1"/>
-          <p:nvPr/>
-        </p:nvSpPr>
-        <p:spPr>
-          <a:xfrm>
-            <a:off x="914400" y="3474720"/>
-            <a:ext cx="4480560" cy="1005840"/>
-          </a:xfrm>
-          <a:prstGeom prst="rect">
-            <a:avLst/>
-          </a:prstGeom>
-          <a:noFill/>
-        </p:spPr>
-        <p:txBody>
-          <a:bodyPr wrap="square" lIns="0" rIns="0" tIns="0" bIns="0" anchor="t">
-            <a:spAutoFit/>
-          </a:bodyPr>
-          <a:lstStyle/>
-          <a:p>
-            <a:pPr algn="ctr">
-              <a:lnSpc>
-                <a:spcPct val="112000"/>
-              </a:lnSpc>
-              <a:spcAft>
-                <a:spcPts val="200"/>
-              </a:spcAft>
-            </a:pPr>
-            <a:r>
-              <a:rPr sz="2800" b="1">
-                <a:solidFill>
-                  <a:srgbClr val="0E0F11"/>
-                </a:solidFill>
-                <a:latin typeface="Instrument Sans"/>
-              </a:rPr>
-              <a:t>Outgoing custodian</a:t>
-            </a:r>
-          </a:p>
-          <a:p>
-            <a:pPr algn="ctr">
-              <a:lnSpc>
-                <a:spcPct val="112000"/>
-              </a:lnSpc>
-              <a:spcAft>
-                <a:spcPts val="200"/>
-              </a:spcAft>
-            </a:pPr>
-            <a:r>
-              <a:rPr sz="1800" b="0">
-                <a:solidFill>
-                  <a:srgbClr val="4D5560"/>
-                </a:solidFill>
-                <a:latin typeface="JetBrains Mono"/>
-              </a:rPr>
-              <a:t>signs</a:t>
-            </a:r>
-          </a:p>
-        </p:txBody>
-      </p:sp>
-      <p:sp>
-        <p:nvSpPr>
-          <p:cNvPr id="127" name="Rounded Rectangle 126"/>
+          <p:cNvPr id="137" name="Oval 136"/>
           <p:cNvSpPr/>
           <p:nvPr/>
         </p:nvSpPr>
         <p:spPr>
           <a:xfrm>
-            <a:off x="5989320" y="3291840"/>
-            <a:ext cx="6309360" cy="1325880"/>
-          </a:xfrm>
-          <a:prstGeom prst="roundRect">
-            <a:avLst>
-              <a:gd name="adj" fmla="val 11034"/>
-            </a:avLst>
+            <a:off x="3267611" y="5053371"/>
+            <a:ext cx="237744" cy="237744"/>
+          </a:xfrm>
+          <a:prstGeom prst="ellipse">
+            <a:avLst/>
           </a:prstGeom>
           <a:solidFill>
-            <a:srgbClr val="C6F24E"/>
+            <a:srgbClr val="0E0F11"/>
           </a:solidFill>
           <a:ln>
             <a:noFill/>
@@ -22262,88 +22444,23 @@
       </p:sp>
       <p:sp>
         <p:nvSpPr>
-          <p:cNvPr id="128" name="TextBox 127"/>
-          <p:cNvSpPr txBox="1"/>
-          <p:nvPr/>
-        </p:nvSpPr>
-        <p:spPr>
-          <a:xfrm>
-            <a:off x="5989320" y="3474720"/>
-            <a:ext cx="6309360" cy="1005840"/>
-          </a:xfrm>
-          <a:prstGeom prst="rect">
-            <a:avLst/>
-          </a:prstGeom>
-          <a:noFill/>
-        </p:spPr>
-        <p:txBody>
-          <a:bodyPr wrap="square" lIns="0" rIns="0" tIns="0" bIns="0" anchor="t">
-            <a:spAutoFit/>
-          </a:bodyPr>
-          <a:lstStyle/>
-          <a:p>
-            <a:pPr algn="ctr">
-              <a:lnSpc>
-                <a:spcPct val="112000"/>
-              </a:lnSpc>
-              <a:spcAft>
-                <a:spcPts val="200"/>
-              </a:spcAft>
-            </a:pPr>
-            <a:r>
-              <a:rPr sz="2800" b="1">
-                <a:solidFill>
-                  <a:srgbClr val="0E0F11"/>
-                </a:solidFill>
-                <a:latin typeface="Instrument Sans"/>
-              </a:rPr>
-              <a:t>One Stellar transaction</a:t>
-            </a:r>
-          </a:p>
-          <a:p>
-            <a:pPr algn="ctr">
-              <a:lnSpc>
-                <a:spcPct val="112000"/>
-              </a:lnSpc>
-              <a:spcAft>
-                <a:spcPts val="200"/>
-              </a:spcAft>
-            </a:pPr>
-            <a:r>
-              <a:rPr sz="1800" b="0">
-                <a:solidFill>
-                  <a:srgbClr val="0E0F11"/>
-                </a:solidFill>
-                <a:latin typeface="JetBrains Mono"/>
-              </a:rPr>
-              <a:t>custody_registry.handover</a:t>
-            </a:r>
-          </a:p>
-        </p:txBody>
-      </p:sp>
-      <p:sp>
-        <p:nvSpPr>
-          <p:cNvPr id="129" name="Rounded Rectangle 128"/>
+          <p:cNvPr id="138" name="Oval 137"/>
           <p:cNvSpPr/>
           <p:nvPr/>
         </p:nvSpPr>
         <p:spPr>
           <a:xfrm>
-            <a:off x="12893040" y="3291840"/>
-            <a:ext cx="4480560" cy="1325880"/>
-          </a:xfrm>
-          <a:prstGeom prst="roundRect">
-            <a:avLst>
-              <a:gd name="adj" fmla="val 11034"/>
-            </a:avLst>
+            <a:off x="2952045" y="6024584"/>
+            <a:ext cx="237744" cy="237744"/>
+          </a:xfrm>
+          <a:prstGeom prst="ellipse">
+            <a:avLst/>
           </a:prstGeom>
           <a:solidFill>
-            <a:srgbClr val="FFFFFF"/>
+            <a:srgbClr val="0E0F11"/>
           </a:solidFill>
-          <a:ln w="12700">
-            <a:solidFill>
-              <a:srgbClr val="DFDDD6"/>
-            </a:solidFill>
+          <a:ln>
+            <a:noFill/>
           </a:ln>
           <a:effectLst/>
         </p:spPr>
@@ -22371,77 +22488,16 @@
       </p:sp>
       <p:sp>
         <p:nvSpPr>
-          <p:cNvPr id="130" name="TextBox 129"/>
-          <p:cNvSpPr txBox="1"/>
-          <p:nvPr/>
-        </p:nvSpPr>
-        <p:spPr>
-          <a:xfrm>
-            <a:off x="12893040" y="3474720"/>
-            <a:ext cx="4480560" cy="1005840"/>
-          </a:xfrm>
-          <a:prstGeom prst="rect">
-            <a:avLst/>
-          </a:prstGeom>
-          <a:noFill/>
-        </p:spPr>
-        <p:txBody>
-          <a:bodyPr wrap="square" lIns="0" rIns="0" tIns="0" bIns="0" anchor="t">
-            <a:spAutoFit/>
-          </a:bodyPr>
-          <a:lstStyle/>
-          <a:p>
-            <a:pPr algn="ctr">
-              <a:lnSpc>
-                <a:spcPct val="112000"/>
-              </a:lnSpc>
-              <a:spcAft>
-                <a:spcPts val="200"/>
-              </a:spcAft>
-            </a:pPr>
-            <a:r>
-              <a:rPr sz="2800" b="1">
-                <a:solidFill>
-                  <a:srgbClr val="0E0F11"/>
-                </a:solidFill>
-                <a:latin typeface="Instrument Sans"/>
-              </a:rPr>
-              <a:t>Incoming custodian</a:t>
-            </a:r>
-          </a:p>
-          <a:p>
-            <a:pPr algn="ctr">
-              <a:lnSpc>
-                <a:spcPct val="112000"/>
-              </a:lnSpc>
-              <a:spcAft>
-                <a:spcPts val="200"/>
-              </a:spcAft>
-            </a:pPr>
-            <a:r>
-              <a:rPr sz="1800" b="0">
-                <a:solidFill>
-                  <a:srgbClr val="4D5560"/>
-                </a:solidFill>
-                <a:latin typeface="JetBrains Mono"/>
-              </a:rPr>
-              <a:t>signs</a:t>
-            </a:r>
-          </a:p>
-        </p:txBody>
-      </p:sp>
-      <p:sp>
-        <p:nvSpPr>
-          <p:cNvPr id="131" name="Rectangle 130"/>
+          <p:cNvPr id="139" name="Oval 138"/>
           <p:cNvSpPr/>
           <p:nvPr/>
         </p:nvSpPr>
         <p:spPr>
           <a:xfrm>
-            <a:off x="5394960" y="3931920"/>
-            <a:ext cx="594360" cy="36576"/>
-          </a:xfrm>
-          <a:prstGeom prst="rect">
+            <a:off x="1930850" y="6024584"/>
+            <a:ext cx="237744" cy="237744"/>
+          </a:xfrm>
+          <a:prstGeom prst="ellipse">
             <a:avLst/>
           </a:prstGeom>
           <a:solidFill>
@@ -22476,16 +22532,16 @@
       </p:sp>
       <p:sp>
         <p:nvSpPr>
-          <p:cNvPr id="132" name="Rectangle 131"/>
+          <p:cNvPr id="140" name="Oval 139"/>
           <p:cNvSpPr/>
           <p:nvPr/>
         </p:nvSpPr>
         <p:spPr>
           <a:xfrm>
-            <a:off x="12298680" y="3931920"/>
-            <a:ext cx="594360" cy="36576"/>
-          </a:xfrm>
-          <a:prstGeom prst="rect">
+            <a:off x="1615284" y="5053371"/>
+            <a:ext cx="237744" cy="237744"/>
+          </a:xfrm>
+          <a:prstGeom prst="ellipse">
             <a:avLst/>
           </a:prstGeom>
           <a:solidFill>
@@ -22520,14 +22576,14 @@
       </p:sp>
       <p:sp>
         <p:nvSpPr>
-          <p:cNvPr id="133" name="TextBox 132"/>
+          <p:cNvPr id="141" name="TextBox 140"/>
           <p:cNvSpPr txBox="1"/>
           <p:nvPr/>
         </p:nvSpPr>
         <p:spPr>
           <a:xfrm>
-            <a:off x="914400" y="4983480"/>
-            <a:ext cx="16459200" cy="548640"/>
+            <a:off x="914399" y="4069080"/>
+            <a:ext cx="3291840" cy="411480"/>
           </a:xfrm>
           <a:prstGeom prst="rect">
             <a:avLst/>
@@ -22549,27 +22605,550 @@
               </a:spcAft>
             </a:pPr>
             <a:r>
-              <a:rPr sz="3000" b="1">
-                <a:solidFill>
-                  <a:srgbClr val="0E0F11"/>
+              <a:rPr sz="1800" b="1">
+                <a:solidFill>
+                  <a:srgbClr val="4D5560"/>
+                </a:solidFill>
+                <a:latin typeface="JetBrains Mono"/>
+              </a:rPr>
+              <a:t>PAIR BY PAIR · 10 LINKS</a:t>
+            </a:r>
+          </a:p>
+        </p:txBody>
+      </p:sp>
+      <p:cxnSp>
+        <p:nvCxnSpPr>
+          <p:cNvPr id="142" name="Connector 141"/>
+          <p:cNvCxnSpPr/>
+          <p:nvPr/>
+        </p:nvCxnSpPr>
+        <p:spPr>
+          <a:xfrm flipV="1">
+            <a:off x="6080760" y="4572000"/>
+            <a:ext cx="0" cy="868680"/>
+          </a:xfrm>
+          <a:prstGeom prst="line">
+            <a:avLst/>
+          </a:prstGeom>
+          <a:ln w="25400">
+            <a:solidFill>
+              <a:srgbClr val="556F00"/>
+            </a:solidFill>
+          </a:ln>
+        </p:spPr>
+        <p:style>
+          <a:lnRef idx="2">
+            <a:schemeClr val="accent1"/>
+          </a:lnRef>
+          <a:fillRef idx="0">
+            <a:schemeClr val="accent1"/>
+          </a:fillRef>
+          <a:effectRef idx="1">
+            <a:schemeClr val="accent1"/>
+          </a:effectRef>
+          <a:fontRef idx="minor">
+            <a:schemeClr val="tx1"/>
+          </a:fontRef>
+        </p:style>
+      </p:cxnSp>
+      <p:cxnSp>
+        <p:nvCxnSpPr>
+          <p:cNvPr id="143" name="Connector 142"/>
+          <p:cNvCxnSpPr/>
+          <p:nvPr/>
+        </p:nvCxnSpPr>
+        <p:spPr>
+          <a:xfrm flipV="1">
+            <a:off x="6080760" y="5172243"/>
+            <a:ext cx="826163" cy="268437"/>
+          </a:xfrm>
+          <a:prstGeom prst="line">
+            <a:avLst/>
+          </a:prstGeom>
+          <a:ln w="25400">
+            <a:solidFill>
+              <a:srgbClr val="556F00"/>
+            </a:solidFill>
+          </a:ln>
+        </p:spPr>
+        <p:style>
+          <a:lnRef idx="2">
+            <a:schemeClr val="accent1"/>
+          </a:lnRef>
+          <a:fillRef idx="0">
+            <a:schemeClr val="accent1"/>
+          </a:fillRef>
+          <a:effectRef idx="1">
+            <a:schemeClr val="accent1"/>
+          </a:effectRef>
+          <a:fontRef idx="minor">
+            <a:schemeClr val="tx1"/>
+          </a:fontRef>
+        </p:style>
+      </p:cxnSp>
+      <p:cxnSp>
+        <p:nvCxnSpPr>
+          <p:cNvPr id="144" name="Connector 143"/>
+          <p:cNvCxnSpPr/>
+          <p:nvPr/>
+        </p:nvCxnSpPr>
+        <p:spPr>
+          <a:xfrm>
+            <a:off x="6080760" y="5440680"/>
+            <a:ext cx="510597" cy="702776"/>
+          </a:xfrm>
+          <a:prstGeom prst="line">
+            <a:avLst/>
+          </a:prstGeom>
+          <a:ln w="25400">
+            <a:solidFill>
+              <a:srgbClr val="556F00"/>
+            </a:solidFill>
+          </a:ln>
+        </p:spPr>
+        <p:style>
+          <a:lnRef idx="2">
+            <a:schemeClr val="accent1"/>
+          </a:lnRef>
+          <a:fillRef idx="0">
+            <a:schemeClr val="accent1"/>
+          </a:fillRef>
+          <a:effectRef idx="1">
+            <a:schemeClr val="accent1"/>
+          </a:effectRef>
+          <a:fontRef idx="minor">
+            <a:schemeClr val="tx1"/>
+          </a:fontRef>
+        </p:style>
+      </p:cxnSp>
+      <p:cxnSp>
+        <p:nvCxnSpPr>
+          <p:cNvPr id="145" name="Connector 144"/>
+          <p:cNvCxnSpPr/>
+          <p:nvPr/>
+        </p:nvCxnSpPr>
+        <p:spPr>
+          <a:xfrm flipH="1">
+            <a:off x="5570162" y="5440680"/>
+            <a:ext cx="510598" cy="702776"/>
+          </a:xfrm>
+          <a:prstGeom prst="line">
+            <a:avLst/>
+          </a:prstGeom>
+          <a:ln w="25400">
+            <a:solidFill>
+              <a:srgbClr val="556F00"/>
+            </a:solidFill>
+          </a:ln>
+        </p:spPr>
+        <p:style>
+          <a:lnRef idx="2">
+            <a:schemeClr val="accent1"/>
+          </a:lnRef>
+          <a:fillRef idx="0">
+            <a:schemeClr val="accent1"/>
+          </a:fillRef>
+          <a:effectRef idx="1">
+            <a:schemeClr val="accent1"/>
+          </a:effectRef>
+          <a:fontRef idx="minor">
+            <a:schemeClr val="tx1"/>
+          </a:fontRef>
+        </p:style>
+      </p:cxnSp>
+      <p:cxnSp>
+        <p:nvCxnSpPr>
+          <p:cNvPr id="146" name="Connector 145"/>
+          <p:cNvCxnSpPr/>
+          <p:nvPr/>
+        </p:nvCxnSpPr>
+        <p:spPr>
+          <a:xfrm flipH="1" flipV="1">
+            <a:off x="5254596" y="5172243"/>
+            <a:ext cx="826164" cy="268437"/>
+          </a:xfrm>
+          <a:prstGeom prst="line">
+            <a:avLst/>
+          </a:prstGeom>
+          <a:ln w="25400">
+            <a:solidFill>
+              <a:srgbClr val="556F00"/>
+            </a:solidFill>
+          </a:ln>
+        </p:spPr>
+        <p:style>
+          <a:lnRef idx="2">
+            <a:schemeClr val="accent1"/>
+          </a:lnRef>
+          <a:fillRef idx="0">
+            <a:schemeClr val="accent1"/>
+          </a:fillRef>
+          <a:effectRef idx="1">
+            <a:schemeClr val="accent1"/>
+          </a:effectRef>
+          <a:fontRef idx="minor">
+            <a:schemeClr val="tx1"/>
+          </a:fontRef>
+        </p:style>
+      </p:cxnSp>
+      <p:sp>
+        <p:nvSpPr>
+          <p:cNvPr id="147" name="Oval 146"/>
+          <p:cNvSpPr/>
+          <p:nvPr/>
+        </p:nvSpPr>
+        <p:spPr>
+          <a:xfrm>
+            <a:off x="5888736" y="5248656"/>
+            <a:ext cx="384048" cy="384048"/>
+          </a:xfrm>
+          <a:prstGeom prst="ellipse">
+            <a:avLst/>
+          </a:prstGeom>
+          <a:solidFill>
+            <a:srgbClr val="C6F24E"/>
+          </a:solidFill>
+          <a:ln>
+            <a:noFill/>
+          </a:ln>
+          <a:effectLst/>
+        </p:spPr>
+        <p:style>
+          <a:lnRef idx="1">
+            <a:schemeClr val="accent1"/>
+          </a:lnRef>
+          <a:fillRef idx="3">
+            <a:schemeClr val="accent1"/>
+          </a:fillRef>
+          <a:effectRef idx="0">
+            <a:schemeClr val="accent1"/>
+          </a:effectRef>
+          <a:fontRef idx="minor">
+            <a:schemeClr val="lt1"/>
+          </a:fontRef>
+        </p:style>
+        <p:txBody>
+          <a:bodyPr rtlCol="0" anchor="ctr"/>
+          <a:lstStyle/>
+          <a:p>
+            <a:pPr algn="ctr"/>
+          </a:p>
+        </p:txBody>
+      </p:sp>
+      <p:sp>
+        <p:nvSpPr>
+          <p:cNvPr id="148" name="Oval 147"/>
+          <p:cNvSpPr/>
+          <p:nvPr/>
+        </p:nvSpPr>
+        <p:spPr>
+          <a:xfrm>
+            <a:off x="5961888" y="4453128"/>
+            <a:ext cx="237744" cy="237744"/>
+          </a:xfrm>
+          <a:prstGeom prst="ellipse">
+            <a:avLst/>
+          </a:prstGeom>
+          <a:solidFill>
+            <a:srgbClr val="0E0F11"/>
+          </a:solidFill>
+          <a:ln>
+            <a:noFill/>
+          </a:ln>
+          <a:effectLst/>
+        </p:spPr>
+        <p:style>
+          <a:lnRef idx="1">
+            <a:schemeClr val="accent1"/>
+          </a:lnRef>
+          <a:fillRef idx="3">
+            <a:schemeClr val="accent1"/>
+          </a:fillRef>
+          <a:effectRef idx="0">
+            <a:schemeClr val="accent1"/>
+          </a:effectRef>
+          <a:fontRef idx="minor">
+            <a:schemeClr val="lt1"/>
+          </a:fontRef>
+        </p:style>
+        <p:txBody>
+          <a:bodyPr rtlCol="0" anchor="ctr"/>
+          <a:lstStyle/>
+          <a:p>
+            <a:pPr algn="ctr"/>
+          </a:p>
+        </p:txBody>
+      </p:sp>
+      <p:sp>
+        <p:nvSpPr>
+          <p:cNvPr id="149" name="Oval 148"/>
+          <p:cNvSpPr/>
+          <p:nvPr/>
+        </p:nvSpPr>
+        <p:spPr>
+          <a:xfrm>
+            <a:off x="6788051" y="5053371"/>
+            <a:ext cx="237744" cy="237744"/>
+          </a:xfrm>
+          <a:prstGeom prst="ellipse">
+            <a:avLst/>
+          </a:prstGeom>
+          <a:solidFill>
+            <a:srgbClr val="0E0F11"/>
+          </a:solidFill>
+          <a:ln>
+            <a:noFill/>
+          </a:ln>
+          <a:effectLst/>
+        </p:spPr>
+        <p:style>
+          <a:lnRef idx="1">
+            <a:schemeClr val="accent1"/>
+          </a:lnRef>
+          <a:fillRef idx="3">
+            <a:schemeClr val="accent1"/>
+          </a:fillRef>
+          <a:effectRef idx="0">
+            <a:schemeClr val="accent1"/>
+          </a:effectRef>
+          <a:fontRef idx="minor">
+            <a:schemeClr val="lt1"/>
+          </a:fontRef>
+        </p:style>
+        <p:txBody>
+          <a:bodyPr rtlCol="0" anchor="ctr"/>
+          <a:lstStyle/>
+          <a:p>
+            <a:pPr algn="ctr"/>
+          </a:p>
+        </p:txBody>
+      </p:sp>
+      <p:sp>
+        <p:nvSpPr>
+          <p:cNvPr id="150" name="Oval 149"/>
+          <p:cNvSpPr/>
+          <p:nvPr/>
+        </p:nvSpPr>
+        <p:spPr>
+          <a:xfrm>
+            <a:off x="6472485" y="6024584"/>
+            <a:ext cx="237744" cy="237744"/>
+          </a:xfrm>
+          <a:prstGeom prst="ellipse">
+            <a:avLst/>
+          </a:prstGeom>
+          <a:solidFill>
+            <a:srgbClr val="0E0F11"/>
+          </a:solidFill>
+          <a:ln>
+            <a:noFill/>
+          </a:ln>
+          <a:effectLst/>
+        </p:spPr>
+        <p:style>
+          <a:lnRef idx="1">
+            <a:schemeClr val="accent1"/>
+          </a:lnRef>
+          <a:fillRef idx="3">
+            <a:schemeClr val="accent1"/>
+          </a:fillRef>
+          <a:effectRef idx="0">
+            <a:schemeClr val="accent1"/>
+          </a:effectRef>
+          <a:fontRef idx="minor">
+            <a:schemeClr val="lt1"/>
+          </a:fontRef>
+        </p:style>
+        <p:txBody>
+          <a:bodyPr rtlCol="0" anchor="ctr"/>
+          <a:lstStyle/>
+          <a:p>
+            <a:pPr algn="ctr"/>
+          </a:p>
+        </p:txBody>
+      </p:sp>
+      <p:sp>
+        <p:nvSpPr>
+          <p:cNvPr id="151" name="Oval 150"/>
+          <p:cNvSpPr/>
+          <p:nvPr/>
+        </p:nvSpPr>
+        <p:spPr>
+          <a:xfrm>
+            <a:off x="5451290" y="6024584"/>
+            <a:ext cx="237744" cy="237744"/>
+          </a:xfrm>
+          <a:prstGeom prst="ellipse">
+            <a:avLst/>
+          </a:prstGeom>
+          <a:solidFill>
+            <a:srgbClr val="0E0F11"/>
+          </a:solidFill>
+          <a:ln>
+            <a:noFill/>
+          </a:ln>
+          <a:effectLst/>
+        </p:spPr>
+        <p:style>
+          <a:lnRef idx="1">
+            <a:schemeClr val="accent1"/>
+          </a:lnRef>
+          <a:fillRef idx="3">
+            <a:schemeClr val="accent1"/>
+          </a:fillRef>
+          <a:effectRef idx="0">
+            <a:schemeClr val="accent1"/>
+          </a:effectRef>
+          <a:fontRef idx="minor">
+            <a:schemeClr val="lt1"/>
+          </a:fontRef>
+        </p:style>
+        <p:txBody>
+          <a:bodyPr rtlCol="0" anchor="ctr"/>
+          <a:lstStyle/>
+          <a:p>
+            <a:pPr algn="ctr"/>
+          </a:p>
+        </p:txBody>
+      </p:sp>
+      <p:sp>
+        <p:nvSpPr>
+          <p:cNvPr id="152" name="Oval 151"/>
+          <p:cNvSpPr/>
+          <p:nvPr/>
+        </p:nvSpPr>
+        <p:spPr>
+          <a:xfrm>
+            <a:off x="5135724" y="5053371"/>
+            <a:ext cx="237744" cy="237744"/>
+          </a:xfrm>
+          <a:prstGeom prst="ellipse">
+            <a:avLst/>
+          </a:prstGeom>
+          <a:solidFill>
+            <a:srgbClr val="0E0F11"/>
+          </a:solidFill>
+          <a:ln>
+            <a:noFill/>
+          </a:ln>
+          <a:effectLst/>
+        </p:spPr>
+        <p:style>
+          <a:lnRef idx="1">
+            <a:schemeClr val="accent1"/>
+          </a:lnRef>
+          <a:fillRef idx="3">
+            <a:schemeClr val="accent1"/>
+          </a:fillRef>
+          <a:effectRef idx="0">
+            <a:schemeClr val="accent1"/>
+          </a:effectRef>
+          <a:fontRef idx="minor">
+            <a:schemeClr val="lt1"/>
+          </a:fontRef>
+        </p:style>
+        <p:txBody>
+          <a:bodyPr rtlCol="0" anchor="ctr"/>
+          <a:lstStyle/>
+          <a:p>
+            <a:pPr algn="ctr"/>
+          </a:p>
+        </p:txBody>
+      </p:sp>
+      <p:sp>
+        <p:nvSpPr>
+          <p:cNvPr id="153" name="TextBox 152"/>
+          <p:cNvSpPr txBox="1"/>
+          <p:nvPr/>
+        </p:nvSpPr>
+        <p:spPr>
+          <a:xfrm>
+            <a:off x="4434840" y="4069080"/>
+            <a:ext cx="3291840" cy="411480"/>
+          </a:xfrm>
+          <a:prstGeom prst="rect">
+            <a:avLst/>
+          </a:prstGeom>
+          <a:noFill/>
+        </p:spPr>
+        <p:txBody>
+          <a:bodyPr wrap="square" lIns="0" rIns="0" tIns="0" bIns="0" anchor="t">
+            <a:spAutoFit/>
+          </a:bodyPr>
+          <a:lstStyle/>
+          <a:p>
+            <a:pPr algn="ctr">
+              <a:lnSpc>
+                <a:spcPct val="112000"/>
+              </a:lnSpc>
+              <a:spcAft>
+                <a:spcPts val="600"/>
+              </a:spcAft>
+            </a:pPr>
+            <a:r>
+              <a:rPr sz="1800" b="1">
+                <a:solidFill>
+                  <a:srgbClr val="556F00"/>
+                </a:solidFill>
+                <a:latin typeface="JetBrains Mono"/>
+              </a:rPr>
+              <a:t>ONE STANDARD · 5 LINKS</a:t>
+            </a:r>
+          </a:p>
+        </p:txBody>
+      </p:sp>
+      <p:sp>
+        <p:nvSpPr>
+          <p:cNvPr id="154" name="TextBox 153"/>
+          <p:cNvSpPr txBox="1"/>
+          <p:nvPr/>
+        </p:nvSpPr>
+        <p:spPr>
+          <a:xfrm>
+            <a:off x="914400" y="6583680"/>
+            <a:ext cx="7132320" cy="822960"/>
+          </a:xfrm>
+          <a:prstGeom prst="rect">
+            <a:avLst/>
+          </a:prstGeom>
+          <a:noFill/>
+        </p:spPr>
+        <p:txBody>
+          <a:bodyPr wrap="square" lIns="0" rIns="0" tIns="0" bIns="0" anchor="t">
+            <a:spAutoFit/>
+          </a:bodyPr>
+          <a:lstStyle/>
+          <a:p>
+            <a:pPr algn="ctr">
+              <a:lnSpc>
+                <a:spcPct val="112000"/>
+              </a:lnSpc>
+              <a:spcAft>
+                <a:spcPts val="600"/>
+              </a:spcAft>
+            </a:pPr>
+            <a:r>
+              <a:rPr sz="2000" b="0">
+                <a:solidFill>
+                  <a:srgbClr val="4D5560"/>
                 </a:solidFill>
                 <a:latin typeface="Instrument Sans"/>
               </a:rPr>
-              <a:t>Either signature missing → the call fails.</a:t>
-            </a:r>
-          </a:p>
-        </p:txBody>
-      </p:sp>
-      <p:sp>
-        <p:nvSpPr>
-          <p:cNvPr id="134" name="TextBox 133"/>
+              <a:t>Example, 5 companies: 10 custom links, or 5 links to one standard.</a:t>
+            </a:r>
+          </a:p>
+        </p:txBody>
+      </p:sp>
+      <p:sp>
+        <p:nvSpPr>
+          <p:cNvPr id="155" name="TextBox 154"/>
           <p:cNvSpPr txBox="1"/>
           <p:nvPr/>
         </p:nvSpPr>
         <p:spPr>
           <a:xfrm>
-            <a:off x="914400" y="5897880"/>
-            <a:ext cx="16459200" cy="1645920"/>
+            <a:off x="8503920" y="4069080"/>
+            <a:ext cx="4389120" cy="411480"/>
           </a:xfrm>
           <a:prstGeom prst="rect">
             <a:avLst/>
@@ -22587,46 +23166,86 @@
                 <a:spcPct val="112000"/>
               </a:lnSpc>
               <a:spcAft>
-                <a:spcPts val="800"/>
+                <a:spcPts val="600"/>
               </a:spcAft>
             </a:pPr>
             <a:r>
-              <a:rPr sz="2600" b="0">
+              <a:rPr sz="1800" b="1">
                 <a:solidFill>
                   <a:srgbClr val="556F00"/>
-                </a:solidFill>
-                <a:latin typeface="Instrument Sans"/>
-              </a:rPr>
-              <a:t>— </a:t>
-            </a:r>
-            <a:r>
-              <a:rPr sz="2600" b="0">
-                <a:solidFill>
-                  <a:srgbClr val="0E0F11"/>
-                </a:solidFill>
-                <a:latin typeface="Instrument Sans"/>
-              </a:rPr>
-              <a:t>Each handover moves custody and extends an on-chain hash chain, the </a:t>
-            </a:r>
-            <a:r>
-              <a:rPr sz="2600" b="0">
-                <a:solidFill>
-                  <a:srgbClr val="0E0F11"/>
                 </a:solidFill>
                 <a:latin typeface="JetBrains Mono"/>
               </a:rPr>
-              <a:t>head</a:t>
-            </a:r>
-            <a:r>
-              <a:rPr sz="2600" b="0">
-                <a:solidFill>
-                  <a:srgbClr val="0E0F11"/>
-                </a:solidFill>
-                <a:latin typeface="Instrument Sans"/>
-              </a:rPr>
-              <a:t>.</a:t>
-            </a:r>
-          </a:p>
+              <a:t>OPEN · ANYONE</a:t>
+            </a:r>
+          </a:p>
+        </p:txBody>
+      </p:sp>
+      <p:sp>
+        <p:nvSpPr>
+          <p:cNvPr id="156" name="Rectangle 155"/>
+          <p:cNvSpPr/>
+          <p:nvPr/>
+        </p:nvSpPr>
+        <p:spPr>
+          <a:xfrm>
+            <a:off x="8503920" y="4539996"/>
+            <a:ext cx="4251960" cy="27432"/>
+          </a:xfrm>
+          <a:prstGeom prst="rect">
+            <a:avLst/>
+          </a:prstGeom>
+          <a:solidFill>
+            <a:srgbClr val="556F00"/>
+          </a:solidFill>
+          <a:ln>
+            <a:noFill/>
+          </a:ln>
+          <a:effectLst/>
+        </p:spPr>
+        <p:style>
+          <a:lnRef idx="1">
+            <a:schemeClr val="accent1"/>
+          </a:lnRef>
+          <a:fillRef idx="3">
+            <a:schemeClr val="accent1"/>
+          </a:fillRef>
+          <a:effectRef idx="0">
+            <a:schemeClr val="accent1"/>
+          </a:effectRef>
+          <a:fontRef idx="minor">
+            <a:schemeClr val="lt1"/>
+          </a:fontRef>
+        </p:style>
+        <p:txBody>
+          <a:bodyPr rtlCol="0" anchor="ctr"/>
+          <a:lstStyle/>
+          <a:p>
+            <a:pPr algn="ctr"/>
+          </a:p>
+        </p:txBody>
+      </p:sp>
+      <p:sp>
+        <p:nvSpPr>
+          <p:cNvPr id="157" name="TextBox 156"/>
+          <p:cNvSpPr txBox="1"/>
+          <p:nvPr/>
+        </p:nvSpPr>
+        <p:spPr>
+          <a:xfrm>
+            <a:off x="8503920" y="4709160"/>
+            <a:ext cx="4343400" cy="2743200"/>
+          </a:xfrm>
+          <a:prstGeom prst="rect">
+            <a:avLst/>
+          </a:prstGeom>
+          <a:noFill/>
+        </p:spPr>
+        <p:txBody>
+          <a:bodyPr wrap="square" lIns="0" rIns="0" tIns="0" bIns="0" anchor="t">
+            <a:spAutoFit/>
+          </a:bodyPr>
+          <a:lstStyle/>
           <a:p>
             <a:pPr algn="l">
               <a:lnSpc>
@@ -22637,7 +23256,7 @@
               </a:spcAft>
             </a:pPr>
             <a:r>
-              <a:rPr sz="2600" b="0">
+              <a:rPr sz="2100" b="0">
                 <a:solidFill>
                   <a:srgbClr val="556F00"/>
                 </a:solidFill>
@@ -22646,13 +23265,13 @@
               <a:t>— </a:t>
             </a:r>
             <a:r>
-              <a:rPr sz="2600" b="0">
+              <a:rPr sz="2100" b="0">
                 <a:solidFill>
                   <a:srgbClr val="0E0F11"/>
                 </a:solidFill>
                 <a:latin typeface="Instrument Sans"/>
               </a:rPr>
-              <a:t>The token stays with its holder in transit; only custody changes.</a:t>
+              <a:t>Record format, roles and events: the custody_registry contract (Apache-2.0)</a:t>
             </a:r>
           </a:p>
           <a:p>
@@ -22665,7 +23284,7 @@
               </a:spcAft>
             </a:pPr>
             <a:r>
-              <a:rPr sz="2600" b="0">
+              <a:rPr sz="2100" b="0">
                 <a:solidFill>
                   <a:srgbClr val="556F00"/>
                 </a:solidFill>
@@ -22674,45 +23293,27 @@
               <a:t>— </a:t>
             </a:r>
             <a:r>
-              <a:rPr sz="2600" b="0">
+              <a:rPr sz="2100" b="0">
                 <a:solidFill>
                   <a:srgbClr val="0E0F11"/>
                 </a:solidFill>
                 <a:latin typeface="Instrument Sans"/>
               </a:rPr>
-              <a:t>After Delivered, the operator burns the token with the existing </a:t>
-            </a:r>
-            <a:r>
-              <a:rPr sz="2600" b="0">
-                <a:solidFill>
-                  <a:srgbClr val="0E0F11"/>
-                </a:solidFill>
-                <a:latin typeface="JetBrains Mono"/>
-              </a:rPr>
-              <a:t>redeem</a:t>
-            </a:r>
-            <a:r>
-              <a:rPr sz="2600" b="0">
-                <a:solidFill>
-                  <a:srgbClr val="0E0F11"/>
-                </a:solidFill>
-                <a:latin typeface="Instrument Sans"/>
-              </a:rPr>
-              <a:t>¹.</a:t>
-            </a:r>
-          </a:p>
-        </p:txBody>
-      </p:sp>
-      <p:sp>
-        <p:nvSpPr>
-          <p:cNvPr id="135" name="TextBox 134"/>
+              <a:t>Verify any shipment, no login (slide 6)</a:t>
+            </a:r>
+          </a:p>
+        </p:txBody>
+      </p:sp>
+      <p:sp>
+        <p:nvSpPr>
+          <p:cNvPr id="158" name="TextBox 157"/>
           <p:cNvSpPr txBox="1"/>
           <p:nvPr/>
         </p:nvSpPr>
         <p:spPr>
           <a:xfrm>
-            <a:off x="914400" y="7909560"/>
-            <a:ext cx="16459200" cy="914400"/>
+            <a:off x="13121640" y="4069080"/>
+            <a:ext cx="4389120" cy="411480"/>
           </a:xfrm>
           <a:prstGeom prst="rect">
             <a:avLst/>
@@ -22730,36 +23331,273 @@
                 <a:spcPct val="112000"/>
               </a:lnSpc>
               <a:spcAft>
-                <a:spcPts val="200"/>
+                <a:spcPts val="600"/>
               </a:spcAft>
             </a:pPr>
             <a:r>
-              <a:rPr sz="1800" b="0">
-                <a:solidFill>
-                  <a:srgbClr val="4D5560"/>
-                </a:solidFill>
-                <a:latin typeface="Instrument Sans"/>
+              <a:rPr sz="1800" b="1">
+                <a:solidFill>
+                  <a:srgbClr val="0E0F11"/>
+                </a:solidFill>
+                <a:latin typeface="JetBrains Mono"/>
               </a:rPr>
-              <a:t>A custody record keyed to the container number. In production it would sit beside the carrier's bill of lading; not integrated in this build.</a:t>
-            </a:r>
-          </a:p>
+              <a:t>RADOX OPERATES · CLIENT PAYS</a:t>
+            </a:r>
+          </a:p>
+        </p:txBody>
+      </p:sp>
+      <p:sp>
+        <p:nvSpPr>
+          <p:cNvPr id="159" name="Rectangle 158"/>
+          <p:cNvSpPr/>
+          <p:nvPr/>
+        </p:nvSpPr>
+        <p:spPr>
+          <a:xfrm>
+            <a:off x="13121640" y="4539996"/>
+            <a:ext cx="4251960" cy="27432"/>
+          </a:xfrm>
+          <a:prstGeom prst="rect">
+            <a:avLst/>
+          </a:prstGeom>
+          <a:solidFill>
+            <a:srgbClr val="0E0F11"/>
+          </a:solidFill>
+          <a:ln>
+            <a:noFill/>
+          </a:ln>
+          <a:effectLst/>
+        </p:spPr>
+        <p:style>
+          <a:lnRef idx="1">
+            <a:schemeClr val="accent1"/>
+          </a:lnRef>
+          <a:fillRef idx="3">
+            <a:schemeClr val="accent1"/>
+          </a:fillRef>
+          <a:effectRef idx="0">
+            <a:schemeClr val="accent1"/>
+          </a:effectRef>
+          <a:fontRef idx="minor">
+            <a:schemeClr val="lt1"/>
+          </a:fontRef>
+        </p:style>
+        <p:txBody>
+          <a:bodyPr rtlCol="0" anchor="ctr"/>
+          <a:lstStyle/>
+          <a:p>
+            <a:pPr algn="ctr"/>
+          </a:p>
+        </p:txBody>
+      </p:sp>
+      <p:sp>
+        <p:nvSpPr>
+          <p:cNvPr id="160" name="TextBox 159"/>
+          <p:cNvSpPr txBox="1"/>
+          <p:nvPr/>
+        </p:nvSpPr>
+        <p:spPr>
+          <a:xfrm>
+            <a:off x="13121640" y="4709160"/>
+            <a:ext cx="4343400" cy="2743200"/>
+          </a:xfrm>
+          <a:prstGeom prst="rect">
+            <a:avLst/>
+          </a:prstGeom>
+          <a:noFill/>
+        </p:spPr>
+        <p:txBody>
+          <a:bodyPr wrap="square" lIns="0" rIns="0" tIns="0" bIns="0" anchor="t">
+            <a:spAutoFit/>
+          </a:bodyPr>
+          <a:lstStyle/>
           <a:p>
             <a:pPr algn="l">
               <a:lnSpc>
                 <a:spcPct val="112000"/>
               </a:lnSpc>
               <a:spcAft>
-                <a:spcPts val="200"/>
+                <a:spcPts val="800"/>
               </a:spcAft>
             </a:pPr>
             <a:r>
-              <a:rPr sz="1800" b="0">
-                <a:solidFill>
-                  <a:srgbClr val="4D5560"/>
+              <a:rPr sz="2100" b="0">
+                <a:solidFill>
+                  <a:srgbClr val="0E0F11"/>
                 </a:solidFill>
                 <a:latin typeface="Instrument Sans"/>
               </a:rPr>
-              <a:t>¹ Radox platform policy, not enforced on-chain by the registry; redeem still needs the holder's signature.</a:t>
+              <a:t>— </a:t>
+            </a:r>
+            <a:r>
+              <a:rPr sz="2100" b="0">
+                <a:solidFill>
+                  <a:srgbClr val="0E0F11"/>
+                </a:solidFill>
+                <a:latin typeface="Instrument Sans"/>
+              </a:rPr>
+              <a:t>Onboarding, issuance controls, operation of the rail</a:t>
+            </a:r>
+          </a:p>
+          <a:p>
+            <a:pPr algn="l">
+              <a:lnSpc>
+                <a:spcPct val="112000"/>
+              </a:lnSpc>
+              <a:spcAft>
+                <a:spcPts val="800"/>
+              </a:spcAft>
+            </a:pPr>
+            <a:r>
+              <a:rPr sz="2100" b="0">
+                <a:solidFill>
+                  <a:srgbClr val="0E0F11"/>
+                </a:solidFill>
+                <a:latin typeface="Instrument Sans"/>
+              </a:rPr>
+              <a:t>— </a:t>
+            </a:r>
+            <a:r>
+              <a:rPr sz="2100" b="0">
+                <a:solidFill>
+                  <a:srgbClr val="0E0F11"/>
+                </a:solidFill>
+                <a:latin typeface="Instrument Sans"/>
+              </a:rPr>
+              <a:t>The API and backend: closed, not self-hostable</a:t>
+            </a:r>
+          </a:p>
+          <a:p>
+            <a:pPr algn="l">
+              <a:lnSpc>
+                <a:spcPct val="112000"/>
+              </a:lnSpc>
+              <a:spcAft>
+                <a:spcPts val="800"/>
+              </a:spcAft>
+            </a:pPr>
+            <a:r>
+              <a:rPr sz="2100" b="0">
+                <a:solidFill>
+                  <a:srgbClr val="0E0F11"/>
+                </a:solidFill>
+                <a:latin typeface="Instrument Sans"/>
+              </a:rPr>
+              <a:t>— </a:t>
+            </a:r>
+            <a:r>
+              <a:rPr sz="2100" b="0">
+                <a:solidFill>
+                  <a:srgbClr val="0E0F11"/>
+                </a:solidFill>
+                <a:latin typeface="Instrument Sans"/>
+              </a:rPr>
+              <a:t>Paid by the financial institution; not priced</a:t>
+            </a:r>
+          </a:p>
+        </p:txBody>
+      </p:sp>
+      <p:sp>
+        <p:nvSpPr>
+          <p:cNvPr id="161" name="Rectangle 160"/>
+          <p:cNvSpPr/>
+          <p:nvPr/>
+        </p:nvSpPr>
+        <p:spPr>
+          <a:xfrm>
+            <a:off x="914400" y="7580376"/>
+            <a:ext cx="16459200" cy="18288"/>
+          </a:xfrm>
+          <a:prstGeom prst="rect">
+            <a:avLst/>
+          </a:prstGeom>
+          <a:solidFill>
+            <a:srgbClr val="DFDDD6"/>
+          </a:solidFill>
+          <a:ln>
+            <a:noFill/>
+          </a:ln>
+          <a:effectLst/>
+        </p:spPr>
+        <p:style>
+          <a:lnRef idx="1">
+            <a:schemeClr val="accent1"/>
+          </a:lnRef>
+          <a:fillRef idx="3">
+            <a:schemeClr val="accent1"/>
+          </a:fillRef>
+          <a:effectRef idx="0">
+            <a:schemeClr val="accent1"/>
+          </a:effectRef>
+          <a:fontRef idx="minor">
+            <a:schemeClr val="lt1"/>
+          </a:fontRef>
+        </p:style>
+        <p:txBody>
+          <a:bodyPr rtlCol="0" anchor="ctr"/>
+          <a:lstStyle/>
+          <a:p>
+            <a:pPr algn="ctr"/>
+          </a:p>
+        </p:txBody>
+      </p:sp>
+      <p:sp>
+        <p:nvSpPr>
+          <p:cNvPr id="162" name="TextBox 161"/>
+          <p:cNvSpPr txBox="1"/>
+          <p:nvPr/>
+        </p:nvSpPr>
+        <p:spPr>
+          <a:xfrm>
+            <a:off x="914400" y="7699248"/>
+            <a:ext cx="16459200" cy="822960"/>
+          </a:xfrm>
+          <a:prstGeom prst="rect">
+            <a:avLst/>
+          </a:prstGeom>
+          <a:noFill/>
+        </p:spPr>
+        <p:txBody>
+          <a:bodyPr wrap="square" lIns="0" rIns="0" tIns="0" bIns="0" anchor="t">
+            <a:spAutoFit/>
+          </a:bodyPr>
+          <a:lstStyle/>
+          <a:p>
+            <a:pPr algn="l">
+              <a:lnSpc>
+                <a:spcPct val="112000"/>
+              </a:lnSpc>
+              <a:spcAft>
+                <a:spcPts val="200"/>
+              </a:spcAft>
+            </a:pPr>
+            <a:r>
+              <a:rPr sz="1800" b="0">
+                <a:solidFill>
+                  <a:srgbClr val="0E0F11"/>
+                </a:solidFill>
+                <a:latin typeface="Instrument Sans"/>
+              </a:rPr>
+              <a:t>Future tense: no standard, port, airport or chamber link exists yet (none confirmed). Each company would still need a key and one connection to the rail.</a:t>
+            </a:r>
+          </a:p>
+          <a:p>
+            <a:pPr algn="l">
+              <a:lnSpc>
+                <a:spcPct val="112000"/>
+              </a:lnSpc>
+              <a:spcAft>
+                <a:spcPts val="200"/>
+              </a:spcAft>
+            </a:pPr>
+            <a:r>
+              <a:rPr sz="1800" b="0">
+                <a:solidFill>
+                  <a:srgbClr val="4D5560"/>
+                </a:solidFill>
+                <a:latin typeface="Instrument Sans"/>
+              </a:rPr>
+              <a:t>Radox is the rail, never the issuer. Regulation and licences stay with the client and its local counsel.</a:t>
             </a:r>
           </a:p>
         </p:txBody>

--- a/projects/hackmeridian-rail/deck/radox-custody-rail.pptx
+++ b/projects/hackmeridian-rail/deck/radox-custody-rail.pptx
@@ -21999,7 +21999,16 @@
                 </a:solidFill>
                 <a:latin typeface="Instrument Sans"/>
               </a:rPr>
-              <a:t>a public, SWIFT-like custody standard on Stellar: a port, airport, carrier, chamber of commerce or financier would integrate once and reach every company that joins, corridor after corridor.</a:t>
+              <a:t>a shared, SWIFT-like custody standard that companies along a supply chain, from origin to destination, could use. </a:t>
+            </a:r>
+            <a:r>
+              <a:rPr sz="2400" b="1">
+                <a:solidFill>
+                  <a:srgbClr val="0E0F11"/>
+                </a:solidFill>
+                <a:latin typeface="Instrument Sans"/>
+              </a:rPr>
+              <a:t>Neither the standard nor the rail exists yet.</a:t>
             </a:r>
           </a:p>
         </p:txBody>
@@ -23578,7 +23587,7 @@
                 </a:solidFill>
                 <a:latin typeface="Instrument Sans"/>
               </a:rPr>
-              <a:t>Future tense: no standard, port, airport or chamber link exists yet (none confirmed). Each company would still need a key and one connection to the rail.</a:t>
+              <a:t>Each company would integrate once instead of pair by pair, but would still need a key and one connection. No port, airport or chamber link: none confirmed.</a:t>
             </a:r>
           </a:p>
           <a:p>

--- a/projects/hackmeridian-rail/deck/radox-custody-rail.pptx
+++ b/projects/hackmeridian-rail/deck/radox-custody-rail.pptx
@@ -10541,7 +10541,7 @@
         <p:spPr>
           <a:xfrm>
             <a:off x="914400" y="1417320"/>
-            <a:ext cx="3703320" cy="475488"/>
+            <a:ext cx="5486400" cy="475488"/>
           </a:xfrm>
           <a:prstGeom prst="roundRect">
             <a:avLst>
@@ -10580,7 +10580,7 @@
                 <a:cs typeface="JetBrains Mono"/>
                 <a:sym typeface="JetBrains Mono"/>
               </a:rPr>
-              <a:t>THE RAIL · END TO END</a:t>
+              <a:t>THE RAIL · DESIGN, LIFECYCLE BUILT</a:t>
             </a:r>
             <a:endParaRPr/>
           </a:p>
@@ -10790,7 +10790,7 @@
                 </a:solidFill>
                 <a:latin typeface="Instrument Sans"/>
               </a:rPr>
-              <a:t>One record follows the goods across company boundaries, not inside one company's system.</a:t>
+              <a:t>One record would follow the goods across company boundaries; today it runs across five test keys.</a:t>
             </a:r>
           </a:p>
         </p:txBody>
@@ -11894,7 +11894,7 @@
               </a:spcAft>
             </a:pPr>
             <a:r>
-              <a:rPr sz="2400" b="0">
+              <a:rPr sz="2300" b="0">
                 <a:solidFill>
                   <a:srgbClr val="556F00"/>
                 </a:solidFill>
@@ -11903,7 +11903,7 @@
               <a:t>— </a:t>
             </a:r>
             <a:r>
-              <a:rPr sz="2400" b="1">
+              <a:rPr sz="2300" b="1">
                 <a:solidFill>
                   <a:srgbClr val="0E0F11"/>
                 </a:solidFill>
@@ -11912,13 +11912,13 @@
               <a:t>Rule of every link: </a:t>
             </a:r>
             <a:r>
-              <a:rPr sz="2400" b="0">
+              <a:rPr sz="2300" b="0">
                 <a:solidFill>
                   <a:srgbClr val="0E0F11"/>
                 </a:solidFill>
                 <a:latin typeface="Instrument Sans"/>
               </a:rPr>
-              <a:t>both companies sign the same Stellar transaction, or custody does not move.</a:t>
+              <a:t>both sides sign one Stellar transaction (delivery: recipient and holder), or the call fails.</a:t>
             </a:r>
           </a:p>
           <a:p>
@@ -11931,7 +11931,7 @@
               </a:spcAft>
             </a:pPr>
             <a:r>
-              <a:rPr sz="2400" b="0">
+              <a:rPr sz="2300" b="0">
                 <a:solidFill>
                   <a:srgbClr val="556F00"/>
                 </a:solidFill>
@@ -11940,7 +11940,7 @@
               <a:t>— </a:t>
             </a:r>
             <a:r>
-              <a:rPr sz="2400" b="0">
+              <a:rPr sz="2300" b="0">
                 <a:solidFill>
                   <a:srgbClr val="0E0F11"/>
                 </a:solidFill>
@@ -11949,7 +11949,7 @@
               <a:t>Each step extends an on-chain hash chain, the </a:t>
             </a:r>
             <a:r>
-              <a:rPr sz="2400" b="0">
+              <a:rPr sz="2300" b="0">
                 <a:solidFill>
                   <a:srgbClr val="0E0F11"/>
                 </a:solidFill>
@@ -11958,7 +11958,7 @@
               <a:t>head</a:t>
             </a:r>
             <a:r>
-              <a:rPr sz="2400" b="0">
+              <a:rPr sz="2300" b="0">
                 <a:solidFill>
                   <a:srgbClr val="0E0F11"/>
                 </a:solidFill>
@@ -11977,7 +11977,7 @@
               </a:spcAft>
             </a:pPr>
             <a:r>
-              <a:rPr sz="2400" b="0">
+              <a:rPr sz="2300" b="0">
                 <a:solidFill>
                   <a:srgbClr val="556F00"/>
                 </a:solidFill>
@@ -11986,7 +11986,7 @@
               <a:t>— </a:t>
             </a:r>
             <a:r>
-              <a:rPr sz="2400" b="0">
+              <a:rPr sz="2300" b="0">
                 <a:solidFill>
                   <a:srgbClr val="0E0F11"/>
                 </a:solidFill>
@@ -12005,8 +12005,8 @@
         </p:nvSpPr>
         <p:spPr>
           <a:xfrm>
-            <a:off x="914400" y="7726679"/>
-            <a:ext cx="16459200" cy="1097280"/>
+            <a:off x="914400" y="7818120"/>
+            <a:ext cx="16459200" cy="1005840"/>
           </a:xfrm>
           <a:prstGeom prst="rect">
             <a:avLst/>
@@ -12500,7 +12500,7 @@
                 </a:solidFill>
                 <a:latin typeface="Inter Tight"/>
               </a:rPr>
-              <a:t>The whole chain ran on testnet</a:t>
+              <a:t>The lifecycle ran on testnet</a:t>
             </a:r>
           </a:p>
         </p:txBody>
@@ -12581,7 +12581,7 @@
         </p:nvSpPr>
         <p:spPr>
           <a:xfrm>
-            <a:off x="8229600" y="3063240"/>
+            <a:off x="8229600" y="3017520"/>
             <a:ext cx="9144000" cy="365760"/>
           </a:xfrm>
           <a:prstGeom prst="rect">
@@ -12632,7 +12632,7 @@
         </p:nvSpPr>
         <p:spPr>
           <a:xfrm>
-            <a:off x="8229600" y="3429000"/>
+            <a:off x="8229600" y="3355848"/>
             <a:ext cx="9144000" cy="365760"/>
           </a:xfrm>
           <a:prstGeom prst="rect">
@@ -12683,7 +12683,7 @@
         </p:nvSpPr>
         <p:spPr>
           <a:xfrm>
-            <a:off x="8229600" y="3794760"/>
+            <a:off x="8229600" y="3694176"/>
             <a:ext cx="9144000" cy="365760"/>
           </a:xfrm>
           <a:prstGeom prst="rect">
@@ -12734,7 +12734,7 @@
         </p:nvSpPr>
         <p:spPr>
           <a:xfrm>
-            <a:off x="8229600" y="4160520"/>
+            <a:off x="8229600" y="4032504"/>
             <a:ext cx="9144000" cy="365760"/>
           </a:xfrm>
           <a:prstGeom prst="rect">
@@ -12785,7 +12785,7 @@
         </p:nvSpPr>
         <p:spPr>
           <a:xfrm>
-            <a:off x="8229600" y="4526280"/>
+            <a:off x="8229600" y="4370831"/>
             <a:ext cx="9144000" cy="365760"/>
           </a:xfrm>
           <a:prstGeom prst="rect">
@@ -12836,7 +12836,7 @@
         </p:nvSpPr>
         <p:spPr>
           <a:xfrm>
-            <a:off x="8229600" y="4892040"/>
+            <a:off x="8229600" y="4709160"/>
             <a:ext cx="9144000" cy="365760"/>
           </a:xfrm>
           <a:prstGeom prst="rect">
@@ -12887,7 +12887,7 @@
         </p:nvSpPr>
         <p:spPr>
           <a:xfrm>
-            <a:off x="8229600" y="5257800"/>
+            <a:off x="8229600" y="5047488"/>
             <a:ext cx="9144000" cy="365760"/>
           </a:xfrm>
           <a:prstGeom prst="rect">
@@ -12938,7 +12938,7 @@
         </p:nvSpPr>
         <p:spPr>
           <a:xfrm>
-            <a:off x="8229600" y="5760720"/>
+            <a:off x="8229600" y="5440680"/>
             <a:ext cx="2286000" cy="731520"/>
           </a:xfrm>
           <a:prstGeom prst="rect">
@@ -12980,8 +12980,302 @@
         </p:nvSpPr>
         <p:spPr>
           <a:xfrm>
-            <a:off x="8229600" y="6492240"/>
+            <a:off x="8229600" y="6144768"/>
             <a:ext cx="2240280" cy="640080"/>
+          </a:xfrm>
+          <a:prstGeom prst="rect">
+            <a:avLst/>
+          </a:prstGeom>
+          <a:noFill/>
+        </p:spPr>
+        <p:txBody>
+          <a:bodyPr wrap="square" lIns="0" rIns="0" tIns="0" bIns="0" anchor="t">
+            <a:spAutoFit/>
+          </a:bodyPr>
+          <a:lstStyle/>
+          <a:p>
+            <a:pPr algn="l">
+              <a:lnSpc>
+                <a:spcPct val="100000"/>
+              </a:lnSpc>
+              <a:spcAft>
+                <a:spcPts val="0"/>
+              </a:spcAft>
+            </a:pPr>
+            <a:r>
+              <a:rPr sz="1800" b="0">
+                <a:solidFill>
+                  <a:srgbClr val="E7E8EA"/>
+                </a:solidFill>
+                <a:latin typeface="Instrument Sans"/>
+              </a:rPr>
+              <a:t>successful</a:t>
+            </a:r>
+          </a:p>
+        </p:txBody>
+      </p:sp>
+      <p:sp>
+        <p:nvSpPr>
+          <p:cNvPr id="136" name="TextBox 135"/>
+          <p:cNvSpPr txBox="1"/>
+          <p:nvPr/>
+        </p:nvSpPr>
+        <p:spPr>
+          <a:xfrm>
+            <a:off x="10561320" y="5440680"/>
+            <a:ext cx="2286000" cy="731520"/>
+          </a:xfrm>
+          <a:prstGeom prst="rect">
+            <a:avLst/>
+          </a:prstGeom>
+          <a:noFill/>
+        </p:spPr>
+        <p:txBody>
+          <a:bodyPr wrap="square" lIns="0" rIns="0" tIns="0" bIns="0" anchor="t">
+            <a:spAutoFit/>
+          </a:bodyPr>
+          <a:lstStyle/>
+          <a:p>
+            <a:pPr algn="l">
+              <a:lnSpc>
+                <a:spcPct val="90000"/>
+              </a:lnSpc>
+              <a:spcAft>
+                <a:spcPts val="600"/>
+              </a:spcAft>
+            </a:pPr>
+            <a:r>
+              <a:rPr sz="4400" b="1">
+                <a:solidFill>
+                  <a:srgbClr val="C6F24E"/>
+                </a:solidFill>
+                <a:latin typeface="Inter Tight"/>
+              </a:rPr>
+              <a:t>9</a:t>
+            </a:r>
+          </a:p>
+        </p:txBody>
+      </p:sp>
+      <p:sp>
+        <p:nvSpPr>
+          <p:cNvPr id="137" name="TextBox 136"/>
+          <p:cNvSpPr txBox="1"/>
+          <p:nvPr/>
+        </p:nvSpPr>
+        <p:spPr>
+          <a:xfrm>
+            <a:off x="10561320" y="6144768"/>
+            <a:ext cx="2240280" cy="640080"/>
+          </a:xfrm>
+          <a:prstGeom prst="rect">
+            <a:avLst/>
+          </a:prstGeom>
+          <a:noFill/>
+        </p:spPr>
+        <p:txBody>
+          <a:bodyPr wrap="square" lIns="0" rIns="0" tIns="0" bIns="0" anchor="t">
+            <a:spAutoFit/>
+          </a:bodyPr>
+          <a:lstStyle/>
+          <a:p>
+            <a:pPr algn="l">
+              <a:lnSpc>
+                <a:spcPct val="100000"/>
+              </a:lnSpc>
+              <a:spcAft>
+                <a:spcPts val="0"/>
+              </a:spcAft>
+            </a:pPr>
+            <a:r>
+              <a:rPr sz="1800" b="0">
+                <a:solidFill>
+                  <a:srgbClr val="E7E8EA"/>
+                </a:solidFill>
+                <a:latin typeface="Instrument Sans"/>
+              </a:rPr>
+              <a:t>refused, e.g. wrong signer (simulated)</a:t>
+            </a:r>
+          </a:p>
+        </p:txBody>
+      </p:sp>
+      <p:sp>
+        <p:nvSpPr>
+          <p:cNvPr id="138" name="TextBox 137"/>
+          <p:cNvSpPr txBox="1"/>
+          <p:nvPr/>
+        </p:nvSpPr>
+        <p:spPr>
+          <a:xfrm>
+            <a:off x="12893040" y="5440680"/>
+            <a:ext cx="2286000" cy="731520"/>
+          </a:xfrm>
+          <a:prstGeom prst="rect">
+            <a:avLst/>
+          </a:prstGeom>
+          <a:noFill/>
+        </p:spPr>
+        <p:txBody>
+          <a:bodyPr wrap="square" lIns="0" rIns="0" tIns="0" bIns="0" anchor="t">
+            <a:spAutoFit/>
+          </a:bodyPr>
+          <a:lstStyle/>
+          <a:p>
+            <a:pPr algn="l">
+              <a:lnSpc>
+                <a:spcPct val="90000"/>
+              </a:lnSpc>
+              <a:spcAft>
+                <a:spcPts val="600"/>
+              </a:spcAft>
+            </a:pPr>
+            <a:r>
+              <a:rPr sz="4400" b="1">
+                <a:solidFill>
+                  <a:srgbClr val="C6F24E"/>
+                </a:solidFill>
+                <a:latin typeface="Inter Tight"/>
+              </a:rPr>
+              <a:t>24</a:t>
+            </a:r>
+          </a:p>
+        </p:txBody>
+      </p:sp>
+      <p:sp>
+        <p:nvSpPr>
+          <p:cNvPr id="139" name="TextBox 138"/>
+          <p:cNvSpPr txBox="1"/>
+          <p:nvPr/>
+        </p:nvSpPr>
+        <p:spPr>
+          <a:xfrm>
+            <a:off x="12893040" y="6144768"/>
+            <a:ext cx="2240280" cy="640080"/>
+          </a:xfrm>
+          <a:prstGeom prst="rect">
+            <a:avLst/>
+          </a:prstGeom>
+          <a:noFill/>
+        </p:spPr>
+        <p:txBody>
+          <a:bodyPr wrap="square" lIns="0" rIns="0" tIns="0" bIns="0" anchor="t">
+            <a:spAutoFit/>
+          </a:bodyPr>
+          <a:lstStyle/>
+          <a:p>
+            <a:pPr algn="l">
+              <a:lnSpc>
+                <a:spcPct val="100000"/>
+              </a:lnSpc>
+              <a:spcAft>
+                <a:spcPts val="0"/>
+              </a:spcAft>
+            </a:pPr>
+            <a:r>
+              <a:rPr sz="1800" b="0">
+                <a:solidFill>
+                  <a:srgbClr val="E7E8EA"/>
+                </a:solidFill>
+                <a:latin typeface="Instrument Sans"/>
+              </a:rPr>
+              <a:t>unit tests</a:t>
+            </a:r>
+          </a:p>
+        </p:txBody>
+      </p:sp>
+      <p:sp>
+        <p:nvSpPr>
+          <p:cNvPr id="140" name="TextBox 139"/>
+          <p:cNvSpPr txBox="1"/>
+          <p:nvPr/>
+        </p:nvSpPr>
+        <p:spPr>
+          <a:xfrm>
+            <a:off x="15224759" y="5440680"/>
+            <a:ext cx="2286000" cy="731520"/>
+          </a:xfrm>
+          <a:prstGeom prst="rect">
+            <a:avLst/>
+          </a:prstGeom>
+          <a:noFill/>
+        </p:spPr>
+        <p:txBody>
+          <a:bodyPr wrap="square" lIns="0" rIns="0" tIns="0" bIns="0" anchor="t">
+            <a:spAutoFit/>
+          </a:bodyPr>
+          <a:lstStyle/>
+          <a:p>
+            <a:pPr algn="l">
+              <a:lnSpc>
+                <a:spcPct val="90000"/>
+              </a:lnSpc>
+              <a:spcAft>
+                <a:spcPts val="600"/>
+              </a:spcAft>
+            </a:pPr>
+            <a:r>
+              <a:rPr sz="4400" b="1">
+                <a:solidFill>
+                  <a:srgbClr val="C6F24E"/>
+                </a:solidFill>
+                <a:latin typeface="Inter Tight"/>
+              </a:rPr>
+              <a:t>MATCH</a:t>
+            </a:r>
+          </a:p>
+        </p:txBody>
+      </p:sp>
+      <p:sp>
+        <p:nvSpPr>
+          <p:cNvPr id="141" name="TextBox 140"/>
+          <p:cNvSpPr txBox="1"/>
+          <p:nvPr/>
+        </p:nvSpPr>
+        <p:spPr>
+          <a:xfrm>
+            <a:off x="15224759" y="6144768"/>
+            <a:ext cx="2240280" cy="640080"/>
+          </a:xfrm>
+          <a:prstGeom prst="rect">
+            <a:avLst/>
+          </a:prstGeom>
+          <a:noFill/>
+        </p:spPr>
+        <p:txBody>
+          <a:bodyPr wrap="square" lIns="0" rIns="0" tIns="0" bIns="0" anchor="t">
+            <a:spAutoFit/>
+          </a:bodyPr>
+          <a:lstStyle/>
+          <a:p>
+            <a:pPr algn="l">
+              <a:lnSpc>
+                <a:spcPct val="100000"/>
+              </a:lnSpc>
+              <a:spcAft>
+                <a:spcPts val="0"/>
+              </a:spcAft>
+            </a:pPr>
+            <a:r>
+              <a:rPr sz="1800" b="0">
+                <a:solidFill>
+                  <a:srgbClr val="E7E8EA"/>
+                </a:solidFill>
+                <a:latin typeface="Instrument Sans"/>
+              </a:rPr>
+              <a:t>head check, 25 Oct</a:t>
+            </a:r>
+          </a:p>
+        </p:txBody>
+      </p:sp>
+      <p:sp>
+        <p:nvSpPr>
+          <p:cNvPr id="142" name="TextBox 141"/>
+          <p:cNvSpPr txBox="1"/>
+          <p:nvPr/>
+        </p:nvSpPr>
+        <p:spPr>
+          <a:xfrm>
+            <a:off x="8229600" y="6949440"/>
+            <a:ext cx="9144000" cy="1463040"/>
           </a:xfrm>
           <a:prstGeom prst="rect">
             <a:avLst/>
@@ -12999,339 +13293,45 @@
                 <a:spcPct val="112000"/>
               </a:lnSpc>
               <a:spcAft>
-                <a:spcPts val="600"/>
+                <a:spcPts val="400"/>
               </a:spcAft>
             </a:pPr>
             <a:r>
               <a:rPr sz="1800" b="0">
                 <a:solidFill>
+                  <a:srgbClr val="A3A8B0"/>
+                </a:solidFill>
+                <a:latin typeface="JetBrains Mono"/>
+              </a:rPr>
+              <a:t>custody_registry </a:t>
+            </a:r>
+            <a:r>
+              <a:rPr sz="1800" b="0">
+                <a:solidFill>
                   <a:srgbClr val="E7E8EA"/>
                 </a:solidFill>
-                <a:latin typeface="Instrument Sans"/>
+                <a:latin typeface="JetBrains Mono"/>
               </a:rPr>
-              <a:t>successful</a:t>
-            </a:r>
-          </a:p>
-        </p:txBody>
-      </p:sp>
-      <p:sp>
-        <p:nvSpPr>
-          <p:cNvPr id="136" name="TextBox 135"/>
-          <p:cNvSpPr txBox="1"/>
-          <p:nvPr/>
-        </p:nvSpPr>
-        <p:spPr>
-          <a:xfrm>
-            <a:off x="10561320" y="5760720"/>
-            <a:ext cx="2286000" cy="731520"/>
-          </a:xfrm>
-          <a:prstGeom prst="rect">
-            <a:avLst/>
-          </a:prstGeom>
-          <a:noFill/>
-        </p:spPr>
-        <p:txBody>
-          <a:bodyPr wrap="square" lIns="0" rIns="0" tIns="0" bIns="0" anchor="t">
-            <a:spAutoFit/>
-          </a:bodyPr>
-          <a:lstStyle/>
-          <a:p>
-            <a:pPr algn="l">
-              <a:lnSpc>
-                <a:spcPct val="90000"/>
-              </a:lnSpc>
-              <a:spcAft>
-                <a:spcPts val="600"/>
-              </a:spcAft>
-            </a:pPr>
-            <a:r>
-              <a:rPr sz="4400" b="1">
-                <a:solidFill>
-                  <a:srgbClr val="C6F24E"/>
-                </a:solidFill>
-                <a:latin typeface="Inter Tight"/>
-              </a:rPr>
-              <a:t>9</a:t>
-            </a:r>
-          </a:p>
-        </p:txBody>
-      </p:sp>
-      <p:sp>
-        <p:nvSpPr>
-          <p:cNvPr id="137" name="TextBox 136"/>
-          <p:cNvSpPr txBox="1"/>
-          <p:nvPr/>
-        </p:nvSpPr>
-        <p:spPr>
-          <a:xfrm>
-            <a:off x="10561320" y="6492240"/>
-            <a:ext cx="2240280" cy="640080"/>
-          </a:xfrm>
-          <a:prstGeom prst="rect">
-            <a:avLst/>
-          </a:prstGeom>
-          <a:noFill/>
-        </p:spPr>
-        <p:txBody>
-          <a:bodyPr wrap="square" lIns="0" rIns="0" tIns="0" bIns="0" anchor="t">
-            <a:spAutoFit/>
-          </a:bodyPr>
-          <a:lstStyle/>
+              <a:t>CCBJVXMJYWPHTDJHDFPRGKPGXGEP24JOPJAMUS5C3BMZJTRTWR2H4LII</a:t>
+            </a:r>
+          </a:p>
           <a:p>
             <a:pPr algn="l">
               <a:lnSpc>
                 <a:spcPct val="112000"/>
               </a:lnSpc>
               <a:spcAft>
-                <a:spcPts val="600"/>
+                <a:spcPts val="400"/>
               </a:spcAft>
             </a:pPr>
             <a:r>
               <a:rPr sz="1800" b="0">
                 <a:solidFill>
-                  <a:srgbClr val="E7E8EA"/>
+                  <a:srgbClr val="A3A8B0"/>
                 </a:solidFill>
                 <a:latin typeface="Instrument Sans"/>
               </a:rPr>
-              <a:t>refused (simulated)</a:t>
-            </a:r>
-          </a:p>
-        </p:txBody>
-      </p:sp>
-      <p:sp>
-        <p:nvSpPr>
-          <p:cNvPr id="138" name="TextBox 137"/>
-          <p:cNvSpPr txBox="1"/>
-          <p:nvPr/>
-        </p:nvSpPr>
-        <p:spPr>
-          <a:xfrm>
-            <a:off x="12893040" y="5760720"/>
-            <a:ext cx="2286000" cy="731520"/>
-          </a:xfrm>
-          <a:prstGeom prst="rect">
-            <a:avLst/>
-          </a:prstGeom>
-          <a:noFill/>
-        </p:spPr>
-        <p:txBody>
-          <a:bodyPr wrap="square" lIns="0" rIns="0" tIns="0" bIns="0" anchor="t">
-            <a:spAutoFit/>
-          </a:bodyPr>
-          <a:lstStyle/>
-          <a:p>
-            <a:pPr algn="l">
-              <a:lnSpc>
-                <a:spcPct val="90000"/>
-              </a:lnSpc>
-              <a:spcAft>
-                <a:spcPts val="600"/>
-              </a:spcAft>
-            </a:pPr>
-            <a:r>
-              <a:rPr sz="4400" b="1">
-                <a:solidFill>
-                  <a:srgbClr val="C6F24E"/>
-                </a:solidFill>
-                <a:latin typeface="Inter Tight"/>
-              </a:rPr>
-              <a:t>24</a:t>
-            </a:r>
-          </a:p>
-        </p:txBody>
-      </p:sp>
-      <p:sp>
-        <p:nvSpPr>
-          <p:cNvPr id="139" name="TextBox 138"/>
-          <p:cNvSpPr txBox="1"/>
-          <p:nvPr/>
-        </p:nvSpPr>
-        <p:spPr>
-          <a:xfrm>
-            <a:off x="12893040" y="6492240"/>
-            <a:ext cx="2240280" cy="640080"/>
-          </a:xfrm>
-          <a:prstGeom prst="rect">
-            <a:avLst/>
-          </a:prstGeom>
-          <a:noFill/>
-        </p:spPr>
-        <p:txBody>
-          <a:bodyPr wrap="square" lIns="0" rIns="0" tIns="0" bIns="0" anchor="t">
-            <a:spAutoFit/>
-          </a:bodyPr>
-          <a:lstStyle/>
-          <a:p>
-            <a:pPr algn="l">
-              <a:lnSpc>
-                <a:spcPct val="112000"/>
-              </a:lnSpc>
-              <a:spcAft>
-                <a:spcPts val="600"/>
-              </a:spcAft>
-            </a:pPr>
-            <a:r>
-              <a:rPr sz="1800" b="0">
-                <a:solidFill>
-                  <a:srgbClr val="E7E8EA"/>
-                </a:solidFill>
-                <a:latin typeface="Instrument Sans"/>
-              </a:rPr>
-              <a:t>unit tests</a:t>
-            </a:r>
-          </a:p>
-        </p:txBody>
-      </p:sp>
-      <p:sp>
-        <p:nvSpPr>
-          <p:cNvPr id="140" name="TextBox 139"/>
-          <p:cNvSpPr txBox="1"/>
-          <p:nvPr/>
-        </p:nvSpPr>
-        <p:spPr>
-          <a:xfrm>
-            <a:off x="15224759" y="5760720"/>
-            <a:ext cx="2286000" cy="731520"/>
-          </a:xfrm>
-          <a:prstGeom prst="rect">
-            <a:avLst/>
-          </a:prstGeom>
-          <a:noFill/>
-        </p:spPr>
-        <p:txBody>
-          <a:bodyPr wrap="square" lIns="0" rIns="0" tIns="0" bIns="0" anchor="t">
-            <a:spAutoFit/>
-          </a:bodyPr>
-          <a:lstStyle/>
-          <a:p>
-            <a:pPr algn="l">
-              <a:lnSpc>
-                <a:spcPct val="90000"/>
-              </a:lnSpc>
-              <a:spcAft>
-                <a:spcPts val="600"/>
-              </a:spcAft>
-            </a:pPr>
-            <a:r>
-              <a:rPr sz="4400" b="1">
-                <a:solidFill>
-                  <a:srgbClr val="C6F24E"/>
-                </a:solidFill>
-                <a:latin typeface="Inter Tight"/>
-              </a:rPr>
-              <a:t>MATCH</a:t>
-            </a:r>
-          </a:p>
-        </p:txBody>
-      </p:sp>
-      <p:sp>
-        <p:nvSpPr>
-          <p:cNvPr id="141" name="TextBox 140"/>
-          <p:cNvSpPr txBox="1"/>
-          <p:nvPr/>
-        </p:nvSpPr>
-        <p:spPr>
-          <a:xfrm>
-            <a:off x="15224759" y="6492240"/>
-            <a:ext cx="2240280" cy="640080"/>
-          </a:xfrm>
-          <a:prstGeom prst="rect">
-            <a:avLst/>
-          </a:prstGeom>
-          <a:noFill/>
-        </p:spPr>
-        <p:txBody>
-          <a:bodyPr wrap="square" lIns="0" rIns="0" tIns="0" bIns="0" anchor="t">
-            <a:spAutoFit/>
-          </a:bodyPr>
-          <a:lstStyle/>
-          <a:p>
-            <a:pPr algn="l">
-              <a:lnSpc>
-                <a:spcPct val="112000"/>
-              </a:lnSpc>
-              <a:spcAft>
-                <a:spcPts val="600"/>
-              </a:spcAft>
-            </a:pPr>
-            <a:r>
-              <a:rPr sz="1800" b="0">
-                <a:solidFill>
-                  <a:srgbClr val="E7E8EA"/>
-                </a:solidFill>
-                <a:latin typeface="Instrument Sans"/>
-              </a:rPr>
-              <a:t>head check, 25 Oct</a:t>
-            </a:r>
-          </a:p>
-        </p:txBody>
-      </p:sp>
-      <p:sp>
-        <p:nvSpPr>
-          <p:cNvPr id="142" name="TextBox 141"/>
-          <p:cNvSpPr txBox="1"/>
-          <p:nvPr/>
-        </p:nvSpPr>
-        <p:spPr>
-          <a:xfrm>
-            <a:off x="8229600" y="6858000"/>
-            <a:ext cx="9144000" cy="1463040"/>
-          </a:xfrm>
-          <a:prstGeom prst="rect">
-            <a:avLst/>
-          </a:prstGeom>
-          <a:noFill/>
-        </p:spPr>
-        <p:txBody>
-          <a:bodyPr wrap="square" lIns="0" rIns="0" tIns="0" bIns="0" anchor="t">
-            <a:spAutoFit/>
-          </a:bodyPr>
-          <a:lstStyle/>
-          <a:p>
-            <a:pPr algn="l">
-              <a:lnSpc>
-                <a:spcPct val="112000"/>
-              </a:lnSpc>
-              <a:spcAft>
-                <a:spcPts val="400"/>
-              </a:spcAft>
-            </a:pPr>
-            <a:r>
-              <a:rPr sz="1800" b="0">
-                <a:solidFill>
-                  <a:srgbClr val="A3A8B0"/>
-                </a:solidFill>
-                <a:latin typeface="JetBrains Mono"/>
-              </a:rPr>
-              <a:t>custody_registry </a:t>
-            </a:r>
-            <a:r>
-              <a:rPr sz="1800" b="0">
-                <a:solidFill>
-                  <a:srgbClr val="E7E8EA"/>
-                </a:solidFill>
-                <a:latin typeface="JetBrains Mono"/>
-              </a:rPr>
-              <a:t>CCBJVXMJYWPHTDJHDFPRGKPGXGEP24JOPJAMUS5C3BMZJTRTWR2H4LII</a:t>
-            </a:r>
-          </a:p>
-          <a:p>
-            <a:pPr algn="l">
-              <a:lnSpc>
-                <a:spcPct val="112000"/>
-              </a:lnSpc>
-              <a:spcAft>
-                <a:spcPts val="400"/>
-              </a:spcAft>
-            </a:pPr>
-            <a:r>
-              <a:rPr sz="1800" b="0">
-                <a:solidFill>
-                  <a:srgbClr val="A3A8B0"/>
-                </a:solidFill>
-                <a:latin typeface="Instrument Sans"/>
-              </a:rPr>
-              <a:t>Second run (branch three-machine): two team members, as two companies, signed from their own computers and testnet keys.</a:t>
+              <a:t>Second run, own registry (branch three-machine): two team members each signed their handovers from their own computers and keys; still test keys.</a:t>
             </a:r>
           </a:p>
           <a:p>
@@ -13797,7 +13797,7 @@
                 </a:solidFill>
                 <a:latin typeface="Inter Tight"/>
               </a:rPr>
-              <a:t>Why Stellar: many companies, one ledger</a:t>
+              <a:t>Why Stellar: all signers, one call</a:t>
             </a:r>
           </a:p>
         </p:txBody>
@@ -18276,7 +18276,7 @@
                 </a:solidFill>
                 <a:latin typeface="Inter Tight"/>
               </a:rPr>
-              <a:t>One record for the goods, from origin to delivery, across every company that touches them.</a:t>
+              <a:t>One record for the goods, from origin to delivery, that every company along the way could share.</a:t>
             </a:r>
           </a:p>
         </p:txBody>
@@ -19899,7 +19899,7 @@
                 </a:solidFill>
                 <a:latin typeface="Instrument Sans"/>
               </a:rPr>
-              <a:t>each company keeps its own record of its own leg; nobody holds the chain end to end.</a:t>
+              <a:t>each company records only its own leg; no shared record follows the goods. Not yet tested with a customer.</a:t>
             </a:r>
           </a:p>
         </p:txBody>

--- a/projects/hackmeridian-rail/deck/radox-custody-rail.pptx
+++ b/projects/hackmeridian-rail/deck/radox-custody-rail.pptx
@@ -11946,7 +11946,7 @@
                 </a:solidFill>
                 <a:latin typeface="Instrument Sans"/>
               </a:rPr>
-              <a:t>Each step extends an on-chain hash chain, the </a:t>
+              <a:t>Each step extends the on-chain </a:t>
             </a:r>
             <a:r>
               <a:rPr sz="2300" b="0">
@@ -11964,7 +11964,7 @@
                 </a:solidFill>
                 <a:latin typeface="Instrument Sans"/>
               </a:rPr>
-              <a:t>: anyone can rebuild the history.</a:t>
+              <a:t>: anyone can replay the history from Horizon and check it against the head.</a:t>
             </a:r>
           </a:p>
           <a:p>
@@ -12053,7 +12053,7 @@
                 </a:solidFill>
                 <a:latin typeface="Instrument Sans"/>
               </a:rPr>
-              <a:t>Keyed to the container number; would sit beside the carrier's bill of lading, not integrated. ¹ Radox policy, not enforced on-chain; redeem needs the holder's signature.</a:t>
+              <a:t>Keyed by sha256(container | origin); would sit beside the carrier's bill of lading, not integrated. ¹ Radox policy, not enforced on-chain; redeem needs the holder's signature.</a:t>
             </a:r>
           </a:p>
         </p:txBody>
@@ -13331,7 +13331,7 @@
                 </a:solidFill>
                 <a:latin typeface="Instrument Sans"/>
               </a:rPr>
-              <a:t>Second run, own registry (branch three-machine): two team members each signed their handovers from their own computers and keys; still test keys.</a:t>
+              <a:t>Second shipment (proofs/three-machine.json): two team members each signed their handovers from their own computers and keys; still test keys.</a:t>
             </a:r>
           </a:p>
           <a:p>
@@ -13961,7 +13961,7 @@
               </a:spcAft>
             </a:pPr>
             <a:r>
-              <a:rPr sz="2400" b="0">
+              <a:rPr sz="2200" b="0">
                 <a:solidFill>
                   <a:srgbClr val="0E0F11"/>
                 </a:solidFill>
@@ -14095,7 +14095,7 @@
                 </a:solidFill>
                 <a:latin typeface="Inter Tight"/>
               </a:rPr>
-              <a:t>Events plus an on-chain head</a:t>
+              <a:t>History from Horizon, checked by an on-chain head</a:t>
             </a:r>
           </a:p>
         </p:txBody>
@@ -14131,13 +14131,13 @@
               </a:spcAft>
             </a:pPr>
             <a:r>
-              <a:rPr sz="2400" b="0">
+              <a:rPr sz="2200" b="0">
                 <a:solidFill>
                   <a:srgbClr val="0E0F11"/>
                 </a:solidFill>
                 <a:latin typeface="Instrument Sans"/>
               </a:rPr>
-              <a:t>RPC keeps contract events about 7 days. The head stored in the contract lets anyone rebuild the full history later.</a:t>
+              <a:t>RPC keeps contract events about 7 days, so we replay each shipment's transactions from Horizon and check them against the head stored in the contract.</a:t>
             </a:r>
           </a:p>
         </p:txBody>
@@ -14301,7 +14301,7 @@
               </a:spcAft>
             </a:pPr>
             <a:r>
-              <a:rPr sz="2400" b="0">
+              <a:rPr sz="2200" b="0">
                 <a:solidFill>
                   <a:srgbClr val="0E0F11"/>
                 </a:solidFill>

--- a/projects/hackmeridian-rail/deck/radox-custody-rail.pptx
+++ b/projects/hackmeridian-rail/deck/radox-custody-rail.pptx
@@ -14664,7 +14664,7 @@
                 <a:cs typeface="JetBrains Mono"/>
                 <a:sym typeface="JetBrains Mono"/>
               </a:rPr>
-              <a:t>NEXT ▸ VISION AND ASK</a:t>
+              <a:t>NEXT ▸ MARKET AND ASK</a:t>
             </a:r>
             <a:endParaRPr/>
           </a:p>
@@ -15667,7 +15667,7 @@
         <p:spPr>
           <a:xfrm>
             <a:off x="914400" y="1417320"/>
-            <a:ext cx="3977639" cy="475488"/>
+            <a:ext cx="4114800" cy="475488"/>
           </a:xfrm>
           <a:prstGeom prst="roundRect">
             <a:avLst>
@@ -15706,7 +15706,7 @@
                 <a:cs typeface="JetBrains Mono"/>
                 <a:sym typeface="JetBrains Mono"/>
               </a:rPr>
-              <a:t>VISION · NEXT · THE ASK</a:t>
+              <a:t>MARKET · MODEL · THE ASK</a:t>
             </a:r>
             <a:endParaRPr/>
           </a:p>
@@ -15874,7 +15874,7 @@
                 </a:solidFill>
                 <a:latin typeface="Inter Tight"/>
               </a:rPr>
-              <a:t>Vision: one rail, every corridor</a:t>
+              <a:t>One rail, every corridor</a:t>
             </a:r>
           </a:p>
         </p:txBody>
@@ -15887,8 +15887,8 @@
         </p:nvSpPr>
         <p:spPr>
           <a:xfrm>
-            <a:off x="914400" y="3108960"/>
-            <a:ext cx="16459200" cy="1188720"/>
+            <a:off x="914400" y="3017520"/>
+            <a:ext cx="9692640" cy="365760"/>
           </a:xfrm>
           <a:prstGeom prst="rect">
             <a:avLst/>
@@ -15910,22 +15910,13 @@
               </a:spcAft>
             </a:pPr>
             <a:r>
-              <a:rPr sz="2600" b="1">
-                <a:solidFill>
-                  <a:srgbClr val="0E0F11"/>
-                </a:solidFill>
-                <a:latin typeface="Instrument Sans"/>
+              <a:rPr sz="1800" b="1">
+                <a:solidFill>
+                  <a:srgbClr val="556F00"/>
+                </a:solidFill>
+                <a:latin typeface="JetBrains Mono"/>
               </a:rPr>
-              <a:t>Rio–Miami is our pilot corridor. </a:t>
-            </a:r>
-            <a:r>
-              <a:rPr sz="2600" b="0">
-                <a:solidFill>
-                  <a:srgbClr val="0E0F11"/>
-                </a:solidFill>
-                <a:latin typeface="Instrument Sans"/>
-              </a:rPr>
-              <a:t>Then the same rail worldwide, linked to chambers of commerce, ports and airports, with a payment leg after delivery: all future work.</a:t>
+              <a:t>MARKET · FIGURES, NOT OURS</a:t>
             </a:r>
           </a:p>
         </p:txBody>
@@ -15938,8 +15929,8 @@
         </p:nvSpPr>
         <p:spPr>
           <a:xfrm>
-            <a:off x="1097280" y="4832604"/>
-            <a:ext cx="12618720" cy="27432"/>
+            <a:off x="914400" y="3442715"/>
+            <a:ext cx="9692640" cy="27432"/>
           </a:xfrm>
           <a:prstGeom prst="rect">
             <a:avLst/>
@@ -15976,20 +15967,281 @@
       </p:sp>
       <p:sp>
         <p:nvSpPr>
-          <p:cNvPr id="127" name="Oval 126"/>
+          <p:cNvPr id="127" name="TextBox 126"/>
+          <p:cNvSpPr txBox="1"/>
+          <p:nvPr/>
+        </p:nvSpPr>
+        <p:spPr>
+          <a:xfrm>
+            <a:off x="914400" y="3611880"/>
+            <a:ext cx="4663440" cy="777240"/>
+          </a:xfrm>
+          <a:prstGeom prst="rect">
+            <a:avLst/>
+          </a:prstGeom>
+          <a:noFill/>
+        </p:spPr>
+        <p:txBody>
+          <a:bodyPr wrap="square" lIns="0" rIns="0" tIns="0" bIns="0" anchor="t">
+            <a:spAutoFit/>
+          </a:bodyPr>
+          <a:lstStyle/>
+          <a:p>
+            <a:pPr algn="l">
+              <a:lnSpc>
+                <a:spcPct val="95000"/>
+              </a:lnSpc>
+              <a:spcAft>
+                <a:spcPts val="600"/>
+              </a:spcAft>
+            </a:pPr>
+            <a:r>
+              <a:rPr sz="4800" b="1">
+                <a:solidFill>
+                  <a:srgbClr val="0E0F11"/>
+                </a:solidFill>
+                <a:latin typeface="Inter Tight"/>
+              </a:rPr>
+              <a:t>US$94.2B</a:t>
+            </a:r>
+          </a:p>
+        </p:txBody>
+      </p:sp>
+      <p:sp>
+        <p:nvSpPr>
+          <p:cNvPr id="128" name="TextBox 127"/>
+          <p:cNvSpPr txBox="1"/>
+          <p:nvPr/>
+        </p:nvSpPr>
+        <p:spPr>
+          <a:xfrm>
+            <a:off x="914400" y="4389120"/>
+            <a:ext cx="4663440" cy="731520"/>
+          </a:xfrm>
+          <a:prstGeom prst="rect">
+            <a:avLst/>
+          </a:prstGeom>
+          <a:noFill/>
+        </p:spPr>
+        <p:txBody>
+          <a:bodyPr wrap="square" lIns="0" rIns="0" tIns="0" bIns="0" anchor="t">
+            <a:spAutoFit/>
+          </a:bodyPr>
+          <a:lstStyle/>
+          <a:p>
+            <a:pPr algn="l">
+              <a:lnSpc>
+                <a:spcPct val="112000"/>
+              </a:lnSpc>
+              <a:spcAft>
+                <a:spcPts val="600"/>
+              </a:spcAft>
+            </a:pPr>
+            <a:r>
+              <a:rPr sz="2000" b="1">
+                <a:solidFill>
+                  <a:srgbClr val="0E0F11"/>
+                </a:solidFill>
+                <a:latin typeface="Instrument Sans"/>
+              </a:rPr>
+              <a:t>US–Brazil goods trade, 2025¹</a:t>
+            </a:r>
+          </a:p>
+        </p:txBody>
+      </p:sp>
+      <p:sp>
+        <p:nvSpPr>
+          <p:cNvPr id="129" name="TextBox 128"/>
+          <p:cNvSpPr txBox="1"/>
+          <p:nvPr/>
+        </p:nvSpPr>
+        <p:spPr>
+          <a:xfrm>
+            <a:off x="5852160" y="3611880"/>
+            <a:ext cx="4663440" cy="777240"/>
+          </a:xfrm>
+          <a:prstGeom prst="rect">
+            <a:avLst/>
+          </a:prstGeom>
+          <a:noFill/>
+        </p:spPr>
+        <p:txBody>
+          <a:bodyPr wrap="square" lIns="0" rIns="0" tIns="0" bIns="0" anchor="t">
+            <a:spAutoFit/>
+          </a:bodyPr>
+          <a:lstStyle/>
+          <a:p>
+            <a:pPr algn="l">
+              <a:lnSpc>
+                <a:spcPct val="95000"/>
+              </a:lnSpc>
+              <a:spcAft>
+                <a:spcPts val="600"/>
+              </a:spcAft>
+            </a:pPr>
+            <a:r>
+              <a:rPr sz="4800" b="1">
+                <a:solidFill>
+                  <a:srgbClr val="0E0F11"/>
+                </a:solidFill>
+                <a:latin typeface="Inter Tight"/>
+              </a:rPr>
+              <a:t>US$6.1B</a:t>
+            </a:r>
+          </a:p>
+        </p:txBody>
+      </p:sp>
+      <p:sp>
+        <p:nvSpPr>
+          <p:cNvPr id="130" name="TextBox 129"/>
+          <p:cNvSpPr txBox="1"/>
+          <p:nvPr/>
+        </p:nvSpPr>
+        <p:spPr>
+          <a:xfrm>
+            <a:off x="5852160" y="4389120"/>
+            <a:ext cx="4663440" cy="731520"/>
+          </a:xfrm>
+          <a:prstGeom prst="rect">
+            <a:avLst/>
+          </a:prstGeom>
+          <a:noFill/>
+        </p:spPr>
+        <p:txBody>
+          <a:bodyPr wrap="square" lIns="0" rIns="0" tIns="0" bIns="0" anchor="t">
+            <a:spAutoFit/>
+          </a:bodyPr>
+          <a:lstStyle/>
+          <a:p>
+            <a:pPr algn="l">
+              <a:lnSpc>
+                <a:spcPct val="112000"/>
+              </a:lnSpc>
+              <a:spcAft>
+                <a:spcPts val="600"/>
+              </a:spcAft>
+            </a:pPr>
+            <a:r>
+              <a:rPr sz="2000" b="1">
+                <a:solidFill>
+                  <a:srgbClr val="0E0F11"/>
+                </a:solidFill>
+                <a:latin typeface="Instrument Sans"/>
+              </a:rPr>
+              <a:t>Florida's goods exports to Brazil, its #1 market, 2025²</a:t>
+            </a:r>
+          </a:p>
+        </p:txBody>
+      </p:sp>
+      <p:sp>
+        <p:nvSpPr>
+          <p:cNvPr id="131" name="TextBox 130"/>
+          <p:cNvSpPr txBox="1"/>
+          <p:nvPr/>
+        </p:nvSpPr>
+        <p:spPr>
+          <a:xfrm>
+            <a:off x="914400" y="5166360"/>
+            <a:ext cx="9692640" cy="822960"/>
+          </a:xfrm>
+          <a:prstGeom prst="rect">
+            <a:avLst/>
+          </a:prstGeom>
+          <a:noFill/>
+        </p:spPr>
+        <p:txBody>
+          <a:bodyPr wrap="square" lIns="0" rIns="0" tIns="0" bIns="0" anchor="t">
+            <a:spAutoFit/>
+          </a:bodyPr>
+          <a:lstStyle/>
+          <a:p>
+            <a:pPr algn="l">
+              <a:lnSpc>
+                <a:spcPct val="112000"/>
+              </a:lnSpc>
+              <a:spcAft>
+                <a:spcPts val="600"/>
+              </a:spcAft>
+            </a:pPr>
+            <a:r>
+              <a:rPr sz="2000" b="1">
+                <a:solidFill>
+                  <a:srgbClr val="0E0F11"/>
+                </a:solidFill>
+                <a:latin typeface="Instrument Sans"/>
+              </a:rPr>
+              <a:t>Global: </a:t>
+            </a:r>
+            <a:r>
+              <a:rPr sz="2000" b="0">
+                <a:solidFill>
+                  <a:srgbClr val="0E0F11"/>
+                </a:solidFill>
+                <a:latin typeface="Instrument Sans"/>
+              </a:rPr>
+              <a:t>US$26.26T world merchandise exports, 2025³; ~80% of goods trade by volume goes by sea⁴; ~45M ocean bills of lading a year⁵.</a:t>
+            </a:r>
+          </a:p>
+        </p:txBody>
+      </p:sp>
+      <p:sp>
+        <p:nvSpPr>
+          <p:cNvPr id="132" name="TextBox 131"/>
+          <p:cNvSpPr txBox="1"/>
+          <p:nvPr/>
+        </p:nvSpPr>
+        <p:spPr>
+          <a:xfrm>
+            <a:off x="11338560" y="3017520"/>
+            <a:ext cx="6035040" cy="365760"/>
+          </a:xfrm>
+          <a:prstGeom prst="rect">
+            <a:avLst/>
+          </a:prstGeom>
+          <a:noFill/>
+        </p:spPr>
+        <p:txBody>
+          <a:bodyPr wrap="square" lIns="0" rIns="0" tIns="0" bIns="0" anchor="t">
+            <a:spAutoFit/>
+          </a:bodyPr>
+          <a:lstStyle/>
+          <a:p>
+            <a:pPr algn="l">
+              <a:lnSpc>
+                <a:spcPct val="112000"/>
+              </a:lnSpc>
+              <a:spcAft>
+                <a:spcPts val="600"/>
+              </a:spcAft>
+            </a:pPr>
+            <a:r>
+              <a:rPr sz="1800" b="1">
+                <a:solidFill>
+                  <a:srgbClr val="0E0F11"/>
+                </a:solidFill>
+                <a:latin typeface="JetBrains Mono"/>
+              </a:rPr>
+              <a:t>MODEL · NO PRICES YET</a:t>
+            </a:r>
+          </a:p>
+        </p:txBody>
+      </p:sp>
+      <p:sp>
+        <p:nvSpPr>
+          <p:cNvPr id="133" name="Rectangle 132"/>
           <p:cNvSpPr/>
           <p:nvPr/>
         </p:nvSpPr>
         <p:spPr>
           <a:xfrm>
-            <a:off x="941832" y="4690872"/>
-            <a:ext cx="310896" cy="310896"/>
-          </a:xfrm>
-          <a:prstGeom prst="ellipse">
+            <a:off x="11338560" y="3442715"/>
+            <a:ext cx="6035040" cy="27432"/>
+          </a:xfrm>
+          <a:prstGeom prst="rect">
             <a:avLst/>
           </a:prstGeom>
           <a:solidFill>
-            <a:srgbClr val="556F00"/>
+            <a:srgbClr val="0E0F11"/>
           </a:solidFill>
           <a:ln>
             <a:noFill/>
@@ -16020,14 +16272,56 @@
       </p:sp>
       <p:sp>
         <p:nvSpPr>
-          <p:cNvPr id="128" name="TextBox 127"/>
+          <p:cNvPr id="134" name="TextBox 133"/>
           <p:cNvSpPr txBox="1"/>
           <p:nvPr/>
         </p:nvSpPr>
         <p:spPr>
           <a:xfrm>
-            <a:off x="914400" y="5074920"/>
-            <a:ext cx="3931920" cy="457200"/>
+            <a:off x="11338560" y="3611880"/>
+            <a:ext cx="6035040" cy="1280160"/>
+          </a:xfrm>
+          <a:prstGeom prst="rect">
+            <a:avLst/>
+          </a:prstGeom>
+          <a:noFill/>
+        </p:spPr>
+        <p:txBody>
+          <a:bodyPr wrap="square" lIns="0" rIns="0" tIns="0" bIns="0" anchor="t">
+            <a:spAutoFit/>
+          </a:bodyPr>
+          <a:lstStyle/>
+          <a:p>
+            <a:pPr algn="l">
+              <a:lnSpc>
+                <a:spcPct val="100000"/>
+              </a:lnSpc>
+              <a:spcAft>
+                <a:spcPts val="600"/>
+              </a:spcAft>
+            </a:pPr>
+            <a:r>
+              <a:rPr sz="2600" b="1">
+                <a:solidFill>
+                  <a:srgbClr val="0E0F11"/>
+                </a:solidFill>
+                <a:latin typeface="Inter Tight"/>
+              </a:rPr>
+              <a:t>Subscription per connected institution + a fee per shipment.</a:t>
+            </a:r>
+          </a:p>
+        </p:txBody>
+      </p:sp>
+      <p:sp>
+        <p:nvSpPr>
+          <p:cNvPr id="135" name="TextBox 134"/>
+          <p:cNvSpPr txBox="1"/>
+          <p:nvPr/>
+        </p:nvSpPr>
+        <p:spPr>
+          <a:xfrm>
+            <a:off x="11338560" y="4800600"/>
+            <a:ext cx="6035040" cy="1280160"/>
           </a:xfrm>
           <a:prstGeom prst="rect">
             <a:avLst/>
@@ -16049,27 +16343,27 @@
               </a:spcAft>
             </a:pPr>
             <a:r>
-              <a:rPr sz="2000" b="1">
-                <a:solidFill>
-                  <a:srgbClr val="556F00"/>
-                </a:solidFill>
-                <a:latin typeface="JetBrains Mono"/>
+              <a:rPr sz="2000" b="0">
+                <a:solidFill>
+                  <a:srgbClr val="4D5560"/>
+                </a:solidFill>
+                <a:latin typeface="Instrument Sans"/>
               </a:rPr>
-              <a:t>NOW</a:t>
-            </a:r>
-          </a:p>
-        </p:txBody>
-      </p:sp>
-      <p:sp>
-        <p:nvSpPr>
-          <p:cNvPr id="129" name="TextBox 128"/>
+              <a:t>Borrows the shape of Swift's billing: annual charges, plus traffic fees for messages sent⁶. Not affiliated with Swift.</a:t>
+            </a:r>
+          </a:p>
+        </p:txBody>
+      </p:sp>
+      <p:sp>
+        <p:nvSpPr>
+          <p:cNvPr id="136" name="TextBox 135"/>
           <p:cNvSpPr txBox="1"/>
           <p:nvPr/>
         </p:nvSpPr>
         <p:spPr>
           <a:xfrm>
-            <a:off x="914400" y="5486400"/>
-            <a:ext cx="3931920" cy="1371600"/>
+            <a:off x="914400" y="6035040"/>
+            <a:ext cx="16459200" cy="502920"/>
           </a:xfrm>
           <a:prstGeom prst="rect">
             <a:avLst/>
@@ -16091,33 +16385,104 @@
               </a:spcAft>
             </a:pPr>
             <a:r>
-              <a:rPr sz="2200" b="0">
+              <a:rPr sz="2000" b="1">
+                <a:solidFill>
+                  <a:srgbClr val="556F00"/>
+                </a:solidFill>
+                <a:latin typeface="JetBrains Mono"/>
+              </a:rPr>
+              <a:t>Now </a:t>
+            </a:r>
+            <a:r>
+              <a:rPr sz="2000" b="0">
                 <a:solidFill>
                   <a:srgbClr val="0E0F11"/>
                 </a:solidFill>
                 <a:latin typeface="Instrument Sans"/>
               </a:rPr>
-              <a:t>Mechanism proven on testnet. No standard, users or revenue yet.</a:t>
-            </a:r>
-          </a:p>
-        </p:txBody>
-      </p:sp>
-      <p:sp>
-        <p:nvSpPr>
-          <p:cNvPr id="130" name="Oval 129"/>
+              <a:t>testnet mechanism; no standard, users or revenue.  </a:t>
+            </a:r>
+            <a:r>
+              <a:rPr sz="2000" b="1">
+                <a:solidFill>
+                  <a:srgbClr val="556F00"/>
+                </a:solidFill>
+                <a:latin typeface="JetBrains Mono"/>
+              </a:rPr>
+              <a:t>Next </a:t>
+            </a:r>
+            <a:r>
+              <a:rPr sz="2000" b="0">
+                <a:solidFill>
+                  <a:srgbClr val="0E0F11"/>
+                </a:solidFill>
+                <a:latin typeface="Instrument Sans"/>
+              </a:rPr>
+              <a:t>one Rio–Miami pilot shipment (none agreed); SCF Build, audit, mainnet; more corridors.</a:t>
+            </a:r>
+          </a:p>
+        </p:txBody>
+      </p:sp>
+      <p:sp>
+        <p:nvSpPr>
+          <p:cNvPr id="137" name="TextBox 136"/>
+          <p:cNvSpPr txBox="1"/>
+          <p:nvPr/>
+        </p:nvSpPr>
+        <p:spPr>
+          <a:xfrm>
+            <a:off x="914400" y="6537960"/>
+            <a:ext cx="16459200" cy="640080"/>
+          </a:xfrm>
+          <a:prstGeom prst="rect">
+            <a:avLst/>
+          </a:prstGeom>
+          <a:noFill/>
+        </p:spPr>
+        <p:txBody>
+          <a:bodyPr wrap="square" lIns="0" rIns="0" tIns="0" bIns="0" anchor="t">
+            <a:spAutoFit/>
+          </a:bodyPr>
+          <a:lstStyle/>
+          <a:p>
+            <a:pPr algn="l">
+              <a:lnSpc>
+                <a:spcPct val="100000"/>
+              </a:lnSpc>
+              <a:spcAft>
+                <a:spcPts val="0"/>
+              </a:spcAft>
+            </a:pPr>
+            <a:r>
+              <a:rPr sz="1800" b="0">
+                <a:solidFill>
+                  <a:srgbClr val="4D5560"/>
+                </a:solidFill>
+                <a:latin typeface="Instrument Sans"/>
+              </a:rPr>
+              <a:t>¹ US Census Bureau, Trade in Goods with Brazil, 2025 (exports + imports, sum ours) ² USTR, Florida trade data ³ WTO, Mar 2026 ⁴ UNCTAD, Review of Maritime Transport ⁵ DCSA, Feb 2023 ⁶ swift.com billing rules. Market figures, not Radox volumes; no traction implied.</a:t>
+            </a:r>
+          </a:p>
+        </p:txBody>
+      </p:sp>
+      <p:sp>
+        <p:nvSpPr>
+          <p:cNvPr id="138" name="Rounded Rectangle 137"/>
           <p:cNvSpPr/>
           <p:nvPr/>
         </p:nvSpPr>
         <p:spPr>
           <a:xfrm>
-            <a:off x="5184648" y="4727448"/>
-            <a:ext cx="237744" cy="237744"/>
-          </a:xfrm>
-          <a:prstGeom prst="ellipse">
-            <a:avLst/>
+            <a:off x="914400" y="7223760"/>
+            <a:ext cx="16459200" cy="1234440"/>
+          </a:xfrm>
+          <a:prstGeom prst="roundRect">
+            <a:avLst>
+              <a:gd name="adj" fmla="val 11851"/>
+            </a:avLst>
           </a:prstGeom>
           <a:solidFill>
-            <a:srgbClr val="556F00"/>
+            <a:srgbClr val="C6F24E"/>
           </a:solidFill>
           <a:ln>
             <a:noFill/>
@@ -16148,393 +16513,7 @@
       </p:sp>
       <p:sp>
         <p:nvSpPr>
-          <p:cNvPr id="131" name="TextBox 130"/>
-          <p:cNvSpPr txBox="1"/>
-          <p:nvPr/>
-        </p:nvSpPr>
-        <p:spPr>
-          <a:xfrm>
-            <a:off x="5120640" y="5074920"/>
-            <a:ext cx="3931920" cy="457200"/>
-          </a:xfrm>
-          <a:prstGeom prst="rect">
-            <a:avLst/>
-          </a:prstGeom>
-          <a:noFill/>
-        </p:spPr>
-        <p:txBody>
-          <a:bodyPr wrap="square" lIns="0" rIns="0" tIns="0" bIns="0" anchor="t">
-            <a:spAutoFit/>
-          </a:bodyPr>
-          <a:lstStyle/>
-          <a:p>
-            <a:pPr algn="l">
-              <a:lnSpc>
-                <a:spcPct val="112000"/>
-              </a:lnSpc>
-              <a:spcAft>
-                <a:spcPts val="600"/>
-              </a:spcAft>
-            </a:pPr>
-            <a:r>
-              <a:rPr sz="2000" b="1">
-                <a:solidFill>
-                  <a:srgbClr val="556F00"/>
-                </a:solidFill>
-                <a:latin typeface="JetBrains Mono"/>
-              </a:rPr>
-              <a:t>NEXT</a:t>
-            </a:r>
-          </a:p>
-        </p:txBody>
-      </p:sp>
-      <p:sp>
-        <p:nvSpPr>
-          <p:cNvPr id="132" name="TextBox 131"/>
-          <p:cNvSpPr txBox="1"/>
-          <p:nvPr/>
-        </p:nvSpPr>
-        <p:spPr>
-          <a:xfrm>
-            <a:off x="5120640" y="5486400"/>
-            <a:ext cx="3931920" cy="1371600"/>
-          </a:xfrm>
-          <a:prstGeom prst="rect">
-            <a:avLst/>
-          </a:prstGeom>
-          <a:noFill/>
-        </p:spPr>
-        <p:txBody>
-          <a:bodyPr wrap="square" lIns="0" rIns="0" tIns="0" bIns="0" anchor="t">
-            <a:spAutoFit/>
-          </a:bodyPr>
-          <a:lstStyle/>
-          <a:p>
-            <a:pPr algn="l">
-              <a:lnSpc>
-                <a:spcPct val="112000"/>
-              </a:lnSpc>
-              <a:spcAft>
-                <a:spcPts val="600"/>
-              </a:spcAft>
-            </a:pPr>
-            <a:r>
-              <a:rPr sz="2200" b="0">
-                <a:solidFill>
-                  <a:srgbClr val="0E0F11"/>
-                </a:solidFill>
-                <a:latin typeface="Instrument Sans"/>
-              </a:rPr>
-              <a:t>One Rio–Miami pilot shipment (none agreed yet). Full test matrix.</a:t>
-            </a:r>
-          </a:p>
-        </p:txBody>
-      </p:sp>
-      <p:sp>
-        <p:nvSpPr>
-          <p:cNvPr id="133" name="Oval 132"/>
-          <p:cNvSpPr/>
-          <p:nvPr/>
-        </p:nvSpPr>
-        <p:spPr>
-          <a:xfrm>
-            <a:off x="9390887" y="4727448"/>
-            <a:ext cx="237744" cy="237744"/>
-          </a:xfrm>
-          <a:prstGeom prst="ellipse">
-            <a:avLst/>
-          </a:prstGeom>
-          <a:solidFill>
-            <a:srgbClr val="556F00"/>
-          </a:solidFill>
-          <a:ln>
-            <a:noFill/>
-          </a:ln>
-          <a:effectLst/>
-        </p:spPr>
-        <p:style>
-          <a:lnRef idx="1">
-            <a:schemeClr val="accent1"/>
-          </a:lnRef>
-          <a:fillRef idx="3">
-            <a:schemeClr val="accent1"/>
-          </a:fillRef>
-          <a:effectRef idx="0">
-            <a:schemeClr val="accent1"/>
-          </a:effectRef>
-          <a:fontRef idx="minor">
-            <a:schemeClr val="lt1"/>
-          </a:fontRef>
-        </p:style>
-        <p:txBody>
-          <a:bodyPr rtlCol="0" anchor="ctr"/>
-          <a:lstStyle/>
-          <a:p>
-            <a:pPr algn="ctr"/>
-          </a:p>
-        </p:txBody>
-      </p:sp>
-      <p:sp>
-        <p:nvSpPr>
-          <p:cNvPr id="134" name="TextBox 133"/>
-          <p:cNvSpPr txBox="1"/>
-          <p:nvPr/>
-        </p:nvSpPr>
-        <p:spPr>
-          <a:xfrm>
-            <a:off x="9326880" y="5074920"/>
-            <a:ext cx="3931920" cy="457200"/>
-          </a:xfrm>
-          <a:prstGeom prst="rect">
-            <a:avLst/>
-          </a:prstGeom>
-          <a:noFill/>
-        </p:spPr>
-        <p:txBody>
-          <a:bodyPr wrap="square" lIns="0" rIns="0" tIns="0" bIns="0" anchor="t">
-            <a:spAutoFit/>
-          </a:bodyPr>
-          <a:lstStyle/>
-          <a:p>
-            <a:pPr algn="l">
-              <a:lnSpc>
-                <a:spcPct val="112000"/>
-              </a:lnSpc>
-              <a:spcAft>
-                <a:spcPts val="600"/>
-              </a:spcAft>
-            </a:pPr>
-            <a:r>
-              <a:rPr sz="2000" b="1">
-                <a:solidFill>
-                  <a:srgbClr val="556F00"/>
-                </a:solidFill>
-                <a:latin typeface="JetBrains Mono"/>
-              </a:rPr>
-              <a:t>PLANNED</a:t>
-            </a:r>
-          </a:p>
-        </p:txBody>
-      </p:sp>
-      <p:sp>
-        <p:nvSpPr>
-          <p:cNvPr id="135" name="TextBox 134"/>
-          <p:cNvSpPr txBox="1"/>
-          <p:nvPr/>
-        </p:nvSpPr>
-        <p:spPr>
-          <a:xfrm>
-            <a:off x="9326880" y="5486400"/>
-            <a:ext cx="3931920" cy="1371600"/>
-          </a:xfrm>
-          <a:prstGeom prst="rect">
-            <a:avLst/>
-          </a:prstGeom>
-          <a:noFill/>
-        </p:spPr>
-        <p:txBody>
-          <a:bodyPr wrap="square" lIns="0" rIns="0" tIns="0" bIns="0" anchor="t">
-            <a:spAutoFit/>
-          </a:bodyPr>
-          <a:lstStyle/>
-          <a:p>
-            <a:pPr algn="l">
-              <a:lnSpc>
-                <a:spcPct val="112000"/>
-              </a:lnSpc>
-              <a:spcAft>
-                <a:spcPts val="600"/>
-              </a:spcAft>
-            </a:pPr>
-            <a:r>
-              <a:rPr sz="2200" b="0">
-                <a:solidFill>
-                  <a:srgbClr val="0E0F11"/>
-                </a:solidFill>
-                <a:latin typeface="Instrument Sans"/>
-              </a:rPr>
-              <a:t>SCF Build, then a security audit (neither done). Mainnet.</a:t>
-            </a:r>
-          </a:p>
-        </p:txBody>
-      </p:sp>
-      <p:sp>
-        <p:nvSpPr>
-          <p:cNvPr id="136" name="Oval 135"/>
-          <p:cNvSpPr/>
-          <p:nvPr/>
-        </p:nvSpPr>
-        <p:spPr>
-          <a:xfrm>
-            <a:off x="13597127" y="4727448"/>
-            <a:ext cx="237744" cy="237744"/>
-          </a:xfrm>
-          <a:prstGeom prst="ellipse">
-            <a:avLst/>
-          </a:prstGeom>
-          <a:solidFill>
-            <a:srgbClr val="556F00"/>
-          </a:solidFill>
-          <a:ln>
-            <a:noFill/>
-          </a:ln>
-          <a:effectLst/>
-        </p:spPr>
-        <p:style>
-          <a:lnRef idx="1">
-            <a:schemeClr val="accent1"/>
-          </a:lnRef>
-          <a:fillRef idx="3">
-            <a:schemeClr val="accent1"/>
-          </a:fillRef>
-          <a:effectRef idx="0">
-            <a:schemeClr val="accent1"/>
-          </a:effectRef>
-          <a:fontRef idx="minor">
-            <a:schemeClr val="lt1"/>
-          </a:fontRef>
-        </p:style>
-        <p:txBody>
-          <a:bodyPr rtlCol="0" anchor="ctr"/>
-          <a:lstStyle/>
-          <a:p>
-            <a:pPr algn="ctr"/>
-          </a:p>
-        </p:txBody>
-      </p:sp>
-      <p:sp>
-        <p:nvSpPr>
-          <p:cNvPr id="137" name="TextBox 136"/>
-          <p:cNvSpPr txBox="1"/>
-          <p:nvPr/>
-        </p:nvSpPr>
-        <p:spPr>
-          <a:xfrm>
-            <a:off x="13533119" y="5074920"/>
-            <a:ext cx="3931920" cy="457200"/>
-          </a:xfrm>
-          <a:prstGeom prst="rect">
-            <a:avLst/>
-          </a:prstGeom>
-          <a:noFill/>
-        </p:spPr>
-        <p:txBody>
-          <a:bodyPr wrap="square" lIns="0" rIns="0" tIns="0" bIns="0" anchor="t">
-            <a:spAutoFit/>
-          </a:bodyPr>
-          <a:lstStyle/>
-          <a:p>
-            <a:pPr algn="l">
-              <a:lnSpc>
-                <a:spcPct val="112000"/>
-              </a:lnSpc>
-              <a:spcAft>
-                <a:spcPts val="600"/>
-              </a:spcAft>
-            </a:pPr>
-            <a:r>
-              <a:rPr sz="2000" b="1">
-                <a:solidFill>
-                  <a:srgbClr val="556F00"/>
-                </a:solidFill>
-                <a:latin typeface="JetBrains Mono"/>
-              </a:rPr>
-              <a:t>FUTURE</a:t>
-            </a:r>
-          </a:p>
-        </p:txBody>
-      </p:sp>
-      <p:sp>
-        <p:nvSpPr>
-          <p:cNvPr id="138" name="TextBox 137"/>
-          <p:cNvSpPr txBox="1"/>
-          <p:nvPr/>
-        </p:nvSpPr>
-        <p:spPr>
-          <a:xfrm>
-            <a:off x="13533119" y="5486400"/>
-            <a:ext cx="3931920" cy="1371600"/>
-          </a:xfrm>
-          <a:prstGeom prst="rect">
-            <a:avLst/>
-          </a:prstGeom>
-          <a:noFill/>
-        </p:spPr>
-        <p:txBody>
-          <a:bodyPr wrap="square" lIns="0" rIns="0" tIns="0" bIns="0" anchor="t">
-            <a:spAutoFit/>
-          </a:bodyPr>
-          <a:lstStyle/>
-          <a:p>
-            <a:pPr algn="l">
-              <a:lnSpc>
-                <a:spcPct val="112000"/>
-              </a:lnSpc>
-              <a:spcAft>
-                <a:spcPts val="600"/>
-              </a:spcAft>
-            </a:pPr>
-            <a:r>
-              <a:rPr sz="2200" b="0">
-                <a:solidFill>
-                  <a:srgbClr val="0E0F11"/>
-                </a:solidFill>
-                <a:latin typeface="Instrument Sans"/>
-              </a:rPr>
-              <a:t>More corridors; port, airport, chamber links (none confirmed); USD leg (not built).</a:t>
-            </a:r>
-          </a:p>
-        </p:txBody>
-      </p:sp>
-      <p:sp>
-        <p:nvSpPr>
-          <p:cNvPr id="139" name="Rounded Rectangle 138"/>
-          <p:cNvSpPr/>
-          <p:nvPr/>
-        </p:nvSpPr>
-        <p:spPr>
-          <a:xfrm>
-            <a:off x="914400" y="7223760"/>
-            <a:ext cx="16459200" cy="1234440"/>
-          </a:xfrm>
-          <a:prstGeom prst="roundRect">
-            <a:avLst>
-              <a:gd name="adj" fmla="val 11851"/>
-            </a:avLst>
-          </a:prstGeom>
-          <a:solidFill>
-            <a:srgbClr val="C6F24E"/>
-          </a:solidFill>
-          <a:ln>
-            <a:noFill/>
-          </a:ln>
-          <a:effectLst/>
-        </p:spPr>
-        <p:style>
-          <a:lnRef idx="1">
-            <a:schemeClr val="accent1"/>
-          </a:lnRef>
-          <a:fillRef idx="3">
-            <a:schemeClr val="accent1"/>
-          </a:fillRef>
-          <a:effectRef idx="0">
-            <a:schemeClr val="accent1"/>
-          </a:effectRef>
-          <a:fontRef idx="minor">
-            <a:schemeClr val="lt1"/>
-          </a:fontRef>
-        </p:style>
-        <p:txBody>
-          <a:bodyPr rtlCol="0" anchor="ctr"/>
-          <a:lstStyle/>
-          <a:p>
-            <a:pPr algn="ctr"/>
-          </a:p>
-        </p:txBody>
-      </p:sp>
-      <p:sp>
-        <p:nvSpPr>
-          <p:cNvPr id="140" name="TextBox 139"/>
+          <p:cNvPr id="139" name="TextBox 138"/>
           <p:cNvSpPr txBox="1"/>
           <p:nvPr/>
         </p:nvSpPr>
@@ -23501,7 +23480,7 @@
                 </a:solidFill>
                 <a:latin typeface="Instrument Sans"/>
               </a:rPr>
-              <a:t>Paid by the financial institution; not priced</a:t>
+              <a:t>Subscription per connected institution + fee per shipment; no prices yet (slide 9)</a:t>
             </a:r>
           </a:p>
         </p:txBody>

--- a/projects/hackmeridian-rail/deck/radox-custody-rail.pptx
+++ b/projects/hackmeridian-rail/deck/radox-custody-rail.pptx
@@ -16141,8 +16141,8 @@
         </p:nvSpPr>
         <p:spPr>
           <a:xfrm>
-            <a:off x="914400" y="5166360"/>
-            <a:ext cx="9692640" cy="822960"/>
+            <a:off x="914400" y="5230368"/>
+            <a:ext cx="9692640" cy="731520"/>
           </a:xfrm>
           <a:prstGeom prst="rect">
             <a:avLst/>
@@ -16363,7 +16363,7 @@
         <p:spPr>
           <a:xfrm>
             <a:off x="914400" y="6035040"/>
-            <a:ext cx="16459200" cy="502920"/>
+            <a:ext cx="16459200" cy="411480"/>
           </a:xfrm>
           <a:prstGeom prst="rect">
             <a:avLst/>
@@ -16400,7 +16400,7 @@
                 </a:solidFill>
                 <a:latin typeface="Instrument Sans"/>
               </a:rPr>
-              <a:t>testnet mechanism; no standard, users or revenue.  </a:t>
+              <a:t>testnet only; no users or revenue yet.  </a:t>
             </a:r>
             <a:r>
               <a:rPr sz="2000" b="1">
@@ -16418,7 +16418,7 @@
                 </a:solidFill>
                 <a:latin typeface="Instrument Sans"/>
               </a:rPr>
-              <a:t>one Rio–Miami pilot shipment (none agreed); SCF Build, audit, mainnet; more corridors.</a:t>
+              <a:t>one Rio–Miami pilot (none agreed yet), SCF Build, audit, mainnet.</a:t>
             </a:r>
           </a:p>
         </p:txBody>
@@ -16431,7 +16431,7 @@
         </p:nvSpPr>
         <p:spPr>
           <a:xfrm>
-            <a:off x="914400" y="6537960"/>
+            <a:off x="914400" y="6510528"/>
             <a:ext cx="16459200" cy="640080"/>
           </a:xfrm>
           <a:prstGeom prst="rect">
@@ -16460,7 +16460,7 @@
                 </a:solidFill>
                 <a:latin typeface="Instrument Sans"/>
               </a:rPr>
-              <a:t>¹ US Census Bureau, Trade in Goods with Brazil, 2025 (exports + imports, sum ours) ² USTR, Florida trade data ³ WTO, Mar 2026 ⁴ UNCTAD, Review of Maritime Transport ⁵ DCSA, Feb 2023 ⁶ swift.com billing rules. Market figures, not Radox volumes; no traction implied.</a:t>
+              <a:t>¹ US Census Bureau, Trade in Goods with Brazil, 2025 (exports + imports, sum ours)  ² USTR, Florida trade data  ³ WTO, Mar 2026  ⁴ UNCTAD, Review of Maritime Transport  ⁵ DCSA, Feb 2023  ⁶ swift.com billing rules. Not Radox volumes.</a:t>
             </a:r>
           </a:p>
         </p:txBody>

--- a/projects/hackmeridian-rail/deck/radox-custody-rail.pptx
+++ b/projects/hackmeridian-rail/deck/radox-custody-rail.pptx
@@ -13274,8 +13274,8 @@
         </p:nvSpPr>
         <p:spPr>
           <a:xfrm>
-            <a:off x="8229600" y="6949440"/>
-            <a:ext cx="9144000" cy="1463040"/>
+            <a:off x="8229600" y="6812280"/>
+            <a:ext cx="9144000" cy="2011680"/>
           </a:xfrm>
           <a:prstGeom prst="rect">
             <a:avLst/>
@@ -13332,6 +13332,25 @@
                 <a:latin typeface="Instrument Sans"/>
               </a:rPr>
               <a:t>Second shipment (proofs/three-machine.json): two team members each signed their handovers from their own computers and keys; still test keys.</a:t>
+            </a:r>
+          </a:p>
+          <a:p>
+            <a:pPr algn="l">
+              <a:lnSpc>
+                <a:spcPct val="112000"/>
+              </a:lnSpc>
+              <a:spcAft>
+                <a:spcPts val="400"/>
+              </a:spcAft>
+            </a:pPr>
+            <a:r>
+              <a:rPr sz="1800" b="0">
+                <a:solidFill>
+                  <a:srgbClr val="A3A8B0"/>
+                </a:solidFill>
+                <a:latin typeface="Instrument Sans"/>
+              </a:rPr>
+              <a:t>Two test companies' chains on one registry, sharing stops, each handover dual-signed (proofs/multi-chain.json).</a:t>
             </a:r>
           </a:p>
           <a:p>
@@ -16349,7 +16368,7 @@
                 </a:solidFill>
                 <a:latin typeface="Instrument Sans"/>
               </a:rPr>
-              <a:t>Borrows the shape of Swift's billing: annual charges, plus traffic fees for messages sent⁶. Not affiliated with Swift.</a:t>
+              <a:t>Borrows the shape of Swift's published fees: entry, annual, per-message usage⁶. Prices not set. Not affiliated with Swift.</a:t>
             </a:r>
           </a:p>
         </p:txBody>
@@ -16460,7 +16479,7 @@
                 </a:solidFill>
                 <a:latin typeface="Instrument Sans"/>
               </a:rPr>
-              <a:t>¹ US Census Bureau, Trade in Goods with Brazil, 2025 (exports + imports, sum ours)  ² USTR, Florida trade data  ³ WTO, Mar 2026  ⁴ UNCTAD, Review of Maritime Transport  ⁵ DCSA, Feb 2023  ⁶ swift.com billing rules. Not Radox volumes.</a:t>
+              <a:t>¹ US Census Bureau, Trade in Goods with Brazil, 2025 (exports + imports, sum ours)  ² USTR, Florida trade data, 2025  ³ WTO, Mar 2026  ⁴ UNCTAD, Review of Maritime Transport (undated page, opened 25 Oct 2026)  ⁵ DCSA, Feb 2023  ⁶ swift.com billing rules, accessed 25 Oct 2026</a:t>
             </a:r>
           </a:p>
         </p:txBody>

--- a/projects/hackmeridian-rail/deck/radox-custody-rail.pptx
+++ b/projects/hackmeridian-rail/deck/radox-custody-rail.pptx
@@ -13274,8 +13274,8 @@
         </p:nvSpPr>
         <p:spPr>
           <a:xfrm>
-            <a:off x="8229600" y="6812280"/>
-            <a:ext cx="9144000" cy="2011680"/>
+            <a:off x="8229600" y="6858000"/>
+            <a:ext cx="9144000" cy="1828800"/>
           </a:xfrm>
           <a:prstGeom prst="rect">
             <a:avLst/>
@@ -13331,26 +13331,7 @@
                 </a:solidFill>
                 <a:latin typeface="Instrument Sans"/>
               </a:rPr>
-              <a:t>Second shipment (proofs/three-machine.json): two team members each signed their handovers from their own computers and keys; still test keys.</a:t>
-            </a:r>
-          </a:p>
-          <a:p>
-            <a:pPr algn="l">
-              <a:lnSpc>
-                <a:spcPct val="112000"/>
-              </a:lnSpc>
-              <a:spcAft>
-                <a:spcPts val="400"/>
-              </a:spcAft>
-            </a:pPr>
-            <a:r>
-              <a:rPr sz="1800" b="0">
-                <a:solidFill>
-                  <a:srgbClr val="A3A8B0"/>
-                </a:solidFill>
-                <a:latin typeface="Instrument Sans"/>
-              </a:rPr>
-              <a:t>Two test companies' chains on one registry, sharing stops, each handover dual-signed (proofs/multi-chain.json).</a:t>
+              <a:t>Also on testnet: handovers signed from separate computers (proofs/three-machine.json); two test companies' chains on one registry, sharing stops, each dual-signed (proofs/multi-chain.json).</a:t>
             </a:r>
           </a:p>
           <a:p>

--- a/projects/hackmeridian-rail/deck/radox-custody-rail.pptx
+++ b/projects/hackmeridian-rail/deck/radox-custody-rail.pptx
@@ -10541,7 +10541,7 @@
         <p:spPr>
           <a:xfrm>
             <a:off x="914400" y="1417320"/>
-            <a:ext cx="5486400" cy="475488"/>
+            <a:ext cx="4389120" cy="475488"/>
           </a:xfrm>
           <a:prstGeom prst="roundRect">
             <a:avLst>
@@ -10580,7 +10580,7 @@
                 <a:cs typeface="JetBrains Mono"/>
                 <a:sym typeface="JetBrains Mono"/>
               </a:rPr>
-              <a:t>THE RAIL · DESIGN, LIFECYCLE BUILT</a:t>
+              <a:t>THE RAIL · LIFECYCLE BUILT</a:t>
             </a:r>
             <a:endParaRPr/>
           </a:p>
@@ -10790,7 +10790,7 @@
                 </a:solidFill>
                 <a:latin typeface="Instrument Sans"/>
               </a:rPr>
-              <a:t>One record would follow the goods across company boundaries; today it runs across five test keys.</a:t>
+              <a:t>One record will follow the goods across company boundaries; port and airport systems will connect by API, not a rewrite.</a:t>
             </a:r>
           </a:p>
         </p:txBody>
@@ -12034,7 +12034,7 @@
                 </a:solidFill>
                 <a:latin typeface="Instrument Sans"/>
               </a:rPr>
-              <a:t>Built: this lifecycle on testnet, test keys. Design, not built: real companies on the rail, the standard, integrations.</a:t>
+              <a:t>Built: this lifecycle on testnet, test keys. Next: real companies on the rail, the standard, integrations.</a:t>
             </a:r>
           </a:p>
           <a:p>
@@ -12053,7 +12053,7 @@
                 </a:solidFill>
                 <a:latin typeface="Instrument Sans"/>
               </a:rPr>
-              <a:t>Keyed by sha256(container | origin); would sit beside the carrier's bill of lading, not integrated. ¹ Radox policy, not enforced on-chain; redeem needs the holder's signature.</a:t>
+              <a:t>Keyed by sha256(container | origin); sits beside the carrier's bill of lading. ¹ Radox policy, not enforced on-chain; redeem needs the holder's signature.</a:t>
             </a:r>
           </a:p>
         </p:txBody>
@@ -13350,7 +13350,7 @@
                 </a:solidFill>
                 <a:latin typeface="Instrument Sans"/>
               </a:rPr>
-              <a:t>All test keys: this proves the mechanism, not independent companies.</a:t>
+              <a:t>Testnet, test keys.</a:t>
             </a:r>
           </a:p>
         </p:txBody>
@@ -14265,7 +14265,7 @@
                 </a:solidFill>
                 <a:latin typeface="Inter Tight"/>
               </a:rPr>
-              <a:t>The token stays put, then burns</a:t>
+              <a:t>Any Stellar asset</a:t>
             </a:r>
           </a:p>
         </p:txBody>
@@ -14307,7 +14307,7 @@
                 </a:solidFill>
                 <a:latin typeface="Instrument Sans"/>
               </a:rPr>
-              <a:t>The shipment token never moves in transit; the existing Radox redeem burns it after delivery.</a:t>
+              <a:t>The record stores a token address and never calls the token, so any tokenized Stellar asset can carry a custody record.</a:t>
             </a:r>
           </a:p>
         </p:txBody>
@@ -14364,8 +14364,8 @@
         </p:nvSpPr>
         <p:spPr>
           <a:xfrm>
-            <a:off x="914400" y="7424927"/>
-            <a:ext cx="16459200" cy="1371600"/>
+            <a:off x="914400" y="7360920"/>
+            <a:ext cx="16459200" cy="1463040"/>
           </a:xfrm>
           <a:prstGeom prst="rect">
             <a:avLst/>
@@ -14380,23 +14380,41 @@
           <a:p>
             <a:pPr algn="l">
               <a:lnSpc>
-                <a:spcPct val="112000"/>
+                <a:spcPct val="105000"/>
               </a:lnSpc>
               <a:spcAft>
-                <a:spcPts val="600"/>
+                <a:spcPts val="400"/>
               </a:spcAft>
             </a:pPr>
             <a:r>
-              <a:rPr sz="2100" b="1">
+              <a:rPr sz="1900" b="1">
                 <a:solidFill>
                   <a:srgbClr val="0E0F11"/>
                 </a:solidFill>
                 <a:latin typeface="Instrument Sans"/>
               </a:rPr>
-              <a:t>Nearest neighbours we found on Stellar </a:t>
-            </a:r>
-            <a:r>
-              <a:rPr sz="2100" b="0">
+              <a:t>Stellar holds about US$4B in tokenized assets </a:t>
+            </a:r>
+            <a:r>
+              <a:rPr sz="1900" b="0">
+                <a:solidFill>
+                  <a:srgbClr val="4D5560"/>
+                </a:solidFill>
+                <a:latin typeface="Instrument Sans"/>
+              </a:rPr>
+              <a:t>(SDF, as of 1 Sep 2026). </a:t>
+            </a:r>
+            <a:r>
+              <a:rPr sz="1900" b="1">
+                <a:solidFill>
+                  <a:srgbClr val="0E0F11"/>
+                </a:solidFill>
+                <a:latin typeface="Instrument Sans"/>
+              </a:rPr>
+              <a:t>Nearest neighbours </a:t>
+            </a:r>
+            <a:r>
+              <a:rPr sz="1900" b="0">
                 <a:solidFill>
                   <a:srgbClr val="4D5560"/>
                 </a:solidFill>
@@ -14405,26 +14423,26 @@
               <a:t>(LumenLoop, SCF, Scout, 24–25 Oct): </a:t>
             </a:r>
             <a:r>
-              <a:rPr sz="2100" b="0">
+              <a:rPr sz="1900" b="0">
                 <a:solidFill>
                   <a:srgbClr val="0E0F11"/>
                 </a:solidFill>
                 <a:latin typeface="Instrument Sans"/>
               </a:rPr>
-              <a:t>Kutana and Trustless Work release escrow on trade milestones; Pipeline finances commodity trade. We found none that records a custody handover signed by two custodians, and no SEP.</a:t>
+              <a:t>Kutana and Trustless Work release escrow on trade milestones; Pipeline finances commodity trade. None records a handover signed by two custodians; no SEP.</a:t>
             </a:r>
           </a:p>
           <a:p>
             <a:pPr algn="l">
               <a:lnSpc>
-                <a:spcPct val="112000"/>
+                <a:spcPct val="105000"/>
               </a:lnSpc>
               <a:spcAft>
-                <a:spcPts val="600"/>
+                <a:spcPts val="400"/>
               </a:spcAft>
             </a:pPr>
             <a:r>
-              <a:rPr sz="2100" b="1">
+              <a:rPr sz="1900" b="1">
                 <a:solidFill>
                   <a:srgbClr val="556F00"/>
                 </a:solidFill>
@@ -14433,13 +14451,13 @@
               <a:t>Open source, Apache-2.0: </a:t>
             </a:r>
             <a:r>
-              <a:rPr sz="2100" b="0">
+              <a:rPr sz="1900" b="0">
                 <a:solidFill>
                   <a:srgbClr val="0E0F11"/>
                 </a:solidFill>
                 <a:latin typeface="Instrument Sans"/>
               </a:rPr>
-              <a:t>a custody primitive other Stellar real-world-asset issuers can reuse.</a:t>
+              <a:t>a custody primitive any Stellar tokenized-asset issuer can reuse. Radox will open API access to them, end to end.</a:t>
             </a:r>
           </a:p>
         </p:txBody>
@@ -15328,7 +15346,7 @@
                 </a:solidFill>
                 <a:latin typeface="Instrument Sans"/>
               </a:rPr>
-              <a:t>Radox API reads the registry: same head (closed backend, testnet)</a:t>
+              <a:t>Radox API reads the registry, read-only: same head (testnet)</a:t>
             </a:r>
           </a:p>
         </p:txBody>
@@ -15916,7 +15934,7 @@
                 </a:solidFill>
                 <a:latin typeface="JetBrains Mono"/>
               </a:rPr>
-              <a:t>MARKET · FIGURES, NOT OURS</a:t>
+              <a:t>MARKET · SOURCED FIGURES</a:t>
             </a:r>
           </a:p>
         </p:txBody>
@@ -16221,7 +16239,7 @@
                 </a:solidFill>
                 <a:latin typeface="JetBrains Mono"/>
               </a:rPr>
-              <a:t>MODEL · NO PRICES YET</a:t>
+              <a:t>MODEL</a:t>
             </a:r>
           </a:p>
         </p:txBody>
@@ -16349,7 +16367,7 @@
                 </a:solidFill>
                 <a:latin typeface="Instrument Sans"/>
               </a:rPr>
-              <a:t>Borrows the shape of Swift's published fees: entry, annual, per-message usage⁶. Prices not set. Not affiliated with Swift.</a:t>
+              <a:t>Borrows the shape of Swift's published fees: entry, annual, per-message usage⁶. Not affiliated with Swift.</a:t>
             </a:r>
           </a:p>
         </p:txBody>
@@ -16400,7 +16418,7 @@
                 </a:solidFill>
                 <a:latin typeface="Instrument Sans"/>
               </a:rPr>
-              <a:t>testnet only; no users or revenue yet.  </a:t>
+              <a:t>running on testnet, test keys.  </a:t>
             </a:r>
             <a:r>
               <a:rPr sz="2000" b="1">
@@ -16418,7 +16436,7 @@
                 </a:solidFill>
                 <a:latin typeface="Instrument Sans"/>
               </a:rPr>
-              <a:t>one Rio–Miami pilot (none agreed yet), SCF Build, audit, mainnet.</a:t>
+              <a:t>the Rio–Miami pilot shipment, SCF Build, audit, mainnet, API for other Stellar assets.</a:t>
             </a:r>
           </a:p>
         </p:txBody>
@@ -17640,7 +17658,7 @@
         <p:spPr>
           <a:xfrm>
             <a:off x="914400" y="1600200"/>
-            <a:ext cx="6446520" cy="475488"/>
+            <a:ext cx="3429000" cy="475488"/>
           </a:xfrm>
           <a:prstGeom prst="roundRect">
             <a:avLst>
@@ -17683,7 +17701,7 @@
                 <a:cs typeface="JetBrains Mono"/>
                 <a:sym typeface="JetBrains Mono"/>
               </a:rPr>
-              <a:t>TESTNET · TEST KEYS · NOT REAL CUSTODIANS</a:t>
+              <a:t>TESTNET · TEST KEYS</a:t>
             </a:r>
             <a:endParaRPr/>
           </a:p>
@@ -18255,7 +18273,7 @@
                 </a:solidFill>
                 <a:latin typeface="Inter Tight"/>
               </a:rPr>
-              <a:t>One record for the goods, from origin to delivery, that every company along the way could share.</a:t>
+              <a:t>One record for the goods, from origin to delivery, that every company along the way will share.</a:t>
             </a:r>
           </a:p>
         </p:txBody>
@@ -19869,7 +19887,7 @@
                 </a:solidFill>
                 <a:latin typeface="Instrument Sans"/>
               </a:rPr>
-              <a:t>Our hypothesis: </a:t>
+              <a:t>The gap: </a:t>
             </a:r>
             <a:r>
               <a:rPr sz="2200" b="0">
@@ -19878,7 +19896,7 @@
                 </a:solidFill>
                 <a:latin typeface="Instrument Sans"/>
               </a:rPr>
-              <a:t>each company records only its own leg; no shared record follows the goods. Not yet tested with a customer.</a:t>
+              <a:t>each company records only its own leg, and no shared record follows the goods.</a:t>
             </a:r>
           </a:p>
         </p:txBody>
@@ -20218,7 +20236,7 @@
                 </a:solidFill>
                 <a:latin typeface="Instrument Sans"/>
               </a:rPr>
-              <a:t>DCSA, as of 2025 (Jan 2025 guide: 5.7%)</a:t>
+              <a:t>DCSA, as of 2025</a:t>
             </a:r>
           </a:p>
         </p:txBody>
@@ -20401,8 +20419,8 @@
         </p:nvSpPr>
         <p:spPr>
           <a:xfrm>
-            <a:off x="914400" y="7909560"/>
-            <a:ext cx="16459200" cy="822960"/>
+            <a:off x="914400" y="7772400"/>
+            <a:ext cx="16459200" cy="1097280"/>
           </a:xfrm>
           <a:prstGeom prst="rect">
             <a:avLst/>
@@ -20420,17 +20438,45 @@
                 <a:spcPct val="112000"/>
               </a:lnSpc>
               <a:spcAft>
-                <a:spcPts val="600"/>
+                <a:spcPts val="400"/>
               </a:spcAft>
             </a:pPr>
             <a:r>
-              <a:rPr sz="1800" b="0">
-                <a:solidFill>
-                  <a:srgbClr val="4D5560"/>
+              <a:rPr sz="1800" b="1">
+                <a:solidFill>
+                  <a:srgbClr val="0E0F11"/>
                 </a:solidFill>
                 <a:latin typeface="Instrument Sans"/>
               </a:rPr>
-              <a:t>Context: our explainer video about a Rio–Miami trade-corridor initiative poses one possibility: a unique digital record for every shipment that both sides can check. This project is a custody layer for that record.</a:t>
+              <a:t>Ports run legacy systems: </a:t>
+            </a:r>
+            <a:r>
+              <a:rPr sz="1800" b="0">
+                <a:solidFill>
+                  <a:srgbClr val="4D5560"/>
+                </a:solidFill>
+                <a:latin typeface="Instrument Sans"/>
+              </a:rPr>
+              <a:t>over 90% of ports in low- and middle-income countries have no port community system (World Bank remark relayed by IAPH, Nov 2023); IMO guidance plans for legacy systems with proprietary formats (FAL.5/Circ.54, 2024).</a:t>
+            </a:r>
+          </a:p>
+          <a:p>
+            <a:pPr algn="l">
+              <a:lnSpc>
+                <a:spcPct val="112000"/>
+              </a:lnSpc>
+              <a:spcAft>
+                <a:spcPts val="400"/>
+              </a:spcAft>
+            </a:pPr>
+            <a:r>
+              <a:rPr sz="1800" b="0">
+                <a:solidFill>
+                  <a:srgbClr val="4D5560"/>
+                </a:solidFill>
+                <a:latin typeface="Instrument Sans"/>
+              </a:rPr>
+              <a:t>Context: our explainer video about a Rio–Miami trade-corridor initiative poses a unique digital record for every shipment that both sides can check; this project is its custody layer.</a:t>
             </a:r>
           </a:p>
         </p:txBody>
@@ -20919,7 +20965,7 @@
                 </a:solidFill>
                 <a:latin typeface="Instrument Sans"/>
               </a:rPr>
-              <a:t>Our hypothesis: </a:t>
+              <a:t>The gap: </a:t>
             </a:r>
             <a:r>
               <a:rPr sz="2400" b="0">
@@ -20928,7 +20974,7 @@
                 </a:solidFill>
                 <a:latin typeface="Instrument Sans"/>
               </a:rPr>
-              <a:t>a financier cannot see who holds the goods before paying. No customer has confirmed it yet.</a:t>
+              <a:t>a financier cannot see who holds the goods before paying.</a:t>
             </a:r>
           </a:p>
         </p:txBody>
@@ -21396,7 +21442,7 @@
                 </a:solidFill>
                 <a:latin typeface="Instrument Sans"/>
               </a:rPr>
-              <a:t>global trade finance gap (market size only)</a:t>
+              <a:t>global trade finance gap (market size)</a:t>
             </a:r>
           </a:p>
         </p:txBody>
@@ -21480,7 +21526,7 @@
                 </a:solidFill>
                 <a:latin typeface="Instrument Sans"/>
               </a:rPr>
-              <a:t>These numbers size the market problem. They are not results of ours, and we do not claim our build prevents any of it.</a:t>
+              <a:t>These figures size the market problem the rail addresses. Sources under each number.</a:t>
             </a:r>
           </a:p>
         </p:txBody>
@@ -21978,7 +22024,7 @@
                 </a:solidFill>
                 <a:latin typeface="Instrument Sans"/>
               </a:rPr>
-              <a:t>a shared, SWIFT-like custody standard that companies along a supply chain, from origin to destination, could use. </a:t>
+              <a:t>a shared, SWIFT-like custody standard that companies along a supply chain, from origin to destination, will use. </a:t>
             </a:r>
             <a:r>
               <a:rPr sz="2400" b="1">
@@ -21987,7 +22033,7 @@
                 </a:solidFill>
                 <a:latin typeface="Instrument Sans"/>
               </a:rPr>
-              <a:t>Neither the standard nor the rail exists yet.</a:t>
+              <a:t>We are building it on Stellar, starting with the custody rail.</a:t>
             </a:r>
           </a:p>
         </p:txBody>
@@ -23480,7 +23526,7 @@
                 </a:solidFill>
                 <a:latin typeface="Instrument Sans"/>
               </a:rPr>
-              <a:t>Subscription per connected institution + fee per shipment; no prices yet (slide 9)</a:t>
+              <a:t>Per-institution subscription + fee per shipment (slide 9)</a:t>
             </a:r>
           </a:p>
         </p:txBody>
@@ -23566,7 +23612,7 @@
                 </a:solidFill>
                 <a:latin typeface="Instrument Sans"/>
               </a:rPr>
-              <a:t>Each company would integrate once instead of pair by pair, but would still need a key and one connection. No port, airport or chamber link: none confirmed.</a:t>
+              <a:t>Each company integrates once instead of pair by pair. Radox is in conversations with ports, airports and chambers of commerce; their legacy systems will join through one adapter to the Radox API.</a:t>
             </a:r>
           </a:p>
           <a:p>

--- a/projects/hackmeridian-rail/deck/radox-custody-rail.pptx
+++ b/projects/hackmeridian-rail/deck/radox-custody-rail.pptx
@@ -15346,7 +15346,7 @@
                 </a:solidFill>
                 <a:latin typeface="Instrument Sans"/>
               </a:rPr>
-              <a:t>Radox API reads the registry, read-only: same head (testnet)</a:t>
+              <a:t>Radox API custody route reads the registry, read-only: same head (testnet)</a:t>
             </a:r>
           </a:p>
         </p:txBody>
@@ -16367,7 +16367,7 @@
                 </a:solidFill>
                 <a:latin typeface="Instrument Sans"/>
               </a:rPr>
-              <a:t>Borrows the shape of Swift's published fees: entry, annual, per-message usage⁶. Not affiliated with Swift.</a:t>
+              <a:t>Borrows the shape of Swift's billing rules: entry, annual, per-message usage⁶. Not affiliated with Swift.</a:t>
             </a:r>
           </a:p>
         </p:txBody>
@@ -20066,7 +20066,7 @@
                 </a:solidFill>
                 <a:latin typeface="Instrument Sans"/>
               </a:rPr>
-              <a:t>DCSA, Feb 2023 (2021 data)</a:t>
+              <a:t>DCSA, Feb 2023</a:t>
             </a:r>
           </a:p>
         </p:txBody>
@@ -20476,7 +20476,7 @@
                 </a:solidFill>
                 <a:latin typeface="Instrument Sans"/>
               </a:rPr>
-              <a:t>Context: our explainer video about a Rio–Miami trade-corridor initiative poses a unique digital record for every shipment that both sides can check; this project is its custody layer.</a:t>
+              <a:t>Context: our explainer video on a Rio–Miami trade-corridor initiative; this project is its custody layer.</a:t>
             </a:r>
           </a:p>
         </p:txBody>
@@ -23375,7 +23375,7 @@
                 </a:solidFill>
                 <a:latin typeface="JetBrains Mono"/>
               </a:rPr>
-              <a:t>RADOX OPERATES · CLIENT PAYS</a:t>
+              <a:t>RADOX WILL OPERATE · CLIENT PAYS</a:t>
             </a:r>
           </a:p>
         </p:txBody>
@@ -23612,7 +23612,7 @@
                 </a:solidFill>
                 <a:latin typeface="Instrument Sans"/>
               </a:rPr>
-              <a:t>Each company integrates once instead of pair by pair. Radox is in conversations with ports, airports and chambers of commerce; their legacy systems will join through one adapter to the Radox API.</a:t>
+              <a:t>Each company integrates once instead of pair by pair. Radox is in conversations with ports, airports and chambers of commerce; legacy systems will join through one adapter to the Radox API.</a:t>
             </a:r>
           </a:p>
           <a:p>

--- a/projects/hackmeridian-rail/deck/radox-custody-rail.pptx
+++ b/projects/hackmeridian-rail/deck/radox-custody-rail.pptx
@@ -23612,7 +23612,7 @@
                 </a:solidFill>
                 <a:latin typeface="Instrument Sans"/>
               </a:rPr>
-              <a:t>Each company integrates once instead of pair by pair. Radox is in conversations with ports, airports and chambers of commerce; legacy systems will join through one adapter to the Radox API.</a:t>
+              <a:t>Each company integrates once instead of pair by pair. Radox has openings with ports and airports, and chambers of commerce in Brazil and Miami are opening doors; legacy systems will join through one adapter to the Radox API.</a:t>
             </a:r>
           </a:p>
           <a:p>

--- a/projects/hackmeridian-rail/deck/radox-custody-rail.pptx
+++ b/projects/hackmeridian-rail/deck/radox-custody-rail.pptx
@@ -23612,7 +23612,7 @@
                 </a:solidFill>
                 <a:latin typeface="Instrument Sans"/>
               </a:rPr>
-              <a:t>Each company integrates once instead of pair by pair. Radox has openings with ports and airports, and chambers of commerce in Brazil and Miami are opening doors; legacy systems will join through one adapter to the Radox API.</a:t>
+              <a:t>Each company integrates once instead of pair by pair. Radox is the technology rail of the Rio–Miami trade-corridor initiative: every port, airport and chamber that joins it joins the rail, through one adapter to the Radox API. Radox is in conversations with chambers of commerce in Brazil and Miami.</a:t>
             </a:r>
           </a:p>
           <a:p>

--- a/projects/hackmeridian-rail/deck/radox-custody-rail.pptx
+++ b/projects/hackmeridian-rail/deck/radox-custody-rail.pptx
@@ -23612,7 +23612,7 @@
                 </a:solidFill>
                 <a:latin typeface="Instrument Sans"/>
               </a:rPr>
-              <a:t>Each company integrates once instead of pair by pair. Radox is the technology rail of the Rio–Miami trade-corridor initiative: every port, airport and chamber that joins it joins the rail, through one adapter to the Radox API. Radox is in conversations with chambers of commerce in Brazil and Miami.</a:t>
+              <a:t>Each company integrates once instead of pair by pair. Radox is part of the Rio–Miami trade-corridor initiative and its technology rail: every port, airport and chamber that joins it joins the rail, through one adapter to the Radox API. Radox is in conversations with chambers of commerce in Brazil and Miami.</a:t>
             </a:r>
           </a:p>
           <a:p>

--- a/projects/hackmeridian-rail/deck/radox-custody-rail.pptx
+++ b/projects/hackmeridian-rail/deck/radox-custody-rail.pptx
@@ -23612,7 +23612,7 @@
                 </a:solidFill>
                 <a:latin typeface="Instrument Sans"/>
               </a:rPr>
-              <a:t>Each company integrates once instead of pair by pair. Radox is part of the Rio–Miami trade-corridor initiative and its technology rail: every port, airport and chamber that joins it joins the rail, through one adapter to the Radox API. Radox is in conversations with chambers of commerce in Brazil and Miami.</a:t>
+              <a:t>Each company integrates once instead of pair by pair. Radox is part of the Rio–Miami trade-corridor initiative and its technology rail: every port, airport and chamber that joins it will join the rail, through one adapter to the Radox API. Radox is in conversations with chambers of commerce in Brazil and Miami.</a:t>
             </a:r>
           </a:p>
           <a:p>

--- a/projects/hackmeridian-rail/deck/radox-custody-rail.pptx
+++ b/projects/hackmeridian-rail/deck/radox-custody-rail.pptx
@@ -18245,7 +18245,7 @@
         <p:spPr>
           <a:xfrm>
             <a:off x="914400" y="3794760"/>
-            <a:ext cx="11247120" cy="1463040"/>
+            <a:ext cx="11247120" cy="822960"/>
           </a:xfrm>
           <a:prstGeom prst="rect">
             <a:avLst/>
@@ -18267,13 +18267,13 @@
               </a:spcAft>
             </a:pPr>
             <a:r>
-              <a:rPr sz="3600" b="1">
+              <a:rPr sz="4400" b="1">
                 <a:solidFill>
                   <a:srgbClr val="E7E8EA"/>
                 </a:solidFill>
                 <a:latin typeface="Inter Tight"/>
               </a:rPr>
-              <a:t>One record for the goods, from origin to delivery, that every company along the way will share.</a:t>
+              <a:t>SWIFT for goods in transit, on Stellar</a:t>
             </a:r>
           </a:p>
         </p:txBody>
@@ -18286,8 +18286,8 @@
         </p:nvSpPr>
         <p:spPr>
           <a:xfrm>
-            <a:off x="914400" y="5440680"/>
-            <a:ext cx="11430000" cy="457200"/>
+            <a:off x="914400" y="4800600"/>
+            <a:ext cx="11247120" cy="1097280"/>
           </a:xfrm>
           <a:prstGeom prst="rect">
             <a:avLst/>
@@ -18309,20 +18309,62 @@
               </a:spcAft>
             </a:pPr>
             <a:r>
-              <a:rPr sz="2400" b="0">
-                <a:solidFill>
-                  <a:srgbClr val="A3A8B0"/>
+              <a:rPr sz="2600" b="0">
+                <a:solidFill>
+                  <a:srgbClr val="E7E8EA"/>
                 </a:solidFill>
                 <a:latin typeface="Instrument Sans"/>
               </a:rPr>
-              <a:t>Toward a SWIFT-like standard on Stellar  ·  Pilot corridor: Rio–Miami</a:t>
+              <a:t>One shared custody record for goods in transit: every handover signed by both companies, checkable by anyone.</a:t>
+            </a:r>
+          </a:p>
+        </p:txBody>
+      </p:sp>
+      <p:sp>
+        <p:nvSpPr>
+          <p:cNvPr id="105" name="TextBox 104"/>
+          <p:cNvSpPr txBox="1"/>
+          <p:nvPr/>
+        </p:nvSpPr>
+        <p:spPr>
+          <a:xfrm>
+            <a:off x="914400" y="6080760"/>
+            <a:ext cx="11430000" cy="457200"/>
+          </a:xfrm>
+          <a:prstGeom prst="rect">
+            <a:avLst/>
+          </a:prstGeom>
+          <a:noFill/>
+        </p:spPr>
+        <p:txBody>
+          <a:bodyPr wrap="square" lIns="0" rIns="0" tIns="0" bIns="0" anchor="t">
+            <a:spAutoFit/>
+          </a:bodyPr>
+          <a:lstStyle/>
+          <a:p>
+            <a:pPr algn="l">
+              <a:lnSpc>
+                <a:spcPct val="112000"/>
+              </a:lnSpc>
+              <a:spcAft>
+                <a:spcPts val="600"/>
+              </a:spcAft>
+            </a:pPr>
+            <a:r>
+              <a:rPr sz="2400" b="0">
+                <a:solidFill>
+                  <a:srgbClr val="A3A8B0"/>
+                </a:solidFill>
+                <a:latin typeface="Instrument Sans"/>
+              </a:rPr>
+              <a:t>Pilot corridor: Rio–Miami</a:t>
             </a:r>
           </a:p>
         </p:txBody>
       </p:sp>
       <p:pic>
         <p:nvPicPr>
-          <p:cNvPr id="105" name="Picture 104" descr="qr-page-dark.png"/>
+          <p:cNvPr id="106" name="Picture 105" descr="qr-page-dark.png"/>
           <p:cNvPicPr>
             <a:picLocks noChangeAspect="1"/>
           </p:cNvPicPr>
@@ -18346,7 +18388,7 @@
       </p:pic>
       <p:sp>
         <p:nvSpPr>
-          <p:cNvPr id="106" name="TextBox 105"/>
+          <p:cNvPr id="107" name="TextBox 106"/>
           <p:cNvSpPr txBox="1"/>
           <p:nvPr/>
         </p:nvSpPr>
@@ -18407,7 +18449,7 @@
       </p:sp>
       <p:sp>
         <p:nvSpPr>
-          <p:cNvPr id="107" name="Rectangle 106"/>
+          <p:cNvPr id="108" name="Rectangle 107"/>
           <p:cNvSpPr/>
           <p:nvPr/>
         </p:nvSpPr>
@@ -18451,7 +18493,7 @@
       </p:sp>
       <p:sp>
         <p:nvSpPr>
-          <p:cNvPr id="108" name="Oval 107"/>
+          <p:cNvPr id="109" name="Oval 108"/>
           <p:cNvSpPr/>
           <p:nvPr/>
         </p:nvSpPr>
@@ -18495,7 +18537,7 @@
       </p:sp>
       <p:sp>
         <p:nvSpPr>
-          <p:cNvPr id="109" name="Oval 108"/>
+          <p:cNvPr id="110" name="Oval 109"/>
           <p:cNvSpPr/>
           <p:nvPr/>
         </p:nvSpPr>
@@ -18539,7 +18581,7 @@
       </p:sp>
       <p:sp>
         <p:nvSpPr>
-          <p:cNvPr id="110" name="Oval 109"/>
+          <p:cNvPr id="111" name="Oval 110"/>
           <p:cNvSpPr/>
           <p:nvPr/>
         </p:nvSpPr>
@@ -18583,7 +18625,7 @@
       </p:sp>
       <p:sp>
         <p:nvSpPr>
-          <p:cNvPr id="111" name="Oval 110"/>
+          <p:cNvPr id="112" name="Oval 111"/>
           <p:cNvSpPr/>
           <p:nvPr/>
         </p:nvSpPr>
@@ -18627,7 +18669,7 @@
       </p:sp>
       <p:sp>
         <p:nvSpPr>
-          <p:cNvPr id="112" name="Oval 111"/>
+          <p:cNvPr id="113" name="Oval 112"/>
           <p:cNvSpPr/>
           <p:nvPr/>
         </p:nvSpPr>
@@ -18671,7 +18713,7 @@
       </p:sp>
       <p:sp>
         <p:nvSpPr>
-          <p:cNvPr id="113" name="Oval 112"/>
+          <p:cNvPr id="114" name="Oval 113"/>
           <p:cNvSpPr/>
           <p:nvPr/>
         </p:nvSpPr>
@@ -18715,7 +18757,7 @@
       </p:sp>
       <p:sp>
         <p:nvSpPr>
-          <p:cNvPr id="114" name="TextBox 113"/>
+          <p:cNvPr id="115" name="TextBox 114"/>
           <p:cNvSpPr txBox="1"/>
           <p:nvPr/>
         </p:nvSpPr>
@@ -18757,7 +18799,7 @@
       </p:sp>
       <p:sp>
         <p:nvSpPr>
-          <p:cNvPr id="115" name="TextBox 114"/>
+          <p:cNvPr id="116" name="TextBox 115"/>
           <p:cNvSpPr txBox="1"/>
           <p:nvPr/>
         </p:nvSpPr>
@@ -20923,7 +20965,7 @@
                 </a:solidFill>
                 <a:latin typeface="Inter Tight"/>
               </a:rPr>
-              <a:t>Cargo goes missing. A bank got fooled.</a:t>
+              <a:t>Cargo goes missing. Finance runs blind.</a:t>
             </a:r>
           </a:p>
         </p:txBody>
@@ -21230,7 +21272,7 @@
                 </a:solidFill>
                 <a:latin typeface="Inter Tight"/>
               </a:rPr>
-              <a:t>US$85M</a:t>
+              <a:t>80–90%</a:t>
             </a:r>
           </a:p>
         </p:txBody>
@@ -21272,7 +21314,7 @@
                 </a:solidFill>
                 <a:latin typeface="Instrument Sans"/>
               </a:rPr>
-              <a:t>HSBC's loss on forged documents for oil trades that never happened</a:t>
+              <a:t>of world trade relies on trade finance</a:t>
             </a:r>
           </a:p>
         </p:txBody>
@@ -21314,7 +21356,7 @@
                 </a:solidFill>
                 <a:latin typeface="Instrument Sans"/>
               </a:rPr>
-              <a:t>Hin Leong case, Global Trade Review, 18 Nov 2024</a:t>
+              <a:t>WTO (undated page)</a:t>
             </a:r>
           </a:p>
         </p:txBody>
@@ -21442,7 +21484,7 @@
                 </a:solidFill>
                 <a:latin typeface="Instrument Sans"/>
               </a:rPr>
-              <a:t>global trade finance gap (market size)</a:t>
+              <a:t>global trade finance gap, unchanged from 2023</a:t>
             </a:r>
           </a:p>
         </p:txBody>
@@ -21484,7 +21526,7 @@
                 </a:solidFill>
                 <a:latin typeface="Instrument Sans"/>
               </a:rPr>
-              <a:t>ADB survey of banks, Dec 2025</a:t>
+              <a:t>ADB Global Trade Finance Gap Survey, Dec 2025</a:t>
             </a:r>
           </a:p>
         </p:txBody>

--- a/projects/hackmeridian-rail/deck/radox-custody-rail.pptx
+++ b/projects/hackmeridian-rail/deck/radox-custody-rail.pptx
@@ -18357,7 +18357,7 @@
                 </a:solidFill>
                 <a:latin typeface="Instrument Sans"/>
               </a:rPr>
-              <a:t>Pilot corridor: Rio–Miami</a:t>
+              <a:t>First corridor: Rio–Miami</a:t>
             </a:r>
           </a:p>
         </p:txBody>
@@ -20965,7 +20965,7 @@
                 </a:solidFill>
                 <a:latin typeface="Inter Tight"/>
               </a:rPr>
-              <a:t>Cargo goes missing. Finance runs blind.</a:t>
+              <a:t>Cargo goes missing. No shared record.</a:t>
             </a:r>
           </a:p>
         </p:txBody>

--- a/projects/hackmeridian-rail/deck/radox-custody-rail.pptx
+++ b/projects/hackmeridian-rail/deck/radox-custody-rail.pptx
@@ -764,7 +764,7 @@
           <a:lstStyle/>
           <a:p>
             <a:r>
-              <a:t>Platform first, feature second. Radox is the rail for a financial institution's offering, from onboarding to holding: nine asset categories, atomic USDC sale, yield and maturity payouts, physical-asset holding. Three Soroban contracts are on Stellar mainnet; every stage is built and runs on testnet. Radox existed before this weekend; only the Custody Rail is new.</a:t>
+              <a:t>Platform first, feature second. Radox is the rail for a financial institution's offering, from onboarding to holding: nine asset categories, atomic USDC sale, yield and maturity payouts, physical-asset holding. Three Soroban contracts are on Stellar mainnet; every stage is built and runs on testnet. Radox existed before this weekend; only Radox Rail is new.</a:t>
             </a:r>
           </a:p>
         </p:txBody>
@@ -20395,7 +20395,7 @@
                 </a:solidFill>
                 <a:latin typeface="Inter Tight"/>
               </a:rPr>
-              <a:t>Radox Custody Rail</a:t>
+              <a:t>Radox Rail</a:t>
             </a:r>
           </a:p>
         </p:txBody>
@@ -22969,7 +22969,7 @@
                 </a:solidFill>
                 <a:latin typeface="Inter Tight"/>
               </a:rPr>
-              <a:t>Custody Rail</a:t>
+              <a:t>Radox Rail</a:t>
             </a:r>
           </a:p>
         </p:txBody>

--- a/projects/hackmeridian-rail/deck/radox-custody-rail.pptx
+++ b/projects/hackmeridian-rail/deck/radox-custody-rail.pptx
@@ -10867,7 +10867,7 @@
                 </a:solidFill>
                 <a:latin typeface="Instrument Sans"/>
               </a:rPr>
-              <a:t>We are building it on Stellar, starting with the custody rail.</a:t>
+              <a:t>We are building it on Stellar, starting with Radox Rail.</a:t>
             </a:r>
           </a:p>
         </p:txBody>
